--- a/presentaties/export/260929_werkgroep_okx_voortgang/260929_werkgroep_okx_voortgang.pptx
+++ b/presentaties/export/260929_werkgroep_okx_voortgang/260929_werkgroep_okx_voortgang.pptx
@@ -7441,8 +7441,8 @@
         </p:nvSpPr>
         <p:spPr>
           <a:xfrm>
-            <a:off x="456840" y="1476360"/>
-            <a:ext cx="4134240" cy="1047960"/>
+            <a:off x="461880" y="842760"/>
+            <a:ext cx="4115160" cy="3686400"/>
           </a:xfrm>
           <a:custGeom>
             <a:avLst/>
@@ -7450,22 +7450,182 @@
             <a:ahLst/>
             <a:rect l="0" t="0" r="r" b="b"/>
             <a:pathLst>
-              <a:path w="11484" h="2911">
+              <a:path w="11431" h="10240">
                 <a:moveTo>
-                  <a:pt x="0" y="0"/>
+                  <a:pt x="0" y="10095"/>
                 </a:moveTo>
                 <a:lnTo>
-                  <a:pt x="11484" y="0"/>
-                </a:lnTo>
-                <a:lnTo>
-                  <a:pt x="11484" y="2911"/>
-                </a:lnTo>
-                <a:lnTo>
-                  <a:pt x="0" y="2911"/>
-                </a:lnTo>
-                <a:lnTo>
-                  <a:pt x="0" y="0"/>
-                </a:lnTo>
+                  <a:pt x="0" y="146"/>
+                </a:lnTo>
+                <a:cubicBezTo>
+                  <a:pt x="0" y="136"/>
+                  <a:pt x="1" y="127"/>
+                  <a:pt x="3" y="117"/>
+                </a:cubicBezTo>
+                <a:cubicBezTo>
+                  <a:pt x="4" y="108"/>
+                  <a:pt x="7" y="99"/>
+                  <a:pt x="11" y="90"/>
+                </a:cubicBezTo>
+                <a:cubicBezTo>
+                  <a:pt x="14" y="81"/>
+                  <a:pt x="19" y="73"/>
+                  <a:pt x="24" y="65"/>
+                </a:cubicBezTo>
+                <a:cubicBezTo>
+                  <a:pt x="30" y="57"/>
+                  <a:pt x="36" y="49"/>
+                  <a:pt x="42" y="43"/>
+                </a:cubicBezTo>
+                <a:cubicBezTo>
+                  <a:pt x="49" y="36"/>
+                  <a:pt x="56" y="30"/>
+                  <a:pt x="64" y="25"/>
+                </a:cubicBezTo>
+                <a:cubicBezTo>
+                  <a:pt x="72" y="19"/>
+                  <a:pt x="81" y="15"/>
+                  <a:pt x="90" y="11"/>
+                </a:cubicBezTo>
+                <a:cubicBezTo>
+                  <a:pt x="98" y="7"/>
+                  <a:pt x="107" y="5"/>
+                  <a:pt x="117" y="3"/>
+                </a:cubicBezTo>
+                <a:cubicBezTo>
+                  <a:pt x="126" y="1"/>
+                  <a:pt x="136" y="0"/>
+                  <a:pt x="145" y="0"/>
+                </a:cubicBezTo>
+                <a:lnTo>
+                  <a:pt x="11285" y="0"/>
+                </a:lnTo>
+                <a:cubicBezTo>
+                  <a:pt x="11295" y="0"/>
+                  <a:pt x="11304" y="1"/>
+                  <a:pt x="11314" y="3"/>
+                </a:cubicBezTo>
+                <a:cubicBezTo>
+                  <a:pt x="11323" y="5"/>
+                  <a:pt x="11332" y="7"/>
+                  <a:pt x="11341" y="11"/>
+                </a:cubicBezTo>
+                <a:cubicBezTo>
+                  <a:pt x="11350" y="15"/>
+                  <a:pt x="11358" y="19"/>
+                  <a:pt x="11366" y="25"/>
+                </a:cubicBezTo>
+                <a:cubicBezTo>
+                  <a:pt x="11374" y="30"/>
+                  <a:pt x="11381" y="36"/>
+                  <a:pt x="11388" y="43"/>
+                </a:cubicBezTo>
+                <a:cubicBezTo>
+                  <a:pt x="11395" y="49"/>
+                  <a:pt x="11401" y="57"/>
+                  <a:pt x="11406" y="65"/>
+                </a:cubicBezTo>
+                <a:cubicBezTo>
+                  <a:pt x="11412" y="73"/>
+                  <a:pt x="11416" y="81"/>
+                  <a:pt x="11420" y="90"/>
+                </a:cubicBezTo>
+                <a:cubicBezTo>
+                  <a:pt x="11423" y="99"/>
+                  <a:pt x="11426" y="108"/>
+                  <a:pt x="11428" y="117"/>
+                </a:cubicBezTo>
+                <a:cubicBezTo>
+                  <a:pt x="11430" y="127"/>
+                  <a:pt x="11431" y="136"/>
+                  <a:pt x="11431" y="146"/>
+                </a:cubicBezTo>
+                <a:lnTo>
+                  <a:pt x="11431" y="10095"/>
+                </a:lnTo>
+                <a:cubicBezTo>
+                  <a:pt x="11431" y="10104"/>
+                  <a:pt x="11430" y="10114"/>
+                  <a:pt x="11428" y="10123"/>
+                </a:cubicBezTo>
+                <a:cubicBezTo>
+                  <a:pt x="11426" y="10133"/>
+                  <a:pt x="11423" y="10142"/>
+                  <a:pt x="11420" y="10151"/>
+                </a:cubicBezTo>
+                <a:cubicBezTo>
+                  <a:pt x="11416" y="10159"/>
+                  <a:pt x="11412" y="10168"/>
+                  <a:pt x="11406" y="10176"/>
+                </a:cubicBezTo>
+                <a:cubicBezTo>
+                  <a:pt x="11401" y="10184"/>
+                  <a:pt x="11395" y="10191"/>
+                  <a:pt x="11388" y="10198"/>
+                </a:cubicBezTo>
+                <a:cubicBezTo>
+                  <a:pt x="11381" y="10205"/>
+                  <a:pt x="11374" y="10211"/>
+                  <a:pt x="11366" y="10216"/>
+                </a:cubicBezTo>
+                <a:cubicBezTo>
+                  <a:pt x="11358" y="10221"/>
+                  <a:pt x="11350" y="10226"/>
+                  <a:pt x="11341" y="10229"/>
+                </a:cubicBezTo>
+                <a:cubicBezTo>
+                  <a:pt x="11332" y="10233"/>
+                  <a:pt x="11323" y="10236"/>
+                  <a:pt x="11314" y="10238"/>
+                </a:cubicBezTo>
+                <a:cubicBezTo>
+                  <a:pt x="11304" y="10240"/>
+                  <a:pt x="11295" y="10240"/>
+                  <a:pt x="11285" y="10240"/>
+                </a:cubicBezTo>
+                <a:lnTo>
+                  <a:pt x="145" y="10240"/>
+                </a:lnTo>
+                <a:cubicBezTo>
+                  <a:pt x="136" y="10240"/>
+                  <a:pt x="126" y="10240"/>
+                  <a:pt x="117" y="10238"/>
+                </a:cubicBezTo>
+                <a:cubicBezTo>
+                  <a:pt x="107" y="10236"/>
+                  <a:pt x="98" y="10233"/>
+                  <a:pt x="90" y="10229"/>
+                </a:cubicBezTo>
+                <a:cubicBezTo>
+                  <a:pt x="81" y="10226"/>
+                  <a:pt x="72" y="10221"/>
+                  <a:pt x="64" y="10216"/>
+                </a:cubicBezTo>
+                <a:cubicBezTo>
+                  <a:pt x="56" y="10211"/>
+                  <a:pt x="49" y="10205"/>
+                  <a:pt x="42" y="10198"/>
+                </a:cubicBezTo>
+                <a:cubicBezTo>
+                  <a:pt x="36" y="10191"/>
+                  <a:pt x="30" y="10184"/>
+                  <a:pt x="24" y="10176"/>
+                </a:cubicBezTo>
+                <a:cubicBezTo>
+                  <a:pt x="19" y="10168"/>
+                  <a:pt x="14" y="10159"/>
+                  <a:pt x="11" y="10151"/>
+                </a:cubicBezTo>
+                <a:cubicBezTo>
+                  <a:pt x="7" y="10142"/>
+                  <a:pt x="4" y="10133"/>
+                  <a:pt x="3" y="10123"/>
+                </a:cubicBezTo>
+                <a:cubicBezTo>
+                  <a:pt x="1" y="10114"/>
+                  <a:pt x="0" y="10104"/>
+                  <a:pt x="0" y="10095"/>
+                </a:cubicBezTo>
                 <a:close/>
               </a:path>
             </a:pathLst>
@@ -7499,8 +7659,8 @@
         </p:nvSpPr>
         <p:spPr>
           <a:xfrm>
-            <a:off x="456840" y="1476360"/>
-            <a:ext cx="4134240" cy="38160"/>
+            <a:off x="461880" y="842760"/>
+            <a:ext cx="4115160" cy="3686400"/>
           </a:xfrm>
           <a:custGeom>
             <a:avLst/>
@@ -7508,35 +7668,196 @@
             <a:ahLst/>
             <a:rect l="0" t="0" r="r" b="b"/>
             <a:pathLst>
-              <a:path w="11484" h="106">
+              <a:path w="11431" h="10240">
                 <a:moveTo>
-                  <a:pt x="0" y="0"/>
+                  <a:pt x="0" y="10095"/>
                 </a:moveTo>
                 <a:lnTo>
-                  <a:pt x="11484" y="0"/>
-                </a:lnTo>
-                <a:lnTo>
-                  <a:pt x="11484" y="106"/>
-                </a:lnTo>
-                <a:lnTo>
-                  <a:pt x="0" y="106"/>
-                </a:lnTo>
-                <a:lnTo>
-                  <a:pt x="0" y="0"/>
-                </a:lnTo>
+                  <a:pt x="0" y="146"/>
+                </a:lnTo>
+                <a:cubicBezTo>
+                  <a:pt x="0" y="136"/>
+                  <a:pt x="1" y="127"/>
+                  <a:pt x="3" y="117"/>
+                </a:cubicBezTo>
+                <a:cubicBezTo>
+                  <a:pt x="4" y="108"/>
+                  <a:pt x="7" y="99"/>
+                  <a:pt x="11" y="90"/>
+                </a:cubicBezTo>
+                <a:cubicBezTo>
+                  <a:pt x="14" y="81"/>
+                  <a:pt x="19" y="73"/>
+                  <a:pt x="24" y="65"/>
+                </a:cubicBezTo>
+                <a:cubicBezTo>
+                  <a:pt x="30" y="57"/>
+                  <a:pt x="36" y="49"/>
+                  <a:pt x="42" y="43"/>
+                </a:cubicBezTo>
+                <a:cubicBezTo>
+                  <a:pt x="49" y="36"/>
+                  <a:pt x="56" y="30"/>
+                  <a:pt x="64" y="25"/>
+                </a:cubicBezTo>
+                <a:cubicBezTo>
+                  <a:pt x="72" y="19"/>
+                  <a:pt x="81" y="15"/>
+                  <a:pt x="90" y="11"/>
+                </a:cubicBezTo>
+                <a:cubicBezTo>
+                  <a:pt x="98" y="7"/>
+                  <a:pt x="107" y="5"/>
+                  <a:pt x="117" y="3"/>
+                </a:cubicBezTo>
+                <a:cubicBezTo>
+                  <a:pt x="126" y="1"/>
+                  <a:pt x="136" y="0"/>
+                  <a:pt x="145" y="0"/>
+                </a:cubicBezTo>
+                <a:lnTo>
+                  <a:pt x="11285" y="0"/>
+                </a:lnTo>
+                <a:cubicBezTo>
+                  <a:pt x="11295" y="0"/>
+                  <a:pt x="11304" y="1"/>
+                  <a:pt x="11314" y="3"/>
+                </a:cubicBezTo>
+                <a:cubicBezTo>
+                  <a:pt x="11323" y="5"/>
+                  <a:pt x="11332" y="7"/>
+                  <a:pt x="11341" y="11"/>
+                </a:cubicBezTo>
+                <a:cubicBezTo>
+                  <a:pt x="11350" y="15"/>
+                  <a:pt x="11358" y="19"/>
+                  <a:pt x="11366" y="25"/>
+                </a:cubicBezTo>
+                <a:cubicBezTo>
+                  <a:pt x="11374" y="30"/>
+                  <a:pt x="11381" y="36"/>
+                  <a:pt x="11388" y="43"/>
+                </a:cubicBezTo>
+                <a:cubicBezTo>
+                  <a:pt x="11395" y="49"/>
+                  <a:pt x="11401" y="57"/>
+                  <a:pt x="11406" y="65"/>
+                </a:cubicBezTo>
+                <a:cubicBezTo>
+                  <a:pt x="11412" y="73"/>
+                  <a:pt x="11416" y="81"/>
+                  <a:pt x="11420" y="90"/>
+                </a:cubicBezTo>
+                <a:cubicBezTo>
+                  <a:pt x="11423" y="99"/>
+                  <a:pt x="11426" y="108"/>
+                  <a:pt x="11428" y="117"/>
+                </a:cubicBezTo>
+                <a:cubicBezTo>
+                  <a:pt x="11430" y="127"/>
+                  <a:pt x="11431" y="136"/>
+                  <a:pt x="11431" y="146"/>
+                </a:cubicBezTo>
+                <a:lnTo>
+                  <a:pt x="11431" y="10095"/>
+                </a:lnTo>
+                <a:cubicBezTo>
+                  <a:pt x="11431" y="10104"/>
+                  <a:pt x="11430" y="10114"/>
+                  <a:pt x="11428" y="10123"/>
+                </a:cubicBezTo>
+                <a:cubicBezTo>
+                  <a:pt x="11426" y="10133"/>
+                  <a:pt x="11423" y="10142"/>
+                  <a:pt x="11420" y="10151"/>
+                </a:cubicBezTo>
+                <a:cubicBezTo>
+                  <a:pt x="11416" y="10159"/>
+                  <a:pt x="11412" y="10168"/>
+                  <a:pt x="11406" y="10176"/>
+                </a:cubicBezTo>
+                <a:cubicBezTo>
+                  <a:pt x="11401" y="10184"/>
+                  <a:pt x="11395" y="10191"/>
+                  <a:pt x="11388" y="10198"/>
+                </a:cubicBezTo>
+                <a:cubicBezTo>
+                  <a:pt x="11381" y="10205"/>
+                  <a:pt x="11374" y="10211"/>
+                  <a:pt x="11366" y="10216"/>
+                </a:cubicBezTo>
+                <a:cubicBezTo>
+                  <a:pt x="11358" y="10221"/>
+                  <a:pt x="11350" y="10226"/>
+                  <a:pt x="11341" y="10229"/>
+                </a:cubicBezTo>
+                <a:cubicBezTo>
+                  <a:pt x="11332" y="10233"/>
+                  <a:pt x="11323" y="10236"/>
+                  <a:pt x="11314" y="10238"/>
+                </a:cubicBezTo>
+                <a:cubicBezTo>
+                  <a:pt x="11304" y="10240"/>
+                  <a:pt x="11295" y="10240"/>
+                  <a:pt x="11285" y="10240"/>
+                </a:cubicBezTo>
+                <a:lnTo>
+                  <a:pt x="145" y="10240"/>
+                </a:lnTo>
+                <a:cubicBezTo>
+                  <a:pt x="136" y="10240"/>
+                  <a:pt x="126" y="10240"/>
+                  <a:pt x="117" y="10238"/>
+                </a:cubicBezTo>
+                <a:cubicBezTo>
+                  <a:pt x="107" y="10236"/>
+                  <a:pt x="98" y="10233"/>
+                  <a:pt x="90" y="10229"/>
+                </a:cubicBezTo>
+                <a:cubicBezTo>
+                  <a:pt x="81" y="10226"/>
+                  <a:pt x="72" y="10221"/>
+                  <a:pt x="64" y="10216"/>
+                </a:cubicBezTo>
+                <a:cubicBezTo>
+                  <a:pt x="56" y="10211"/>
+                  <a:pt x="49" y="10205"/>
+                  <a:pt x="42" y="10198"/>
+                </a:cubicBezTo>
+                <a:cubicBezTo>
+                  <a:pt x="36" y="10191"/>
+                  <a:pt x="30" y="10184"/>
+                  <a:pt x="24" y="10176"/>
+                </a:cubicBezTo>
+                <a:cubicBezTo>
+                  <a:pt x="19" y="10168"/>
+                  <a:pt x="14" y="10159"/>
+                  <a:pt x="11" y="10151"/>
+                </a:cubicBezTo>
+                <a:cubicBezTo>
+                  <a:pt x="7" y="10142"/>
+                  <a:pt x="4" y="10133"/>
+                  <a:pt x="3" y="10123"/>
+                </a:cubicBezTo>
+                <a:cubicBezTo>
+                  <a:pt x="1" y="10114"/>
+                  <a:pt x="0" y="10104"/>
+                  <a:pt x="0" y="10095"/>
+                </a:cubicBezTo>
                 <a:close/>
               </a:path>
             </a:pathLst>
           </a:custGeom>
-          <a:solidFill>
-            <a:srgbClr val="3d68ec"/>
-          </a:solidFill>
-          <a:ln w="0">
-            <a:noFill/>
-          </a:ln>
-        </p:spPr>
-        <p:txBody>
-          <a:bodyPr lIns="0" rIns="0" tIns="0" bIns="0" anchor="t">
+          <a:noFill/>
+          <a:ln w="9360">
+            <a:solidFill>
+              <a:srgbClr val="e5e7eb"/>
+            </a:solidFill>
+            <a:miter/>
+          </a:ln>
+        </p:spPr>
+        <p:txBody>
+          <a:bodyPr lIns="4680" rIns="4680" tIns="4680" bIns="4680" anchor="t">
             <a:noAutofit/>
           </a:bodyPr>
           <a:p>
@@ -7549,503 +7870,39 @@
           </a:p>
         </p:txBody>
       </p:sp>
-      <p:sp>
-        <p:nvSpPr>
-          <p:cNvPr id="104" name=""/>
-          <p:cNvSpPr/>
-          <p:nvPr/>
-        </p:nvSpPr>
-        <p:spPr>
-          <a:xfrm>
-            <a:off x="456840" y="2514240"/>
-            <a:ext cx="4134240" cy="10080"/>
-          </a:xfrm>
-          <a:custGeom>
-            <a:avLst/>
-            <a:gdLst/>
-            <a:ahLst/>
-            <a:rect l="0" t="0" r="r" b="b"/>
-            <a:pathLst>
-              <a:path w="11484" h="28">
-                <a:moveTo>
-                  <a:pt x="0" y="0"/>
-                </a:moveTo>
-                <a:lnTo>
-                  <a:pt x="11484" y="0"/>
-                </a:lnTo>
-                <a:lnTo>
-                  <a:pt x="11484" y="28"/>
-                </a:lnTo>
-                <a:lnTo>
-                  <a:pt x="0" y="28"/>
-                </a:lnTo>
-                <a:lnTo>
-                  <a:pt x="0" y="0"/>
-                </a:lnTo>
-                <a:close/>
-              </a:path>
-            </a:pathLst>
-          </a:custGeom>
-          <a:solidFill>
-            <a:srgbClr val="e5e7eb"/>
-          </a:solidFill>
-          <a:ln w="0">
-            <a:noFill/>
-          </a:ln>
-        </p:spPr>
-        <p:txBody>
-          <a:bodyPr lIns="0" rIns="0" tIns="0" bIns="0" anchor="t">
-            <a:noAutofit/>
-          </a:bodyPr>
-          <a:p>
-            <a:endParaRPr b="0" lang="en-US" sz="2400" spc="-1" strike="noStrike">
-              <a:solidFill>
-                <a:srgbClr val="000000"/>
-              </a:solidFill>
-              <a:latin typeface="DejaVu Serif"/>
-            </a:endParaRPr>
-          </a:p>
-        </p:txBody>
-      </p:sp>
+      <p:pic>
+        <p:nvPicPr>
+          <p:cNvPr id="104" name="" descr=""/>
+          <p:cNvPicPr/>
+          <p:nvPr/>
+        </p:nvPicPr>
+        <p:blipFill>
+          <a:blip r:embed="rId2"/>
+          <a:stretch/>
+        </p:blipFill>
+        <p:spPr>
+          <a:xfrm>
+            <a:off x="466560" y="847800"/>
+            <a:ext cx="4105080" cy="3676320"/>
+          </a:xfrm>
+          <a:prstGeom prst="rect">
+            <a:avLst/>
+          </a:prstGeom>
+          <a:ln w="0">
+            <a:noFill/>
+          </a:ln>
+        </p:spPr>
+      </p:pic>
       <p:sp>
         <p:nvSpPr>
           <p:cNvPr id="105" name=""/>
-          <p:cNvSpPr/>
-          <p:nvPr/>
-        </p:nvSpPr>
-        <p:spPr>
-          <a:xfrm>
-            <a:off x="4581360" y="1476360"/>
-            <a:ext cx="9720" cy="1047960"/>
-          </a:xfrm>
-          <a:custGeom>
-            <a:avLst/>
-            <a:gdLst/>
-            <a:ahLst/>
-            <a:rect l="0" t="0" r="r" b="b"/>
-            <a:pathLst>
-              <a:path w="27" h="2911">
-                <a:moveTo>
-                  <a:pt x="0" y="105"/>
-                </a:moveTo>
-                <a:lnTo>
-                  <a:pt x="0" y="2911"/>
-                </a:lnTo>
-                <a:lnTo>
-                  <a:pt x="27" y="2911"/>
-                </a:lnTo>
-                <a:lnTo>
-                  <a:pt x="27" y="0"/>
-                </a:lnTo>
-                <a:lnTo>
-                  <a:pt x="0" y="105"/>
-                </a:lnTo>
-                <a:close/>
-              </a:path>
-            </a:pathLst>
-          </a:custGeom>
-          <a:solidFill>
-            <a:srgbClr val="e5e7eb"/>
-          </a:solidFill>
-          <a:ln w="0">
-            <a:noFill/>
-          </a:ln>
-        </p:spPr>
-        <p:txBody>
-          <a:bodyPr lIns="0" rIns="0" tIns="0" bIns="0" anchor="t">
-            <a:noAutofit/>
-          </a:bodyPr>
-          <a:p>
-            <a:endParaRPr b="0" lang="en-US" sz="2400" spc="-1" strike="noStrike">
-              <a:solidFill>
-                <a:srgbClr val="000000"/>
-              </a:solidFill>
-              <a:latin typeface="DejaVu Serif"/>
-            </a:endParaRPr>
-          </a:p>
-        </p:txBody>
-      </p:sp>
-      <p:sp>
-        <p:nvSpPr>
-          <p:cNvPr id="106" name=""/>
-          <p:cNvSpPr/>
-          <p:nvPr/>
-        </p:nvSpPr>
-        <p:spPr>
-          <a:xfrm>
-            <a:off x="456840" y="1476360"/>
-            <a:ext cx="10080" cy="1047960"/>
-          </a:xfrm>
-          <a:custGeom>
-            <a:avLst/>
-            <a:gdLst/>
-            <a:ahLst/>
-            <a:rect l="0" t="0" r="r" b="b"/>
-            <a:pathLst>
-              <a:path w="28" h="2911">
-                <a:moveTo>
-                  <a:pt x="0" y="0"/>
-                </a:moveTo>
-                <a:lnTo>
-                  <a:pt x="0" y="2911"/>
-                </a:lnTo>
-                <a:lnTo>
-                  <a:pt x="28" y="2911"/>
-                </a:lnTo>
-                <a:lnTo>
-                  <a:pt x="28" y="105"/>
-                </a:lnTo>
-                <a:lnTo>
-                  <a:pt x="0" y="0"/>
-                </a:lnTo>
-                <a:close/>
-              </a:path>
-            </a:pathLst>
-          </a:custGeom>
-          <a:solidFill>
-            <a:srgbClr val="e5e7eb"/>
-          </a:solidFill>
-          <a:ln w="0">
-            <a:noFill/>
-          </a:ln>
-        </p:spPr>
-        <p:txBody>
-          <a:bodyPr lIns="0" rIns="0" tIns="0" bIns="0" anchor="t">
-            <a:noAutofit/>
-          </a:bodyPr>
-          <a:p>
-            <a:endParaRPr b="0" lang="en-US" sz="2400" spc="-1" strike="noStrike">
-              <a:solidFill>
-                <a:srgbClr val="000000"/>
-              </a:solidFill>
-              <a:latin typeface="DejaVu Serif"/>
-            </a:endParaRPr>
-          </a:p>
-        </p:txBody>
-      </p:sp>
-      <p:sp>
-        <p:nvSpPr>
-          <p:cNvPr id="107" name=""/>
-          <p:cNvSpPr/>
-          <p:nvPr/>
-        </p:nvSpPr>
-        <p:spPr>
-          <a:xfrm>
-            <a:off x="671040" y="1683360"/>
-            <a:ext cx="199080" cy="232200"/>
-          </a:xfrm>
-          <a:custGeom>
-            <a:avLst/>
-            <a:gdLst/>
-            <a:ahLst/>
-            <a:rect l="0" t="0" r="r" b="b"/>
-            <a:pathLst>
-              <a:path w="553" h="645">
-                <a:moveTo>
-                  <a:pt x="507" y="0"/>
-                </a:moveTo>
-                <a:lnTo>
-                  <a:pt x="93" y="0"/>
-                </a:lnTo>
-                <a:cubicBezTo>
-                  <a:pt x="87" y="0"/>
-                  <a:pt x="81" y="1"/>
-                  <a:pt x="76" y="3"/>
-                </a:cubicBezTo>
-                <a:cubicBezTo>
-                  <a:pt x="70" y="6"/>
-                  <a:pt x="64" y="9"/>
-                  <a:pt x="60" y="13"/>
-                </a:cubicBezTo>
-                <a:cubicBezTo>
-                  <a:pt x="55" y="18"/>
-                  <a:pt x="52" y="22"/>
-                  <a:pt x="50" y="28"/>
-                </a:cubicBezTo>
-                <a:cubicBezTo>
-                  <a:pt x="47" y="34"/>
-                  <a:pt x="46" y="40"/>
-                  <a:pt x="46" y="46"/>
-                </a:cubicBezTo>
-                <a:lnTo>
-                  <a:pt x="46" y="138"/>
-                </a:lnTo>
-                <a:lnTo>
-                  <a:pt x="0" y="138"/>
-                </a:lnTo>
-                <a:lnTo>
-                  <a:pt x="0" y="185"/>
-                </a:lnTo>
-                <a:lnTo>
-                  <a:pt x="46" y="185"/>
-                </a:lnTo>
-                <a:lnTo>
-                  <a:pt x="46" y="300"/>
-                </a:lnTo>
-                <a:lnTo>
-                  <a:pt x="0" y="300"/>
-                </a:lnTo>
-                <a:lnTo>
-                  <a:pt x="0" y="346"/>
-                </a:lnTo>
-                <a:lnTo>
-                  <a:pt x="46" y="346"/>
-                </a:lnTo>
-                <a:lnTo>
-                  <a:pt x="46" y="461"/>
-                </a:lnTo>
-                <a:lnTo>
-                  <a:pt x="0" y="461"/>
-                </a:lnTo>
-                <a:lnTo>
-                  <a:pt x="0" y="507"/>
-                </a:lnTo>
-                <a:lnTo>
-                  <a:pt x="46" y="507"/>
-                </a:lnTo>
-                <a:lnTo>
-                  <a:pt x="46" y="599"/>
-                </a:lnTo>
-                <a:cubicBezTo>
-                  <a:pt x="46" y="605"/>
-                  <a:pt x="47" y="611"/>
-                  <a:pt x="50" y="617"/>
-                </a:cubicBezTo>
-                <a:cubicBezTo>
-                  <a:pt x="52" y="622"/>
-                  <a:pt x="55" y="627"/>
-                  <a:pt x="60" y="631"/>
-                </a:cubicBezTo>
-                <a:cubicBezTo>
-                  <a:pt x="64" y="636"/>
-                  <a:pt x="70" y="639"/>
-                  <a:pt x="76" y="641"/>
-                </a:cubicBezTo>
-                <a:cubicBezTo>
-                  <a:pt x="81" y="644"/>
-                  <a:pt x="87" y="645"/>
-                  <a:pt x="93" y="645"/>
-                </a:cubicBezTo>
-                <a:lnTo>
-                  <a:pt x="507" y="645"/>
-                </a:lnTo>
-                <a:cubicBezTo>
-                  <a:pt x="514" y="645"/>
-                  <a:pt x="519" y="644"/>
-                  <a:pt x="525" y="641"/>
-                </a:cubicBezTo>
-                <a:cubicBezTo>
-                  <a:pt x="531" y="639"/>
-                  <a:pt x="536" y="636"/>
-                  <a:pt x="540" y="631"/>
-                </a:cubicBezTo>
-                <a:cubicBezTo>
-                  <a:pt x="544" y="627"/>
-                  <a:pt x="548" y="622"/>
-                  <a:pt x="550" y="617"/>
-                </a:cubicBezTo>
-                <a:cubicBezTo>
-                  <a:pt x="552" y="611"/>
-                  <a:pt x="553" y="605"/>
-                  <a:pt x="553" y="599"/>
-                </a:cubicBezTo>
-                <a:lnTo>
-                  <a:pt x="553" y="46"/>
-                </a:lnTo>
-                <a:cubicBezTo>
-                  <a:pt x="553" y="40"/>
-                  <a:pt x="552" y="34"/>
-                  <a:pt x="550" y="28"/>
-                </a:cubicBezTo>
-                <a:cubicBezTo>
-                  <a:pt x="548" y="22"/>
-                  <a:pt x="544" y="18"/>
-                  <a:pt x="540" y="13"/>
-                </a:cubicBezTo>
-                <a:cubicBezTo>
-                  <a:pt x="536" y="9"/>
-                  <a:pt x="531" y="6"/>
-                  <a:pt x="525" y="3"/>
-                </a:cubicBezTo>
-                <a:cubicBezTo>
-                  <a:pt x="519" y="1"/>
-                  <a:pt x="514" y="0"/>
-                  <a:pt x="507" y="0"/>
-                </a:cubicBezTo>
-                <a:moveTo>
-                  <a:pt x="507" y="599"/>
-                </a:moveTo>
-                <a:lnTo>
-                  <a:pt x="93" y="599"/>
-                </a:lnTo>
-                <a:lnTo>
-                  <a:pt x="93" y="507"/>
-                </a:lnTo>
-                <a:lnTo>
-                  <a:pt x="139" y="507"/>
-                </a:lnTo>
-                <a:lnTo>
-                  <a:pt x="139" y="461"/>
-                </a:lnTo>
-                <a:lnTo>
-                  <a:pt x="93" y="461"/>
-                </a:lnTo>
-                <a:lnTo>
-                  <a:pt x="93" y="346"/>
-                </a:lnTo>
-                <a:lnTo>
-                  <a:pt x="139" y="346"/>
-                </a:lnTo>
-                <a:lnTo>
-                  <a:pt x="139" y="300"/>
-                </a:lnTo>
-                <a:lnTo>
-                  <a:pt x="93" y="300"/>
-                </a:lnTo>
-                <a:lnTo>
-                  <a:pt x="93" y="185"/>
-                </a:lnTo>
-                <a:lnTo>
-                  <a:pt x="139" y="185"/>
-                </a:lnTo>
-                <a:lnTo>
-                  <a:pt x="139" y="138"/>
-                </a:lnTo>
-                <a:lnTo>
-                  <a:pt x="93" y="138"/>
-                </a:lnTo>
-                <a:lnTo>
-                  <a:pt x="93" y="46"/>
-                </a:lnTo>
-                <a:lnTo>
-                  <a:pt x="507" y="46"/>
-                </a:lnTo>
-                <a:lnTo>
-                  <a:pt x="507" y="599"/>
-                </a:lnTo>
-                <a:close/>
-              </a:path>
-            </a:pathLst>
-          </a:custGeom>
-          <a:solidFill>
-            <a:srgbClr val="3d68ec"/>
-          </a:solidFill>
-          <a:ln w="0">
-            <a:noFill/>
-          </a:ln>
-        </p:spPr>
-        <p:txBody>
-          <a:bodyPr lIns="0" rIns="0" tIns="0" bIns="0" anchor="t">
-            <a:noAutofit/>
-          </a:bodyPr>
-          <a:p>
-            <a:endParaRPr b="0" lang="en-US" sz="2400" spc="-1" strike="noStrike">
-              <a:solidFill>
-                <a:srgbClr val="000000"/>
-              </a:solidFill>
-              <a:latin typeface="DejaVu Serif"/>
-            </a:endParaRPr>
-          </a:p>
-        </p:txBody>
-      </p:sp>
-      <p:sp>
-        <p:nvSpPr>
-          <p:cNvPr id="108" name=""/>
-          <p:cNvSpPr/>
-          <p:nvPr/>
-        </p:nvSpPr>
-        <p:spPr>
-          <a:xfrm>
-            <a:off x="753840" y="1733040"/>
-            <a:ext cx="66600" cy="132840"/>
-          </a:xfrm>
-          <a:custGeom>
-            <a:avLst/>
-            <a:gdLst/>
-            <a:ahLst/>
-            <a:rect l="0" t="0" r="r" b="b"/>
-            <a:pathLst>
-              <a:path w="185" h="369">
-                <a:moveTo>
-                  <a:pt x="0" y="0"/>
-                </a:moveTo>
-                <a:lnTo>
-                  <a:pt x="185" y="0"/>
-                </a:lnTo>
-                <a:lnTo>
-                  <a:pt x="185" y="46"/>
-                </a:lnTo>
-                <a:lnTo>
-                  <a:pt x="0" y="46"/>
-                </a:lnTo>
-                <a:lnTo>
-                  <a:pt x="0" y="0"/>
-                </a:lnTo>
-                <a:moveTo>
-                  <a:pt x="0" y="162"/>
-                </a:moveTo>
-                <a:lnTo>
-                  <a:pt x="185" y="162"/>
-                </a:lnTo>
-                <a:lnTo>
-                  <a:pt x="185" y="208"/>
-                </a:lnTo>
-                <a:lnTo>
-                  <a:pt x="0" y="208"/>
-                </a:lnTo>
-                <a:lnTo>
-                  <a:pt x="0" y="162"/>
-                </a:lnTo>
-                <a:moveTo>
-                  <a:pt x="0" y="323"/>
-                </a:moveTo>
-                <a:lnTo>
-                  <a:pt x="185" y="323"/>
-                </a:lnTo>
-                <a:lnTo>
-                  <a:pt x="185" y="369"/>
-                </a:lnTo>
-                <a:lnTo>
-                  <a:pt x="0" y="369"/>
-                </a:lnTo>
-                <a:lnTo>
-                  <a:pt x="0" y="323"/>
-                </a:lnTo>
-                <a:close/>
-              </a:path>
-            </a:pathLst>
-          </a:custGeom>
-          <a:solidFill>
-            <a:srgbClr val="3d68ec"/>
-          </a:solidFill>
-          <a:ln w="0">
-            <a:noFill/>
-          </a:ln>
-        </p:spPr>
-        <p:txBody>
-          <a:bodyPr lIns="0" rIns="0" tIns="0" bIns="0" anchor="t">
-            <a:noAutofit/>
-          </a:bodyPr>
-          <a:p>
-            <a:endParaRPr b="0" lang="en-US" sz="2400" spc="-1" strike="noStrike">
-              <a:solidFill>
-                <a:srgbClr val="000000"/>
-              </a:solidFill>
-              <a:latin typeface="DejaVu Serif"/>
-            </a:endParaRPr>
-          </a:p>
-        </p:txBody>
-      </p:sp>
-      <p:sp>
-        <p:nvSpPr>
-          <p:cNvPr id="109" name=""/>
           <p:cNvSpPr txBox="1"/>
           <p:nvPr/>
         </p:nvSpPr>
         <p:spPr>
           <a:xfrm>
-            <a:off x="439920" y="786600"/>
-            <a:ext cx="5106240" cy="399600"/>
+            <a:off x="439920" y="186480"/>
+            <a:ext cx="6773400" cy="399600"/>
           </a:xfrm>
           <a:prstGeom prst="rect">
             <a:avLst/>
@@ -8068,7 +7925,7 @@
                 <a:latin typeface="Arial"/>
                 <a:ea typeface="Arial"/>
               </a:rPr>
-              <a:t>Koppelingen in uitwerking</a:t>
+              <a:t>Het eindproduct, scherper in beeld</a:t>
             </a:r>
             <a:endParaRPr b="0" lang="en-US" sz="2700" spc="-1" strike="noStrike">
               <a:solidFill>
@@ -8081,100 +7938,14 @@
       </p:sp>
       <p:sp>
         <p:nvSpPr>
-          <p:cNvPr id="110" name=""/>
-          <p:cNvSpPr txBox="1"/>
-          <p:nvPr/>
-        </p:nvSpPr>
-        <p:spPr>
-          <a:xfrm>
-            <a:off x="899280" y="1767600"/>
-            <a:ext cx="2487960" cy="160560"/>
-          </a:xfrm>
-          <a:prstGeom prst="rect">
-            <a:avLst/>
-          </a:prstGeom>
-          <a:noFill/>
-          <a:ln w="0">
-            <a:noFill/>
-          </a:ln>
-        </p:spPr>
-        <p:txBody>
-          <a:bodyPr lIns="0" rIns="0" tIns="0" bIns="0" anchor="t">
-            <a:noAutofit/>
-          </a:bodyPr>
-          <a:p>
-            <a:r>
-              <a:rPr b="1" lang="en-US" sz="1080" spc="-1" strike="noStrike">
-                <a:solidFill>
-                  <a:srgbClr val="3d68ec"/>
-                </a:solidFill>
-                <a:latin typeface="Arial"/>
-                <a:ea typeface="Arial"/>
-              </a:rPr>
-              <a:t>Onderwijscatalogus en planning</a:t>
-            </a:r>
-            <a:endParaRPr b="0" lang="en-US" sz="1080" spc="-1" strike="noStrike">
-              <a:solidFill>
-                <a:srgbClr val="000000"/>
-              </a:solidFill>
-              <a:latin typeface="DejaVu Serif"/>
-            </a:endParaRPr>
-          </a:p>
-        </p:txBody>
-      </p:sp>
-      <p:sp>
-        <p:nvSpPr>
-          <p:cNvPr id="111" name=""/>
-          <p:cNvSpPr txBox="1"/>
-          <p:nvPr/>
-        </p:nvSpPr>
-        <p:spPr>
-          <a:xfrm>
-            <a:off x="634320" y="1977840"/>
-            <a:ext cx="4155120" cy="160560"/>
-          </a:xfrm>
-          <a:prstGeom prst="rect">
-            <a:avLst/>
-          </a:prstGeom>
-          <a:noFill/>
-          <a:ln w="0">
-            <a:noFill/>
-          </a:ln>
-        </p:spPr>
-        <p:txBody>
-          <a:bodyPr lIns="0" rIns="0" tIns="0" bIns="0" anchor="t">
-            <a:noAutofit/>
-          </a:bodyPr>
-          <a:p>
-            <a:r>
-              <a:rPr b="0" lang="en-US" sz="1080" spc="-1" strike="noStrike">
-                <a:solidFill>
-                  <a:srgbClr val="1a1a2e"/>
-                </a:solidFill>
-                <a:latin typeface="Arial"/>
-                <a:ea typeface="Arial"/>
-              </a:rPr>
-              <a:t>het ontworpen aanbod, nominaal en keuze, planbaar maken</a:t>
-            </a:r>
-            <a:endParaRPr b="0" lang="en-US" sz="1080" spc="-1" strike="noStrike">
-              <a:solidFill>
-                <a:srgbClr val="000000"/>
-              </a:solidFill>
-              <a:latin typeface="DejaVu Serif"/>
-            </a:endParaRPr>
-          </a:p>
-        </p:txBody>
-      </p:sp>
-      <p:sp>
-        <p:nvSpPr>
-          <p:cNvPr id="112" name=""/>
+          <p:cNvPr id="106" name=""/>
           <p:cNvSpPr/>
           <p:nvPr/>
         </p:nvSpPr>
         <p:spPr>
           <a:xfrm>
-            <a:off x="4743360" y="1476360"/>
-            <a:ext cx="4134240" cy="1047960"/>
+            <a:off x="4752720" y="1457280"/>
+            <a:ext cx="4124880" cy="828720"/>
           </a:xfrm>
           <a:custGeom>
             <a:avLst/>
@@ -8182,18 +7953,18 @@
             <a:ahLst/>
             <a:rect l="0" t="0" r="r" b="b"/>
             <a:pathLst>
-              <a:path w="11484" h="2911">
+              <a:path w="11458" h="2302">
                 <a:moveTo>
                   <a:pt x="0" y="0"/>
                 </a:moveTo>
                 <a:lnTo>
-                  <a:pt x="11484" y="0"/>
-                </a:lnTo>
-                <a:lnTo>
-                  <a:pt x="11484" y="2911"/>
-                </a:lnTo>
-                <a:lnTo>
-                  <a:pt x="0" y="2911"/>
+                  <a:pt x="11458" y="0"/>
+                </a:lnTo>
+                <a:lnTo>
+                  <a:pt x="11458" y="2302"/>
+                </a:lnTo>
+                <a:lnTo>
+                  <a:pt x="0" y="2302"/>
                 </a:lnTo>
                 <a:lnTo>
                   <a:pt x="0" y="0"/>
@@ -8225,14 +7996,14 @@
       </p:sp>
       <p:sp>
         <p:nvSpPr>
-          <p:cNvPr id="113" name=""/>
+          <p:cNvPr id="107" name=""/>
           <p:cNvSpPr/>
           <p:nvPr/>
         </p:nvSpPr>
         <p:spPr>
           <a:xfrm>
-            <a:off x="4743360" y="1476360"/>
-            <a:ext cx="4134240" cy="38160"/>
+            <a:off x="4752720" y="1457280"/>
+            <a:ext cx="4124880" cy="38160"/>
           </a:xfrm>
           <a:custGeom>
             <a:avLst/>
@@ -8240,18 +8011,308 @@
             <a:ahLst/>
             <a:rect l="0" t="0" r="r" b="b"/>
             <a:pathLst>
-              <a:path w="11484" h="106">
+              <a:path w="11458" h="106">
                 <a:moveTo>
                   <a:pt x="0" y="0"/>
                 </a:moveTo>
                 <a:lnTo>
-                  <a:pt x="11484" y="0"/>
-                </a:lnTo>
-                <a:lnTo>
-                  <a:pt x="11484" y="106"/>
+                  <a:pt x="11458" y="0"/>
+                </a:lnTo>
+                <a:lnTo>
+                  <a:pt x="11458" y="106"/>
                 </a:lnTo>
                 <a:lnTo>
                   <a:pt x="0" y="106"/>
+                </a:lnTo>
+                <a:lnTo>
+                  <a:pt x="0" y="0"/>
+                </a:lnTo>
+                <a:close/>
+              </a:path>
+            </a:pathLst>
+          </a:custGeom>
+          <a:solidFill>
+            <a:srgbClr val="3d68ec"/>
+          </a:solidFill>
+          <a:ln w="0">
+            <a:noFill/>
+          </a:ln>
+        </p:spPr>
+        <p:txBody>
+          <a:bodyPr lIns="0" rIns="0" tIns="0" bIns="0" anchor="t">
+            <a:noAutofit/>
+          </a:bodyPr>
+          <a:p>
+            <a:endParaRPr b="0" lang="en-US" sz="2400" spc="-1" strike="noStrike">
+              <a:solidFill>
+                <a:srgbClr val="000000"/>
+              </a:solidFill>
+              <a:latin typeface="DejaVu Serif"/>
+            </a:endParaRPr>
+          </a:p>
+        </p:txBody>
+      </p:sp>
+      <p:sp>
+        <p:nvSpPr>
+          <p:cNvPr id="108" name=""/>
+          <p:cNvSpPr/>
+          <p:nvPr/>
+        </p:nvSpPr>
+        <p:spPr>
+          <a:xfrm>
+            <a:off x="4752720" y="2276280"/>
+            <a:ext cx="4124880" cy="9720"/>
+          </a:xfrm>
+          <a:custGeom>
+            <a:avLst/>
+            <a:gdLst/>
+            <a:ahLst/>
+            <a:rect l="0" t="0" r="r" b="b"/>
+            <a:pathLst>
+              <a:path w="11458" h="27">
+                <a:moveTo>
+                  <a:pt x="0" y="0"/>
+                </a:moveTo>
+                <a:lnTo>
+                  <a:pt x="11458" y="0"/>
+                </a:lnTo>
+                <a:lnTo>
+                  <a:pt x="11458" y="27"/>
+                </a:lnTo>
+                <a:lnTo>
+                  <a:pt x="0" y="27"/>
+                </a:lnTo>
+                <a:lnTo>
+                  <a:pt x="0" y="0"/>
+                </a:lnTo>
+                <a:close/>
+              </a:path>
+            </a:pathLst>
+          </a:custGeom>
+          <a:solidFill>
+            <a:srgbClr val="e5e7eb"/>
+          </a:solidFill>
+          <a:ln w="0">
+            <a:noFill/>
+          </a:ln>
+        </p:spPr>
+        <p:txBody>
+          <a:bodyPr lIns="0" rIns="0" tIns="0" bIns="0" anchor="t">
+            <a:noAutofit/>
+          </a:bodyPr>
+          <a:p>
+            <a:endParaRPr b="0" lang="en-US" sz="2400" spc="-1" strike="noStrike">
+              <a:solidFill>
+                <a:srgbClr val="000000"/>
+              </a:solidFill>
+              <a:latin typeface="DejaVu Serif"/>
+            </a:endParaRPr>
+          </a:p>
+        </p:txBody>
+      </p:sp>
+      <p:sp>
+        <p:nvSpPr>
+          <p:cNvPr id="109" name=""/>
+          <p:cNvSpPr/>
+          <p:nvPr/>
+        </p:nvSpPr>
+        <p:spPr>
+          <a:xfrm>
+            <a:off x="8867520" y="1457280"/>
+            <a:ext cx="10080" cy="828720"/>
+          </a:xfrm>
+          <a:custGeom>
+            <a:avLst/>
+            <a:gdLst/>
+            <a:ahLst/>
+            <a:rect l="0" t="0" r="r" b="b"/>
+            <a:pathLst>
+              <a:path w="28" h="2302">
+                <a:moveTo>
+                  <a:pt x="0" y="105"/>
+                </a:moveTo>
+                <a:lnTo>
+                  <a:pt x="0" y="2302"/>
+                </a:lnTo>
+                <a:lnTo>
+                  <a:pt x="28" y="2302"/>
+                </a:lnTo>
+                <a:lnTo>
+                  <a:pt x="28" y="0"/>
+                </a:lnTo>
+                <a:lnTo>
+                  <a:pt x="0" y="105"/>
+                </a:lnTo>
+                <a:close/>
+              </a:path>
+            </a:pathLst>
+          </a:custGeom>
+          <a:solidFill>
+            <a:srgbClr val="e5e7eb"/>
+          </a:solidFill>
+          <a:ln w="0">
+            <a:noFill/>
+          </a:ln>
+        </p:spPr>
+        <p:txBody>
+          <a:bodyPr lIns="0" rIns="0" tIns="0" bIns="0" anchor="t">
+            <a:noAutofit/>
+          </a:bodyPr>
+          <a:p>
+            <a:endParaRPr b="0" lang="en-US" sz="2400" spc="-1" strike="noStrike">
+              <a:solidFill>
+                <a:srgbClr val="000000"/>
+              </a:solidFill>
+              <a:latin typeface="DejaVu Serif"/>
+            </a:endParaRPr>
+          </a:p>
+        </p:txBody>
+      </p:sp>
+      <p:sp>
+        <p:nvSpPr>
+          <p:cNvPr id="110" name=""/>
+          <p:cNvSpPr/>
+          <p:nvPr/>
+        </p:nvSpPr>
+        <p:spPr>
+          <a:xfrm>
+            <a:off x="4752720" y="1457280"/>
+            <a:ext cx="10080" cy="828720"/>
+          </a:xfrm>
+          <a:custGeom>
+            <a:avLst/>
+            <a:gdLst/>
+            <a:ahLst/>
+            <a:rect l="0" t="0" r="r" b="b"/>
+            <a:pathLst>
+              <a:path w="28" h="2302">
+                <a:moveTo>
+                  <a:pt x="0" y="0"/>
+                </a:moveTo>
+                <a:lnTo>
+                  <a:pt x="0" y="2302"/>
+                </a:lnTo>
+                <a:lnTo>
+                  <a:pt x="28" y="2302"/>
+                </a:lnTo>
+                <a:lnTo>
+                  <a:pt x="28" y="105"/>
+                </a:lnTo>
+                <a:lnTo>
+                  <a:pt x="0" y="0"/>
+                </a:lnTo>
+                <a:close/>
+              </a:path>
+            </a:pathLst>
+          </a:custGeom>
+          <a:solidFill>
+            <a:srgbClr val="e5e7eb"/>
+          </a:solidFill>
+          <a:ln w="0">
+            <a:noFill/>
+          </a:ln>
+        </p:spPr>
+        <p:txBody>
+          <a:bodyPr lIns="0" rIns="0" tIns="0" bIns="0" anchor="t">
+            <a:noAutofit/>
+          </a:bodyPr>
+          <a:p>
+            <a:endParaRPr b="0" lang="en-US" sz="2400" spc="-1" strike="noStrike">
+              <a:solidFill>
+                <a:srgbClr val="000000"/>
+              </a:solidFill>
+              <a:latin typeface="DejaVu Serif"/>
+            </a:endParaRPr>
+          </a:p>
+        </p:txBody>
+      </p:sp>
+      <p:sp>
+        <p:nvSpPr>
+          <p:cNvPr id="111" name=""/>
+          <p:cNvSpPr/>
+          <p:nvPr/>
+        </p:nvSpPr>
+        <p:spPr>
+          <a:xfrm>
+            <a:off x="4752720" y="2381040"/>
+            <a:ext cx="4124880" cy="819360"/>
+          </a:xfrm>
+          <a:custGeom>
+            <a:avLst/>
+            <a:gdLst/>
+            <a:ahLst/>
+            <a:rect l="0" t="0" r="r" b="b"/>
+            <a:pathLst>
+              <a:path w="11458" h="2276">
+                <a:moveTo>
+                  <a:pt x="0" y="0"/>
+                </a:moveTo>
+                <a:lnTo>
+                  <a:pt x="11458" y="0"/>
+                </a:lnTo>
+                <a:lnTo>
+                  <a:pt x="11458" y="2276"/>
+                </a:lnTo>
+                <a:lnTo>
+                  <a:pt x="0" y="2276"/>
+                </a:lnTo>
+                <a:lnTo>
+                  <a:pt x="0" y="0"/>
+                </a:lnTo>
+                <a:close/>
+              </a:path>
+            </a:pathLst>
+          </a:custGeom>
+          <a:solidFill>
+            <a:srgbClr val="ffffff"/>
+          </a:solidFill>
+          <a:ln w="0">
+            <a:noFill/>
+          </a:ln>
+        </p:spPr>
+        <p:txBody>
+          <a:bodyPr lIns="0" rIns="0" tIns="0" bIns="0" anchor="t">
+            <a:noAutofit/>
+          </a:bodyPr>
+          <a:p>
+            <a:endParaRPr b="0" lang="en-US" sz="2400" spc="-1" strike="noStrike">
+              <a:solidFill>
+                <a:srgbClr val="000000"/>
+              </a:solidFill>
+              <a:latin typeface="DejaVu Serif"/>
+            </a:endParaRPr>
+          </a:p>
+        </p:txBody>
+      </p:sp>
+      <p:sp>
+        <p:nvSpPr>
+          <p:cNvPr id="112" name=""/>
+          <p:cNvSpPr/>
+          <p:nvPr/>
+        </p:nvSpPr>
+        <p:spPr>
+          <a:xfrm>
+            <a:off x="4752720" y="2381040"/>
+            <a:ext cx="4124880" cy="38520"/>
+          </a:xfrm>
+          <a:custGeom>
+            <a:avLst/>
+            <a:gdLst/>
+            <a:ahLst/>
+            <a:rect l="0" t="0" r="r" b="b"/>
+            <a:pathLst>
+              <a:path w="11458" h="107">
+                <a:moveTo>
+                  <a:pt x="0" y="0"/>
+                </a:moveTo>
+                <a:lnTo>
+                  <a:pt x="11458" y="0"/>
+                </a:lnTo>
+                <a:lnTo>
+                  <a:pt x="11458" y="107"/>
+                </a:lnTo>
+                <a:lnTo>
+                  <a:pt x="0" y="107"/>
                 </a:lnTo>
                 <a:lnTo>
                   <a:pt x="0" y="0"/>
@@ -8283,14 +8344,14 @@
       </p:sp>
       <p:sp>
         <p:nvSpPr>
-          <p:cNvPr id="114" name=""/>
+          <p:cNvPr id="113" name=""/>
           <p:cNvSpPr/>
           <p:nvPr/>
         </p:nvSpPr>
         <p:spPr>
           <a:xfrm>
-            <a:off x="4743360" y="2514240"/>
-            <a:ext cx="4134240" cy="10080"/>
+            <a:off x="4752720" y="3190680"/>
+            <a:ext cx="4124880" cy="9720"/>
           </a:xfrm>
           <a:custGeom>
             <a:avLst/>
@@ -8298,18 +8359,18 @@
             <a:ahLst/>
             <a:rect l="0" t="0" r="r" b="b"/>
             <a:pathLst>
-              <a:path w="11484" h="28">
+              <a:path w="11458" h="27">
                 <a:moveTo>
                   <a:pt x="0" y="0"/>
                 </a:moveTo>
                 <a:lnTo>
-                  <a:pt x="11484" y="0"/>
-                </a:lnTo>
-                <a:lnTo>
-                  <a:pt x="11484" y="28"/>
-                </a:lnTo>
-                <a:lnTo>
-                  <a:pt x="0" y="28"/>
+                  <a:pt x="11458" y="0"/>
+                </a:lnTo>
+                <a:lnTo>
+                  <a:pt x="11458" y="27"/>
+                </a:lnTo>
+                <a:lnTo>
+                  <a:pt x="0" y="27"/>
                 </a:lnTo>
                 <a:lnTo>
                   <a:pt x="0" y="0"/>
@@ -8341,14 +8402,14 @@
       </p:sp>
       <p:sp>
         <p:nvSpPr>
-          <p:cNvPr id="115" name=""/>
+          <p:cNvPr id="114" name=""/>
           <p:cNvSpPr/>
           <p:nvPr/>
         </p:nvSpPr>
         <p:spPr>
           <a:xfrm>
-            <a:off x="8867520" y="1476360"/>
-            <a:ext cx="10080" cy="1047960"/>
+            <a:off x="8867520" y="2381040"/>
+            <a:ext cx="10080" cy="819360"/>
           </a:xfrm>
           <a:custGeom>
             <a:avLst/>
@@ -8356,21 +8417,21 @@
             <a:ahLst/>
             <a:rect l="0" t="0" r="r" b="b"/>
             <a:pathLst>
-              <a:path w="28" h="2911">
+              <a:path w="28" h="2276">
                 <a:moveTo>
-                  <a:pt x="0" y="105"/>
+                  <a:pt x="0" y="106"/>
                 </a:moveTo>
                 <a:lnTo>
-                  <a:pt x="0" y="2911"/>
-                </a:lnTo>
-                <a:lnTo>
-                  <a:pt x="28" y="2911"/>
+                  <a:pt x="0" y="2276"/>
+                </a:lnTo>
+                <a:lnTo>
+                  <a:pt x="28" y="2276"/>
                 </a:lnTo>
                 <a:lnTo>
                   <a:pt x="28" y="0"/>
                 </a:lnTo>
                 <a:lnTo>
-                  <a:pt x="0" y="105"/>
+                  <a:pt x="0" y="106"/>
                 </a:lnTo>
                 <a:close/>
               </a:path>
@@ -8399,14 +8460,14 @@
       </p:sp>
       <p:sp>
         <p:nvSpPr>
-          <p:cNvPr id="116" name=""/>
+          <p:cNvPr id="115" name=""/>
           <p:cNvSpPr/>
           <p:nvPr/>
         </p:nvSpPr>
         <p:spPr>
           <a:xfrm>
-            <a:off x="4743360" y="1476360"/>
-            <a:ext cx="9720" cy="1047960"/>
+            <a:off x="4752720" y="2381040"/>
+            <a:ext cx="10080" cy="819360"/>
           </a:xfrm>
           <a:custGeom>
             <a:avLst/>
@@ -8414,18 +8475,18 @@
             <a:ahLst/>
             <a:rect l="0" t="0" r="r" b="b"/>
             <a:pathLst>
-              <a:path w="27" h="2911">
+              <a:path w="28" h="2276">
                 <a:moveTo>
                   <a:pt x="0" y="0"/>
                 </a:moveTo>
                 <a:lnTo>
-                  <a:pt x="0" y="2911"/>
-                </a:lnTo>
-                <a:lnTo>
-                  <a:pt x="27" y="2911"/>
-                </a:lnTo>
-                <a:lnTo>
-                  <a:pt x="27" y="105"/>
+                  <a:pt x="0" y="2276"/>
+                </a:lnTo>
+                <a:lnTo>
+                  <a:pt x="28" y="2276"/>
+                </a:lnTo>
+                <a:lnTo>
+                  <a:pt x="28" y="106"/>
                 </a:lnTo>
                 <a:lnTo>
                   <a:pt x="0" y="0"/>
@@ -8457,14 +8518,14 @@
       </p:sp>
       <p:sp>
         <p:nvSpPr>
-          <p:cNvPr id="117" name=""/>
+          <p:cNvPr id="116" name=""/>
           <p:cNvSpPr/>
           <p:nvPr/>
         </p:nvSpPr>
         <p:spPr>
           <a:xfrm>
-            <a:off x="4974120" y="1691640"/>
-            <a:ext cx="165960" cy="215640"/>
+            <a:off x="4752720" y="3295440"/>
+            <a:ext cx="4124880" cy="829080"/>
           </a:xfrm>
           <a:custGeom>
             <a:avLst/>
@@ -8472,588 +8533,18 @@
             <a:ahLst/>
             <a:rect l="0" t="0" r="r" b="b"/>
             <a:pathLst>
-              <a:path w="461" h="599">
+              <a:path w="11458" h="2303">
                 <a:moveTo>
-                  <a:pt x="415" y="0"/>
+                  <a:pt x="0" y="0"/>
                 </a:moveTo>
                 <a:lnTo>
-                  <a:pt x="46" y="0"/>
-                </a:lnTo>
-                <a:cubicBezTo>
-                  <a:pt x="39" y="0"/>
-                  <a:pt x="34" y="1"/>
-                  <a:pt x="28" y="3"/>
-                </a:cubicBezTo>
-                <a:cubicBezTo>
-                  <a:pt x="22" y="6"/>
-                  <a:pt x="17" y="9"/>
-                  <a:pt x="13" y="13"/>
-                </a:cubicBezTo>
-                <a:cubicBezTo>
-                  <a:pt x="9" y="18"/>
-                  <a:pt x="5" y="23"/>
-                  <a:pt x="3" y="28"/>
-                </a:cubicBezTo>
-                <a:cubicBezTo>
-                  <a:pt x="1" y="34"/>
-                  <a:pt x="0" y="40"/>
-                  <a:pt x="0" y="46"/>
-                </a:cubicBezTo>
-                <a:lnTo>
-                  <a:pt x="0" y="553"/>
-                </a:lnTo>
-                <a:cubicBezTo>
-                  <a:pt x="0" y="559"/>
-                  <a:pt x="1" y="565"/>
-                  <a:pt x="3" y="571"/>
-                </a:cubicBezTo>
-                <a:cubicBezTo>
-                  <a:pt x="5" y="576"/>
-                  <a:pt x="9" y="581"/>
-                  <a:pt x="13" y="585"/>
-                </a:cubicBezTo>
-                <a:cubicBezTo>
-                  <a:pt x="17" y="590"/>
-                  <a:pt x="22" y="593"/>
-                  <a:pt x="28" y="595"/>
-                </a:cubicBezTo>
-                <a:cubicBezTo>
-                  <a:pt x="34" y="598"/>
-                  <a:pt x="39" y="599"/>
-                  <a:pt x="46" y="599"/>
-                </a:cubicBezTo>
-                <a:lnTo>
-                  <a:pt x="415" y="599"/>
-                </a:lnTo>
-                <a:cubicBezTo>
-                  <a:pt x="421" y="599"/>
-                  <a:pt x="427" y="598"/>
-                  <a:pt x="432" y="595"/>
-                </a:cubicBezTo>
-                <a:cubicBezTo>
-                  <a:pt x="438" y="593"/>
-                  <a:pt x="443" y="590"/>
-                  <a:pt x="447" y="585"/>
-                </a:cubicBezTo>
-                <a:cubicBezTo>
-                  <a:pt x="452" y="581"/>
-                  <a:pt x="455" y="576"/>
-                  <a:pt x="457" y="571"/>
-                </a:cubicBezTo>
-                <a:cubicBezTo>
-                  <a:pt x="460" y="565"/>
-                  <a:pt x="461" y="559"/>
-                  <a:pt x="461" y="553"/>
-                </a:cubicBezTo>
-                <a:lnTo>
-                  <a:pt x="461" y="46"/>
-                </a:lnTo>
-                <a:cubicBezTo>
-                  <a:pt x="461" y="40"/>
-                  <a:pt x="460" y="34"/>
-                  <a:pt x="457" y="28"/>
-                </a:cubicBezTo>
-                <a:cubicBezTo>
-                  <a:pt x="455" y="23"/>
-                  <a:pt x="452" y="18"/>
-                  <a:pt x="447" y="13"/>
-                </a:cubicBezTo>
-                <a:cubicBezTo>
-                  <a:pt x="443" y="9"/>
-                  <a:pt x="438" y="6"/>
-                  <a:pt x="432" y="3"/>
-                </a:cubicBezTo>
-                <a:cubicBezTo>
-                  <a:pt x="427" y="1"/>
-                  <a:pt x="421" y="0"/>
-                  <a:pt x="415" y="0"/>
-                </a:cubicBezTo>
-                <a:moveTo>
-                  <a:pt x="415" y="46"/>
-                </a:moveTo>
-                <a:lnTo>
-                  <a:pt x="415" y="184"/>
-                </a:lnTo>
-                <a:lnTo>
-                  <a:pt x="46" y="184"/>
-                </a:lnTo>
-                <a:lnTo>
-                  <a:pt x="46" y="46"/>
-                </a:lnTo>
-                <a:lnTo>
-                  <a:pt x="415" y="46"/>
-                </a:lnTo>
-                <a:moveTo>
-                  <a:pt x="46" y="368"/>
-                </a:moveTo>
-                <a:lnTo>
-                  <a:pt x="46" y="230"/>
-                </a:lnTo>
-                <a:lnTo>
-                  <a:pt x="415" y="230"/>
-                </a:lnTo>
-                <a:lnTo>
-                  <a:pt x="415" y="368"/>
-                </a:lnTo>
-                <a:lnTo>
-                  <a:pt x="46" y="368"/>
-                </a:lnTo>
-                <a:moveTo>
-                  <a:pt x="46" y="553"/>
-                </a:moveTo>
-                <a:lnTo>
-                  <a:pt x="46" y="415"/>
-                </a:lnTo>
-                <a:lnTo>
-                  <a:pt x="415" y="415"/>
-                </a:lnTo>
-                <a:lnTo>
-                  <a:pt x="415" y="553"/>
-                </a:lnTo>
-                <a:lnTo>
-                  <a:pt x="46" y="553"/>
-                </a:lnTo>
-                <a:close/>
-              </a:path>
-            </a:pathLst>
-          </a:custGeom>
-          <a:solidFill>
-            <a:srgbClr val="dd784b"/>
-          </a:solidFill>
-          <a:ln w="0">
-            <a:noFill/>
-          </a:ln>
-        </p:spPr>
-        <p:txBody>
-          <a:bodyPr lIns="0" rIns="0" tIns="0" bIns="0" anchor="t">
-            <a:noAutofit/>
-          </a:bodyPr>
-          <a:p>
-            <a:endParaRPr b="0" lang="en-US" sz="2400" spc="-1" strike="noStrike">
-              <a:solidFill>
-                <a:srgbClr val="000000"/>
-              </a:solidFill>
-              <a:latin typeface="DejaVu Serif"/>
-            </a:endParaRPr>
-          </a:p>
-        </p:txBody>
-      </p:sp>
-      <p:sp>
-        <p:nvSpPr>
-          <p:cNvPr id="118" name=""/>
-          <p:cNvSpPr/>
-          <p:nvPr/>
-        </p:nvSpPr>
-        <p:spPr>
-          <a:xfrm>
-            <a:off x="5007240" y="1724760"/>
-            <a:ext cx="16920" cy="16920"/>
-          </a:xfrm>
-          <a:custGeom>
-            <a:avLst/>
-            <a:gdLst/>
-            <a:ahLst/>
-            <a:rect l="0" t="0" r="r" b="b"/>
-            <a:pathLst>
-              <a:path w="47" h="47">
-                <a:moveTo>
-                  <a:pt x="47" y="24"/>
-                </a:moveTo>
-                <a:cubicBezTo>
-                  <a:pt x="47" y="30"/>
-                  <a:pt x="44" y="36"/>
-                  <a:pt x="40" y="40"/>
-                </a:cubicBezTo>
-                <a:cubicBezTo>
-                  <a:pt x="35" y="45"/>
-                  <a:pt x="30" y="47"/>
-                  <a:pt x="24" y="47"/>
-                </a:cubicBezTo>
-                <a:cubicBezTo>
-                  <a:pt x="17" y="47"/>
-                  <a:pt x="12" y="45"/>
-                  <a:pt x="7" y="40"/>
-                </a:cubicBezTo>
-                <a:cubicBezTo>
-                  <a:pt x="2" y="36"/>
-                  <a:pt x="0" y="30"/>
-                  <a:pt x="0" y="24"/>
-                </a:cubicBezTo>
-                <a:cubicBezTo>
-                  <a:pt x="0" y="17"/>
-                  <a:pt x="2" y="11"/>
-                  <a:pt x="7" y="7"/>
-                </a:cubicBezTo>
-                <a:cubicBezTo>
-                  <a:pt x="12" y="2"/>
-                  <a:pt x="17" y="0"/>
-                  <a:pt x="24" y="0"/>
-                </a:cubicBezTo>
-                <a:cubicBezTo>
-                  <a:pt x="30" y="0"/>
-                  <a:pt x="35" y="2"/>
-                  <a:pt x="40" y="7"/>
-                </a:cubicBezTo>
-                <a:cubicBezTo>
-                  <a:pt x="44" y="11"/>
-                  <a:pt x="47" y="17"/>
-                  <a:pt x="47" y="24"/>
-                </a:cubicBezTo>
-                <a:close/>
-              </a:path>
-            </a:pathLst>
-          </a:custGeom>
-          <a:solidFill>
-            <a:srgbClr val="dd784b"/>
-          </a:solidFill>
-          <a:ln w="0">
-            <a:noFill/>
-          </a:ln>
-        </p:spPr>
-        <p:txBody>
-          <a:bodyPr lIns="0" rIns="0" tIns="0" bIns="0" anchor="t">
-            <a:noAutofit/>
-          </a:bodyPr>
-          <a:p>
-            <a:endParaRPr b="0" lang="en-US" sz="2400" spc="-1" strike="noStrike">
-              <a:solidFill>
-                <a:srgbClr val="000000"/>
-              </a:solidFill>
-              <a:latin typeface="DejaVu Serif"/>
-            </a:endParaRPr>
-          </a:p>
-        </p:txBody>
-      </p:sp>
-      <p:sp>
-        <p:nvSpPr>
-          <p:cNvPr id="119" name=""/>
-          <p:cNvSpPr/>
-          <p:nvPr/>
-        </p:nvSpPr>
-        <p:spPr>
-          <a:xfrm>
-            <a:off x="5007240" y="1791000"/>
-            <a:ext cx="16920" cy="16920"/>
-          </a:xfrm>
-          <a:custGeom>
-            <a:avLst/>
-            <a:gdLst/>
-            <a:ahLst/>
-            <a:rect l="0" t="0" r="r" b="b"/>
-            <a:pathLst>
-              <a:path w="47" h="47">
-                <a:moveTo>
-                  <a:pt x="47" y="24"/>
-                </a:moveTo>
-                <a:cubicBezTo>
-                  <a:pt x="47" y="30"/>
-                  <a:pt x="44" y="36"/>
-                  <a:pt x="40" y="40"/>
-                </a:cubicBezTo>
-                <a:cubicBezTo>
-                  <a:pt x="35" y="45"/>
-                  <a:pt x="30" y="47"/>
-                  <a:pt x="24" y="47"/>
-                </a:cubicBezTo>
-                <a:cubicBezTo>
-                  <a:pt x="17" y="47"/>
-                  <a:pt x="12" y="45"/>
-                  <a:pt x="7" y="40"/>
-                </a:cubicBezTo>
-                <a:cubicBezTo>
-                  <a:pt x="2" y="36"/>
-                  <a:pt x="0" y="30"/>
-                  <a:pt x="0" y="24"/>
-                </a:cubicBezTo>
-                <a:cubicBezTo>
-                  <a:pt x="0" y="17"/>
-                  <a:pt x="2" y="11"/>
-                  <a:pt x="7" y="7"/>
-                </a:cubicBezTo>
-                <a:cubicBezTo>
-                  <a:pt x="12" y="2"/>
-                  <a:pt x="17" y="0"/>
-                  <a:pt x="24" y="0"/>
-                </a:cubicBezTo>
-                <a:cubicBezTo>
-                  <a:pt x="30" y="0"/>
-                  <a:pt x="35" y="2"/>
-                  <a:pt x="40" y="7"/>
-                </a:cubicBezTo>
-                <a:cubicBezTo>
-                  <a:pt x="44" y="11"/>
-                  <a:pt x="47" y="17"/>
-                  <a:pt x="47" y="24"/>
-                </a:cubicBezTo>
-                <a:close/>
-              </a:path>
-            </a:pathLst>
-          </a:custGeom>
-          <a:solidFill>
-            <a:srgbClr val="dd784b"/>
-          </a:solidFill>
-          <a:ln w="0">
-            <a:noFill/>
-          </a:ln>
-        </p:spPr>
-        <p:txBody>
-          <a:bodyPr lIns="0" rIns="0" tIns="0" bIns="0" anchor="t">
-            <a:noAutofit/>
-          </a:bodyPr>
-          <a:p>
-            <a:endParaRPr b="0" lang="en-US" sz="2400" spc="-1" strike="noStrike">
-              <a:solidFill>
-                <a:srgbClr val="000000"/>
-              </a:solidFill>
-              <a:latin typeface="DejaVu Serif"/>
-            </a:endParaRPr>
-          </a:p>
-        </p:txBody>
-      </p:sp>
-      <p:sp>
-        <p:nvSpPr>
-          <p:cNvPr id="120" name=""/>
-          <p:cNvSpPr/>
-          <p:nvPr/>
-        </p:nvSpPr>
-        <p:spPr>
-          <a:xfrm>
-            <a:off x="5007240" y="1857240"/>
-            <a:ext cx="16920" cy="16920"/>
-          </a:xfrm>
-          <a:custGeom>
-            <a:avLst/>
-            <a:gdLst/>
-            <a:ahLst/>
-            <a:rect l="0" t="0" r="r" b="b"/>
-            <a:pathLst>
-              <a:path w="47" h="47">
-                <a:moveTo>
-                  <a:pt x="47" y="24"/>
-                </a:moveTo>
-                <a:cubicBezTo>
-                  <a:pt x="47" y="30"/>
-                  <a:pt x="44" y="36"/>
-                  <a:pt x="40" y="40"/>
-                </a:cubicBezTo>
-                <a:cubicBezTo>
-                  <a:pt x="35" y="45"/>
-                  <a:pt x="30" y="47"/>
-                  <a:pt x="24" y="47"/>
-                </a:cubicBezTo>
-                <a:cubicBezTo>
-                  <a:pt x="17" y="47"/>
-                  <a:pt x="12" y="45"/>
-                  <a:pt x="7" y="40"/>
-                </a:cubicBezTo>
-                <a:cubicBezTo>
-                  <a:pt x="2" y="36"/>
-                  <a:pt x="0" y="30"/>
-                  <a:pt x="0" y="24"/>
-                </a:cubicBezTo>
-                <a:cubicBezTo>
-                  <a:pt x="0" y="18"/>
-                  <a:pt x="2" y="11"/>
-                  <a:pt x="7" y="7"/>
-                </a:cubicBezTo>
-                <a:cubicBezTo>
-                  <a:pt x="12" y="2"/>
-                  <a:pt x="17" y="0"/>
-                  <a:pt x="24" y="0"/>
-                </a:cubicBezTo>
-                <a:cubicBezTo>
-                  <a:pt x="30" y="0"/>
-                  <a:pt x="35" y="2"/>
-                  <a:pt x="40" y="7"/>
-                </a:cubicBezTo>
-                <a:cubicBezTo>
-                  <a:pt x="44" y="11"/>
-                  <a:pt x="47" y="18"/>
-                  <a:pt x="47" y="24"/>
-                </a:cubicBezTo>
-                <a:close/>
-              </a:path>
-            </a:pathLst>
-          </a:custGeom>
-          <a:solidFill>
-            <a:srgbClr val="dd784b"/>
-          </a:solidFill>
-          <a:ln w="0">
-            <a:noFill/>
-          </a:ln>
-        </p:spPr>
-        <p:txBody>
-          <a:bodyPr lIns="0" rIns="0" tIns="0" bIns="0" anchor="t">
-            <a:noAutofit/>
-          </a:bodyPr>
-          <a:p>
-            <a:endParaRPr b="0" lang="en-US" sz="2400" spc="-1" strike="noStrike">
-              <a:solidFill>
-                <a:srgbClr val="000000"/>
-              </a:solidFill>
-              <a:latin typeface="DejaVu Serif"/>
-            </a:endParaRPr>
-          </a:p>
-        </p:txBody>
-      </p:sp>
-      <p:sp>
-        <p:nvSpPr>
-          <p:cNvPr id="121" name=""/>
-          <p:cNvSpPr txBox="1"/>
-          <p:nvPr/>
-        </p:nvSpPr>
-        <p:spPr>
-          <a:xfrm>
-            <a:off x="634320" y="2187360"/>
-            <a:ext cx="1706040" cy="160560"/>
-          </a:xfrm>
-          <a:prstGeom prst="rect">
-            <a:avLst/>
-          </a:prstGeom>
-          <a:noFill/>
-          <a:ln w="0">
-            <a:noFill/>
-          </a:ln>
-        </p:spPr>
-        <p:txBody>
-          <a:bodyPr lIns="0" rIns="0" tIns="0" bIns="0" anchor="t">
-            <a:noAutofit/>
-          </a:bodyPr>
-          <a:p>
-            <a:r>
-              <a:rPr b="0" lang="en-US" sz="1080" spc="-1" strike="noStrike">
-                <a:solidFill>
-                  <a:srgbClr val="1a1a2e"/>
-                </a:solidFill>
-                <a:latin typeface="Arial"/>
-                <a:ea typeface="Arial"/>
-              </a:rPr>
-              <a:t>in perioden en capaciteit</a:t>
-            </a:r>
-            <a:endParaRPr b="0" lang="en-US" sz="1080" spc="-1" strike="noStrike">
-              <a:solidFill>
-                <a:srgbClr val="000000"/>
-              </a:solidFill>
-              <a:latin typeface="DejaVu Serif"/>
-            </a:endParaRPr>
-          </a:p>
-        </p:txBody>
-      </p:sp>
-      <p:sp>
-        <p:nvSpPr>
-          <p:cNvPr id="122" name=""/>
-          <p:cNvSpPr txBox="1"/>
-          <p:nvPr/>
-        </p:nvSpPr>
-        <p:spPr>
-          <a:xfrm>
-            <a:off x="5185440" y="1767600"/>
-            <a:ext cx="3450960" cy="160560"/>
-          </a:xfrm>
-          <a:prstGeom prst="rect">
-            <a:avLst/>
-          </a:prstGeom>
-          <a:noFill/>
-          <a:ln w="0">
-            <a:noFill/>
-          </a:ln>
-        </p:spPr>
-        <p:txBody>
-          <a:bodyPr lIns="0" rIns="0" tIns="0" bIns="0" anchor="t">
-            <a:noAutofit/>
-          </a:bodyPr>
-          <a:p>
-            <a:r>
-              <a:rPr b="1" lang="en-US" sz="1080" spc="-1" strike="noStrike">
-                <a:solidFill>
-                  <a:srgbClr val="3d68ec"/>
-                </a:solidFill>
-                <a:latin typeface="Arial"/>
-                <a:ea typeface="Arial"/>
-              </a:rPr>
-              <a:t>Onderwijscatalogus en studentadministratie</a:t>
-            </a:r>
-            <a:endParaRPr b="0" lang="en-US" sz="1080" spc="-1" strike="noStrike">
-              <a:solidFill>
-                <a:srgbClr val="000000"/>
-              </a:solidFill>
-              <a:latin typeface="DejaVu Serif"/>
-            </a:endParaRPr>
-          </a:p>
-        </p:txBody>
-      </p:sp>
-      <p:sp>
-        <p:nvSpPr>
-          <p:cNvPr id="123" name=""/>
-          <p:cNvSpPr txBox="1"/>
-          <p:nvPr/>
-        </p:nvSpPr>
-        <p:spPr>
-          <a:xfrm>
-            <a:off x="4920480" y="1977840"/>
-            <a:ext cx="4103280" cy="160560"/>
-          </a:xfrm>
-          <a:prstGeom prst="rect">
-            <a:avLst/>
-          </a:prstGeom>
-          <a:noFill/>
-          <a:ln w="0">
-            <a:noFill/>
-          </a:ln>
-        </p:spPr>
-        <p:txBody>
-          <a:bodyPr lIns="0" rIns="0" tIns="0" bIns="0" anchor="t">
-            <a:noAutofit/>
-          </a:bodyPr>
-          <a:p>
-            <a:r>
-              <a:rPr b="0" lang="en-US" sz="1080" spc="-1" strike="noStrike">
-                <a:solidFill>
-                  <a:srgbClr val="1a1a2e"/>
-                </a:solidFill>
-                <a:latin typeface="Arial"/>
-                <a:ea typeface="Arial"/>
-              </a:rPr>
-              <a:t>waarop een student zich inschrijft, en waartegen resultaten</a:t>
-            </a:r>
-            <a:endParaRPr b="0" lang="en-US" sz="1080" spc="-1" strike="noStrike">
-              <a:solidFill>
-                <a:srgbClr val="000000"/>
-              </a:solidFill>
-              <a:latin typeface="DejaVu Serif"/>
-            </a:endParaRPr>
-          </a:p>
-        </p:txBody>
-      </p:sp>
-      <p:sp>
-        <p:nvSpPr>
-          <p:cNvPr id="124" name=""/>
-          <p:cNvSpPr/>
-          <p:nvPr/>
-        </p:nvSpPr>
-        <p:spPr>
-          <a:xfrm>
-            <a:off x="456840" y="2676240"/>
-            <a:ext cx="4134240" cy="1048320"/>
-          </a:xfrm>
-          <a:custGeom>
-            <a:avLst/>
-            <a:gdLst/>
-            <a:ahLst/>
-            <a:rect l="0" t="0" r="r" b="b"/>
-            <a:pathLst>
-              <a:path w="11484" h="2912">
-                <a:moveTo>
-                  <a:pt x="0" y="0"/>
-                </a:moveTo>
-                <a:lnTo>
-                  <a:pt x="11484" y="0"/>
-                </a:lnTo>
-                <a:lnTo>
-                  <a:pt x="11484" y="2912"/>
-                </a:lnTo>
-                <a:lnTo>
-                  <a:pt x="0" y="2912"/>
+                  <a:pt x="11458" y="0"/>
+                </a:lnTo>
+                <a:lnTo>
+                  <a:pt x="11458" y="2303"/>
+                </a:lnTo>
+                <a:lnTo>
+                  <a:pt x="0" y="2303"/>
                 </a:lnTo>
                 <a:lnTo>
                   <a:pt x="0" y="0"/>
@@ -9085,14 +8576,14 @@
       </p:sp>
       <p:sp>
         <p:nvSpPr>
-          <p:cNvPr id="125" name=""/>
+          <p:cNvPr id="117" name=""/>
           <p:cNvSpPr/>
           <p:nvPr/>
         </p:nvSpPr>
         <p:spPr>
           <a:xfrm>
-            <a:off x="456840" y="2676240"/>
-            <a:ext cx="4134240" cy="38520"/>
+            <a:off x="4752720" y="3295440"/>
+            <a:ext cx="4124880" cy="38520"/>
           </a:xfrm>
           <a:custGeom>
             <a:avLst/>
@@ -9100,15 +8591,15 @@
             <a:ahLst/>
             <a:rect l="0" t="0" r="r" b="b"/>
             <a:pathLst>
-              <a:path w="11484" h="107">
+              <a:path w="11458" h="107">
                 <a:moveTo>
                   <a:pt x="0" y="0"/>
                 </a:moveTo>
                 <a:lnTo>
-                  <a:pt x="11484" y="0"/>
-                </a:lnTo>
-                <a:lnTo>
-                  <a:pt x="11484" y="107"/>
+                  <a:pt x="11458" y="0"/>
+                </a:lnTo>
+                <a:lnTo>
+                  <a:pt x="11458" y="107"/>
                 </a:lnTo>
                 <a:lnTo>
                   <a:pt x="0" y="107"/>
@@ -9143,14 +8634,14 @@
       </p:sp>
       <p:sp>
         <p:nvSpPr>
-          <p:cNvPr id="126" name=""/>
+          <p:cNvPr id="118" name=""/>
           <p:cNvSpPr/>
           <p:nvPr/>
         </p:nvSpPr>
         <p:spPr>
           <a:xfrm>
-            <a:off x="456840" y="3714480"/>
-            <a:ext cx="4134240" cy="10080"/>
+            <a:off x="4752720" y="4114440"/>
+            <a:ext cx="4124880" cy="10080"/>
           </a:xfrm>
           <a:custGeom>
             <a:avLst/>
@@ -9158,15 +8649,15 @@
             <a:ahLst/>
             <a:rect l="0" t="0" r="r" b="b"/>
             <a:pathLst>
-              <a:path w="11484" h="28">
+              <a:path w="11458" h="28">
                 <a:moveTo>
                   <a:pt x="0" y="0"/>
                 </a:moveTo>
                 <a:lnTo>
-                  <a:pt x="11484" y="0"/>
-                </a:lnTo>
-                <a:lnTo>
-                  <a:pt x="11484" y="28"/>
+                  <a:pt x="11458" y="0"/>
+                </a:lnTo>
+                <a:lnTo>
+                  <a:pt x="11458" y="28"/>
                 </a:lnTo>
                 <a:lnTo>
                   <a:pt x="0" y="28"/>
@@ -9201,14 +8692,14 @@
       </p:sp>
       <p:sp>
         <p:nvSpPr>
-          <p:cNvPr id="127" name=""/>
+          <p:cNvPr id="119" name=""/>
           <p:cNvSpPr/>
           <p:nvPr/>
         </p:nvSpPr>
         <p:spPr>
           <a:xfrm>
-            <a:off x="4581360" y="2676240"/>
-            <a:ext cx="9720" cy="1048320"/>
+            <a:off x="8867520" y="3295440"/>
+            <a:ext cx="10080" cy="829080"/>
           </a:xfrm>
           <a:custGeom>
             <a:avLst/>
@@ -9216,18 +8707,18 @@
             <a:ahLst/>
             <a:rect l="0" t="0" r="r" b="b"/>
             <a:pathLst>
-              <a:path w="27" h="2912">
+              <a:path w="28" h="2303">
                 <a:moveTo>
                   <a:pt x="0" y="106"/>
                 </a:moveTo>
                 <a:lnTo>
-                  <a:pt x="0" y="2912"/>
-                </a:lnTo>
-                <a:lnTo>
-                  <a:pt x="27" y="2912"/>
-                </a:lnTo>
-                <a:lnTo>
-                  <a:pt x="27" y="0"/>
+                  <a:pt x="0" y="2303"/>
+                </a:lnTo>
+                <a:lnTo>
+                  <a:pt x="28" y="2303"/>
+                </a:lnTo>
+                <a:lnTo>
+                  <a:pt x="28" y="0"/>
                 </a:lnTo>
                 <a:lnTo>
                   <a:pt x="0" y="106"/>
@@ -9259,14 +8750,14 @@
       </p:sp>
       <p:sp>
         <p:nvSpPr>
-          <p:cNvPr id="128" name=""/>
+          <p:cNvPr id="120" name=""/>
           <p:cNvSpPr/>
           <p:nvPr/>
         </p:nvSpPr>
         <p:spPr>
           <a:xfrm>
-            <a:off x="456840" y="2676240"/>
-            <a:ext cx="10080" cy="1048320"/>
+            <a:off x="4752720" y="3295440"/>
+            <a:ext cx="10080" cy="829080"/>
           </a:xfrm>
           <a:custGeom>
             <a:avLst/>
@@ -9274,15 +8765,15 @@
             <a:ahLst/>
             <a:rect l="0" t="0" r="r" b="b"/>
             <a:pathLst>
-              <a:path w="28" h="2912">
+              <a:path w="28" h="2303">
                 <a:moveTo>
                   <a:pt x="0" y="0"/>
                 </a:moveTo>
                 <a:lnTo>
-                  <a:pt x="0" y="2912"/>
-                </a:lnTo>
-                <a:lnTo>
-                  <a:pt x="28" y="2912"/>
+                  <a:pt x="0" y="2303"/>
+                </a:lnTo>
+                <a:lnTo>
+                  <a:pt x="28" y="2303"/>
                 </a:lnTo>
                 <a:lnTo>
                   <a:pt x="28" y="106"/>
@@ -9317,450 +8808,14 @@
       </p:sp>
       <p:sp>
         <p:nvSpPr>
-          <p:cNvPr id="129" name=""/>
-          <p:cNvSpPr/>
-          <p:nvPr/>
-        </p:nvSpPr>
-        <p:spPr>
-          <a:xfrm>
-            <a:off x="671040" y="2916720"/>
-            <a:ext cx="182520" cy="199080"/>
-          </a:xfrm>
-          <a:custGeom>
-            <a:avLst/>
-            <a:gdLst/>
-            <a:ahLst/>
-            <a:rect l="0" t="0" r="r" b="b"/>
-            <a:pathLst>
-              <a:path w="507" h="553">
-                <a:moveTo>
-                  <a:pt x="507" y="553"/>
-                </a:moveTo>
-                <a:lnTo>
-                  <a:pt x="461" y="553"/>
-                </a:lnTo>
-                <a:lnTo>
-                  <a:pt x="461" y="484"/>
-                </a:lnTo>
-                <a:cubicBezTo>
-                  <a:pt x="461" y="468"/>
-                  <a:pt x="458" y="453"/>
-                  <a:pt x="453" y="439"/>
-                </a:cubicBezTo>
-                <a:cubicBezTo>
-                  <a:pt x="447" y="425"/>
-                  <a:pt x="438" y="412"/>
-                  <a:pt x="428" y="401"/>
-                </a:cubicBezTo>
-                <a:cubicBezTo>
-                  <a:pt x="417" y="391"/>
-                  <a:pt x="403" y="382"/>
-                  <a:pt x="389" y="376"/>
-                </a:cubicBezTo>
-                <a:cubicBezTo>
-                  <a:pt x="375" y="371"/>
-                  <a:pt x="361" y="368"/>
-                  <a:pt x="345" y="368"/>
-                </a:cubicBezTo>
-                <a:lnTo>
-                  <a:pt x="207" y="368"/>
-                </a:lnTo>
-                <a:cubicBezTo>
-                  <a:pt x="192" y="368"/>
-                  <a:pt x="177" y="371"/>
-                  <a:pt x="163" y="376"/>
-                </a:cubicBezTo>
-                <a:cubicBezTo>
-                  <a:pt x="149" y="382"/>
-                  <a:pt x="137" y="391"/>
-                  <a:pt x="126" y="401"/>
-                </a:cubicBezTo>
-                <a:cubicBezTo>
-                  <a:pt x="115" y="412"/>
-                  <a:pt x="107" y="425"/>
-                  <a:pt x="101" y="439"/>
-                </a:cubicBezTo>
-                <a:cubicBezTo>
-                  <a:pt x="95" y="453"/>
-                  <a:pt x="92" y="468"/>
-                  <a:pt x="92" y="484"/>
-                </a:cubicBezTo>
-                <a:lnTo>
-                  <a:pt x="92" y="553"/>
-                </a:lnTo>
-                <a:lnTo>
-                  <a:pt x="46" y="553"/>
-                </a:lnTo>
-                <a:lnTo>
-                  <a:pt x="46" y="484"/>
-                </a:lnTo>
-                <a:cubicBezTo>
-                  <a:pt x="46" y="473"/>
-                  <a:pt x="47" y="463"/>
-                  <a:pt x="49" y="451"/>
-                </a:cubicBezTo>
-                <a:cubicBezTo>
-                  <a:pt x="51" y="441"/>
-                  <a:pt x="55" y="431"/>
-                  <a:pt x="59" y="421"/>
-                </a:cubicBezTo>
-                <a:cubicBezTo>
-                  <a:pt x="63" y="411"/>
-                  <a:pt x="68" y="402"/>
-                  <a:pt x="73" y="393"/>
-                </a:cubicBezTo>
-                <a:cubicBezTo>
-                  <a:pt x="79" y="384"/>
-                  <a:pt x="86" y="376"/>
-                  <a:pt x="94" y="369"/>
-                </a:cubicBezTo>
-                <a:cubicBezTo>
-                  <a:pt x="101" y="361"/>
-                  <a:pt x="109" y="355"/>
-                  <a:pt x="118" y="349"/>
-                </a:cubicBezTo>
-                <a:cubicBezTo>
-                  <a:pt x="127" y="343"/>
-                  <a:pt x="136" y="338"/>
-                  <a:pt x="146" y="334"/>
-                </a:cubicBezTo>
-                <a:cubicBezTo>
-                  <a:pt x="155" y="330"/>
-                  <a:pt x="166" y="327"/>
-                  <a:pt x="176" y="325"/>
-                </a:cubicBezTo>
-                <a:cubicBezTo>
-                  <a:pt x="186" y="323"/>
-                  <a:pt x="197" y="322"/>
-                  <a:pt x="207" y="322"/>
-                </a:cubicBezTo>
-                <a:lnTo>
-                  <a:pt x="345" y="322"/>
-                </a:lnTo>
-                <a:cubicBezTo>
-                  <a:pt x="356" y="322"/>
-                  <a:pt x="366" y="323"/>
-                  <a:pt x="377" y="325"/>
-                </a:cubicBezTo>
-                <a:cubicBezTo>
-                  <a:pt x="387" y="327"/>
-                  <a:pt x="397" y="330"/>
-                  <a:pt x="407" y="334"/>
-                </a:cubicBezTo>
-                <a:cubicBezTo>
-                  <a:pt x="418" y="338"/>
-                  <a:pt x="427" y="343"/>
-                  <a:pt x="436" y="349"/>
-                </a:cubicBezTo>
-                <a:cubicBezTo>
-                  <a:pt x="445" y="355"/>
-                  <a:pt x="453" y="361"/>
-                  <a:pt x="460" y="369"/>
-                </a:cubicBezTo>
-                <a:cubicBezTo>
-                  <a:pt x="468" y="376"/>
-                  <a:pt x="474" y="384"/>
-                  <a:pt x="480" y="393"/>
-                </a:cubicBezTo>
-                <a:cubicBezTo>
-                  <a:pt x="486" y="402"/>
-                  <a:pt x="491" y="411"/>
-                  <a:pt x="495" y="421"/>
-                </a:cubicBezTo>
-                <a:cubicBezTo>
-                  <a:pt x="499" y="431"/>
-                  <a:pt x="502" y="441"/>
-                  <a:pt x="504" y="451"/>
-                </a:cubicBezTo>
-                <a:cubicBezTo>
-                  <a:pt x="506" y="463"/>
-                  <a:pt x="507" y="473"/>
-                  <a:pt x="507" y="484"/>
-                </a:cubicBezTo>
-                <a:lnTo>
-                  <a:pt x="507" y="553"/>
-                </a:lnTo>
-                <a:moveTo>
-                  <a:pt x="23" y="0"/>
-                </a:moveTo>
-                <a:cubicBezTo>
-                  <a:pt x="17" y="0"/>
-                  <a:pt x="11" y="2"/>
-                  <a:pt x="7" y="6"/>
-                </a:cubicBezTo>
-                <a:cubicBezTo>
-                  <a:pt x="2" y="11"/>
-                  <a:pt x="0" y="16"/>
-                  <a:pt x="0" y="23"/>
-                </a:cubicBezTo>
-                <a:lnTo>
-                  <a:pt x="0" y="230"/>
-                </a:lnTo>
-                <a:lnTo>
-                  <a:pt x="46" y="230"/>
-                </a:lnTo>
-                <a:lnTo>
-                  <a:pt x="46" y="23"/>
-                </a:lnTo>
-                <a:cubicBezTo>
-                  <a:pt x="46" y="16"/>
-                  <a:pt x="44" y="11"/>
-                  <a:pt x="40" y="6"/>
-                </a:cubicBezTo>
-                <a:cubicBezTo>
-                  <a:pt x="35" y="2"/>
-                  <a:pt x="30" y="0"/>
-                  <a:pt x="23" y="0"/>
-                </a:cubicBezTo>
-                <a:close/>
-              </a:path>
-            </a:pathLst>
-          </a:custGeom>
-          <a:solidFill>
-            <a:srgbClr val="00af81"/>
-          </a:solidFill>
-          <a:ln w="0">
-            <a:noFill/>
-          </a:ln>
-        </p:spPr>
-        <p:txBody>
-          <a:bodyPr lIns="0" rIns="0" tIns="0" bIns="0" anchor="t">
-            <a:noAutofit/>
-          </a:bodyPr>
-          <a:p>
-            <a:endParaRPr b="0" lang="en-US" sz="2400" spc="-1" strike="noStrike">
-              <a:solidFill>
-                <a:srgbClr val="000000"/>
-              </a:solidFill>
-              <a:latin typeface="DejaVu Serif"/>
-            </a:endParaRPr>
-          </a:p>
-        </p:txBody>
-      </p:sp>
-      <p:sp>
-        <p:nvSpPr>
-          <p:cNvPr id="130" name=""/>
-          <p:cNvSpPr/>
-          <p:nvPr/>
-        </p:nvSpPr>
-        <p:spPr>
-          <a:xfrm>
-            <a:off x="671040" y="2883240"/>
-            <a:ext cx="199080" cy="133200"/>
-          </a:xfrm>
-          <a:custGeom>
-            <a:avLst/>
-            <a:gdLst/>
-            <a:ahLst/>
-            <a:rect l="0" t="0" r="r" b="b"/>
-            <a:pathLst>
-              <a:path w="553" h="370">
-                <a:moveTo>
-                  <a:pt x="0" y="0"/>
-                </a:moveTo>
-                <a:lnTo>
-                  <a:pt x="0" y="46"/>
-                </a:lnTo>
-                <a:lnTo>
-                  <a:pt x="116" y="46"/>
-                </a:lnTo>
-                <a:lnTo>
-                  <a:pt x="116" y="208"/>
-                </a:lnTo>
-                <a:cubicBezTo>
-                  <a:pt x="116" y="218"/>
-                  <a:pt x="117" y="229"/>
-                  <a:pt x="119" y="239"/>
-                </a:cubicBezTo>
-                <a:cubicBezTo>
-                  <a:pt x="121" y="249"/>
-                  <a:pt x="125" y="259"/>
-                  <a:pt x="129" y="269"/>
-                </a:cubicBezTo>
-                <a:cubicBezTo>
-                  <a:pt x="133" y="280"/>
-                  <a:pt x="138" y="289"/>
-                  <a:pt x="143" y="298"/>
-                </a:cubicBezTo>
-                <a:cubicBezTo>
-                  <a:pt x="149" y="307"/>
-                  <a:pt x="156" y="315"/>
-                  <a:pt x="163" y="322"/>
-                </a:cubicBezTo>
-                <a:cubicBezTo>
-                  <a:pt x="171" y="330"/>
-                  <a:pt x="179" y="337"/>
-                  <a:pt x="188" y="342"/>
-                </a:cubicBezTo>
-                <a:cubicBezTo>
-                  <a:pt x="197" y="348"/>
-                  <a:pt x="206" y="353"/>
-                  <a:pt x="216" y="357"/>
-                </a:cubicBezTo>
-                <a:cubicBezTo>
-                  <a:pt x="225" y="361"/>
-                  <a:pt x="236" y="364"/>
-                  <a:pt x="246" y="367"/>
-                </a:cubicBezTo>
-                <a:cubicBezTo>
-                  <a:pt x="256" y="369"/>
-                  <a:pt x="267" y="370"/>
-                  <a:pt x="277" y="370"/>
-                </a:cubicBezTo>
-                <a:cubicBezTo>
-                  <a:pt x="288" y="370"/>
-                  <a:pt x="298" y="369"/>
-                  <a:pt x="309" y="367"/>
-                </a:cubicBezTo>
-                <a:cubicBezTo>
-                  <a:pt x="319" y="364"/>
-                  <a:pt x="329" y="361"/>
-                  <a:pt x="339" y="357"/>
-                </a:cubicBezTo>
-                <a:cubicBezTo>
-                  <a:pt x="349" y="353"/>
-                  <a:pt x="358" y="348"/>
-                  <a:pt x="367" y="342"/>
-                </a:cubicBezTo>
-                <a:cubicBezTo>
-                  <a:pt x="376" y="337"/>
-                  <a:pt x="384" y="330"/>
-                  <a:pt x="391" y="322"/>
-                </a:cubicBezTo>
-                <a:cubicBezTo>
-                  <a:pt x="399" y="315"/>
-                  <a:pt x="405" y="307"/>
-                  <a:pt x="411" y="298"/>
-                </a:cubicBezTo>
-                <a:cubicBezTo>
-                  <a:pt x="417" y="289"/>
-                  <a:pt x="422" y="280"/>
-                  <a:pt x="426" y="269"/>
-                </a:cubicBezTo>
-                <a:cubicBezTo>
-                  <a:pt x="430" y="259"/>
-                  <a:pt x="433" y="249"/>
-                  <a:pt x="435" y="239"/>
-                </a:cubicBezTo>
-                <a:cubicBezTo>
-                  <a:pt x="437" y="229"/>
-                  <a:pt x="438" y="218"/>
-                  <a:pt x="438" y="208"/>
-                </a:cubicBezTo>
-                <a:lnTo>
-                  <a:pt x="438" y="46"/>
-                </a:lnTo>
-                <a:lnTo>
-                  <a:pt x="553" y="46"/>
-                </a:lnTo>
-                <a:lnTo>
-                  <a:pt x="553" y="0"/>
-                </a:lnTo>
-                <a:lnTo>
-                  <a:pt x="0" y="0"/>
-                </a:lnTo>
-                <a:moveTo>
-                  <a:pt x="162" y="46"/>
-                </a:moveTo>
-                <a:lnTo>
-                  <a:pt x="392" y="46"/>
-                </a:lnTo>
-                <a:lnTo>
-                  <a:pt x="392" y="116"/>
-                </a:lnTo>
-                <a:lnTo>
-                  <a:pt x="162" y="116"/>
-                </a:lnTo>
-                <a:lnTo>
-                  <a:pt x="162" y="46"/>
-                </a:lnTo>
-                <a:moveTo>
-                  <a:pt x="277" y="324"/>
-                </a:moveTo>
-                <a:cubicBezTo>
-                  <a:pt x="262" y="324"/>
-                  <a:pt x="247" y="321"/>
-                  <a:pt x="233" y="315"/>
-                </a:cubicBezTo>
-                <a:cubicBezTo>
-                  <a:pt x="219" y="309"/>
-                  <a:pt x="207" y="301"/>
-                  <a:pt x="196" y="290"/>
-                </a:cubicBezTo>
-                <a:cubicBezTo>
-                  <a:pt x="185" y="279"/>
-                  <a:pt x="177" y="266"/>
-                  <a:pt x="171" y="252"/>
-                </a:cubicBezTo>
-                <a:cubicBezTo>
-                  <a:pt x="165" y="237"/>
-                  <a:pt x="162" y="223"/>
-                  <a:pt x="162" y="208"/>
-                </a:cubicBezTo>
-                <a:lnTo>
-                  <a:pt x="162" y="162"/>
-                </a:lnTo>
-                <a:lnTo>
-                  <a:pt x="392" y="162"/>
-                </a:lnTo>
-                <a:lnTo>
-                  <a:pt x="392" y="208"/>
-                </a:lnTo>
-                <a:cubicBezTo>
-                  <a:pt x="392" y="223"/>
-                  <a:pt x="389" y="237"/>
-                  <a:pt x="384" y="252"/>
-                </a:cubicBezTo>
-                <a:cubicBezTo>
-                  <a:pt x="378" y="266"/>
-                  <a:pt x="369" y="279"/>
-                  <a:pt x="359" y="290"/>
-                </a:cubicBezTo>
-                <a:cubicBezTo>
-                  <a:pt x="348" y="301"/>
-                  <a:pt x="335" y="309"/>
-                  <a:pt x="321" y="315"/>
-                </a:cubicBezTo>
-                <a:cubicBezTo>
-                  <a:pt x="307" y="321"/>
-                  <a:pt x="293" y="324"/>
-                  <a:pt x="277" y="324"/>
-                </a:cubicBezTo>
-                <a:close/>
-              </a:path>
-            </a:pathLst>
-          </a:custGeom>
-          <a:solidFill>
-            <a:srgbClr val="00af81"/>
-          </a:solidFill>
-          <a:ln w="0">
-            <a:noFill/>
-          </a:ln>
-        </p:spPr>
-        <p:txBody>
-          <a:bodyPr lIns="0" rIns="0" tIns="0" bIns="0" anchor="t">
-            <a:noAutofit/>
-          </a:bodyPr>
-          <a:p>
-            <a:endParaRPr b="0" lang="en-US" sz="2400" spc="-1" strike="noStrike">
-              <a:solidFill>
-                <a:srgbClr val="000000"/>
-              </a:solidFill>
-              <a:latin typeface="DejaVu Serif"/>
-            </a:endParaRPr>
-          </a:p>
-        </p:txBody>
-      </p:sp>
-      <p:sp>
-        <p:nvSpPr>
-          <p:cNvPr id="131" name=""/>
+          <p:cNvPr id="121" name=""/>
           <p:cNvSpPr txBox="1"/>
           <p:nvPr/>
         </p:nvSpPr>
         <p:spPr>
           <a:xfrm>
-            <a:off x="4920480" y="2187360"/>
-            <a:ext cx="384840" cy="160560"/>
+            <a:off x="457200" y="4603680"/>
+            <a:ext cx="2628000" cy="128520"/>
           </a:xfrm>
           <a:prstGeom prst="rect">
             <a:avLst/>
@@ -9776,34 +8831,87 @@
           </a:bodyPr>
           <a:p>
             <a:r>
-              <a:rPr b="0" lang="en-US" sz="1080" spc="-1" strike="noStrike">
+              <a:rPr b="0" lang="en-US" sz="860" spc="-1" strike="noStrike">
+                <a:solidFill>
+                  <a:srgbClr val="6b7280"/>
+                </a:solidFill>
+                <a:latin typeface="Arial"/>
+                <a:ea typeface="Arial"/>
+              </a:rPr>
+              <a:t>De koppelvlakspeciﬁcatie en haar bouwblokken</a:t>
+            </a:r>
+            <a:endParaRPr b="0" lang="en-US" sz="860" spc="-1" strike="noStrike">
+              <a:solidFill>
+                <a:srgbClr val="000000"/>
+              </a:solidFill>
+              <a:latin typeface="DejaVu Serif"/>
+            </a:endParaRPr>
+          </a:p>
+        </p:txBody>
+      </p:sp>
+      <p:sp>
+        <p:nvSpPr>
+          <p:cNvPr id="122" name=""/>
+          <p:cNvSpPr txBox="1"/>
+          <p:nvPr/>
+        </p:nvSpPr>
+        <p:spPr>
+          <a:xfrm>
+            <a:off x="4897800" y="1610640"/>
+            <a:ext cx="4310640" cy="155880"/>
+          </a:xfrm>
+          <a:prstGeom prst="rect">
+            <a:avLst/>
+          </a:prstGeom>
+          <a:noFill/>
+          <a:ln w="0">
+            <a:noFill/>
+          </a:ln>
+        </p:spPr>
+        <p:txBody>
+          <a:bodyPr lIns="0" rIns="0" tIns="0" bIns="0" anchor="t">
+            <a:noAutofit/>
+          </a:bodyPr>
+          <a:p>
+            <a:r>
+              <a:rPr b="1" lang="en-US" sz="1050" spc="-1" strike="noStrike">
+                <a:solidFill>
+                  <a:srgbClr val="3d68ec"/>
+                </a:solidFill>
+                <a:latin typeface="Arial"/>
+                <a:ea typeface="Arial"/>
+              </a:rPr>
+              <a:t>Vaste bouwblokken per koppeling:</a:t>
+            </a:r>
+            <a:r>
+              <a:rPr b="0" lang="en-US" sz="1050" spc="-1" strike="noStrike">
                 <a:solidFill>
                   <a:srgbClr val="1a1a2e"/>
                 </a:solidFill>
                 <a:latin typeface="Arial"/>
                 <a:ea typeface="Arial"/>
               </a:rPr>
-              <a:t>tellen</a:t>
+              <a:t> wat systemen van elkaar</a:t>
             </a:r>
-            <a:endParaRPr b="0" lang="en-US" sz="1080" spc="-1" strike="noStrike">
-              <a:solidFill>
-                <a:srgbClr val="000000"/>
-              </a:solidFill>
-              <a:latin typeface="DejaVu Serif"/>
-            </a:endParaRPr>
-          </a:p>
-        </p:txBody>
-      </p:sp>
-      <p:sp>
-        <p:nvSpPr>
-          <p:cNvPr id="132" name=""/>
+            <a:endParaRPr b="0" lang="en-US" sz="1050" spc="-1" strike="noStrike">
+              <a:solidFill>
+                <a:srgbClr val="000000"/>
+              </a:solidFill>
+              <a:latin typeface="DejaVu Serif"/>
+            </a:endParaRPr>
+          </a:p>
+        </p:txBody>
+      </p:sp>
+      <p:sp>
+        <p:nvSpPr>
+          <p:cNvPr id="123" name=""/>
           <p:cNvSpPr txBox="1"/>
           <p:nvPr/>
         </p:nvSpPr>
         <p:spPr>
           <a:xfrm>
-            <a:off x="899280" y="2967840"/>
-            <a:ext cx="2873520" cy="160560"/>
+            <a:off x="4897800" y="1810440"/>
+            <a:ext cx="4266360" cy="155880"/>
           </a:xfrm>
           <a:prstGeom prst="rect">
             <a:avLst/>
@@ -9819,77 +8927,355 @@
           </a:bodyPr>
           <a:p>
             <a:r>
-              <a:rPr b="1" lang="en-US" sz="1080" spc="-1" strike="noStrike">
+              <a:rPr b="0" lang="en-US" sz="1050" spc="-1" strike="noStrike">
+                <a:solidFill>
+                  <a:srgbClr val="1a1a2e"/>
+                </a:solidFill>
+                <a:latin typeface="Arial"/>
+                <a:ea typeface="Arial"/>
+              </a:rPr>
+              <a:t>vragen, wanneer zij dat doen, welke gegevens meegaan en hoe</a:t>
+            </a:r>
+            <a:endParaRPr b="0" lang="en-US" sz="1050" spc="-1" strike="noStrike">
+              <a:solidFill>
+                <a:srgbClr val="000000"/>
+              </a:solidFill>
+              <a:latin typeface="DejaVu Serif"/>
+            </a:endParaRPr>
+          </a:p>
+        </p:txBody>
+      </p:sp>
+      <p:sp>
+        <p:nvSpPr>
+          <p:cNvPr id="124" name=""/>
+          <p:cNvSpPr txBox="1"/>
+          <p:nvPr/>
+        </p:nvSpPr>
+        <p:spPr>
+          <a:xfrm>
+            <a:off x="4897800" y="2010600"/>
+            <a:ext cx="4138560" cy="155880"/>
+          </a:xfrm>
+          <a:prstGeom prst="rect">
+            <a:avLst/>
+          </a:prstGeom>
+          <a:noFill/>
+          <a:ln w="0">
+            <a:noFill/>
+          </a:ln>
+        </p:spPr>
+        <p:txBody>
+          <a:bodyPr lIns="0" rIns="0" tIns="0" bIns="0" anchor="t">
+            <a:noAutofit/>
+          </a:bodyPr>
+          <a:p>
+            <a:r>
+              <a:rPr b="0" lang="en-US" sz="1050" spc="-1" strike="noStrike">
+                <a:solidFill>
+                  <a:srgbClr val="1a1a2e"/>
+                </a:solidFill>
+                <a:latin typeface="Arial"/>
+                <a:ea typeface="Arial"/>
+              </a:rPr>
+              <a:t>toegang is geregeld. Elke eis komt uit de vraag van de sector.</a:t>
+            </a:r>
+            <a:endParaRPr b="0" lang="en-US" sz="1050" spc="-1" strike="noStrike">
+              <a:solidFill>
+                <a:srgbClr val="000000"/>
+              </a:solidFill>
+              <a:latin typeface="DejaVu Serif"/>
+            </a:endParaRPr>
+          </a:p>
+        </p:txBody>
+      </p:sp>
+      <p:sp>
+        <p:nvSpPr>
+          <p:cNvPr id="125" name=""/>
+          <p:cNvSpPr txBox="1"/>
+          <p:nvPr/>
+        </p:nvSpPr>
+        <p:spPr>
+          <a:xfrm>
+            <a:off x="4897800" y="2525040"/>
+            <a:ext cx="4214520" cy="155880"/>
+          </a:xfrm>
+          <a:prstGeom prst="rect">
+            <a:avLst/>
+          </a:prstGeom>
+          <a:noFill/>
+          <a:ln w="0">
+            <a:noFill/>
+          </a:ln>
+        </p:spPr>
+        <p:txBody>
+          <a:bodyPr lIns="0" rIns="0" tIns="0" bIns="0" anchor="t">
+            <a:noAutofit/>
+          </a:bodyPr>
+          <a:p>
+            <a:r>
+              <a:rPr b="1" lang="en-US" sz="1050" spc="-1" strike="noStrike">
                 <a:solidFill>
                   <a:srgbClr val="3d68ec"/>
                 </a:solidFill>
                 <a:latin typeface="Arial"/>
                 <a:ea typeface="Arial"/>
               </a:rPr>
-              <a:t>Onderwijscatalogus en leeromgeving</a:t>
+              <a:t>Drie koppelingen in uitwerking:</a:t>
             </a:r>
-            <a:endParaRPr b="0" lang="en-US" sz="1080" spc="-1" strike="noStrike">
-              <a:solidFill>
-                <a:srgbClr val="000000"/>
-              </a:solidFill>
-              <a:latin typeface="DejaVu Serif"/>
-            </a:endParaRPr>
-          </a:p>
-        </p:txBody>
-      </p:sp>
-      <p:sp>
-        <p:nvSpPr>
-          <p:cNvPr id="133" name=""/>
-          <p:cNvSpPr txBox="1"/>
-          <p:nvPr/>
-        </p:nvSpPr>
-        <p:spPr>
-          <a:xfrm>
-            <a:off x="634320" y="3177720"/>
-            <a:ext cx="3978360" cy="160560"/>
-          </a:xfrm>
-          <a:prstGeom prst="rect">
-            <a:avLst/>
-          </a:prstGeom>
-          <a:noFill/>
-          <a:ln w="0">
-            <a:noFill/>
-          </a:ln>
-        </p:spPr>
-        <p:txBody>
-          <a:bodyPr lIns="0" rIns="0" tIns="0" bIns="0" anchor="t">
-            <a:noAutofit/>
-          </a:bodyPr>
-          <a:p>
             <a:r>
-              <a:rPr b="0" lang="en-US" sz="1080" spc="-1" strike="noStrike">
+              <a:rPr b="0" lang="en-US" sz="1050" spc="-1" strike="noStrike">
                 <a:solidFill>
                   <a:srgbClr val="1a1a2e"/>
                 </a:solidFill>
                 <a:latin typeface="Arial"/>
                 <a:ea typeface="Arial"/>
               </a:rPr>
-              <a:t>de leeromgeving uitlijnen op het ontworpen onderwijs; de</a:t>
+              <a:t> catalogus en planning voor</a:t>
             </a:r>
-            <a:endParaRPr b="0" lang="en-US" sz="1080" spc="-1" strike="noStrike">
-              <a:solidFill>
-                <a:srgbClr val="000000"/>
-              </a:solidFill>
-              <a:latin typeface="DejaVu Serif"/>
-            </a:endParaRPr>
-          </a:p>
-        </p:txBody>
-      </p:sp>
-      <p:sp>
-        <p:nvSpPr>
-          <p:cNvPr id="134" name=""/>
+            <a:endParaRPr b="0" lang="en-US" sz="1050" spc="-1" strike="noStrike">
+              <a:solidFill>
+                <a:srgbClr val="000000"/>
+              </a:solidFill>
+              <a:latin typeface="DejaVu Serif"/>
+            </a:endParaRPr>
+          </a:p>
+        </p:txBody>
+      </p:sp>
+      <p:sp>
+        <p:nvSpPr>
+          <p:cNvPr id="126" name=""/>
+          <p:cNvSpPr txBox="1"/>
+          <p:nvPr/>
+        </p:nvSpPr>
+        <p:spPr>
+          <a:xfrm>
+            <a:off x="4897800" y="2724840"/>
+            <a:ext cx="4204080" cy="155880"/>
+          </a:xfrm>
+          <a:prstGeom prst="rect">
+            <a:avLst/>
+          </a:prstGeom>
+          <a:noFill/>
+          <a:ln w="0">
+            <a:noFill/>
+          </a:ln>
+        </p:spPr>
+        <p:txBody>
+          <a:bodyPr lIns="0" rIns="0" tIns="0" bIns="0" anchor="t">
+            <a:noAutofit/>
+          </a:bodyPr>
+          <a:p>
+            <a:r>
+              <a:rPr b="0" lang="en-US" sz="1050" spc="-1" strike="noStrike">
+                <a:solidFill>
+                  <a:srgbClr val="1a1a2e"/>
+                </a:solidFill>
+                <a:latin typeface="Arial"/>
+                <a:ea typeface="Arial"/>
+              </a:rPr>
+              <a:t>nominaal en keuze-aanbod, catalogus en studentadministratie,</a:t>
+            </a:r>
+            <a:endParaRPr b="0" lang="en-US" sz="1050" spc="-1" strike="noStrike">
+              <a:solidFill>
+                <a:srgbClr val="000000"/>
+              </a:solidFill>
+              <a:latin typeface="DejaVu Serif"/>
+            </a:endParaRPr>
+          </a:p>
+        </p:txBody>
+      </p:sp>
+      <p:sp>
+        <p:nvSpPr>
+          <p:cNvPr id="127" name=""/>
+          <p:cNvSpPr txBox="1"/>
+          <p:nvPr/>
+        </p:nvSpPr>
+        <p:spPr>
+          <a:xfrm>
+            <a:off x="4897800" y="2925000"/>
+            <a:ext cx="1849320" cy="155880"/>
+          </a:xfrm>
+          <a:prstGeom prst="rect">
+            <a:avLst/>
+          </a:prstGeom>
+          <a:noFill/>
+          <a:ln w="0">
+            <a:noFill/>
+          </a:ln>
+        </p:spPr>
+        <p:txBody>
+          <a:bodyPr lIns="0" rIns="0" tIns="0" bIns="0" anchor="t">
+            <a:noAutofit/>
+          </a:bodyPr>
+          <a:p>
+            <a:r>
+              <a:rPr b="0" lang="en-US" sz="1050" spc="-1" strike="noStrike">
+                <a:solidFill>
+                  <a:srgbClr val="1a1a2e"/>
+                </a:solidFill>
+                <a:latin typeface="Arial"/>
+                <a:ea typeface="Arial"/>
+              </a:rPr>
+              <a:t>catalogus en leeromgeving.</a:t>
+            </a:r>
+            <a:endParaRPr b="0" lang="en-US" sz="1050" spc="-1" strike="noStrike">
+              <a:solidFill>
+                <a:srgbClr val="000000"/>
+              </a:solidFill>
+              <a:latin typeface="DejaVu Serif"/>
+            </a:endParaRPr>
+          </a:p>
+        </p:txBody>
+      </p:sp>
+      <p:sp>
+        <p:nvSpPr>
+          <p:cNvPr id="128" name=""/>
+          <p:cNvSpPr txBox="1"/>
+          <p:nvPr/>
+        </p:nvSpPr>
+        <p:spPr>
+          <a:xfrm>
+            <a:off x="4897800" y="3448800"/>
+            <a:ext cx="4466160" cy="155880"/>
+          </a:xfrm>
+          <a:prstGeom prst="rect">
+            <a:avLst/>
+          </a:prstGeom>
+          <a:noFill/>
+          <a:ln w="0">
+            <a:noFill/>
+          </a:ln>
+        </p:spPr>
+        <p:txBody>
+          <a:bodyPr lIns="0" rIns="0" tIns="0" bIns="0" anchor="t">
+            <a:noAutofit/>
+          </a:bodyPr>
+          <a:p>
+            <a:r>
+              <a:rPr b="1" lang="en-US" sz="1050" spc="-1" strike="noStrike">
+                <a:solidFill>
+                  <a:srgbClr val="3d68ec"/>
+                </a:solidFill>
+                <a:latin typeface="Arial"/>
+                <a:ea typeface="Arial"/>
+              </a:rPr>
+              <a:t>Per onderdeel een eigen versie en ritme,</a:t>
+            </a:r>
+            <a:r>
+              <a:rPr b="0" lang="en-US" sz="1050" spc="-1" strike="noStrike">
+                <a:solidFill>
+                  <a:srgbClr val="1a1a2e"/>
+                </a:solidFill>
+                <a:latin typeface="Arial"/>
+                <a:ea typeface="Arial"/>
+              </a:rPr>
+              <a:t> openbaar en met de</a:t>
+            </a:r>
+            <a:endParaRPr b="0" lang="en-US" sz="1050" spc="-1" strike="noStrike">
+              <a:solidFill>
+                <a:srgbClr val="000000"/>
+              </a:solidFill>
+              <a:latin typeface="DejaVu Serif"/>
+            </a:endParaRPr>
+          </a:p>
+        </p:txBody>
+      </p:sp>
+      <p:sp>
+        <p:nvSpPr>
+          <p:cNvPr id="129" name=""/>
+          <p:cNvSpPr txBox="1"/>
+          <p:nvPr/>
+        </p:nvSpPr>
+        <p:spPr>
+          <a:xfrm>
+            <a:off x="4897800" y="3639240"/>
+            <a:ext cx="4082040" cy="155880"/>
+          </a:xfrm>
+          <a:prstGeom prst="rect">
+            <a:avLst/>
+          </a:prstGeom>
+          <a:noFill/>
+          <a:ln w="0">
+            <a:noFill/>
+          </a:ln>
+        </p:spPr>
+        <p:txBody>
+          <a:bodyPr lIns="0" rIns="0" tIns="0" bIns="0" anchor="t">
+            <a:noAutofit/>
+          </a:bodyPr>
+          <a:p>
+            <a:r>
+              <a:rPr b="0" lang="en-US" sz="1050" spc="-1" strike="noStrike">
+                <a:solidFill>
+                  <a:srgbClr val="1a1a2e"/>
+                </a:solidFill>
+                <a:latin typeface="Arial"/>
+                <a:ea typeface="Arial"/>
+              </a:rPr>
+              <a:t>reden bij elke wijziging. Een school of leverancier weet welke</a:t>
+            </a:r>
+            <a:endParaRPr b="0" lang="en-US" sz="1050" spc="-1" strike="noStrike">
+              <a:solidFill>
+                <a:srgbClr val="000000"/>
+              </a:solidFill>
+              <a:latin typeface="DejaVu Serif"/>
+            </a:endParaRPr>
+          </a:p>
+        </p:txBody>
+      </p:sp>
+      <p:sp>
+        <p:nvSpPr>
+          <p:cNvPr id="130" name=""/>
+          <p:cNvSpPr txBox="1"/>
+          <p:nvPr/>
+        </p:nvSpPr>
+        <p:spPr>
+          <a:xfrm>
+            <a:off x="4897800" y="3839400"/>
+            <a:ext cx="2556360" cy="155880"/>
+          </a:xfrm>
+          <a:prstGeom prst="rect">
+            <a:avLst/>
+          </a:prstGeom>
+          <a:noFill/>
+          <a:ln w="0">
+            <a:noFill/>
+          </a:ln>
+        </p:spPr>
+        <p:txBody>
+          <a:bodyPr lIns="0" rIns="0" tIns="0" bIns="0" anchor="t">
+            <a:noAutofit/>
+          </a:bodyPr>
+          <a:p>
+            <a:r>
+              <a:rPr b="0" lang="en-US" sz="1050" spc="-1" strike="noStrike">
+                <a:solidFill>
+                  <a:srgbClr val="1a1a2e"/>
+                </a:solidFill>
+                <a:latin typeface="Arial"/>
+                <a:ea typeface="Arial"/>
+              </a:rPr>
+              <a:t>versie hij leest en wat er veranderd is.</a:t>
+            </a:r>
+            <a:endParaRPr b="0" lang="en-US" sz="1050" spc="-1" strike="noStrike">
+              <a:solidFill>
+                <a:srgbClr val="000000"/>
+              </a:solidFill>
+              <a:latin typeface="DejaVu Serif"/>
+            </a:endParaRPr>
+          </a:p>
+        </p:txBody>
+      </p:sp>
+      <p:sp>
+        <p:nvSpPr>
+          <p:cNvPr id="131" name=""/>
           <p:cNvSpPr/>
           <p:nvPr/>
         </p:nvSpPr>
         <p:spPr>
           <a:xfrm>
-            <a:off x="4743360" y="2676240"/>
-            <a:ext cx="4134240" cy="1048320"/>
+            <a:off x="0" y="5257440"/>
+            <a:ext cx="9334800" cy="5258160"/>
           </a:xfrm>
           <a:custGeom>
             <a:avLst/>
@@ -9897,18 +9283,18 @@
             <a:ahLst/>
             <a:rect l="0" t="0" r="r" b="b"/>
             <a:pathLst>
-              <a:path w="11484" h="2912">
+              <a:path w="25930" h="14606">
                 <a:moveTo>
                   <a:pt x="0" y="0"/>
                 </a:moveTo>
                 <a:lnTo>
-                  <a:pt x="11484" y="0"/>
-                </a:lnTo>
-                <a:lnTo>
-                  <a:pt x="11484" y="2912"/>
-                </a:lnTo>
-                <a:lnTo>
-                  <a:pt x="0" y="2912"/>
+                  <a:pt x="25930" y="0"/>
+                </a:lnTo>
+                <a:lnTo>
+                  <a:pt x="25930" y="14606"/>
+                </a:lnTo>
+                <a:lnTo>
+                  <a:pt x="0" y="14606"/>
                 </a:lnTo>
                 <a:lnTo>
                   <a:pt x="0" y="0"/>
@@ -9940,993 +9326,14 @@
       </p:sp>
       <p:sp>
         <p:nvSpPr>
-          <p:cNvPr id="135" name=""/>
-          <p:cNvSpPr/>
-          <p:nvPr/>
-        </p:nvSpPr>
-        <p:spPr>
-          <a:xfrm>
-            <a:off x="4743360" y="2676240"/>
-            <a:ext cx="4134240" cy="38520"/>
-          </a:xfrm>
-          <a:custGeom>
-            <a:avLst/>
-            <a:gdLst/>
-            <a:ahLst/>
-            <a:rect l="0" t="0" r="r" b="b"/>
-            <a:pathLst>
-              <a:path w="11484" h="107">
-                <a:moveTo>
-                  <a:pt x="0" y="0"/>
-                </a:moveTo>
-                <a:lnTo>
-                  <a:pt x="11484" y="0"/>
-                </a:lnTo>
-                <a:lnTo>
-                  <a:pt x="11484" y="107"/>
-                </a:lnTo>
-                <a:lnTo>
-                  <a:pt x="0" y="107"/>
-                </a:lnTo>
-                <a:lnTo>
-                  <a:pt x="0" y="0"/>
-                </a:lnTo>
-                <a:close/>
-              </a:path>
-            </a:pathLst>
-          </a:custGeom>
-          <a:solidFill>
-            <a:srgbClr val="3d68ec"/>
-          </a:solidFill>
-          <a:ln w="0">
-            <a:noFill/>
-          </a:ln>
-        </p:spPr>
-        <p:txBody>
-          <a:bodyPr lIns="0" rIns="0" tIns="0" bIns="0" anchor="t">
-            <a:noAutofit/>
-          </a:bodyPr>
-          <a:p>
-            <a:endParaRPr b="0" lang="en-US" sz="2400" spc="-1" strike="noStrike">
-              <a:solidFill>
-                <a:srgbClr val="000000"/>
-              </a:solidFill>
-              <a:latin typeface="DejaVu Serif"/>
-            </a:endParaRPr>
-          </a:p>
-        </p:txBody>
-      </p:sp>
-      <p:sp>
-        <p:nvSpPr>
-          <p:cNvPr id="136" name=""/>
-          <p:cNvSpPr/>
-          <p:nvPr/>
-        </p:nvSpPr>
-        <p:spPr>
-          <a:xfrm>
-            <a:off x="4743360" y="3714480"/>
-            <a:ext cx="4134240" cy="10080"/>
-          </a:xfrm>
-          <a:custGeom>
-            <a:avLst/>
-            <a:gdLst/>
-            <a:ahLst/>
-            <a:rect l="0" t="0" r="r" b="b"/>
-            <a:pathLst>
-              <a:path w="11484" h="28">
-                <a:moveTo>
-                  <a:pt x="0" y="0"/>
-                </a:moveTo>
-                <a:lnTo>
-                  <a:pt x="11484" y="0"/>
-                </a:lnTo>
-                <a:lnTo>
-                  <a:pt x="11484" y="28"/>
-                </a:lnTo>
-                <a:lnTo>
-                  <a:pt x="0" y="28"/>
-                </a:lnTo>
-                <a:lnTo>
-                  <a:pt x="0" y="0"/>
-                </a:lnTo>
-                <a:close/>
-              </a:path>
-            </a:pathLst>
-          </a:custGeom>
-          <a:solidFill>
-            <a:srgbClr val="e5e7eb"/>
-          </a:solidFill>
-          <a:ln w="0">
-            <a:noFill/>
-          </a:ln>
-        </p:spPr>
-        <p:txBody>
-          <a:bodyPr lIns="0" rIns="0" tIns="0" bIns="0" anchor="t">
-            <a:noAutofit/>
-          </a:bodyPr>
-          <a:p>
-            <a:endParaRPr b="0" lang="en-US" sz="2400" spc="-1" strike="noStrike">
-              <a:solidFill>
-                <a:srgbClr val="000000"/>
-              </a:solidFill>
-              <a:latin typeface="DejaVu Serif"/>
-            </a:endParaRPr>
-          </a:p>
-        </p:txBody>
-      </p:sp>
-      <p:sp>
-        <p:nvSpPr>
-          <p:cNvPr id="137" name=""/>
-          <p:cNvSpPr/>
-          <p:nvPr/>
-        </p:nvSpPr>
-        <p:spPr>
-          <a:xfrm>
-            <a:off x="8867520" y="2676240"/>
-            <a:ext cx="10080" cy="1048320"/>
-          </a:xfrm>
-          <a:custGeom>
-            <a:avLst/>
-            <a:gdLst/>
-            <a:ahLst/>
-            <a:rect l="0" t="0" r="r" b="b"/>
-            <a:pathLst>
-              <a:path w="28" h="2912">
-                <a:moveTo>
-                  <a:pt x="0" y="106"/>
-                </a:moveTo>
-                <a:lnTo>
-                  <a:pt x="0" y="2912"/>
-                </a:lnTo>
-                <a:lnTo>
-                  <a:pt x="28" y="2912"/>
-                </a:lnTo>
-                <a:lnTo>
-                  <a:pt x="28" y="0"/>
-                </a:lnTo>
-                <a:lnTo>
-                  <a:pt x="0" y="106"/>
-                </a:lnTo>
-                <a:close/>
-              </a:path>
-            </a:pathLst>
-          </a:custGeom>
-          <a:solidFill>
-            <a:srgbClr val="e5e7eb"/>
-          </a:solidFill>
-          <a:ln w="0">
-            <a:noFill/>
-          </a:ln>
-        </p:spPr>
-        <p:txBody>
-          <a:bodyPr lIns="0" rIns="0" tIns="0" bIns="0" anchor="t">
-            <a:noAutofit/>
-          </a:bodyPr>
-          <a:p>
-            <a:endParaRPr b="0" lang="en-US" sz="2400" spc="-1" strike="noStrike">
-              <a:solidFill>
-                <a:srgbClr val="000000"/>
-              </a:solidFill>
-              <a:latin typeface="DejaVu Serif"/>
-            </a:endParaRPr>
-          </a:p>
-        </p:txBody>
-      </p:sp>
-      <p:sp>
-        <p:nvSpPr>
-          <p:cNvPr id="138" name=""/>
-          <p:cNvSpPr/>
-          <p:nvPr/>
-        </p:nvSpPr>
-        <p:spPr>
-          <a:xfrm>
-            <a:off x="4743360" y="2676240"/>
-            <a:ext cx="9720" cy="1048320"/>
-          </a:xfrm>
-          <a:custGeom>
-            <a:avLst/>
-            <a:gdLst/>
-            <a:ahLst/>
-            <a:rect l="0" t="0" r="r" b="b"/>
-            <a:pathLst>
-              <a:path w="27" h="2912">
-                <a:moveTo>
-                  <a:pt x="0" y="0"/>
-                </a:moveTo>
-                <a:lnTo>
-                  <a:pt x="0" y="2912"/>
-                </a:lnTo>
-                <a:lnTo>
-                  <a:pt x="27" y="2912"/>
-                </a:lnTo>
-                <a:lnTo>
-                  <a:pt x="27" y="106"/>
-                </a:lnTo>
-                <a:lnTo>
-                  <a:pt x="0" y="0"/>
-                </a:lnTo>
-                <a:close/>
-              </a:path>
-            </a:pathLst>
-          </a:custGeom>
-          <a:solidFill>
-            <a:srgbClr val="e5e7eb"/>
-          </a:solidFill>
-          <a:ln w="0">
-            <a:noFill/>
-          </a:ln>
-        </p:spPr>
-        <p:txBody>
-          <a:bodyPr lIns="0" rIns="0" tIns="0" bIns="0" anchor="t">
-            <a:noAutofit/>
-          </a:bodyPr>
-          <a:p>
-            <a:endParaRPr b="0" lang="en-US" sz="2400" spc="-1" strike="noStrike">
-              <a:solidFill>
-                <a:srgbClr val="000000"/>
-              </a:solidFill>
-              <a:latin typeface="DejaVu Serif"/>
-            </a:endParaRPr>
-          </a:p>
-        </p:txBody>
-      </p:sp>
-      <p:sp>
-        <p:nvSpPr>
-          <p:cNvPr id="139" name=""/>
-          <p:cNvSpPr/>
-          <p:nvPr/>
-        </p:nvSpPr>
-        <p:spPr>
-          <a:xfrm>
-            <a:off x="4982400" y="2982960"/>
-            <a:ext cx="33480" cy="33480"/>
-          </a:xfrm>
-          <a:custGeom>
-            <a:avLst/>
-            <a:gdLst/>
-            <a:ahLst/>
-            <a:rect l="0" t="0" r="r" b="b"/>
-            <a:pathLst>
-              <a:path w="93" h="93">
-                <a:moveTo>
-                  <a:pt x="93" y="47"/>
-                </a:moveTo>
-                <a:cubicBezTo>
-                  <a:pt x="93" y="53"/>
-                  <a:pt x="91" y="59"/>
-                  <a:pt x="89" y="64"/>
-                </a:cubicBezTo>
-                <a:cubicBezTo>
-                  <a:pt x="87" y="70"/>
-                  <a:pt x="83" y="75"/>
-                  <a:pt x="79" y="79"/>
-                </a:cubicBezTo>
-                <a:cubicBezTo>
-                  <a:pt x="75" y="83"/>
-                  <a:pt x="70" y="87"/>
-                  <a:pt x="64" y="89"/>
-                </a:cubicBezTo>
-                <a:cubicBezTo>
-                  <a:pt x="59" y="91"/>
-                  <a:pt x="53" y="93"/>
-                  <a:pt x="47" y="93"/>
-                </a:cubicBezTo>
-                <a:cubicBezTo>
-                  <a:pt x="40" y="93"/>
-                  <a:pt x="35" y="91"/>
-                  <a:pt x="29" y="89"/>
-                </a:cubicBezTo>
-                <a:cubicBezTo>
-                  <a:pt x="23" y="87"/>
-                  <a:pt x="18" y="83"/>
-                  <a:pt x="14" y="79"/>
-                </a:cubicBezTo>
-                <a:cubicBezTo>
-                  <a:pt x="10" y="75"/>
-                  <a:pt x="5" y="70"/>
-                  <a:pt x="3" y="64"/>
-                </a:cubicBezTo>
-                <a:cubicBezTo>
-                  <a:pt x="1" y="59"/>
-                  <a:pt x="0" y="53"/>
-                  <a:pt x="0" y="47"/>
-                </a:cubicBezTo>
-                <a:cubicBezTo>
-                  <a:pt x="0" y="39"/>
-                  <a:pt x="1" y="34"/>
-                  <a:pt x="3" y="28"/>
-                </a:cubicBezTo>
-                <a:cubicBezTo>
-                  <a:pt x="5" y="22"/>
-                  <a:pt x="10" y="17"/>
-                  <a:pt x="14" y="13"/>
-                </a:cubicBezTo>
-                <a:cubicBezTo>
-                  <a:pt x="18" y="9"/>
-                  <a:pt x="23" y="5"/>
-                  <a:pt x="29" y="3"/>
-                </a:cubicBezTo>
-                <a:cubicBezTo>
-                  <a:pt x="35" y="1"/>
-                  <a:pt x="40" y="0"/>
-                  <a:pt x="47" y="0"/>
-                </a:cubicBezTo>
-                <a:cubicBezTo>
-                  <a:pt x="53" y="0"/>
-                  <a:pt x="59" y="1"/>
-                  <a:pt x="64" y="3"/>
-                </a:cubicBezTo>
-                <a:cubicBezTo>
-                  <a:pt x="70" y="5"/>
-                  <a:pt x="75" y="9"/>
-                  <a:pt x="79" y="13"/>
-                </a:cubicBezTo>
-                <a:cubicBezTo>
-                  <a:pt x="83" y="17"/>
-                  <a:pt x="87" y="22"/>
-                  <a:pt x="89" y="28"/>
-                </a:cubicBezTo>
-                <a:cubicBezTo>
-                  <a:pt x="91" y="34"/>
-                  <a:pt x="93" y="39"/>
-                  <a:pt x="93" y="47"/>
-                </a:cubicBezTo>
-                <a:close/>
-              </a:path>
-            </a:pathLst>
-          </a:custGeom>
-          <a:solidFill>
-            <a:srgbClr val="3d68ec"/>
-          </a:solidFill>
-          <a:ln w="0">
-            <a:noFill/>
-          </a:ln>
-        </p:spPr>
-        <p:txBody>
-          <a:bodyPr lIns="0" rIns="0" tIns="0" bIns="0" anchor="t">
-            <a:noAutofit/>
-          </a:bodyPr>
-          <a:p>
-            <a:endParaRPr b="0" lang="en-US" sz="2400" spc="-1" strike="noStrike">
-              <a:solidFill>
-                <a:srgbClr val="000000"/>
-              </a:solidFill>
-              <a:latin typeface="DejaVu Serif"/>
-            </a:endParaRPr>
-          </a:p>
-        </p:txBody>
-      </p:sp>
-      <p:sp>
-        <p:nvSpPr>
-          <p:cNvPr id="140" name=""/>
-          <p:cNvSpPr/>
-          <p:nvPr/>
-        </p:nvSpPr>
-        <p:spPr>
-          <a:xfrm>
-            <a:off x="5098320" y="2982960"/>
-            <a:ext cx="33480" cy="33480"/>
-          </a:xfrm>
-          <a:custGeom>
-            <a:avLst/>
-            <a:gdLst/>
-            <a:ahLst/>
-            <a:rect l="0" t="0" r="r" b="b"/>
-            <a:pathLst>
-              <a:path w="93" h="93">
-                <a:moveTo>
-                  <a:pt x="93" y="47"/>
-                </a:moveTo>
-                <a:cubicBezTo>
-                  <a:pt x="93" y="53"/>
-                  <a:pt x="92" y="59"/>
-                  <a:pt x="89" y="64"/>
-                </a:cubicBezTo>
-                <a:cubicBezTo>
-                  <a:pt x="87" y="70"/>
-                  <a:pt x="84" y="75"/>
-                  <a:pt x="79" y="79"/>
-                </a:cubicBezTo>
-                <a:cubicBezTo>
-                  <a:pt x="75" y="83"/>
-                  <a:pt x="70" y="87"/>
-                  <a:pt x="64" y="89"/>
-                </a:cubicBezTo>
-                <a:cubicBezTo>
-                  <a:pt x="59" y="91"/>
-                  <a:pt x="53" y="93"/>
-                  <a:pt x="46" y="93"/>
-                </a:cubicBezTo>
-                <a:cubicBezTo>
-                  <a:pt x="40" y="93"/>
-                  <a:pt x="34" y="91"/>
-                  <a:pt x="28" y="89"/>
-                </a:cubicBezTo>
-                <a:cubicBezTo>
-                  <a:pt x="22" y="87"/>
-                  <a:pt x="17" y="83"/>
-                  <a:pt x="13" y="79"/>
-                </a:cubicBezTo>
-                <a:cubicBezTo>
-                  <a:pt x="9" y="75"/>
-                  <a:pt x="5" y="70"/>
-                  <a:pt x="3" y="64"/>
-                </a:cubicBezTo>
-                <a:cubicBezTo>
-                  <a:pt x="1" y="59"/>
-                  <a:pt x="0" y="53"/>
-                  <a:pt x="0" y="47"/>
-                </a:cubicBezTo>
-                <a:cubicBezTo>
-                  <a:pt x="0" y="39"/>
-                  <a:pt x="1" y="34"/>
-                  <a:pt x="3" y="28"/>
-                </a:cubicBezTo>
-                <a:cubicBezTo>
-                  <a:pt x="5" y="22"/>
-                  <a:pt x="9" y="17"/>
-                  <a:pt x="13" y="13"/>
-                </a:cubicBezTo>
-                <a:cubicBezTo>
-                  <a:pt x="17" y="9"/>
-                  <a:pt x="22" y="5"/>
-                  <a:pt x="28" y="3"/>
-                </a:cubicBezTo>
-                <a:cubicBezTo>
-                  <a:pt x="34" y="1"/>
-                  <a:pt x="40" y="0"/>
-                  <a:pt x="46" y="0"/>
-                </a:cubicBezTo>
-                <a:cubicBezTo>
-                  <a:pt x="53" y="0"/>
-                  <a:pt x="59" y="1"/>
-                  <a:pt x="64" y="3"/>
-                </a:cubicBezTo>
-                <a:cubicBezTo>
-                  <a:pt x="70" y="5"/>
-                  <a:pt x="75" y="9"/>
-                  <a:pt x="79" y="13"/>
-                </a:cubicBezTo>
-                <a:cubicBezTo>
-                  <a:pt x="84" y="17"/>
-                  <a:pt x="87" y="22"/>
-                  <a:pt x="89" y="28"/>
-                </a:cubicBezTo>
-                <a:cubicBezTo>
-                  <a:pt x="92" y="34"/>
-                  <a:pt x="93" y="39"/>
-                  <a:pt x="93" y="47"/>
-                </a:cubicBezTo>
-                <a:close/>
-              </a:path>
-            </a:pathLst>
-          </a:custGeom>
-          <a:solidFill>
-            <a:srgbClr val="3d68ec"/>
-          </a:solidFill>
-          <a:ln w="0">
-            <a:noFill/>
-          </a:ln>
-        </p:spPr>
-        <p:txBody>
-          <a:bodyPr lIns="0" rIns="0" tIns="0" bIns="0" anchor="t">
-            <a:noAutofit/>
-          </a:bodyPr>
-          <a:p>
-            <a:endParaRPr b="0" lang="en-US" sz="2400" spc="-1" strike="noStrike">
-              <a:solidFill>
-                <a:srgbClr val="000000"/>
-              </a:solidFill>
-              <a:latin typeface="DejaVu Serif"/>
-            </a:endParaRPr>
-          </a:p>
-        </p:txBody>
-      </p:sp>
-      <p:sp>
-        <p:nvSpPr>
-          <p:cNvPr id="141" name=""/>
-          <p:cNvSpPr/>
-          <p:nvPr/>
-        </p:nvSpPr>
-        <p:spPr>
-          <a:xfrm>
-            <a:off x="5040360" y="2982960"/>
-            <a:ext cx="33480" cy="33480"/>
-          </a:xfrm>
-          <a:custGeom>
-            <a:avLst/>
-            <a:gdLst/>
-            <a:ahLst/>
-            <a:rect l="0" t="0" r="r" b="b"/>
-            <a:pathLst>
-              <a:path w="93" h="93">
-                <a:moveTo>
-                  <a:pt x="93" y="47"/>
-                </a:moveTo>
-                <a:cubicBezTo>
-                  <a:pt x="93" y="53"/>
-                  <a:pt x="91" y="59"/>
-                  <a:pt x="89" y="64"/>
-                </a:cubicBezTo>
-                <a:cubicBezTo>
-                  <a:pt x="87" y="70"/>
-                  <a:pt x="83" y="75"/>
-                  <a:pt x="79" y="79"/>
-                </a:cubicBezTo>
-                <a:cubicBezTo>
-                  <a:pt x="75" y="83"/>
-                  <a:pt x="70" y="87"/>
-                  <a:pt x="64" y="89"/>
-                </a:cubicBezTo>
-                <a:cubicBezTo>
-                  <a:pt x="59" y="91"/>
-                  <a:pt x="53" y="93"/>
-                  <a:pt x="47" y="93"/>
-                </a:cubicBezTo>
-                <a:cubicBezTo>
-                  <a:pt x="40" y="93"/>
-                  <a:pt x="35" y="91"/>
-                  <a:pt x="28" y="89"/>
-                </a:cubicBezTo>
-                <a:cubicBezTo>
-                  <a:pt x="22" y="87"/>
-                  <a:pt x="17" y="83"/>
-                  <a:pt x="13" y="79"/>
-                </a:cubicBezTo>
-                <a:cubicBezTo>
-                  <a:pt x="9" y="75"/>
-                  <a:pt x="5" y="70"/>
-                  <a:pt x="3" y="64"/>
-                </a:cubicBezTo>
-                <a:cubicBezTo>
-                  <a:pt x="1" y="59"/>
-                  <a:pt x="0" y="53"/>
-                  <a:pt x="0" y="47"/>
-                </a:cubicBezTo>
-                <a:cubicBezTo>
-                  <a:pt x="0" y="39"/>
-                  <a:pt x="1" y="34"/>
-                  <a:pt x="3" y="28"/>
-                </a:cubicBezTo>
-                <a:cubicBezTo>
-                  <a:pt x="5" y="22"/>
-                  <a:pt x="9" y="17"/>
-                  <a:pt x="13" y="13"/>
-                </a:cubicBezTo>
-                <a:cubicBezTo>
-                  <a:pt x="17" y="9"/>
-                  <a:pt x="22" y="5"/>
-                  <a:pt x="28" y="3"/>
-                </a:cubicBezTo>
-                <a:cubicBezTo>
-                  <a:pt x="35" y="1"/>
-                  <a:pt x="40" y="0"/>
-                  <a:pt x="47" y="0"/>
-                </a:cubicBezTo>
-                <a:cubicBezTo>
-                  <a:pt x="53" y="0"/>
-                  <a:pt x="59" y="1"/>
-                  <a:pt x="64" y="3"/>
-                </a:cubicBezTo>
-                <a:cubicBezTo>
-                  <a:pt x="70" y="5"/>
-                  <a:pt x="75" y="9"/>
-                  <a:pt x="79" y="13"/>
-                </a:cubicBezTo>
-                <a:cubicBezTo>
-                  <a:pt x="83" y="17"/>
-                  <a:pt x="87" y="22"/>
-                  <a:pt x="89" y="28"/>
-                </a:cubicBezTo>
-                <a:cubicBezTo>
-                  <a:pt x="91" y="34"/>
-                  <a:pt x="93" y="39"/>
-                  <a:pt x="93" y="47"/>
-                </a:cubicBezTo>
-                <a:close/>
-              </a:path>
-            </a:pathLst>
-          </a:custGeom>
-          <a:solidFill>
-            <a:srgbClr val="3d68ec"/>
-          </a:solidFill>
-          <a:ln w="0">
-            <a:noFill/>
-          </a:ln>
-        </p:spPr>
-        <p:txBody>
-          <a:bodyPr lIns="0" rIns="0" tIns="0" bIns="0" anchor="t">
-            <a:noAutofit/>
-          </a:bodyPr>
-          <a:p>
-            <a:endParaRPr b="0" lang="en-US" sz="2400" spc="-1" strike="noStrike">
-              <a:solidFill>
-                <a:srgbClr val="000000"/>
-              </a:solidFill>
-              <a:latin typeface="DejaVu Serif"/>
-            </a:endParaRPr>
-          </a:p>
-        </p:txBody>
-      </p:sp>
-      <p:sp>
-        <p:nvSpPr>
-          <p:cNvPr id="142" name=""/>
-          <p:cNvSpPr/>
-          <p:nvPr/>
-        </p:nvSpPr>
-        <p:spPr>
-          <a:xfrm>
-            <a:off x="4940640" y="2883240"/>
-            <a:ext cx="232560" cy="232560"/>
-          </a:xfrm>
-          <a:custGeom>
-            <a:avLst/>
-            <a:gdLst/>
-            <a:ahLst/>
-            <a:rect l="0" t="0" r="r" b="b"/>
-            <a:pathLst>
-              <a:path w="646" h="646">
-                <a:moveTo>
-                  <a:pt x="324" y="646"/>
-                </a:moveTo>
-                <a:cubicBezTo>
-                  <a:pt x="302" y="646"/>
-                  <a:pt x="282" y="644"/>
-                  <a:pt x="261" y="640"/>
-                </a:cubicBezTo>
-                <a:cubicBezTo>
-                  <a:pt x="240" y="635"/>
-                  <a:pt x="220" y="629"/>
-                  <a:pt x="200" y="621"/>
-                </a:cubicBezTo>
-                <a:cubicBezTo>
-                  <a:pt x="181" y="613"/>
-                  <a:pt x="162" y="603"/>
-                  <a:pt x="145" y="591"/>
-                </a:cubicBezTo>
-                <a:cubicBezTo>
-                  <a:pt x="127" y="580"/>
-                  <a:pt x="110" y="566"/>
-                  <a:pt x="95" y="551"/>
-                </a:cubicBezTo>
-                <a:cubicBezTo>
-                  <a:pt x="80" y="536"/>
-                  <a:pt x="67" y="520"/>
-                  <a:pt x="55" y="503"/>
-                </a:cubicBezTo>
-                <a:cubicBezTo>
-                  <a:pt x="43" y="485"/>
-                  <a:pt x="33" y="466"/>
-                  <a:pt x="25" y="447"/>
-                </a:cubicBezTo>
-                <a:cubicBezTo>
-                  <a:pt x="17" y="427"/>
-                  <a:pt x="11" y="407"/>
-                  <a:pt x="7" y="386"/>
-                </a:cubicBezTo>
-                <a:cubicBezTo>
-                  <a:pt x="3" y="366"/>
-                  <a:pt x="0" y="345"/>
-                  <a:pt x="0" y="324"/>
-                </a:cubicBezTo>
-                <a:cubicBezTo>
-                  <a:pt x="0" y="302"/>
-                  <a:pt x="3" y="282"/>
-                  <a:pt x="7" y="261"/>
-                </a:cubicBezTo>
-                <a:cubicBezTo>
-                  <a:pt x="11" y="240"/>
-                  <a:pt x="17" y="220"/>
-                  <a:pt x="25" y="200"/>
-                </a:cubicBezTo>
-                <a:cubicBezTo>
-                  <a:pt x="33" y="181"/>
-                  <a:pt x="43" y="162"/>
-                  <a:pt x="55" y="145"/>
-                </a:cubicBezTo>
-                <a:cubicBezTo>
-                  <a:pt x="67" y="127"/>
-                  <a:pt x="80" y="111"/>
-                  <a:pt x="95" y="96"/>
-                </a:cubicBezTo>
-                <a:cubicBezTo>
-                  <a:pt x="110" y="81"/>
-                  <a:pt x="127" y="68"/>
-                  <a:pt x="145" y="56"/>
-                </a:cubicBezTo>
-                <a:cubicBezTo>
-                  <a:pt x="162" y="44"/>
-                  <a:pt x="181" y="33"/>
-                  <a:pt x="200" y="25"/>
-                </a:cubicBezTo>
-                <a:cubicBezTo>
-                  <a:pt x="220" y="17"/>
-                  <a:pt x="240" y="11"/>
-                  <a:pt x="261" y="7"/>
-                </a:cubicBezTo>
-                <a:cubicBezTo>
-                  <a:pt x="282" y="3"/>
-                  <a:pt x="302" y="0"/>
-                  <a:pt x="324" y="0"/>
-                </a:cubicBezTo>
-                <a:cubicBezTo>
-                  <a:pt x="345" y="0"/>
-                  <a:pt x="366" y="3"/>
-                  <a:pt x="386" y="7"/>
-                </a:cubicBezTo>
-                <a:cubicBezTo>
-                  <a:pt x="407" y="11"/>
-                  <a:pt x="427" y="17"/>
-                  <a:pt x="447" y="25"/>
-                </a:cubicBezTo>
-                <a:cubicBezTo>
-                  <a:pt x="466" y="33"/>
-                  <a:pt x="485" y="44"/>
-                  <a:pt x="503" y="56"/>
-                </a:cubicBezTo>
-                <a:cubicBezTo>
-                  <a:pt x="520" y="68"/>
-                  <a:pt x="536" y="81"/>
-                  <a:pt x="551" y="96"/>
-                </a:cubicBezTo>
-                <a:cubicBezTo>
-                  <a:pt x="566" y="111"/>
-                  <a:pt x="580" y="127"/>
-                  <a:pt x="591" y="145"/>
-                </a:cubicBezTo>
-                <a:cubicBezTo>
-                  <a:pt x="603" y="162"/>
-                  <a:pt x="613" y="181"/>
-                  <a:pt x="621" y="200"/>
-                </a:cubicBezTo>
-                <a:cubicBezTo>
-                  <a:pt x="629" y="220"/>
-                  <a:pt x="635" y="240"/>
-                  <a:pt x="640" y="261"/>
-                </a:cubicBezTo>
-                <a:cubicBezTo>
-                  <a:pt x="644" y="282"/>
-                  <a:pt x="646" y="302"/>
-                  <a:pt x="646" y="324"/>
-                </a:cubicBezTo>
-                <a:cubicBezTo>
-                  <a:pt x="646" y="345"/>
-                  <a:pt x="644" y="366"/>
-                  <a:pt x="639" y="386"/>
-                </a:cubicBezTo>
-                <a:cubicBezTo>
-                  <a:pt x="635" y="407"/>
-                  <a:pt x="629" y="427"/>
-                  <a:pt x="621" y="447"/>
-                </a:cubicBezTo>
-                <a:cubicBezTo>
-                  <a:pt x="613" y="466"/>
-                  <a:pt x="603" y="485"/>
-                  <a:pt x="591" y="502"/>
-                </a:cubicBezTo>
-                <a:cubicBezTo>
-                  <a:pt x="580" y="520"/>
-                  <a:pt x="566" y="536"/>
-                  <a:pt x="551" y="551"/>
-                </a:cubicBezTo>
-                <a:cubicBezTo>
-                  <a:pt x="536" y="566"/>
-                  <a:pt x="520" y="580"/>
-                  <a:pt x="502" y="591"/>
-                </a:cubicBezTo>
-                <a:cubicBezTo>
-                  <a:pt x="485" y="603"/>
-                  <a:pt x="466" y="613"/>
-                  <a:pt x="447" y="621"/>
-                </a:cubicBezTo>
-                <a:cubicBezTo>
-                  <a:pt x="427" y="629"/>
-                  <a:pt x="407" y="635"/>
-                  <a:pt x="386" y="639"/>
-                </a:cubicBezTo>
-                <a:cubicBezTo>
-                  <a:pt x="366" y="644"/>
-                  <a:pt x="345" y="646"/>
-                  <a:pt x="324" y="646"/>
-                </a:cubicBezTo>
-                <a:moveTo>
-                  <a:pt x="324" y="47"/>
-                </a:moveTo>
-                <a:cubicBezTo>
-                  <a:pt x="305" y="47"/>
-                  <a:pt x="288" y="49"/>
-                  <a:pt x="270" y="53"/>
-                </a:cubicBezTo>
-                <a:cubicBezTo>
-                  <a:pt x="252" y="56"/>
-                  <a:pt x="235" y="62"/>
-                  <a:pt x="218" y="69"/>
-                </a:cubicBezTo>
-                <a:cubicBezTo>
-                  <a:pt x="201" y="75"/>
-                  <a:pt x="185" y="84"/>
-                  <a:pt x="170" y="94"/>
-                </a:cubicBezTo>
-                <a:cubicBezTo>
-                  <a:pt x="155" y="104"/>
-                  <a:pt x="141" y="116"/>
-                  <a:pt x="128" y="128"/>
-                </a:cubicBezTo>
-                <a:cubicBezTo>
-                  <a:pt x="115" y="141"/>
-                  <a:pt x="103" y="155"/>
-                  <a:pt x="93" y="170"/>
-                </a:cubicBezTo>
-                <a:cubicBezTo>
-                  <a:pt x="83" y="185"/>
-                  <a:pt x="74" y="201"/>
-                  <a:pt x="68" y="218"/>
-                </a:cubicBezTo>
-                <a:cubicBezTo>
-                  <a:pt x="61" y="235"/>
-                  <a:pt x="55" y="252"/>
-                  <a:pt x="52" y="270"/>
-                </a:cubicBezTo>
-                <a:cubicBezTo>
-                  <a:pt x="48" y="288"/>
-                  <a:pt x="46" y="305"/>
-                  <a:pt x="46" y="324"/>
-                </a:cubicBezTo>
-                <a:cubicBezTo>
-                  <a:pt x="46" y="342"/>
-                  <a:pt x="48" y="360"/>
-                  <a:pt x="52" y="377"/>
-                </a:cubicBezTo>
-                <a:cubicBezTo>
-                  <a:pt x="55" y="395"/>
-                  <a:pt x="61" y="413"/>
-                  <a:pt x="68" y="429"/>
-                </a:cubicBezTo>
-                <a:cubicBezTo>
-                  <a:pt x="74" y="446"/>
-                  <a:pt x="83" y="462"/>
-                  <a:pt x="93" y="477"/>
-                </a:cubicBezTo>
-                <a:cubicBezTo>
-                  <a:pt x="103" y="492"/>
-                  <a:pt x="115" y="506"/>
-                  <a:pt x="128" y="519"/>
-                </a:cubicBezTo>
-                <a:cubicBezTo>
-                  <a:pt x="141" y="532"/>
-                  <a:pt x="155" y="543"/>
-                  <a:pt x="170" y="553"/>
-                </a:cubicBezTo>
-                <a:cubicBezTo>
-                  <a:pt x="185" y="563"/>
-                  <a:pt x="201" y="572"/>
-                  <a:pt x="218" y="579"/>
-                </a:cubicBezTo>
-                <a:cubicBezTo>
-                  <a:pt x="235" y="586"/>
-                  <a:pt x="252" y="591"/>
-                  <a:pt x="270" y="594"/>
-                </a:cubicBezTo>
-                <a:cubicBezTo>
-                  <a:pt x="288" y="598"/>
-                  <a:pt x="305" y="600"/>
-                  <a:pt x="324" y="600"/>
-                </a:cubicBezTo>
-                <a:cubicBezTo>
-                  <a:pt x="342" y="600"/>
-                  <a:pt x="360" y="598"/>
-                  <a:pt x="377" y="594"/>
-                </a:cubicBezTo>
-                <a:cubicBezTo>
-                  <a:pt x="395" y="591"/>
-                  <a:pt x="413" y="586"/>
-                  <a:pt x="429" y="579"/>
-                </a:cubicBezTo>
-                <a:cubicBezTo>
-                  <a:pt x="446" y="572"/>
-                  <a:pt x="462" y="563"/>
-                  <a:pt x="477" y="553"/>
-                </a:cubicBezTo>
-                <a:cubicBezTo>
-                  <a:pt x="492" y="543"/>
-                  <a:pt x="506" y="532"/>
-                  <a:pt x="519" y="519"/>
-                </a:cubicBezTo>
-                <a:cubicBezTo>
-                  <a:pt x="532" y="506"/>
-                  <a:pt x="543" y="492"/>
-                  <a:pt x="553" y="477"/>
-                </a:cubicBezTo>
-                <a:cubicBezTo>
-                  <a:pt x="563" y="462"/>
-                  <a:pt x="572" y="446"/>
-                  <a:pt x="579" y="429"/>
-                </a:cubicBezTo>
-                <a:cubicBezTo>
-                  <a:pt x="586" y="413"/>
-                  <a:pt x="591" y="395"/>
-                  <a:pt x="594" y="377"/>
-                </a:cubicBezTo>
-                <a:cubicBezTo>
-                  <a:pt x="598" y="360"/>
-                  <a:pt x="600" y="342"/>
-                  <a:pt x="600" y="324"/>
-                </a:cubicBezTo>
-                <a:cubicBezTo>
-                  <a:pt x="600" y="305"/>
-                  <a:pt x="598" y="288"/>
-                  <a:pt x="594" y="270"/>
-                </a:cubicBezTo>
-                <a:cubicBezTo>
-                  <a:pt x="591" y="252"/>
-                  <a:pt x="586" y="235"/>
-                  <a:pt x="579" y="218"/>
-                </a:cubicBezTo>
-                <a:cubicBezTo>
-                  <a:pt x="572" y="201"/>
-                  <a:pt x="563" y="185"/>
-                  <a:pt x="553" y="170"/>
-                </a:cubicBezTo>
-                <a:cubicBezTo>
-                  <a:pt x="543" y="155"/>
-                  <a:pt x="532" y="141"/>
-                  <a:pt x="519" y="128"/>
-                </a:cubicBezTo>
-                <a:cubicBezTo>
-                  <a:pt x="506" y="116"/>
-                  <a:pt x="492" y="104"/>
-                  <a:pt x="477" y="94"/>
-                </a:cubicBezTo>
-                <a:cubicBezTo>
-                  <a:pt x="462" y="84"/>
-                  <a:pt x="446" y="76"/>
-                  <a:pt x="429" y="69"/>
-                </a:cubicBezTo>
-                <a:cubicBezTo>
-                  <a:pt x="412" y="62"/>
-                  <a:pt x="395" y="56"/>
-                  <a:pt x="377" y="53"/>
-                </a:cubicBezTo>
-                <a:cubicBezTo>
-                  <a:pt x="360" y="49"/>
-                  <a:pt x="342" y="48"/>
-                  <a:pt x="324" y="47"/>
-                </a:cubicBezTo>
-                <a:close/>
-              </a:path>
-            </a:pathLst>
-          </a:custGeom>
-          <a:solidFill>
-            <a:srgbClr val="3d68ec"/>
-          </a:solidFill>
-          <a:ln w="0">
-            <a:noFill/>
-          </a:ln>
-        </p:spPr>
-        <p:txBody>
-          <a:bodyPr lIns="0" rIns="0" tIns="0" bIns="0" anchor="t">
-            <a:noAutofit/>
-          </a:bodyPr>
-          <a:p>
-            <a:endParaRPr b="0" lang="en-US" sz="2400" spc="-1" strike="noStrike">
-              <a:solidFill>
-                <a:srgbClr val="000000"/>
-              </a:solidFill>
-              <a:latin typeface="DejaVu Serif"/>
-            </a:endParaRPr>
-          </a:p>
-        </p:txBody>
-      </p:sp>
-      <p:sp>
-        <p:nvSpPr>
-          <p:cNvPr id="143" name=""/>
+          <p:cNvPr id="132" name=""/>
           <p:cNvSpPr txBox="1"/>
           <p:nvPr/>
         </p:nvSpPr>
         <p:spPr>
           <a:xfrm>
-            <a:off x="634320" y="3377880"/>
-            <a:ext cx="1811160" cy="160560"/>
+            <a:off x="1738440" y="4889880"/>
+            <a:ext cx="6521760" cy="151200"/>
           </a:xfrm>
           <a:prstGeom prst="rect">
             <a:avLst/>
@@ -10942,536 +9349,16 @@
           </a:bodyPr>
           <a:p>
             <a:r>
-              <a:rPr b="0" lang="en-US" sz="1080" spc="-1" strike="noStrike">
+              <a:rPr b="0" lang="en-US" sz="1020" spc="-1" strike="noStrike">
                 <a:solidFill>
-                  <a:srgbClr val="1a1a2e"/>
+                  <a:srgbClr val="6b7280"/>
                 </a:solidFill>
                 <a:latin typeface="Arial"/>
                 <a:ea typeface="Arial"/>
               </a:rPr>
-              <a:t>inhoud blijft van de school</a:t>
+              <a:t>Status: concept. Richting en eerste invulling liggen er; de details scherpen wij aan met leveranciers.</a:t>
             </a:r>
-            <a:endParaRPr b="0" lang="en-US" sz="1080" spc="-1" strike="noStrike">
-              <a:solidFill>
-                <a:srgbClr val="000000"/>
-              </a:solidFill>
-              <a:latin typeface="DejaVu Serif"/>
-            </a:endParaRPr>
-          </a:p>
-        </p:txBody>
-      </p:sp>
-      <p:sp>
-        <p:nvSpPr>
-          <p:cNvPr id="144" name=""/>
-          <p:cNvSpPr txBox="1"/>
-          <p:nvPr/>
-        </p:nvSpPr>
-        <p:spPr>
-          <a:xfrm>
-            <a:off x="5185440" y="2967840"/>
-            <a:ext cx="2376720" cy="160560"/>
-          </a:xfrm>
-          <a:prstGeom prst="rect">
-            <a:avLst/>
-          </a:prstGeom>
-          <a:noFill/>
-          <a:ln w="0">
-            <a:noFill/>
-          </a:ln>
-        </p:spPr>
-        <p:txBody>
-          <a:bodyPr lIns="0" rIns="0" tIns="0" bIns="0" anchor="t">
-            <a:noAutofit/>
-          </a:bodyPr>
-          <a:p>
-            <a:r>
-              <a:rPr b="1" lang="en-US" sz="1080" spc="-1" strike="noStrike">
-                <a:solidFill>
-                  <a:srgbClr val="3d68ec"/>
-                </a:solidFill>
-                <a:latin typeface="Arial"/>
-                <a:ea typeface="Arial"/>
-              </a:rPr>
-              <a:t>Status: concept in afstemming</a:t>
-            </a:r>
-            <a:endParaRPr b="0" lang="en-US" sz="1080" spc="-1" strike="noStrike">
-              <a:solidFill>
-                <a:srgbClr val="000000"/>
-              </a:solidFill>
-              <a:latin typeface="DejaVu Serif"/>
-            </a:endParaRPr>
-          </a:p>
-        </p:txBody>
-      </p:sp>
-      <p:sp>
-        <p:nvSpPr>
-          <p:cNvPr id="145" name=""/>
-          <p:cNvSpPr txBox="1"/>
-          <p:nvPr/>
-        </p:nvSpPr>
-        <p:spPr>
-          <a:xfrm>
-            <a:off x="4920480" y="3177720"/>
-            <a:ext cx="4116960" cy="160560"/>
-          </a:xfrm>
-          <a:prstGeom prst="rect">
-            <a:avLst/>
-          </a:prstGeom>
-          <a:noFill/>
-          <a:ln w="0">
-            <a:noFill/>
-          </a:ln>
-        </p:spPr>
-        <p:txBody>
-          <a:bodyPr lIns="0" rIns="0" tIns="0" bIns="0" anchor="t">
-            <a:noAutofit/>
-          </a:bodyPr>
-          <a:p>
-            <a:r>
-              <a:rPr b="0" lang="en-US" sz="1080" spc="-1" strike="noStrike">
-                <a:solidFill>
-                  <a:srgbClr val="1a1a2e"/>
-                </a:solidFill>
-                <a:latin typeface="Arial"/>
-                <a:ea typeface="Arial"/>
-              </a:rPr>
-              <a:t>richting en eerste invulling liggen er, de details worden met</a:t>
-            </a:r>
-            <a:endParaRPr b="0" lang="en-US" sz="1080" spc="-1" strike="noStrike">
-              <a:solidFill>
-                <a:srgbClr val="000000"/>
-              </a:solidFill>
-              <a:latin typeface="DejaVu Serif"/>
-            </a:endParaRPr>
-          </a:p>
-        </p:txBody>
-      </p:sp>
-      <p:sp>
-        <p:nvSpPr>
-          <p:cNvPr id="146" name=""/>
-          <p:cNvSpPr/>
-          <p:nvPr/>
-        </p:nvSpPr>
-        <p:spPr>
-          <a:xfrm>
-            <a:off x="456840" y="3895560"/>
-            <a:ext cx="8420760" cy="571680"/>
-          </a:xfrm>
-          <a:custGeom>
-            <a:avLst/>
-            <a:gdLst/>
-            <a:ahLst/>
-            <a:rect l="0" t="0" r="r" b="b"/>
-            <a:pathLst>
-              <a:path w="23391" h="1588">
-                <a:moveTo>
-                  <a:pt x="0" y="0"/>
-                </a:moveTo>
-                <a:lnTo>
-                  <a:pt x="23391" y="0"/>
-                </a:lnTo>
-                <a:lnTo>
-                  <a:pt x="23391" y="1588"/>
-                </a:lnTo>
-                <a:lnTo>
-                  <a:pt x="0" y="1588"/>
-                </a:lnTo>
-                <a:lnTo>
-                  <a:pt x="0" y="0"/>
-                </a:lnTo>
-                <a:close/>
-              </a:path>
-            </a:pathLst>
-          </a:custGeom>
-          <a:solidFill>
-            <a:srgbClr val="ffffff"/>
-          </a:solidFill>
-          <a:ln w="0">
-            <a:noFill/>
-          </a:ln>
-        </p:spPr>
-        <p:txBody>
-          <a:bodyPr lIns="0" rIns="0" tIns="0" bIns="0" anchor="t">
-            <a:noAutofit/>
-          </a:bodyPr>
-          <a:p>
-            <a:endParaRPr b="0" lang="en-US" sz="2400" spc="-1" strike="noStrike">
-              <a:solidFill>
-                <a:srgbClr val="000000"/>
-              </a:solidFill>
-              <a:latin typeface="DejaVu Serif"/>
-            </a:endParaRPr>
-          </a:p>
-        </p:txBody>
-      </p:sp>
-      <p:sp>
-        <p:nvSpPr>
-          <p:cNvPr id="147" name=""/>
-          <p:cNvSpPr/>
-          <p:nvPr/>
-        </p:nvSpPr>
-        <p:spPr>
-          <a:xfrm>
-            <a:off x="456840" y="3895560"/>
-            <a:ext cx="8420760" cy="38520"/>
-          </a:xfrm>
-          <a:custGeom>
-            <a:avLst/>
-            <a:gdLst/>
-            <a:ahLst/>
-            <a:rect l="0" t="0" r="r" b="b"/>
-            <a:pathLst>
-              <a:path w="23391" h="107">
-                <a:moveTo>
-                  <a:pt x="0" y="0"/>
-                </a:moveTo>
-                <a:lnTo>
-                  <a:pt x="23391" y="0"/>
-                </a:lnTo>
-                <a:lnTo>
-                  <a:pt x="23391" y="107"/>
-                </a:lnTo>
-                <a:lnTo>
-                  <a:pt x="0" y="107"/>
-                </a:lnTo>
-                <a:lnTo>
-                  <a:pt x="0" y="0"/>
-                </a:lnTo>
-                <a:close/>
-              </a:path>
-            </a:pathLst>
-          </a:custGeom>
-          <a:solidFill>
-            <a:srgbClr val="dd784b"/>
-          </a:solidFill>
-          <a:ln w="0">
-            <a:noFill/>
-          </a:ln>
-        </p:spPr>
-        <p:txBody>
-          <a:bodyPr lIns="0" rIns="0" tIns="0" bIns="0" anchor="t">
-            <a:noAutofit/>
-          </a:bodyPr>
-          <a:p>
-            <a:endParaRPr b="0" lang="en-US" sz="2400" spc="-1" strike="noStrike">
-              <a:solidFill>
-                <a:srgbClr val="000000"/>
-              </a:solidFill>
-              <a:latin typeface="DejaVu Serif"/>
-            </a:endParaRPr>
-          </a:p>
-        </p:txBody>
-      </p:sp>
-      <p:sp>
-        <p:nvSpPr>
-          <p:cNvPr id="148" name=""/>
-          <p:cNvSpPr/>
-          <p:nvPr/>
-        </p:nvSpPr>
-        <p:spPr>
-          <a:xfrm>
-            <a:off x="456840" y="4457520"/>
-            <a:ext cx="8420760" cy="9720"/>
-          </a:xfrm>
-          <a:custGeom>
-            <a:avLst/>
-            <a:gdLst/>
-            <a:ahLst/>
-            <a:rect l="0" t="0" r="r" b="b"/>
-            <a:pathLst>
-              <a:path w="23391" h="27">
-                <a:moveTo>
-                  <a:pt x="0" y="0"/>
-                </a:moveTo>
-                <a:lnTo>
-                  <a:pt x="23391" y="0"/>
-                </a:lnTo>
-                <a:lnTo>
-                  <a:pt x="23391" y="27"/>
-                </a:lnTo>
-                <a:lnTo>
-                  <a:pt x="0" y="27"/>
-                </a:lnTo>
-                <a:lnTo>
-                  <a:pt x="0" y="0"/>
-                </a:lnTo>
-                <a:close/>
-              </a:path>
-            </a:pathLst>
-          </a:custGeom>
-          <a:solidFill>
-            <a:srgbClr val="e5e7eb"/>
-          </a:solidFill>
-          <a:ln w="0">
-            <a:noFill/>
-          </a:ln>
-        </p:spPr>
-        <p:txBody>
-          <a:bodyPr lIns="0" rIns="0" tIns="0" bIns="0" anchor="t">
-            <a:noAutofit/>
-          </a:bodyPr>
-          <a:p>
-            <a:endParaRPr b="0" lang="en-US" sz="2400" spc="-1" strike="noStrike">
-              <a:solidFill>
-                <a:srgbClr val="000000"/>
-              </a:solidFill>
-              <a:latin typeface="DejaVu Serif"/>
-            </a:endParaRPr>
-          </a:p>
-        </p:txBody>
-      </p:sp>
-      <p:sp>
-        <p:nvSpPr>
-          <p:cNvPr id="149" name=""/>
-          <p:cNvSpPr/>
-          <p:nvPr/>
-        </p:nvSpPr>
-        <p:spPr>
-          <a:xfrm>
-            <a:off x="8867520" y="3895560"/>
-            <a:ext cx="10080" cy="571680"/>
-          </a:xfrm>
-          <a:custGeom>
-            <a:avLst/>
-            <a:gdLst/>
-            <a:ahLst/>
-            <a:rect l="0" t="0" r="r" b="b"/>
-            <a:pathLst>
-              <a:path w="28" h="1588">
-                <a:moveTo>
-                  <a:pt x="0" y="106"/>
-                </a:moveTo>
-                <a:lnTo>
-                  <a:pt x="0" y="1588"/>
-                </a:lnTo>
-                <a:lnTo>
-                  <a:pt x="28" y="1588"/>
-                </a:lnTo>
-                <a:lnTo>
-                  <a:pt x="28" y="0"/>
-                </a:lnTo>
-                <a:lnTo>
-                  <a:pt x="0" y="106"/>
-                </a:lnTo>
-                <a:close/>
-              </a:path>
-            </a:pathLst>
-          </a:custGeom>
-          <a:solidFill>
-            <a:srgbClr val="e5e7eb"/>
-          </a:solidFill>
-          <a:ln w="0">
-            <a:noFill/>
-          </a:ln>
-        </p:spPr>
-        <p:txBody>
-          <a:bodyPr lIns="0" rIns="0" tIns="0" bIns="0" anchor="t">
-            <a:noAutofit/>
-          </a:bodyPr>
-          <a:p>
-            <a:endParaRPr b="0" lang="en-US" sz="2400" spc="-1" strike="noStrike">
-              <a:solidFill>
-                <a:srgbClr val="000000"/>
-              </a:solidFill>
-              <a:latin typeface="DejaVu Serif"/>
-            </a:endParaRPr>
-          </a:p>
-        </p:txBody>
-      </p:sp>
-      <p:sp>
-        <p:nvSpPr>
-          <p:cNvPr id="150" name=""/>
-          <p:cNvSpPr/>
-          <p:nvPr/>
-        </p:nvSpPr>
-        <p:spPr>
-          <a:xfrm>
-            <a:off x="456840" y="3895560"/>
-            <a:ext cx="10080" cy="571680"/>
-          </a:xfrm>
-          <a:custGeom>
-            <a:avLst/>
-            <a:gdLst/>
-            <a:ahLst/>
-            <a:rect l="0" t="0" r="r" b="b"/>
-            <a:pathLst>
-              <a:path w="28" h="1588">
-                <a:moveTo>
-                  <a:pt x="0" y="0"/>
-                </a:moveTo>
-                <a:lnTo>
-                  <a:pt x="0" y="1588"/>
-                </a:lnTo>
-                <a:lnTo>
-                  <a:pt x="28" y="1588"/>
-                </a:lnTo>
-                <a:lnTo>
-                  <a:pt x="28" y="106"/>
-                </a:lnTo>
-                <a:lnTo>
-                  <a:pt x="0" y="0"/>
-                </a:lnTo>
-                <a:close/>
-              </a:path>
-            </a:pathLst>
-          </a:custGeom>
-          <a:solidFill>
-            <a:srgbClr val="e5e7eb"/>
-          </a:solidFill>
-          <a:ln w="0">
-            <a:noFill/>
-          </a:ln>
-        </p:spPr>
-        <p:txBody>
-          <a:bodyPr lIns="0" rIns="0" tIns="0" bIns="0" anchor="t">
-            <a:noAutofit/>
-          </a:bodyPr>
-          <a:p>
-            <a:endParaRPr b="0" lang="en-US" sz="2400" spc="-1" strike="noStrike">
-              <a:solidFill>
-                <a:srgbClr val="000000"/>
-              </a:solidFill>
-              <a:latin typeface="DejaVu Serif"/>
-            </a:endParaRPr>
-          </a:p>
-        </p:txBody>
-      </p:sp>
-      <p:sp>
-        <p:nvSpPr>
-          <p:cNvPr id="151" name=""/>
-          <p:cNvSpPr txBox="1"/>
-          <p:nvPr/>
-        </p:nvSpPr>
-        <p:spPr>
-          <a:xfrm>
-            <a:off x="4920480" y="3377880"/>
-            <a:ext cx="1821960" cy="160560"/>
-          </a:xfrm>
-          <a:prstGeom prst="rect">
-            <a:avLst/>
-          </a:prstGeom>
-          <a:noFill/>
-          <a:ln w="0">
-            <a:noFill/>
-          </a:ln>
-        </p:spPr>
-        <p:txBody>
-          <a:bodyPr lIns="0" rIns="0" tIns="0" bIns="0" anchor="t">
-            <a:noAutofit/>
-          </a:bodyPr>
-          <a:p>
-            <a:r>
-              <a:rPr b="0" lang="en-US" sz="1080" spc="-1" strike="noStrike">
-                <a:solidFill>
-                  <a:srgbClr val="1a1a2e"/>
-                </a:solidFill>
-                <a:latin typeface="Arial"/>
-                <a:ea typeface="Arial"/>
-              </a:rPr>
-              <a:t>leveranciers aangescherpt</a:t>
-            </a:r>
-            <a:endParaRPr b="0" lang="en-US" sz="1080" spc="-1" strike="noStrike">
-              <a:solidFill>
-                <a:srgbClr val="000000"/>
-              </a:solidFill>
-              <a:latin typeface="DejaVu Serif"/>
-            </a:endParaRPr>
-          </a:p>
-        </p:txBody>
-      </p:sp>
-      <p:sp>
-        <p:nvSpPr>
-          <p:cNvPr id="152" name=""/>
-          <p:cNvSpPr/>
-          <p:nvPr/>
-        </p:nvSpPr>
-        <p:spPr>
-          <a:xfrm>
-            <a:off x="0" y="5257440"/>
-            <a:ext cx="9334800" cy="5258160"/>
-          </a:xfrm>
-          <a:custGeom>
-            <a:avLst/>
-            <a:gdLst/>
-            <a:ahLst/>
-            <a:rect l="0" t="0" r="r" b="b"/>
-            <a:pathLst>
-              <a:path w="25930" h="14606">
-                <a:moveTo>
-                  <a:pt x="0" y="0"/>
-                </a:moveTo>
-                <a:lnTo>
-                  <a:pt x="25930" y="0"/>
-                </a:lnTo>
-                <a:lnTo>
-                  <a:pt x="25930" y="14606"/>
-                </a:lnTo>
-                <a:lnTo>
-                  <a:pt x="0" y="14606"/>
-                </a:lnTo>
-                <a:lnTo>
-                  <a:pt x="0" y="0"/>
-                </a:lnTo>
-                <a:close/>
-              </a:path>
-            </a:pathLst>
-          </a:custGeom>
-          <a:solidFill>
-            <a:srgbClr val="ffffff"/>
-          </a:solidFill>
-          <a:ln w="0">
-            <a:noFill/>
-          </a:ln>
-        </p:spPr>
-        <p:txBody>
-          <a:bodyPr lIns="0" rIns="0" tIns="0" bIns="0" anchor="t">
-            <a:noAutofit/>
-          </a:bodyPr>
-          <a:p>
-            <a:endParaRPr b="0" lang="en-US" sz="2400" spc="-1" strike="noStrike">
-              <a:solidFill>
-                <a:srgbClr val="000000"/>
-              </a:solidFill>
-              <a:latin typeface="DejaVu Serif"/>
-            </a:endParaRPr>
-          </a:p>
-        </p:txBody>
-      </p:sp>
-      <p:sp>
-        <p:nvSpPr>
-          <p:cNvPr id="153" name=""/>
-          <p:cNvSpPr txBox="1"/>
-          <p:nvPr/>
-        </p:nvSpPr>
-        <p:spPr>
-          <a:xfrm>
-            <a:off x="634320" y="4116600"/>
-            <a:ext cx="8121960" cy="164880"/>
-          </a:xfrm>
-          <a:prstGeom prst="rect">
-            <a:avLst/>
-          </a:prstGeom>
-          <a:noFill/>
-          <a:ln w="0">
-            <a:noFill/>
-          </a:ln>
-        </p:spPr>
-        <p:txBody>
-          <a:bodyPr lIns="0" rIns="0" tIns="0" bIns="0" anchor="t">
-            <a:noAutofit/>
-          </a:bodyPr>
-          <a:p>
-            <a:r>
-              <a:rPr b="0" lang="en-US" sz="1110" spc="-1" strike="noStrike">
-                <a:solidFill>
-                  <a:srgbClr val="1a1a2e"/>
-                </a:solidFill>
-                <a:latin typeface="Arial"/>
-                <a:ea typeface="Arial"/>
-              </a:rPr>
-              <a:t>Openbaar en versiebeheerd, zodat iedereen dezelfde versie leest en een wijziging zichtbaar is met de reden erbij.</a:t>
-            </a:r>
-            <a:endParaRPr b="0" lang="en-US" sz="1110" spc="-1" strike="noStrike">
+            <a:endParaRPr b="0" lang="en-US" sz="1020" spc="-1" strike="noStrike">
               <a:solidFill>
                 <a:srgbClr val="000000"/>
               </a:solidFill>
@@ -11512,7 +9399,7 @@
       </p:grpSpPr>
       <p:sp>
         <p:nvSpPr>
-          <p:cNvPr id="154" name=""/>
+          <p:cNvPr id="133" name=""/>
           <p:cNvSpPr/>
           <p:nvPr/>
         </p:nvSpPr>
@@ -11570,7 +9457,7 @@
       </p:sp>
       <p:sp>
         <p:nvSpPr>
-          <p:cNvPr id="155" name=""/>
+          <p:cNvPr id="134" name=""/>
           <p:cNvSpPr/>
           <p:nvPr/>
         </p:nvSpPr>
@@ -11628,7 +9515,7 @@
       </p:sp>
       <p:sp>
         <p:nvSpPr>
-          <p:cNvPr id="156" name=""/>
+          <p:cNvPr id="135" name=""/>
           <p:cNvSpPr/>
           <p:nvPr/>
         </p:nvSpPr>
@@ -11686,7 +9573,7 @@
       </p:sp>
       <p:sp>
         <p:nvSpPr>
-          <p:cNvPr id="157" name=""/>
+          <p:cNvPr id="136" name=""/>
           <p:cNvSpPr/>
           <p:nvPr/>
         </p:nvSpPr>
@@ -11744,7 +9631,7 @@
       </p:sp>
       <p:sp>
         <p:nvSpPr>
-          <p:cNvPr id="158" name=""/>
+          <p:cNvPr id="137" name=""/>
           <p:cNvSpPr/>
           <p:nvPr/>
         </p:nvSpPr>
@@ -11802,7 +9689,7 @@
       </p:sp>
       <p:sp>
         <p:nvSpPr>
-          <p:cNvPr id="159" name=""/>
+          <p:cNvPr id="138" name=""/>
           <p:cNvSpPr/>
           <p:nvPr/>
         </p:nvSpPr>
@@ -11860,7 +9747,7 @@
       </p:sp>
       <p:pic>
         <p:nvPicPr>
-          <p:cNvPr id="160" name="" descr=""/>
+          <p:cNvPr id="139" name="" descr=""/>
           <p:cNvPicPr/>
           <p:nvPr/>
         </p:nvPicPr>
@@ -11883,7 +9770,7 @@
       </p:pic>
       <p:sp>
         <p:nvSpPr>
-          <p:cNvPr id="161" name=""/>
+          <p:cNvPr id="140" name=""/>
           <p:cNvSpPr/>
           <p:nvPr/>
         </p:nvSpPr>
@@ -11941,7 +9828,7 @@
       </p:sp>
       <p:sp>
         <p:nvSpPr>
-          <p:cNvPr id="162" name=""/>
+          <p:cNvPr id="141" name=""/>
           <p:cNvSpPr/>
           <p:nvPr/>
         </p:nvSpPr>
@@ -11999,7 +9886,7 @@
       </p:sp>
       <p:sp>
         <p:nvSpPr>
-          <p:cNvPr id="163" name=""/>
+          <p:cNvPr id="142" name=""/>
           <p:cNvSpPr/>
           <p:nvPr/>
         </p:nvSpPr>
@@ -12057,7 +9944,7 @@
       </p:sp>
       <p:sp>
         <p:nvSpPr>
-          <p:cNvPr id="164" name=""/>
+          <p:cNvPr id="143" name=""/>
           <p:cNvSpPr/>
           <p:nvPr/>
         </p:nvSpPr>
@@ -12115,7 +10002,7 @@
       </p:sp>
       <p:sp>
         <p:nvSpPr>
-          <p:cNvPr id="165" name=""/>
+          <p:cNvPr id="144" name=""/>
           <p:cNvSpPr/>
           <p:nvPr/>
         </p:nvSpPr>
@@ -12173,7 +10060,7 @@
       </p:sp>
       <p:sp>
         <p:nvSpPr>
-          <p:cNvPr id="166" name=""/>
+          <p:cNvPr id="145" name=""/>
           <p:cNvSpPr/>
           <p:nvPr/>
         </p:nvSpPr>
@@ -12231,7 +10118,7 @@
       </p:sp>
       <p:sp>
         <p:nvSpPr>
-          <p:cNvPr id="167" name=""/>
+          <p:cNvPr id="146" name=""/>
           <p:cNvSpPr/>
           <p:nvPr/>
         </p:nvSpPr>
@@ -12289,7 +10176,7 @@
       </p:sp>
       <p:sp>
         <p:nvSpPr>
-          <p:cNvPr id="168" name=""/>
+          <p:cNvPr id="147" name=""/>
           <p:cNvSpPr/>
           <p:nvPr/>
         </p:nvSpPr>
@@ -12347,7 +10234,7 @@
       </p:sp>
       <p:sp>
         <p:nvSpPr>
-          <p:cNvPr id="169" name=""/>
+          <p:cNvPr id="148" name=""/>
           <p:cNvSpPr/>
           <p:nvPr/>
         </p:nvSpPr>
@@ -12405,7 +10292,7 @@
       </p:sp>
       <p:sp>
         <p:nvSpPr>
-          <p:cNvPr id="170" name=""/>
+          <p:cNvPr id="149" name=""/>
           <p:cNvSpPr/>
           <p:nvPr/>
         </p:nvSpPr>
@@ -12463,7 +10350,7 @@
       </p:sp>
       <p:sp>
         <p:nvSpPr>
-          <p:cNvPr id="171" name=""/>
+          <p:cNvPr id="150" name=""/>
           <p:cNvSpPr/>
           <p:nvPr/>
         </p:nvSpPr>
@@ -12521,7 +10408,7 @@
       </p:sp>
       <p:sp>
         <p:nvSpPr>
-          <p:cNvPr id="172" name=""/>
+          <p:cNvPr id="151" name=""/>
           <p:cNvSpPr/>
           <p:nvPr/>
         </p:nvSpPr>
@@ -12579,7 +10466,7 @@
       </p:sp>
       <p:sp>
         <p:nvSpPr>
-          <p:cNvPr id="173" name=""/>
+          <p:cNvPr id="152" name=""/>
           <p:cNvSpPr/>
           <p:nvPr/>
         </p:nvSpPr>
@@ -12637,7 +10524,7 @@
       </p:sp>
       <p:sp>
         <p:nvSpPr>
-          <p:cNvPr id="174" name=""/>
+          <p:cNvPr id="153" name=""/>
           <p:cNvSpPr/>
           <p:nvPr/>
         </p:nvSpPr>
@@ -12695,7 +10582,7 @@
       </p:sp>
       <p:sp>
         <p:nvSpPr>
-          <p:cNvPr id="175" name=""/>
+          <p:cNvPr id="154" name=""/>
           <p:cNvSpPr/>
           <p:nvPr/>
         </p:nvSpPr>
@@ -12753,7 +10640,7 @@
       </p:sp>
       <p:sp>
         <p:nvSpPr>
-          <p:cNvPr id="176" name=""/>
+          <p:cNvPr id="155" name=""/>
           <p:cNvSpPr txBox="1"/>
           <p:nvPr/>
         </p:nvSpPr>
@@ -12796,7 +10683,7 @@
       </p:sp>
       <p:sp>
         <p:nvSpPr>
-          <p:cNvPr id="177" name=""/>
+          <p:cNvPr id="156" name=""/>
           <p:cNvSpPr txBox="1"/>
           <p:nvPr/>
         </p:nvSpPr>
@@ -12839,7 +10726,7 @@
       </p:sp>
       <p:sp>
         <p:nvSpPr>
-          <p:cNvPr id="178" name=""/>
+          <p:cNvPr id="157" name=""/>
           <p:cNvSpPr txBox="1"/>
           <p:nvPr/>
         </p:nvSpPr>
@@ -12882,7 +10769,7 @@
       </p:sp>
       <p:sp>
         <p:nvSpPr>
-          <p:cNvPr id="179" name=""/>
+          <p:cNvPr id="158" name=""/>
           <p:cNvSpPr/>
           <p:nvPr/>
         </p:nvSpPr>
@@ -12940,7 +10827,7 @@
       </p:sp>
       <p:sp>
         <p:nvSpPr>
-          <p:cNvPr id="180" name=""/>
+          <p:cNvPr id="159" name=""/>
           <p:cNvSpPr/>
           <p:nvPr/>
         </p:nvSpPr>
@@ -12998,7 +10885,7 @@
       </p:sp>
       <p:sp>
         <p:nvSpPr>
-          <p:cNvPr id="181" name=""/>
+          <p:cNvPr id="160" name=""/>
           <p:cNvSpPr/>
           <p:nvPr/>
         </p:nvSpPr>
@@ -13056,7 +10943,7 @@
       </p:sp>
       <p:sp>
         <p:nvSpPr>
-          <p:cNvPr id="182" name=""/>
+          <p:cNvPr id="161" name=""/>
           <p:cNvSpPr/>
           <p:nvPr/>
         </p:nvSpPr>
@@ -13114,7 +11001,7 @@
       </p:sp>
       <p:sp>
         <p:nvSpPr>
-          <p:cNvPr id="183" name=""/>
+          <p:cNvPr id="162" name=""/>
           <p:cNvSpPr/>
           <p:nvPr/>
         </p:nvSpPr>
@@ -13172,7 +11059,7 @@
       </p:sp>
       <p:sp>
         <p:nvSpPr>
-          <p:cNvPr id="184" name=""/>
+          <p:cNvPr id="163" name=""/>
           <p:cNvSpPr txBox="1"/>
           <p:nvPr/>
         </p:nvSpPr>
@@ -13215,7 +11102,7 @@
       </p:sp>
       <p:sp>
         <p:nvSpPr>
-          <p:cNvPr id="185" name=""/>
+          <p:cNvPr id="164" name=""/>
           <p:cNvSpPr txBox="1"/>
           <p:nvPr/>
         </p:nvSpPr>
@@ -13258,7 +11145,7 @@
       </p:sp>
       <p:sp>
         <p:nvSpPr>
-          <p:cNvPr id="186" name=""/>
+          <p:cNvPr id="165" name=""/>
           <p:cNvSpPr txBox="1"/>
           <p:nvPr/>
         </p:nvSpPr>
@@ -13301,7 +11188,7 @@
       </p:sp>
       <p:sp>
         <p:nvSpPr>
-          <p:cNvPr id="187" name=""/>
+          <p:cNvPr id="166" name=""/>
           <p:cNvSpPr txBox="1"/>
           <p:nvPr/>
         </p:nvSpPr>
@@ -13344,7 +11231,7 @@
       </p:sp>
       <p:sp>
         <p:nvSpPr>
-          <p:cNvPr id="188" name=""/>
+          <p:cNvPr id="167" name=""/>
           <p:cNvSpPr txBox="1"/>
           <p:nvPr/>
         </p:nvSpPr>
@@ -13387,7 +11274,7 @@
       </p:sp>
       <p:sp>
         <p:nvSpPr>
-          <p:cNvPr id="189" name=""/>
+          <p:cNvPr id="168" name=""/>
           <p:cNvSpPr txBox="1"/>
           <p:nvPr/>
         </p:nvSpPr>
@@ -13430,7 +11317,7 @@
       </p:sp>
       <p:sp>
         <p:nvSpPr>
-          <p:cNvPr id="190" name=""/>
+          <p:cNvPr id="169" name=""/>
           <p:cNvSpPr txBox="1"/>
           <p:nvPr/>
         </p:nvSpPr>
@@ -13473,7 +11360,7 @@
       </p:sp>
       <p:sp>
         <p:nvSpPr>
-          <p:cNvPr id="191" name=""/>
+          <p:cNvPr id="170" name=""/>
           <p:cNvSpPr/>
           <p:nvPr/>
         </p:nvSpPr>
@@ -13692,7 +11579,7 @@
       </p:sp>
       <p:pic>
         <p:nvPicPr>
-          <p:cNvPr id="192" name="" descr=""/>
+          <p:cNvPr id="171" name="" descr=""/>
           <p:cNvPicPr/>
           <p:nvPr/>
         </p:nvPicPr>
@@ -13715,7 +11602,7 @@
       </p:pic>
       <p:sp>
         <p:nvSpPr>
-          <p:cNvPr id="193" name=""/>
+          <p:cNvPr id="172" name=""/>
           <p:cNvSpPr txBox="1"/>
           <p:nvPr/>
         </p:nvSpPr>
@@ -13758,7 +11645,7 @@
       </p:sp>
       <p:sp>
         <p:nvSpPr>
-          <p:cNvPr id="194" name=""/>
+          <p:cNvPr id="173" name=""/>
           <p:cNvSpPr/>
           <p:nvPr/>
         </p:nvSpPr>
@@ -13816,7 +11703,7 @@
       </p:sp>
       <p:sp>
         <p:nvSpPr>
-          <p:cNvPr id="195" name=""/>
+          <p:cNvPr id="174" name=""/>
           <p:cNvSpPr txBox="1"/>
           <p:nvPr/>
         </p:nvSpPr>
@@ -13889,7 +11776,7 @@
       </p:grpSpPr>
       <p:sp>
         <p:nvSpPr>
-          <p:cNvPr id="196" name=""/>
+          <p:cNvPr id="175" name=""/>
           <p:cNvSpPr/>
           <p:nvPr/>
         </p:nvSpPr>
@@ -13947,7 +11834,7 @@
       </p:sp>
       <p:sp>
         <p:nvSpPr>
-          <p:cNvPr id="197" name=""/>
+          <p:cNvPr id="176" name=""/>
           <p:cNvSpPr/>
           <p:nvPr/>
         </p:nvSpPr>
@@ -14005,7 +11892,7 @@
       </p:sp>
       <p:sp>
         <p:nvSpPr>
-          <p:cNvPr id="198" name=""/>
+          <p:cNvPr id="177" name=""/>
           <p:cNvSpPr/>
           <p:nvPr/>
         </p:nvSpPr>
@@ -14063,7 +11950,7 @@
       </p:sp>
       <p:sp>
         <p:nvSpPr>
-          <p:cNvPr id="199" name=""/>
+          <p:cNvPr id="178" name=""/>
           <p:cNvSpPr/>
           <p:nvPr/>
         </p:nvSpPr>
@@ -14121,7 +12008,7 @@
       </p:sp>
       <p:sp>
         <p:nvSpPr>
-          <p:cNvPr id="200" name=""/>
+          <p:cNvPr id="179" name=""/>
           <p:cNvSpPr/>
           <p:nvPr/>
         </p:nvSpPr>
@@ -14179,7 +12066,7 @@
       </p:sp>
       <p:sp>
         <p:nvSpPr>
-          <p:cNvPr id="201" name=""/>
+          <p:cNvPr id="180" name=""/>
           <p:cNvSpPr/>
           <p:nvPr/>
         </p:nvSpPr>
@@ -14237,7 +12124,7 @@
       </p:sp>
       <p:pic>
         <p:nvPicPr>
-          <p:cNvPr id="202" name="" descr=""/>
+          <p:cNvPr id="181" name="" descr=""/>
           <p:cNvPicPr/>
           <p:nvPr/>
         </p:nvPicPr>
@@ -14260,7 +12147,7 @@
       </p:pic>
       <p:sp>
         <p:nvSpPr>
-          <p:cNvPr id="203" name=""/>
+          <p:cNvPr id="182" name=""/>
           <p:cNvSpPr/>
           <p:nvPr/>
         </p:nvSpPr>
@@ -14479,7 +12366,7 @@
       </p:sp>
       <p:pic>
         <p:nvPicPr>
-          <p:cNvPr id="204" name="" descr=""/>
+          <p:cNvPr id="183" name="" descr=""/>
           <p:cNvPicPr/>
           <p:nvPr/>
         </p:nvPicPr>
@@ -14502,7 +12389,7 @@
       </p:pic>
       <p:sp>
         <p:nvSpPr>
-          <p:cNvPr id="205" name=""/>
+          <p:cNvPr id="184" name=""/>
           <p:cNvSpPr/>
           <p:nvPr/>
         </p:nvSpPr>
@@ -14560,7 +12447,7 @@
       </p:sp>
       <p:sp>
         <p:nvSpPr>
-          <p:cNvPr id="206" name=""/>
+          <p:cNvPr id="185" name=""/>
           <p:cNvSpPr/>
           <p:nvPr/>
         </p:nvSpPr>
@@ -14618,7 +12505,7 @@
       </p:sp>
       <p:sp>
         <p:nvSpPr>
-          <p:cNvPr id="207" name=""/>
+          <p:cNvPr id="186" name=""/>
           <p:cNvSpPr/>
           <p:nvPr/>
         </p:nvSpPr>
@@ -14676,7 +12563,7 @@
       </p:sp>
       <p:sp>
         <p:nvSpPr>
-          <p:cNvPr id="208" name=""/>
+          <p:cNvPr id="187" name=""/>
           <p:cNvSpPr/>
           <p:nvPr/>
         </p:nvSpPr>
@@ -14734,7 +12621,7 @@
       </p:sp>
       <p:sp>
         <p:nvSpPr>
-          <p:cNvPr id="209" name=""/>
+          <p:cNvPr id="188" name=""/>
           <p:cNvSpPr/>
           <p:nvPr/>
         </p:nvSpPr>
@@ -14792,7 +12679,7 @@
       </p:sp>
       <p:sp>
         <p:nvSpPr>
-          <p:cNvPr id="210" name=""/>
+          <p:cNvPr id="189" name=""/>
           <p:cNvSpPr/>
           <p:nvPr/>
         </p:nvSpPr>
@@ -14850,7 +12737,7 @@
       </p:sp>
       <p:sp>
         <p:nvSpPr>
-          <p:cNvPr id="211" name=""/>
+          <p:cNvPr id="190" name=""/>
           <p:cNvSpPr/>
           <p:nvPr/>
         </p:nvSpPr>
@@ -14908,7 +12795,7 @@
       </p:sp>
       <p:sp>
         <p:nvSpPr>
-          <p:cNvPr id="212" name=""/>
+          <p:cNvPr id="191" name=""/>
           <p:cNvSpPr/>
           <p:nvPr/>
         </p:nvSpPr>
@@ -14966,7 +12853,7 @@
       </p:sp>
       <p:sp>
         <p:nvSpPr>
-          <p:cNvPr id="213" name=""/>
+          <p:cNvPr id="192" name=""/>
           <p:cNvSpPr/>
           <p:nvPr/>
         </p:nvSpPr>
@@ -15024,7 +12911,7 @@
       </p:sp>
       <p:sp>
         <p:nvSpPr>
-          <p:cNvPr id="214" name=""/>
+          <p:cNvPr id="193" name=""/>
           <p:cNvSpPr/>
           <p:nvPr/>
         </p:nvSpPr>
@@ -15082,7 +12969,7 @@
       </p:sp>
       <p:sp>
         <p:nvSpPr>
-          <p:cNvPr id="215" name=""/>
+          <p:cNvPr id="194" name=""/>
           <p:cNvSpPr/>
           <p:nvPr/>
         </p:nvSpPr>
@@ -15140,7 +13027,7 @@
       </p:sp>
       <p:sp>
         <p:nvSpPr>
-          <p:cNvPr id="216" name=""/>
+          <p:cNvPr id="195" name=""/>
           <p:cNvSpPr/>
           <p:nvPr/>
         </p:nvSpPr>
@@ -15198,7 +13085,7 @@
       </p:sp>
       <p:sp>
         <p:nvSpPr>
-          <p:cNvPr id="217" name=""/>
+          <p:cNvPr id="196" name=""/>
           <p:cNvSpPr/>
           <p:nvPr/>
         </p:nvSpPr>
@@ -15256,7 +13143,7 @@
       </p:sp>
       <p:sp>
         <p:nvSpPr>
-          <p:cNvPr id="218" name=""/>
+          <p:cNvPr id="197" name=""/>
           <p:cNvSpPr/>
           <p:nvPr/>
         </p:nvSpPr>
@@ -15314,7 +13201,7 @@
       </p:sp>
       <p:sp>
         <p:nvSpPr>
-          <p:cNvPr id="219" name=""/>
+          <p:cNvPr id="198" name=""/>
           <p:cNvSpPr/>
           <p:nvPr/>
         </p:nvSpPr>
@@ -15372,7 +13259,7 @@
       </p:sp>
       <p:sp>
         <p:nvSpPr>
-          <p:cNvPr id="220" name=""/>
+          <p:cNvPr id="199" name=""/>
           <p:cNvSpPr txBox="1"/>
           <p:nvPr/>
         </p:nvSpPr>
@@ -15415,7 +13302,7 @@
       </p:sp>
       <p:sp>
         <p:nvSpPr>
-          <p:cNvPr id="221" name=""/>
+          <p:cNvPr id="200" name=""/>
           <p:cNvSpPr txBox="1"/>
           <p:nvPr/>
         </p:nvSpPr>
@@ -15458,7 +13345,7 @@
       </p:sp>
       <p:sp>
         <p:nvSpPr>
-          <p:cNvPr id="222" name=""/>
+          <p:cNvPr id="201" name=""/>
           <p:cNvSpPr txBox="1"/>
           <p:nvPr/>
         </p:nvSpPr>
@@ -15501,7 +13388,7 @@
       </p:sp>
       <p:sp>
         <p:nvSpPr>
-          <p:cNvPr id="223" name=""/>
+          <p:cNvPr id="202" name=""/>
           <p:cNvSpPr txBox="1"/>
           <p:nvPr/>
         </p:nvSpPr>
@@ -15544,7 +13431,7 @@
       </p:sp>
       <p:sp>
         <p:nvSpPr>
-          <p:cNvPr id="224" name=""/>
+          <p:cNvPr id="203" name=""/>
           <p:cNvSpPr txBox="1"/>
           <p:nvPr/>
         </p:nvSpPr>
@@ -15587,7 +13474,7 @@
       </p:sp>
       <p:sp>
         <p:nvSpPr>
-          <p:cNvPr id="225" name=""/>
+          <p:cNvPr id="204" name=""/>
           <p:cNvSpPr txBox="1"/>
           <p:nvPr/>
         </p:nvSpPr>
@@ -15630,7 +13517,7 @@
       </p:sp>
       <p:sp>
         <p:nvSpPr>
-          <p:cNvPr id="226" name=""/>
+          <p:cNvPr id="205" name=""/>
           <p:cNvSpPr txBox="1"/>
           <p:nvPr/>
         </p:nvSpPr>
@@ -15673,7 +13560,7 @@
       </p:sp>
       <p:sp>
         <p:nvSpPr>
-          <p:cNvPr id="227" name=""/>
+          <p:cNvPr id="206" name=""/>
           <p:cNvSpPr txBox="1"/>
           <p:nvPr/>
         </p:nvSpPr>
@@ -15716,7 +13603,7 @@
       </p:sp>
       <p:sp>
         <p:nvSpPr>
-          <p:cNvPr id="228" name=""/>
+          <p:cNvPr id="207" name=""/>
           <p:cNvSpPr/>
           <p:nvPr/>
         </p:nvSpPr>
@@ -15774,7 +13661,7 @@
       </p:sp>
       <p:sp>
         <p:nvSpPr>
-          <p:cNvPr id="229" name=""/>
+          <p:cNvPr id="208" name=""/>
           <p:cNvSpPr txBox="1"/>
           <p:nvPr/>
         </p:nvSpPr>
@@ -15847,7 +13734,7 @@
       </p:grpSpPr>
       <p:sp>
         <p:nvSpPr>
-          <p:cNvPr id="230" name=""/>
+          <p:cNvPr id="209" name=""/>
           <p:cNvSpPr/>
           <p:nvPr/>
         </p:nvSpPr>
@@ -15905,7 +13792,7 @@
       </p:sp>
       <p:sp>
         <p:nvSpPr>
-          <p:cNvPr id="231" name=""/>
+          <p:cNvPr id="210" name=""/>
           <p:cNvSpPr/>
           <p:nvPr/>
         </p:nvSpPr>
@@ -15963,7 +13850,7 @@
       </p:sp>
       <p:sp>
         <p:nvSpPr>
-          <p:cNvPr id="232" name=""/>
+          <p:cNvPr id="211" name=""/>
           <p:cNvSpPr/>
           <p:nvPr/>
         </p:nvSpPr>
@@ -16021,7 +13908,7 @@
       </p:sp>
       <p:sp>
         <p:nvSpPr>
-          <p:cNvPr id="233" name=""/>
+          <p:cNvPr id="212" name=""/>
           <p:cNvSpPr/>
           <p:nvPr/>
         </p:nvSpPr>
@@ -16079,7 +13966,7 @@
       </p:sp>
       <p:sp>
         <p:nvSpPr>
-          <p:cNvPr id="234" name=""/>
+          <p:cNvPr id="213" name=""/>
           <p:cNvSpPr/>
           <p:nvPr/>
         </p:nvSpPr>
@@ -16137,7 +14024,7 @@
       </p:sp>
       <p:sp>
         <p:nvSpPr>
-          <p:cNvPr id="235" name=""/>
+          <p:cNvPr id="214" name=""/>
           <p:cNvSpPr/>
           <p:nvPr/>
         </p:nvSpPr>
@@ -16195,7 +14082,7 @@
       </p:sp>
       <p:pic>
         <p:nvPicPr>
-          <p:cNvPr id="236" name="" descr=""/>
+          <p:cNvPr id="215" name="" descr=""/>
           <p:cNvPicPr/>
           <p:nvPr/>
         </p:nvPicPr>
@@ -16218,14 +14105,14 @@
       </p:pic>
       <p:sp>
         <p:nvSpPr>
-          <p:cNvPr id="237" name=""/>
+          <p:cNvPr id="216" name=""/>
           <p:cNvSpPr/>
           <p:nvPr/>
         </p:nvSpPr>
         <p:spPr>
           <a:xfrm>
-            <a:off x="456840" y="1618920"/>
-            <a:ext cx="4153320" cy="753120"/>
+            <a:off x="456840" y="1609560"/>
+            <a:ext cx="4153320" cy="752760"/>
           </a:xfrm>
           <a:custGeom>
             <a:avLst/>
@@ -16233,7 +14120,7 @@
             <a:ahLst/>
             <a:rect l="0" t="0" r="r" b="b"/>
             <a:pathLst>
-              <a:path w="11537" h="2092">
+              <a:path w="11537" h="2091">
                 <a:moveTo>
                   <a:pt x="0" y="0"/>
                 </a:moveTo>
@@ -16241,10 +14128,10 @@
                   <a:pt x="11537" y="0"/>
                 </a:lnTo>
                 <a:lnTo>
-                  <a:pt x="11537" y="2092"/>
-                </a:lnTo>
-                <a:lnTo>
-                  <a:pt x="0" y="2092"/>
+                  <a:pt x="11537" y="2091"/>
+                </a:lnTo>
+                <a:lnTo>
+                  <a:pt x="0" y="2091"/>
                 </a:lnTo>
                 <a:lnTo>
                   <a:pt x="0" y="0"/>
@@ -16276,13 +14163,13 @@
       </p:sp>
       <p:sp>
         <p:nvSpPr>
-          <p:cNvPr id="238" name=""/>
+          <p:cNvPr id="217" name=""/>
           <p:cNvSpPr/>
           <p:nvPr/>
         </p:nvSpPr>
         <p:spPr>
           <a:xfrm>
-            <a:off x="456840" y="1618920"/>
+            <a:off x="456840" y="1609560"/>
             <a:ext cx="4153320" cy="38520"/>
           </a:xfrm>
           <a:custGeom>
@@ -16334,14 +14221,14 @@
       </p:sp>
       <p:sp>
         <p:nvSpPr>
-          <p:cNvPr id="239" name=""/>
+          <p:cNvPr id="218" name=""/>
           <p:cNvSpPr/>
           <p:nvPr/>
         </p:nvSpPr>
         <p:spPr>
           <a:xfrm>
-            <a:off x="456840" y="2361960"/>
-            <a:ext cx="4153320" cy="10080"/>
+            <a:off x="456840" y="2352600"/>
+            <a:ext cx="4153320" cy="9720"/>
           </a:xfrm>
           <a:custGeom>
             <a:avLst/>
@@ -16349,7 +14236,7 @@
             <a:ahLst/>
             <a:rect l="0" t="0" r="r" b="b"/>
             <a:pathLst>
-              <a:path w="11537" h="28">
+              <a:path w="11537" h="27">
                 <a:moveTo>
                   <a:pt x="0" y="0"/>
                 </a:moveTo>
@@ -16357,10 +14244,10 @@
                   <a:pt x="11537" y="0"/>
                 </a:lnTo>
                 <a:lnTo>
-                  <a:pt x="11537" y="28"/>
-                </a:lnTo>
-                <a:lnTo>
-                  <a:pt x="0" y="28"/>
+                  <a:pt x="11537" y="27"/>
+                </a:lnTo>
+                <a:lnTo>
+                  <a:pt x="0" y="27"/>
                 </a:lnTo>
                 <a:lnTo>
                   <a:pt x="0" y="0"/>
@@ -16392,14 +14279,14 @@
       </p:sp>
       <p:sp>
         <p:nvSpPr>
-          <p:cNvPr id="240" name=""/>
+          <p:cNvPr id="219" name=""/>
           <p:cNvSpPr/>
           <p:nvPr/>
         </p:nvSpPr>
         <p:spPr>
           <a:xfrm>
-            <a:off x="4600440" y="1618920"/>
-            <a:ext cx="9720" cy="753120"/>
+            <a:off x="4600440" y="1609560"/>
+            <a:ext cx="9720" cy="752760"/>
           </a:xfrm>
           <a:custGeom>
             <a:avLst/>
@@ -16407,15 +14294,15 @@
             <a:ahLst/>
             <a:rect l="0" t="0" r="r" b="b"/>
             <a:pathLst>
-              <a:path w="27" h="2092">
+              <a:path w="27" h="2091">
                 <a:moveTo>
                   <a:pt x="0" y="106"/>
                 </a:moveTo>
                 <a:lnTo>
-                  <a:pt x="0" y="2092"/>
-                </a:lnTo>
-                <a:lnTo>
-                  <a:pt x="27" y="2092"/>
+                  <a:pt x="0" y="2091"/>
+                </a:lnTo>
+                <a:lnTo>
+                  <a:pt x="27" y="2091"/>
                 </a:lnTo>
                 <a:lnTo>
                   <a:pt x="27" y="0"/>
@@ -16450,14 +14337,14 @@
       </p:sp>
       <p:sp>
         <p:nvSpPr>
-          <p:cNvPr id="241" name=""/>
+          <p:cNvPr id="220" name=""/>
           <p:cNvSpPr/>
           <p:nvPr/>
         </p:nvSpPr>
         <p:spPr>
           <a:xfrm>
-            <a:off x="456840" y="1618920"/>
-            <a:ext cx="10080" cy="753120"/>
+            <a:off x="456840" y="1609560"/>
+            <a:ext cx="10080" cy="752760"/>
           </a:xfrm>
           <a:custGeom>
             <a:avLst/>
@@ -16465,15 +14352,15 @@
             <a:ahLst/>
             <a:rect l="0" t="0" r="r" b="b"/>
             <a:pathLst>
-              <a:path w="28" h="2092">
+              <a:path w="28" h="2091">
                 <a:moveTo>
                   <a:pt x="0" y="0"/>
                 </a:moveTo>
                 <a:lnTo>
-                  <a:pt x="0" y="2092"/>
-                </a:lnTo>
-                <a:lnTo>
-                  <a:pt x="28" y="2092"/>
+                  <a:pt x="0" y="2091"/>
+                </a:lnTo>
+                <a:lnTo>
+                  <a:pt x="28" y="2091"/>
                 </a:lnTo>
                 <a:lnTo>
                   <a:pt x="28" y="106"/>
@@ -16508,7 +14395,7 @@
       </p:sp>
       <p:sp>
         <p:nvSpPr>
-          <p:cNvPr id="242" name=""/>
+          <p:cNvPr id="221" name=""/>
           <p:cNvSpPr txBox="1"/>
           <p:nvPr/>
         </p:nvSpPr>
@@ -16551,13 +14438,13 @@
       </p:sp>
       <p:sp>
         <p:nvSpPr>
-          <p:cNvPr id="243" name=""/>
+          <p:cNvPr id="222" name=""/>
           <p:cNvSpPr txBox="1"/>
           <p:nvPr/>
         </p:nvSpPr>
         <p:spPr>
           <a:xfrm>
-            <a:off x="634320" y="1837800"/>
+            <a:off x="634320" y="1828080"/>
             <a:ext cx="913680" cy="157320"/>
           </a:xfrm>
           <a:prstGeom prst="rect">
@@ -16594,14 +14481,14 @@
       </p:sp>
       <p:sp>
         <p:nvSpPr>
-          <p:cNvPr id="244" name=""/>
+          <p:cNvPr id="223" name=""/>
           <p:cNvSpPr/>
           <p:nvPr/>
         </p:nvSpPr>
         <p:spPr>
           <a:xfrm>
-            <a:off x="4724280" y="1618920"/>
-            <a:ext cx="4153320" cy="753120"/>
+            <a:off x="4724280" y="1609560"/>
+            <a:ext cx="4153320" cy="752760"/>
           </a:xfrm>
           <a:custGeom>
             <a:avLst/>
@@ -16609,7 +14496,7 @@
             <a:ahLst/>
             <a:rect l="0" t="0" r="r" b="b"/>
             <a:pathLst>
-              <a:path w="11537" h="2092">
+              <a:path w="11537" h="2091">
                 <a:moveTo>
                   <a:pt x="0" y="0"/>
                 </a:moveTo>
@@ -16617,10 +14504,10 @@
                   <a:pt x="11537" y="0"/>
                 </a:lnTo>
                 <a:lnTo>
-                  <a:pt x="11537" y="2092"/>
-                </a:lnTo>
-                <a:lnTo>
-                  <a:pt x="0" y="2092"/>
+                  <a:pt x="11537" y="2091"/>
+                </a:lnTo>
+                <a:lnTo>
+                  <a:pt x="0" y="2091"/>
                 </a:lnTo>
                 <a:lnTo>
                   <a:pt x="0" y="0"/>
@@ -16652,13 +14539,13 @@
       </p:sp>
       <p:sp>
         <p:nvSpPr>
-          <p:cNvPr id="245" name=""/>
+          <p:cNvPr id="224" name=""/>
           <p:cNvSpPr/>
           <p:nvPr/>
         </p:nvSpPr>
         <p:spPr>
           <a:xfrm>
-            <a:off x="4724280" y="1618920"/>
+            <a:off x="4724280" y="1609560"/>
             <a:ext cx="4153320" cy="38520"/>
           </a:xfrm>
           <a:custGeom>
@@ -16710,14 +14597,14 @@
       </p:sp>
       <p:sp>
         <p:nvSpPr>
-          <p:cNvPr id="246" name=""/>
+          <p:cNvPr id="225" name=""/>
           <p:cNvSpPr/>
           <p:nvPr/>
         </p:nvSpPr>
         <p:spPr>
           <a:xfrm>
-            <a:off x="4724280" y="2361960"/>
-            <a:ext cx="4153320" cy="10080"/>
+            <a:off x="4724280" y="2352600"/>
+            <a:ext cx="4153320" cy="9720"/>
           </a:xfrm>
           <a:custGeom>
             <a:avLst/>
@@ -16725,7 +14612,7 @@
             <a:ahLst/>
             <a:rect l="0" t="0" r="r" b="b"/>
             <a:pathLst>
-              <a:path w="11537" h="28">
+              <a:path w="11537" h="27">
                 <a:moveTo>
                   <a:pt x="0" y="0"/>
                 </a:moveTo>
@@ -16733,10 +14620,10 @@
                   <a:pt x="11537" y="0"/>
                 </a:lnTo>
                 <a:lnTo>
-                  <a:pt x="11537" y="28"/>
-                </a:lnTo>
-                <a:lnTo>
-                  <a:pt x="0" y="28"/>
+                  <a:pt x="11537" y="27"/>
+                </a:lnTo>
+                <a:lnTo>
+                  <a:pt x="0" y="27"/>
                 </a:lnTo>
                 <a:lnTo>
                   <a:pt x="0" y="0"/>
@@ -16768,14 +14655,14 @@
       </p:sp>
       <p:sp>
         <p:nvSpPr>
-          <p:cNvPr id="247" name=""/>
+          <p:cNvPr id="226" name=""/>
           <p:cNvSpPr/>
           <p:nvPr/>
         </p:nvSpPr>
         <p:spPr>
           <a:xfrm>
-            <a:off x="8867520" y="1618920"/>
-            <a:ext cx="10080" cy="753120"/>
+            <a:off x="8867520" y="1609560"/>
+            <a:ext cx="10080" cy="752760"/>
           </a:xfrm>
           <a:custGeom>
             <a:avLst/>
@@ -16783,15 +14670,15 @@
             <a:ahLst/>
             <a:rect l="0" t="0" r="r" b="b"/>
             <a:pathLst>
-              <a:path w="28" h="2092">
+              <a:path w="28" h="2091">
                 <a:moveTo>
                   <a:pt x="0" y="106"/>
                 </a:moveTo>
                 <a:lnTo>
-                  <a:pt x="0" y="2092"/>
-                </a:lnTo>
-                <a:lnTo>
-                  <a:pt x="28" y="2092"/>
+                  <a:pt x="0" y="2091"/>
+                </a:lnTo>
+                <a:lnTo>
+                  <a:pt x="28" y="2091"/>
                 </a:lnTo>
                 <a:lnTo>
                   <a:pt x="28" y="0"/>
@@ -16826,14 +14713,14 @@
       </p:sp>
       <p:sp>
         <p:nvSpPr>
-          <p:cNvPr id="248" name=""/>
+          <p:cNvPr id="227" name=""/>
           <p:cNvSpPr/>
           <p:nvPr/>
         </p:nvSpPr>
         <p:spPr>
           <a:xfrm>
-            <a:off x="4724280" y="1618920"/>
-            <a:ext cx="9720" cy="753120"/>
+            <a:off x="4724280" y="1609560"/>
+            <a:ext cx="9720" cy="752760"/>
           </a:xfrm>
           <a:custGeom>
             <a:avLst/>
@@ -16841,15 +14728,15 @@
             <a:ahLst/>
             <a:rect l="0" t="0" r="r" b="b"/>
             <a:pathLst>
-              <a:path w="27" h="2092">
+              <a:path w="27" h="2091">
                 <a:moveTo>
                   <a:pt x="0" y="0"/>
                 </a:moveTo>
                 <a:lnTo>
-                  <a:pt x="0" y="2092"/>
-                </a:lnTo>
-                <a:lnTo>
-                  <a:pt x="27" y="2092"/>
+                  <a:pt x="0" y="2091"/>
+                </a:lnTo>
+                <a:lnTo>
+                  <a:pt x="27" y="2091"/>
                 </a:lnTo>
                 <a:lnTo>
                   <a:pt x="27" y="106"/>
@@ -16884,13 +14771,13 @@
       </p:sp>
       <p:sp>
         <p:nvSpPr>
-          <p:cNvPr id="249" name=""/>
+          <p:cNvPr id="228" name=""/>
           <p:cNvSpPr txBox="1"/>
           <p:nvPr/>
         </p:nvSpPr>
         <p:spPr>
           <a:xfrm>
-            <a:off x="634320" y="2037600"/>
+            <a:off x="634320" y="2028240"/>
             <a:ext cx="3973680" cy="157320"/>
           </a:xfrm>
           <a:prstGeom prst="rect">
@@ -16927,13 +14814,13 @@
       </p:sp>
       <p:sp>
         <p:nvSpPr>
-          <p:cNvPr id="250" name=""/>
+          <p:cNvPr id="229" name=""/>
           <p:cNvSpPr txBox="1"/>
           <p:nvPr/>
         </p:nvSpPr>
         <p:spPr>
           <a:xfrm>
-            <a:off x="4905360" y="1837800"/>
+            <a:off x="4905360" y="1828080"/>
             <a:ext cx="1014120" cy="157320"/>
           </a:xfrm>
           <a:prstGeom prst="rect">
@@ -16970,13 +14857,13 @@
       </p:sp>
       <p:sp>
         <p:nvSpPr>
-          <p:cNvPr id="251" name=""/>
+          <p:cNvPr id="230" name=""/>
           <p:cNvSpPr/>
           <p:nvPr/>
         </p:nvSpPr>
         <p:spPr>
           <a:xfrm>
-            <a:off x="456840" y="2495520"/>
+            <a:off x="456840" y="2485800"/>
             <a:ext cx="4153320" cy="752760"/>
           </a:xfrm>
           <a:custGeom>
@@ -17028,14 +14915,14 @@
       </p:sp>
       <p:sp>
         <p:nvSpPr>
-          <p:cNvPr id="252" name=""/>
+          <p:cNvPr id="231" name=""/>
           <p:cNvSpPr/>
           <p:nvPr/>
         </p:nvSpPr>
         <p:spPr>
           <a:xfrm>
-            <a:off x="456840" y="2495520"/>
-            <a:ext cx="4153320" cy="38160"/>
+            <a:off x="456840" y="2485800"/>
+            <a:ext cx="4153320" cy="38520"/>
           </a:xfrm>
           <a:custGeom>
             <a:avLst/>
@@ -17043,7 +14930,7 @@
             <a:ahLst/>
             <a:rect l="0" t="0" r="r" b="b"/>
             <a:pathLst>
-              <a:path w="11537" h="106">
+              <a:path w="11537" h="107">
                 <a:moveTo>
                   <a:pt x="0" y="0"/>
                 </a:moveTo>
@@ -17051,10 +14938,10 @@
                   <a:pt x="11537" y="0"/>
                 </a:lnTo>
                 <a:lnTo>
-                  <a:pt x="11537" y="106"/>
-                </a:lnTo>
-                <a:lnTo>
-                  <a:pt x="0" y="106"/>
+                  <a:pt x="11537" y="107"/>
+                </a:lnTo>
+                <a:lnTo>
+                  <a:pt x="0" y="107"/>
                 </a:lnTo>
                 <a:lnTo>
                   <a:pt x="0" y="0"/>
@@ -17086,14 +14973,14 @@
       </p:sp>
       <p:sp>
         <p:nvSpPr>
-          <p:cNvPr id="253" name=""/>
+          <p:cNvPr id="232" name=""/>
           <p:cNvSpPr/>
           <p:nvPr/>
         </p:nvSpPr>
         <p:spPr>
           <a:xfrm>
-            <a:off x="456840" y="3238200"/>
-            <a:ext cx="4153320" cy="10080"/>
+            <a:off x="456840" y="3228840"/>
+            <a:ext cx="4153320" cy="9720"/>
           </a:xfrm>
           <a:custGeom>
             <a:avLst/>
@@ -17101,7 +14988,7 @@
             <a:ahLst/>
             <a:rect l="0" t="0" r="r" b="b"/>
             <a:pathLst>
-              <a:path w="11537" h="28">
+              <a:path w="11537" h="27">
                 <a:moveTo>
                   <a:pt x="0" y="0"/>
                 </a:moveTo>
@@ -17109,10 +14996,10 @@
                   <a:pt x="11537" y="0"/>
                 </a:lnTo>
                 <a:lnTo>
-                  <a:pt x="11537" y="28"/>
-                </a:lnTo>
-                <a:lnTo>
-                  <a:pt x="0" y="28"/>
+                  <a:pt x="11537" y="27"/>
+                </a:lnTo>
+                <a:lnTo>
+                  <a:pt x="0" y="27"/>
                 </a:lnTo>
                 <a:lnTo>
                   <a:pt x="0" y="0"/>
@@ -17144,13 +15031,13 @@
       </p:sp>
       <p:sp>
         <p:nvSpPr>
-          <p:cNvPr id="254" name=""/>
+          <p:cNvPr id="233" name=""/>
           <p:cNvSpPr/>
           <p:nvPr/>
         </p:nvSpPr>
         <p:spPr>
           <a:xfrm>
-            <a:off x="4600440" y="2495520"/>
+            <a:off x="4600440" y="2485800"/>
             <a:ext cx="9720" cy="752760"/>
           </a:xfrm>
           <a:custGeom>
@@ -17161,7 +15048,7 @@
             <a:pathLst>
               <a:path w="27" h="2091">
                 <a:moveTo>
-                  <a:pt x="0" y="105"/>
+                  <a:pt x="0" y="106"/>
                 </a:moveTo>
                 <a:lnTo>
                   <a:pt x="0" y="2091"/>
@@ -17173,7 +15060,7 @@
                   <a:pt x="27" y="0"/>
                 </a:lnTo>
                 <a:lnTo>
-                  <a:pt x="0" y="105"/>
+                  <a:pt x="0" y="106"/>
                 </a:lnTo>
                 <a:close/>
               </a:path>
@@ -17202,13 +15089,13 @@
       </p:sp>
       <p:sp>
         <p:nvSpPr>
-          <p:cNvPr id="255" name=""/>
+          <p:cNvPr id="234" name=""/>
           <p:cNvSpPr/>
           <p:nvPr/>
         </p:nvSpPr>
         <p:spPr>
           <a:xfrm>
-            <a:off x="456840" y="2495520"/>
+            <a:off x="456840" y="2485800"/>
             <a:ext cx="10080" cy="752760"/>
           </a:xfrm>
           <a:custGeom>
@@ -17228,7 +15115,7 @@
                   <a:pt x="28" y="2091"/>
                 </a:lnTo>
                 <a:lnTo>
-                  <a:pt x="28" y="105"/>
+                  <a:pt x="28" y="106"/>
                 </a:lnTo>
                 <a:lnTo>
                   <a:pt x="0" y="0"/>
@@ -17260,13 +15147,13 @@
       </p:sp>
       <p:sp>
         <p:nvSpPr>
-          <p:cNvPr id="256" name=""/>
+          <p:cNvPr id="235" name=""/>
           <p:cNvSpPr txBox="1"/>
           <p:nvPr/>
         </p:nvSpPr>
         <p:spPr>
           <a:xfrm>
-            <a:off x="4905360" y="2037600"/>
+            <a:off x="4905360" y="2028240"/>
             <a:ext cx="2899440" cy="157320"/>
           </a:xfrm>
           <a:prstGeom prst="rect">
@@ -17303,13 +15190,13 @@
       </p:sp>
       <p:sp>
         <p:nvSpPr>
-          <p:cNvPr id="257" name=""/>
+          <p:cNvPr id="236" name=""/>
           <p:cNvSpPr txBox="1"/>
           <p:nvPr/>
         </p:nvSpPr>
         <p:spPr>
           <a:xfrm>
-            <a:off x="634320" y="2714040"/>
+            <a:off x="634320" y="2704320"/>
             <a:ext cx="1424160" cy="157320"/>
           </a:xfrm>
           <a:prstGeom prst="rect">
@@ -17346,13 +15233,13 @@
       </p:sp>
       <p:sp>
         <p:nvSpPr>
-          <p:cNvPr id="258" name=""/>
+          <p:cNvPr id="237" name=""/>
           <p:cNvSpPr/>
           <p:nvPr/>
         </p:nvSpPr>
         <p:spPr>
           <a:xfrm>
-            <a:off x="4724280" y="2495520"/>
+            <a:off x="4724280" y="2485800"/>
             <a:ext cx="4153320" cy="752760"/>
           </a:xfrm>
           <a:custGeom>
@@ -17404,14 +15291,14 @@
       </p:sp>
       <p:sp>
         <p:nvSpPr>
-          <p:cNvPr id="259" name=""/>
+          <p:cNvPr id="238" name=""/>
           <p:cNvSpPr/>
           <p:nvPr/>
         </p:nvSpPr>
         <p:spPr>
           <a:xfrm>
-            <a:off x="4724280" y="2495520"/>
-            <a:ext cx="4153320" cy="38160"/>
+            <a:off x="4724280" y="2485800"/>
+            <a:ext cx="4153320" cy="38520"/>
           </a:xfrm>
           <a:custGeom>
             <a:avLst/>
@@ -17419,7 +15306,7 @@
             <a:ahLst/>
             <a:rect l="0" t="0" r="r" b="b"/>
             <a:pathLst>
-              <a:path w="11537" h="106">
+              <a:path w="11537" h="107">
                 <a:moveTo>
                   <a:pt x="0" y="0"/>
                 </a:moveTo>
@@ -17427,10 +15314,10 @@
                   <a:pt x="11537" y="0"/>
                 </a:lnTo>
                 <a:lnTo>
-                  <a:pt x="11537" y="106"/>
-                </a:lnTo>
-                <a:lnTo>
-                  <a:pt x="0" y="106"/>
+                  <a:pt x="11537" y="107"/>
+                </a:lnTo>
+                <a:lnTo>
+                  <a:pt x="0" y="107"/>
                 </a:lnTo>
                 <a:lnTo>
                   <a:pt x="0" y="0"/>
@@ -17462,14 +15349,14 @@
       </p:sp>
       <p:sp>
         <p:nvSpPr>
-          <p:cNvPr id="260" name=""/>
+          <p:cNvPr id="239" name=""/>
           <p:cNvSpPr/>
           <p:nvPr/>
         </p:nvSpPr>
         <p:spPr>
           <a:xfrm>
-            <a:off x="4724280" y="3238200"/>
-            <a:ext cx="4153320" cy="10080"/>
+            <a:off x="4724280" y="3228840"/>
+            <a:ext cx="4153320" cy="9720"/>
           </a:xfrm>
           <a:custGeom>
             <a:avLst/>
@@ -17477,7 +15364,7 @@
             <a:ahLst/>
             <a:rect l="0" t="0" r="r" b="b"/>
             <a:pathLst>
-              <a:path w="11537" h="28">
+              <a:path w="11537" h="27">
                 <a:moveTo>
                   <a:pt x="0" y="0"/>
                 </a:moveTo>
@@ -17485,10 +15372,10 @@
                   <a:pt x="11537" y="0"/>
                 </a:lnTo>
                 <a:lnTo>
-                  <a:pt x="11537" y="28"/>
-                </a:lnTo>
-                <a:lnTo>
-                  <a:pt x="0" y="28"/>
+                  <a:pt x="11537" y="27"/>
+                </a:lnTo>
+                <a:lnTo>
+                  <a:pt x="0" y="27"/>
                 </a:lnTo>
                 <a:lnTo>
                   <a:pt x="0" y="0"/>
@@ -17520,13 +15407,13 @@
       </p:sp>
       <p:sp>
         <p:nvSpPr>
-          <p:cNvPr id="261" name=""/>
+          <p:cNvPr id="240" name=""/>
           <p:cNvSpPr/>
           <p:nvPr/>
         </p:nvSpPr>
         <p:spPr>
           <a:xfrm>
-            <a:off x="8867520" y="2495520"/>
+            <a:off x="8867520" y="2485800"/>
             <a:ext cx="10080" cy="752760"/>
           </a:xfrm>
           <a:custGeom>
@@ -17537,7 +15424,7 @@
             <a:pathLst>
               <a:path w="28" h="2091">
                 <a:moveTo>
-                  <a:pt x="0" y="105"/>
+                  <a:pt x="0" y="106"/>
                 </a:moveTo>
                 <a:lnTo>
                   <a:pt x="0" y="2091"/>
@@ -17549,7 +15436,7 @@
                   <a:pt x="28" y="0"/>
                 </a:lnTo>
                 <a:lnTo>
-                  <a:pt x="0" y="105"/>
+                  <a:pt x="0" y="106"/>
                 </a:lnTo>
                 <a:close/>
               </a:path>
@@ -17578,13 +15465,13 @@
       </p:sp>
       <p:sp>
         <p:nvSpPr>
-          <p:cNvPr id="262" name=""/>
+          <p:cNvPr id="241" name=""/>
           <p:cNvSpPr/>
           <p:nvPr/>
         </p:nvSpPr>
         <p:spPr>
           <a:xfrm>
-            <a:off x="4724280" y="2495520"/>
+            <a:off x="4724280" y="2485800"/>
             <a:ext cx="9720" cy="752760"/>
           </a:xfrm>
           <a:custGeom>
@@ -17604,7 +15491,7 @@
                   <a:pt x="27" y="2091"/>
                 </a:lnTo>
                 <a:lnTo>
-                  <a:pt x="27" y="105"/>
+                  <a:pt x="27" y="106"/>
                 </a:lnTo>
                 <a:lnTo>
                   <a:pt x="0" y="0"/>
@@ -17636,13 +15523,13 @@
       </p:sp>
       <p:sp>
         <p:nvSpPr>
-          <p:cNvPr id="263" name=""/>
+          <p:cNvPr id="242" name=""/>
           <p:cNvSpPr txBox="1"/>
           <p:nvPr/>
         </p:nvSpPr>
         <p:spPr>
           <a:xfrm>
-            <a:off x="634320" y="2913840"/>
+            <a:off x="634320" y="2904480"/>
             <a:ext cx="3038040" cy="157320"/>
           </a:xfrm>
           <a:prstGeom prst="rect">
@@ -17679,13 +15566,13 @@
       </p:sp>
       <p:sp>
         <p:nvSpPr>
-          <p:cNvPr id="264" name=""/>
+          <p:cNvPr id="243" name=""/>
           <p:cNvSpPr txBox="1"/>
           <p:nvPr/>
         </p:nvSpPr>
         <p:spPr>
           <a:xfrm>
-            <a:off x="4905360" y="2714040"/>
+            <a:off x="4905360" y="2704320"/>
             <a:ext cx="732240" cy="157320"/>
           </a:xfrm>
           <a:prstGeom prst="rect">
@@ -17722,14 +15609,14 @@
       </p:sp>
       <p:sp>
         <p:nvSpPr>
-          <p:cNvPr id="265" name=""/>
+          <p:cNvPr id="244" name=""/>
           <p:cNvSpPr/>
           <p:nvPr/>
         </p:nvSpPr>
         <p:spPr>
           <a:xfrm>
             <a:off x="456840" y="3428640"/>
-            <a:ext cx="8420760" cy="591120"/>
+            <a:ext cx="8420760" cy="600480"/>
           </a:xfrm>
           <a:custGeom>
             <a:avLst/>
@@ -17737,7 +15624,7 @@
             <a:ahLst/>
             <a:rect l="0" t="0" r="r" b="b"/>
             <a:pathLst>
-              <a:path w="23391" h="1642">
+              <a:path w="23391" h="1668">
                 <a:moveTo>
                   <a:pt x="0" y="0"/>
                 </a:moveTo>
@@ -17745,10 +15632,10 @@
                   <a:pt x="23391" y="0"/>
                 </a:lnTo>
                 <a:lnTo>
-                  <a:pt x="23391" y="1642"/>
-                </a:lnTo>
-                <a:lnTo>
-                  <a:pt x="0" y="1642"/>
+                  <a:pt x="23391" y="1668"/>
+                </a:lnTo>
+                <a:lnTo>
+                  <a:pt x="0" y="1668"/>
                 </a:lnTo>
                 <a:lnTo>
                   <a:pt x="0" y="0"/>
@@ -17780,7 +15667,7 @@
       </p:sp>
       <p:sp>
         <p:nvSpPr>
-          <p:cNvPr id="266" name=""/>
+          <p:cNvPr id="245" name=""/>
           <p:cNvSpPr/>
           <p:nvPr/>
         </p:nvSpPr>
@@ -17838,14 +15725,14 @@
       </p:sp>
       <p:sp>
         <p:nvSpPr>
-          <p:cNvPr id="267" name=""/>
+          <p:cNvPr id="246" name=""/>
           <p:cNvSpPr/>
           <p:nvPr/>
         </p:nvSpPr>
         <p:spPr>
           <a:xfrm>
-            <a:off x="456840" y="4009680"/>
-            <a:ext cx="8420760" cy="10080"/>
+            <a:off x="456840" y="4019400"/>
+            <a:ext cx="8420760" cy="9720"/>
           </a:xfrm>
           <a:custGeom>
             <a:avLst/>
@@ -17853,7 +15740,7 @@
             <a:ahLst/>
             <a:rect l="0" t="0" r="r" b="b"/>
             <a:pathLst>
-              <a:path w="23391" h="28">
+              <a:path w="23391" h="27">
                 <a:moveTo>
                   <a:pt x="0" y="0"/>
                 </a:moveTo>
@@ -17861,10 +15748,10 @@
                   <a:pt x="23391" y="0"/>
                 </a:lnTo>
                 <a:lnTo>
-                  <a:pt x="23391" y="28"/>
-                </a:lnTo>
-                <a:lnTo>
-                  <a:pt x="0" y="28"/>
+                  <a:pt x="23391" y="27"/>
+                </a:lnTo>
+                <a:lnTo>
+                  <a:pt x="0" y="27"/>
                 </a:lnTo>
                 <a:lnTo>
                   <a:pt x="0" y="0"/>
@@ -17896,14 +15783,14 @@
       </p:sp>
       <p:sp>
         <p:nvSpPr>
-          <p:cNvPr id="268" name=""/>
+          <p:cNvPr id="247" name=""/>
           <p:cNvSpPr/>
           <p:nvPr/>
         </p:nvSpPr>
         <p:spPr>
           <a:xfrm>
             <a:off x="8867520" y="3428640"/>
-            <a:ext cx="10080" cy="591120"/>
+            <a:ext cx="10080" cy="600480"/>
           </a:xfrm>
           <a:custGeom>
             <a:avLst/>
@@ -17911,15 +15798,15 @@
             <a:ahLst/>
             <a:rect l="0" t="0" r="r" b="b"/>
             <a:pathLst>
-              <a:path w="28" h="1642">
+              <a:path w="28" h="1668">
                 <a:moveTo>
                   <a:pt x="0" y="106"/>
                 </a:moveTo>
                 <a:lnTo>
-                  <a:pt x="0" y="1642"/>
-                </a:lnTo>
-                <a:lnTo>
-                  <a:pt x="28" y="1642"/>
+                  <a:pt x="0" y="1668"/>
+                </a:lnTo>
+                <a:lnTo>
+                  <a:pt x="28" y="1668"/>
                 </a:lnTo>
                 <a:lnTo>
                   <a:pt x="28" y="0"/>
@@ -17954,14 +15841,14 @@
       </p:sp>
       <p:sp>
         <p:nvSpPr>
-          <p:cNvPr id="269" name=""/>
+          <p:cNvPr id="248" name=""/>
           <p:cNvSpPr/>
           <p:nvPr/>
         </p:nvSpPr>
         <p:spPr>
           <a:xfrm>
             <a:off x="456840" y="3428640"/>
-            <a:ext cx="10080" cy="591120"/>
+            <a:ext cx="10080" cy="600480"/>
           </a:xfrm>
           <a:custGeom>
             <a:avLst/>
@@ -17969,15 +15856,15 @@
             <a:ahLst/>
             <a:rect l="0" t="0" r="r" b="b"/>
             <a:pathLst>
-              <a:path w="28" h="1642">
+              <a:path w="28" h="1668">
                 <a:moveTo>
                   <a:pt x="0" y="0"/>
                 </a:moveTo>
                 <a:lnTo>
-                  <a:pt x="0" y="1642"/>
-                </a:lnTo>
-                <a:lnTo>
-                  <a:pt x="28" y="1642"/>
+                  <a:pt x="0" y="1668"/>
+                </a:lnTo>
+                <a:lnTo>
+                  <a:pt x="28" y="1668"/>
                 </a:lnTo>
                 <a:lnTo>
                   <a:pt x="28" y="106"/>
@@ -18012,13 +15899,13 @@
       </p:sp>
       <p:sp>
         <p:nvSpPr>
-          <p:cNvPr id="270" name=""/>
+          <p:cNvPr id="249" name=""/>
           <p:cNvSpPr txBox="1"/>
           <p:nvPr/>
         </p:nvSpPr>
         <p:spPr>
           <a:xfrm>
-            <a:off x="4905360" y="2913840"/>
+            <a:off x="4905360" y="2904480"/>
             <a:ext cx="3018240" cy="157320"/>
           </a:xfrm>
           <a:prstGeom prst="rect">
@@ -18055,14 +15942,14 @@
       </p:sp>
       <p:sp>
         <p:nvSpPr>
-          <p:cNvPr id="271" name=""/>
+          <p:cNvPr id="250" name=""/>
           <p:cNvSpPr txBox="1"/>
           <p:nvPr/>
         </p:nvSpPr>
         <p:spPr>
           <a:xfrm>
-            <a:off x="2347920" y="3652200"/>
-            <a:ext cx="5395680" cy="186480"/>
+            <a:off x="2990880" y="3654360"/>
+            <a:ext cx="4071240" cy="195480"/>
           </a:xfrm>
           <a:prstGeom prst="rect">
             <a:avLst/>
@@ -18078,37 +15965,27 @@
           </a:bodyPr>
           <a:p>
             <a:r>
-              <a:rPr b="1" lang="en-US" sz="1260" spc="-1" strike="noStrike">
+              <a:rPr b="1" lang="en-US" sz="1320" spc="-1" strike="noStrike">
                 <a:solidFill>
                   <a:srgbClr val="3d68ec"/>
                 </a:solidFill>
                 <a:latin typeface="Arial"/>
                 <a:ea typeface="Arial"/>
               </a:rPr>
-              <a:t>Vraag aan de werkgroep:</a:t>
+              <a:t>Welke instellingen toetsen dit najaar mee?</a:t>
             </a:r>
-            <a:r>
-              <a:rPr b="0" lang="en-US" sz="1260" spc="-1" strike="noStrike">
-                <a:solidFill>
-                  <a:srgbClr val="1a1a2e"/>
-                </a:solidFill>
-                <a:latin typeface="Arial"/>
-                <a:ea typeface="Arial"/>
-              </a:rPr>
-              <a:t> herkennen de instellingen zich hierin?</a:t>
-            </a:r>
-            <a:endParaRPr b="0" lang="en-US" sz="1260" spc="-1" strike="noStrike">
-              <a:solidFill>
-                <a:srgbClr val="000000"/>
-              </a:solidFill>
-              <a:latin typeface="DejaVu Serif"/>
-            </a:endParaRPr>
-          </a:p>
-        </p:txBody>
-      </p:sp>
-      <p:sp>
-        <p:nvSpPr>
-          <p:cNvPr id="272" name=""/>
+            <a:endParaRPr b="0" lang="en-US" sz="1320" spc="-1" strike="noStrike">
+              <a:solidFill>
+                <a:srgbClr val="000000"/>
+              </a:solidFill>
+              <a:latin typeface="DejaVu Serif"/>
+            </a:endParaRPr>
+          </a:p>
+        </p:txBody>
+      </p:sp>
+      <p:sp>
+        <p:nvSpPr>
+          <p:cNvPr id="251" name=""/>
           <p:cNvSpPr txBox="1"/>
           <p:nvPr/>
         </p:nvSpPr>

--- a/presentaties/export/260929_werkgroep_okx_voortgang/260929_werkgroep_okx_voortgang.pptx
+++ b/presentaties/export/260929_werkgroep_okx_voortgang/260929_werkgroep_okx_voortgang.pptx
@@ -3023,13 +3023,1103 @@
       <p:sp>
         <p:nvSpPr>
           <p:cNvPr id="55" name=""/>
+          <p:cNvSpPr/>
+          <p:nvPr/>
+        </p:nvSpPr>
+        <p:spPr>
+          <a:xfrm>
+            <a:off x="461880" y="1885680"/>
+            <a:ext cx="2590920" cy="1195920"/>
+          </a:xfrm>
+          <a:custGeom>
+            <a:avLst/>
+            <a:gdLst/>
+            <a:ahLst/>
+            <a:rect l="0" t="0" r="r" b="b"/>
+            <a:pathLst>
+              <a:path w="7197" h="3322">
+                <a:moveTo>
+                  <a:pt x="0" y="3016"/>
+                </a:moveTo>
+                <a:lnTo>
+                  <a:pt x="0" y="265"/>
+                </a:lnTo>
+                <a:cubicBezTo>
+                  <a:pt x="0" y="247"/>
+                  <a:pt x="2" y="230"/>
+                  <a:pt x="6" y="213"/>
+                </a:cubicBezTo>
+                <a:cubicBezTo>
+                  <a:pt x="9" y="196"/>
+                  <a:pt x="15" y="180"/>
+                  <a:pt x="23" y="164"/>
+                </a:cubicBezTo>
+                <a:cubicBezTo>
+                  <a:pt x="31" y="148"/>
+                  <a:pt x="40" y="132"/>
+                  <a:pt x="51" y="118"/>
+                </a:cubicBezTo>
+                <a:cubicBezTo>
+                  <a:pt x="62" y="103"/>
+                  <a:pt x="75" y="90"/>
+                  <a:pt x="89" y="78"/>
+                </a:cubicBezTo>
+                <a:cubicBezTo>
+                  <a:pt x="103" y="65"/>
+                  <a:pt x="118" y="54"/>
+                  <a:pt x="135" y="45"/>
+                </a:cubicBezTo>
+                <a:cubicBezTo>
+                  <a:pt x="152" y="35"/>
+                  <a:pt x="169" y="27"/>
+                  <a:pt x="188" y="20"/>
+                </a:cubicBezTo>
+                <a:cubicBezTo>
+                  <a:pt x="206" y="14"/>
+                  <a:pt x="225" y="9"/>
+                  <a:pt x="245" y="5"/>
+                </a:cubicBezTo>
+                <a:cubicBezTo>
+                  <a:pt x="264" y="2"/>
+                  <a:pt x="284" y="0"/>
+                  <a:pt x="304" y="0"/>
+                </a:cubicBezTo>
+                <a:lnTo>
+                  <a:pt x="6893" y="0"/>
+                </a:lnTo>
+                <a:cubicBezTo>
+                  <a:pt x="6913" y="0"/>
+                  <a:pt x="6933" y="2"/>
+                  <a:pt x="6952" y="5"/>
+                </a:cubicBezTo>
+                <a:cubicBezTo>
+                  <a:pt x="6972" y="9"/>
+                  <a:pt x="6991" y="14"/>
+                  <a:pt x="7010" y="20"/>
+                </a:cubicBezTo>
+                <a:cubicBezTo>
+                  <a:pt x="7028" y="27"/>
+                  <a:pt x="7046" y="35"/>
+                  <a:pt x="7062" y="45"/>
+                </a:cubicBezTo>
+                <a:cubicBezTo>
+                  <a:pt x="7079" y="54"/>
+                  <a:pt x="7094" y="65"/>
+                  <a:pt x="7108" y="78"/>
+                </a:cubicBezTo>
+                <a:cubicBezTo>
+                  <a:pt x="7122" y="90"/>
+                  <a:pt x="7135" y="103"/>
+                  <a:pt x="7146" y="118"/>
+                </a:cubicBezTo>
+                <a:cubicBezTo>
+                  <a:pt x="7157" y="132"/>
+                  <a:pt x="7167" y="148"/>
+                  <a:pt x="7174" y="164"/>
+                </a:cubicBezTo>
+                <a:cubicBezTo>
+                  <a:pt x="7182" y="180"/>
+                  <a:pt x="7188" y="196"/>
+                  <a:pt x="7192" y="213"/>
+                </a:cubicBezTo>
+                <a:cubicBezTo>
+                  <a:pt x="7195" y="230"/>
+                  <a:pt x="7197" y="247"/>
+                  <a:pt x="7197" y="265"/>
+                </a:cubicBezTo>
+                <a:lnTo>
+                  <a:pt x="7197" y="3016"/>
+                </a:lnTo>
+                <a:cubicBezTo>
+                  <a:pt x="7197" y="3036"/>
+                  <a:pt x="7195" y="3056"/>
+                  <a:pt x="7192" y="3077"/>
+                </a:cubicBezTo>
+                <a:cubicBezTo>
+                  <a:pt x="7188" y="3096"/>
+                  <a:pt x="7182" y="3115"/>
+                  <a:pt x="7174" y="3134"/>
+                </a:cubicBezTo>
+                <a:cubicBezTo>
+                  <a:pt x="7167" y="3152"/>
+                  <a:pt x="7157" y="3170"/>
+                  <a:pt x="7146" y="3187"/>
+                </a:cubicBezTo>
+                <a:cubicBezTo>
+                  <a:pt x="7135" y="3203"/>
+                  <a:pt x="7122" y="3219"/>
+                  <a:pt x="7108" y="3233"/>
+                </a:cubicBezTo>
+                <a:cubicBezTo>
+                  <a:pt x="7094" y="3247"/>
+                  <a:pt x="7079" y="3259"/>
+                  <a:pt x="7062" y="3270"/>
+                </a:cubicBezTo>
+                <a:cubicBezTo>
+                  <a:pt x="7046" y="3282"/>
+                  <a:pt x="7028" y="3291"/>
+                  <a:pt x="7010" y="3299"/>
+                </a:cubicBezTo>
+                <a:cubicBezTo>
+                  <a:pt x="6991" y="3306"/>
+                  <a:pt x="6972" y="3312"/>
+                  <a:pt x="6952" y="3316"/>
+                </a:cubicBezTo>
+                <a:cubicBezTo>
+                  <a:pt x="6933" y="3320"/>
+                  <a:pt x="6913" y="3322"/>
+                  <a:pt x="6893" y="3322"/>
+                </a:cubicBezTo>
+                <a:lnTo>
+                  <a:pt x="304" y="3322"/>
+                </a:lnTo>
+                <a:cubicBezTo>
+                  <a:pt x="284" y="3322"/>
+                  <a:pt x="264" y="3320"/>
+                  <a:pt x="245" y="3316"/>
+                </a:cubicBezTo>
+                <a:cubicBezTo>
+                  <a:pt x="225" y="3312"/>
+                  <a:pt x="206" y="3306"/>
+                  <a:pt x="188" y="3299"/>
+                </a:cubicBezTo>
+                <a:cubicBezTo>
+                  <a:pt x="169" y="3291"/>
+                  <a:pt x="152" y="3282"/>
+                  <a:pt x="135" y="3270"/>
+                </a:cubicBezTo>
+                <a:cubicBezTo>
+                  <a:pt x="118" y="3259"/>
+                  <a:pt x="103" y="3247"/>
+                  <a:pt x="89" y="3233"/>
+                </a:cubicBezTo>
+                <a:cubicBezTo>
+                  <a:pt x="75" y="3219"/>
+                  <a:pt x="62" y="3203"/>
+                  <a:pt x="51" y="3187"/>
+                </a:cubicBezTo>
+                <a:cubicBezTo>
+                  <a:pt x="40" y="3170"/>
+                  <a:pt x="31" y="3152"/>
+                  <a:pt x="23" y="3134"/>
+                </a:cubicBezTo>
+                <a:cubicBezTo>
+                  <a:pt x="15" y="3115"/>
+                  <a:pt x="9" y="3096"/>
+                  <a:pt x="6" y="3077"/>
+                </a:cubicBezTo>
+                <a:cubicBezTo>
+                  <a:pt x="2" y="3056"/>
+                  <a:pt x="0" y="3036"/>
+                  <a:pt x="0" y="3016"/>
+                </a:cubicBezTo>
+                <a:close/>
+              </a:path>
+            </a:pathLst>
+          </a:custGeom>
+          <a:solidFill>
+            <a:srgbClr val="ffffff"/>
+          </a:solidFill>
+          <a:ln w="0">
+            <a:noFill/>
+          </a:ln>
+        </p:spPr>
+        <p:txBody>
+          <a:bodyPr lIns="0" rIns="0" tIns="0" bIns="0" anchor="t">
+            <a:noAutofit/>
+          </a:bodyPr>
+          <a:p>
+            <a:endParaRPr b="0" lang="en-US" sz="2400" spc="-1" strike="noStrike">
+              <a:solidFill>
+                <a:srgbClr val="000000"/>
+              </a:solidFill>
+              <a:latin typeface="DejaVu Serif"/>
+            </a:endParaRPr>
+          </a:p>
+        </p:txBody>
+      </p:sp>
+      <p:sp>
+        <p:nvSpPr>
+          <p:cNvPr id="56" name=""/>
+          <p:cNvSpPr/>
+          <p:nvPr/>
+        </p:nvSpPr>
+        <p:spPr>
+          <a:xfrm>
+            <a:off x="456840" y="1866600"/>
+            <a:ext cx="2601000" cy="1219680"/>
+          </a:xfrm>
+          <a:custGeom>
+            <a:avLst/>
+            <a:gdLst/>
+            <a:ahLst/>
+            <a:rect l="0" t="0" r="r" b="b"/>
+            <a:pathLst>
+              <a:path w="7225" h="3388">
+                <a:moveTo>
+                  <a:pt x="0" y="0"/>
+                </a:moveTo>
+                <a:lnTo>
+                  <a:pt x="7225" y="0"/>
+                </a:lnTo>
+                <a:lnTo>
+                  <a:pt x="7225" y="3388"/>
+                </a:lnTo>
+                <a:lnTo>
+                  <a:pt x="0" y="3388"/>
+                </a:lnTo>
+                <a:lnTo>
+                  <a:pt x="0" y="0"/>
+                </a:lnTo>
+                <a:close/>
+              </a:path>
+            </a:pathLst>
+          </a:custGeom>
+          <a:solidFill>
+            <a:srgbClr val="dd784b"/>
+          </a:solidFill>
+          <a:ln w="0">
+            <a:noFill/>
+          </a:ln>
+        </p:spPr>
+        <p:txBody>
+          <a:bodyPr lIns="0" rIns="0" tIns="0" bIns="0" anchor="t">
+            <a:noAutofit/>
+          </a:bodyPr>
+          <a:p>
+            <a:endParaRPr b="0" lang="en-US" sz="2400" spc="-1" strike="noStrike">
+              <a:solidFill>
+                <a:srgbClr val="000000"/>
+              </a:solidFill>
+              <a:latin typeface="DejaVu Serif"/>
+            </a:endParaRPr>
+          </a:p>
+        </p:txBody>
+      </p:sp>
+      <p:sp>
+        <p:nvSpPr>
+          <p:cNvPr id="57" name=""/>
+          <p:cNvSpPr/>
+          <p:nvPr/>
+        </p:nvSpPr>
+        <p:spPr>
+          <a:xfrm>
+            <a:off x="456840" y="1866600"/>
+            <a:ext cx="2601000" cy="1219680"/>
+          </a:xfrm>
+          <a:custGeom>
+            <a:avLst/>
+            <a:gdLst/>
+            <a:ahLst/>
+            <a:rect l="0" t="0" r="r" b="b"/>
+            <a:pathLst>
+              <a:path w="7225" h="3388">
+                <a:moveTo>
+                  <a:pt x="0" y="0"/>
+                </a:moveTo>
+                <a:lnTo>
+                  <a:pt x="7225" y="0"/>
+                </a:lnTo>
+                <a:lnTo>
+                  <a:pt x="7225" y="3388"/>
+                </a:lnTo>
+                <a:lnTo>
+                  <a:pt x="0" y="3388"/>
+                </a:lnTo>
+                <a:lnTo>
+                  <a:pt x="0" y="0"/>
+                </a:lnTo>
+                <a:close/>
+              </a:path>
+            </a:pathLst>
+          </a:custGeom>
+          <a:solidFill>
+            <a:srgbClr val="e5e7eb"/>
+          </a:solidFill>
+          <a:ln w="0">
+            <a:noFill/>
+          </a:ln>
+        </p:spPr>
+        <p:txBody>
+          <a:bodyPr lIns="0" rIns="0" tIns="0" bIns="0" anchor="t">
+            <a:noAutofit/>
+          </a:bodyPr>
+          <a:p>
+            <a:endParaRPr b="0" lang="en-US" sz="2400" spc="-1" strike="noStrike">
+              <a:solidFill>
+                <a:srgbClr val="000000"/>
+              </a:solidFill>
+              <a:latin typeface="DejaVu Serif"/>
+            </a:endParaRPr>
+          </a:p>
+        </p:txBody>
+      </p:sp>
+      <p:sp>
+        <p:nvSpPr>
+          <p:cNvPr id="58" name=""/>
+          <p:cNvSpPr/>
+          <p:nvPr/>
+        </p:nvSpPr>
+        <p:spPr>
+          <a:xfrm>
+            <a:off x="456840" y="1866600"/>
+            <a:ext cx="2601000" cy="1219680"/>
+          </a:xfrm>
+          <a:custGeom>
+            <a:avLst/>
+            <a:gdLst/>
+            <a:ahLst/>
+            <a:rect l="0" t="0" r="r" b="b"/>
+            <a:pathLst>
+              <a:path w="7225" h="3388">
+                <a:moveTo>
+                  <a:pt x="0" y="0"/>
+                </a:moveTo>
+                <a:lnTo>
+                  <a:pt x="7225" y="0"/>
+                </a:lnTo>
+                <a:lnTo>
+                  <a:pt x="7225" y="3388"/>
+                </a:lnTo>
+                <a:lnTo>
+                  <a:pt x="0" y="3388"/>
+                </a:lnTo>
+                <a:lnTo>
+                  <a:pt x="0" y="0"/>
+                </a:lnTo>
+                <a:close/>
+              </a:path>
+            </a:pathLst>
+          </a:custGeom>
+          <a:solidFill>
+            <a:srgbClr val="e5e7eb"/>
+          </a:solidFill>
+          <a:ln w="0">
+            <a:noFill/>
+          </a:ln>
+        </p:spPr>
+        <p:txBody>
+          <a:bodyPr lIns="0" rIns="0" tIns="0" bIns="0" anchor="t">
+            <a:noAutofit/>
+          </a:bodyPr>
+          <a:p>
+            <a:endParaRPr b="0" lang="en-US" sz="2400" spc="-1" strike="noStrike">
+              <a:solidFill>
+                <a:srgbClr val="000000"/>
+              </a:solidFill>
+              <a:latin typeface="DejaVu Serif"/>
+            </a:endParaRPr>
+          </a:p>
+        </p:txBody>
+      </p:sp>
+      <p:sp>
+        <p:nvSpPr>
+          <p:cNvPr id="59" name=""/>
+          <p:cNvSpPr/>
+          <p:nvPr/>
+        </p:nvSpPr>
+        <p:spPr>
+          <a:xfrm>
+            <a:off x="456840" y="1866600"/>
+            <a:ext cx="2601000" cy="1219680"/>
+          </a:xfrm>
+          <a:custGeom>
+            <a:avLst/>
+            <a:gdLst/>
+            <a:ahLst/>
+            <a:rect l="0" t="0" r="r" b="b"/>
+            <a:pathLst>
+              <a:path w="7225" h="3388">
+                <a:moveTo>
+                  <a:pt x="0" y="0"/>
+                </a:moveTo>
+                <a:lnTo>
+                  <a:pt x="7225" y="0"/>
+                </a:lnTo>
+                <a:lnTo>
+                  <a:pt x="7225" y="3388"/>
+                </a:lnTo>
+                <a:lnTo>
+                  <a:pt x="0" y="3388"/>
+                </a:lnTo>
+                <a:lnTo>
+                  <a:pt x="0" y="0"/>
+                </a:lnTo>
+                <a:close/>
+              </a:path>
+            </a:pathLst>
+          </a:custGeom>
+          <a:solidFill>
+            <a:srgbClr val="e5e7eb"/>
+          </a:solidFill>
+          <a:ln w="0">
+            <a:noFill/>
+          </a:ln>
+        </p:spPr>
+        <p:txBody>
+          <a:bodyPr lIns="0" rIns="0" tIns="0" bIns="0" anchor="t">
+            <a:noAutofit/>
+          </a:bodyPr>
+          <a:p>
+            <a:endParaRPr b="0" lang="en-US" sz="2400" spc="-1" strike="noStrike">
+              <a:solidFill>
+                <a:srgbClr val="000000"/>
+              </a:solidFill>
+              <a:latin typeface="DejaVu Serif"/>
+            </a:endParaRPr>
+          </a:p>
+        </p:txBody>
+      </p:sp>
+      <p:sp>
+        <p:nvSpPr>
+          <p:cNvPr id="60" name=""/>
+          <p:cNvSpPr/>
+          <p:nvPr/>
+        </p:nvSpPr>
+        <p:spPr>
+          <a:xfrm>
+            <a:off x="657360" y="2067120"/>
+            <a:ext cx="272160" cy="272160"/>
+          </a:xfrm>
+          <a:custGeom>
+            <a:avLst/>
+            <a:gdLst/>
+            <a:ahLst/>
+            <a:rect l="0" t="0" r="r" b="b"/>
+            <a:pathLst>
+              <a:path w="756" h="756">
+                <a:moveTo>
+                  <a:pt x="756" y="756"/>
+                </a:moveTo>
+                <a:lnTo>
+                  <a:pt x="703" y="756"/>
+                </a:lnTo>
+                <a:lnTo>
+                  <a:pt x="703" y="620"/>
+                </a:lnTo>
+                <a:cubicBezTo>
+                  <a:pt x="702" y="603"/>
+                  <a:pt x="699" y="585"/>
+                  <a:pt x="692" y="569"/>
+                </a:cubicBezTo>
+                <a:cubicBezTo>
+                  <a:pt x="685" y="552"/>
+                  <a:pt x="676" y="538"/>
+                  <a:pt x="663" y="525"/>
+                </a:cubicBezTo>
+                <a:cubicBezTo>
+                  <a:pt x="650" y="512"/>
+                  <a:pt x="636" y="503"/>
+                  <a:pt x="619" y="496"/>
+                </a:cubicBezTo>
+                <a:cubicBezTo>
+                  <a:pt x="603" y="489"/>
+                  <a:pt x="586" y="486"/>
+                  <a:pt x="568" y="486"/>
+                </a:cubicBezTo>
+                <a:lnTo>
+                  <a:pt x="568" y="432"/>
+                </a:lnTo>
+                <a:cubicBezTo>
+                  <a:pt x="580" y="432"/>
+                  <a:pt x="592" y="433"/>
+                  <a:pt x="604" y="435"/>
+                </a:cubicBezTo>
+                <a:cubicBezTo>
+                  <a:pt x="617" y="438"/>
+                  <a:pt x="628" y="441"/>
+                  <a:pt x="640" y="446"/>
+                </a:cubicBezTo>
+                <a:cubicBezTo>
+                  <a:pt x="651" y="451"/>
+                  <a:pt x="662" y="457"/>
+                  <a:pt x="672" y="463"/>
+                </a:cubicBezTo>
+                <a:cubicBezTo>
+                  <a:pt x="683" y="470"/>
+                  <a:pt x="692" y="478"/>
+                  <a:pt x="701" y="487"/>
+                </a:cubicBezTo>
+                <a:cubicBezTo>
+                  <a:pt x="710" y="496"/>
+                  <a:pt x="718" y="505"/>
+                  <a:pt x="725" y="516"/>
+                </a:cubicBezTo>
+                <a:cubicBezTo>
+                  <a:pt x="731" y="526"/>
+                  <a:pt x="737" y="537"/>
+                  <a:pt x="742" y="548"/>
+                </a:cubicBezTo>
+                <a:cubicBezTo>
+                  <a:pt x="747" y="560"/>
+                  <a:pt x="750" y="571"/>
+                  <a:pt x="753" y="584"/>
+                </a:cubicBezTo>
+                <a:cubicBezTo>
+                  <a:pt x="755" y="596"/>
+                  <a:pt x="756" y="608"/>
+                  <a:pt x="756" y="620"/>
+                </a:cubicBezTo>
+                <a:lnTo>
+                  <a:pt x="756" y="756"/>
+                </a:lnTo>
+                <a:moveTo>
+                  <a:pt x="541" y="756"/>
+                </a:moveTo>
+                <a:lnTo>
+                  <a:pt x="487" y="756"/>
+                </a:lnTo>
+                <a:lnTo>
+                  <a:pt x="487" y="620"/>
+                </a:lnTo>
+                <a:cubicBezTo>
+                  <a:pt x="487" y="603"/>
+                  <a:pt x="483" y="585"/>
+                  <a:pt x="476" y="569"/>
+                </a:cubicBezTo>
+                <a:cubicBezTo>
+                  <a:pt x="470" y="552"/>
+                  <a:pt x="460" y="538"/>
+                  <a:pt x="447" y="525"/>
+                </a:cubicBezTo>
+                <a:cubicBezTo>
+                  <a:pt x="435" y="512"/>
+                  <a:pt x="420" y="503"/>
+                  <a:pt x="403" y="496"/>
+                </a:cubicBezTo>
+                <a:cubicBezTo>
+                  <a:pt x="387" y="489"/>
+                  <a:pt x="370" y="486"/>
+                  <a:pt x="352" y="486"/>
+                </a:cubicBezTo>
+                <a:lnTo>
+                  <a:pt x="190" y="486"/>
+                </a:lnTo>
+                <a:cubicBezTo>
+                  <a:pt x="172" y="486"/>
+                  <a:pt x="155" y="489"/>
+                  <a:pt x="138" y="496"/>
+                </a:cubicBezTo>
+                <a:cubicBezTo>
+                  <a:pt x="122" y="503"/>
+                  <a:pt x="107" y="512"/>
+                  <a:pt x="95" y="525"/>
+                </a:cubicBezTo>
+                <a:cubicBezTo>
+                  <a:pt x="82" y="538"/>
+                  <a:pt x="72" y="552"/>
+                  <a:pt x="65" y="569"/>
+                </a:cubicBezTo>
+                <a:cubicBezTo>
+                  <a:pt x="58" y="585"/>
+                  <a:pt x="54" y="603"/>
+                  <a:pt x="54" y="620"/>
+                </a:cubicBezTo>
+                <a:lnTo>
+                  <a:pt x="54" y="756"/>
+                </a:lnTo>
+                <a:lnTo>
+                  <a:pt x="0" y="756"/>
+                </a:lnTo>
+                <a:lnTo>
+                  <a:pt x="0" y="620"/>
+                </a:lnTo>
+                <a:cubicBezTo>
+                  <a:pt x="0" y="608"/>
+                  <a:pt x="1" y="596"/>
+                  <a:pt x="4" y="584"/>
+                </a:cubicBezTo>
+                <a:cubicBezTo>
+                  <a:pt x="6" y="571"/>
+                  <a:pt x="10" y="560"/>
+                  <a:pt x="15" y="548"/>
+                </a:cubicBezTo>
+                <a:cubicBezTo>
+                  <a:pt x="19" y="537"/>
+                  <a:pt x="25" y="526"/>
+                  <a:pt x="32" y="516"/>
+                </a:cubicBezTo>
+                <a:cubicBezTo>
+                  <a:pt x="39" y="505"/>
+                  <a:pt x="47" y="496"/>
+                  <a:pt x="56" y="487"/>
+                </a:cubicBezTo>
+                <a:cubicBezTo>
+                  <a:pt x="65" y="478"/>
+                  <a:pt x="75" y="470"/>
+                  <a:pt x="85" y="463"/>
+                </a:cubicBezTo>
+                <a:cubicBezTo>
+                  <a:pt x="95" y="457"/>
+                  <a:pt x="106" y="451"/>
+                  <a:pt x="118" y="446"/>
+                </a:cubicBezTo>
+                <a:cubicBezTo>
+                  <a:pt x="129" y="441"/>
+                  <a:pt x="141" y="438"/>
+                  <a:pt x="153" y="435"/>
+                </a:cubicBezTo>
+                <a:cubicBezTo>
+                  <a:pt x="165" y="433"/>
+                  <a:pt x="178" y="432"/>
+                  <a:pt x="190" y="432"/>
+                </a:cubicBezTo>
+                <a:lnTo>
+                  <a:pt x="352" y="432"/>
+                </a:lnTo>
+                <a:cubicBezTo>
+                  <a:pt x="364" y="432"/>
+                  <a:pt x="377" y="433"/>
+                  <a:pt x="389" y="435"/>
+                </a:cubicBezTo>
+                <a:cubicBezTo>
+                  <a:pt x="401" y="438"/>
+                  <a:pt x="413" y="441"/>
+                  <a:pt x="424" y="446"/>
+                </a:cubicBezTo>
+                <a:cubicBezTo>
+                  <a:pt x="436" y="451"/>
+                  <a:pt x="446" y="457"/>
+                  <a:pt x="457" y="463"/>
+                </a:cubicBezTo>
+                <a:cubicBezTo>
+                  <a:pt x="467" y="470"/>
+                  <a:pt x="477" y="478"/>
+                  <a:pt x="485" y="487"/>
+                </a:cubicBezTo>
+                <a:cubicBezTo>
+                  <a:pt x="494" y="496"/>
+                  <a:pt x="502" y="505"/>
+                  <a:pt x="509" y="516"/>
+                </a:cubicBezTo>
+                <a:cubicBezTo>
+                  <a:pt x="516" y="526"/>
+                  <a:pt x="521" y="537"/>
+                  <a:pt x="526" y="548"/>
+                </a:cubicBezTo>
+                <a:cubicBezTo>
+                  <a:pt x="531" y="560"/>
+                  <a:pt x="535" y="571"/>
+                  <a:pt x="537" y="584"/>
+                </a:cubicBezTo>
+                <a:cubicBezTo>
+                  <a:pt x="539" y="596"/>
+                  <a:pt x="541" y="608"/>
+                  <a:pt x="541" y="620"/>
+                </a:cubicBezTo>
+                <a:lnTo>
+                  <a:pt x="541" y="756"/>
+                </a:lnTo>
+                <a:moveTo>
+                  <a:pt x="487" y="0"/>
+                </a:moveTo>
+                <a:lnTo>
+                  <a:pt x="487" y="54"/>
+                </a:lnTo>
+                <a:cubicBezTo>
+                  <a:pt x="505" y="54"/>
+                  <a:pt x="522" y="57"/>
+                  <a:pt x="538" y="64"/>
+                </a:cubicBezTo>
+                <a:cubicBezTo>
+                  <a:pt x="555" y="71"/>
+                  <a:pt x="569" y="81"/>
+                  <a:pt x="582" y="93"/>
+                </a:cubicBezTo>
+                <a:cubicBezTo>
+                  <a:pt x="595" y="106"/>
+                  <a:pt x="604" y="121"/>
+                  <a:pt x="611" y="137"/>
+                </a:cubicBezTo>
+                <a:cubicBezTo>
+                  <a:pt x="618" y="154"/>
+                  <a:pt x="622" y="171"/>
+                  <a:pt x="622" y="189"/>
+                </a:cubicBezTo>
+                <a:cubicBezTo>
+                  <a:pt x="622" y="207"/>
+                  <a:pt x="618" y="224"/>
+                  <a:pt x="611" y="240"/>
+                </a:cubicBezTo>
+                <a:cubicBezTo>
+                  <a:pt x="604" y="257"/>
+                  <a:pt x="595" y="272"/>
+                  <a:pt x="582" y="284"/>
+                </a:cubicBezTo>
+                <a:cubicBezTo>
+                  <a:pt x="569" y="297"/>
+                  <a:pt x="555" y="307"/>
+                  <a:pt x="538" y="313"/>
+                </a:cubicBezTo>
+                <a:cubicBezTo>
+                  <a:pt x="522" y="320"/>
+                  <a:pt x="505" y="324"/>
+                  <a:pt x="487" y="324"/>
+                </a:cubicBezTo>
+                <a:lnTo>
+                  <a:pt x="487" y="378"/>
+                </a:lnTo>
+                <a:cubicBezTo>
+                  <a:pt x="499" y="378"/>
+                  <a:pt x="511" y="376"/>
+                  <a:pt x="524" y="374"/>
+                </a:cubicBezTo>
+                <a:cubicBezTo>
+                  <a:pt x="536" y="372"/>
+                  <a:pt x="548" y="368"/>
+                  <a:pt x="559" y="363"/>
+                </a:cubicBezTo>
+                <a:cubicBezTo>
+                  <a:pt x="570" y="359"/>
+                  <a:pt x="581" y="353"/>
+                  <a:pt x="592" y="346"/>
+                </a:cubicBezTo>
+                <a:cubicBezTo>
+                  <a:pt x="602" y="339"/>
+                  <a:pt x="611" y="331"/>
+                  <a:pt x="620" y="322"/>
+                </a:cubicBezTo>
+                <a:cubicBezTo>
+                  <a:pt x="629" y="314"/>
+                  <a:pt x="637" y="304"/>
+                  <a:pt x="644" y="294"/>
+                </a:cubicBezTo>
+                <a:cubicBezTo>
+                  <a:pt x="651" y="283"/>
+                  <a:pt x="656" y="273"/>
+                  <a:pt x="661" y="261"/>
+                </a:cubicBezTo>
+                <a:cubicBezTo>
+                  <a:pt x="666" y="250"/>
+                  <a:pt x="669" y="238"/>
+                  <a:pt x="672" y="226"/>
+                </a:cubicBezTo>
+                <a:cubicBezTo>
+                  <a:pt x="674" y="213"/>
+                  <a:pt x="676" y="201"/>
+                  <a:pt x="676" y="189"/>
+                </a:cubicBezTo>
+                <a:cubicBezTo>
+                  <a:pt x="676" y="176"/>
+                  <a:pt x="674" y="164"/>
+                  <a:pt x="672" y="152"/>
+                </a:cubicBezTo>
+                <a:cubicBezTo>
+                  <a:pt x="669" y="140"/>
+                  <a:pt x="666" y="128"/>
+                  <a:pt x="661" y="117"/>
+                </a:cubicBezTo>
+                <a:cubicBezTo>
+                  <a:pt x="656" y="105"/>
+                  <a:pt x="651" y="94"/>
+                  <a:pt x="644" y="84"/>
+                </a:cubicBezTo>
+                <a:cubicBezTo>
+                  <a:pt x="637" y="74"/>
+                  <a:pt x="629" y="64"/>
+                  <a:pt x="620" y="55"/>
+                </a:cubicBezTo>
+                <a:cubicBezTo>
+                  <a:pt x="611" y="47"/>
+                  <a:pt x="602" y="39"/>
+                  <a:pt x="592" y="32"/>
+                </a:cubicBezTo>
+                <a:cubicBezTo>
+                  <a:pt x="581" y="25"/>
+                  <a:pt x="570" y="19"/>
+                  <a:pt x="559" y="14"/>
+                </a:cubicBezTo>
+                <a:cubicBezTo>
+                  <a:pt x="548" y="10"/>
+                  <a:pt x="536" y="6"/>
+                  <a:pt x="524" y="4"/>
+                </a:cubicBezTo>
+                <a:cubicBezTo>
+                  <a:pt x="511" y="1"/>
+                  <a:pt x="499" y="0"/>
+                  <a:pt x="487" y="0"/>
+                </a:cubicBezTo>
+                <a:moveTo>
+                  <a:pt x="271" y="54"/>
+                </a:moveTo>
+                <a:cubicBezTo>
+                  <a:pt x="289" y="54"/>
+                  <a:pt x="306" y="57"/>
+                  <a:pt x="323" y="64"/>
+                </a:cubicBezTo>
+                <a:cubicBezTo>
+                  <a:pt x="339" y="71"/>
+                  <a:pt x="354" y="81"/>
+                  <a:pt x="366" y="93"/>
+                </a:cubicBezTo>
+                <a:cubicBezTo>
+                  <a:pt x="379" y="106"/>
+                  <a:pt x="389" y="121"/>
+                  <a:pt x="396" y="137"/>
+                </a:cubicBezTo>
+                <a:cubicBezTo>
+                  <a:pt x="402" y="154"/>
+                  <a:pt x="406" y="171"/>
+                  <a:pt x="406" y="189"/>
+                </a:cubicBezTo>
+                <a:cubicBezTo>
+                  <a:pt x="406" y="207"/>
+                  <a:pt x="402" y="224"/>
+                  <a:pt x="396" y="240"/>
+                </a:cubicBezTo>
+                <a:cubicBezTo>
+                  <a:pt x="389" y="257"/>
+                  <a:pt x="379" y="272"/>
+                  <a:pt x="366" y="284"/>
+                </a:cubicBezTo>
+                <a:cubicBezTo>
+                  <a:pt x="354" y="297"/>
+                  <a:pt x="339" y="307"/>
+                  <a:pt x="323" y="313"/>
+                </a:cubicBezTo>
+                <a:cubicBezTo>
+                  <a:pt x="306" y="320"/>
+                  <a:pt x="289" y="324"/>
+                  <a:pt x="271" y="324"/>
+                </a:cubicBezTo>
+                <a:cubicBezTo>
+                  <a:pt x="253" y="324"/>
+                  <a:pt x="236" y="320"/>
+                  <a:pt x="219" y="313"/>
+                </a:cubicBezTo>
+                <a:cubicBezTo>
+                  <a:pt x="203" y="307"/>
+                  <a:pt x="188" y="297"/>
+                  <a:pt x="176" y="284"/>
+                </a:cubicBezTo>
+                <a:cubicBezTo>
+                  <a:pt x="163" y="272"/>
+                  <a:pt x="153" y="257"/>
+                  <a:pt x="146" y="240"/>
+                </a:cubicBezTo>
+                <a:cubicBezTo>
+                  <a:pt x="139" y="224"/>
+                  <a:pt x="136" y="207"/>
+                  <a:pt x="136" y="189"/>
+                </a:cubicBezTo>
+                <a:cubicBezTo>
+                  <a:pt x="136" y="171"/>
+                  <a:pt x="139" y="154"/>
+                  <a:pt x="146" y="137"/>
+                </a:cubicBezTo>
+                <a:cubicBezTo>
+                  <a:pt x="153" y="121"/>
+                  <a:pt x="163" y="106"/>
+                  <a:pt x="176" y="93"/>
+                </a:cubicBezTo>
+                <a:cubicBezTo>
+                  <a:pt x="188" y="81"/>
+                  <a:pt x="203" y="71"/>
+                  <a:pt x="219" y="64"/>
+                </a:cubicBezTo>
+                <a:cubicBezTo>
+                  <a:pt x="236" y="57"/>
+                  <a:pt x="253" y="54"/>
+                  <a:pt x="271" y="54"/>
+                </a:cubicBezTo>
+                <a:moveTo>
+                  <a:pt x="271" y="0"/>
+                </a:moveTo>
+                <a:cubicBezTo>
+                  <a:pt x="259" y="0"/>
+                  <a:pt x="246" y="1"/>
+                  <a:pt x="234" y="4"/>
+                </a:cubicBezTo>
+                <a:cubicBezTo>
+                  <a:pt x="222" y="6"/>
+                  <a:pt x="210" y="10"/>
+                  <a:pt x="199" y="14"/>
+                </a:cubicBezTo>
+                <a:cubicBezTo>
+                  <a:pt x="187" y="19"/>
+                  <a:pt x="176" y="25"/>
+                  <a:pt x="166" y="32"/>
+                </a:cubicBezTo>
+                <a:cubicBezTo>
+                  <a:pt x="156" y="39"/>
+                  <a:pt x="146" y="47"/>
+                  <a:pt x="137" y="55"/>
+                </a:cubicBezTo>
+                <a:cubicBezTo>
+                  <a:pt x="129" y="64"/>
+                  <a:pt x="121" y="74"/>
+                  <a:pt x="114" y="84"/>
+                </a:cubicBezTo>
+                <a:cubicBezTo>
+                  <a:pt x="107" y="94"/>
+                  <a:pt x="101" y="105"/>
+                  <a:pt x="96" y="117"/>
+                </a:cubicBezTo>
+                <a:cubicBezTo>
+                  <a:pt x="92" y="128"/>
+                  <a:pt x="88" y="140"/>
+                  <a:pt x="86" y="152"/>
+                </a:cubicBezTo>
+                <a:cubicBezTo>
+                  <a:pt x="83" y="164"/>
+                  <a:pt x="82" y="176"/>
+                  <a:pt x="82" y="189"/>
+                </a:cubicBezTo>
+                <a:cubicBezTo>
+                  <a:pt x="82" y="201"/>
+                  <a:pt x="83" y="213"/>
+                  <a:pt x="86" y="226"/>
+                </a:cubicBezTo>
+                <a:cubicBezTo>
+                  <a:pt x="88" y="238"/>
+                  <a:pt x="92" y="250"/>
+                  <a:pt x="96" y="261"/>
+                </a:cubicBezTo>
+                <a:cubicBezTo>
+                  <a:pt x="101" y="273"/>
+                  <a:pt x="107" y="283"/>
+                  <a:pt x="114" y="294"/>
+                </a:cubicBezTo>
+                <a:cubicBezTo>
+                  <a:pt x="121" y="304"/>
+                  <a:pt x="129" y="314"/>
+                  <a:pt x="137" y="322"/>
+                </a:cubicBezTo>
+                <a:cubicBezTo>
+                  <a:pt x="146" y="331"/>
+                  <a:pt x="156" y="339"/>
+                  <a:pt x="166" y="346"/>
+                </a:cubicBezTo>
+                <a:cubicBezTo>
+                  <a:pt x="176" y="353"/>
+                  <a:pt x="187" y="359"/>
+                  <a:pt x="199" y="363"/>
+                </a:cubicBezTo>
+                <a:cubicBezTo>
+                  <a:pt x="210" y="368"/>
+                  <a:pt x="222" y="372"/>
+                  <a:pt x="234" y="374"/>
+                </a:cubicBezTo>
+                <a:cubicBezTo>
+                  <a:pt x="246" y="376"/>
+                  <a:pt x="259" y="378"/>
+                  <a:pt x="271" y="378"/>
+                </a:cubicBezTo>
+                <a:cubicBezTo>
+                  <a:pt x="283" y="378"/>
+                  <a:pt x="296" y="376"/>
+                  <a:pt x="308" y="374"/>
+                </a:cubicBezTo>
+                <a:cubicBezTo>
+                  <a:pt x="320" y="372"/>
+                  <a:pt x="332" y="368"/>
+                  <a:pt x="343" y="363"/>
+                </a:cubicBezTo>
+                <a:cubicBezTo>
+                  <a:pt x="355" y="359"/>
+                  <a:pt x="366" y="353"/>
+                  <a:pt x="376" y="346"/>
+                </a:cubicBezTo>
+                <a:cubicBezTo>
+                  <a:pt x="386" y="339"/>
+                  <a:pt x="396" y="331"/>
+                  <a:pt x="404" y="322"/>
+                </a:cubicBezTo>
+                <a:cubicBezTo>
+                  <a:pt x="413" y="314"/>
+                  <a:pt x="421" y="304"/>
+                  <a:pt x="428" y="294"/>
+                </a:cubicBezTo>
+                <a:cubicBezTo>
+                  <a:pt x="435" y="283"/>
+                  <a:pt x="441" y="273"/>
+                  <a:pt x="445" y="261"/>
+                </a:cubicBezTo>
+                <a:cubicBezTo>
+                  <a:pt x="450" y="250"/>
+                  <a:pt x="454" y="238"/>
+                  <a:pt x="456" y="226"/>
+                </a:cubicBezTo>
+                <a:cubicBezTo>
+                  <a:pt x="459" y="213"/>
+                  <a:pt x="460" y="201"/>
+                  <a:pt x="460" y="189"/>
+                </a:cubicBezTo>
+                <a:cubicBezTo>
+                  <a:pt x="460" y="176"/>
+                  <a:pt x="459" y="164"/>
+                  <a:pt x="456" y="152"/>
+                </a:cubicBezTo>
+                <a:cubicBezTo>
+                  <a:pt x="454" y="140"/>
+                  <a:pt x="450" y="128"/>
+                  <a:pt x="445" y="117"/>
+                </a:cubicBezTo>
+                <a:cubicBezTo>
+                  <a:pt x="441" y="105"/>
+                  <a:pt x="435" y="94"/>
+                  <a:pt x="428" y="84"/>
+                </a:cubicBezTo>
+                <a:cubicBezTo>
+                  <a:pt x="421" y="74"/>
+                  <a:pt x="413" y="64"/>
+                  <a:pt x="404" y="55"/>
+                </a:cubicBezTo>
+                <a:cubicBezTo>
+                  <a:pt x="396" y="47"/>
+                  <a:pt x="386" y="39"/>
+                  <a:pt x="376" y="32"/>
+                </a:cubicBezTo>
+                <a:cubicBezTo>
+                  <a:pt x="366" y="25"/>
+                  <a:pt x="355" y="19"/>
+                  <a:pt x="343" y="14"/>
+                </a:cubicBezTo>
+                <a:cubicBezTo>
+                  <a:pt x="332" y="10"/>
+                  <a:pt x="320" y="6"/>
+                  <a:pt x="308" y="4"/>
+                </a:cubicBezTo>
+                <a:cubicBezTo>
+                  <a:pt x="296" y="1"/>
+                  <a:pt x="283" y="0"/>
+                  <a:pt x="271" y="0"/>
+                </a:cubicBezTo>
+                <a:close/>
+              </a:path>
+            </a:pathLst>
+          </a:custGeom>
+          <a:solidFill>
+            <a:srgbClr val="dd784b"/>
+          </a:solidFill>
+          <a:ln w="0">
+            <a:noFill/>
+          </a:ln>
+        </p:spPr>
+        <p:txBody>
+          <a:bodyPr lIns="0" rIns="0" tIns="0" bIns="0" anchor="t">
+            <a:noAutofit/>
+          </a:bodyPr>
+          <a:p>
+            <a:endParaRPr b="0" lang="en-US" sz="2400" spc="-1" strike="noStrike">
+              <a:solidFill>
+                <a:srgbClr val="000000"/>
+              </a:solidFill>
+              <a:latin typeface="DejaVu Serif"/>
+            </a:endParaRPr>
+          </a:p>
+        </p:txBody>
+      </p:sp>
+      <p:sp>
+        <p:nvSpPr>
+          <p:cNvPr id="61" name=""/>
           <p:cNvSpPr txBox="1"/>
           <p:nvPr/>
         </p:nvSpPr>
         <p:spPr>
           <a:xfrm>
-            <a:off x="439920" y="910440"/>
-            <a:ext cx="9120240" cy="399600"/>
+            <a:off x="439920" y="1063080"/>
+            <a:ext cx="6681960" cy="399600"/>
           </a:xfrm>
           <a:prstGeom prst="rect">
             <a:avLst/>
@@ -3052,7 +4142,7 @@
                 <a:latin typeface="Arial"/>
                 <a:ea typeface="Arial"/>
               </a:rPr>
-              <a:t>Een werkwijze die de complexiteit hanteerbaar</a:t>
+              <a:t>Drie sporen, alle drie in uitvoering</a:t>
             </a:r>
             <a:endParaRPr b="0" lang="en-US" sz="2700" spc="-1" strike="noStrike">
               <a:solidFill>
@@ -3065,1284 +4155,14 @@
       </p:sp>
       <p:sp>
         <p:nvSpPr>
-          <p:cNvPr id="56" name=""/>
-          <p:cNvSpPr/>
-          <p:nvPr/>
-        </p:nvSpPr>
-        <p:spPr>
-          <a:xfrm>
-            <a:off x="461880" y="2057040"/>
-            <a:ext cx="2590920" cy="1243440"/>
-          </a:xfrm>
-          <a:custGeom>
-            <a:avLst/>
-            <a:gdLst/>
-            <a:ahLst/>
-            <a:rect l="0" t="0" r="r" b="b"/>
-            <a:pathLst>
-              <a:path w="7197" h="3454">
-                <a:moveTo>
-                  <a:pt x="0" y="3150"/>
-                </a:moveTo>
-                <a:lnTo>
-                  <a:pt x="0" y="265"/>
-                </a:lnTo>
-                <a:cubicBezTo>
-                  <a:pt x="0" y="248"/>
-                  <a:pt x="2" y="231"/>
-                  <a:pt x="6" y="213"/>
-                </a:cubicBezTo>
-                <a:cubicBezTo>
-                  <a:pt x="9" y="196"/>
-                  <a:pt x="15" y="180"/>
-                  <a:pt x="23" y="164"/>
-                </a:cubicBezTo>
-                <a:cubicBezTo>
-                  <a:pt x="31" y="148"/>
-                  <a:pt x="40" y="133"/>
-                  <a:pt x="51" y="118"/>
-                </a:cubicBezTo>
-                <a:cubicBezTo>
-                  <a:pt x="62" y="104"/>
-                  <a:pt x="75" y="90"/>
-                  <a:pt x="89" y="78"/>
-                </a:cubicBezTo>
-                <a:cubicBezTo>
-                  <a:pt x="103" y="66"/>
-                  <a:pt x="118" y="55"/>
-                  <a:pt x="135" y="45"/>
-                </a:cubicBezTo>
-                <a:cubicBezTo>
-                  <a:pt x="152" y="35"/>
-                  <a:pt x="169" y="27"/>
-                  <a:pt x="188" y="21"/>
-                </a:cubicBezTo>
-                <a:cubicBezTo>
-                  <a:pt x="206" y="14"/>
-                  <a:pt x="225" y="9"/>
-                  <a:pt x="245" y="6"/>
-                </a:cubicBezTo>
-                <a:cubicBezTo>
-                  <a:pt x="264" y="2"/>
-                  <a:pt x="284" y="0"/>
-                  <a:pt x="304" y="0"/>
-                </a:cubicBezTo>
-                <a:lnTo>
-                  <a:pt x="6893" y="0"/>
-                </a:lnTo>
-                <a:cubicBezTo>
-                  <a:pt x="6913" y="0"/>
-                  <a:pt x="6933" y="2"/>
-                  <a:pt x="6952" y="6"/>
-                </a:cubicBezTo>
-                <a:cubicBezTo>
-                  <a:pt x="6972" y="9"/>
-                  <a:pt x="6991" y="14"/>
-                  <a:pt x="7010" y="21"/>
-                </a:cubicBezTo>
-                <a:cubicBezTo>
-                  <a:pt x="7028" y="27"/>
-                  <a:pt x="7046" y="35"/>
-                  <a:pt x="7062" y="45"/>
-                </a:cubicBezTo>
-                <a:cubicBezTo>
-                  <a:pt x="7079" y="55"/>
-                  <a:pt x="7094" y="66"/>
-                  <a:pt x="7108" y="78"/>
-                </a:cubicBezTo>
-                <a:cubicBezTo>
-                  <a:pt x="7122" y="90"/>
-                  <a:pt x="7135" y="104"/>
-                  <a:pt x="7146" y="118"/>
-                </a:cubicBezTo>
-                <a:cubicBezTo>
-                  <a:pt x="7157" y="133"/>
-                  <a:pt x="7167" y="148"/>
-                  <a:pt x="7174" y="164"/>
-                </a:cubicBezTo>
-                <a:cubicBezTo>
-                  <a:pt x="7182" y="180"/>
-                  <a:pt x="7188" y="196"/>
-                  <a:pt x="7192" y="213"/>
-                </a:cubicBezTo>
-                <a:cubicBezTo>
-                  <a:pt x="7195" y="231"/>
-                  <a:pt x="7197" y="248"/>
-                  <a:pt x="7197" y="265"/>
-                </a:cubicBezTo>
-                <a:lnTo>
-                  <a:pt x="7197" y="3150"/>
-                </a:lnTo>
-                <a:cubicBezTo>
-                  <a:pt x="7197" y="3170"/>
-                  <a:pt x="7195" y="3190"/>
-                  <a:pt x="7192" y="3209"/>
-                </a:cubicBezTo>
-                <a:cubicBezTo>
-                  <a:pt x="7188" y="3229"/>
-                  <a:pt x="7182" y="3248"/>
-                  <a:pt x="7174" y="3266"/>
-                </a:cubicBezTo>
-                <a:cubicBezTo>
-                  <a:pt x="7167" y="3285"/>
-                  <a:pt x="7157" y="3302"/>
-                  <a:pt x="7146" y="3319"/>
-                </a:cubicBezTo>
-                <a:cubicBezTo>
-                  <a:pt x="7135" y="3336"/>
-                  <a:pt x="7122" y="3351"/>
-                  <a:pt x="7108" y="3365"/>
-                </a:cubicBezTo>
-                <a:cubicBezTo>
-                  <a:pt x="7094" y="3379"/>
-                  <a:pt x="7079" y="3392"/>
-                  <a:pt x="7062" y="3403"/>
-                </a:cubicBezTo>
-                <a:cubicBezTo>
-                  <a:pt x="7046" y="3414"/>
-                  <a:pt x="7028" y="3424"/>
-                  <a:pt x="7010" y="3431"/>
-                </a:cubicBezTo>
-                <a:cubicBezTo>
-                  <a:pt x="6991" y="3439"/>
-                  <a:pt x="6972" y="3445"/>
-                  <a:pt x="6952" y="3448"/>
-                </a:cubicBezTo>
-                <a:cubicBezTo>
-                  <a:pt x="6933" y="3452"/>
-                  <a:pt x="6913" y="3454"/>
-                  <a:pt x="6893" y="3454"/>
-                </a:cubicBezTo>
-                <a:lnTo>
-                  <a:pt x="304" y="3454"/>
-                </a:lnTo>
-                <a:cubicBezTo>
-                  <a:pt x="284" y="3454"/>
-                  <a:pt x="264" y="3452"/>
-                  <a:pt x="245" y="3448"/>
-                </a:cubicBezTo>
-                <a:cubicBezTo>
-                  <a:pt x="225" y="3445"/>
-                  <a:pt x="206" y="3439"/>
-                  <a:pt x="188" y="3431"/>
-                </a:cubicBezTo>
-                <a:cubicBezTo>
-                  <a:pt x="169" y="3424"/>
-                  <a:pt x="152" y="3414"/>
-                  <a:pt x="135" y="3403"/>
-                </a:cubicBezTo>
-                <a:cubicBezTo>
-                  <a:pt x="118" y="3392"/>
-                  <a:pt x="103" y="3379"/>
-                  <a:pt x="89" y="3365"/>
-                </a:cubicBezTo>
-                <a:cubicBezTo>
-                  <a:pt x="75" y="3351"/>
-                  <a:pt x="62" y="3336"/>
-                  <a:pt x="51" y="3319"/>
-                </a:cubicBezTo>
-                <a:cubicBezTo>
-                  <a:pt x="40" y="3302"/>
-                  <a:pt x="31" y="3285"/>
-                  <a:pt x="23" y="3266"/>
-                </a:cubicBezTo>
-                <a:cubicBezTo>
-                  <a:pt x="15" y="3248"/>
-                  <a:pt x="9" y="3229"/>
-                  <a:pt x="6" y="3209"/>
-                </a:cubicBezTo>
-                <a:cubicBezTo>
-                  <a:pt x="2" y="3190"/>
-                  <a:pt x="0" y="3170"/>
-                  <a:pt x="0" y="3150"/>
-                </a:cubicBezTo>
-                <a:close/>
-              </a:path>
-            </a:pathLst>
-          </a:custGeom>
-          <a:solidFill>
-            <a:srgbClr val="ffffff"/>
-          </a:solidFill>
-          <a:ln w="0">
-            <a:noFill/>
-          </a:ln>
-        </p:spPr>
-        <p:txBody>
-          <a:bodyPr lIns="0" rIns="0" tIns="0" bIns="0" anchor="t">
-            <a:noAutofit/>
-          </a:bodyPr>
-          <a:p>
-            <a:endParaRPr b="0" lang="en-US" sz="2400" spc="-1" strike="noStrike">
-              <a:solidFill>
-                <a:srgbClr val="000000"/>
-              </a:solidFill>
-              <a:latin typeface="DejaVu Serif"/>
-            </a:endParaRPr>
-          </a:p>
-        </p:txBody>
-      </p:sp>
-      <p:sp>
-        <p:nvSpPr>
-          <p:cNvPr id="57" name=""/>
-          <p:cNvSpPr/>
-          <p:nvPr/>
-        </p:nvSpPr>
-        <p:spPr>
-          <a:xfrm>
-            <a:off x="456840" y="2038320"/>
-            <a:ext cx="2601000" cy="1267200"/>
-          </a:xfrm>
-          <a:custGeom>
-            <a:avLst/>
-            <a:gdLst/>
-            <a:ahLst/>
-            <a:rect l="0" t="0" r="r" b="b"/>
-            <a:pathLst>
-              <a:path w="7225" h="3520">
-                <a:moveTo>
-                  <a:pt x="0" y="0"/>
-                </a:moveTo>
-                <a:lnTo>
-                  <a:pt x="7225" y="0"/>
-                </a:lnTo>
-                <a:lnTo>
-                  <a:pt x="7225" y="3520"/>
-                </a:lnTo>
-                <a:lnTo>
-                  <a:pt x="0" y="3520"/>
-                </a:lnTo>
-                <a:lnTo>
-                  <a:pt x="0" y="0"/>
-                </a:lnTo>
-                <a:close/>
-              </a:path>
-            </a:pathLst>
-          </a:custGeom>
-          <a:solidFill>
-            <a:srgbClr val="dd784b"/>
-          </a:solidFill>
-          <a:ln w="0">
-            <a:noFill/>
-          </a:ln>
-        </p:spPr>
-        <p:txBody>
-          <a:bodyPr lIns="0" rIns="0" tIns="0" bIns="0" anchor="t">
-            <a:noAutofit/>
-          </a:bodyPr>
-          <a:p>
-            <a:endParaRPr b="0" lang="en-US" sz="2400" spc="-1" strike="noStrike">
-              <a:solidFill>
-                <a:srgbClr val="000000"/>
-              </a:solidFill>
-              <a:latin typeface="DejaVu Serif"/>
-            </a:endParaRPr>
-          </a:p>
-        </p:txBody>
-      </p:sp>
-      <p:sp>
-        <p:nvSpPr>
-          <p:cNvPr id="58" name=""/>
-          <p:cNvSpPr/>
-          <p:nvPr/>
-        </p:nvSpPr>
-        <p:spPr>
-          <a:xfrm>
-            <a:off x="456840" y="2038320"/>
-            <a:ext cx="2601000" cy="1267200"/>
-          </a:xfrm>
-          <a:custGeom>
-            <a:avLst/>
-            <a:gdLst/>
-            <a:ahLst/>
-            <a:rect l="0" t="0" r="r" b="b"/>
-            <a:pathLst>
-              <a:path w="7225" h="3520">
-                <a:moveTo>
-                  <a:pt x="0" y="0"/>
-                </a:moveTo>
-                <a:lnTo>
-                  <a:pt x="7225" y="0"/>
-                </a:lnTo>
-                <a:lnTo>
-                  <a:pt x="7225" y="3520"/>
-                </a:lnTo>
-                <a:lnTo>
-                  <a:pt x="0" y="3520"/>
-                </a:lnTo>
-                <a:lnTo>
-                  <a:pt x="0" y="0"/>
-                </a:lnTo>
-                <a:close/>
-              </a:path>
-            </a:pathLst>
-          </a:custGeom>
-          <a:solidFill>
-            <a:srgbClr val="e5e7eb"/>
-          </a:solidFill>
-          <a:ln w="0">
-            <a:noFill/>
-          </a:ln>
-        </p:spPr>
-        <p:txBody>
-          <a:bodyPr lIns="0" rIns="0" tIns="0" bIns="0" anchor="t">
-            <a:noAutofit/>
-          </a:bodyPr>
-          <a:p>
-            <a:endParaRPr b="0" lang="en-US" sz="2400" spc="-1" strike="noStrike">
-              <a:solidFill>
-                <a:srgbClr val="000000"/>
-              </a:solidFill>
-              <a:latin typeface="DejaVu Serif"/>
-            </a:endParaRPr>
-          </a:p>
-        </p:txBody>
-      </p:sp>
-      <p:sp>
-        <p:nvSpPr>
-          <p:cNvPr id="59" name=""/>
-          <p:cNvSpPr/>
-          <p:nvPr/>
-        </p:nvSpPr>
-        <p:spPr>
-          <a:xfrm>
-            <a:off x="456840" y="2038320"/>
-            <a:ext cx="2601000" cy="1267200"/>
-          </a:xfrm>
-          <a:custGeom>
-            <a:avLst/>
-            <a:gdLst/>
-            <a:ahLst/>
-            <a:rect l="0" t="0" r="r" b="b"/>
-            <a:pathLst>
-              <a:path w="7225" h="3520">
-                <a:moveTo>
-                  <a:pt x="0" y="0"/>
-                </a:moveTo>
-                <a:lnTo>
-                  <a:pt x="7225" y="0"/>
-                </a:lnTo>
-                <a:lnTo>
-                  <a:pt x="7225" y="3520"/>
-                </a:lnTo>
-                <a:lnTo>
-                  <a:pt x="0" y="3520"/>
-                </a:lnTo>
-                <a:lnTo>
-                  <a:pt x="0" y="0"/>
-                </a:lnTo>
-                <a:close/>
-              </a:path>
-            </a:pathLst>
-          </a:custGeom>
-          <a:solidFill>
-            <a:srgbClr val="e5e7eb"/>
-          </a:solidFill>
-          <a:ln w="0">
-            <a:noFill/>
-          </a:ln>
-        </p:spPr>
-        <p:txBody>
-          <a:bodyPr lIns="0" rIns="0" tIns="0" bIns="0" anchor="t">
-            <a:noAutofit/>
-          </a:bodyPr>
-          <a:p>
-            <a:endParaRPr b="0" lang="en-US" sz="2400" spc="-1" strike="noStrike">
-              <a:solidFill>
-                <a:srgbClr val="000000"/>
-              </a:solidFill>
-              <a:latin typeface="DejaVu Serif"/>
-            </a:endParaRPr>
-          </a:p>
-        </p:txBody>
-      </p:sp>
-      <p:sp>
-        <p:nvSpPr>
-          <p:cNvPr id="60" name=""/>
-          <p:cNvSpPr/>
-          <p:nvPr/>
-        </p:nvSpPr>
-        <p:spPr>
-          <a:xfrm>
-            <a:off x="456840" y="2038320"/>
-            <a:ext cx="2601000" cy="1267200"/>
-          </a:xfrm>
-          <a:custGeom>
-            <a:avLst/>
-            <a:gdLst/>
-            <a:ahLst/>
-            <a:rect l="0" t="0" r="r" b="b"/>
-            <a:pathLst>
-              <a:path w="7225" h="3520">
-                <a:moveTo>
-                  <a:pt x="0" y="0"/>
-                </a:moveTo>
-                <a:lnTo>
-                  <a:pt x="7225" y="0"/>
-                </a:lnTo>
-                <a:lnTo>
-                  <a:pt x="7225" y="3520"/>
-                </a:lnTo>
-                <a:lnTo>
-                  <a:pt x="0" y="3520"/>
-                </a:lnTo>
-                <a:lnTo>
-                  <a:pt x="0" y="0"/>
-                </a:lnTo>
-                <a:close/>
-              </a:path>
-            </a:pathLst>
-          </a:custGeom>
-          <a:solidFill>
-            <a:srgbClr val="e5e7eb"/>
-          </a:solidFill>
-          <a:ln w="0">
-            <a:noFill/>
-          </a:ln>
-        </p:spPr>
-        <p:txBody>
-          <a:bodyPr lIns="0" rIns="0" tIns="0" bIns="0" anchor="t">
-            <a:noAutofit/>
-          </a:bodyPr>
-          <a:p>
-            <a:endParaRPr b="0" lang="en-US" sz="2400" spc="-1" strike="noStrike">
-              <a:solidFill>
-                <a:srgbClr val="000000"/>
-              </a:solidFill>
-              <a:latin typeface="DejaVu Serif"/>
-            </a:endParaRPr>
-          </a:p>
-        </p:txBody>
-      </p:sp>
-      <p:sp>
-        <p:nvSpPr>
-          <p:cNvPr id="61" name=""/>
-          <p:cNvSpPr/>
-          <p:nvPr/>
-        </p:nvSpPr>
-        <p:spPr>
-          <a:xfrm>
-            <a:off x="659880" y="2241000"/>
-            <a:ext cx="304200" cy="304200"/>
-          </a:xfrm>
-          <a:custGeom>
-            <a:avLst/>
-            <a:gdLst/>
-            <a:ahLst/>
-            <a:rect l="0" t="0" r="r" b="b"/>
-            <a:pathLst>
-              <a:path w="845" h="845">
-                <a:moveTo>
-                  <a:pt x="845" y="845"/>
-                </a:moveTo>
-                <a:lnTo>
-                  <a:pt x="784" y="845"/>
-                </a:lnTo>
-                <a:lnTo>
-                  <a:pt x="784" y="694"/>
-                </a:lnTo>
-                <a:cubicBezTo>
-                  <a:pt x="784" y="684"/>
-                  <a:pt x="784" y="674"/>
-                  <a:pt x="782" y="665"/>
-                </a:cubicBezTo>
-                <a:cubicBezTo>
-                  <a:pt x="780" y="655"/>
-                  <a:pt x="777" y="646"/>
-                  <a:pt x="773" y="636"/>
-                </a:cubicBezTo>
-                <a:cubicBezTo>
-                  <a:pt x="769" y="627"/>
-                  <a:pt x="765" y="619"/>
-                  <a:pt x="759" y="610"/>
-                </a:cubicBezTo>
-                <a:cubicBezTo>
-                  <a:pt x="754" y="602"/>
-                  <a:pt x="747" y="595"/>
-                  <a:pt x="740" y="588"/>
-                </a:cubicBezTo>
-                <a:cubicBezTo>
-                  <a:pt x="733" y="581"/>
-                  <a:pt x="726" y="574"/>
-                  <a:pt x="717" y="569"/>
-                </a:cubicBezTo>
-                <a:cubicBezTo>
-                  <a:pt x="709" y="563"/>
-                  <a:pt x="701" y="559"/>
-                  <a:pt x="691" y="555"/>
-                </a:cubicBezTo>
-                <a:cubicBezTo>
-                  <a:pt x="682" y="551"/>
-                  <a:pt x="673" y="548"/>
-                  <a:pt x="663" y="546"/>
-                </a:cubicBezTo>
-                <a:cubicBezTo>
-                  <a:pt x="653" y="544"/>
-                  <a:pt x="644" y="543"/>
-                  <a:pt x="634" y="543"/>
-                </a:cubicBezTo>
-                <a:lnTo>
-                  <a:pt x="634" y="483"/>
-                </a:lnTo>
-                <a:cubicBezTo>
-                  <a:pt x="648" y="483"/>
-                  <a:pt x="661" y="484"/>
-                  <a:pt x="675" y="487"/>
-                </a:cubicBezTo>
-                <a:cubicBezTo>
-                  <a:pt x="688" y="490"/>
-                  <a:pt x="702" y="494"/>
-                  <a:pt x="714" y="499"/>
-                </a:cubicBezTo>
-                <a:cubicBezTo>
-                  <a:pt x="727" y="505"/>
-                  <a:pt x="739" y="511"/>
-                  <a:pt x="751" y="519"/>
-                </a:cubicBezTo>
-                <a:cubicBezTo>
-                  <a:pt x="762" y="526"/>
-                  <a:pt x="773" y="535"/>
-                  <a:pt x="783" y="545"/>
-                </a:cubicBezTo>
-                <a:cubicBezTo>
-                  <a:pt x="793" y="555"/>
-                  <a:pt x="801" y="565"/>
-                  <a:pt x="809" y="577"/>
-                </a:cubicBezTo>
-                <a:cubicBezTo>
-                  <a:pt x="817" y="588"/>
-                  <a:pt x="823" y="601"/>
-                  <a:pt x="829" y="613"/>
-                </a:cubicBezTo>
-                <a:cubicBezTo>
-                  <a:pt x="834" y="626"/>
-                  <a:pt x="838" y="639"/>
-                  <a:pt x="841" y="653"/>
-                </a:cubicBezTo>
-                <a:cubicBezTo>
-                  <a:pt x="843" y="667"/>
-                  <a:pt x="845" y="680"/>
-                  <a:pt x="845" y="694"/>
-                </a:cubicBezTo>
-                <a:lnTo>
-                  <a:pt x="845" y="845"/>
-                </a:lnTo>
-                <a:moveTo>
-                  <a:pt x="604" y="845"/>
-                </a:moveTo>
-                <a:lnTo>
-                  <a:pt x="543" y="845"/>
-                </a:lnTo>
-                <a:lnTo>
-                  <a:pt x="543" y="694"/>
-                </a:lnTo>
-                <a:cubicBezTo>
-                  <a:pt x="543" y="684"/>
-                  <a:pt x="542" y="674"/>
-                  <a:pt x="540" y="665"/>
-                </a:cubicBezTo>
-                <a:cubicBezTo>
-                  <a:pt x="538" y="655"/>
-                  <a:pt x="536" y="646"/>
-                  <a:pt x="532" y="636"/>
-                </a:cubicBezTo>
-                <a:cubicBezTo>
-                  <a:pt x="528" y="627"/>
-                  <a:pt x="523" y="619"/>
-                  <a:pt x="518" y="610"/>
-                </a:cubicBezTo>
-                <a:cubicBezTo>
-                  <a:pt x="512" y="602"/>
-                  <a:pt x="506" y="595"/>
-                  <a:pt x="499" y="588"/>
-                </a:cubicBezTo>
-                <a:cubicBezTo>
-                  <a:pt x="492" y="581"/>
-                  <a:pt x="484" y="574"/>
-                  <a:pt x="476" y="569"/>
-                </a:cubicBezTo>
-                <a:cubicBezTo>
-                  <a:pt x="468" y="563"/>
-                  <a:pt x="459" y="559"/>
-                  <a:pt x="450" y="555"/>
-                </a:cubicBezTo>
-                <a:cubicBezTo>
-                  <a:pt x="441" y="551"/>
-                  <a:pt x="432" y="548"/>
-                  <a:pt x="422" y="546"/>
-                </a:cubicBezTo>
-                <a:cubicBezTo>
-                  <a:pt x="412" y="544"/>
-                  <a:pt x="402" y="543"/>
-                  <a:pt x="393" y="543"/>
-                </a:cubicBezTo>
-                <a:lnTo>
-                  <a:pt x="211" y="543"/>
-                </a:lnTo>
-                <a:cubicBezTo>
-                  <a:pt x="201" y="543"/>
-                  <a:pt x="191" y="544"/>
-                  <a:pt x="181" y="546"/>
-                </a:cubicBezTo>
-                <a:cubicBezTo>
-                  <a:pt x="171" y="548"/>
-                  <a:pt x="162" y="551"/>
-                  <a:pt x="153" y="555"/>
-                </a:cubicBezTo>
-                <a:cubicBezTo>
-                  <a:pt x="144" y="559"/>
-                  <a:pt x="135" y="563"/>
-                  <a:pt x="127" y="569"/>
-                </a:cubicBezTo>
-                <a:cubicBezTo>
-                  <a:pt x="119" y="574"/>
-                  <a:pt x="111" y="581"/>
-                  <a:pt x="104" y="588"/>
-                </a:cubicBezTo>
-                <a:cubicBezTo>
-                  <a:pt x="97" y="595"/>
-                  <a:pt x="91" y="602"/>
-                  <a:pt x="85" y="610"/>
-                </a:cubicBezTo>
-                <a:cubicBezTo>
-                  <a:pt x="80" y="619"/>
-                  <a:pt x="75" y="627"/>
-                  <a:pt x="71" y="636"/>
-                </a:cubicBezTo>
-                <a:cubicBezTo>
-                  <a:pt x="68" y="646"/>
-                  <a:pt x="65" y="655"/>
-                  <a:pt x="63" y="665"/>
-                </a:cubicBezTo>
-                <a:cubicBezTo>
-                  <a:pt x="61" y="674"/>
-                  <a:pt x="60" y="684"/>
-                  <a:pt x="60" y="694"/>
-                </a:cubicBezTo>
-                <a:lnTo>
-                  <a:pt x="60" y="845"/>
-                </a:lnTo>
-                <a:lnTo>
-                  <a:pt x="0" y="845"/>
-                </a:lnTo>
-                <a:lnTo>
-                  <a:pt x="0" y="694"/>
-                </a:lnTo>
-                <a:cubicBezTo>
-                  <a:pt x="0" y="680"/>
-                  <a:pt x="1" y="667"/>
-                  <a:pt x="4" y="653"/>
-                </a:cubicBezTo>
-                <a:cubicBezTo>
-                  <a:pt x="6" y="639"/>
-                  <a:pt x="10" y="626"/>
-                  <a:pt x="16" y="613"/>
-                </a:cubicBezTo>
-                <a:cubicBezTo>
-                  <a:pt x="21" y="601"/>
-                  <a:pt x="27" y="588"/>
-                  <a:pt x="35" y="577"/>
-                </a:cubicBezTo>
-                <a:cubicBezTo>
-                  <a:pt x="43" y="565"/>
-                  <a:pt x="52" y="555"/>
-                  <a:pt x="61" y="545"/>
-                </a:cubicBezTo>
-                <a:cubicBezTo>
-                  <a:pt x="71" y="535"/>
-                  <a:pt x="82" y="526"/>
-                  <a:pt x="93" y="519"/>
-                </a:cubicBezTo>
-                <a:cubicBezTo>
-                  <a:pt x="105" y="511"/>
-                  <a:pt x="117" y="505"/>
-                  <a:pt x="130" y="499"/>
-                </a:cubicBezTo>
-                <a:cubicBezTo>
-                  <a:pt x="143" y="494"/>
-                  <a:pt x="156" y="490"/>
-                  <a:pt x="169" y="487"/>
-                </a:cubicBezTo>
-                <a:cubicBezTo>
-                  <a:pt x="183" y="484"/>
-                  <a:pt x="197" y="483"/>
-                  <a:pt x="211" y="483"/>
-                </a:cubicBezTo>
-                <a:lnTo>
-                  <a:pt x="393" y="483"/>
-                </a:lnTo>
-                <a:cubicBezTo>
-                  <a:pt x="406" y="483"/>
-                  <a:pt x="420" y="484"/>
-                  <a:pt x="434" y="487"/>
-                </a:cubicBezTo>
-                <a:cubicBezTo>
-                  <a:pt x="447" y="490"/>
-                  <a:pt x="460" y="494"/>
-                  <a:pt x="473" y="499"/>
-                </a:cubicBezTo>
-                <a:cubicBezTo>
-                  <a:pt x="486" y="505"/>
-                  <a:pt x="498" y="511"/>
-                  <a:pt x="510" y="519"/>
-                </a:cubicBezTo>
-                <a:cubicBezTo>
-                  <a:pt x="521" y="526"/>
-                  <a:pt x="532" y="535"/>
-                  <a:pt x="542" y="545"/>
-                </a:cubicBezTo>
-                <a:cubicBezTo>
-                  <a:pt x="551" y="555"/>
-                  <a:pt x="560" y="565"/>
-                  <a:pt x="568" y="577"/>
-                </a:cubicBezTo>
-                <a:cubicBezTo>
-                  <a:pt x="576" y="588"/>
-                  <a:pt x="582" y="601"/>
-                  <a:pt x="587" y="613"/>
-                </a:cubicBezTo>
-                <a:cubicBezTo>
-                  <a:pt x="593" y="626"/>
-                  <a:pt x="597" y="639"/>
-                  <a:pt x="599" y="653"/>
-                </a:cubicBezTo>
-                <a:cubicBezTo>
-                  <a:pt x="602" y="667"/>
-                  <a:pt x="604" y="680"/>
-                  <a:pt x="604" y="694"/>
-                </a:cubicBezTo>
-                <a:lnTo>
-                  <a:pt x="604" y="845"/>
-                </a:lnTo>
-                <a:moveTo>
-                  <a:pt x="543" y="0"/>
-                </a:moveTo>
-                <a:lnTo>
-                  <a:pt x="543" y="60"/>
-                </a:lnTo>
-                <a:cubicBezTo>
-                  <a:pt x="553" y="60"/>
-                  <a:pt x="563" y="61"/>
-                  <a:pt x="573" y="63"/>
-                </a:cubicBezTo>
-                <a:cubicBezTo>
-                  <a:pt x="582" y="65"/>
-                  <a:pt x="592" y="68"/>
-                  <a:pt x="601" y="71"/>
-                </a:cubicBezTo>
-                <a:cubicBezTo>
-                  <a:pt x="610" y="75"/>
-                  <a:pt x="619" y="80"/>
-                  <a:pt x="627" y="85"/>
-                </a:cubicBezTo>
-                <a:cubicBezTo>
-                  <a:pt x="635" y="91"/>
-                  <a:pt x="643" y="97"/>
-                  <a:pt x="650" y="104"/>
-                </a:cubicBezTo>
-                <a:cubicBezTo>
-                  <a:pt x="657" y="112"/>
-                  <a:pt x="663" y="120"/>
-                  <a:pt x="669" y="128"/>
-                </a:cubicBezTo>
-                <a:cubicBezTo>
-                  <a:pt x="674" y="136"/>
-                  <a:pt x="679" y="145"/>
-                  <a:pt x="683" y="154"/>
-                </a:cubicBezTo>
-                <a:cubicBezTo>
-                  <a:pt x="686" y="163"/>
-                  <a:pt x="689" y="173"/>
-                  <a:pt x="691" y="182"/>
-                </a:cubicBezTo>
-                <a:cubicBezTo>
-                  <a:pt x="693" y="192"/>
-                  <a:pt x="694" y="202"/>
-                  <a:pt x="694" y="212"/>
-                </a:cubicBezTo>
-                <a:cubicBezTo>
-                  <a:pt x="694" y="222"/>
-                  <a:pt x="693" y="231"/>
-                  <a:pt x="691" y="241"/>
-                </a:cubicBezTo>
-                <a:cubicBezTo>
-                  <a:pt x="689" y="251"/>
-                  <a:pt x="686" y="260"/>
-                  <a:pt x="683" y="269"/>
-                </a:cubicBezTo>
-                <a:cubicBezTo>
-                  <a:pt x="679" y="279"/>
-                  <a:pt x="674" y="287"/>
-                  <a:pt x="669" y="295"/>
-                </a:cubicBezTo>
-                <a:cubicBezTo>
-                  <a:pt x="663" y="304"/>
-                  <a:pt x="657" y="311"/>
-                  <a:pt x="650" y="318"/>
-                </a:cubicBezTo>
-                <a:cubicBezTo>
-                  <a:pt x="643" y="325"/>
-                  <a:pt x="635" y="332"/>
-                  <a:pt x="627" y="337"/>
-                </a:cubicBezTo>
-                <a:cubicBezTo>
-                  <a:pt x="619" y="343"/>
-                  <a:pt x="610" y="347"/>
-                  <a:pt x="601" y="351"/>
-                </a:cubicBezTo>
-                <a:cubicBezTo>
-                  <a:pt x="592" y="355"/>
-                  <a:pt x="582" y="358"/>
-                  <a:pt x="573" y="360"/>
-                </a:cubicBezTo>
-                <a:cubicBezTo>
-                  <a:pt x="563" y="361"/>
-                  <a:pt x="553" y="362"/>
-                  <a:pt x="543" y="362"/>
-                </a:cubicBezTo>
-                <a:lnTo>
-                  <a:pt x="543" y="423"/>
-                </a:lnTo>
-                <a:cubicBezTo>
-                  <a:pt x="557" y="423"/>
-                  <a:pt x="571" y="421"/>
-                  <a:pt x="584" y="419"/>
-                </a:cubicBezTo>
-                <a:cubicBezTo>
-                  <a:pt x="598" y="416"/>
-                  <a:pt x="611" y="412"/>
-                  <a:pt x="624" y="407"/>
-                </a:cubicBezTo>
-                <a:cubicBezTo>
-                  <a:pt x="637" y="401"/>
-                  <a:pt x="649" y="395"/>
-                  <a:pt x="661" y="387"/>
-                </a:cubicBezTo>
-                <a:cubicBezTo>
-                  <a:pt x="672" y="379"/>
-                  <a:pt x="683" y="371"/>
-                  <a:pt x="693" y="361"/>
-                </a:cubicBezTo>
-                <a:cubicBezTo>
-                  <a:pt x="702" y="351"/>
-                  <a:pt x="711" y="340"/>
-                  <a:pt x="719" y="329"/>
-                </a:cubicBezTo>
-                <a:cubicBezTo>
-                  <a:pt x="726" y="317"/>
-                  <a:pt x="733" y="305"/>
-                  <a:pt x="738" y="292"/>
-                </a:cubicBezTo>
-                <a:cubicBezTo>
-                  <a:pt x="744" y="280"/>
-                  <a:pt x="748" y="266"/>
-                  <a:pt x="750" y="253"/>
-                </a:cubicBezTo>
-                <a:cubicBezTo>
-                  <a:pt x="753" y="239"/>
-                  <a:pt x="754" y="226"/>
-                  <a:pt x="754" y="212"/>
-                </a:cubicBezTo>
-                <a:cubicBezTo>
-                  <a:pt x="754" y="198"/>
-                  <a:pt x="753" y="184"/>
-                  <a:pt x="750" y="170"/>
-                </a:cubicBezTo>
-                <a:cubicBezTo>
-                  <a:pt x="748" y="157"/>
-                  <a:pt x="744" y="144"/>
-                  <a:pt x="738" y="131"/>
-                </a:cubicBezTo>
-                <a:cubicBezTo>
-                  <a:pt x="733" y="118"/>
-                  <a:pt x="726" y="106"/>
-                  <a:pt x="719" y="93"/>
-                </a:cubicBezTo>
-                <a:cubicBezTo>
-                  <a:pt x="711" y="82"/>
-                  <a:pt x="702" y="71"/>
-                  <a:pt x="693" y="61"/>
-                </a:cubicBezTo>
-                <a:cubicBezTo>
-                  <a:pt x="683" y="52"/>
-                  <a:pt x="672" y="43"/>
-                  <a:pt x="661" y="35"/>
-                </a:cubicBezTo>
-                <a:cubicBezTo>
-                  <a:pt x="649" y="27"/>
-                  <a:pt x="637" y="21"/>
-                  <a:pt x="624" y="16"/>
-                </a:cubicBezTo>
-                <a:cubicBezTo>
-                  <a:pt x="611" y="10"/>
-                  <a:pt x="598" y="6"/>
-                  <a:pt x="584" y="4"/>
-                </a:cubicBezTo>
-                <a:cubicBezTo>
-                  <a:pt x="571" y="1"/>
-                  <a:pt x="557" y="0"/>
-                  <a:pt x="543" y="0"/>
-                </a:cubicBezTo>
-                <a:moveTo>
-                  <a:pt x="302" y="60"/>
-                </a:moveTo>
-                <a:cubicBezTo>
-                  <a:pt x="312" y="60"/>
-                  <a:pt x="322" y="61"/>
-                  <a:pt x="331" y="63"/>
-                </a:cubicBezTo>
-                <a:cubicBezTo>
-                  <a:pt x="341" y="65"/>
-                  <a:pt x="351" y="68"/>
-                  <a:pt x="360" y="71"/>
-                </a:cubicBezTo>
-                <a:cubicBezTo>
-                  <a:pt x="369" y="75"/>
-                  <a:pt x="378" y="80"/>
-                  <a:pt x="386" y="85"/>
-                </a:cubicBezTo>
-                <a:cubicBezTo>
-                  <a:pt x="394" y="91"/>
-                  <a:pt x="402" y="97"/>
-                  <a:pt x="409" y="104"/>
-                </a:cubicBezTo>
-                <a:cubicBezTo>
-                  <a:pt x="416" y="112"/>
-                  <a:pt x="422" y="120"/>
-                  <a:pt x="427" y="128"/>
-                </a:cubicBezTo>
-                <a:cubicBezTo>
-                  <a:pt x="433" y="136"/>
-                  <a:pt x="438" y="145"/>
-                  <a:pt x="441" y="154"/>
-                </a:cubicBezTo>
-                <a:cubicBezTo>
-                  <a:pt x="445" y="163"/>
-                  <a:pt x="448" y="173"/>
-                  <a:pt x="450" y="182"/>
-                </a:cubicBezTo>
-                <a:cubicBezTo>
-                  <a:pt x="452" y="192"/>
-                  <a:pt x="453" y="202"/>
-                  <a:pt x="453" y="212"/>
-                </a:cubicBezTo>
-                <a:cubicBezTo>
-                  <a:pt x="453" y="222"/>
-                  <a:pt x="452" y="231"/>
-                  <a:pt x="450" y="241"/>
-                </a:cubicBezTo>
-                <a:cubicBezTo>
-                  <a:pt x="448" y="251"/>
-                  <a:pt x="445" y="260"/>
-                  <a:pt x="441" y="269"/>
-                </a:cubicBezTo>
-                <a:cubicBezTo>
-                  <a:pt x="438" y="279"/>
-                  <a:pt x="433" y="287"/>
-                  <a:pt x="427" y="295"/>
-                </a:cubicBezTo>
-                <a:cubicBezTo>
-                  <a:pt x="422" y="304"/>
-                  <a:pt x="416" y="311"/>
-                  <a:pt x="409" y="318"/>
-                </a:cubicBezTo>
-                <a:cubicBezTo>
-                  <a:pt x="402" y="325"/>
-                  <a:pt x="394" y="332"/>
-                  <a:pt x="386" y="337"/>
-                </a:cubicBezTo>
-                <a:cubicBezTo>
-                  <a:pt x="378" y="343"/>
-                  <a:pt x="369" y="347"/>
-                  <a:pt x="360" y="351"/>
-                </a:cubicBezTo>
-                <a:cubicBezTo>
-                  <a:pt x="351" y="355"/>
-                  <a:pt x="341" y="358"/>
-                  <a:pt x="331" y="360"/>
-                </a:cubicBezTo>
-                <a:cubicBezTo>
-                  <a:pt x="322" y="361"/>
-                  <a:pt x="312" y="362"/>
-                  <a:pt x="302" y="362"/>
-                </a:cubicBezTo>
-                <a:cubicBezTo>
-                  <a:pt x="292" y="362"/>
-                  <a:pt x="282" y="361"/>
-                  <a:pt x="272" y="360"/>
-                </a:cubicBezTo>
-                <a:cubicBezTo>
-                  <a:pt x="262" y="358"/>
-                  <a:pt x="252" y="355"/>
-                  <a:pt x="243" y="351"/>
-                </a:cubicBezTo>
-                <a:cubicBezTo>
-                  <a:pt x="234" y="347"/>
-                  <a:pt x="226" y="343"/>
-                  <a:pt x="217" y="337"/>
-                </a:cubicBezTo>
-                <a:cubicBezTo>
-                  <a:pt x="209" y="332"/>
-                  <a:pt x="201" y="325"/>
-                  <a:pt x="194" y="318"/>
-                </a:cubicBezTo>
-                <a:cubicBezTo>
-                  <a:pt x="187" y="311"/>
-                  <a:pt x="181" y="304"/>
-                  <a:pt x="176" y="295"/>
-                </a:cubicBezTo>
-                <a:cubicBezTo>
-                  <a:pt x="170" y="287"/>
-                  <a:pt x="166" y="279"/>
-                  <a:pt x="162" y="269"/>
-                </a:cubicBezTo>
-                <a:cubicBezTo>
-                  <a:pt x="158" y="260"/>
-                  <a:pt x="155" y="251"/>
-                  <a:pt x="153" y="241"/>
-                </a:cubicBezTo>
-                <a:cubicBezTo>
-                  <a:pt x="151" y="231"/>
-                  <a:pt x="150" y="222"/>
-                  <a:pt x="150" y="212"/>
-                </a:cubicBezTo>
-                <a:cubicBezTo>
-                  <a:pt x="150" y="202"/>
-                  <a:pt x="151" y="192"/>
-                  <a:pt x="153" y="182"/>
-                </a:cubicBezTo>
-                <a:cubicBezTo>
-                  <a:pt x="155" y="173"/>
-                  <a:pt x="158" y="163"/>
-                  <a:pt x="162" y="154"/>
-                </a:cubicBezTo>
-                <a:cubicBezTo>
-                  <a:pt x="166" y="145"/>
-                  <a:pt x="170" y="136"/>
-                  <a:pt x="176" y="128"/>
-                </a:cubicBezTo>
-                <a:cubicBezTo>
-                  <a:pt x="181" y="120"/>
-                  <a:pt x="187" y="112"/>
-                  <a:pt x="194" y="104"/>
-                </a:cubicBezTo>
-                <a:cubicBezTo>
-                  <a:pt x="201" y="97"/>
-                  <a:pt x="209" y="91"/>
-                  <a:pt x="217" y="85"/>
-                </a:cubicBezTo>
-                <a:cubicBezTo>
-                  <a:pt x="226" y="80"/>
-                  <a:pt x="234" y="75"/>
-                  <a:pt x="243" y="71"/>
-                </a:cubicBezTo>
-                <a:cubicBezTo>
-                  <a:pt x="252" y="68"/>
-                  <a:pt x="262" y="65"/>
-                  <a:pt x="272" y="63"/>
-                </a:cubicBezTo>
-                <a:cubicBezTo>
-                  <a:pt x="282" y="61"/>
-                  <a:pt x="292" y="60"/>
-                  <a:pt x="302" y="60"/>
-                </a:cubicBezTo>
-                <a:moveTo>
-                  <a:pt x="302" y="0"/>
-                </a:moveTo>
-                <a:cubicBezTo>
-                  <a:pt x="288" y="0"/>
-                  <a:pt x="273" y="1"/>
-                  <a:pt x="260" y="4"/>
-                </a:cubicBezTo>
-                <a:cubicBezTo>
-                  <a:pt x="246" y="6"/>
-                  <a:pt x="233" y="10"/>
-                  <a:pt x="220" y="16"/>
-                </a:cubicBezTo>
-                <a:cubicBezTo>
-                  <a:pt x="207" y="21"/>
-                  <a:pt x="195" y="27"/>
-                  <a:pt x="184" y="35"/>
-                </a:cubicBezTo>
-                <a:cubicBezTo>
-                  <a:pt x="172" y="43"/>
-                  <a:pt x="162" y="52"/>
-                  <a:pt x="152" y="61"/>
-                </a:cubicBezTo>
-                <a:cubicBezTo>
-                  <a:pt x="142" y="71"/>
-                  <a:pt x="133" y="82"/>
-                  <a:pt x="126" y="93"/>
-                </a:cubicBezTo>
-                <a:cubicBezTo>
-                  <a:pt x="118" y="106"/>
-                  <a:pt x="111" y="118"/>
-                  <a:pt x="106" y="131"/>
-                </a:cubicBezTo>
-                <a:cubicBezTo>
-                  <a:pt x="101" y="144"/>
-                  <a:pt x="97" y="157"/>
-                  <a:pt x="94" y="170"/>
-                </a:cubicBezTo>
-                <a:cubicBezTo>
-                  <a:pt x="91" y="184"/>
-                  <a:pt x="90" y="198"/>
-                  <a:pt x="90" y="212"/>
-                </a:cubicBezTo>
-                <a:cubicBezTo>
-                  <a:pt x="90" y="226"/>
-                  <a:pt x="91" y="239"/>
-                  <a:pt x="94" y="253"/>
-                </a:cubicBezTo>
-                <a:cubicBezTo>
-                  <a:pt x="97" y="266"/>
-                  <a:pt x="101" y="280"/>
-                  <a:pt x="106" y="292"/>
-                </a:cubicBezTo>
-                <a:cubicBezTo>
-                  <a:pt x="111" y="305"/>
-                  <a:pt x="118" y="317"/>
-                  <a:pt x="126" y="329"/>
-                </a:cubicBezTo>
-                <a:cubicBezTo>
-                  <a:pt x="133" y="340"/>
-                  <a:pt x="142" y="351"/>
-                  <a:pt x="152" y="361"/>
-                </a:cubicBezTo>
-                <a:cubicBezTo>
-                  <a:pt x="162" y="371"/>
-                  <a:pt x="172" y="379"/>
-                  <a:pt x="184" y="387"/>
-                </a:cubicBezTo>
-                <a:cubicBezTo>
-                  <a:pt x="195" y="395"/>
-                  <a:pt x="207" y="401"/>
-                  <a:pt x="220" y="407"/>
-                </a:cubicBezTo>
-                <a:cubicBezTo>
-                  <a:pt x="233" y="412"/>
-                  <a:pt x="246" y="416"/>
-                  <a:pt x="260" y="419"/>
-                </a:cubicBezTo>
-                <a:cubicBezTo>
-                  <a:pt x="273" y="421"/>
-                  <a:pt x="288" y="423"/>
-                  <a:pt x="302" y="423"/>
-                </a:cubicBezTo>
-                <a:cubicBezTo>
-                  <a:pt x="316" y="423"/>
-                  <a:pt x="330" y="421"/>
-                  <a:pt x="343" y="419"/>
-                </a:cubicBezTo>
-                <a:cubicBezTo>
-                  <a:pt x="357" y="416"/>
-                  <a:pt x="370" y="412"/>
-                  <a:pt x="383" y="407"/>
-                </a:cubicBezTo>
-                <a:cubicBezTo>
-                  <a:pt x="396" y="401"/>
-                  <a:pt x="408" y="395"/>
-                  <a:pt x="419" y="387"/>
-                </a:cubicBezTo>
-                <a:cubicBezTo>
-                  <a:pt x="431" y="379"/>
-                  <a:pt x="441" y="371"/>
-                  <a:pt x="451" y="361"/>
-                </a:cubicBezTo>
-                <a:cubicBezTo>
-                  <a:pt x="461" y="351"/>
-                  <a:pt x="470" y="340"/>
-                  <a:pt x="478" y="329"/>
-                </a:cubicBezTo>
-                <a:cubicBezTo>
-                  <a:pt x="485" y="317"/>
-                  <a:pt x="492" y="305"/>
-                  <a:pt x="497" y="292"/>
-                </a:cubicBezTo>
-                <a:cubicBezTo>
-                  <a:pt x="502" y="280"/>
-                  <a:pt x="506" y="266"/>
-                  <a:pt x="509" y="253"/>
-                </a:cubicBezTo>
-                <a:cubicBezTo>
-                  <a:pt x="512" y="239"/>
-                  <a:pt x="513" y="226"/>
-                  <a:pt x="513" y="212"/>
-                </a:cubicBezTo>
-                <a:cubicBezTo>
-                  <a:pt x="513" y="198"/>
-                  <a:pt x="512" y="184"/>
-                  <a:pt x="509" y="170"/>
-                </a:cubicBezTo>
-                <a:cubicBezTo>
-                  <a:pt x="506" y="157"/>
-                  <a:pt x="502" y="144"/>
-                  <a:pt x="497" y="131"/>
-                </a:cubicBezTo>
-                <a:cubicBezTo>
-                  <a:pt x="492" y="118"/>
-                  <a:pt x="485" y="106"/>
-                  <a:pt x="478" y="93"/>
-                </a:cubicBezTo>
-                <a:cubicBezTo>
-                  <a:pt x="470" y="82"/>
-                  <a:pt x="461" y="71"/>
-                  <a:pt x="451" y="61"/>
-                </a:cubicBezTo>
-                <a:cubicBezTo>
-                  <a:pt x="441" y="52"/>
-                  <a:pt x="431" y="43"/>
-                  <a:pt x="419" y="35"/>
-                </a:cubicBezTo>
-                <a:cubicBezTo>
-                  <a:pt x="408" y="27"/>
-                  <a:pt x="396" y="21"/>
-                  <a:pt x="383" y="16"/>
-                </a:cubicBezTo>
-                <a:cubicBezTo>
-                  <a:pt x="370" y="10"/>
-                  <a:pt x="357" y="6"/>
-                  <a:pt x="343" y="4"/>
-                </a:cubicBezTo>
-                <a:cubicBezTo>
-                  <a:pt x="330" y="1"/>
-                  <a:pt x="316" y="0"/>
-                  <a:pt x="302" y="0"/>
-                </a:cubicBezTo>
-                <a:close/>
-              </a:path>
-            </a:pathLst>
-          </a:custGeom>
-          <a:solidFill>
-            <a:srgbClr val="dd784b"/>
-          </a:solidFill>
-          <a:ln w="0">
-            <a:noFill/>
-          </a:ln>
-        </p:spPr>
-        <p:txBody>
-          <a:bodyPr lIns="0" rIns="0" tIns="0" bIns="0" anchor="t">
-            <a:noAutofit/>
-          </a:bodyPr>
-          <a:p>
-            <a:endParaRPr b="0" lang="en-US" sz="2400" spc="-1" strike="noStrike">
-              <a:solidFill>
-                <a:srgbClr val="000000"/>
-              </a:solidFill>
-              <a:latin typeface="DejaVu Serif"/>
-            </a:endParaRPr>
-          </a:p>
-        </p:txBody>
-      </p:sp>
-      <p:sp>
-        <p:nvSpPr>
           <p:cNvPr id="62" name=""/>
           <p:cNvSpPr txBox="1"/>
           <p:nvPr/>
         </p:nvSpPr>
         <p:spPr>
           <a:xfrm>
-            <a:off x="439920" y="1291680"/>
-            <a:ext cx="1213920" cy="399600"/>
+            <a:off x="893880" y="2402640"/>
+            <a:ext cx="2019960" cy="153000"/>
           </a:xfrm>
           <a:prstGeom prst="rect">
             <a:avLst/>
@@ -4358,77 +4178,34 @@
           </a:bodyPr>
           <a:p>
             <a:r>
-              <a:rPr b="1" lang="en-US" sz="2700" spc="-1" strike="noStrike">
-                <a:solidFill>
-                  <a:srgbClr val="dd784b"/>
-                </a:solidFill>
-                <a:latin typeface="Arial"/>
-                <a:ea typeface="Arial"/>
-              </a:rPr>
-              <a:t>maakt</a:t>
-            </a:r>
-            <a:endParaRPr b="0" lang="en-US" sz="2700" spc="-1" strike="noStrike">
-              <a:solidFill>
-                <a:srgbClr val="000000"/>
-              </a:solidFill>
-              <a:latin typeface="DejaVu Serif"/>
-            </a:endParaRPr>
-          </a:p>
-        </p:txBody>
-      </p:sp>
-      <p:sp>
-        <p:nvSpPr>
-          <p:cNvPr id="63" name=""/>
-          <p:cNvSpPr txBox="1"/>
-          <p:nvPr/>
-        </p:nvSpPr>
-        <p:spPr>
-          <a:xfrm>
-            <a:off x="1165320" y="2618640"/>
-            <a:ext cx="1424160" cy="157320"/>
-          </a:xfrm>
-          <a:prstGeom prst="rect">
-            <a:avLst/>
-          </a:prstGeom>
-          <a:noFill/>
-          <a:ln w="0">
-            <a:noFill/>
-          </a:ln>
-        </p:spPr>
-        <p:txBody>
-          <a:bodyPr lIns="0" rIns="0" tIns="0" bIns="0" anchor="t">
-            <a:noAutofit/>
-          </a:bodyPr>
-          <a:p>
-            <a:r>
-              <a:rPr b="1" lang="en-US" sz="1050" spc="-1" strike="noStrike">
+              <a:rPr b="1" lang="en-US" sz="1030" spc="-1" strike="noStrike">
                 <a:solidFill>
                   <a:srgbClr val="3d68ec"/>
                 </a:solidFill>
                 <a:latin typeface="Arial"/>
                 <a:ea typeface="Arial"/>
               </a:rPr>
-              <a:t>Wat scholen willen</a:t>
+              <a:t>Ophalen wat scholen willen</a:t>
             </a:r>
-            <a:endParaRPr b="0" lang="en-US" sz="1050" spc="-1" strike="noStrike">
-              <a:solidFill>
-                <a:srgbClr val="000000"/>
-              </a:solidFill>
-              <a:latin typeface="DejaVu Serif"/>
-            </a:endParaRPr>
-          </a:p>
-        </p:txBody>
-      </p:sp>
-      <p:sp>
-        <p:nvSpPr>
-          <p:cNvPr id="64" name=""/>
+            <a:endParaRPr b="0" lang="en-US" sz="1030" spc="-1" strike="noStrike">
+              <a:solidFill>
+                <a:srgbClr val="000000"/>
+              </a:solidFill>
+              <a:latin typeface="DejaVu Serif"/>
+            </a:endParaRPr>
+          </a:p>
+        </p:txBody>
+      </p:sp>
+      <p:sp>
+        <p:nvSpPr>
+          <p:cNvPr id="63" name=""/>
           <p:cNvSpPr txBox="1"/>
           <p:nvPr/>
         </p:nvSpPr>
         <p:spPr>
           <a:xfrm>
-            <a:off x="822600" y="2850840"/>
-            <a:ext cx="2111400" cy="128520"/>
+            <a:off x="912960" y="2631960"/>
+            <a:ext cx="1975680" cy="128520"/>
           </a:xfrm>
           <a:prstGeom prst="rect">
             <a:avLst/>
@@ -4451,7 +4228,7 @@
                 <a:latin typeface="Arial"/>
                 <a:ea typeface="Arial"/>
               </a:rPr>
-              <a:t>opgehaald bij koplopers, per leerroute</a:t>
+              <a:t>koplopers per leerroute; leerroute 1</a:t>
             </a:r>
             <a:endParaRPr b="0" lang="en-US" sz="860" spc="-1" strike="noStrike">
               <a:solidFill>
@@ -4464,14 +4241,14 @@
       </p:sp>
       <p:sp>
         <p:nvSpPr>
-          <p:cNvPr id="65" name=""/>
+          <p:cNvPr id="64" name=""/>
           <p:cNvSpPr txBox="1"/>
           <p:nvPr/>
         </p:nvSpPr>
         <p:spPr>
           <a:xfrm>
-            <a:off x="1494000" y="3012840"/>
-            <a:ext cx="590400" cy="128520"/>
+            <a:off x="998640" y="2793600"/>
+            <a:ext cx="1753200" cy="128520"/>
           </a:xfrm>
           <a:prstGeom prst="rect">
             <a:avLst/>
@@ -4494,7 +4271,7 @@
                 <a:latin typeface="Arial"/>
                 <a:ea typeface="Arial"/>
               </a:rPr>
-              <a:t>uitgewerkt</a:t>
+              <a:t>uitgewerkt, 2 en 3 in bewerking</a:t>
             </a:r>
             <a:endParaRPr b="0" lang="en-US" sz="860" spc="-1" strike="noStrike">
               <a:solidFill>
@@ -4507,14 +4284,14 @@
       </p:sp>
       <p:sp>
         <p:nvSpPr>
-          <p:cNvPr id="66" name=""/>
+          <p:cNvPr id="65" name=""/>
           <p:cNvSpPr/>
           <p:nvPr/>
         </p:nvSpPr>
         <p:spPr>
           <a:xfrm>
-            <a:off x="3376440" y="2057040"/>
-            <a:ext cx="2581560" cy="1243440"/>
+            <a:off x="3376440" y="1809720"/>
+            <a:ext cx="2581560" cy="1357560"/>
           </a:xfrm>
           <a:custGeom>
             <a:avLst/>
@@ -4522,50 +4299,50 @@
             <a:ahLst/>
             <a:rect l="0" t="0" r="r" b="b"/>
             <a:pathLst>
-              <a:path w="7171" h="3454">
+              <a:path w="7171" h="3771">
                 <a:moveTo>
-                  <a:pt x="0" y="3150"/>
+                  <a:pt x="0" y="3467"/>
                 </a:moveTo>
                 <a:lnTo>
-                  <a:pt x="0" y="265"/>
-                </a:lnTo>
-                <a:cubicBezTo>
-                  <a:pt x="0" y="248"/>
-                  <a:pt x="2" y="231"/>
+                  <a:pt x="0" y="264"/>
+                </a:lnTo>
+                <a:cubicBezTo>
+                  <a:pt x="0" y="247"/>
+                  <a:pt x="2" y="230"/>
                   <a:pt x="6" y="213"/>
                 </a:cubicBezTo>
                 <a:cubicBezTo>
                   <a:pt x="10" y="196"/>
-                  <a:pt x="15" y="180"/>
-                  <a:pt x="23" y="164"/>
-                </a:cubicBezTo>
-                <a:cubicBezTo>
-                  <a:pt x="31" y="148"/>
-                  <a:pt x="40" y="133"/>
-                  <a:pt x="51" y="118"/>
-                </a:cubicBezTo>
-                <a:cubicBezTo>
-                  <a:pt x="62" y="104"/>
-                  <a:pt x="75" y="90"/>
-                  <a:pt x="89" y="78"/>
-                </a:cubicBezTo>
-                <a:cubicBezTo>
-                  <a:pt x="103" y="66"/>
-                  <a:pt x="119" y="55"/>
-                  <a:pt x="135" y="45"/>
+                  <a:pt x="15" y="179"/>
+                  <a:pt x="23" y="163"/>
+                </a:cubicBezTo>
+                <a:cubicBezTo>
+                  <a:pt x="31" y="147"/>
+                  <a:pt x="40" y="132"/>
+                  <a:pt x="51" y="117"/>
+                </a:cubicBezTo>
+                <a:cubicBezTo>
+                  <a:pt x="62" y="103"/>
+                  <a:pt x="75" y="89"/>
+                  <a:pt x="89" y="77"/>
+                </a:cubicBezTo>
+                <a:cubicBezTo>
+                  <a:pt x="103" y="65"/>
+                  <a:pt x="119" y="54"/>
+                  <a:pt x="135" y="44"/>
                 </a:cubicBezTo>
                 <a:cubicBezTo>
                   <a:pt x="152" y="35"/>
-                  <a:pt x="169" y="27"/>
-                  <a:pt x="188" y="21"/>
-                </a:cubicBezTo>
-                <a:cubicBezTo>
-                  <a:pt x="206" y="14"/>
-                  <a:pt x="225" y="9"/>
-                  <a:pt x="245" y="6"/>
-                </a:cubicBezTo>
-                <a:cubicBezTo>
-                  <a:pt x="264" y="2"/>
+                  <a:pt x="169" y="26"/>
+                  <a:pt x="188" y="20"/>
+                </a:cubicBezTo>
+                <a:cubicBezTo>
+                  <a:pt x="206" y="13"/>
+                  <a:pt x="225" y="8"/>
+                  <a:pt x="245" y="5"/>
+                </a:cubicBezTo>
+                <a:cubicBezTo>
+                  <a:pt x="264" y="1"/>
                   <a:pt x="284" y="0"/>
                   <a:pt x="304" y="0"/>
                 </a:cubicBezTo>
@@ -4574,129 +4351,129 @@
                 </a:lnTo>
                 <a:cubicBezTo>
                   <a:pt x="6887" y="0"/>
-                  <a:pt x="6907" y="2"/>
-                  <a:pt x="6926" y="6"/>
-                </a:cubicBezTo>
-                <a:cubicBezTo>
-                  <a:pt x="6946" y="9"/>
-                  <a:pt x="6965" y="14"/>
-                  <a:pt x="6983" y="21"/>
-                </a:cubicBezTo>
-                <a:cubicBezTo>
-                  <a:pt x="7002" y="27"/>
+                  <a:pt x="6907" y="1"/>
+                  <a:pt x="6926" y="5"/>
+                </a:cubicBezTo>
+                <a:cubicBezTo>
+                  <a:pt x="6946" y="8"/>
+                  <a:pt x="6965" y="13"/>
+                  <a:pt x="6983" y="20"/>
+                </a:cubicBezTo>
+                <a:cubicBezTo>
+                  <a:pt x="7002" y="26"/>
                   <a:pt x="7019" y="35"/>
-                  <a:pt x="7036" y="45"/>
-                </a:cubicBezTo>
-                <a:cubicBezTo>
-                  <a:pt x="7053" y="55"/>
-                  <a:pt x="7068" y="66"/>
-                  <a:pt x="7082" y="78"/>
-                </a:cubicBezTo>
-                <a:cubicBezTo>
-                  <a:pt x="7096" y="90"/>
-                  <a:pt x="7109" y="104"/>
-                  <a:pt x="7120" y="118"/>
-                </a:cubicBezTo>
-                <a:cubicBezTo>
-                  <a:pt x="7131" y="133"/>
-                  <a:pt x="7140" y="148"/>
-                  <a:pt x="7148" y="164"/>
-                </a:cubicBezTo>
-                <a:cubicBezTo>
-                  <a:pt x="7156" y="180"/>
+                  <a:pt x="7036" y="44"/>
+                </a:cubicBezTo>
+                <a:cubicBezTo>
+                  <a:pt x="7053" y="54"/>
+                  <a:pt x="7068" y="65"/>
+                  <a:pt x="7082" y="77"/>
+                </a:cubicBezTo>
+                <a:cubicBezTo>
+                  <a:pt x="7096" y="89"/>
+                  <a:pt x="7109" y="103"/>
+                  <a:pt x="7120" y="117"/>
+                </a:cubicBezTo>
+                <a:cubicBezTo>
+                  <a:pt x="7131" y="132"/>
+                  <a:pt x="7140" y="147"/>
+                  <a:pt x="7148" y="163"/>
+                </a:cubicBezTo>
+                <a:cubicBezTo>
+                  <a:pt x="7156" y="179"/>
                   <a:pt x="7161" y="196"/>
                   <a:pt x="7165" y="213"/>
                 </a:cubicBezTo>
                 <a:cubicBezTo>
-                  <a:pt x="7169" y="231"/>
-                  <a:pt x="7171" y="248"/>
-                  <a:pt x="7171" y="265"/>
-                </a:cubicBezTo>
-                <a:lnTo>
-                  <a:pt x="7171" y="3150"/>
-                </a:lnTo>
-                <a:cubicBezTo>
-                  <a:pt x="7171" y="3170"/>
-                  <a:pt x="7169" y="3190"/>
-                  <a:pt x="7165" y="3209"/>
-                </a:cubicBezTo>
-                <a:cubicBezTo>
-                  <a:pt x="7161" y="3229"/>
-                  <a:pt x="7156" y="3248"/>
-                  <a:pt x="7148" y="3266"/>
-                </a:cubicBezTo>
-                <a:cubicBezTo>
-                  <a:pt x="7140" y="3285"/>
-                  <a:pt x="7131" y="3302"/>
-                  <a:pt x="7120" y="3319"/>
-                </a:cubicBezTo>
-                <a:cubicBezTo>
-                  <a:pt x="7109" y="3336"/>
-                  <a:pt x="7096" y="3351"/>
-                  <a:pt x="7082" y="3365"/>
-                </a:cubicBezTo>
-                <a:cubicBezTo>
-                  <a:pt x="7068" y="3379"/>
-                  <a:pt x="7053" y="3392"/>
-                  <a:pt x="7036" y="3403"/>
-                </a:cubicBezTo>
-                <a:cubicBezTo>
-                  <a:pt x="7019" y="3414"/>
-                  <a:pt x="7002" y="3424"/>
-                  <a:pt x="6983" y="3431"/>
-                </a:cubicBezTo>
-                <a:cubicBezTo>
-                  <a:pt x="6965" y="3439"/>
-                  <a:pt x="6946" y="3445"/>
-                  <a:pt x="6926" y="3448"/>
-                </a:cubicBezTo>
-                <a:cubicBezTo>
-                  <a:pt x="6907" y="3452"/>
-                  <a:pt x="6887" y="3454"/>
-                  <a:pt x="6867" y="3454"/>
-                </a:cubicBezTo>
-                <a:lnTo>
-                  <a:pt x="304" y="3454"/>
-                </a:lnTo>
-                <a:cubicBezTo>
-                  <a:pt x="284" y="3454"/>
-                  <a:pt x="264" y="3452"/>
-                  <a:pt x="245" y="3448"/>
-                </a:cubicBezTo>
-                <a:cubicBezTo>
-                  <a:pt x="225" y="3445"/>
-                  <a:pt x="206" y="3439"/>
-                  <a:pt x="188" y="3431"/>
-                </a:cubicBezTo>
-                <a:cubicBezTo>
-                  <a:pt x="169" y="3424"/>
-                  <a:pt x="152" y="3414"/>
-                  <a:pt x="135" y="3403"/>
-                </a:cubicBezTo>
-                <a:cubicBezTo>
-                  <a:pt x="119" y="3392"/>
-                  <a:pt x="103" y="3379"/>
-                  <a:pt x="89" y="3365"/>
-                </a:cubicBezTo>
-                <a:cubicBezTo>
-                  <a:pt x="75" y="3351"/>
-                  <a:pt x="62" y="3336"/>
-                  <a:pt x="51" y="3319"/>
-                </a:cubicBezTo>
-                <a:cubicBezTo>
-                  <a:pt x="40" y="3302"/>
-                  <a:pt x="31" y="3285"/>
-                  <a:pt x="23" y="3266"/>
-                </a:cubicBezTo>
-                <a:cubicBezTo>
-                  <a:pt x="15" y="3248"/>
-                  <a:pt x="10" y="3229"/>
-                  <a:pt x="6" y="3209"/>
-                </a:cubicBezTo>
-                <a:cubicBezTo>
-                  <a:pt x="2" y="3190"/>
-                  <a:pt x="0" y="3170"/>
-                  <a:pt x="0" y="3150"/>
+                  <a:pt x="7169" y="230"/>
+                  <a:pt x="7171" y="247"/>
+                  <a:pt x="7171" y="264"/>
+                </a:cubicBezTo>
+                <a:lnTo>
+                  <a:pt x="7171" y="3467"/>
+                </a:lnTo>
+                <a:cubicBezTo>
+                  <a:pt x="7171" y="3487"/>
+                  <a:pt x="7169" y="3506"/>
+                  <a:pt x="7165" y="3526"/>
+                </a:cubicBezTo>
+                <a:cubicBezTo>
+                  <a:pt x="7161" y="3546"/>
+                  <a:pt x="7156" y="3565"/>
+                  <a:pt x="7148" y="3583"/>
+                </a:cubicBezTo>
+                <a:cubicBezTo>
+                  <a:pt x="7140" y="3602"/>
+                  <a:pt x="7131" y="3619"/>
+                  <a:pt x="7120" y="3636"/>
+                </a:cubicBezTo>
+                <a:cubicBezTo>
+                  <a:pt x="7109" y="3652"/>
+                  <a:pt x="7096" y="3668"/>
+                  <a:pt x="7082" y="3682"/>
+                </a:cubicBezTo>
+                <a:cubicBezTo>
+                  <a:pt x="7068" y="3696"/>
+                  <a:pt x="7053" y="3709"/>
+                  <a:pt x="7036" y="3720"/>
+                </a:cubicBezTo>
+                <a:cubicBezTo>
+                  <a:pt x="7019" y="3731"/>
+                  <a:pt x="7002" y="3740"/>
+                  <a:pt x="6983" y="3748"/>
+                </a:cubicBezTo>
+                <a:cubicBezTo>
+                  <a:pt x="6965" y="3755"/>
+                  <a:pt x="6946" y="3761"/>
+                  <a:pt x="6926" y="3765"/>
+                </a:cubicBezTo>
+                <a:cubicBezTo>
+                  <a:pt x="6907" y="3769"/>
+                  <a:pt x="6887" y="3771"/>
+                  <a:pt x="6867" y="3771"/>
+                </a:cubicBezTo>
+                <a:lnTo>
+                  <a:pt x="304" y="3771"/>
+                </a:lnTo>
+                <a:cubicBezTo>
+                  <a:pt x="284" y="3771"/>
+                  <a:pt x="264" y="3769"/>
+                  <a:pt x="245" y="3765"/>
+                </a:cubicBezTo>
+                <a:cubicBezTo>
+                  <a:pt x="225" y="3761"/>
+                  <a:pt x="206" y="3755"/>
+                  <a:pt x="188" y="3748"/>
+                </a:cubicBezTo>
+                <a:cubicBezTo>
+                  <a:pt x="169" y="3740"/>
+                  <a:pt x="152" y="3731"/>
+                  <a:pt x="135" y="3720"/>
+                </a:cubicBezTo>
+                <a:cubicBezTo>
+                  <a:pt x="119" y="3709"/>
+                  <a:pt x="103" y="3696"/>
+                  <a:pt x="89" y="3682"/>
+                </a:cubicBezTo>
+                <a:cubicBezTo>
+                  <a:pt x="75" y="3668"/>
+                  <a:pt x="62" y="3652"/>
+                  <a:pt x="51" y="3636"/>
+                </a:cubicBezTo>
+                <a:cubicBezTo>
+                  <a:pt x="40" y="3619"/>
+                  <a:pt x="31" y="3602"/>
+                  <a:pt x="23" y="3583"/>
+                </a:cubicBezTo>
+                <a:cubicBezTo>
+                  <a:pt x="15" y="3565"/>
+                  <a:pt x="10" y="3546"/>
+                  <a:pt x="6" y="3526"/>
+                </a:cubicBezTo>
+                <a:cubicBezTo>
+                  <a:pt x="2" y="3506"/>
+                  <a:pt x="0" y="3487"/>
+                  <a:pt x="0" y="3467"/>
                 </a:cubicBezTo>
                 <a:close/>
               </a:path>
@@ -4725,14 +4502,14 @@
       </p:sp>
       <p:sp>
         <p:nvSpPr>
-          <p:cNvPr id="67" name=""/>
+          <p:cNvPr id="66" name=""/>
           <p:cNvSpPr/>
           <p:nvPr/>
         </p:nvSpPr>
         <p:spPr>
           <a:xfrm>
-            <a:off x="3371760" y="2038320"/>
-            <a:ext cx="2590920" cy="1267200"/>
+            <a:off x="3371760" y="1790640"/>
+            <a:ext cx="2590920" cy="1381320"/>
           </a:xfrm>
           <a:custGeom>
             <a:avLst/>
@@ -4740,7 +4517,7 @@
             <a:ahLst/>
             <a:rect l="0" t="0" r="r" b="b"/>
             <a:pathLst>
-              <a:path w="7197" h="3520">
+              <a:path w="7197" h="3837">
                 <a:moveTo>
                   <a:pt x="0" y="0"/>
                 </a:moveTo>
@@ -4748,10 +4525,10 @@
                   <a:pt x="7197" y="0"/>
                 </a:lnTo>
                 <a:lnTo>
-                  <a:pt x="7197" y="3520"/>
-                </a:lnTo>
-                <a:lnTo>
-                  <a:pt x="0" y="3520"/>
+                  <a:pt x="7197" y="3837"/>
+                </a:lnTo>
+                <a:lnTo>
+                  <a:pt x="0" y="3837"/>
                 </a:lnTo>
                 <a:lnTo>
                   <a:pt x="0" y="0"/>
@@ -4783,14 +4560,14 @@
       </p:sp>
       <p:sp>
         <p:nvSpPr>
-          <p:cNvPr id="68" name=""/>
+          <p:cNvPr id="67" name=""/>
           <p:cNvSpPr/>
           <p:nvPr/>
         </p:nvSpPr>
         <p:spPr>
           <a:xfrm>
-            <a:off x="3371760" y="2038320"/>
-            <a:ext cx="2590920" cy="1267200"/>
+            <a:off x="3371760" y="1790640"/>
+            <a:ext cx="2590920" cy="1381320"/>
           </a:xfrm>
           <a:custGeom>
             <a:avLst/>
@@ -4798,7 +4575,7 @@
             <a:ahLst/>
             <a:rect l="0" t="0" r="r" b="b"/>
             <a:pathLst>
-              <a:path w="7197" h="3520">
+              <a:path w="7197" h="3837">
                 <a:moveTo>
                   <a:pt x="0" y="0"/>
                 </a:moveTo>
@@ -4806,10 +4583,10 @@
                   <a:pt x="7197" y="0"/>
                 </a:lnTo>
                 <a:lnTo>
-                  <a:pt x="7197" y="3520"/>
-                </a:lnTo>
-                <a:lnTo>
-                  <a:pt x="0" y="3520"/>
+                  <a:pt x="7197" y="3837"/>
+                </a:lnTo>
+                <a:lnTo>
+                  <a:pt x="0" y="3837"/>
                 </a:lnTo>
                 <a:lnTo>
                   <a:pt x="0" y="0"/>
@@ -4841,14 +4618,14 @@
       </p:sp>
       <p:sp>
         <p:nvSpPr>
-          <p:cNvPr id="69" name=""/>
+          <p:cNvPr id="68" name=""/>
           <p:cNvSpPr/>
           <p:nvPr/>
         </p:nvSpPr>
         <p:spPr>
           <a:xfrm>
-            <a:off x="3371760" y="2038320"/>
-            <a:ext cx="2590920" cy="1267200"/>
+            <a:off x="3371760" y="1790640"/>
+            <a:ext cx="2590920" cy="1381320"/>
           </a:xfrm>
           <a:custGeom>
             <a:avLst/>
@@ -4856,7 +4633,7 @@
             <a:ahLst/>
             <a:rect l="0" t="0" r="r" b="b"/>
             <a:pathLst>
-              <a:path w="7197" h="3520">
+              <a:path w="7197" h="3837">
                 <a:moveTo>
                   <a:pt x="0" y="0"/>
                 </a:moveTo>
@@ -4864,10 +4641,10 @@
                   <a:pt x="7197" y="0"/>
                 </a:lnTo>
                 <a:lnTo>
-                  <a:pt x="7197" y="3520"/>
-                </a:lnTo>
-                <a:lnTo>
-                  <a:pt x="0" y="3520"/>
+                  <a:pt x="7197" y="3837"/>
+                </a:lnTo>
+                <a:lnTo>
+                  <a:pt x="0" y="3837"/>
                 </a:lnTo>
                 <a:lnTo>
                   <a:pt x="0" y="0"/>
@@ -4899,14 +4676,14 @@
       </p:sp>
       <p:sp>
         <p:nvSpPr>
-          <p:cNvPr id="70" name=""/>
+          <p:cNvPr id="69" name=""/>
           <p:cNvSpPr/>
           <p:nvPr/>
         </p:nvSpPr>
         <p:spPr>
           <a:xfrm>
-            <a:off x="3371760" y="2038320"/>
-            <a:ext cx="2590920" cy="1267200"/>
+            <a:off x="3371760" y="1790640"/>
+            <a:ext cx="2590920" cy="1381320"/>
           </a:xfrm>
           <a:custGeom>
             <a:avLst/>
@@ -4914,7 +4691,7 @@
             <a:ahLst/>
             <a:rect l="0" t="0" r="r" b="b"/>
             <a:pathLst>
-              <a:path w="7197" h="3520">
+              <a:path w="7197" h="3837">
                 <a:moveTo>
                   <a:pt x="0" y="0"/>
                 </a:moveTo>
@@ -4922,10 +4699,10 @@
                   <a:pt x="7197" y="0"/>
                 </a:lnTo>
                 <a:lnTo>
-                  <a:pt x="7197" y="3520"/>
-                </a:lnTo>
-                <a:lnTo>
-                  <a:pt x="0" y="3520"/>
+                  <a:pt x="7197" y="3837"/>
+                </a:lnTo>
+                <a:lnTo>
+                  <a:pt x="0" y="3837"/>
                 </a:lnTo>
                 <a:lnTo>
                   <a:pt x="0" y="0"/>
@@ -4957,14 +4734,14 @@
       </p:sp>
       <p:sp>
         <p:nvSpPr>
-          <p:cNvPr id="71" name=""/>
+          <p:cNvPr id="70" name=""/>
           <p:cNvSpPr/>
           <p:nvPr/>
         </p:nvSpPr>
         <p:spPr>
           <a:xfrm>
-            <a:off x="3564720" y="2229840"/>
-            <a:ext cx="304560" cy="315360"/>
+            <a:off x="3562560" y="1971720"/>
+            <a:ext cx="272160" cy="281880"/>
           </a:xfrm>
           <a:custGeom>
             <a:avLst/>
@@ -4972,605 +4749,605 @@
             <a:ahLst/>
             <a:rect l="0" t="0" r="r" b="b"/>
             <a:pathLst>
-              <a:path w="846" h="876">
+              <a:path w="756" h="783">
                 <a:moveTo>
-                  <a:pt x="181" y="242"/>
+                  <a:pt x="162" y="216"/>
                 </a:moveTo>
                 <a:cubicBezTo>
-                  <a:pt x="165" y="242"/>
-                  <a:pt x="150" y="239"/>
-                  <a:pt x="135" y="232"/>
-                </a:cubicBezTo>
-                <a:cubicBezTo>
-                  <a:pt x="120" y="226"/>
-                  <a:pt x="107" y="218"/>
-                  <a:pt x="96" y="206"/>
-                </a:cubicBezTo>
-                <a:cubicBezTo>
-                  <a:pt x="85" y="195"/>
-                  <a:pt x="76" y="182"/>
-                  <a:pt x="70" y="167"/>
-                </a:cubicBezTo>
-                <a:cubicBezTo>
-                  <a:pt x="64" y="152"/>
-                  <a:pt x="61" y="137"/>
-                  <a:pt x="61" y="121"/>
-                </a:cubicBezTo>
-                <a:cubicBezTo>
-                  <a:pt x="61" y="105"/>
-                  <a:pt x="64" y="90"/>
-                  <a:pt x="70" y="75"/>
-                </a:cubicBezTo>
-                <a:cubicBezTo>
-                  <a:pt x="76" y="60"/>
-                  <a:pt x="85" y="47"/>
-                  <a:pt x="96" y="36"/>
-                </a:cubicBezTo>
-                <a:cubicBezTo>
-                  <a:pt x="107" y="24"/>
-                  <a:pt x="120" y="16"/>
-                  <a:pt x="135" y="10"/>
-                </a:cubicBezTo>
-                <a:cubicBezTo>
-                  <a:pt x="150" y="4"/>
-                  <a:pt x="165" y="0"/>
-                  <a:pt x="181" y="0"/>
-                </a:cubicBezTo>
-                <a:cubicBezTo>
-                  <a:pt x="197" y="0"/>
-                  <a:pt x="213" y="4"/>
-                  <a:pt x="227" y="10"/>
-                </a:cubicBezTo>
-                <a:cubicBezTo>
-                  <a:pt x="242" y="16"/>
-                  <a:pt x="255" y="24"/>
-                  <a:pt x="267" y="36"/>
-                </a:cubicBezTo>
-                <a:cubicBezTo>
-                  <a:pt x="278" y="47"/>
-                  <a:pt x="287" y="60"/>
-                  <a:pt x="293" y="75"/>
-                </a:cubicBezTo>
-                <a:cubicBezTo>
-                  <a:pt x="299" y="90"/>
-                  <a:pt x="302" y="105"/>
-                  <a:pt x="302" y="121"/>
-                </a:cubicBezTo>
-                <a:cubicBezTo>
-                  <a:pt x="302" y="137"/>
-                  <a:pt x="299" y="152"/>
-                  <a:pt x="293" y="167"/>
-                </a:cubicBezTo>
-                <a:cubicBezTo>
-                  <a:pt x="287" y="182"/>
-                  <a:pt x="278" y="195"/>
-                  <a:pt x="267" y="206"/>
-                </a:cubicBezTo>
-                <a:cubicBezTo>
-                  <a:pt x="255" y="218"/>
-                  <a:pt x="242" y="226"/>
-                  <a:pt x="227" y="232"/>
-                </a:cubicBezTo>
-                <a:cubicBezTo>
-                  <a:pt x="213" y="239"/>
-                  <a:pt x="197" y="242"/>
-                  <a:pt x="181" y="242"/>
+                  <a:pt x="147" y="216"/>
+                  <a:pt x="134" y="213"/>
+                  <a:pt x="121" y="207"/>
+                </a:cubicBezTo>
+                <a:cubicBezTo>
+                  <a:pt x="107" y="202"/>
+                  <a:pt x="96" y="194"/>
+                  <a:pt x="86" y="184"/>
+                </a:cubicBezTo>
+                <a:cubicBezTo>
+                  <a:pt x="75" y="174"/>
+                  <a:pt x="68" y="162"/>
+                  <a:pt x="62" y="149"/>
+                </a:cubicBezTo>
+                <a:cubicBezTo>
+                  <a:pt x="57" y="136"/>
+                  <a:pt x="54" y="122"/>
+                  <a:pt x="54" y="108"/>
+                </a:cubicBezTo>
+                <a:cubicBezTo>
+                  <a:pt x="54" y="93"/>
+                  <a:pt x="57" y="80"/>
+                  <a:pt x="62" y="67"/>
+                </a:cubicBezTo>
+                <a:cubicBezTo>
+                  <a:pt x="68" y="53"/>
+                  <a:pt x="75" y="42"/>
+                  <a:pt x="86" y="31"/>
+                </a:cubicBezTo>
+                <a:cubicBezTo>
+                  <a:pt x="96" y="21"/>
+                  <a:pt x="107" y="14"/>
+                  <a:pt x="121" y="8"/>
+                </a:cubicBezTo>
+                <a:cubicBezTo>
+                  <a:pt x="134" y="3"/>
+                  <a:pt x="147" y="0"/>
+                  <a:pt x="162" y="0"/>
+                </a:cubicBezTo>
+                <a:cubicBezTo>
+                  <a:pt x="176" y="0"/>
+                  <a:pt x="190" y="3"/>
+                  <a:pt x="203" y="8"/>
+                </a:cubicBezTo>
+                <a:cubicBezTo>
+                  <a:pt x="216" y="14"/>
+                  <a:pt x="228" y="21"/>
+                  <a:pt x="238" y="31"/>
+                </a:cubicBezTo>
+                <a:cubicBezTo>
+                  <a:pt x="248" y="42"/>
+                  <a:pt x="256" y="53"/>
+                  <a:pt x="261" y="67"/>
+                </a:cubicBezTo>
+                <a:cubicBezTo>
+                  <a:pt x="267" y="80"/>
+                  <a:pt x="270" y="93"/>
+                  <a:pt x="270" y="108"/>
+                </a:cubicBezTo>
+                <a:cubicBezTo>
+                  <a:pt x="270" y="122"/>
+                  <a:pt x="267" y="136"/>
+                  <a:pt x="261" y="149"/>
+                </a:cubicBezTo>
+                <a:cubicBezTo>
+                  <a:pt x="256" y="162"/>
+                  <a:pt x="248" y="174"/>
+                  <a:pt x="238" y="184"/>
+                </a:cubicBezTo>
+                <a:cubicBezTo>
+                  <a:pt x="228" y="194"/>
+                  <a:pt x="216" y="202"/>
+                  <a:pt x="203" y="207"/>
+                </a:cubicBezTo>
+                <a:cubicBezTo>
+                  <a:pt x="190" y="213"/>
+                  <a:pt x="176" y="216"/>
+                  <a:pt x="162" y="216"/>
                 </a:cubicBezTo>
                 <a:moveTo>
-                  <a:pt x="181" y="61"/>
+                  <a:pt x="162" y="54"/>
                 </a:moveTo>
                 <a:cubicBezTo>
-                  <a:pt x="173" y="61"/>
-                  <a:pt x="166" y="62"/>
-                  <a:pt x="158" y="65"/>
-                </a:cubicBezTo>
-                <a:cubicBezTo>
-                  <a:pt x="151" y="68"/>
-                  <a:pt x="144" y="73"/>
-                  <a:pt x="139" y="78"/>
-                </a:cubicBezTo>
-                <a:cubicBezTo>
-                  <a:pt x="133" y="84"/>
-                  <a:pt x="129" y="91"/>
-                  <a:pt x="126" y="98"/>
-                </a:cubicBezTo>
-                <a:cubicBezTo>
-                  <a:pt x="122" y="105"/>
-                  <a:pt x="121" y="113"/>
-                  <a:pt x="121" y="121"/>
-                </a:cubicBezTo>
-                <a:cubicBezTo>
-                  <a:pt x="121" y="129"/>
-                  <a:pt x="122" y="137"/>
-                  <a:pt x="126" y="144"/>
-                </a:cubicBezTo>
-                <a:cubicBezTo>
-                  <a:pt x="129" y="152"/>
-                  <a:pt x="133" y="158"/>
-                  <a:pt x="139" y="164"/>
-                </a:cubicBezTo>
-                <a:cubicBezTo>
-                  <a:pt x="144" y="169"/>
-                  <a:pt x="151" y="174"/>
-                  <a:pt x="158" y="177"/>
-                </a:cubicBezTo>
-                <a:cubicBezTo>
-                  <a:pt x="166" y="180"/>
-                  <a:pt x="173" y="181"/>
-                  <a:pt x="181" y="181"/>
-                </a:cubicBezTo>
-                <a:cubicBezTo>
-                  <a:pt x="189" y="181"/>
-                  <a:pt x="197" y="180"/>
-                  <a:pt x="204" y="177"/>
-                </a:cubicBezTo>
-                <a:cubicBezTo>
-                  <a:pt x="212" y="174"/>
-                  <a:pt x="218" y="169"/>
-                  <a:pt x="224" y="164"/>
-                </a:cubicBezTo>
-                <a:cubicBezTo>
-                  <a:pt x="230" y="158"/>
-                  <a:pt x="234" y="152"/>
-                  <a:pt x="237" y="144"/>
-                </a:cubicBezTo>
-                <a:cubicBezTo>
-                  <a:pt x="240" y="137"/>
-                  <a:pt x="242" y="129"/>
-                  <a:pt x="242" y="121"/>
-                </a:cubicBezTo>
-                <a:cubicBezTo>
-                  <a:pt x="242" y="113"/>
-                  <a:pt x="240" y="105"/>
-                  <a:pt x="237" y="98"/>
-                </a:cubicBezTo>
-                <a:cubicBezTo>
-                  <a:pt x="234" y="91"/>
-                  <a:pt x="230" y="84"/>
-                  <a:pt x="224" y="78"/>
-                </a:cubicBezTo>
-                <a:cubicBezTo>
-                  <a:pt x="218" y="73"/>
-                  <a:pt x="212" y="68"/>
-                  <a:pt x="204" y="65"/>
-                </a:cubicBezTo>
-                <a:cubicBezTo>
-                  <a:pt x="197" y="62"/>
+                  <a:pt x="155" y="54"/>
+                  <a:pt x="148" y="55"/>
+                  <a:pt x="141" y="58"/>
+                </a:cubicBezTo>
+                <a:cubicBezTo>
+                  <a:pt x="135" y="61"/>
+                  <a:pt x="129" y="65"/>
+                  <a:pt x="124" y="70"/>
+                </a:cubicBezTo>
+                <a:cubicBezTo>
+                  <a:pt x="119" y="75"/>
+                  <a:pt x="115" y="81"/>
+                  <a:pt x="112" y="87"/>
+                </a:cubicBezTo>
+                <a:cubicBezTo>
+                  <a:pt x="109" y="94"/>
+                  <a:pt x="108" y="101"/>
+                  <a:pt x="108" y="108"/>
+                </a:cubicBezTo>
+                <a:cubicBezTo>
+                  <a:pt x="108" y="115"/>
+                  <a:pt x="109" y="122"/>
+                  <a:pt x="112" y="128"/>
+                </a:cubicBezTo>
+                <a:cubicBezTo>
+                  <a:pt x="115" y="135"/>
+                  <a:pt x="119" y="141"/>
+                  <a:pt x="124" y="146"/>
+                </a:cubicBezTo>
+                <a:cubicBezTo>
+                  <a:pt x="129" y="151"/>
+                  <a:pt x="135" y="155"/>
+                  <a:pt x="141" y="158"/>
+                </a:cubicBezTo>
+                <a:cubicBezTo>
+                  <a:pt x="148" y="160"/>
+                  <a:pt x="155" y="162"/>
+                  <a:pt x="162" y="162"/>
+                </a:cubicBezTo>
+                <a:cubicBezTo>
+                  <a:pt x="169" y="162"/>
+                  <a:pt x="176" y="160"/>
+                  <a:pt x="182" y="158"/>
+                </a:cubicBezTo>
+                <a:cubicBezTo>
+                  <a:pt x="189" y="155"/>
+                  <a:pt x="195" y="151"/>
+                  <a:pt x="200" y="146"/>
+                </a:cubicBezTo>
+                <a:cubicBezTo>
+                  <a:pt x="205" y="141"/>
+                  <a:pt x="209" y="135"/>
+                  <a:pt x="212" y="128"/>
+                </a:cubicBezTo>
+                <a:cubicBezTo>
+                  <a:pt x="214" y="122"/>
+                  <a:pt x="216" y="115"/>
+                  <a:pt x="216" y="108"/>
+                </a:cubicBezTo>
+                <a:cubicBezTo>
+                  <a:pt x="216" y="101"/>
+                  <a:pt x="214" y="94"/>
+                  <a:pt x="212" y="87"/>
+                </a:cubicBezTo>
+                <a:cubicBezTo>
+                  <a:pt x="209" y="81"/>
+                  <a:pt x="205" y="75"/>
+                  <a:pt x="200" y="70"/>
+                </a:cubicBezTo>
+                <a:cubicBezTo>
+                  <a:pt x="195" y="65"/>
                   <a:pt x="189" y="61"/>
-                  <a:pt x="181" y="61"/>
+                  <a:pt x="182" y="58"/>
+                </a:cubicBezTo>
+                <a:cubicBezTo>
+                  <a:pt x="176" y="55"/>
+                  <a:pt x="169" y="54"/>
+                  <a:pt x="162" y="54"/>
                 </a:cubicBezTo>
                 <a:moveTo>
-                  <a:pt x="665" y="242"/>
+                  <a:pt x="594" y="216"/>
                 </a:moveTo>
                 <a:cubicBezTo>
-                  <a:pt x="649" y="242"/>
-                  <a:pt x="632" y="239"/>
-                  <a:pt x="618" y="232"/>
-                </a:cubicBezTo>
-                <a:cubicBezTo>
-                  <a:pt x="603" y="226"/>
-                  <a:pt x="590" y="218"/>
-                  <a:pt x="578" y="206"/>
-                </a:cubicBezTo>
-                <a:cubicBezTo>
-                  <a:pt x="567" y="195"/>
-                  <a:pt x="558" y="182"/>
-                  <a:pt x="552" y="167"/>
-                </a:cubicBezTo>
-                <a:cubicBezTo>
-                  <a:pt x="546" y="152"/>
-                  <a:pt x="543" y="137"/>
-                  <a:pt x="543" y="121"/>
-                </a:cubicBezTo>
-                <a:cubicBezTo>
-                  <a:pt x="543" y="105"/>
-                  <a:pt x="546" y="90"/>
-                  <a:pt x="552" y="75"/>
-                </a:cubicBezTo>
-                <a:cubicBezTo>
-                  <a:pt x="558" y="60"/>
-                  <a:pt x="567" y="47"/>
-                  <a:pt x="578" y="36"/>
-                </a:cubicBezTo>
-                <a:cubicBezTo>
-                  <a:pt x="590" y="24"/>
-                  <a:pt x="603" y="16"/>
-                  <a:pt x="618" y="10"/>
-                </a:cubicBezTo>
-                <a:cubicBezTo>
-                  <a:pt x="632" y="4"/>
-                  <a:pt x="649" y="0"/>
-                  <a:pt x="665" y="0"/>
-                </a:cubicBezTo>
-                <a:cubicBezTo>
-                  <a:pt x="681" y="0"/>
-                  <a:pt x="696" y="4"/>
-                  <a:pt x="711" y="10"/>
-                </a:cubicBezTo>
-                <a:cubicBezTo>
-                  <a:pt x="726" y="16"/>
-                  <a:pt x="739" y="24"/>
-                  <a:pt x="750" y="36"/>
-                </a:cubicBezTo>
-                <a:cubicBezTo>
-                  <a:pt x="761" y="47"/>
-                  <a:pt x="770" y="60"/>
-                  <a:pt x="776" y="75"/>
-                </a:cubicBezTo>
-                <a:cubicBezTo>
-                  <a:pt x="782" y="90"/>
-                  <a:pt x="785" y="105"/>
-                  <a:pt x="785" y="121"/>
-                </a:cubicBezTo>
-                <a:cubicBezTo>
-                  <a:pt x="785" y="137"/>
-                  <a:pt x="782" y="152"/>
-                  <a:pt x="776" y="167"/>
-                </a:cubicBezTo>
-                <a:cubicBezTo>
-                  <a:pt x="770" y="182"/>
-                  <a:pt x="761" y="195"/>
-                  <a:pt x="750" y="206"/>
-                </a:cubicBezTo>
-                <a:cubicBezTo>
-                  <a:pt x="739" y="218"/>
-                  <a:pt x="726" y="226"/>
-                  <a:pt x="711" y="232"/>
-                </a:cubicBezTo>
-                <a:cubicBezTo>
-                  <a:pt x="696" y="239"/>
-                  <a:pt x="681" y="242"/>
-                  <a:pt x="665" y="242"/>
+                  <a:pt x="580" y="216"/>
+                  <a:pt x="566" y="213"/>
+                  <a:pt x="553" y="207"/>
+                </a:cubicBezTo>
+                <a:cubicBezTo>
+                  <a:pt x="540" y="202"/>
+                  <a:pt x="528" y="194"/>
+                  <a:pt x="518" y="184"/>
+                </a:cubicBezTo>
+                <a:cubicBezTo>
+                  <a:pt x="508" y="174"/>
+                  <a:pt x="500" y="162"/>
+                  <a:pt x="495" y="149"/>
+                </a:cubicBezTo>
+                <a:cubicBezTo>
+                  <a:pt x="489" y="136"/>
+                  <a:pt x="487" y="122"/>
+                  <a:pt x="487" y="108"/>
+                </a:cubicBezTo>
+                <a:cubicBezTo>
+                  <a:pt x="487" y="93"/>
+                  <a:pt x="489" y="80"/>
+                  <a:pt x="495" y="67"/>
+                </a:cubicBezTo>
+                <a:cubicBezTo>
+                  <a:pt x="500" y="53"/>
+                  <a:pt x="508" y="42"/>
+                  <a:pt x="518" y="31"/>
+                </a:cubicBezTo>
+                <a:cubicBezTo>
+                  <a:pt x="528" y="21"/>
+                  <a:pt x="540" y="14"/>
+                  <a:pt x="553" y="8"/>
+                </a:cubicBezTo>
+                <a:cubicBezTo>
+                  <a:pt x="566" y="3"/>
+                  <a:pt x="580" y="0"/>
+                  <a:pt x="594" y="0"/>
+                </a:cubicBezTo>
+                <a:cubicBezTo>
+                  <a:pt x="609" y="0"/>
+                  <a:pt x="622" y="3"/>
+                  <a:pt x="636" y="8"/>
+                </a:cubicBezTo>
+                <a:cubicBezTo>
+                  <a:pt x="649" y="14"/>
+                  <a:pt x="661" y="21"/>
+                  <a:pt x="671" y="31"/>
+                </a:cubicBezTo>
+                <a:cubicBezTo>
+                  <a:pt x="681" y="42"/>
+                  <a:pt x="689" y="53"/>
+                  <a:pt x="694" y="67"/>
+                </a:cubicBezTo>
+                <a:cubicBezTo>
+                  <a:pt x="700" y="80"/>
+                  <a:pt x="702" y="93"/>
+                  <a:pt x="702" y="108"/>
+                </a:cubicBezTo>
+                <a:cubicBezTo>
+                  <a:pt x="702" y="122"/>
+                  <a:pt x="700" y="136"/>
+                  <a:pt x="694" y="149"/>
+                </a:cubicBezTo>
+                <a:cubicBezTo>
+                  <a:pt x="689" y="162"/>
+                  <a:pt x="681" y="174"/>
+                  <a:pt x="671" y="184"/>
+                </a:cubicBezTo>
+                <a:cubicBezTo>
+                  <a:pt x="661" y="194"/>
+                  <a:pt x="649" y="202"/>
+                  <a:pt x="636" y="207"/>
+                </a:cubicBezTo>
+                <a:cubicBezTo>
+                  <a:pt x="622" y="213"/>
+                  <a:pt x="609" y="216"/>
+                  <a:pt x="594" y="216"/>
                 </a:cubicBezTo>
                 <a:moveTo>
-                  <a:pt x="665" y="61"/>
+                  <a:pt x="594" y="54"/>
                 </a:moveTo>
                 <a:cubicBezTo>
-                  <a:pt x="657" y="61"/>
-                  <a:pt x="649" y="62"/>
-                  <a:pt x="641" y="65"/>
-                </a:cubicBezTo>
-                <a:cubicBezTo>
-                  <a:pt x="633" y="68"/>
-                  <a:pt x="627" y="73"/>
-                  <a:pt x="621" y="78"/>
-                </a:cubicBezTo>
-                <a:cubicBezTo>
-                  <a:pt x="615" y="84"/>
-                  <a:pt x="611" y="91"/>
-                  <a:pt x="608" y="98"/>
-                </a:cubicBezTo>
-                <a:cubicBezTo>
-                  <a:pt x="605" y="105"/>
-                  <a:pt x="603" y="113"/>
-                  <a:pt x="603" y="121"/>
-                </a:cubicBezTo>
-                <a:cubicBezTo>
-                  <a:pt x="603" y="129"/>
-                  <a:pt x="605" y="137"/>
-                  <a:pt x="608" y="144"/>
-                </a:cubicBezTo>
-                <a:cubicBezTo>
-                  <a:pt x="611" y="152"/>
+                  <a:pt x="587" y="54"/>
+                  <a:pt x="580" y="55"/>
+                  <a:pt x="574" y="58"/>
+                </a:cubicBezTo>
+                <a:cubicBezTo>
+                  <a:pt x="567" y="61"/>
+                  <a:pt x="561" y="65"/>
+                  <a:pt x="556" y="70"/>
+                </a:cubicBezTo>
+                <a:cubicBezTo>
+                  <a:pt x="551" y="75"/>
+                  <a:pt x="547" y="81"/>
+                  <a:pt x="545" y="87"/>
+                </a:cubicBezTo>
+                <a:cubicBezTo>
+                  <a:pt x="542" y="94"/>
+                  <a:pt x="540" y="101"/>
+                  <a:pt x="540" y="108"/>
+                </a:cubicBezTo>
+                <a:cubicBezTo>
+                  <a:pt x="540" y="115"/>
+                  <a:pt x="542" y="122"/>
+                  <a:pt x="545" y="128"/>
+                </a:cubicBezTo>
+                <a:cubicBezTo>
+                  <a:pt x="547" y="135"/>
+                  <a:pt x="551" y="141"/>
+                  <a:pt x="556" y="146"/>
+                </a:cubicBezTo>
+                <a:cubicBezTo>
+                  <a:pt x="561" y="151"/>
+                  <a:pt x="567" y="155"/>
+                  <a:pt x="574" y="158"/>
+                </a:cubicBezTo>
+                <a:cubicBezTo>
+                  <a:pt x="580" y="160"/>
+                  <a:pt x="587" y="162"/>
+                  <a:pt x="594" y="162"/>
+                </a:cubicBezTo>
+                <a:cubicBezTo>
+                  <a:pt x="602" y="162"/>
+                  <a:pt x="608" y="160"/>
                   <a:pt x="615" y="158"/>
-                  <a:pt x="621" y="164"/>
-                </a:cubicBezTo>
-                <a:cubicBezTo>
-                  <a:pt x="627" y="169"/>
-                  <a:pt x="633" y="174"/>
-                  <a:pt x="641" y="177"/>
-                </a:cubicBezTo>
-                <a:cubicBezTo>
-                  <a:pt x="649" y="180"/>
-                  <a:pt x="657" y="181"/>
-                  <a:pt x="665" y="181"/>
-                </a:cubicBezTo>
-                <a:cubicBezTo>
-                  <a:pt x="673" y="181"/>
-                  <a:pt x="680" y="180"/>
-                  <a:pt x="688" y="177"/>
-                </a:cubicBezTo>
-                <a:cubicBezTo>
-                  <a:pt x="695" y="174"/>
-                  <a:pt x="702" y="169"/>
-                  <a:pt x="707" y="164"/>
-                </a:cubicBezTo>
-                <a:cubicBezTo>
-                  <a:pt x="713" y="158"/>
-                  <a:pt x="717" y="152"/>
-                  <a:pt x="720" y="144"/>
-                </a:cubicBezTo>
-                <a:cubicBezTo>
-                  <a:pt x="723" y="137"/>
-                  <a:pt x="725" y="129"/>
-                  <a:pt x="725" y="121"/>
-                </a:cubicBezTo>
-                <a:cubicBezTo>
-                  <a:pt x="725" y="113"/>
-                  <a:pt x="723" y="105"/>
-                  <a:pt x="720" y="98"/>
-                </a:cubicBezTo>
-                <a:cubicBezTo>
-                  <a:pt x="717" y="91"/>
-                  <a:pt x="713" y="84"/>
-                  <a:pt x="707" y="78"/>
-                </a:cubicBezTo>
-                <a:cubicBezTo>
-                  <a:pt x="702" y="73"/>
-                  <a:pt x="695" y="68"/>
-                  <a:pt x="688" y="65"/>
-                </a:cubicBezTo>
-                <a:cubicBezTo>
-                  <a:pt x="680" y="62"/>
-                  <a:pt x="673" y="61"/>
-                  <a:pt x="665" y="61"/>
+                </a:cubicBezTo>
+                <a:cubicBezTo>
+                  <a:pt x="622" y="155"/>
+                  <a:pt x="627" y="151"/>
+                  <a:pt x="633" y="146"/>
+                </a:cubicBezTo>
+                <a:cubicBezTo>
+                  <a:pt x="638" y="141"/>
+                  <a:pt x="642" y="135"/>
+                  <a:pt x="644" y="128"/>
+                </a:cubicBezTo>
+                <a:cubicBezTo>
+                  <a:pt x="647" y="122"/>
+                  <a:pt x="648" y="115"/>
+                  <a:pt x="648" y="108"/>
+                </a:cubicBezTo>
+                <a:cubicBezTo>
+                  <a:pt x="648" y="101"/>
+                  <a:pt x="647" y="94"/>
+                  <a:pt x="644" y="87"/>
+                </a:cubicBezTo>
+                <a:cubicBezTo>
+                  <a:pt x="642" y="81"/>
+                  <a:pt x="638" y="75"/>
+                  <a:pt x="633" y="70"/>
+                </a:cubicBezTo>
+                <a:cubicBezTo>
+                  <a:pt x="627" y="65"/>
+                  <a:pt x="622" y="61"/>
+                  <a:pt x="615" y="58"/>
+                </a:cubicBezTo>
+                <a:cubicBezTo>
+                  <a:pt x="608" y="55"/>
+                  <a:pt x="602" y="54"/>
+                  <a:pt x="594" y="54"/>
                 </a:cubicBezTo>
                 <a:moveTo>
-                  <a:pt x="725" y="876"/>
+                  <a:pt x="648" y="783"/>
                 </a:moveTo>
                 <a:lnTo>
-                  <a:pt x="603" y="876"/>
-                </a:lnTo>
-                <a:cubicBezTo>
-                  <a:pt x="595" y="876"/>
-                  <a:pt x="588" y="874"/>
-                  <a:pt x="580" y="871"/>
-                </a:cubicBezTo>
-                <a:cubicBezTo>
-                  <a:pt x="573" y="868"/>
-                  <a:pt x="566" y="864"/>
-                  <a:pt x="561" y="858"/>
-                </a:cubicBezTo>
-                <a:cubicBezTo>
-                  <a:pt x="555" y="853"/>
-                  <a:pt x="551" y="846"/>
-                  <a:pt x="548" y="839"/>
-                </a:cubicBezTo>
-                <a:cubicBezTo>
-                  <a:pt x="545" y="831"/>
-                  <a:pt x="543" y="824"/>
-                  <a:pt x="543" y="816"/>
-                </a:cubicBezTo>
-                <a:lnTo>
-                  <a:pt x="543" y="605"/>
-                </a:lnTo>
-                <a:lnTo>
-                  <a:pt x="603" y="605"/>
-                </a:lnTo>
-                <a:lnTo>
-                  <a:pt x="603" y="816"/>
-                </a:lnTo>
-                <a:lnTo>
-                  <a:pt x="725" y="816"/>
-                </a:lnTo>
-                <a:lnTo>
-                  <a:pt x="725" y="544"/>
-                </a:lnTo>
-                <a:lnTo>
-                  <a:pt x="785" y="544"/>
-                </a:lnTo>
-                <a:lnTo>
-                  <a:pt x="785" y="363"/>
-                </a:lnTo>
-                <a:cubicBezTo>
-                  <a:pt x="785" y="354"/>
-                  <a:pt x="782" y="347"/>
-                  <a:pt x="776" y="341"/>
-                </a:cubicBezTo>
-                <a:cubicBezTo>
-                  <a:pt x="771" y="335"/>
-                  <a:pt x="763" y="332"/>
-                  <a:pt x="755" y="332"/>
-                </a:cubicBezTo>
-                <a:lnTo>
-                  <a:pt x="561" y="332"/>
-                </a:lnTo>
-                <a:lnTo>
-                  <a:pt x="422" y="574"/>
-                </a:lnTo>
-                <a:lnTo>
-                  <a:pt x="284" y="332"/>
-                </a:lnTo>
-                <a:lnTo>
-                  <a:pt x="91" y="332"/>
-                </a:lnTo>
-                <a:cubicBezTo>
-                  <a:pt x="82" y="332"/>
-                  <a:pt x="75" y="335"/>
-                  <a:pt x="69" y="341"/>
-                </a:cubicBezTo>
-                <a:cubicBezTo>
-                  <a:pt x="64" y="347"/>
-                  <a:pt x="61" y="354"/>
-                  <a:pt x="61" y="363"/>
-                </a:cubicBezTo>
-                <a:lnTo>
-                  <a:pt x="61" y="544"/>
-                </a:lnTo>
-                <a:lnTo>
-                  <a:pt x="121" y="544"/>
-                </a:lnTo>
-                <a:lnTo>
-                  <a:pt x="121" y="816"/>
-                </a:lnTo>
-                <a:lnTo>
-                  <a:pt x="242" y="816"/>
-                </a:lnTo>
-                <a:lnTo>
-                  <a:pt x="242" y="605"/>
-                </a:lnTo>
-                <a:lnTo>
-                  <a:pt x="302" y="605"/>
-                </a:lnTo>
-                <a:lnTo>
-                  <a:pt x="302" y="816"/>
-                </a:lnTo>
-                <a:cubicBezTo>
-                  <a:pt x="302" y="824"/>
-                  <a:pt x="300" y="831"/>
-                  <a:pt x="297" y="839"/>
-                </a:cubicBezTo>
-                <a:cubicBezTo>
-                  <a:pt x="294" y="846"/>
-                  <a:pt x="290" y="853"/>
-                  <a:pt x="284" y="858"/>
-                </a:cubicBezTo>
-                <a:cubicBezTo>
-                  <a:pt x="279" y="864"/>
-                  <a:pt x="272" y="868"/>
-                  <a:pt x="265" y="871"/>
-                </a:cubicBezTo>
-                <a:cubicBezTo>
-                  <a:pt x="257" y="874"/>
-                  <a:pt x="250" y="876"/>
-                  <a:pt x="242" y="876"/>
-                </a:cubicBezTo>
-                <a:lnTo>
-                  <a:pt x="121" y="876"/>
-                </a:lnTo>
-                <a:cubicBezTo>
-                  <a:pt x="113" y="876"/>
-                  <a:pt x="105" y="874"/>
-                  <a:pt x="98" y="871"/>
-                </a:cubicBezTo>
-                <a:cubicBezTo>
-                  <a:pt x="90" y="868"/>
-                  <a:pt x="84" y="864"/>
-                  <a:pt x="78" y="858"/>
-                </a:cubicBezTo>
-                <a:cubicBezTo>
-                  <a:pt x="73" y="853"/>
-                  <a:pt x="68" y="846"/>
-                  <a:pt x="65" y="839"/>
-                </a:cubicBezTo>
-                <a:cubicBezTo>
-                  <a:pt x="62" y="831"/>
-                  <a:pt x="61" y="824"/>
-                  <a:pt x="61" y="816"/>
-                </a:cubicBezTo>
-                <a:lnTo>
-                  <a:pt x="61" y="605"/>
-                </a:lnTo>
-                <a:cubicBezTo>
-                  <a:pt x="53" y="605"/>
-                  <a:pt x="45" y="603"/>
-                  <a:pt x="38" y="600"/>
-                </a:cubicBezTo>
-                <a:cubicBezTo>
-                  <a:pt x="30" y="597"/>
-                  <a:pt x="24" y="592"/>
-                  <a:pt x="18" y="587"/>
-                </a:cubicBezTo>
-                <a:cubicBezTo>
-                  <a:pt x="12" y="581"/>
-                  <a:pt x="8" y="575"/>
-                  <a:pt x="5" y="567"/>
-                </a:cubicBezTo>
-                <a:cubicBezTo>
-                  <a:pt x="2" y="560"/>
-                  <a:pt x="0" y="552"/>
-                  <a:pt x="0" y="544"/>
-                </a:cubicBezTo>
-                <a:lnTo>
-                  <a:pt x="0" y="363"/>
-                </a:lnTo>
-                <a:cubicBezTo>
-                  <a:pt x="0" y="350"/>
-                  <a:pt x="3" y="339"/>
-                  <a:pt x="7" y="328"/>
-                </a:cubicBezTo>
-                <a:cubicBezTo>
-                  <a:pt x="12" y="317"/>
-                  <a:pt x="18" y="307"/>
-                  <a:pt x="27" y="298"/>
-                </a:cubicBezTo>
-                <a:cubicBezTo>
-                  <a:pt x="35" y="290"/>
-                  <a:pt x="45" y="283"/>
-                  <a:pt x="56" y="279"/>
-                </a:cubicBezTo>
-                <a:cubicBezTo>
-                  <a:pt x="67" y="274"/>
-                  <a:pt x="79" y="272"/>
-                  <a:pt x="91" y="272"/>
-                </a:cubicBezTo>
-                <a:lnTo>
-                  <a:pt x="319" y="272"/>
-                </a:lnTo>
-                <a:lnTo>
-                  <a:pt x="422" y="454"/>
-                </a:lnTo>
-                <a:lnTo>
-                  <a:pt x="526" y="272"/>
-                </a:lnTo>
-                <a:lnTo>
-                  <a:pt x="755" y="272"/>
-                </a:lnTo>
-                <a:cubicBezTo>
-                  <a:pt x="767" y="272"/>
-                  <a:pt x="779" y="274"/>
-                  <a:pt x="790" y="279"/>
-                </a:cubicBezTo>
-                <a:cubicBezTo>
-                  <a:pt x="801" y="283"/>
-                  <a:pt x="811" y="290"/>
-                  <a:pt x="819" y="298"/>
-                </a:cubicBezTo>
-                <a:cubicBezTo>
-                  <a:pt x="828" y="307"/>
-                  <a:pt x="834" y="317"/>
-                  <a:pt x="839" y="328"/>
-                </a:cubicBezTo>
-                <a:cubicBezTo>
-                  <a:pt x="843" y="339"/>
-                  <a:pt x="846" y="350"/>
-                  <a:pt x="846" y="363"/>
-                </a:cubicBezTo>
-                <a:lnTo>
-                  <a:pt x="846" y="544"/>
-                </a:lnTo>
-                <a:cubicBezTo>
-                  <a:pt x="846" y="552"/>
-                  <a:pt x="844" y="560"/>
-                  <a:pt x="841" y="567"/>
-                </a:cubicBezTo>
-                <a:cubicBezTo>
-                  <a:pt x="838" y="575"/>
-                  <a:pt x="834" y="581"/>
-                  <a:pt x="828" y="587"/>
-                </a:cubicBezTo>
-                <a:cubicBezTo>
-                  <a:pt x="822" y="592"/>
-                  <a:pt x="816" y="597"/>
-                  <a:pt x="808" y="600"/>
-                </a:cubicBezTo>
-                <a:cubicBezTo>
-                  <a:pt x="801" y="603"/>
-                  <a:pt x="793" y="605"/>
-                  <a:pt x="785" y="605"/>
-                </a:cubicBezTo>
-                <a:lnTo>
-                  <a:pt x="785" y="816"/>
-                </a:lnTo>
-                <a:cubicBezTo>
-                  <a:pt x="785" y="824"/>
-                  <a:pt x="784" y="831"/>
-                  <a:pt x="781" y="839"/>
-                </a:cubicBezTo>
-                <a:cubicBezTo>
-                  <a:pt x="778" y="846"/>
-                  <a:pt x="773" y="853"/>
-                  <a:pt x="768" y="858"/>
-                </a:cubicBezTo>
-                <a:cubicBezTo>
-                  <a:pt x="762" y="864"/>
-                  <a:pt x="755" y="868"/>
-                  <a:pt x="748" y="871"/>
-                </a:cubicBezTo>
-                <a:cubicBezTo>
-                  <a:pt x="741" y="874"/>
-                  <a:pt x="733" y="876"/>
-                  <a:pt x="725" y="876"/>
+                  <a:pt x="540" y="783"/>
+                </a:lnTo>
+                <a:cubicBezTo>
+                  <a:pt x="533" y="783"/>
+                  <a:pt x="526" y="782"/>
+                  <a:pt x="520" y="779"/>
+                </a:cubicBezTo>
+                <a:cubicBezTo>
+                  <a:pt x="513" y="776"/>
+                  <a:pt x="507" y="772"/>
+                  <a:pt x="502" y="767"/>
+                </a:cubicBezTo>
+                <a:cubicBezTo>
+                  <a:pt x="497" y="762"/>
+                  <a:pt x="493" y="756"/>
+                  <a:pt x="491" y="750"/>
+                </a:cubicBezTo>
+                <a:cubicBezTo>
+                  <a:pt x="488" y="743"/>
+                  <a:pt x="487" y="736"/>
+                  <a:pt x="487" y="729"/>
+                </a:cubicBezTo>
+                <a:lnTo>
+                  <a:pt x="487" y="540"/>
+                </a:lnTo>
+                <a:lnTo>
+                  <a:pt x="540" y="540"/>
+                </a:lnTo>
+                <a:lnTo>
+                  <a:pt x="540" y="729"/>
+                </a:lnTo>
+                <a:lnTo>
+                  <a:pt x="648" y="729"/>
+                </a:lnTo>
+                <a:lnTo>
+                  <a:pt x="648" y="486"/>
+                </a:lnTo>
+                <a:lnTo>
+                  <a:pt x="702" y="486"/>
+                </a:lnTo>
+                <a:lnTo>
+                  <a:pt x="702" y="324"/>
+                </a:lnTo>
+                <a:cubicBezTo>
+                  <a:pt x="702" y="316"/>
+                  <a:pt x="700" y="310"/>
+                  <a:pt x="694" y="305"/>
+                </a:cubicBezTo>
+                <a:cubicBezTo>
+                  <a:pt x="689" y="299"/>
+                  <a:pt x="683" y="297"/>
+                  <a:pt x="675" y="297"/>
+                </a:cubicBezTo>
+                <a:lnTo>
+                  <a:pt x="502" y="297"/>
+                </a:lnTo>
+                <a:lnTo>
+                  <a:pt x="379" y="513"/>
+                </a:lnTo>
+                <a:lnTo>
+                  <a:pt x="254" y="297"/>
+                </a:lnTo>
+                <a:lnTo>
+                  <a:pt x="81" y="297"/>
+                </a:lnTo>
+                <a:cubicBezTo>
+                  <a:pt x="73" y="297"/>
+                  <a:pt x="67" y="299"/>
+                  <a:pt x="62" y="305"/>
+                </a:cubicBezTo>
+                <a:cubicBezTo>
+                  <a:pt x="57" y="310"/>
+                  <a:pt x="54" y="316"/>
+                  <a:pt x="54" y="324"/>
+                </a:cubicBezTo>
+                <a:lnTo>
+                  <a:pt x="54" y="486"/>
+                </a:lnTo>
+                <a:lnTo>
+                  <a:pt x="108" y="486"/>
+                </a:lnTo>
+                <a:lnTo>
+                  <a:pt x="108" y="729"/>
+                </a:lnTo>
+                <a:lnTo>
+                  <a:pt x="216" y="729"/>
+                </a:lnTo>
+                <a:lnTo>
+                  <a:pt x="216" y="540"/>
+                </a:lnTo>
+                <a:lnTo>
+                  <a:pt x="270" y="540"/>
+                </a:lnTo>
+                <a:lnTo>
+                  <a:pt x="270" y="729"/>
+                </a:lnTo>
+                <a:cubicBezTo>
+                  <a:pt x="270" y="736"/>
+                  <a:pt x="268" y="743"/>
+                  <a:pt x="266" y="750"/>
+                </a:cubicBezTo>
+                <a:cubicBezTo>
+                  <a:pt x="263" y="756"/>
+                  <a:pt x="259" y="762"/>
+                  <a:pt x="254" y="767"/>
+                </a:cubicBezTo>
+                <a:cubicBezTo>
+                  <a:pt x="249" y="772"/>
+                  <a:pt x="243" y="776"/>
+                  <a:pt x="236" y="779"/>
+                </a:cubicBezTo>
+                <a:cubicBezTo>
+                  <a:pt x="230" y="782"/>
+                  <a:pt x="223" y="783"/>
+                  <a:pt x="216" y="783"/>
+                </a:cubicBezTo>
+                <a:lnTo>
+                  <a:pt x="108" y="783"/>
+                </a:lnTo>
+                <a:cubicBezTo>
+                  <a:pt x="101" y="783"/>
+                  <a:pt x="94" y="782"/>
+                  <a:pt x="87" y="779"/>
+                </a:cubicBezTo>
+                <a:cubicBezTo>
+                  <a:pt x="81" y="776"/>
+                  <a:pt x="75" y="772"/>
+                  <a:pt x="70" y="767"/>
+                </a:cubicBezTo>
+                <a:cubicBezTo>
+                  <a:pt x="65" y="762"/>
+                  <a:pt x="61" y="756"/>
+                  <a:pt x="58" y="750"/>
+                </a:cubicBezTo>
+                <a:cubicBezTo>
+                  <a:pt x="55" y="743"/>
+                  <a:pt x="54" y="736"/>
+                  <a:pt x="54" y="729"/>
+                </a:cubicBezTo>
+                <a:lnTo>
+                  <a:pt x="54" y="540"/>
+                </a:lnTo>
+                <a:cubicBezTo>
+                  <a:pt x="47" y="540"/>
+                  <a:pt x="40" y="539"/>
+                  <a:pt x="33" y="536"/>
+                </a:cubicBezTo>
+                <a:cubicBezTo>
+                  <a:pt x="27" y="534"/>
+                  <a:pt x="21" y="530"/>
+                  <a:pt x="16" y="525"/>
+                </a:cubicBezTo>
+                <a:cubicBezTo>
+                  <a:pt x="11" y="520"/>
+                  <a:pt x="7" y="514"/>
+                  <a:pt x="4" y="507"/>
+                </a:cubicBezTo>
+                <a:cubicBezTo>
+                  <a:pt x="1" y="500"/>
+                  <a:pt x="0" y="494"/>
+                  <a:pt x="0" y="486"/>
+                </a:cubicBezTo>
+                <a:lnTo>
+                  <a:pt x="0" y="324"/>
+                </a:lnTo>
+                <a:cubicBezTo>
+                  <a:pt x="0" y="313"/>
+                  <a:pt x="2" y="303"/>
+                  <a:pt x="6" y="293"/>
+                </a:cubicBezTo>
+                <a:cubicBezTo>
+                  <a:pt x="10" y="283"/>
+                  <a:pt x="16" y="274"/>
+                  <a:pt x="24" y="266"/>
+                </a:cubicBezTo>
+                <a:cubicBezTo>
+                  <a:pt x="31" y="259"/>
+                  <a:pt x="40" y="253"/>
+                  <a:pt x="50" y="249"/>
+                </a:cubicBezTo>
+                <a:cubicBezTo>
+                  <a:pt x="60" y="245"/>
+                  <a:pt x="70" y="243"/>
+                  <a:pt x="81" y="243"/>
+                </a:cubicBezTo>
+                <a:lnTo>
+                  <a:pt x="285" y="243"/>
+                </a:lnTo>
+                <a:lnTo>
+                  <a:pt x="379" y="406"/>
+                </a:lnTo>
+                <a:lnTo>
+                  <a:pt x="471" y="243"/>
+                </a:lnTo>
+                <a:lnTo>
+                  <a:pt x="675" y="243"/>
+                </a:lnTo>
+                <a:cubicBezTo>
+                  <a:pt x="686" y="243"/>
+                  <a:pt x="696" y="245"/>
+                  <a:pt x="706" y="249"/>
+                </a:cubicBezTo>
+                <a:cubicBezTo>
+                  <a:pt x="716" y="253"/>
+                  <a:pt x="725" y="259"/>
+                  <a:pt x="733" y="266"/>
+                </a:cubicBezTo>
+                <a:cubicBezTo>
+                  <a:pt x="740" y="274"/>
+                  <a:pt x="746" y="283"/>
+                  <a:pt x="750" y="293"/>
+                </a:cubicBezTo>
+                <a:cubicBezTo>
+                  <a:pt x="754" y="303"/>
+                  <a:pt x="756" y="313"/>
+                  <a:pt x="756" y="324"/>
+                </a:cubicBezTo>
+                <a:lnTo>
+                  <a:pt x="756" y="486"/>
+                </a:lnTo>
+                <a:cubicBezTo>
+                  <a:pt x="756" y="494"/>
+                  <a:pt x="755" y="500"/>
+                  <a:pt x="752" y="507"/>
+                </a:cubicBezTo>
+                <a:cubicBezTo>
+                  <a:pt x="749" y="514"/>
+                  <a:pt x="746" y="520"/>
+                  <a:pt x="740" y="525"/>
+                </a:cubicBezTo>
+                <a:cubicBezTo>
+                  <a:pt x="735" y="530"/>
+                  <a:pt x="730" y="534"/>
+                  <a:pt x="723" y="536"/>
+                </a:cubicBezTo>
+                <a:cubicBezTo>
+                  <a:pt x="716" y="539"/>
+                  <a:pt x="709" y="540"/>
+                  <a:pt x="702" y="540"/>
+                </a:cubicBezTo>
+                <a:lnTo>
+                  <a:pt x="702" y="729"/>
+                </a:lnTo>
+                <a:cubicBezTo>
+                  <a:pt x="702" y="736"/>
+                  <a:pt x="701" y="743"/>
+                  <a:pt x="698" y="750"/>
+                </a:cubicBezTo>
+                <a:cubicBezTo>
+                  <a:pt x="695" y="756"/>
+                  <a:pt x="692" y="762"/>
+                  <a:pt x="687" y="767"/>
+                </a:cubicBezTo>
+                <a:cubicBezTo>
+                  <a:pt x="681" y="772"/>
+                  <a:pt x="676" y="776"/>
+                  <a:pt x="669" y="779"/>
+                </a:cubicBezTo>
+                <a:cubicBezTo>
+                  <a:pt x="662" y="782"/>
+                  <a:pt x="656" y="783"/>
+                  <a:pt x="648" y="783"/>
                 </a:cubicBezTo>
                 <a:close/>
               </a:path>
@@ -5599,13 +5376,13 @@
       </p:sp>
       <p:sp>
         <p:nvSpPr>
-          <p:cNvPr id="72" name=""/>
+          <p:cNvPr id="71" name=""/>
           <p:cNvSpPr txBox="1"/>
           <p:nvPr/>
         </p:nvSpPr>
         <p:spPr>
           <a:xfrm>
-            <a:off x="3115800" y="2540520"/>
+            <a:off x="3115800" y="2350080"/>
             <a:ext cx="228240" cy="265680"/>
           </a:xfrm>
           <a:prstGeom prst="rect">
@@ -5642,14 +5419,14 @@
       </p:sp>
       <p:sp>
         <p:nvSpPr>
-          <p:cNvPr id="73" name=""/>
+          <p:cNvPr id="72" name=""/>
           <p:cNvSpPr txBox="1"/>
           <p:nvPr/>
         </p:nvSpPr>
         <p:spPr>
           <a:xfrm>
-            <a:off x="3909960" y="2618640"/>
-            <a:ext cx="1771560" cy="157320"/>
+            <a:off x="3705120" y="2326320"/>
+            <a:ext cx="2282040" cy="153000"/>
           </a:xfrm>
           <a:prstGeom prst="rect">
             <a:avLst/>
@@ -5665,34 +5442,34 @@
           </a:bodyPr>
           <a:p>
             <a:r>
-              <a:rPr b="1" lang="en-US" sz="1050" spc="-1" strike="noStrike">
+              <a:rPr b="1" lang="en-US" sz="1030" spc="-1" strike="noStrike">
                 <a:solidFill>
                   <a:srgbClr val="3d68ec"/>
                 </a:solidFill>
                 <a:latin typeface="Arial"/>
                 <a:ea typeface="Arial"/>
               </a:rPr>
-              <a:t>Beschreven vertaalslag</a:t>
+              <a:t>Vertalen langs een vaste route</a:t>
             </a:r>
-            <a:endParaRPr b="0" lang="en-US" sz="1050" spc="-1" strike="noStrike">
-              <a:solidFill>
-                <a:srgbClr val="000000"/>
-              </a:solidFill>
-              <a:latin typeface="DejaVu Serif"/>
-            </a:endParaRPr>
-          </a:p>
-        </p:txBody>
-      </p:sp>
-      <p:sp>
-        <p:nvSpPr>
-          <p:cNvPr id="74" name=""/>
+            <a:endParaRPr b="0" lang="en-US" sz="1030" spc="-1" strike="noStrike">
+              <a:solidFill>
+                <a:srgbClr val="000000"/>
+              </a:solidFill>
+              <a:latin typeface="DejaVu Serif"/>
+            </a:endParaRPr>
+          </a:p>
+        </p:txBody>
+      </p:sp>
+      <p:sp>
+        <p:nvSpPr>
+          <p:cNvPr id="73" name=""/>
           <p:cNvSpPr txBox="1"/>
           <p:nvPr/>
         </p:nvSpPr>
         <p:spPr>
           <a:xfrm>
-            <a:off x="3719520" y="2850840"/>
-            <a:ext cx="2109960" cy="128520"/>
+            <a:off x="3900600" y="2555640"/>
+            <a:ext cx="1710720" cy="128520"/>
           </a:xfrm>
           <a:prstGeom prst="rect">
             <a:avLst/>
@@ -5715,7 +5492,7 @@
                 <a:latin typeface="Arial"/>
                 <a:ea typeface="Arial"/>
               </a:rPr>
-              <a:t>scenario, begrippen, informatiemodel,</a:t>
+              <a:t>begrippen, informatiemodel en</a:t>
             </a:r>
             <a:endParaRPr b="0" lang="en-US" sz="860" spc="-1" strike="noStrike">
               <a:solidFill>
@@ -5728,14 +5505,14 @@
       </p:sp>
       <p:sp>
         <p:nvSpPr>
-          <p:cNvPr id="75" name=""/>
+          <p:cNvPr id="74" name=""/>
           <p:cNvSpPr txBox="1"/>
           <p:nvPr/>
         </p:nvSpPr>
         <p:spPr>
           <a:xfrm>
-            <a:off x="4200480" y="3012840"/>
-            <a:ext cx="1023480" cy="128520"/>
+            <a:off x="3591000" y="2717640"/>
+            <a:ext cx="2404080" cy="128520"/>
           </a:xfrm>
           <a:prstGeom prst="rect">
             <a:avLst/>
@@ -5758,7 +5535,7 @@
                 <a:latin typeface="Arial"/>
                 <a:ea typeface="Arial"/>
               </a:rPr>
-              <a:t>informatiestromen</a:t>
+              <a:t>informatiestromen liggen voor, afstemming</a:t>
             </a:r>
             <a:endParaRPr b="0" lang="en-US" sz="860" spc="-1" strike="noStrike">
               <a:solidFill>
@@ -5771,14 +5548,57 @@
       </p:sp>
       <p:sp>
         <p:nvSpPr>
+          <p:cNvPr id="75" name=""/>
+          <p:cNvSpPr txBox="1"/>
+          <p:nvPr/>
+        </p:nvSpPr>
+        <p:spPr>
+          <a:xfrm>
+            <a:off x="4533840" y="2879640"/>
+            <a:ext cx="277920" cy="128520"/>
+          </a:xfrm>
+          <a:prstGeom prst="rect">
+            <a:avLst/>
+          </a:prstGeom>
+          <a:noFill/>
+          <a:ln w="0">
+            <a:noFill/>
+          </a:ln>
+        </p:spPr>
+        <p:txBody>
+          <a:bodyPr lIns="0" rIns="0" tIns="0" bIns="0" anchor="t">
+            <a:noAutofit/>
+          </a:bodyPr>
+          <a:p>
+            <a:r>
+              <a:rPr b="0" lang="en-US" sz="860" spc="-1" strike="noStrike">
+                <a:solidFill>
+                  <a:srgbClr val="6b7280"/>
+                </a:solidFill>
+                <a:latin typeface="Arial"/>
+                <a:ea typeface="Arial"/>
+              </a:rPr>
+              <a:t>loopt</a:t>
+            </a:r>
+            <a:endParaRPr b="0" lang="en-US" sz="860" spc="-1" strike="noStrike">
+              <a:solidFill>
+                <a:srgbClr val="000000"/>
+              </a:solidFill>
+              <a:latin typeface="DejaVu Serif"/>
+            </a:endParaRPr>
+          </a:p>
+        </p:txBody>
+      </p:sp>
+      <p:sp>
+        <p:nvSpPr>
           <p:cNvPr id="76" name=""/>
           <p:cNvSpPr/>
           <p:nvPr/>
         </p:nvSpPr>
         <p:spPr>
           <a:xfrm>
-            <a:off x="6281640" y="2057040"/>
-            <a:ext cx="2590920" cy="1243440"/>
+            <a:off x="6281640" y="1885680"/>
+            <a:ext cx="2590920" cy="1195920"/>
           </a:xfrm>
           <a:custGeom>
             <a:avLst/>
@@ -5786,16 +5606,16 @@
             <a:ahLst/>
             <a:rect l="0" t="0" r="r" b="b"/>
             <a:pathLst>
-              <a:path w="7197" h="3454">
+              <a:path w="7197" h="3322">
                 <a:moveTo>
-                  <a:pt x="0" y="3150"/>
+                  <a:pt x="0" y="3016"/>
                 </a:moveTo>
                 <a:lnTo>
                   <a:pt x="0" y="265"/>
                 </a:lnTo>
                 <a:cubicBezTo>
-                  <a:pt x="0" y="248"/>
-                  <a:pt x="2" y="231"/>
+                  <a:pt x="0" y="247"/>
+                  <a:pt x="2" y="230"/>
                   <a:pt x="6" y="213"/>
                 </a:cubicBezTo>
                 <a:cubicBezTo>
@@ -5805,28 +5625,28 @@
                 </a:cubicBezTo>
                 <a:cubicBezTo>
                   <a:pt x="31" y="148"/>
-                  <a:pt x="40" y="133"/>
+                  <a:pt x="40" y="132"/>
                   <a:pt x="51" y="118"/>
                 </a:cubicBezTo>
                 <a:cubicBezTo>
-                  <a:pt x="62" y="104"/>
+                  <a:pt x="62" y="103"/>
                   <a:pt x="75" y="90"/>
                   <a:pt x="89" y="78"/>
                 </a:cubicBezTo>
                 <a:cubicBezTo>
-                  <a:pt x="103" y="66"/>
-                  <a:pt x="118" y="55"/>
+                  <a:pt x="103" y="65"/>
+                  <a:pt x="118" y="54"/>
                   <a:pt x="135" y="45"/>
                 </a:cubicBezTo>
                 <a:cubicBezTo>
                   <a:pt x="152" y="35"/>
                   <a:pt x="169" y="27"/>
-                  <a:pt x="188" y="21"/>
+                  <a:pt x="188" y="20"/>
                 </a:cubicBezTo>
                 <a:cubicBezTo>
                   <a:pt x="206" y="14"/>
                   <a:pt x="225" y="9"/>
-                  <a:pt x="245" y="6"/>
+                  <a:pt x="245" y="5"/>
                 </a:cubicBezTo>
                 <a:cubicBezTo>
                   <a:pt x="264" y="2"/>
@@ -5839,12 +5659,12 @@
                 <a:cubicBezTo>
                   <a:pt x="6913" y="0"/>
                   <a:pt x="6933" y="2"/>
-                  <a:pt x="6953" y="6"/>
+                  <a:pt x="6953" y="5"/>
                 </a:cubicBezTo>
                 <a:cubicBezTo>
                   <a:pt x="6972" y="9"/>
                   <a:pt x="6991" y="14"/>
-                  <a:pt x="7010" y="21"/>
+                  <a:pt x="7010" y="20"/>
                 </a:cubicBezTo>
                 <a:cubicBezTo>
                   <a:pt x="7028" y="27"/>
@@ -5852,17 +5672,17 @@
                   <a:pt x="7062" y="45"/>
                 </a:cubicBezTo>
                 <a:cubicBezTo>
-                  <a:pt x="7079" y="55"/>
-                  <a:pt x="7094" y="66"/>
+                  <a:pt x="7079" y="54"/>
+                  <a:pt x="7094" y="65"/>
                   <a:pt x="7108" y="78"/>
                 </a:cubicBezTo>
                 <a:cubicBezTo>
                   <a:pt x="7122" y="90"/>
-                  <a:pt x="7135" y="104"/>
+                  <a:pt x="7135" y="103"/>
                   <a:pt x="7146" y="118"/>
                 </a:cubicBezTo>
                 <a:cubicBezTo>
-                  <a:pt x="7157" y="133"/>
+                  <a:pt x="7157" y="132"/>
                   <a:pt x="7167" y="148"/>
                   <a:pt x="7174" y="164"/>
                 </a:cubicBezTo>
@@ -5872,95 +5692,95 @@
                   <a:pt x="7192" y="213"/>
                 </a:cubicBezTo>
                 <a:cubicBezTo>
-                  <a:pt x="7195" y="231"/>
-                  <a:pt x="7197" y="248"/>
+                  <a:pt x="7195" y="230"/>
+                  <a:pt x="7197" y="247"/>
                   <a:pt x="7197" y="265"/>
                 </a:cubicBezTo>
                 <a:lnTo>
-                  <a:pt x="7197" y="3150"/>
-                </a:lnTo>
-                <a:cubicBezTo>
-                  <a:pt x="7197" y="3170"/>
-                  <a:pt x="7195" y="3190"/>
-                  <a:pt x="7192" y="3209"/>
-                </a:cubicBezTo>
-                <a:cubicBezTo>
-                  <a:pt x="7188" y="3229"/>
-                  <a:pt x="7182" y="3248"/>
-                  <a:pt x="7174" y="3266"/>
-                </a:cubicBezTo>
-                <a:cubicBezTo>
-                  <a:pt x="7167" y="3285"/>
-                  <a:pt x="7157" y="3302"/>
-                  <a:pt x="7146" y="3319"/>
-                </a:cubicBezTo>
-                <a:cubicBezTo>
-                  <a:pt x="7135" y="3336"/>
-                  <a:pt x="7122" y="3351"/>
-                  <a:pt x="7108" y="3365"/>
-                </a:cubicBezTo>
-                <a:cubicBezTo>
-                  <a:pt x="7094" y="3379"/>
-                  <a:pt x="7079" y="3392"/>
-                  <a:pt x="7062" y="3403"/>
-                </a:cubicBezTo>
-                <a:cubicBezTo>
-                  <a:pt x="7046" y="3414"/>
-                  <a:pt x="7028" y="3424"/>
-                  <a:pt x="7010" y="3431"/>
-                </a:cubicBezTo>
-                <a:cubicBezTo>
-                  <a:pt x="6991" y="3439"/>
-                  <a:pt x="6972" y="3445"/>
-                  <a:pt x="6953" y="3448"/>
-                </a:cubicBezTo>
-                <a:cubicBezTo>
-                  <a:pt x="6933" y="3452"/>
-                  <a:pt x="6913" y="3454"/>
-                  <a:pt x="6893" y="3454"/>
-                </a:cubicBezTo>
-                <a:lnTo>
-                  <a:pt x="304" y="3454"/>
-                </a:lnTo>
-                <a:cubicBezTo>
-                  <a:pt x="284" y="3454"/>
-                  <a:pt x="264" y="3452"/>
-                  <a:pt x="245" y="3448"/>
-                </a:cubicBezTo>
-                <a:cubicBezTo>
-                  <a:pt x="225" y="3445"/>
-                  <a:pt x="206" y="3439"/>
-                  <a:pt x="188" y="3431"/>
-                </a:cubicBezTo>
-                <a:cubicBezTo>
-                  <a:pt x="169" y="3424"/>
-                  <a:pt x="152" y="3414"/>
-                  <a:pt x="135" y="3403"/>
-                </a:cubicBezTo>
-                <a:cubicBezTo>
-                  <a:pt x="118" y="3392"/>
-                  <a:pt x="103" y="3379"/>
-                  <a:pt x="89" y="3365"/>
-                </a:cubicBezTo>
-                <a:cubicBezTo>
-                  <a:pt x="75" y="3351"/>
-                  <a:pt x="62" y="3336"/>
-                  <a:pt x="51" y="3319"/>
-                </a:cubicBezTo>
-                <a:cubicBezTo>
-                  <a:pt x="40" y="3302"/>
-                  <a:pt x="31" y="3285"/>
-                  <a:pt x="23" y="3266"/>
-                </a:cubicBezTo>
-                <a:cubicBezTo>
-                  <a:pt x="15" y="3248"/>
-                  <a:pt x="10" y="3229"/>
-                  <a:pt x="6" y="3209"/>
-                </a:cubicBezTo>
-                <a:cubicBezTo>
-                  <a:pt x="2" y="3190"/>
-                  <a:pt x="0" y="3170"/>
-                  <a:pt x="0" y="3150"/>
+                  <a:pt x="7197" y="3016"/>
+                </a:lnTo>
+                <a:cubicBezTo>
+                  <a:pt x="7197" y="3036"/>
+                  <a:pt x="7195" y="3056"/>
+                  <a:pt x="7192" y="3077"/>
+                </a:cubicBezTo>
+                <a:cubicBezTo>
+                  <a:pt x="7188" y="3096"/>
+                  <a:pt x="7182" y="3115"/>
+                  <a:pt x="7174" y="3134"/>
+                </a:cubicBezTo>
+                <a:cubicBezTo>
+                  <a:pt x="7167" y="3152"/>
+                  <a:pt x="7157" y="3170"/>
+                  <a:pt x="7146" y="3187"/>
+                </a:cubicBezTo>
+                <a:cubicBezTo>
+                  <a:pt x="7135" y="3203"/>
+                  <a:pt x="7122" y="3219"/>
+                  <a:pt x="7108" y="3233"/>
+                </a:cubicBezTo>
+                <a:cubicBezTo>
+                  <a:pt x="7094" y="3247"/>
+                  <a:pt x="7079" y="3259"/>
+                  <a:pt x="7062" y="3270"/>
+                </a:cubicBezTo>
+                <a:cubicBezTo>
+                  <a:pt x="7046" y="3282"/>
+                  <a:pt x="7028" y="3291"/>
+                  <a:pt x="7010" y="3299"/>
+                </a:cubicBezTo>
+                <a:cubicBezTo>
+                  <a:pt x="6991" y="3306"/>
+                  <a:pt x="6972" y="3312"/>
+                  <a:pt x="6953" y="3316"/>
+                </a:cubicBezTo>
+                <a:cubicBezTo>
+                  <a:pt x="6933" y="3320"/>
+                  <a:pt x="6913" y="3322"/>
+                  <a:pt x="6893" y="3322"/>
+                </a:cubicBezTo>
+                <a:lnTo>
+                  <a:pt x="304" y="3322"/>
+                </a:lnTo>
+                <a:cubicBezTo>
+                  <a:pt x="284" y="3322"/>
+                  <a:pt x="264" y="3320"/>
+                  <a:pt x="245" y="3316"/>
+                </a:cubicBezTo>
+                <a:cubicBezTo>
+                  <a:pt x="225" y="3312"/>
+                  <a:pt x="206" y="3306"/>
+                  <a:pt x="188" y="3299"/>
+                </a:cubicBezTo>
+                <a:cubicBezTo>
+                  <a:pt x="169" y="3291"/>
+                  <a:pt x="152" y="3282"/>
+                  <a:pt x="135" y="3270"/>
+                </a:cubicBezTo>
+                <a:cubicBezTo>
+                  <a:pt x="118" y="3259"/>
+                  <a:pt x="103" y="3247"/>
+                  <a:pt x="89" y="3233"/>
+                </a:cubicBezTo>
+                <a:cubicBezTo>
+                  <a:pt x="75" y="3219"/>
+                  <a:pt x="62" y="3203"/>
+                  <a:pt x="51" y="3187"/>
+                </a:cubicBezTo>
+                <a:cubicBezTo>
+                  <a:pt x="40" y="3170"/>
+                  <a:pt x="31" y="3152"/>
+                  <a:pt x="23" y="3134"/>
+                </a:cubicBezTo>
+                <a:cubicBezTo>
+                  <a:pt x="15" y="3115"/>
+                  <a:pt x="10" y="3096"/>
+                  <a:pt x="6" y="3077"/>
+                </a:cubicBezTo>
+                <a:cubicBezTo>
+                  <a:pt x="2" y="3056"/>
+                  <a:pt x="0" y="3036"/>
+                  <a:pt x="0" y="3016"/>
                 </a:cubicBezTo>
                 <a:close/>
               </a:path>
@@ -5995,8 +5815,8 @@
         </p:nvSpPr>
         <p:spPr>
           <a:xfrm>
-            <a:off x="6276960" y="2038320"/>
-            <a:ext cx="2600640" cy="1267200"/>
+            <a:off x="6276960" y="1866600"/>
+            <a:ext cx="2600640" cy="1219680"/>
           </a:xfrm>
           <a:custGeom>
             <a:avLst/>
@@ -6004,7 +5824,7 @@
             <a:ahLst/>
             <a:rect l="0" t="0" r="r" b="b"/>
             <a:pathLst>
-              <a:path w="7224" h="3520">
+              <a:path w="7224" h="3388">
                 <a:moveTo>
                   <a:pt x="0" y="0"/>
                 </a:moveTo>
@@ -6012,10 +5832,10 @@
                   <a:pt x="7224" y="0"/>
                 </a:lnTo>
                 <a:lnTo>
-                  <a:pt x="7224" y="3520"/>
-                </a:lnTo>
-                <a:lnTo>
-                  <a:pt x="0" y="3520"/>
+                  <a:pt x="7224" y="3388"/>
+                </a:lnTo>
+                <a:lnTo>
+                  <a:pt x="0" y="3388"/>
                 </a:lnTo>
                 <a:lnTo>
                   <a:pt x="0" y="0"/>
@@ -6053,8 +5873,8 @@
         </p:nvSpPr>
         <p:spPr>
           <a:xfrm>
-            <a:off x="6276960" y="2038320"/>
-            <a:ext cx="2600640" cy="1267200"/>
+            <a:off x="6276960" y="1866600"/>
+            <a:ext cx="2600640" cy="1219680"/>
           </a:xfrm>
           <a:custGeom>
             <a:avLst/>
@@ -6062,7 +5882,7 @@
             <a:ahLst/>
             <a:rect l="0" t="0" r="r" b="b"/>
             <a:pathLst>
-              <a:path w="7224" h="3520">
+              <a:path w="7224" h="3388">
                 <a:moveTo>
                   <a:pt x="0" y="0"/>
                 </a:moveTo>
@@ -6070,10 +5890,10 @@
                   <a:pt x="7224" y="0"/>
                 </a:lnTo>
                 <a:lnTo>
-                  <a:pt x="7224" y="3520"/>
-                </a:lnTo>
-                <a:lnTo>
-                  <a:pt x="0" y="3520"/>
+                  <a:pt x="7224" y="3388"/>
+                </a:lnTo>
+                <a:lnTo>
+                  <a:pt x="0" y="3388"/>
                 </a:lnTo>
                 <a:lnTo>
                   <a:pt x="0" y="0"/>
@@ -6111,8 +5931,8 @@
         </p:nvSpPr>
         <p:spPr>
           <a:xfrm>
-            <a:off x="6276960" y="2038320"/>
-            <a:ext cx="2600640" cy="1267200"/>
+            <a:off x="6276960" y="1866600"/>
+            <a:ext cx="2600640" cy="1219680"/>
           </a:xfrm>
           <a:custGeom>
             <a:avLst/>
@@ -6120,7 +5940,7 @@
             <a:ahLst/>
             <a:rect l="0" t="0" r="r" b="b"/>
             <a:pathLst>
-              <a:path w="7224" h="3520">
+              <a:path w="7224" h="3388">
                 <a:moveTo>
                   <a:pt x="0" y="0"/>
                 </a:moveTo>
@@ -6128,10 +5948,10 @@
                   <a:pt x="7224" y="0"/>
                 </a:lnTo>
                 <a:lnTo>
-                  <a:pt x="7224" y="3520"/>
-                </a:lnTo>
-                <a:lnTo>
-                  <a:pt x="0" y="3520"/>
+                  <a:pt x="7224" y="3388"/>
+                </a:lnTo>
+                <a:lnTo>
+                  <a:pt x="0" y="3388"/>
                 </a:lnTo>
                 <a:lnTo>
                   <a:pt x="0" y="0"/>
@@ -6169,8 +5989,8 @@
         </p:nvSpPr>
         <p:spPr>
           <a:xfrm>
-            <a:off x="6276960" y="2038320"/>
-            <a:ext cx="2600640" cy="1267200"/>
+            <a:off x="6276960" y="1866600"/>
+            <a:ext cx="2600640" cy="1219680"/>
           </a:xfrm>
           <a:custGeom>
             <a:avLst/>
@@ -6178,7 +5998,7 @@
             <a:ahLst/>
             <a:rect l="0" t="0" r="r" b="b"/>
             <a:pathLst>
-              <a:path w="7224" h="3520">
+              <a:path w="7224" h="3388">
                 <a:moveTo>
                   <a:pt x="0" y="0"/>
                 </a:moveTo>
@@ -6186,10 +6006,10 @@
                   <a:pt x="7224" y="0"/>
                 </a:lnTo>
                 <a:lnTo>
-                  <a:pt x="7224" y="3520"/>
-                </a:lnTo>
-                <a:lnTo>
-                  <a:pt x="0" y="3520"/>
+                  <a:pt x="7224" y="3388"/>
+                </a:lnTo>
+                <a:lnTo>
+                  <a:pt x="0" y="3388"/>
                 </a:lnTo>
                 <a:lnTo>
                   <a:pt x="0" y="0"/>
@@ -6227,8 +6047,8 @@
         </p:nvSpPr>
         <p:spPr>
           <a:xfrm>
-            <a:off x="6522840" y="2241000"/>
-            <a:ext cx="217440" cy="304200"/>
+            <a:off x="6516000" y="2067120"/>
+            <a:ext cx="194760" cy="272160"/>
           </a:xfrm>
           <a:custGeom>
             <a:avLst/>
@@ -6236,87 +6056,87 @@
             <a:ahLst/>
             <a:rect l="0" t="0" r="r" b="b"/>
             <a:pathLst>
-              <a:path w="604" h="845">
+              <a:path w="541" h="756">
                 <a:moveTo>
-                  <a:pt x="595" y="221"/>
+                  <a:pt x="533" y="197"/>
                 </a:moveTo>
                 <a:lnTo>
-                  <a:pt x="384" y="9"/>
-                </a:lnTo>
-                <a:cubicBezTo>
-                  <a:pt x="378" y="3"/>
-                  <a:pt x="372" y="0"/>
-                  <a:pt x="363" y="0"/>
-                </a:cubicBezTo>
-                <a:lnTo>
-                  <a:pt x="60" y="0"/>
-                </a:lnTo>
-                <a:cubicBezTo>
-                  <a:pt x="27" y="0"/>
-                  <a:pt x="0" y="27"/>
-                  <a:pt x="0" y="60"/>
-                </a:cubicBezTo>
-                <a:lnTo>
-                  <a:pt x="0" y="785"/>
-                </a:lnTo>
-                <a:cubicBezTo>
-                  <a:pt x="0" y="818"/>
-                  <a:pt x="27" y="845"/>
-                  <a:pt x="60" y="845"/>
-                </a:cubicBezTo>
-                <a:lnTo>
-                  <a:pt x="544" y="845"/>
-                </a:lnTo>
-                <a:cubicBezTo>
-                  <a:pt x="577" y="845"/>
-                  <a:pt x="604" y="818"/>
-                  <a:pt x="604" y="785"/>
-                </a:cubicBezTo>
-                <a:lnTo>
-                  <a:pt x="604" y="242"/>
-                </a:lnTo>
-                <a:cubicBezTo>
-                  <a:pt x="604" y="233"/>
-                  <a:pt x="601" y="227"/>
-                  <a:pt x="595" y="221"/>
+                  <a:pt x="343" y="8"/>
+                </a:lnTo>
+                <a:cubicBezTo>
+                  <a:pt x="337" y="3"/>
+                  <a:pt x="332" y="0"/>
+                  <a:pt x="324" y="0"/>
+                </a:cubicBezTo>
+                <a:lnTo>
+                  <a:pt x="54" y="0"/>
+                </a:lnTo>
+                <a:cubicBezTo>
+                  <a:pt x="24" y="0"/>
+                  <a:pt x="0" y="24"/>
+                  <a:pt x="0" y="54"/>
+                </a:cubicBezTo>
+                <a:lnTo>
+                  <a:pt x="0" y="702"/>
+                </a:lnTo>
+                <a:cubicBezTo>
+                  <a:pt x="0" y="732"/>
+                  <a:pt x="24" y="756"/>
+                  <a:pt x="54" y="756"/>
+                </a:cubicBezTo>
+                <a:lnTo>
+                  <a:pt x="486" y="756"/>
+                </a:lnTo>
+                <a:cubicBezTo>
+                  <a:pt x="516" y="756"/>
+                  <a:pt x="541" y="732"/>
+                  <a:pt x="541" y="702"/>
+                </a:cubicBezTo>
+                <a:lnTo>
+                  <a:pt x="541" y="216"/>
+                </a:lnTo>
+                <a:cubicBezTo>
+                  <a:pt x="541" y="208"/>
+                  <a:pt x="538" y="202"/>
+                  <a:pt x="533" y="197"/>
                 </a:cubicBezTo>
                 <a:moveTo>
-                  <a:pt x="363" y="72"/>
+                  <a:pt x="324" y="65"/>
                 </a:moveTo>
                 <a:lnTo>
-                  <a:pt x="532" y="242"/>
-                </a:lnTo>
-                <a:lnTo>
-                  <a:pt x="363" y="242"/>
-                </a:lnTo>
-                <a:lnTo>
-                  <a:pt x="363" y="72"/>
+                  <a:pt x="475" y="216"/>
+                </a:lnTo>
+                <a:lnTo>
+                  <a:pt x="324" y="216"/>
+                </a:lnTo>
+                <a:lnTo>
+                  <a:pt x="324" y="65"/>
                 </a:lnTo>
                 <a:moveTo>
-                  <a:pt x="544" y="785"/>
+                  <a:pt x="486" y="702"/>
                 </a:moveTo>
                 <a:lnTo>
-                  <a:pt x="60" y="785"/>
-                </a:lnTo>
-                <a:lnTo>
-                  <a:pt x="60" y="60"/>
-                </a:lnTo>
-                <a:lnTo>
-                  <a:pt x="303" y="60"/>
-                </a:lnTo>
-                <a:lnTo>
-                  <a:pt x="303" y="242"/>
-                </a:lnTo>
-                <a:cubicBezTo>
-                  <a:pt x="303" y="275"/>
-                  <a:pt x="330" y="302"/>
-                  <a:pt x="363" y="302"/>
-                </a:cubicBezTo>
-                <a:lnTo>
-                  <a:pt x="544" y="302"/>
-                </a:lnTo>
-                <a:lnTo>
-                  <a:pt x="544" y="785"/>
+                  <a:pt x="54" y="702"/>
+                </a:lnTo>
+                <a:lnTo>
+                  <a:pt x="54" y="54"/>
+                </a:lnTo>
+                <a:lnTo>
+                  <a:pt x="270" y="54"/>
+                </a:lnTo>
+                <a:lnTo>
+                  <a:pt x="270" y="216"/>
+                </a:lnTo>
+                <a:cubicBezTo>
+                  <a:pt x="270" y="245"/>
+                  <a:pt x="294" y="270"/>
+                  <a:pt x="324" y="270"/>
+                </a:cubicBezTo>
+                <a:lnTo>
+                  <a:pt x="486" y="270"/>
+                </a:lnTo>
+                <a:lnTo>
+                  <a:pt x="486" y="702"/>
                 </a:lnTo>
                 <a:close/>
               </a:path>
@@ -6351,8 +6171,8 @@
         </p:nvSpPr>
         <p:spPr>
           <a:xfrm>
-            <a:off x="6566400" y="2392920"/>
-            <a:ext cx="130680" cy="87120"/>
+            <a:off x="6554880" y="2203200"/>
+            <a:ext cx="117000" cy="77760"/>
           </a:xfrm>
           <a:custGeom>
             <a:avLst/>
@@ -6360,33 +6180,33 @@
             <a:ahLst/>
             <a:rect l="0" t="0" r="r" b="b"/>
             <a:pathLst>
-              <a:path w="363" h="242">
+              <a:path w="325" h="216">
                 <a:moveTo>
-                  <a:pt x="0" y="181"/>
+                  <a:pt x="0" y="162"/>
                 </a:moveTo>
                 <a:lnTo>
-                  <a:pt x="363" y="181"/>
-                </a:lnTo>
-                <a:lnTo>
-                  <a:pt x="363" y="242"/>
-                </a:lnTo>
-                <a:lnTo>
-                  <a:pt x="0" y="242"/>
-                </a:lnTo>
-                <a:lnTo>
-                  <a:pt x="0" y="181"/>
+                  <a:pt x="325" y="162"/>
+                </a:lnTo>
+                <a:lnTo>
+                  <a:pt x="325" y="216"/>
+                </a:lnTo>
+                <a:lnTo>
+                  <a:pt x="0" y="216"/>
+                </a:lnTo>
+                <a:lnTo>
+                  <a:pt x="0" y="162"/>
                 </a:lnTo>
                 <a:moveTo>
                   <a:pt x="0" y="0"/>
                 </a:moveTo>
                 <a:lnTo>
-                  <a:pt x="363" y="0"/>
-                </a:lnTo>
-                <a:lnTo>
-                  <a:pt x="363" y="60"/>
-                </a:lnTo>
-                <a:lnTo>
-                  <a:pt x="0" y="60"/>
+                  <a:pt x="325" y="0"/>
+                </a:lnTo>
+                <a:lnTo>
+                  <a:pt x="325" y="55"/>
+                </a:lnTo>
+                <a:lnTo>
+                  <a:pt x="0" y="55"/>
                 </a:lnTo>
                 <a:lnTo>
                   <a:pt x="0" y="0"/>
@@ -6424,7 +6244,7 @@
         </p:nvSpPr>
         <p:spPr>
           <a:xfrm>
-            <a:off x="6027120" y="2540520"/>
+            <a:off x="6027120" y="2350080"/>
             <a:ext cx="228240" cy="265680"/>
           </a:xfrm>
           <a:prstGeom prst="rect">
@@ -6467,8 +6287,8 @@
         </p:nvSpPr>
         <p:spPr>
           <a:xfrm>
-            <a:off x="7183080" y="2618640"/>
-            <a:ext cx="918000" cy="157320"/>
+            <a:off x="6611400" y="2402640"/>
+            <a:ext cx="2247120" cy="153000"/>
           </a:xfrm>
           <a:prstGeom prst="rect">
             <a:avLst/>
@@ -6484,16 +6304,16 @@
           </a:bodyPr>
           <a:p>
             <a:r>
-              <a:rPr b="1" lang="en-US" sz="1050" spc="-1" strike="noStrike">
+              <a:rPr b="1" lang="en-US" sz="1030" spc="-1" strike="noStrike">
                 <a:solidFill>
                   <a:srgbClr val="3d68ec"/>
                 </a:solidFill>
                 <a:latin typeface="Arial"/>
                 <a:ea typeface="Arial"/>
               </a:rPr>
-              <a:t>Eindproduct</a:t>
+              <a:t>Uitwerken tot het eindproduct</a:t>
             </a:r>
-            <a:endParaRPr b="0" lang="en-US" sz="1050" spc="-1" strike="noStrike">
+            <a:endParaRPr b="0" lang="en-US" sz="1030" spc="-1" strike="noStrike">
               <a:solidFill>
                 <a:srgbClr val="000000"/>
               </a:solidFill>
@@ -6510,8 +6330,8 @@
         </p:nvSpPr>
         <p:spPr>
           <a:xfrm>
-            <a:off x="6625800" y="2850840"/>
-            <a:ext cx="2109960" cy="128520"/>
+            <a:off x="6506640" y="2631960"/>
+            <a:ext cx="2449800" cy="128520"/>
           </a:xfrm>
           <a:prstGeom prst="rect">
             <a:avLst/>
@@ -6534,7 +6354,7 @@
                 <a:latin typeface="Arial"/>
                 <a:ea typeface="Arial"/>
               </a:rPr>
-              <a:t>koppelvlakspeciﬁcatie, opgebouwd uit</a:t>
+              <a:t>opbouw en eerste invulling liggen er, details</a:t>
             </a:r>
             <a:endParaRPr b="0" lang="en-US" sz="860" spc="-1" strike="noStrike">
               <a:solidFill>
@@ -6553,8 +6373,8 @@
         </p:nvSpPr>
         <p:spPr>
           <a:xfrm>
-            <a:off x="456840" y="3514680"/>
-            <a:ext cx="8420760" cy="828720"/>
+            <a:off x="456840" y="3371760"/>
+            <a:ext cx="8420760" cy="819360"/>
           </a:xfrm>
           <a:custGeom>
             <a:avLst/>
@@ -6562,7 +6382,7 @@
             <a:ahLst/>
             <a:rect l="0" t="0" r="r" b="b"/>
             <a:pathLst>
-              <a:path w="23391" h="2302">
+              <a:path w="23391" h="2276">
                 <a:moveTo>
                   <a:pt x="0" y="0"/>
                 </a:moveTo>
@@ -6570,10 +6390,10 @@
                   <a:pt x="23391" y="0"/>
                 </a:lnTo>
                 <a:lnTo>
-                  <a:pt x="23391" y="2302"/>
-                </a:lnTo>
-                <a:lnTo>
-                  <a:pt x="0" y="2302"/>
+                  <a:pt x="23391" y="2276"/>
+                </a:lnTo>
+                <a:lnTo>
+                  <a:pt x="0" y="2276"/>
                 </a:lnTo>
                 <a:lnTo>
                   <a:pt x="0" y="0"/>
@@ -6611,8 +6431,8 @@
         </p:nvSpPr>
         <p:spPr>
           <a:xfrm>
-            <a:off x="456840" y="3514680"/>
-            <a:ext cx="8420760" cy="38160"/>
+            <a:off x="456840" y="3371760"/>
+            <a:ext cx="8420760" cy="38520"/>
           </a:xfrm>
           <a:custGeom>
             <a:avLst/>
@@ -6620,7 +6440,7 @@
             <a:ahLst/>
             <a:rect l="0" t="0" r="r" b="b"/>
             <a:pathLst>
-              <a:path w="23391" h="106">
+              <a:path w="23391" h="107">
                 <a:moveTo>
                   <a:pt x="0" y="0"/>
                 </a:moveTo>
@@ -6628,10 +6448,10 @@
                   <a:pt x="23391" y="0"/>
                 </a:lnTo>
                 <a:lnTo>
-                  <a:pt x="23391" y="106"/>
-                </a:lnTo>
-                <a:lnTo>
-                  <a:pt x="0" y="106"/>
+                  <a:pt x="23391" y="107"/>
+                </a:lnTo>
+                <a:lnTo>
+                  <a:pt x="0" y="107"/>
                 </a:lnTo>
                 <a:lnTo>
                   <a:pt x="0" y="0"/>
@@ -6669,7 +6489,7 @@
         </p:nvSpPr>
         <p:spPr>
           <a:xfrm>
-            <a:off x="456840" y="4333680"/>
+            <a:off x="456840" y="4181400"/>
             <a:ext cx="8420760" cy="9720"/>
           </a:xfrm>
           <a:custGeom>
@@ -6727,8 +6547,8 @@
         </p:nvSpPr>
         <p:spPr>
           <a:xfrm>
-            <a:off x="8867520" y="3514680"/>
-            <a:ext cx="10080" cy="828720"/>
+            <a:off x="8867520" y="3371760"/>
+            <a:ext cx="10080" cy="819360"/>
           </a:xfrm>
           <a:custGeom>
             <a:avLst/>
@@ -6736,21 +6556,21 @@
             <a:ahLst/>
             <a:rect l="0" t="0" r="r" b="b"/>
             <a:pathLst>
-              <a:path w="28" h="2302">
+              <a:path w="28" h="2276">
                 <a:moveTo>
-                  <a:pt x="0" y="105"/>
+                  <a:pt x="0" y="106"/>
                 </a:moveTo>
                 <a:lnTo>
-                  <a:pt x="0" y="2302"/>
-                </a:lnTo>
-                <a:lnTo>
-                  <a:pt x="28" y="2302"/>
+                  <a:pt x="0" y="2276"/>
+                </a:lnTo>
+                <a:lnTo>
+                  <a:pt x="28" y="2276"/>
                 </a:lnTo>
                 <a:lnTo>
                   <a:pt x="28" y="0"/>
                 </a:lnTo>
                 <a:lnTo>
-                  <a:pt x="0" y="105"/>
+                  <a:pt x="0" y="106"/>
                 </a:lnTo>
                 <a:close/>
               </a:path>
@@ -6785,8 +6605,8 @@
         </p:nvSpPr>
         <p:spPr>
           <a:xfrm>
-            <a:off x="456840" y="3514680"/>
-            <a:ext cx="10080" cy="828720"/>
+            <a:off x="456840" y="3371760"/>
+            <a:ext cx="10080" cy="819360"/>
           </a:xfrm>
           <a:custGeom>
             <a:avLst/>
@@ -6794,18 +6614,18 @@
             <a:ahLst/>
             <a:rect l="0" t="0" r="r" b="b"/>
             <a:pathLst>
-              <a:path w="28" h="2302">
+              <a:path w="28" h="2276">
                 <a:moveTo>
                   <a:pt x="0" y="0"/>
                 </a:moveTo>
                 <a:lnTo>
-                  <a:pt x="0" y="2302"/>
-                </a:lnTo>
-                <a:lnTo>
-                  <a:pt x="28" y="2302"/>
-                </a:lnTo>
-                <a:lnTo>
-                  <a:pt x="28" y="105"/>
+                  <a:pt x="0" y="2276"/>
+                </a:lnTo>
+                <a:lnTo>
+                  <a:pt x="28" y="2276"/>
+                </a:lnTo>
+                <a:lnTo>
+                  <a:pt x="28" y="106"/>
                 </a:lnTo>
                 <a:lnTo>
                   <a:pt x="0" y="0"/>
@@ -6843,8 +6663,8 @@
         </p:nvSpPr>
         <p:spPr>
           <a:xfrm>
-            <a:off x="7011720" y="3012840"/>
-            <a:ext cx="1221480" cy="128520"/>
+            <a:off x="6992640" y="2793600"/>
+            <a:ext cx="1332720" cy="128520"/>
           </a:xfrm>
           <a:prstGeom prst="rect">
             <a:avLst/>
@@ -6867,7 +6687,7 @@
                 <a:latin typeface="Arial"/>
                 <a:ea typeface="Arial"/>
               </a:rPr>
-              <a:t>koppelingspeciﬁcaties</a:t>
+              <a:t>volgen met leveranciers</a:t>
             </a:r>
             <a:endParaRPr b="0" lang="en-US" sz="860" spc="-1" strike="noStrike">
               <a:solidFill>
@@ -6886,8 +6706,8 @@
         </p:nvSpPr>
         <p:spPr>
           <a:xfrm>
-            <a:off x="634320" y="3738240"/>
-            <a:ext cx="9457200" cy="174240"/>
+            <a:off x="634320" y="3598200"/>
+            <a:ext cx="8967960" cy="171000"/>
           </a:xfrm>
           <a:prstGeom prst="rect">
             <a:avLst/>
@@ -6903,26 +6723,26 @@
           </a:bodyPr>
           <a:p>
             <a:r>
-              <a:rPr b="1" lang="en-US" sz="1180" spc="-1" strike="noStrike">
+              <a:rPr b="1" lang="en-US" sz="1150" spc="-1" strike="noStrike">
                 <a:solidFill>
                   <a:srgbClr val="3d68ec"/>
                 </a:solidFill>
                 <a:latin typeface="Arial"/>
                 <a:ea typeface="Arial"/>
               </a:rPr>
-              <a:t>Dat is de winst van dit kwartaal:</a:t>
+              <a:t>Wat dit kwartaal opleverde:</a:t>
             </a:r>
             <a:r>
-              <a:rPr b="0" lang="en-US" sz="1180" spc="-1" strike="noStrike">
+              <a:rPr b="0" lang="en-US" sz="1150" spc="-1" strike="noStrike">
                 <a:solidFill>
                   <a:srgbClr val="1a1a2e"/>
                 </a:solidFill>
                 <a:latin typeface="Arial"/>
                 <a:ea typeface="Arial"/>
               </a:rPr>
-              <a:t> een vorm waarin business en techniek aan elkaar te knopen zijn, en waarin de vraag van</a:t>
+              <a:t> de drie sporen hangen nu aan elkaar. De vraag van een school is te volgen tot in wat een</a:t>
             </a:r>
-            <a:endParaRPr b="0" lang="en-US" sz="1180" spc="-1" strike="noStrike">
+            <a:endParaRPr b="0" lang="en-US" sz="1150" spc="-1" strike="noStrike">
               <a:solidFill>
                 <a:srgbClr val="000000"/>
               </a:solidFill>
@@ -6997,8 +6817,8 @@
         </p:nvSpPr>
         <p:spPr>
           <a:xfrm>
-            <a:off x="634320" y="3976200"/>
-            <a:ext cx="5356080" cy="174240"/>
+            <a:off x="634320" y="3826800"/>
+            <a:ext cx="7370640" cy="171000"/>
           </a:xfrm>
           <a:prstGeom prst="rect">
             <a:avLst/>
@@ -7014,16 +6834,16 @@
           </a:bodyPr>
           <a:p>
             <a:r>
-              <a:rPr b="0" lang="en-US" sz="1180" spc="-1" strike="noStrike">
+              <a:rPr b="0" lang="en-US" sz="1150" spc="-1" strike="noStrike">
                 <a:solidFill>
                   <a:srgbClr val="1a1a2e"/>
                 </a:solidFill>
                 <a:latin typeface="Arial"/>
                 <a:ea typeface="Arial"/>
               </a:rPr>
-              <a:t>een school herleidbaar terugkomt in wat een leverancier moet bouwen.</a:t>
+              <a:t>leverancier moet bouwen, en andersom. Die route is er; de inhoud gaat er stap voor stap doorheen.</a:t>
             </a:r>
-            <a:endParaRPr b="0" lang="en-US" sz="1180" spc="-1" strike="noStrike">
+            <a:endParaRPr b="0" lang="en-US" sz="1150" spc="-1" strike="noStrike">
               <a:solidFill>
                 <a:srgbClr val="000000"/>
               </a:solidFill>

--- a/presentaties/export/260929_werkgroep_okx_voortgang/260929_werkgroep_okx_voortgang.pptx
+++ b/presentaties/export/260929_werkgroep_okx_voortgang/260929_werkgroep_okx_voortgang.pptx
@@ -3028,8 +3028,8 @@
         </p:nvSpPr>
         <p:spPr>
           <a:xfrm>
-            <a:off x="461880" y="1885680"/>
-            <a:ext cx="2590920" cy="1195920"/>
+            <a:off x="461880" y="1733400"/>
+            <a:ext cx="2590920" cy="1195560"/>
           </a:xfrm>
           <a:custGeom>
             <a:avLst/>
@@ -3037,32 +3037,32 @@
             <a:ahLst/>
             <a:rect l="0" t="0" r="r" b="b"/>
             <a:pathLst>
-              <a:path w="7197" h="3322">
+              <a:path w="7197" h="3321">
                 <a:moveTo>
-                  <a:pt x="0" y="3016"/>
+                  <a:pt x="0" y="3017"/>
                 </a:moveTo>
                 <a:lnTo>
                   <a:pt x="0" y="265"/>
                 </a:lnTo>
                 <a:cubicBezTo>
-                  <a:pt x="0" y="247"/>
-                  <a:pt x="2" y="230"/>
-                  <a:pt x="6" y="213"/>
-                </a:cubicBezTo>
-                <a:cubicBezTo>
-                  <a:pt x="9" y="196"/>
+                  <a:pt x="0" y="248"/>
+                  <a:pt x="2" y="231"/>
+                  <a:pt x="6" y="214"/>
+                </a:cubicBezTo>
+                <a:cubicBezTo>
+                  <a:pt x="9" y="197"/>
                   <a:pt x="15" y="180"/>
-                  <a:pt x="23" y="164"/>
-                </a:cubicBezTo>
-                <a:cubicBezTo>
-                  <a:pt x="31" y="148"/>
+                  <a:pt x="23" y="163"/>
+                </a:cubicBezTo>
+                <a:cubicBezTo>
+                  <a:pt x="31" y="147"/>
                   <a:pt x="40" y="132"/>
                   <a:pt x="51" y="118"/>
                 </a:cubicBezTo>
                 <a:cubicBezTo>
                   <a:pt x="62" y="103"/>
                   <a:pt x="75" y="90"/>
-                  <a:pt x="89" y="78"/>
+                  <a:pt x="89" y="77"/>
                 </a:cubicBezTo>
                 <a:cubicBezTo>
                   <a:pt x="103" y="65"/>
@@ -3075,8 +3075,8 @@
                   <a:pt x="188" y="20"/>
                 </a:cubicBezTo>
                 <a:cubicBezTo>
-                  <a:pt x="206" y="14"/>
-                  <a:pt x="225" y="9"/>
+                  <a:pt x="206" y="13"/>
+                  <a:pt x="225" y="8"/>
                   <a:pt x="245" y="5"/>
                 </a:cubicBezTo>
                 <a:cubicBezTo>
@@ -3093,8 +3093,8 @@
                   <a:pt x="6952" y="5"/>
                 </a:cubicBezTo>
                 <a:cubicBezTo>
-                  <a:pt x="6972" y="9"/>
-                  <a:pt x="6991" y="14"/>
+                  <a:pt x="6972" y="8"/>
+                  <a:pt x="6991" y="13"/>
                   <a:pt x="7010" y="20"/>
                 </a:cubicBezTo>
                 <a:cubicBezTo>
@@ -3105,7 +3105,7 @@
                 <a:cubicBezTo>
                   <a:pt x="7079" y="54"/>
                   <a:pt x="7094" y="65"/>
-                  <a:pt x="7108" y="78"/>
+                  <a:pt x="7108" y="77"/>
                 </a:cubicBezTo>
                 <a:cubicBezTo>
                   <a:pt x="7122" y="90"/>
@@ -3114,25 +3114,25 @@
                 </a:cubicBezTo>
                 <a:cubicBezTo>
                   <a:pt x="7157" y="132"/>
-                  <a:pt x="7167" y="148"/>
-                  <a:pt x="7174" y="164"/>
+                  <a:pt x="7167" y="147"/>
+                  <a:pt x="7174" y="163"/>
                 </a:cubicBezTo>
                 <a:cubicBezTo>
                   <a:pt x="7182" y="180"/>
-                  <a:pt x="7188" y="196"/>
-                  <a:pt x="7192" y="213"/>
-                </a:cubicBezTo>
-                <a:cubicBezTo>
-                  <a:pt x="7195" y="230"/>
-                  <a:pt x="7197" y="247"/>
+                  <a:pt x="7188" y="197"/>
+                  <a:pt x="7192" y="214"/>
+                </a:cubicBezTo>
+                <a:cubicBezTo>
+                  <a:pt x="7195" y="231"/>
+                  <a:pt x="7197" y="248"/>
                   <a:pt x="7197" y="265"/>
                 </a:cubicBezTo>
                 <a:lnTo>
-                  <a:pt x="7197" y="3016"/>
-                </a:lnTo>
-                <a:cubicBezTo>
-                  <a:pt x="7197" y="3036"/>
-                  <a:pt x="7195" y="3056"/>
+                  <a:pt x="7197" y="3017"/>
+                </a:lnTo>
+                <a:cubicBezTo>
+                  <a:pt x="7197" y="3037"/>
+                  <a:pt x="7195" y="3057"/>
                   <a:pt x="7192" y="3077"/>
                 </a:cubicBezTo>
                 <a:cubicBezTo>
@@ -3143,22 +3143,22 @@
                 <a:cubicBezTo>
                   <a:pt x="7167" y="3152"/>
                   <a:pt x="7157" y="3170"/>
-                  <a:pt x="7146" y="3187"/>
+                  <a:pt x="7146" y="3186"/>
                 </a:cubicBezTo>
                 <a:cubicBezTo>
                   <a:pt x="7135" y="3203"/>
-                  <a:pt x="7122" y="3219"/>
-                  <a:pt x="7108" y="3233"/>
-                </a:cubicBezTo>
-                <a:cubicBezTo>
-                  <a:pt x="7094" y="3247"/>
+                  <a:pt x="7122" y="3218"/>
+                  <a:pt x="7108" y="3232"/>
+                </a:cubicBezTo>
+                <a:cubicBezTo>
+                  <a:pt x="7094" y="3246"/>
                   <a:pt x="7079" y="3259"/>
                   <a:pt x="7062" y="3270"/>
                 </a:cubicBezTo>
                 <a:cubicBezTo>
-                  <a:pt x="7046" y="3282"/>
+                  <a:pt x="7046" y="3281"/>
                   <a:pt x="7028" y="3291"/>
-                  <a:pt x="7010" y="3299"/>
+                  <a:pt x="7010" y="3298"/>
                 </a:cubicBezTo>
                 <a:cubicBezTo>
                   <a:pt x="6991" y="3306"/>
@@ -3166,37 +3166,37 @@
                   <a:pt x="6952" y="3316"/>
                 </a:cubicBezTo>
                 <a:cubicBezTo>
-                  <a:pt x="6933" y="3320"/>
-                  <a:pt x="6913" y="3322"/>
-                  <a:pt x="6893" y="3322"/>
-                </a:cubicBezTo>
-                <a:lnTo>
-                  <a:pt x="304" y="3322"/>
-                </a:lnTo>
-                <a:cubicBezTo>
-                  <a:pt x="284" y="3322"/>
-                  <a:pt x="264" y="3320"/>
+                  <a:pt x="6933" y="3319"/>
+                  <a:pt x="6913" y="3321"/>
+                  <a:pt x="6893" y="3321"/>
+                </a:cubicBezTo>
+                <a:lnTo>
+                  <a:pt x="304" y="3321"/>
+                </a:lnTo>
+                <a:cubicBezTo>
+                  <a:pt x="284" y="3321"/>
+                  <a:pt x="264" y="3319"/>
                   <a:pt x="245" y="3316"/>
                 </a:cubicBezTo>
                 <a:cubicBezTo>
                   <a:pt x="225" y="3312"/>
                   <a:pt x="206" y="3306"/>
-                  <a:pt x="188" y="3299"/>
+                  <a:pt x="188" y="3298"/>
                 </a:cubicBezTo>
                 <a:cubicBezTo>
                   <a:pt x="169" y="3291"/>
-                  <a:pt x="152" y="3282"/>
+                  <a:pt x="152" y="3281"/>
                   <a:pt x="135" y="3270"/>
                 </a:cubicBezTo>
                 <a:cubicBezTo>
                   <a:pt x="118" y="3259"/>
-                  <a:pt x="103" y="3247"/>
-                  <a:pt x="89" y="3233"/>
-                </a:cubicBezTo>
-                <a:cubicBezTo>
-                  <a:pt x="75" y="3219"/>
+                  <a:pt x="103" y="3246"/>
+                  <a:pt x="89" y="3232"/>
+                </a:cubicBezTo>
+                <a:cubicBezTo>
+                  <a:pt x="75" y="3218"/>
                   <a:pt x="62" y="3203"/>
-                  <a:pt x="51" y="3187"/>
+                  <a:pt x="51" y="3186"/>
                 </a:cubicBezTo>
                 <a:cubicBezTo>
                   <a:pt x="40" y="3170"/>
@@ -3209,9 +3209,9 @@
                   <a:pt x="6" y="3077"/>
                 </a:cubicBezTo>
                 <a:cubicBezTo>
-                  <a:pt x="2" y="3056"/>
-                  <a:pt x="0" y="3036"/>
-                  <a:pt x="0" y="3016"/>
+                  <a:pt x="2" y="3057"/>
+                  <a:pt x="0" y="3037"/>
+                  <a:pt x="0" y="3017"/>
                 </a:cubicBezTo>
                 <a:close/>
               </a:path>
@@ -3246,7 +3246,7 @@
         </p:nvSpPr>
         <p:spPr>
           <a:xfrm>
-            <a:off x="456840" y="1866600"/>
+            <a:off x="456840" y="1714320"/>
             <a:ext cx="2601000" cy="1219680"/>
           </a:xfrm>
           <a:custGeom>
@@ -3304,7 +3304,7 @@
         </p:nvSpPr>
         <p:spPr>
           <a:xfrm>
-            <a:off x="456840" y="1866600"/>
+            <a:off x="456840" y="1714320"/>
             <a:ext cx="2601000" cy="1219680"/>
           </a:xfrm>
           <a:custGeom>
@@ -3362,7 +3362,7 @@
         </p:nvSpPr>
         <p:spPr>
           <a:xfrm>
-            <a:off x="456840" y="1866600"/>
+            <a:off x="456840" y="1714320"/>
             <a:ext cx="2601000" cy="1219680"/>
           </a:xfrm>
           <a:custGeom>
@@ -3420,7 +3420,7 @@
         </p:nvSpPr>
         <p:spPr>
           <a:xfrm>
-            <a:off x="456840" y="1866600"/>
+            <a:off x="456840" y="1714320"/>
             <a:ext cx="2601000" cy="1219680"/>
           </a:xfrm>
           <a:custGeom>
@@ -3478,8 +3478,8 @@
         </p:nvSpPr>
         <p:spPr>
           <a:xfrm>
-            <a:off x="657360" y="2067120"/>
-            <a:ext cx="272160" cy="272160"/>
+            <a:off x="657360" y="1905120"/>
+            <a:ext cx="272160" cy="272520"/>
           </a:xfrm>
           <a:custGeom>
             <a:avLst/>
@@ -3487,228 +3487,228 @@
             <a:ahLst/>
             <a:rect l="0" t="0" r="r" b="b"/>
             <a:pathLst>
-              <a:path w="756" h="756">
+              <a:path w="756" h="757">
                 <a:moveTo>
-                  <a:pt x="756" y="756"/>
+                  <a:pt x="756" y="757"/>
                 </a:moveTo>
                 <a:lnTo>
-                  <a:pt x="703" y="756"/>
-                </a:lnTo>
-                <a:lnTo>
-                  <a:pt x="703" y="620"/>
-                </a:lnTo>
-                <a:cubicBezTo>
-                  <a:pt x="702" y="603"/>
-                  <a:pt x="699" y="585"/>
-                  <a:pt x="692" y="569"/>
-                </a:cubicBezTo>
-                <a:cubicBezTo>
-                  <a:pt x="685" y="552"/>
-                  <a:pt x="676" y="538"/>
-                  <a:pt x="663" y="525"/>
-                </a:cubicBezTo>
-                <a:cubicBezTo>
-                  <a:pt x="650" y="512"/>
-                  <a:pt x="636" y="503"/>
-                  <a:pt x="619" y="496"/>
-                </a:cubicBezTo>
-                <a:cubicBezTo>
-                  <a:pt x="603" y="489"/>
-                  <a:pt x="586" y="486"/>
-                  <a:pt x="568" y="486"/>
-                </a:cubicBezTo>
-                <a:lnTo>
-                  <a:pt x="568" y="432"/>
-                </a:lnTo>
-                <a:cubicBezTo>
-                  <a:pt x="580" y="432"/>
-                  <a:pt x="592" y="433"/>
-                  <a:pt x="604" y="435"/>
-                </a:cubicBezTo>
-                <a:cubicBezTo>
-                  <a:pt x="617" y="438"/>
-                  <a:pt x="628" y="441"/>
-                  <a:pt x="640" y="446"/>
-                </a:cubicBezTo>
-                <a:cubicBezTo>
-                  <a:pt x="651" y="451"/>
-                  <a:pt x="662" y="457"/>
-                  <a:pt x="672" y="463"/>
-                </a:cubicBezTo>
-                <a:cubicBezTo>
-                  <a:pt x="683" y="470"/>
-                  <a:pt x="692" y="478"/>
-                  <a:pt x="701" y="487"/>
-                </a:cubicBezTo>
-                <a:cubicBezTo>
-                  <a:pt x="710" y="496"/>
-                  <a:pt x="718" y="505"/>
-                  <a:pt x="725" y="516"/>
-                </a:cubicBezTo>
-                <a:cubicBezTo>
-                  <a:pt x="731" y="526"/>
-                  <a:pt x="737" y="537"/>
-                  <a:pt x="742" y="548"/>
-                </a:cubicBezTo>
-                <a:cubicBezTo>
-                  <a:pt x="747" y="560"/>
-                  <a:pt x="750" y="571"/>
-                  <a:pt x="753" y="584"/>
-                </a:cubicBezTo>
-                <a:cubicBezTo>
-                  <a:pt x="755" y="596"/>
-                  <a:pt x="756" y="608"/>
-                  <a:pt x="756" y="620"/>
-                </a:cubicBezTo>
-                <a:lnTo>
-                  <a:pt x="756" y="756"/>
+                  <a:pt x="703" y="757"/>
+                </a:lnTo>
+                <a:lnTo>
+                  <a:pt x="703" y="622"/>
+                </a:lnTo>
+                <a:cubicBezTo>
+                  <a:pt x="702" y="604"/>
+                  <a:pt x="699" y="587"/>
+                  <a:pt x="692" y="570"/>
+                </a:cubicBezTo>
+                <a:cubicBezTo>
+                  <a:pt x="685" y="554"/>
+                  <a:pt x="676" y="539"/>
+                  <a:pt x="663" y="526"/>
+                </a:cubicBezTo>
+                <a:cubicBezTo>
+                  <a:pt x="650" y="514"/>
+                  <a:pt x="636" y="504"/>
+                  <a:pt x="619" y="497"/>
+                </a:cubicBezTo>
+                <a:cubicBezTo>
+                  <a:pt x="603" y="490"/>
+                  <a:pt x="586" y="487"/>
+                  <a:pt x="568" y="487"/>
+                </a:cubicBezTo>
+                <a:lnTo>
+                  <a:pt x="568" y="433"/>
+                </a:lnTo>
+                <a:cubicBezTo>
+                  <a:pt x="580" y="433"/>
+                  <a:pt x="592" y="434"/>
+                  <a:pt x="604" y="436"/>
+                </a:cubicBezTo>
+                <a:cubicBezTo>
+                  <a:pt x="617" y="439"/>
+                  <a:pt x="628" y="442"/>
+                  <a:pt x="640" y="447"/>
+                </a:cubicBezTo>
+                <a:cubicBezTo>
+                  <a:pt x="651" y="452"/>
+                  <a:pt x="662" y="458"/>
+                  <a:pt x="672" y="465"/>
+                </a:cubicBezTo>
+                <a:cubicBezTo>
+                  <a:pt x="683" y="472"/>
+                  <a:pt x="692" y="479"/>
+                  <a:pt x="701" y="488"/>
+                </a:cubicBezTo>
+                <a:cubicBezTo>
+                  <a:pt x="710" y="497"/>
+                  <a:pt x="718" y="506"/>
+                  <a:pt x="725" y="517"/>
+                </a:cubicBezTo>
+                <a:cubicBezTo>
+                  <a:pt x="731" y="527"/>
+                  <a:pt x="737" y="538"/>
+                  <a:pt x="742" y="549"/>
+                </a:cubicBezTo>
+                <a:cubicBezTo>
+                  <a:pt x="747" y="561"/>
+                  <a:pt x="750" y="573"/>
+                  <a:pt x="753" y="585"/>
+                </a:cubicBezTo>
+                <a:cubicBezTo>
+                  <a:pt x="755" y="597"/>
+                  <a:pt x="756" y="609"/>
+                  <a:pt x="756" y="622"/>
+                </a:cubicBezTo>
+                <a:lnTo>
+                  <a:pt x="756" y="757"/>
                 </a:lnTo>
                 <a:moveTo>
-                  <a:pt x="541" y="756"/>
+                  <a:pt x="541" y="757"/>
                 </a:moveTo>
                 <a:lnTo>
-                  <a:pt x="487" y="756"/>
-                </a:lnTo>
-                <a:lnTo>
-                  <a:pt x="487" y="620"/>
-                </a:lnTo>
-                <a:cubicBezTo>
-                  <a:pt x="487" y="603"/>
-                  <a:pt x="483" y="585"/>
-                  <a:pt x="476" y="569"/>
-                </a:cubicBezTo>
-                <a:cubicBezTo>
-                  <a:pt x="470" y="552"/>
-                  <a:pt x="460" y="538"/>
-                  <a:pt x="447" y="525"/>
-                </a:cubicBezTo>
-                <a:cubicBezTo>
-                  <a:pt x="435" y="512"/>
-                  <a:pt x="420" y="503"/>
-                  <a:pt x="403" y="496"/>
-                </a:cubicBezTo>
-                <a:cubicBezTo>
-                  <a:pt x="387" y="489"/>
-                  <a:pt x="370" y="486"/>
-                  <a:pt x="352" y="486"/>
-                </a:cubicBezTo>
-                <a:lnTo>
-                  <a:pt x="190" y="486"/>
-                </a:lnTo>
-                <a:cubicBezTo>
-                  <a:pt x="172" y="486"/>
-                  <a:pt x="155" y="489"/>
-                  <a:pt x="138" y="496"/>
-                </a:cubicBezTo>
-                <a:cubicBezTo>
-                  <a:pt x="122" y="503"/>
-                  <a:pt x="107" y="512"/>
-                  <a:pt x="95" y="525"/>
-                </a:cubicBezTo>
-                <a:cubicBezTo>
-                  <a:pt x="82" y="538"/>
-                  <a:pt x="72" y="552"/>
-                  <a:pt x="65" y="569"/>
-                </a:cubicBezTo>
-                <a:cubicBezTo>
-                  <a:pt x="58" y="585"/>
-                  <a:pt x="54" y="603"/>
-                  <a:pt x="54" y="620"/>
-                </a:cubicBezTo>
-                <a:lnTo>
-                  <a:pt x="54" y="756"/>
-                </a:lnTo>
-                <a:lnTo>
-                  <a:pt x="0" y="756"/>
-                </a:lnTo>
-                <a:lnTo>
-                  <a:pt x="0" y="620"/>
-                </a:lnTo>
-                <a:cubicBezTo>
-                  <a:pt x="0" y="608"/>
-                  <a:pt x="1" y="596"/>
-                  <a:pt x="4" y="584"/>
-                </a:cubicBezTo>
-                <a:cubicBezTo>
-                  <a:pt x="6" y="571"/>
-                  <a:pt x="10" y="560"/>
-                  <a:pt x="15" y="548"/>
-                </a:cubicBezTo>
-                <a:cubicBezTo>
-                  <a:pt x="19" y="537"/>
-                  <a:pt x="25" y="526"/>
-                  <a:pt x="32" y="516"/>
-                </a:cubicBezTo>
-                <a:cubicBezTo>
-                  <a:pt x="39" y="505"/>
-                  <a:pt x="47" y="496"/>
-                  <a:pt x="56" y="487"/>
-                </a:cubicBezTo>
-                <a:cubicBezTo>
-                  <a:pt x="65" y="478"/>
-                  <a:pt x="75" y="470"/>
-                  <a:pt x="85" y="463"/>
-                </a:cubicBezTo>
-                <a:cubicBezTo>
-                  <a:pt x="95" y="457"/>
-                  <a:pt x="106" y="451"/>
-                  <a:pt x="118" y="446"/>
-                </a:cubicBezTo>
-                <a:cubicBezTo>
-                  <a:pt x="129" y="441"/>
-                  <a:pt x="141" y="438"/>
-                  <a:pt x="153" y="435"/>
-                </a:cubicBezTo>
-                <a:cubicBezTo>
-                  <a:pt x="165" y="433"/>
-                  <a:pt x="178" y="432"/>
-                  <a:pt x="190" y="432"/>
-                </a:cubicBezTo>
-                <a:lnTo>
-                  <a:pt x="352" y="432"/>
-                </a:lnTo>
-                <a:cubicBezTo>
-                  <a:pt x="364" y="432"/>
-                  <a:pt x="377" y="433"/>
-                  <a:pt x="389" y="435"/>
-                </a:cubicBezTo>
-                <a:cubicBezTo>
-                  <a:pt x="401" y="438"/>
-                  <a:pt x="413" y="441"/>
-                  <a:pt x="424" y="446"/>
-                </a:cubicBezTo>
-                <a:cubicBezTo>
-                  <a:pt x="436" y="451"/>
-                  <a:pt x="446" y="457"/>
-                  <a:pt x="457" y="463"/>
-                </a:cubicBezTo>
-                <a:cubicBezTo>
-                  <a:pt x="467" y="470"/>
-                  <a:pt x="477" y="478"/>
-                  <a:pt x="485" y="487"/>
-                </a:cubicBezTo>
-                <a:cubicBezTo>
-                  <a:pt x="494" y="496"/>
-                  <a:pt x="502" y="505"/>
-                  <a:pt x="509" y="516"/>
-                </a:cubicBezTo>
-                <a:cubicBezTo>
-                  <a:pt x="516" y="526"/>
-                  <a:pt x="521" y="537"/>
-                  <a:pt x="526" y="548"/>
-                </a:cubicBezTo>
-                <a:cubicBezTo>
-                  <a:pt x="531" y="560"/>
-                  <a:pt x="535" y="571"/>
-                  <a:pt x="537" y="584"/>
-                </a:cubicBezTo>
-                <a:cubicBezTo>
-                  <a:pt x="539" y="596"/>
-                  <a:pt x="541" y="608"/>
-                  <a:pt x="541" y="620"/>
-                </a:cubicBezTo>
-                <a:lnTo>
-                  <a:pt x="541" y="756"/>
+                  <a:pt x="487" y="757"/>
+                </a:lnTo>
+                <a:lnTo>
+                  <a:pt x="487" y="622"/>
+                </a:lnTo>
+                <a:cubicBezTo>
+                  <a:pt x="487" y="604"/>
+                  <a:pt x="483" y="587"/>
+                  <a:pt x="476" y="570"/>
+                </a:cubicBezTo>
+                <a:cubicBezTo>
+                  <a:pt x="470" y="554"/>
+                  <a:pt x="460" y="539"/>
+                  <a:pt x="447" y="526"/>
+                </a:cubicBezTo>
+                <a:cubicBezTo>
+                  <a:pt x="435" y="514"/>
+                  <a:pt x="420" y="504"/>
+                  <a:pt x="403" y="497"/>
+                </a:cubicBezTo>
+                <a:cubicBezTo>
+                  <a:pt x="387" y="490"/>
+                  <a:pt x="370" y="487"/>
+                  <a:pt x="352" y="487"/>
+                </a:cubicBezTo>
+                <a:lnTo>
+                  <a:pt x="190" y="487"/>
+                </a:lnTo>
+                <a:cubicBezTo>
+                  <a:pt x="172" y="487"/>
+                  <a:pt x="155" y="490"/>
+                  <a:pt x="138" y="497"/>
+                </a:cubicBezTo>
+                <a:cubicBezTo>
+                  <a:pt x="122" y="504"/>
+                  <a:pt x="107" y="514"/>
+                  <a:pt x="95" y="526"/>
+                </a:cubicBezTo>
+                <a:cubicBezTo>
+                  <a:pt x="82" y="539"/>
+                  <a:pt x="72" y="554"/>
+                  <a:pt x="65" y="570"/>
+                </a:cubicBezTo>
+                <a:cubicBezTo>
+                  <a:pt x="58" y="587"/>
+                  <a:pt x="54" y="604"/>
+                  <a:pt x="54" y="622"/>
+                </a:cubicBezTo>
+                <a:lnTo>
+                  <a:pt x="54" y="757"/>
+                </a:lnTo>
+                <a:lnTo>
+                  <a:pt x="0" y="757"/>
+                </a:lnTo>
+                <a:lnTo>
+                  <a:pt x="0" y="622"/>
+                </a:lnTo>
+                <a:cubicBezTo>
+                  <a:pt x="0" y="609"/>
+                  <a:pt x="1" y="597"/>
+                  <a:pt x="4" y="585"/>
+                </a:cubicBezTo>
+                <a:cubicBezTo>
+                  <a:pt x="6" y="573"/>
+                  <a:pt x="10" y="561"/>
+                  <a:pt x="15" y="549"/>
+                </a:cubicBezTo>
+                <a:cubicBezTo>
+                  <a:pt x="19" y="538"/>
+                  <a:pt x="25" y="527"/>
+                  <a:pt x="32" y="517"/>
+                </a:cubicBezTo>
+                <a:cubicBezTo>
+                  <a:pt x="39" y="506"/>
+                  <a:pt x="47" y="497"/>
+                  <a:pt x="56" y="488"/>
+                </a:cubicBezTo>
+                <a:cubicBezTo>
+                  <a:pt x="65" y="479"/>
+                  <a:pt x="75" y="472"/>
+                  <a:pt x="85" y="465"/>
+                </a:cubicBezTo>
+                <a:cubicBezTo>
+                  <a:pt x="95" y="458"/>
+                  <a:pt x="106" y="452"/>
+                  <a:pt x="118" y="447"/>
+                </a:cubicBezTo>
+                <a:cubicBezTo>
+                  <a:pt x="129" y="442"/>
+                  <a:pt x="141" y="439"/>
+                  <a:pt x="153" y="436"/>
+                </a:cubicBezTo>
+                <a:cubicBezTo>
+                  <a:pt x="165" y="434"/>
+                  <a:pt x="178" y="433"/>
+                  <a:pt x="190" y="433"/>
+                </a:cubicBezTo>
+                <a:lnTo>
+                  <a:pt x="352" y="433"/>
+                </a:lnTo>
+                <a:cubicBezTo>
+                  <a:pt x="364" y="433"/>
+                  <a:pt x="377" y="434"/>
+                  <a:pt x="389" y="436"/>
+                </a:cubicBezTo>
+                <a:cubicBezTo>
+                  <a:pt x="401" y="439"/>
+                  <a:pt x="413" y="442"/>
+                  <a:pt x="424" y="447"/>
+                </a:cubicBezTo>
+                <a:cubicBezTo>
+                  <a:pt x="436" y="452"/>
+                  <a:pt x="446" y="458"/>
+                  <a:pt x="457" y="465"/>
+                </a:cubicBezTo>
+                <a:cubicBezTo>
+                  <a:pt x="467" y="472"/>
+                  <a:pt x="477" y="479"/>
+                  <a:pt x="485" y="488"/>
+                </a:cubicBezTo>
+                <a:cubicBezTo>
+                  <a:pt x="494" y="497"/>
+                  <a:pt x="502" y="506"/>
+                  <a:pt x="509" y="517"/>
+                </a:cubicBezTo>
+                <a:cubicBezTo>
+                  <a:pt x="516" y="527"/>
+                  <a:pt x="521" y="538"/>
+                  <a:pt x="526" y="549"/>
+                </a:cubicBezTo>
+                <a:cubicBezTo>
+                  <a:pt x="531" y="561"/>
+                  <a:pt x="535" y="573"/>
+                  <a:pt x="537" y="585"/>
+                </a:cubicBezTo>
+                <a:cubicBezTo>
+                  <a:pt x="539" y="597"/>
+                  <a:pt x="541" y="609"/>
+                  <a:pt x="541" y="622"/>
+                </a:cubicBezTo>
+                <a:lnTo>
+                  <a:pt x="541" y="757"/>
                 </a:lnTo>
                 <a:moveTo>
                   <a:pt x="487" y="0"/>
@@ -3718,13 +3718,13 @@
                 </a:lnTo>
                 <a:cubicBezTo>
                   <a:pt x="505" y="54"/>
-                  <a:pt x="522" y="57"/>
+                  <a:pt x="522" y="58"/>
                   <a:pt x="538" y="64"/>
                 </a:cubicBezTo>
                 <a:cubicBezTo>
                   <a:pt x="555" y="71"/>
                   <a:pt x="569" y="81"/>
-                  <a:pt x="582" y="93"/>
+                  <a:pt x="582" y="94"/>
                 </a:cubicBezTo>
                 <a:cubicBezTo>
                   <a:pt x="595" y="106"/>
@@ -3739,7 +3739,7 @@
                 <a:cubicBezTo>
                   <a:pt x="622" y="207"/>
                   <a:pt x="618" y="224"/>
-                  <a:pt x="611" y="240"/>
+                  <a:pt x="611" y="241"/>
                 </a:cubicBezTo>
                 <a:cubicBezTo>
                   <a:pt x="604" y="257"/>
@@ -3749,7 +3749,7 @@
                 <a:cubicBezTo>
                   <a:pt x="569" y="297"/>
                   <a:pt x="555" y="307"/>
-                  <a:pt x="538" y="313"/>
+                  <a:pt x="538" y="314"/>
                 </a:cubicBezTo>
                 <a:cubicBezTo>
                   <a:pt x="522" y="320"/>
@@ -3757,15 +3757,15 @@
                   <a:pt x="487" y="324"/>
                 </a:cubicBezTo>
                 <a:lnTo>
-                  <a:pt x="487" y="378"/>
-                </a:lnTo>
-                <a:cubicBezTo>
-                  <a:pt x="499" y="378"/>
-                  <a:pt x="511" y="376"/>
-                  <a:pt x="524" y="374"/>
-                </a:cubicBezTo>
-                <a:cubicBezTo>
-                  <a:pt x="536" y="372"/>
+                  <a:pt x="487" y="379"/>
+                </a:lnTo>
+                <a:cubicBezTo>
+                  <a:pt x="499" y="379"/>
+                  <a:pt x="511" y="378"/>
+                  <a:pt x="524" y="375"/>
+                </a:cubicBezTo>
+                <a:cubicBezTo>
+                  <a:pt x="536" y="373"/>
                   <a:pt x="548" y="368"/>
                   <a:pt x="559" y="363"/>
                 </a:cubicBezTo>
@@ -3777,7 +3777,7 @@
                 <a:cubicBezTo>
                   <a:pt x="602" y="339"/>
                   <a:pt x="611" y="331"/>
-                  <a:pt x="620" y="322"/>
+                  <a:pt x="620" y="323"/>
                 </a:cubicBezTo>
                 <a:cubicBezTo>
                   <a:pt x="629" y="314"/>
@@ -3785,7 +3785,7 @@
                   <a:pt x="644" y="294"/>
                 </a:cubicBezTo>
                 <a:cubicBezTo>
-                  <a:pt x="651" y="283"/>
+                  <a:pt x="651" y="284"/>
                   <a:pt x="656" y="273"/>
                   <a:pt x="661" y="261"/>
                 </a:cubicBezTo>
@@ -3795,12 +3795,12 @@
                   <a:pt x="672" y="226"/>
                 </a:cubicBezTo>
                 <a:cubicBezTo>
-                  <a:pt x="674" y="213"/>
+                  <a:pt x="674" y="214"/>
                   <a:pt x="676" y="201"/>
                   <a:pt x="676" y="189"/>
                 </a:cubicBezTo>
                 <a:cubicBezTo>
-                  <a:pt x="676" y="176"/>
+                  <a:pt x="676" y="177"/>
                   <a:pt x="674" y="164"/>
                   <a:pt x="672" y="152"/>
                 </a:cubicBezTo>
@@ -3817,7 +3817,7 @@
                 <a:cubicBezTo>
                   <a:pt x="637" y="74"/>
                   <a:pt x="629" y="64"/>
-                  <a:pt x="620" y="55"/>
+                  <a:pt x="620" y="56"/>
                 </a:cubicBezTo>
                 <a:cubicBezTo>
                   <a:pt x="611" y="47"/>
@@ -3827,7 +3827,7 @@
                 <a:cubicBezTo>
                   <a:pt x="581" y="25"/>
                   <a:pt x="570" y="19"/>
-                  <a:pt x="559" y="14"/>
+                  <a:pt x="559" y="15"/>
                 </a:cubicBezTo>
                 <a:cubicBezTo>
                   <a:pt x="548" y="10"/>
@@ -3844,13 +3844,13 @@
                 </a:moveTo>
                 <a:cubicBezTo>
                   <a:pt x="289" y="54"/>
-                  <a:pt x="306" y="57"/>
+                  <a:pt x="306" y="58"/>
                   <a:pt x="323" y="64"/>
                 </a:cubicBezTo>
                 <a:cubicBezTo>
                   <a:pt x="339" y="71"/>
                   <a:pt x="354" y="81"/>
-                  <a:pt x="366" y="93"/>
+                  <a:pt x="366" y="94"/>
                 </a:cubicBezTo>
                 <a:cubicBezTo>
                   <a:pt x="379" y="106"/>
@@ -3865,7 +3865,7 @@
                 <a:cubicBezTo>
                   <a:pt x="406" y="207"/>
                   <a:pt x="402" y="224"/>
-                  <a:pt x="396" y="240"/>
+                  <a:pt x="396" y="241"/>
                 </a:cubicBezTo>
                 <a:cubicBezTo>
                   <a:pt x="389" y="257"/>
@@ -3875,7 +3875,7 @@
                 <a:cubicBezTo>
                   <a:pt x="354" y="297"/>
                   <a:pt x="339" y="307"/>
-                  <a:pt x="323" y="313"/>
+                  <a:pt x="323" y="314"/>
                 </a:cubicBezTo>
                 <a:cubicBezTo>
                   <a:pt x="306" y="320"/>
@@ -3885,7 +3885,7 @@
                 <a:cubicBezTo>
                   <a:pt x="253" y="324"/>
                   <a:pt x="236" y="320"/>
-                  <a:pt x="219" y="313"/>
+                  <a:pt x="219" y="314"/>
                 </a:cubicBezTo>
                 <a:cubicBezTo>
                   <a:pt x="203" y="307"/>
@@ -3895,7 +3895,7 @@
                 <a:cubicBezTo>
                   <a:pt x="163" y="272"/>
                   <a:pt x="153" y="257"/>
-                  <a:pt x="146" y="240"/>
+                  <a:pt x="146" y="241"/>
                 </a:cubicBezTo>
                 <a:cubicBezTo>
                   <a:pt x="139" y="224"/>
@@ -3910,7 +3910,7 @@
                 <a:cubicBezTo>
                   <a:pt x="153" y="121"/>
                   <a:pt x="163" y="106"/>
-                  <a:pt x="176" y="93"/>
+                  <a:pt x="176" y="94"/>
                 </a:cubicBezTo>
                 <a:cubicBezTo>
                   <a:pt x="188" y="81"/>
@@ -3918,7 +3918,7 @@
                   <a:pt x="219" y="64"/>
                 </a:cubicBezTo>
                 <a:cubicBezTo>
-                  <a:pt x="236" y="57"/>
+                  <a:pt x="236" y="58"/>
                   <a:pt x="253" y="54"/>
                   <a:pt x="271" y="54"/>
                 </a:cubicBezTo>
@@ -3933,7 +3933,7 @@
                 <a:cubicBezTo>
                   <a:pt x="222" y="6"/>
                   <a:pt x="210" y="10"/>
-                  <a:pt x="199" y="14"/>
+                  <a:pt x="199" y="15"/>
                 </a:cubicBezTo>
                 <a:cubicBezTo>
                   <a:pt x="187" y="19"/>
@@ -3943,7 +3943,7 @@
                 <a:cubicBezTo>
                   <a:pt x="156" y="39"/>
                   <a:pt x="146" y="47"/>
-                  <a:pt x="137" y="55"/>
+                  <a:pt x="137" y="56"/>
                 </a:cubicBezTo>
                 <a:cubicBezTo>
                   <a:pt x="129" y="64"/>
@@ -3962,12 +3962,12 @@
                 </a:cubicBezTo>
                 <a:cubicBezTo>
                   <a:pt x="83" y="164"/>
-                  <a:pt x="82" y="176"/>
+                  <a:pt x="82" y="177"/>
                   <a:pt x="82" y="189"/>
                 </a:cubicBezTo>
                 <a:cubicBezTo>
                   <a:pt x="82" y="201"/>
-                  <a:pt x="83" y="213"/>
+                  <a:pt x="83" y="214"/>
                   <a:pt x="86" y="226"/>
                 </a:cubicBezTo>
                 <a:cubicBezTo>
@@ -3977,13 +3977,13 @@
                 </a:cubicBezTo>
                 <a:cubicBezTo>
                   <a:pt x="101" y="273"/>
-                  <a:pt x="107" y="283"/>
+                  <a:pt x="107" y="284"/>
                   <a:pt x="114" y="294"/>
                 </a:cubicBezTo>
                 <a:cubicBezTo>
                   <a:pt x="121" y="304"/>
                   <a:pt x="129" y="314"/>
-                  <a:pt x="137" y="322"/>
+                  <a:pt x="137" y="323"/>
                 </a:cubicBezTo>
                 <a:cubicBezTo>
                   <a:pt x="146" y="331"/>
@@ -3997,21 +3997,21 @@
                 </a:cubicBezTo>
                 <a:cubicBezTo>
                   <a:pt x="210" y="368"/>
-                  <a:pt x="222" y="372"/>
-                  <a:pt x="234" y="374"/>
-                </a:cubicBezTo>
-                <a:cubicBezTo>
-                  <a:pt x="246" y="376"/>
-                  <a:pt x="259" y="378"/>
-                  <a:pt x="271" y="378"/>
-                </a:cubicBezTo>
-                <a:cubicBezTo>
-                  <a:pt x="283" y="378"/>
-                  <a:pt x="296" y="376"/>
-                  <a:pt x="308" y="374"/>
-                </a:cubicBezTo>
-                <a:cubicBezTo>
-                  <a:pt x="320" y="372"/>
+                  <a:pt x="222" y="373"/>
+                  <a:pt x="234" y="375"/>
+                </a:cubicBezTo>
+                <a:cubicBezTo>
+                  <a:pt x="246" y="378"/>
+                  <a:pt x="259" y="379"/>
+                  <a:pt x="271" y="379"/>
+                </a:cubicBezTo>
+                <a:cubicBezTo>
+                  <a:pt x="283" y="379"/>
+                  <a:pt x="296" y="378"/>
+                  <a:pt x="308" y="375"/>
+                </a:cubicBezTo>
+                <a:cubicBezTo>
+                  <a:pt x="320" y="373"/>
                   <a:pt x="332" y="368"/>
                   <a:pt x="343" y="363"/>
                 </a:cubicBezTo>
@@ -4023,7 +4023,7 @@
                 <a:cubicBezTo>
                   <a:pt x="386" y="339"/>
                   <a:pt x="396" y="331"/>
-                  <a:pt x="404" y="322"/>
+                  <a:pt x="404" y="323"/>
                 </a:cubicBezTo>
                 <a:cubicBezTo>
                   <a:pt x="413" y="314"/>
@@ -4031,7 +4031,7 @@
                   <a:pt x="428" y="294"/>
                 </a:cubicBezTo>
                 <a:cubicBezTo>
-                  <a:pt x="435" y="283"/>
+                  <a:pt x="435" y="284"/>
                   <a:pt x="441" y="273"/>
                   <a:pt x="445" y="261"/>
                 </a:cubicBezTo>
@@ -4041,12 +4041,12 @@
                   <a:pt x="456" y="226"/>
                 </a:cubicBezTo>
                 <a:cubicBezTo>
-                  <a:pt x="459" y="213"/>
+                  <a:pt x="459" y="214"/>
                   <a:pt x="460" y="201"/>
                   <a:pt x="460" y="189"/>
                 </a:cubicBezTo>
                 <a:cubicBezTo>
-                  <a:pt x="460" y="176"/>
+                  <a:pt x="460" y="177"/>
                   <a:pt x="459" y="164"/>
                   <a:pt x="456" y="152"/>
                 </a:cubicBezTo>
@@ -4063,7 +4063,7 @@
                 <a:cubicBezTo>
                   <a:pt x="421" y="74"/>
                   <a:pt x="413" y="64"/>
-                  <a:pt x="404" y="55"/>
+                  <a:pt x="404" y="56"/>
                 </a:cubicBezTo>
                 <a:cubicBezTo>
                   <a:pt x="396" y="47"/>
@@ -4073,7 +4073,7 @@
                 <a:cubicBezTo>
                   <a:pt x="366" y="25"/>
                   <a:pt x="355" y="19"/>
-                  <a:pt x="343" y="14"/>
+                  <a:pt x="343" y="15"/>
                 </a:cubicBezTo>
                 <a:cubicBezTo>
                   <a:pt x="332" y="10"/>
@@ -4118,7 +4118,7 @@
         </p:nvSpPr>
         <p:spPr>
           <a:xfrm>
-            <a:off x="439920" y="1063080"/>
+            <a:off x="439920" y="910440"/>
             <a:ext cx="6681960" cy="399600"/>
           </a:xfrm>
           <a:prstGeom prst="rect">
@@ -4161,7 +4161,7 @@
         </p:nvSpPr>
         <p:spPr>
           <a:xfrm>
-            <a:off x="893880" y="2402640"/>
+            <a:off x="893880" y="2250000"/>
             <a:ext cx="2019960" cy="153000"/>
           </a:xfrm>
           <a:prstGeom prst="rect">
@@ -4204,7 +4204,7 @@
         </p:nvSpPr>
         <p:spPr>
           <a:xfrm>
-            <a:off x="912960" y="2631960"/>
+            <a:off x="912960" y="2479320"/>
             <a:ext cx="1975680" cy="128520"/>
           </a:xfrm>
           <a:prstGeom prst="rect">
@@ -4247,7 +4247,7 @@
         </p:nvSpPr>
         <p:spPr>
           <a:xfrm>
-            <a:off x="998640" y="2793600"/>
+            <a:off x="998640" y="2641320"/>
             <a:ext cx="1753200" cy="128520"/>
           </a:xfrm>
           <a:prstGeom prst="rect">
@@ -4290,7 +4290,7 @@
         </p:nvSpPr>
         <p:spPr>
           <a:xfrm>
-            <a:off x="3376440" y="1809720"/>
+            <a:off x="3376440" y="1647720"/>
             <a:ext cx="2581560" cy="1357560"/>
           </a:xfrm>
           <a:custGeom>
@@ -4323,7 +4323,7 @@
                 </a:cubicBezTo>
                 <a:cubicBezTo>
                   <a:pt x="62" y="103"/>
-                  <a:pt x="75" y="89"/>
+                  <a:pt x="75" y="90"/>
                   <a:pt x="89" y="77"/>
                 </a:cubicBezTo>
                 <a:cubicBezTo>
@@ -4333,7 +4333,7 @@
                 </a:cubicBezTo>
                 <a:cubicBezTo>
                   <a:pt x="152" y="35"/>
-                  <a:pt x="169" y="26"/>
+                  <a:pt x="169" y="27"/>
                   <a:pt x="188" y="20"/>
                 </a:cubicBezTo>
                 <a:cubicBezTo>
@@ -4360,7 +4360,7 @@
                   <a:pt x="6983" y="20"/>
                 </a:cubicBezTo>
                 <a:cubicBezTo>
-                  <a:pt x="7002" y="26"/>
+                  <a:pt x="7002" y="27"/>
                   <a:pt x="7019" y="35"/>
                   <a:pt x="7036" y="44"/>
                 </a:cubicBezTo>
@@ -4370,7 +4370,7 @@
                   <a:pt x="7082" y="77"/>
                 </a:cubicBezTo>
                 <a:cubicBezTo>
-                  <a:pt x="7096" y="89"/>
+                  <a:pt x="7096" y="90"/>
                   <a:pt x="7109" y="103"/>
                   <a:pt x="7120" y="117"/>
                 </a:cubicBezTo>
@@ -4394,7 +4394,7 @@
                 </a:lnTo>
                 <a:cubicBezTo>
                   <a:pt x="7171" y="3487"/>
-                  <a:pt x="7169" y="3506"/>
+                  <a:pt x="7169" y="3507"/>
                   <a:pt x="7165" y="3526"/>
                 </a:cubicBezTo>
                 <a:cubicBezTo>
@@ -4423,7 +4423,7 @@
                   <a:pt x="6983" y="3748"/>
                 </a:cubicBezTo>
                 <a:cubicBezTo>
-                  <a:pt x="6965" y="3755"/>
+                  <a:pt x="6965" y="3756"/>
                   <a:pt x="6946" y="3761"/>
                   <a:pt x="6926" y="3765"/>
                 </a:cubicBezTo>
@@ -4442,7 +4442,7 @@
                 </a:cubicBezTo>
                 <a:cubicBezTo>
                   <a:pt x="225" y="3761"/>
-                  <a:pt x="206" y="3755"/>
+                  <a:pt x="206" y="3756"/>
                   <a:pt x="188" y="3748"/>
                 </a:cubicBezTo>
                 <a:cubicBezTo>
@@ -4471,7 +4471,7 @@
                   <a:pt x="6" y="3526"/>
                 </a:cubicBezTo>
                 <a:cubicBezTo>
-                  <a:pt x="2" y="3506"/>
+                  <a:pt x="2" y="3507"/>
                   <a:pt x="0" y="3487"/>
                   <a:pt x="0" y="3467"/>
                 </a:cubicBezTo>
@@ -4508,7 +4508,7 @@
         </p:nvSpPr>
         <p:spPr>
           <a:xfrm>
-            <a:off x="3371760" y="1790640"/>
+            <a:off x="3371760" y="1628640"/>
             <a:ext cx="2590920" cy="1381320"/>
           </a:xfrm>
           <a:custGeom>
@@ -4566,7 +4566,7 @@
         </p:nvSpPr>
         <p:spPr>
           <a:xfrm>
-            <a:off x="3371760" y="1790640"/>
+            <a:off x="3371760" y="1628640"/>
             <a:ext cx="2590920" cy="1381320"/>
           </a:xfrm>
           <a:custGeom>
@@ -4624,7 +4624,7 @@
         </p:nvSpPr>
         <p:spPr>
           <a:xfrm>
-            <a:off x="3371760" y="1790640"/>
+            <a:off x="3371760" y="1628640"/>
             <a:ext cx="2590920" cy="1381320"/>
           </a:xfrm>
           <a:custGeom>
@@ -4682,7 +4682,7 @@
         </p:nvSpPr>
         <p:spPr>
           <a:xfrm>
-            <a:off x="3371760" y="1790640"/>
+            <a:off x="3371760" y="1628640"/>
             <a:ext cx="2590920" cy="1381320"/>
           </a:xfrm>
           <a:custGeom>
@@ -4740,7 +4740,7 @@
         </p:nvSpPr>
         <p:spPr>
           <a:xfrm>
-            <a:off x="3562560" y="1971720"/>
+            <a:off x="3562560" y="1809720"/>
             <a:ext cx="272160" cy="281880"/>
           </a:xfrm>
           <a:custGeom>
@@ -4751,40 +4751,40 @@
             <a:pathLst>
               <a:path w="756" h="783">
                 <a:moveTo>
-                  <a:pt x="162" y="216"/>
+                  <a:pt x="162" y="217"/>
                 </a:moveTo>
                 <a:cubicBezTo>
-                  <a:pt x="147" y="216"/>
-                  <a:pt x="134" y="213"/>
-                  <a:pt x="121" y="207"/>
-                </a:cubicBezTo>
-                <a:cubicBezTo>
-                  <a:pt x="107" y="202"/>
-                  <a:pt x="96" y="194"/>
-                  <a:pt x="86" y="184"/>
-                </a:cubicBezTo>
-                <a:cubicBezTo>
-                  <a:pt x="75" y="174"/>
-                  <a:pt x="68" y="162"/>
-                  <a:pt x="62" y="149"/>
-                </a:cubicBezTo>
-                <a:cubicBezTo>
-                  <a:pt x="57" y="136"/>
-                  <a:pt x="54" y="122"/>
-                  <a:pt x="54" y="108"/>
-                </a:cubicBezTo>
-                <a:cubicBezTo>
-                  <a:pt x="54" y="93"/>
-                  <a:pt x="57" y="80"/>
-                  <a:pt x="62" y="67"/>
+                  <a:pt x="147" y="217"/>
+                  <a:pt x="134" y="214"/>
+                  <a:pt x="121" y="209"/>
+                </a:cubicBezTo>
+                <a:cubicBezTo>
+                  <a:pt x="107" y="203"/>
+                  <a:pt x="96" y="195"/>
+                  <a:pt x="86" y="185"/>
+                </a:cubicBezTo>
+                <a:cubicBezTo>
+                  <a:pt x="75" y="175"/>
+                  <a:pt x="68" y="164"/>
+                  <a:pt x="62" y="150"/>
+                </a:cubicBezTo>
+                <a:cubicBezTo>
+                  <a:pt x="57" y="137"/>
+                  <a:pt x="54" y="123"/>
+                  <a:pt x="54" y="109"/>
+                </a:cubicBezTo>
+                <a:cubicBezTo>
+                  <a:pt x="54" y="95"/>
+                  <a:pt x="57" y="81"/>
+                  <a:pt x="62" y="68"/>
                 </a:cubicBezTo>
                 <a:cubicBezTo>
                   <a:pt x="68" y="53"/>
                   <a:pt x="75" y="42"/>
-                  <a:pt x="86" y="31"/>
-                </a:cubicBezTo>
-                <a:cubicBezTo>
-                  <a:pt x="96" y="21"/>
+                  <a:pt x="86" y="32"/>
+                </a:cubicBezTo>
+                <a:cubicBezTo>
+                  <a:pt x="96" y="22"/>
                   <a:pt x="107" y="14"/>
                   <a:pt x="121" y="8"/>
                 </a:cubicBezTo>
@@ -4800,38 +4800,38 @@
                 </a:cubicBezTo>
                 <a:cubicBezTo>
                   <a:pt x="216" y="14"/>
-                  <a:pt x="228" y="21"/>
-                  <a:pt x="238" y="31"/>
+                  <a:pt x="228" y="22"/>
+                  <a:pt x="238" y="32"/>
                 </a:cubicBezTo>
                 <a:cubicBezTo>
                   <a:pt x="248" y="42"/>
                   <a:pt x="256" y="53"/>
-                  <a:pt x="261" y="67"/>
-                </a:cubicBezTo>
-                <a:cubicBezTo>
-                  <a:pt x="267" y="80"/>
-                  <a:pt x="270" y="93"/>
-                  <a:pt x="270" y="108"/>
-                </a:cubicBezTo>
-                <a:cubicBezTo>
-                  <a:pt x="270" y="122"/>
-                  <a:pt x="267" y="136"/>
-                  <a:pt x="261" y="149"/>
-                </a:cubicBezTo>
-                <a:cubicBezTo>
-                  <a:pt x="256" y="162"/>
-                  <a:pt x="248" y="174"/>
-                  <a:pt x="238" y="184"/>
-                </a:cubicBezTo>
-                <a:cubicBezTo>
-                  <a:pt x="228" y="194"/>
-                  <a:pt x="216" y="202"/>
-                  <a:pt x="203" y="207"/>
-                </a:cubicBezTo>
-                <a:cubicBezTo>
-                  <a:pt x="190" y="213"/>
-                  <a:pt x="176" y="216"/>
-                  <a:pt x="162" y="216"/>
+                  <a:pt x="261" y="68"/>
+                </a:cubicBezTo>
+                <a:cubicBezTo>
+                  <a:pt x="267" y="81"/>
+                  <a:pt x="270" y="95"/>
+                  <a:pt x="270" y="109"/>
+                </a:cubicBezTo>
+                <a:cubicBezTo>
+                  <a:pt x="270" y="123"/>
+                  <a:pt x="267" y="137"/>
+                  <a:pt x="261" y="150"/>
+                </a:cubicBezTo>
+                <a:cubicBezTo>
+                  <a:pt x="256" y="164"/>
+                  <a:pt x="248" y="175"/>
+                  <a:pt x="238" y="185"/>
+                </a:cubicBezTo>
+                <a:cubicBezTo>
+                  <a:pt x="228" y="195"/>
+                  <a:pt x="216" y="203"/>
+                  <a:pt x="203" y="209"/>
+                </a:cubicBezTo>
+                <a:cubicBezTo>
+                  <a:pt x="190" y="214"/>
+                  <a:pt x="176" y="217"/>
+                  <a:pt x="162" y="217"/>
                 </a:cubicBezTo>
                 <a:moveTo>
                   <a:pt x="162" y="54"/>
@@ -4839,77 +4839,77 @@
                 <a:cubicBezTo>
                   <a:pt x="155" y="54"/>
                   <a:pt x="148" y="55"/>
-                  <a:pt x="141" y="58"/>
-                </a:cubicBezTo>
-                <a:cubicBezTo>
-                  <a:pt x="135" y="61"/>
-                  <a:pt x="129" y="65"/>
-                  <a:pt x="124" y="70"/>
-                </a:cubicBezTo>
-                <a:cubicBezTo>
-                  <a:pt x="119" y="75"/>
-                  <a:pt x="115" y="81"/>
-                  <a:pt x="112" y="87"/>
-                </a:cubicBezTo>
-                <a:cubicBezTo>
-                  <a:pt x="109" y="94"/>
-                  <a:pt x="108" y="101"/>
-                  <a:pt x="108" y="108"/>
-                </a:cubicBezTo>
-                <a:cubicBezTo>
-                  <a:pt x="108" y="115"/>
-                  <a:pt x="109" y="122"/>
-                  <a:pt x="112" y="128"/>
-                </a:cubicBezTo>
-                <a:cubicBezTo>
-                  <a:pt x="115" y="135"/>
-                  <a:pt x="119" y="141"/>
-                  <a:pt x="124" y="146"/>
-                </a:cubicBezTo>
-                <a:cubicBezTo>
-                  <a:pt x="129" y="151"/>
-                  <a:pt x="135" y="155"/>
-                  <a:pt x="141" y="158"/>
-                </a:cubicBezTo>
-                <a:cubicBezTo>
-                  <a:pt x="148" y="160"/>
-                  <a:pt x="155" y="162"/>
-                  <a:pt x="162" y="162"/>
-                </a:cubicBezTo>
-                <a:cubicBezTo>
-                  <a:pt x="169" y="162"/>
-                  <a:pt x="176" y="160"/>
-                  <a:pt x="182" y="158"/>
-                </a:cubicBezTo>
-                <a:cubicBezTo>
-                  <a:pt x="189" y="155"/>
-                  <a:pt x="195" y="151"/>
-                  <a:pt x="200" y="146"/>
-                </a:cubicBezTo>
-                <a:cubicBezTo>
-                  <a:pt x="205" y="141"/>
-                  <a:pt x="209" y="135"/>
-                  <a:pt x="212" y="128"/>
-                </a:cubicBezTo>
-                <a:cubicBezTo>
-                  <a:pt x="214" y="122"/>
-                  <a:pt x="216" y="115"/>
-                  <a:pt x="216" y="108"/>
-                </a:cubicBezTo>
-                <a:cubicBezTo>
-                  <a:pt x="216" y="101"/>
-                  <a:pt x="214" y="94"/>
-                  <a:pt x="212" y="87"/>
-                </a:cubicBezTo>
-                <a:cubicBezTo>
-                  <a:pt x="209" y="81"/>
-                  <a:pt x="205" y="75"/>
-                  <a:pt x="200" y="70"/>
-                </a:cubicBezTo>
-                <a:cubicBezTo>
-                  <a:pt x="195" y="65"/>
-                  <a:pt x="189" y="61"/>
-                  <a:pt x="182" y="58"/>
+                  <a:pt x="141" y="59"/>
+                </a:cubicBezTo>
+                <a:cubicBezTo>
+                  <a:pt x="135" y="62"/>
+                  <a:pt x="129" y="66"/>
+                  <a:pt x="124" y="71"/>
+                </a:cubicBezTo>
+                <a:cubicBezTo>
+                  <a:pt x="119" y="76"/>
+                  <a:pt x="115" y="82"/>
+                  <a:pt x="112" y="88"/>
+                </a:cubicBezTo>
+                <a:cubicBezTo>
+                  <a:pt x="109" y="95"/>
+                  <a:pt x="108" y="102"/>
+                  <a:pt x="108" y="109"/>
+                </a:cubicBezTo>
+                <a:cubicBezTo>
+                  <a:pt x="108" y="116"/>
+                  <a:pt x="109" y="123"/>
+                  <a:pt x="112" y="130"/>
+                </a:cubicBezTo>
+                <a:cubicBezTo>
+                  <a:pt x="115" y="136"/>
+                  <a:pt x="119" y="142"/>
+                  <a:pt x="124" y="147"/>
+                </a:cubicBezTo>
+                <a:cubicBezTo>
+                  <a:pt x="129" y="152"/>
+                  <a:pt x="135" y="156"/>
+                  <a:pt x="141" y="159"/>
+                </a:cubicBezTo>
+                <a:cubicBezTo>
+                  <a:pt x="148" y="162"/>
+                  <a:pt x="155" y="163"/>
+                  <a:pt x="162" y="163"/>
+                </a:cubicBezTo>
+                <a:cubicBezTo>
+                  <a:pt x="169" y="163"/>
+                  <a:pt x="176" y="162"/>
+                  <a:pt x="182" y="159"/>
+                </a:cubicBezTo>
+                <a:cubicBezTo>
+                  <a:pt x="189" y="156"/>
+                  <a:pt x="195" y="152"/>
+                  <a:pt x="200" y="147"/>
+                </a:cubicBezTo>
+                <a:cubicBezTo>
+                  <a:pt x="205" y="142"/>
+                  <a:pt x="209" y="136"/>
+                  <a:pt x="212" y="130"/>
+                </a:cubicBezTo>
+                <a:cubicBezTo>
+                  <a:pt x="214" y="123"/>
+                  <a:pt x="216" y="116"/>
+                  <a:pt x="216" y="109"/>
+                </a:cubicBezTo>
+                <a:cubicBezTo>
+                  <a:pt x="216" y="102"/>
+                  <a:pt x="214" y="95"/>
+                  <a:pt x="212" y="88"/>
+                </a:cubicBezTo>
+                <a:cubicBezTo>
+                  <a:pt x="209" y="82"/>
+                  <a:pt x="205" y="76"/>
+                  <a:pt x="200" y="71"/>
+                </a:cubicBezTo>
+                <a:cubicBezTo>
+                  <a:pt x="195" y="66"/>
+                  <a:pt x="189" y="62"/>
+                  <a:pt x="182" y="59"/>
                 </a:cubicBezTo>
                 <a:cubicBezTo>
                   <a:pt x="176" y="55"/>
@@ -4917,40 +4917,40 @@
                   <a:pt x="162" y="54"/>
                 </a:cubicBezTo>
                 <a:moveTo>
-                  <a:pt x="594" y="216"/>
+                  <a:pt x="594" y="217"/>
                 </a:moveTo>
                 <a:cubicBezTo>
-                  <a:pt x="580" y="216"/>
-                  <a:pt x="566" y="213"/>
-                  <a:pt x="553" y="207"/>
-                </a:cubicBezTo>
-                <a:cubicBezTo>
-                  <a:pt x="540" y="202"/>
-                  <a:pt x="528" y="194"/>
-                  <a:pt x="518" y="184"/>
-                </a:cubicBezTo>
-                <a:cubicBezTo>
-                  <a:pt x="508" y="174"/>
-                  <a:pt x="500" y="162"/>
-                  <a:pt x="495" y="149"/>
-                </a:cubicBezTo>
-                <a:cubicBezTo>
-                  <a:pt x="489" y="136"/>
-                  <a:pt x="487" y="122"/>
-                  <a:pt x="487" y="108"/>
-                </a:cubicBezTo>
-                <a:cubicBezTo>
-                  <a:pt x="487" y="93"/>
-                  <a:pt x="489" y="80"/>
-                  <a:pt x="495" y="67"/>
+                  <a:pt x="580" y="217"/>
+                  <a:pt x="566" y="214"/>
+                  <a:pt x="553" y="209"/>
+                </a:cubicBezTo>
+                <a:cubicBezTo>
+                  <a:pt x="540" y="203"/>
+                  <a:pt x="528" y="195"/>
+                  <a:pt x="518" y="185"/>
+                </a:cubicBezTo>
+                <a:cubicBezTo>
+                  <a:pt x="508" y="175"/>
+                  <a:pt x="500" y="164"/>
+                  <a:pt x="495" y="150"/>
+                </a:cubicBezTo>
+                <a:cubicBezTo>
+                  <a:pt x="489" y="137"/>
+                  <a:pt x="487" y="123"/>
+                  <a:pt x="487" y="109"/>
+                </a:cubicBezTo>
+                <a:cubicBezTo>
+                  <a:pt x="487" y="95"/>
+                  <a:pt x="489" y="81"/>
+                  <a:pt x="495" y="68"/>
                 </a:cubicBezTo>
                 <a:cubicBezTo>
                   <a:pt x="500" y="53"/>
                   <a:pt x="508" y="42"/>
-                  <a:pt x="518" y="31"/>
-                </a:cubicBezTo>
-                <a:cubicBezTo>
-                  <a:pt x="528" y="21"/>
+                  <a:pt x="518" y="32"/>
+                </a:cubicBezTo>
+                <a:cubicBezTo>
+                  <a:pt x="528" y="22"/>
                   <a:pt x="540" y="14"/>
                   <a:pt x="553" y="8"/>
                 </a:cubicBezTo>
@@ -4966,38 +4966,38 @@
                 </a:cubicBezTo>
                 <a:cubicBezTo>
                   <a:pt x="649" y="14"/>
-                  <a:pt x="661" y="21"/>
-                  <a:pt x="671" y="31"/>
+                  <a:pt x="661" y="22"/>
+                  <a:pt x="671" y="32"/>
                 </a:cubicBezTo>
                 <a:cubicBezTo>
                   <a:pt x="681" y="42"/>
                   <a:pt x="689" y="53"/>
-                  <a:pt x="694" y="67"/>
-                </a:cubicBezTo>
-                <a:cubicBezTo>
-                  <a:pt x="700" y="80"/>
-                  <a:pt x="702" y="93"/>
-                  <a:pt x="702" y="108"/>
-                </a:cubicBezTo>
-                <a:cubicBezTo>
-                  <a:pt x="702" y="122"/>
-                  <a:pt x="700" y="136"/>
-                  <a:pt x="694" y="149"/>
-                </a:cubicBezTo>
-                <a:cubicBezTo>
-                  <a:pt x="689" y="162"/>
-                  <a:pt x="681" y="174"/>
-                  <a:pt x="671" y="184"/>
-                </a:cubicBezTo>
-                <a:cubicBezTo>
-                  <a:pt x="661" y="194"/>
-                  <a:pt x="649" y="202"/>
-                  <a:pt x="636" y="207"/>
-                </a:cubicBezTo>
-                <a:cubicBezTo>
-                  <a:pt x="622" y="213"/>
-                  <a:pt x="609" y="216"/>
-                  <a:pt x="594" y="216"/>
+                  <a:pt x="694" y="68"/>
+                </a:cubicBezTo>
+                <a:cubicBezTo>
+                  <a:pt x="700" y="81"/>
+                  <a:pt x="702" y="95"/>
+                  <a:pt x="702" y="109"/>
+                </a:cubicBezTo>
+                <a:cubicBezTo>
+                  <a:pt x="702" y="123"/>
+                  <a:pt x="700" y="137"/>
+                  <a:pt x="694" y="150"/>
+                </a:cubicBezTo>
+                <a:cubicBezTo>
+                  <a:pt x="689" y="164"/>
+                  <a:pt x="681" y="175"/>
+                  <a:pt x="671" y="185"/>
+                </a:cubicBezTo>
+                <a:cubicBezTo>
+                  <a:pt x="661" y="195"/>
+                  <a:pt x="649" y="203"/>
+                  <a:pt x="636" y="209"/>
+                </a:cubicBezTo>
+                <a:cubicBezTo>
+                  <a:pt x="622" y="214"/>
+                  <a:pt x="609" y="217"/>
+                  <a:pt x="594" y="217"/>
                 </a:cubicBezTo>
                 <a:moveTo>
                   <a:pt x="594" y="54"/>
@@ -5005,77 +5005,77 @@
                 <a:cubicBezTo>
                   <a:pt x="587" y="54"/>
                   <a:pt x="580" y="55"/>
-                  <a:pt x="574" y="58"/>
-                </a:cubicBezTo>
-                <a:cubicBezTo>
-                  <a:pt x="567" y="61"/>
-                  <a:pt x="561" y="65"/>
-                  <a:pt x="556" y="70"/>
-                </a:cubicBezTo>
-                <a:cubicBezTo>
-                  <a:pt x="551" y="75"/>
-                  <a:pt x="547" y="81"/>
-                  <a:pt x="545" y="87"/>
-                </a:cubicBezTo>
-                <a:cubicBezTo>
-                  <a:pt x="542" y="94"/>
-                  <a:pt x="540" y="101"/>
-                  <a:pt x="540" y="108"/>
-                </a:cubicBezTo>
-                <a:cubicBezTo>
-                  <a:pt x="540" y="115"/>
-                  <a:pt x="542" y="122"/>
-                  <a:pt x="545" y="128"/>
-                </a:cubicBezTo>
-                <a:cubicBezTo>
-                  <a:pt x="547" y="135"/>
-                  <a:pt x="551" y="141"/>
-                  <a:pt x="556" y="146"/>
-                </a:cubicBezTo>
-                <a:cubicBezTo>
-                  <a:pt x="561" y="151"/>
-                  <a:pt x="567" y="155"/>
-                  <a:pt x="574" y="158"/>
-                </a:cubicBezTo>
-                <a:cubicBezTo>
-                  <a:pt x="580" y="160"/>
-                  <a:pt x="587" y="162"/>
-                  <a:pt x="594" y="162"/>
-                </a:cubicBezTo>
-                <a:cubicBezTo>
-                  <a:pt x="602" y="162"/>
-                  <a:pt x="608" y="160"/>
-                  <a:pt x="615" y="158"/>
-                </a:cubicBezTo>
-                <a:cubicBezTo>
-                  <a:pt x="622" y="155"/>
-                  <a:pt x="627" y="151"/>
-                  <a:pt x="633" y="146"/>
-                </a:cubicBezTo>
-                <a:cubicBezTo>
-                  <a:pt x="638" y="141"/>
-                  <a:pt x="642" y="135"/>
-                  <a:pt x="644" y="128"/>
-                </a:cubicBezTo>
-                <a:cubicBezTo>
-                  <a:pt x="647" y="122"/>
-                  <a:pt x="648" y="115"/>
-                  <a:pt x="648" y="108"/>
-                </a:cubicBezTo>
-                <a:cubicBezTo>
-                  <a:pt x="648" y="101"/>
-                  <a:pt x="647" y="94"/>
-                  <a:pt x="644" y="87"/>
-                </a:cubicBezTo>
-                <a:cubicBezTo>
-                  <a:pt x="642" y="81"/>
-                  <a:pt x="638" y="75"/>
-                  <a:pt x="633" y="70"/>
-                </a:cubicBezTo>
-                <a:cubicBezTo>
-                  <a:pt x="627" y="65"/>
-                  <a:pt x="622" y="61"/>
-                  <a:pt x="615" y="58"/>
+                  <a:pt x="574" y="59"/>
+                </a:cubicBezTo>
+                <a:cubicBezTo>
+                  <a:pt x="567" y="62"/>
+                  <a:pt x="561" y="66"/>
+                  <a:pt x="556" y="71"/>
+                </a:cubicBezTo>
+                <a:cubicBezTo>
+                  <a:pt x="551" y="76"/>
+                  <a:pt x="547" y="82"/>
+                  <a:pt x="545" y="88"/>
+                </a:cubicBezTo>
+                <a:cubicBezTo>
+                  <a:pt x="542" y="95"/>
+                  <a:pt x="540" y="102"/>
+                  <a:pt x="540" y="109"/>
+                </a:cubicBezTo>
+                <a:cubicBezTo>
+                  <a:pt x="540" y="116"/>
+                  <a:pt x="542" y="123"/>
+                  <a:pt x="545" y="130"/>
+                </a:cubicBezTo>
+                <a:cubicBezTo>
+                  <a:pt x="547" y="136"/>
+                  <a:pt x="551" y="142"/>
+                  <a:pt x="556" y="147"/>
+                </a:cubicBezTo>
+                <a:cubicBezTo>
+                  <a:pt x="561" y="152"/>
+                  <a:pt x="567" y="156"/>
+                  <a:pt x="574" y="159"/>
+                </a:cubicBezTo>
+                <a:cubicBezTo>
+                  <a:pt x="580" y="162"/>
+                  <a:pt x="587" y="163"/>
+                  <a:pt x="594" y="163"/>
+                </a:cubicBezTo>
+                <a:cubicBezTo>
+                  <a:pt x="602" y="163"/>
+                  <a:pt x="608" y="162"/>
+                  <a:pt x="615" y="159"/>
+                </a:cubicBezTo>
+                <a:cubicBezTo>
+                  <a:pt x="622" y="156"/>
+                  <a:pt x="627" y="152"/>
+                  <a:pt x="633" y="147"/>
+                </a:cubicBezTo>
+                <a:cubicBezTo>
+                  <a:pt x="638" y="142"/>
+                  <a:pt x="642" y="136"/>
+                  <a:pt x="644" y="130"/>
+                </a:cubicBezTo>
+                <a:cubicBezTo>
+                  <a:pt x="647" y="123"/>
+                  <a:pt x="648" y="116"/>
+                  <a:pt x="648" y="109"/>
+                </a:cubicBezTo>
+                <a:cubicBezTo>
+                  <a:pt x="648" y="102"/>
+                  <a:pt x="647" y="95"/>
+                  <a:pt x="644" y="88"/>
+                </a:cubicBezTo>
+                <a:cubicBezTo>
+                  <a:pt x="642" y="82"/>
+                  <a:pt x="638" y="76"/>
+                  <a:pt x="633" y="71"/>
+                </a:cubicBezTo>
+                <a:cubicBezTo>
+                  <a:pt x="627" y="66"/>
+                  <a:pt x="622" y="62"/>
+                  <a:pt x="615" y="59"/>
                 </a:cubicBezTo>
                 <a:cubicBezTo>
                   <a:pt x="608" y="55"/>
@@ -5094,25 +5094,25 @@
                   <a:pt x="520" y="779"/>
                 </a:cubicBezTo>
                 <a:cubicBezTo>
-                  <a:pt x="513" y="776"/>
-                  <a:pt x="507" y="772"/>
-                  <a:pt x="502" y="767"/>
-                </a:cubicBezTo>
-                <a:cubicBezTo>
-                  <a:pt x="497" y="762"/>
-                  <a:pt x="493" y="756"/>
+                  <a:pt x="513" y="777"/>
+                  <a:pt x="507" y="773"/>
+                  <a:pt x="502" y="768"/>
+                </a:cubicBezTo>
+                <a:cubicBezTo>
+                  <a:pt x="497" y="763"/>
+                  <a:pt x="493" y="757"/>
                   <a:pt x="491" y="750"/>
                 </a:cubicBezTo>
                 <a:cubicBezTo>
                   <a:pt x="488" y="743"/>
-                  <a:pt x="487" y="736"/>
+                  <a:pt x="487" y="737"/>
                   <a:pt x="487" y="729"/>
                 </a:cubicBezTo>
                 <a:lnTo>
-                  <a:pt x="487" y="540"/>
-                </a:lnTo>
-                <a:lnTo>
-                  <a:pt x="540" y="540"/>
+                  <a:pt x="487" y="541"/>
+                </a:lnTo>
+                <a:lnTo>
+                  <a:pt x="540" y="541"/>
                 </a:lnTo>
                 <a:lnTo>
                   <a:pt x="540" y="729"/>
@@ -5121,51 +5121,51 @@
                   <a:pt x="648" y="729"/>
                 </a:lnTo>
                 <a:lnTo>
-                  <a:pt x="648" y="486"/>
-                </a:lnTo>
-                <a:lnTo>
-                  <a:pt x="702" y="486"/>
-                </a:lnTo>
-                <a:lnTo>
-                  <a:pt x="702" y="324"/>
-                </a:lnTo>
-                <a:cubicBezTo>
-                  <a:pt x="702" y="316"/>
-                  <a:pt x="700" y="310"/>
-                  <a:pt x="694" y="305"/>
-                </a:cubicBezTo>
-                <a:cubicBezTo>
-                  <a:pt x="689" y="299"/>
-                  <a:pt x="683" y="297"/>
-                  <a:pt x="675" y="297"/>
-                </a:cubicBezTo>
-                <a:lnTo>
-                  <a:pt x="502" y="297"/>
-                </a:lnTo>
-                <a:lnTo>
-                  <a:pt x="379" y="513"/>
-                </a:lnTo>
-                <a:lnTo>
-                  <a:pt x="254" y="297"/>
-                </a:lnTo>
-                <a:lnTo>
-                  <a:pt x="81" y="297"/>
-                </a:lnTo>
-                <a:cubicBezTo>
-                  <a:pt x="73" y="297"/>
-                  <a:pt x="67" y="299"/>
-                  <a:pt x="62" y="305"/>
-                </a:cubicBezTo>
-                <a:cubicBezTo>
-                  <a:pt x="57" y="310"/>
-                  <a:pt x="54" y="316"/>
-                  <a:pt x="54" y="324"/>
-                </a:cubicBezTo>
-                <a:lnTo>
-                  <a:pt x="54" y="486"/>
-                </a:lnTo>
-                <a:lnTo>
-                  <a:pt x="108" y="486"/>
+                  <a:pt x="648" y="487"/>
+                </a:lnTo>
+                <a:lnTo>
+                  <a:pt x="702" y="487"/>
+                </a:lnTo>
+                <a:lnTo>
+                  <a:pt x="702" y="325"/>
+                </a:lnTo>
+                <a:cubicBezTo>
+                  <a:pt x="702" y="317"/>
+                  <a:pt x="700" y="311"/>
+                  <a:pt x="694" y="306"/>
+                </a:cubicBezTo>
+                <a:cubicBezTo>
+                  <a:pt x="689" y="300"/>
+                  <a:pt x="683" y="298"/>
+                  <a:pt x="675" y="298"/>
+                </a:cubicBezTo>
+                <a:lnTo>
+                  <a:pt x="502" y="298"/>
+                </a:lnTo>
+                <a:lnTo>
+                  <a:pt x="379" y="514"/>
+                </a:lnTo>
+                <a:lnTo>
+                  <a:pt x="254" y="298"/>
+                </a:lnTo>
+                <a:lnTo>
+                  <a:pt x="81" y="298"/>
+                </a:lnTo>
+                <a:cubicBezTo>
+                  <a:pt x="73" y="298"/>
+                  <a:pt x="67" y="300"/>
+                  <a:pt x="62" y="306"/>
+                </a:cubicBezTo>
+                <a:cubicBezTo>
+                  <a:pt x="57" y="311"/>
+                  <a:pt x="54" y="317"/>
+                  <a:pt x="54" y="325"/>
+                </a:cubicBezTo>
+                <a:lnTo>
+                  <a:pt x="54" y="487"/>
+                </a:lnTo>
+                <a:lnTo>
+                  <a:pt x="108" y="487"/>
                 </a:lnTo>
                 <a:lnTo>
                   <a:pt x="108" y="729"/>
@@ -5174,27 +5174,27 @@
                   <a:pt x="216" y="729"/>
                 </a:lnTo>
                 <a:lnTo>
-                  <a:pt x="216" y="540"/>
-                </a:lnTo>
-                <a:lnTo>
-                  <a:pt x="270" y="540"/>
+                  <a:pt x="216" y="541"/>
+                </a:lnTo>
+                <a:lnTo>
+                  <a:pt x="270" y="541"/>
                 </a:lnTo>
                 <a:lnTo>
                   <a:pt x="270" y="729"/>
                 </a:lnTo>
                 <a:cubicBezTo>
-                  <a:pt x="270" y="736"/>
+                  <a:pt x="270" y="737"/>
                   <a:pt x="268" y="743"/>
                   <a:pt x="266" y="750"/>
                 </a:cubicBezTo>
                 <a:cubicBezTo>
-                  <a:pt x="263" y="756"/>
-                  <a:pt x="259" y="762"/>
-                  <a:pt x="254" y="767"/>
-                </a:cubicBezTo>
-                <a:cubicBezTo>
-                  <a:pt x="249" y="772"/>
-                  <a:pt x="243" y="776"/>
+                  <a:pt x="263" y="757"/>
+                  <a:pt x="259" y="763"/>
+                  <a:pt x="254" y="768"/>
+                </a:cubicBezTo>
+                <a:cubicBezTo>
+                  <a:pt x="249" y="773"/>
+                  <a:pt x="243" y="777"/>
                   <a:pt x="236" y="779"/>
                 </a:cubicBezTo>
                 <a:cubicBezTo>
@@ -5211,25 +5211,25 @@
                   <a:pt x="87" y="779"/>
                 </a:cubicBezTo>
                 <a:cubicBezTo>
-                  <a:pt x="81" y="776"/>
-                  <a:pt x="75" y="772"/>
-                  <a:pt x="70" y="767"/>
-                </a:cubicBezTo>
-                <a:cubicBezTo>
-                  <a:pt x="65" y="762"/>
-                  <a:pt x="61" y="756"/>
+                  <a:pt x="81" y="777"/>
+                  <a:pt x="75" y="773"/>
+                  <a:pt x="70" y="768"/>
+                </a:cubicBezTo>
+                <a:cubicBezTo>
+                  <a:pt x="65" y="763"/>
+                  <a:pt x="61" y="757"/>
                   <a:pt x="58" y="750"/>
                 </a:cubicBezTo>
                 <a:cubicBezTo>
                   <a:pt x="55" y="743"/>
-                  <a:pt x="54" y="736"/>
+                  <a:pt x="54" y="737"/>
                   <a:pt x="54" y="729"/>
                 </a:cubicBezTo>
                 <a:lnTo>
-                  <a:pt x="54" y="540"/>
-                </a:lnTo>
-                <a:cubicBezTo>
-                  <a:pt x="47" y="540"/>
+                  <a:pt x="54" y="541"/>
+                </a:lnTo>
+                <a:cubicBezTo>
+                  <a:pt x="47" y="541"/>
                   <a:pt x="40" y="539"/>
                   <a:pt x="33" y="536"/>
                 </a:cubicBezTo>
@@ -5244,71 +5244,71 @@
                   <a:pt x="4" y="507"/>
                 </a:cubicBezTo>
                 <a:cubicBezTo>
-                  <a:pt x="1" y="500"/>
+                  <a:pt x="1" y="501"/>
                   <a:pt x="0" y="494"/>
-                  <a:pt x="0" y="486"/>
-                </a:cubicBezTo>
-                <a:lnTo>
-                  <a:pt x="0" y="324"/>
-                </a:lnTo>
-                <a:cubicBezTo>
-                  <a:pt x="0" y="313"/>
-                  <a:pt x="2" y="303"/>
-                  <a:pt x="6" y="293"/>
-                </a:cubicBezTo>
-                <a:cubicBezTo>
-                  <a:pt x="10" y="283"/>
-                  <a:pt x="16" y="274"/>
-                  <a:pt x="24" y="266"/>
-                </a:cubicBezTo>
-                <a:cubicBezTo>
-                  <a:pt x="31" y="259"/>
-                  <a:pt x="40" y="253"/>
-                  <a:pt x="50" y="249"/>
-                </a:cubicBezTo>
-                <a:cubicBezTo>
-                  <a:pt x="60" y="245"/>
-                  <a:pt x="70" y="243"/>
-                  <a:pt x="81" y="243"/>
-                </a:cubicBezTo>
-                <a:lnTo>
-                  <a:pt x="285" y="243"/>
+                  <a:pt x="0" y="487"/>
+                </a:cubicBezTo>
+                <a:lnTo>
+                  <a:pt x="0" y="325"/>
+                </a:lnTo>
+                <a:cubicBezTo>
+                  <a:pt x="0" y="314"/>
+                  <a:pt x="2" y="304"/>
+                  <a:pt x="6" y="294"/>
+                </a:cubicBezTo>
+                <a:cubicBezTo>
+                  <a:pt x="10" y="284"/>
+                  <a:pt x="16" y="275"/>
+                  <a:pt x="24" y="268"/>
+                </a:cubicBezTo>
+                <a:cubicBezTo>
+                  <a:pt x="31" y="260"/>
+                  <a:pt x="40" y="254"/>
+                  <a:pt x="50" y="250"/>
+                </a:cubicBezTo>
+                <a:cubicBezTo>
+                  <a:pt x="60" y="246"/>
+                  <a:pt x="70" y="244"/>
+                  <a:pt x="81" y="244"/>
+                </a:cubicBezTo>
+                <a:lnTo>
+                  <a:pt x="285" y="244"/>
                 </a:lnTo>
                 <a:lnTo>
                   <a:pt x="379" y="406"/>
                 </a:lnTo>
                 <a:lnTo>
-                  <a:pt x="471" y="243"/>
-                </a:lnTo>
-                <a:lnTo>
-                  <a:pt x="675" y="243"/>
-                </a:lnTo>
-                <a:cubicBezTo>
-                  <a:pt x="686" y="243"/>
-                  <a:pt x="696" y="245"/>
-                  <a:pt x="706" y="249"/>
-                </a:cubicBezTo>
-                <a:cubicBezTo>
-                  <a:pt x="716" y="253"/>
-                  <a:pt x="725" y="259"/>
-                  <a:pt x="733" y="266"/>
-                </a:cubicBezTo>
-                <a:cubicBezTo>
-                  <a:pt x="740" y="274"/>
-                  <a:pt x="746" y="283"/>
-                  <a:pt x="750" y="293"/>
-                </a:cubicBezTo>
-                <a:cubicBezTo>
-                  <a:pt x="754" y="303"/>
-                  <a:pt x="756" y="313"/>
-                  <a:pt x="756" y="324"/>
-                </a:cubicBezTo>
-                <a:lnTo>
-                  <a:pt x="756" y="486"/>
+                  <a:pt x="471" y="244"/>
+                </a:lnTo>
+                <a:lnTo>
+                  <a:pt x="675" y="244"/>
+                </a:lnTo>
+                <a:cubicBezTo>
+                  <a:pt x="686" y="244"/>
+                  <a:pt x="696" y="246"/>
+                  <a:pt x="706" y="250"/>
+                </a:cubicBezTo>
+                <a:cubicBezTo>
+                  <a:pt x="716" y="254"/>
+                  <a:pt x="725" y="260"/>
+                  <a:pt x="733" y="268"/>
+                </a:cubicBezTo>
+                <a:cubicBezTo>
+                  <a:pt x="740" y="275"/>
+                  <a:pt x="746" y="284"/>
+                  <a:pt x="750" y="294"/>
+                </a:cubicBezTo>
+                <a:cubicBezTo>
+                  <a:pt x="754" y="304"/>
+                  <a:pt x="756" y="314"/>
+                  <a:pt x="756" y="325"/>
+                </a:cubicBezTo>
+                <a:lnTo>
+                  <a:pt x="756" y="487"/>
                 </a:lnTo>
                 <a:cubicBezTo>
                   <a:pt x="756" y="494"/>
-                  <a:pt x="755" y="500"/>
+                  <a:pt x="755" y="501"/>
                   <a:pt x="752" y="507"/>
                 </a:cubicBezTo>
                 <a:cubicBezTo>
@@ -5323,25 +5323,25 @@
                 </a:cubicBezTo>
                 <a:cubicBezTo>
                   <a:pt x="716" y="539"/>
-                  <a:pt x="709" y="540"/>
-                  <a:pt x="702" y="540"/>
+                  <a:pt x="709" y="541"/>
+                  <a:pt x="702" y="541"/>
                 </a:cubicBezTo>
                 <a:lnTo>
                   <a:pt x="702" y="729"/>
                 </a:lnTo>
                 <a:cubicBezTo>
-                  <a:pt x="702" y="736"/>
+                  <a:pt x="702" y="737"/>
                   <a:pt x="701" y="743"/>
                   <a:pt x="698" y="750"/>
                 </a:cubicBezTo>
                 <a:cubicBezTo>
-                  <a:pt x="695" y="756"/>
-                  <a:pt x="692" y="762"/>
-                  <a:pt x="687" y="767"/>
-                </a:cubicBezTo>
-                <a:cubicBezTo>
-                  <a:pt x="681" y="772"/>
-                  <a:pt x="676" y="776"/>
+                  <a:pt x="695" y="757"/>
+                  <a:pt x="692" y="763"/>
+                  <a:pt x="687" y="768"/>
+                </a:cubicBezTo>
+                <a:cubicBezTo>
+                  <a:pt x="681" y="773"/>
+                  <a:pt x="676" y="777"/>
                   <a:pt x="669" y="779"/>
                 </a:cubicBezTo>
                 <a:cubicBezTo>
@@ -5382,7 +5382,7 @@
         </p:nvSpPr>
         <p:spPr>
           <a:xfrm>
-            <a:off x="3115800" y="2350080"/>
+            <a:off x="3115800" y="2197800"/>
             <a:ext cx="228240" cy="265680"/>
           </a:xfrm>
           <a:prstGeom prst="rect">
@@ -5425,7 +5425,7 @@
         </p:nvSpPr>
         <p:spPr>
           <a:xfrm>
-            <a:off x="3705120" y="2326320"/>
+            <a:off x="3705120" y="2164320"/>
             <a:ext cx="2282040" cy="153000"/>
           </a:xfrm>
           <a:prstGeom prst="rect">
@@ -5468,7 +5468,7 @@
         </p:nvSpPr>
         <p:spPr>
           <a:xfrm>
-            <a:off x="3900600" y="2555640"/>
+            <a:off x="3900600" y="2393640"/>
             <a:ext cx="1710720" cy="128520"/>
           </a:xfrm>
           <a:prstGeom prst="rect">
@@ -5511,7 +5511,7 @@
         </p:nvSpPr>
         <p:spPr>
           <a:xfrm>
-            <a:off x="3591000" y="2717640"/>
+            <a:off x="3591000" y="2555640"/>
             <a:ext cx="2404080" cy="128520"/>
           </a:xfrm>
           <a:prstGeom prst="rect">
@@ -5554,7 +5554,7 @@
         </p:nvSpPr>
         <p:spPr>
           <a:xfrm>
-            <a:off x="4533840" y="2879640"/>
+            <a:off x="4533840" y="2727000"/>
             <a:ext cx="277920" cy="128520"/>
           </a:xfrm>
           <a:prstGeom prst="rect">
@@ -5597,8 +5597,8 @@
         </p:nvSpPr>
         <p:spPr>
           <a:xfrm>
-            <a:off x="6281640" y="1885680"/>
-            <a:ext cx="2590920" cy="1195920"/>
+            <a:off x="6281640" y="1733400"/>
+            <a:ext cx="2590920" cy="1195560"/>
           </a:xfrm>
           <a:custGeom>
             <a:avLst/>
@@ -5606,32 +5606,32 @@
             <a:ahLst/>
             <a:rect l="0" t="0" r="r" b="b"/>
             <a:pathLst>
-              <a:path w="7197" h="3322">
+              <a:path w="7197" h="3321">
                 <a:moveTo>
-                  <a:pt x="0" y="3016"/>
+                  <a:pt x="0" y="3017"/>
                 </a:moveTo>
                 <a:lnTo>
                   <a:pt x="0" y="265"/>
                 </a:lnTo>
                 <a:cubicBezTo>
-                  <a:pt x="0" y="247"/>
-                  <a:pt x="2" y="230"/>
-                  <a:pt x="6" y="213"/>
-                </a:cubicBezTo>
-                <a:cubicBezTo>
-                  <a:pt x="10" y="196"/>
+                  <a:pt x="0" y="248"/>
+                  <a:pt x="2" y="231"/>
+                  <a:pt x="6" y="214"/>
+                </a:cubicBezTo>
+                <a:cubicBezTo>
+                  <a:pt x="10" y="197"/>
                   <a:pt x="15" y="180"/>
-                  <a:pt x="23" y="164"/>
-                </a:cubicBezTo>
-                <a:cubicBezTo>
-                  <a:pt x="31" y="148"/>
+                  <a:pt x="23" y="163"/>
+                </a:cubicBezTo>
+                <a:cubicBezTo>
+                  <a:pt x="31" y="147"/>
                   <a:pt x="40" y="132"/>
                   <a:pt x="51" y="118"/>
                 </a:cubicBezTo>
                 <a:cubicBezTo>
                   <a:pt x="62" y="103"/>
                   <a:pt x="75" y="90"/>
-                  <a:pt x="89" y="78"/>
+                  <a:pt x="89" y="77"/>
                 </a:cubicBezTo>
                 <a:cubicBezTo>
                   <a:pt x="103" y="65"/>
@@ -5644,8 +5644,8 @@
                   <a:pt x="188" y="20"/>
                 </a:cubicBezTo>
                 <a:cubicBezTo>
-                  <a:pt x="206" y="14"/>
-                  <a:pt x="225" y="9"/>
+                  <a:pt x="206" y="13"/>
+                  <a:pt x="225" y="8"/>
                   <a:pt x="245" y="5"/>
                 </a:cubicBezTo>
                 <a:cubicBezTo>
@@ -5662,8 +5662,8 @@
                   <a:pt x="6953" y="5"/>
                 </a:cubicBezTo>
                 <a:cubicBezTo>
-                  <a:pt x="6972" y="9"/>
-                  <a:pt x="6991" y="14"/>
+                  <a:pt x="6972" y="8"/>
+                  <a:pt x="6991" y="13"/>
                   <a:pt x="7010" y="20"/>
                 </a:cubicBezTo>
                 <a:cubicBezTo>
@@ -5674,7 +5674,7 @@
                 <a:cubicBezTo>
                   <a:pt x="7079" y="54"/>
                   <a:pt x="7094" y="65"/>
-                  <a:pt x="7108" y="78"/>
+                  <a:pt x="7108" y="77"/>
                 </a:cubicBezTo>
                 <a:cubicBezTo>
                   <a:pt x="7122" y="90"/>
@@ -5683,25 +5683,25 @@
                 </a:cubicBezTo>
                 <a:cubicBezTo>
                   <a:pt x="7157" y="132"/>
-                  <a:pt x="7167" y="148"/>
-                  <a:pt x="7174" y="164"/>
+                  <a:pt x="7167" y="147"/>
+                  <a:pt x="7174" y="163"/>
                 </a:cubicBezTo>
                 <a:cubicBezTo>
                   <a:pt x="7182" y="180"/>
-                  <a:pt x="7188" y="196"/>
-                  <a:pt x="7192" y="213"/>
-                </a:cubicBezTo>
-                <a:cubicBezTo>
-                  <a:pt x="7195" y="230"/>
-                  <a:pt x="7197" y="247"/>
+                  <a:pt x="7188" y="197"/>
+                  <a:pt x="7192" y="214"/>
+                </a:cubicBezTo>
+                <a:cubicBezTo>
+                  <a:pt x="7195" y="231"/>
+                  <a:pt x="7197" y="248"/>
                   <a:pt x="7197" y="265"/>
                 </a:cubicBezTo>
                 <a:lnTo>
-                  <a:pt x="7197" y="3016"/>
-                </a:lnTo>
-                <a:cubicBezTo>
-                  <a:pt x="7197" y="3036"/>
-                  <a:pt x="7195" y="3056"/>
+                  <a:pt x="7197" y="3017"/>
+                </a:lnTo>
+                <a:cubicBezTo>
+                  <a:pt x="7197" y="3037"/>
+                  <a:pt x="7195" y="3057"/>
                   <a:pt x="7192" y="3077"/>
                 </a:cubicBezTo>
                 <a:cubicBezTo>
@@ -5712,22 +5712,22 @@
                 <a:cubicBezTo>
                   <a:pt x="7167" y="3152"/>
                   <a:pt x="7157" y="3170"/>
-                  <a:pt x="7146" y="3187"/>
+                  <a:pt x="7146" y="3186"/>
                 </a:cubicBezTo>
                 <a:cubicBezTo>
                   <a:pt x="7135" y="3203"/>
-                  <a:pt x="7122" y="3219"/>
-                  <a:pt x="7108" y="3233"/>
-                </a:cubicBezTo>
-                <a:cubicBezTo>
-                  <a:pt x="7094" y="3247"/>
+                  <a:pt x="7122" y="3218"/>
+                  <a:pt x="7108" y="3232"/>
+                </a:cubicBezTo>
+                <a:cubicBezTo>
+                  <a:pt x="7094" y="3246"/>
                   <a:pt x="7079" y="3259"/>
                   <a:pt x="7062" y="3270"/>
                 </a:cubicBezTo>
                 <a:cubicBezTo>
-                  <a:pt x="7046" y="3282"/>
+                  <a:pt x="7046" y="3281"/>
                   <a:pt x="7028" y="3291"/>
-                  <a:pt x="7010" y="3299"/>
+                  <a:pt x="7010" y="3298"/>
                 </a:cubicBezTo>
                 <a:cubicBezTo>
                   <a:pt x="6991" y="3306"/>
@@ -5735,37 +5735,37 @@
                   <a:pt x="6953" y="3316"/>
                 </a:cubicBezTo>
                 <a:cubicBezTo>
-                  <a:pt x="6933" y="3320"/>
-                  <a:pt x="6913" y="3322"/>
-                  <a:pt x="6893" y="3322"/>
-                </a:cubicBezTo>
-                <a:lnTo>
-                  <a:pt x="304" y="3322"/>
-                </a:lnTo>
-                <a:cubicBezTo>
-                  <a:pt x="284" y="3322"/>
-                  <a:pt x="264" y="3320"/>
+                  <a:pt x="6933" y="3319"/>
+                  <a:pt x="6913" y="3321"/>
+                  <a:pt x="6893" y="3321"/>
+                </a:cubicBezTo>
+                <a:lnTo>
+                  <a:pt x="304" y="3321"/>
+                </a:lnTo>
+                <a:cubicBezTo>
+                  <a:pt x="284" y="3321"/>
+                  <a:pt x="264" y="3319"/>
                   <a:pt x="245" y="3316"/>
                 </a:cubicBezTo>
                 <a:cubicBezTo>
                   <a:pt x="225" y="3312"/>
                   <a:pt x="206" y="3306"/>
-                  <a:pt x="188" y="3299"/>
+                  <a:pt x="188" y="3298"/>
                 </a:cubicBezTo>
                 <a:cubicBezTo>
                   <a:pt x="169" y="3291"/>
-                  <a:pt x="152" y="3282"/>
+                  <a:pt x="152" y="3281"/>
                   <a:pt x="135" y="3270"/>
                 </a:cubicBezTo>
                 <a:cubicBezTo>
                   <a:pt x="118" y="3259"/>
-                  <a:pt x="103" y="3247"/>
-                  <a:pt x="89" y="3233"/>
-                </a:cubicBezTo>
-                <a:cubicBezTo>
-                  <a:pt x="75" y="3219"/>
+                  <a:pt x="103" y="3246"/>
+                  <a:pt x="89" y="3232"/>
+                </a:cubicBezTo>
+                <a:cubicBezTo>
+                  <a:pt x="75" y="3218"/>
                   <a:pt x="62" y="3203"/>
-                  <a:pt x="51" y="3187"/>
+                  <a:pt x="51" y="3186"/>
                 </a:cubicBezTo>
                 <a:cubicBezTo>
                   <a:pt x="40" y="3170"/>
@@ -5778,9 +5778,9 @@
                   <a:pt x="6" y="3077"/>
                 </a:cubicBezTo>
                 <a:cubicBezTo>
-                  <a:pt x="2" y="3056"/>
-                  <a:pt x="0" y="3036"/>
-                  <a:pt x="0" y="3016"/>
+                  <a:pt x="2" y="3057"/>
+                  <a:pt x="0" y="3037"/>
+                  <a:pt x="0" y="3017"/>
                 </a:cubicBezTo>
                 <a:close/>
               </a:path>
@@ -5815,7 +5815,7 @@
         </p:nvSpPr>
         <p:spPr>
           <a:xfrm>
-            <a:off x="6276960" y="1866600"/>
+            <a:off x="6276960" y="1714320"/>
             <a:ext cx="2600640" cy="1219680"/>
           </a:xfrm>
           <a:custGeom>
@@ -5873,7 +5873,7 @@
         </p:nvSpPr>
         <p:spPr>
           <a:xfrm>
-            <a:off x="6276960" y="1866600"/>
+            <a:off x="6276960" y="1714320"/>
             <a:ext cx="2600640" cy="1219680"/>
           </a:xfrm>
           <a:custGeom>
@@ -5931,7 +5931,7 @@
         </p:nvSpPr>
         <p:spPr>
           <a:xfrm>
-            <a:off x="6276960" y="1866600"/>
+            <a:off x="6276960" y="1714320"/>
             <a:ext cx="2600640" cy="1219680"/>
           </a:xfrm>
           <a:custGeom>
@@ -5989,7 +5989,7 @@
         </p:nvSpPr>
         <p:spPr>
           <a:xfrm>
-            <a:off x="6276960" y="1866600"/>
+            <a:off x="6276960" y="1714320"/>
             <a:ext cx="2600640" cy="1219680"/>
           </a:xfrm>
           <a:custGeom>
@@ -6047,8 +6047,8 @@
         </p:nvSpPr>
         <p:spPr>
           <a:xfrm>
-            <a:off x="6516000" y="2067120"/>
-            <a:ext cx="194760" cy="272160"/>
+            <a:off x="6516000" y="1905120"/>
+            <a:ext cx="194760" cy="272520"/>
           </a:xfrm>
           <a:custGeom>
             <a:avLst/>
@@ -6056,7 +6056,7 @@
             <a:ahLst/>
             <a:rect l="0" t="0" r="r" b="b"/>
             <a:pathLst>
-              <a:path w="541" h="756">
+              <a:path w="541" h="757">
                 <a:moveTo>
                   <a:pt x="533" y="197"/>
                 </a:moveTo>
@@ -6077,27 +6077,27 @@
                   <a:pt x="0" y="54"/>
                 </a:cubicBezTo>
                 <a:lnTo>
-                  <a:pt x="0" y="702"/>
+                  <a:pt x="0" y="703"/>
                 </a:lnTo>
                 <a:cubicBezTo>
                   <a:pt x="0" y="732"/>
-                  <a:pt x="24" y="756"/>
-                  <a:pt x="54" y="756"/>
-                </a:cubicBezTo>
-                <a:lnTo>
-                  <a:pt x="486" y="756"/>
-                </a:lnTo>
-                <a:cubicBezTo>
-                  <a:pt x="516" y="756"/>
+                  <a:pt x="24" y="757"/>
+                  <a:pt x="54" y="757"/>
+                </a:cubicBezTo>
+                <a:lnTo>
+                  <a:pt x="486" y="757"/>
+                </a:lnTo>
+                <a:cubicBezTo>
+                  <a:pt x="516" y="757"/>
                   <a:pt x="541" y="732"/>
-                  <a:pt x="541" y="702"/>
+                  <a:pt x="541" y="703"/>
                 </a:cubicBezTo>
                 <a:lnTo>
                   <a:pt x="541" y="216"/>
                 </a:lnTo>
                 <a:cubicBezTo>
                   <a:pt x="541" y="208"/>
-                  <a:pt x="538" y="202"/>
+                  <a:pt x="538" y="203"/>
                   <a:pt x="533" y="197"/>
                 </a:cubicBezTo>
                 <a:moveTo>
@@ -6113,10 +6113,10 @@
                   <a:pt x="324" y="65"/>
                 </a:lnTo>
                 <a:moveTo>
-                  <a:pt x="486" y="702"/>
+                  <a:pt x="486" y="703"/>
                 </a:moveTo>
                 <a:lnTo>
-                  <a:pt x="54" y="702"/>
+                  <a:pt x="54" y="703"/>
                 </a:lnTo>
                 <a:lnTo>
                   <a:pt x="54" y="54"/>
@@ -6128,7 +6128,7 @@
                   <a:pt x="270" y="216"/>
                 </a:lnTo>
                 <a:cubicBezTo>
-                  <a:pt x="270" y="245"/>
+                  <a:pt x="270" y="246"/>
                   <a:pt x="294" y="270"/>
                   <a:pt x="324" y="270"/>
                 </a:cubicBezTo>
@@ -6136,7 +6136,7 @@
                   <a:pt x="486" y="270"/>
                 </a:lnTo>
                 <a:lnTo>
-                  <a:pt x="486" y="702"/>
+                  <a:pt x="486" y="703"/>
                 </a:lnTo>
                 <a:close/>
               </a:path>
@@ -6171,8 +6171,8 @@
         </p:nvSpPr>
         <p:spPr>
           <a:xfrm>
-            <a:off x="6554880" y="2203200"/>
-            <a:ext cx="117000" cy="77760"/>
+            <a:off x="6554880" y="2041200"/>
+            <a:ext cx="117000" cy="78120"/>
           </a:xfrm>
           <a:custGeom>
             <a:avLst/>
@@ -6180,21 +6180,21 @@
             <a:ahLst/>
             <a:rect l="0" t="0" r="r" b="b"/>
             <a:pathLst>
-              <a:path w="325" h="216">
+              <a:path w="325" h="217">
                 <a:moveTo>
-                  <a:pt x="0" y="162"/>
+                  <a:pt x="0" y="163"/>
                 </a:moveTo>
                 <a:lnTo>
-                  <a:pt x="325" y="162"/>
-                </a:lnTo>
-                <a:lnTo>
-                  <a:pt x="325" y="216"/>
-                </a:lnTo>
-                <a:lnTo>
-                  <a:pt x="0" y="216"/>
-                </a:lnTo>
-                <a:lnTo>
-                  <a:pt x="0" y="162"/>
+                  <a:pt x="325" y="163"/>
+                </a:lnTo>
+                <a:lnTo>
+                  <a:pt x="325" y="217"/>
+                </a:lnTo>
+                <a:lnTo>
+                  <a:pt x="0" y="217"/>
+                </a:lnTo>
+                <a:lnTo>
+                  <a:pt x="0" y="163"/>
                 </a:lnTo>
                 <a:moveTo>
                   <a:pt x="0" y="0"/>
@@ -6244,7 +6244,7 @@
         </p:nvSpPr>
         <p:spPr>
           <a:xfrm>
-            <a:off x="6027120" y="2350080"/>
+            <a:off x="6027120" y="2197800"/>
             <a:ext cx="228240" cy="265680"/>
           </a:xfrm>
           <a:prstGeom prst="rect">
@@ -6287,7 +6287,7 @@
         </p:nvSpPr>
         <p:spPr>
           <a:xfrm>
-            <a:off x="6611400" y="2402640"/>
+            <a:off x="6611400" y="2250000"/>
             <a:ext cx="2247120" cy="153000"/>
           </a:xfrm>
           <a:prstGeom prst="rect">
@@ -6330,7 +6330,7 @@
         </p:nvSpPr>
         <p:spPr>
           <a:xfrm>
-            <a:off x="6506640" y="2631960"/>
+            <a:off x="6506640" y="2479320"/>
             <a:ext cx="2449800" cy="128520"/>
           </a:xfrm>
           <a:prstGeom prst="rect">
@@ -6373,8 +6373,8 @@
         </p:nvSpPr>
         <p:spPr>
           <a:xfrm>
-            <a:off x="456840" y="3371760"/>
-            <a:ext cx="8420760" cy="819360"/>
+            <a:off x="456840" y="3209760"/>
+            <a:ext cx="2724840" cy="1133640"/>
           </a:xfrm>
           <a:custGeom>
             <a:avLst/>
@@ -6382,18 +6382,18 @@
             <a:ahLst/>
             <a:rect l="0" t="0" r="r" b="b"/>
             <a:pathLst>
-              <a:path w="23391" h="2276">
+              <a:path w="7569" h="3149">
                 <a:moveTo>
                   <a:pt x="0" y="0"/>
                 </a:moveTo>
                 <a:lnTo>
-                  <a:pt x="23391" y="0"/>
-                </a:lnTo>
-                <a:lnTo>
-                  <a:pt x="23391" y="2276"/>
-                </a:lnTo>
-                <a:lnTo>
-                  <a:pt x="0" y="2276"/>
+                  <a:pt x="7569" y="0"/>
+                </a:lnTo>
+                <a:lnTo>
+                  <a:pt x="7569" y="3149"/>
+                </a:lnTo>
+                <a:lnTo>
+                  <a:pt x="0" y="3149"/>
                 </a:lnTo>
                 <a:lnTo>
                   <a:pt x="0" y="0"/>
@@ -6431,8 +6431,8 @@
         </p:nvSpPr>
         <p:spPr>
           <a:xfrm>
-            <a:off x="456840" y="3371760"/>
-            <a:ext cx="8420760" cy="38520"/>
+            <a:off x="456840" y="3209760"/>
+            <a:ext cx="2724840" cy="38520"/>
           </a:xfrm>
           <a:custGeom>
             <a:avLst/>
@@ -6440,15 +6440,15 @@
             <a:ahLst/>
             <a:rect l="0" t="0" r="r" b="b"/>
             <a:pathLst>
-              <a:path w="23391" h="107">
+              <a:path w="7569" h="107">
                 <a:moveTo>
                   <a:pt x="0" y="0"/>
                 </a:moveTo>
                 <a:lnTo>
-                  <a:pt x="23391" y="0"/>
-                </a:lnTo>
-                <a:lnTo>
-                  <a:pt x="23391" y="107"/>
+                  <a:pt x="7569" y="0"/>
+                </a:lnTo>
+                <a:lnTo>
+                  <a:pt x="7569" y="107"/>
                 </a:lnTo>
                 <a:lnTo>
                   <a:pt x="0" y="107"/>
@@ -6489,8 +6489,8 @@
         </p:nvSpPr>
         <p:spPr>
           <a:xfrm>
-            <a:off x="456840" y="4181400"/>
-            <a:ext cx="8420760" cy="9720"/>
+            <a:off x="456840" y="4333680"/>
+            <a:ext cx="2724840" cy="9720"/>
           </a:xfrm>
           <a:custGeom>
             <a:avLst/>
@@ -6498,15 +6498,15 @@
             <a:ahLst/>
             <a:rect l="0" t="0" r="r" b="b"/>
             <a:pathLst>
-              <a:path w="23391" h="27">
+              <a:path w="7569" h="27">
                 <a:moveTo>
                   <a:pt x="0" y="0"/>
                 </a:moveTo>
                 <a:lnTo>
-                  <a:pt x="23391" y="0"/>
-                </a:lnTo>
-                <a:lnTo>
-                  <a:pt x="23391" y="27"/>
+                  <a:pt x="7569" y="0"/>
+                </a:lnTo>
+                <a:lnTo>
+                  <a:pt x="7569" y="27"/>
                 </a:lnTo>
                 <a:lnTo>
                   <a:pt x="0" y="27"/>
@@ -6547,8 +6547,8 @@
         </p:nvSpPr>
         <p:spPr>
           <a:xfrm>
-            <a:off x="8867520" y="3371760"/>
-            <a:ext cx="10080" cy="819360"/>
+            <a:off x="3171600" y="3209760"/>
+            <a:ext cx="10080" cy="1133640"/>
           </a:xfrm>
           <a:custGeom>
             <a:avLst/>
@@ -6556,15 +6556,15 @@
             <a:ahLst/>
             <a:rect l="0" t="0" r="r" b="b"/>
             <a:pathLst>
-              <a:path w="28" h="2276">
+              <a:path w="28" h="3149">
                 <a:moveTo>
                   <a:pt x="0" y="106"/>
                 </a:moveTo>
                 <a:lnTo>
-                  <a:pt x="0" y="2276"/>
-                </a:lnTo>
-                <a:lnTo>
-                  <a:pt x="28" y="2276"/>
+                  <a:pt x="0" y="3149"/>
+                </a:lnTo>
+                <a:lnTo>
+                  <a:pt x="28" y="3149"/>
                 </a:lnTo>
                 <a:lnTo>
                   <a:pt x="28" y="0"/>
@@ -6605,8 +6605,8 @@
         </p:nvSpPr>
         <p:spPr>
           <a:xfrm>
-            <a:off x="456840" y="3371760"/>
-            <a:ext cx="10080" cy="819360"/>
+            <a:off x="456840" y="3209760"/>
+            <a:ext cx="10080" cy="1133640"/>
           </a:xfrm>
           <a:custGeom>
             <a:avLst/>
@@ -6614,15 +6614,15 @@
             <a:ahLst/>
             <a:rect l="0" t="0" r="r" b="b"/>
             <a:pathLst>
-              <a:path w="28" h="2276">
+              <a:path w="28" h="3149">
                 <a:moveTo>
                   <a:pt x="0" y="0"/>
                 </a:moveTo>
                 <a:lnTo>
-                  <a:pt x="0" y="2276"/>
-                </a:lnTo>
-                <a:lnTo>
-                  <a:pt x="28" y="2276"/>
+                  <a:pt x="0" y="3149"/>
+                </a:lnTo>
+                <a:lnTo>
+                  <a:pt x="28" y="3149"/>
                 </a:lnTo>
                 <a:lnTo>
                   <a:pt x="28" y="106"/>
@@ -6658,12 +6658,445 @@
       <p:sp>
         <p:nvSpPr>
           <p:cNvPr id="91" name=""/>
+          <p:cNvSpPr/>
+          <p:nvPr/>
+        </p:nvSpPr>
+        <p:spPr>
+          <a:xfrm>
+            <a:off x="1753920" y="3478320"/>
+            <a:ext cx="136440" cy="101520"/>
+          </a:xfrm>
+          <a:custGeom>
+            <a:avLst/>
+            <a:gdLst/>
+            <a:ahLst/>
+            <a:rect l="0" t="0" r="r" b="b"/>
+            <a:pathLst>
+              <a:path w="379" h="282">
+                <a:moveTo>
+                  <a:pt x="135" y="282"/>
+                </a:moveTo>
+                <a:lnTo>
+                  <a:pt x="0" y="146"/>
+                </a:lnTo>
+                <a:lnTo>
+                  <a:pt x="39" y="108"/>
+                </a:lnTo>
+                <a:lnTo>
+                  <a:pt x="135" y="205"/>
+                </a:lnTo>
+                <a:lnTo>
+                  <a:pt x="341" y="0"/>
+                </a:lnTo>
+                <a:lnTo>
+                  <a:pt x="379" y="39"/>
+                </a:lnTo>
+                <a:lnTo>
+                  <a:pt x="135" y="282"/>
+                </a:lnTo>
+                <a:close/>
+              </a:path>
+            </a:pathLst>
+          </a:custGeom>
+          <a:solidFill>
+            <a:srgbClr val="00af81"/>
+          </a:solidFill>
+          <a:ln w="0">
+            <a:noFill/>
+          </a:ln>
+        </p:spPr>
+        <p:txBody>
+          <a:bodyPr lIns="0" rIns="0" tIns="0" bIns="0" anchor="t">
+            <a:noAutofit/>
+          </a:bodyPr>
+          <a:p>
+            <a:endParaRPr b="0" lang="en-US" sz="2400" spc="-1" strike="noStrike">
+              <a:solidFill>
+                <a:srgbClr val="000000"/>
+              </a:solidFill>
+              <a:latin typeface="DejaVu Serif"/>
+            </a:endParaRPr>
+          </a:p>
+        </p:txBody>
+      </p:sp>
+      <p:sp>
+        <p:nvSpPr>
+          <p:cNvPr id="92" name=""/>
+          <p:cNvSpPr/>
+          <p:nvPr/>
+        </p:nvSpPr>
+        <p:spPr>
+          <a:xfrm>
+            <a:off x="1686240" y="3391200"/>
+            <a:ext cx="272160" cy="272160"/>
+          </a:xfrm>
+          <a:custGeom>
+            <a:avLst/>
+            <a:gdLst/>
+            <a:ahLst/>
+            <a:rect l="0" t="0" r="r" b="b"/>
+            <a:pathLst>
+              <a:path w="756" h="756">
+                <a:moveTo>
+                  <a:pt x="378" y="0"/>
+                </a:moveTo>
+                <a:cubicBezTo>
+                  <a:pt x="354" y="0"/>
+                  <a:pt x="329" y="2"/>
+                  <a:pt x="305" y="7"/>
+                </a:cubicBezTo>
+                <a:cubicBezTo>
+                  <a:pt x="280" y="12"/>
+                  <a:pt x="257" y="20"/>
+                  <a:pt x="234" y="29"/>
+                </a:cubicBezTo>
+                <a:cubicBezTo>
+                  <a:pt x="210" y="39"/>
+                  <a:pt x="188" y="51"/>
+                  <a:pt x="167" y="64"/>
+                </a:cubicBezTo>
+                <a:cubicBezTo>
+                  <a:pt x="147" y="78"/>
+                  <a:pt x="128" y="94"/>
+                  <a:pt x="110" y="111"/>
+                </a:cubicBezTo>
+                <a:cubicBezTo>
+                  <a:pt x="93" y="129"/>
+                  <a:pt x="77" y="148"/>
+                  <a:pt x="63" y="169"/>
+                </a:cubicBezTo>
+                <a:cubicBezTo>
+                  <a:pt x="50" y="189"/>
+                  <a:pt x="38" y="211"/>
+                  <a:pt x="28" y="234"/>
+                </a:cubicBezTo>
+                <a:cubicBezTo>
+                  <a:pt x="19" y="257"/>
+                  <a:pt x="12" y="280"/>
+                  <a:pt x="7" y="305"/>
+                </a:cubicBezTo>
+                <a:cubicBezTo>
+                  <a:pt x="2" y="329"/>
+                  <a:pt x="0" y="354"/>
+                  <a:pt x="0" y="378"/>
+                </a:cubicBezTo>
+                <a:cubicBezTo>
+                  <a:pt x="0" y="403"/>
+                  <a:pt x="2" y="428"/>
+                  <a:pt x="7" y="452"/>
+                </a:cubicBezTo>
+                <a:cubicBezTo>
+                  <a:pt x="12" y="476"/>
+                  <a:pt x="19" y="500"/>
+                  <a:pt x="28" y="523"/>
+                </a:cubicBezTo>
+                <a:cubicBezTo>
+                  <a:pt x="38" y="546"/>
+                  <a:pt x="50" y="568"/>
+                  <a:pt x="63" y="588"/>
+                </a:cubicBezTo>
+                <a:cubicBezTo>
+                  <a:pt x="77" y="609"/>
+                  <a:pt x="93" y="628"/>
+                  <a:pt x="110" y="645"/>
+                </a:cubicBezTo>
+                <a:cubicBezTo>
+                  <a:pt x="128" y="663"/>
+                  <a:pt x="147" y="679"/>
+                  <a:pt x="167" y="692"/>
+                </a:cubicBezTo>
+                <a:cubicBezTo>
+                  <a:pt x="188" y="706"/>
+                  <a:pt x="210" y="718"/>
+                  <a:pt x="234" y="727"/>
+                </a:cubicBezTo>
+                <a:cubicBezTo>
+                  <a:pt x="257" y="737"/>
+                  <a:pt x="280" y="744"/>
+                  <a:pt x="305" y="749"/>
+                </a:cubicBezTo>
+                <a:cubicBezTo>
+                  <a:pt x="329" y="754"/>
+                  <a:pt x="354" y="756"/>
+                  <a:pt x="378" y="756"/>
+                </a:cubicBezTo>
+                <a:cubicBezTo>
+                  <a:pt x="403" y="756"/>
+                  <a:pt x="428" y="754"/>
+                  <a:pt x="452" y="749"/>
+                </a:cubicBezTo>
+                <a:cubicBezTo>
+                  <a:pt x="476" y="744"/>
+                  <a:pt x="500" y="737"/>
+                  <a:pt x="523" y="727"/>
+                </a:cubicBezTo>
+                <a:cubicBezTo>
+                  <a:pt x="546" y="718"/>
+                  <a:pt x="568" y="706"/>
+                  <a:pt x="588" y="692"/>
+                </a:cubicBezTo>
+                <a:cubicBezTo>
+                  <a:pt x="609" y="679"/>
+                  <a:pt x="628" y="663"/>
+                  <a:pt x="645" y="645"/>
+                </a:cubicBezTo>
+                <a:cubicBezTo>
+                  <a:pt x="663" y="628"/>
+                  <a:pt x="679" y="609"/>
+                  <a:pt x="692" y="588"/>
+                </a:cubicBezTo>
+                <a:cubicBezTo>
+                  <a:pt x="706" y="568"/>
+                  <a:pt x="718" y="546"/>
+                  <a:pt x="727" y="523"/>
+                </a:cubicBezTo>
+                <a:cubicBezTo>
+                  <a:pt x="737" y="500"/>
+                  <a:pt x="744" y="476"/>
+                  <a:pt x="749" y="452"/>
+                </a:cubicBezTo>
+                <a:cubicBezTo>
+                  <a:pt x="754" y="428"/>
+                  <a:pt x="756" y="403"/>
+                  <a:pt x="756" y="378"/>
+                </a:cubicBezTo>
+                <a:cubicBezTo>
+                  <a:pt x="756" y="354"/>
+                  <a:pt x="754" y="329"/>
+                  <a:pt x="749" y="305"/>
+                </a:cubicBezTo>
+                <a:cubicBezTo>
+                  <a:pt x="744" y="280"/>
+                  <a:pt x="737" y="257"/>
+                  <a:pt x="727" y="234"/>
+                </a:cubicBezTo>
+                <a:cubicBezTo>
+                  <a:pt x="718" y="211"/>
+                  <a:pt x="706" y="189"/>
+                  <a:pt x="692" y="169"/>
+                </a:cubicBezTo>
+                <a:cubicBezTo>
+                  <a:pt x="679" y="148"/>
+                  <a:pt x="663" y="129"/>
+                  <a:pt x="645" y="111"/>
+                </a:cubicBezTo>
+                <a:cubicBezTo>
+                  <a:pt x="628" y="94"/>
+                  <a:pt x="609" y="78"/>
+                  <a:pt x="588" y="64"/>
+                </a:cubicBezTo>
+                <a:cubicBezTo>
+                  <a:pt x="568" y="51"/>
+                  <a:pt x="546" y="39"/>
+                  <a:pt x="523" y="29"/>
+                </a:cubicBezTo>
+                <a:cubicBezTo>
+                  <a:pt x="500" y="20"/>
+                  <a:pt x="476" y="12"/>
+                  <a:pt x="452" y="7"/>
+                </a:cubicBezTo>
+                <a:cubicBezTo>
+                  <a:pt x="428" y="2"/>
+                  <a:pt x="403" y="0"/>
+                  <a:pt x="378" y="0"/>
+                </a:cubicBezTo>
+                <a:moveTo>
+                  <a:pt x="378" y="702"/>
+                </a:moveTo>
+                <a:cubicBezTo>
+                  <a:pt x="357" y="702"/>
+                  <a:pt x="336" y="700"/>
+                  <a:pt x="315" y="696"/>
+                </a:cubicBezTo>
+                <a:cubicBezTo>
+                  <a:pt x="294" y="692"/>
+                  <a:pt x="274" y="686"/>
+                  <a:pt x="254" y="677"/>
+                </a:cubicBezTo>
+                <a:cubicBezTo>
+                  <a:pt x="235" y="669"/>
+                  <a:pt x="215" y="659"/>
+                  <a:pt x="197" y="647"/>
+                </a:cubicBezTo>
+                <a:cubicBezTo>
+                  <a:pt x="180" y="636"/>
+                  <a:pt x="163" y="622"/>
+                  <a:pt x="148" y="607"/>
+                </a:cubicBezTo>
+                <a:cubicBezTo>
+                  <a:pt x="133" y="592"/>
+                  <a:pt x="120" y="576"/>
+                  <a:pt x="108" y="558"/>
+                </a:cubicBezTo>
+                <a:cubicBezTo>
+                  <a:pt x="96" y="541"/>
+                  <a:pt x="86" y="522"/>
+                  <a:pt x="78" y="502"/>
+                </a:cubicBezTo>
+                <a:cubicBezTo>
+                  <a:pt x="70" y="483"/>
+                  <a:pt x="64" y="462"/>
+                  <a:pt x="60" y="442"/>
+                </a:cubicBezTo>
+                <a:cubicBezTo>
+                  <a:pt x="56" y="421"/>
+                  <a:pt x="54" y="400"/>
+                  <a:pt x="54" y="378"/>
+                </a:cubicBezTo>
+                <a:cubicBezTo>
+                  <a:pt x="54" y="357"/>
+                  <a:pt x="56" y="336"/>
+                  <a:pt x="60" y="315"/>
+                </a:cubicBezTo>
+                <a:cubicBezTo>
+                  <a:pt x="64" y="294"/>
+                  <a:pt x="70" y="274"/>
+                  <a:pt x="78" y="254"/>
+                </a:cubicBezTo>
+                <a:cubicBezTo>
+                  <a:pt x="86" y="235"/>
+                  <a:pt x="96" y="216"/>
+                  <a:pt x="108" y="199"/>
+                </a:cubicBezTo>
+                <a:cubicBezTo>
+                  <a:pt x="120" y="181"/>
+                  <a:pt x="133" y="164"/>
+                  <a:pt x="148" y="149"/>
+                </a:cubicBezTo>
+                <a:cubicBezTo>
+                  <a:pt x="163" y="134"/>
+                  <a:pt x="180" y="121"/>
+                  <a:pt x="197" y="109"/>
+                </a:cubicBezTo>
+                <a:cubicBezTo>
+                  <a:pt x="215" y="97"/>
+                  <a:pt x="235" y="87"/>
+                  <a:pt x="254" y="79"/>
+                </a:cubicBezTo>
+                <a:cubicBezTo>
+                  <a:pt x="274" y="71"/>
+                  <a:pt x="294" y="65"/>
+                  <a:pt x="315" y="61"/>
+                </a:cubicBezTo>
+                <a:cubicBezTo>
+                  <a:pt x="336" y="57"/>
+                  <a:pt x="357" y="55"/>
+                  <a:pt x="378" y="55"/>
+                </a:cubicBezTo>
+                <a:cubicBezTo>
+                  <a:pt x="400" y="55"/>
+                  <a:pt x="421" y="57"/>
+                  <a:pt x="441" y="61"/>
+                </a:cubicBezTo>
+                <a:cubicBezTo>
+                  <a:pt x="462" y="65"/>
+                  <a:pt x="483" y="71"/>
+                  <a:pt x="502" y="79"/>
+                </a:cubicBezTo>
+                <a:cubicBezTo>
+                  <a:pt x="522" y="87"/>
+                  <a:pt x="540" y="97"/>
+                  <a:pt x="558" y="109"/>
+                </a:cubicBezTo>
+                <a:cubicBezTo>
+                  <a:pt x="576" y="121"/>
+                  <a:pt x="592" y="134"/>
+                  <a:pt x="607" y="149"/>
+                </a:cubicBezTo>
+                <a:cubicBezTo>
+                  <a:pt x="622" y="164"/>
+                  <a:pt x="636" y="181"/>
+                  <a:pt x="647" y="199"/>
+                </a:cubicBezTo>
+                <a:cubicBezTo>
+                  <a:pt x="659" y="216"/>
+                  <a:pt x="669" y="235"/>
+                  <a:pt x="677" y="254"/>
+                </a:cubicBezTo>
+                <a:cubicBezTo>
+                  <a:pt x="686" y="274"/>
+                  <a:pt x="692" y="294"/>
+                  <a:pt x="696" y="315"/>
+                </a:cubicBezTo>
+                <a:cubicBezTo>
+                  <a:pt x="700" y="336"/>
+                  <a:pt x="702" y="357"/>
+                  <a:pt x="702" y="378"/>
+                </a:cubicBezTo>
+                <a:cubicBezTo>
+                  <a:pt x="702" y="400"/>
+                  <a:pt x="700" y="421"/>
+                  <a:pt x="696" y="442"/>
+                </a:cubicBezTo>
+                <a:cubicBezTo>
+                  <a:pt x="692" y="462"/>
+                  <a:pt x="686" y="483"/>
+                  <a:pt x="677" y="502"/>
+                </a:cubicBezTo>
+                <a:cubicBezTo>
+                  <a:pt x="669" y="522"/>
+                  <a:pt x="659" y="541"/>
+                  <a:pt x="647" y="558"/>
+                </a:cubicBezTo>
+                <a:cubicBezTo>
+                  <a:pt x="636" y="576"/>
+                  <a:pt x="622" y="592"/>
+                  <a:pt x="607" y="607"/>
+                </a:cubicBezTo>
+                <a:cubicBezTo>
+                  <a:pt x="592" y="622"/>
+                  <a:pt x="576" y="636"/>
+                  <a:pt x="558" y="647"/>
+                </a:cubicBezTo>
+                <a:cubicBezTo>
+                  <a:pt x="540" y="659"/>
+                  <a:pt x="522" y="669"/>
+                  <a:pt x="502" y="677"/>
+                </a:cubicBezTo>
+                <a:cubicBezTo>
+                  <a:pt x="483" y="686"/>
+                  <a:pt x="462" y="692"/>
+                  <a:pt x="441" y="696"/>
+                </a:cubicBezTo>
+                <a:cubicBezTo>
+                  <a:pt x="421" y="700"/>
+                  <a:pt x="400" y="702"/>
+                  <a:pt x="378" y="702"/>
+                </a:cubicBezTo>
+                <a:close/>
+              </a:path>
+            </a:pathLst>
+          </a:custGeom>
+          <a:solidFill>
+            <a:srgbClr val="00af81"/>
+          </a:solidFill>
+          <a:ln w="0">
+            <a:noFill/>
+          </a:ln>
+        </p:spPr>
+        <p:txBody>
+          <a:bodyPr lIns="0" rIns="0" tIns="0" bIns="0" anchor="t">
+            <a:noAutofit/>
+          </a:bodyPr>
+          <a:p>
+            <a:endParaRPr b="0" lang="en-US" sz="2400" spc="-1" strike="noStrike">
+              <a:solidFill>
+                <a:srgbClr val="000000"/>
+              </a:solidFill>
+              <a:latin typeface="DejaVu Serif"/>
+            </a:endParaRPr>
+          </a:p>
+        </p:txBody>
+      </p:sp>
+      <p:sp>
+        <p:nvSpPr>
+          <p:cNvPr id="93" name=""/>
           <p:cNvSpPr txBox="1"/>
           <p:nvPr/>
         </p:nvSpPr>
         <p:spPr>
           <a:xfrm>
-            <a:off x="6992640" y="2793600"/>
+            <a:off x="6992640" y="2641320"/>
             <a:ext cx="1332720" cy="128520"/>
           </a:xfrm>
           <a:prstGeom prst="rect">
@@ -6700,14 +7133,14 @@
       </p:sp>
       <p:sp>
         <p:nvSpPr>
-          <p:cNvPr id="92" name=""/>
+          <p:cNvPr id="94" name=""/>
           <p:cNvSpPr txBox="1"/>
           <p:nvPr/>
         </p:nvSpPr>
         <p:spPr>
           <a:xfrm>
-            <a:off x="634320" y="3598200"/>
-            <a:ext cx="8967960" cy="171000"/>
+            <a:off x="1176840" y="3761280"/>
+            <a:ext cx="1549080" cy="168120"/>
           </a:xfrm>
           <a:prstGeom prst="rect">
             <a:avLst/>
@@ -6723,44 +7156,34 @@
           </a:bodyPr>
           <a:p>
             <a:r>
-              <a:rPr b="1" lang="en-US" sz="1150" spc="-1" strike="noStrike">
-                <a:solidFill>
-                  <a:srgbClr val="3d68ec"/>
-                </a:solidFill>
-                <a:latin typeface="Arial"/>
-                <a:ea typeface="Arial"/>
-              </a:rPr>
-              <a:t>Wat dit kwartaal opleverde:</a:t>
-            </a:r>
-            <a:r>
-              <a:rPr b="0" lang="en-US" sz="1150" spc="-1" strike="noStrike">
+              <a:rPr b="1" lang="en-US" sz="1140" spc="-1" strike="noStrike">
                 <a:solidFill>
                   <a:srgbClr val="1a1a2e"/>
                 </a:solidFill>
                 <a:latin typeface="Arial"/>
                 <a:ea typeface="Arial"/>
               </a:rPr>
-              <a:t> de drie sporen hangen nu aan elkaar. De vraag van een school is te volgen tot in wat een</a:t>
+              <a:t>Route staat scherp</a:t>
             </a:r>
-            <a:endParaRPr b="0" lang="en-US" sz="1150" spc="-1" strike="noStrike">
-              <a:solidFill>
-                <a:srgbClr val="000000"/>
-              </a:solidFill>
-              <a:latin typeface="DejaVu Serif"/>
-            </a:endParaRPr>
-          </a:p>
-        </p:txBody>
-      </p:sp>
-      <p:sp>
-        <p:nvSpPr>
-          <p:cNvPr id="93" name=""/>
+            <a:endParaRPr b="0" lang="en-US" sz="1140" spc="-1" strike="noStrike">
+              <a:solidFill>
+                <a:srgbClr val="000000"/>
+              </a:solidFill>
+              <a:latin typeface="DejaVu Serif"/>
+            </a:endParaRPr>
+          </a:p>
+        </p:txBody>
+      </p:sp>
+      <p:sp>
+        <p:nvSpPr>
+          <p:cNvPr id="95" name=""/>
           <p:cNvSpPr/>
           <p:nvPr/>
         </p:nvSpPr>
         <p:spPr>
           <a:xfrm>
-            <a:off x="0" y="5257440"/>
-            <a:ext cx="9334800" cy="5258160"/>
+            <a:off x="3305160" y="3209760"/>
+            <a:ext cx="2724480" cy="1133640"/>
           </a:xfrm>
           <a:custGeom>
             <a:avLst/>
@@ -6768,18 +7191,18 @@
             <a:ahLst/>
             <a:rect l="0" t="0" r="r" b="b"/>
             <a:pathLst>
-              <a:path w="25930" h="14606">
+              <a:path w="7568" h="3149">
                 <a:moveTo>
                   <a:pt x="0" y="0"/>
                 </a:moveTo>
                 <a:lnTo>
-                  <a:pt x="25930" y="0"/>
-                </a:lnTo>
-                <a:lnTo>
-                  <a:pt x="25930" y="14606"/>
-                </a:lnTo>
-                <a:lnTo>
-                  <a:pt x="0" y="14606"/>
+                  <a:pt x="7568" y="0"/>
+                </a:lnTo>
+                <a:lnTo>
+                  <a:pt x="7568" y="3149"/>
+                </a:lnTo>
+                <a:lnTo>
+                  <a:pt x="0" y="3149"/>
                 </a:lnTo>
                 <a:lnTo>
                   <a:pt x="0" y="0"/>
@@ -6811,14 +7234,886 @@
       </p:sp>
       <p:sp>
         <p:nvSpPr>
-          <p:cNvPr id="94" name=""/>
+          <p:cNvPr id="96" name=""/>
+          <p:cNvSpPr/>
+          <p:nvPr/>
+        </p:nvSpPr>
+        <p:spPr>
+          <a:xfrm>
+            <a:off x="3305160" y="3209760"/>
+            <a:ext cx="2724480" cy="38520"/>
+          </a:xfrm>
+          <a:custGeom>
+            <a:avLst/>
+            <a:gdLst/>
+            <a:ahLst/>
+            <a:rect l="0" t="0" r="r" b="b"/>
+            <a:pathLst>
+              <a:path w="7568" h="107">
+                <a:moveTo>
+                  <a:pt x="0" y="0"/>
+                </a:moveTo>
+                <a:lnTo>
+                  <a:pt x="7568" y="0"/>
+                </a:lnTo>
+                <a:lnTo>
+                  <a:pt x="7568" y="107"/>
+                </a:lnTo>
+                <a:lnTo>
+                  <a:pt x="0" y="107"/>
+                </a:lnTo>
+                <a:lnTo>
+                  <a:pt x="0" y="0"/>
+                </a:lnTo>
+                <a:close/>
+              </a:path>
+            </a:pathLst>
+          </a:custGeom>
+          <a:solidFill>
+            <a:srgbClr val="dd784b"/>
+          </a:solidFill>
+          <a:ln w="0">
+            <a:noFill/>
+          </a:ln>
+        </p:spPr>
+        <p:txBody>
+          <a:bodyPr lIns="0" rIns="0" tIns="0" bIns="0" anchor="t">
+            <a:noAutofit/>
+          </a:bodyPr>
+          <a:p>
+            <a:endParaRPr b="0" lang="en-US" sz="2400" spc="-1" strike="noStrike">
+              <a:solidFill>
+                <a:srgbClr val="000000"/>
+              </a:solidFill>
+              <a:latin typeface="DejaVu Serif"/>
+            </a:endParaRPr>
+          </a:p>
+        </p:txBody>
+      </p:sp>
+      <p:sp>
+        <p:nvSpPr>
+          <p:cNvPr id="97" name=""/>
+          <p:cNvSpPr/>
+          <p:nvPr/>
+        </p:nvSpPr>
+        <p:spPr>
+          <a:xfrm>
+            <a:off x="3305160" y="4333680"/>
+            <a:ext cx="2724480" cy="9720"/>
+          </a:xfrm>
+          <a:custGeom>
+            <a:avLst/>
+            <a:gdLst/>
+            <a:ahLst/>
+            <a:rect l="0" t="0" r="r" b="b"/>
+            <a:pathLst>
+              <a:path w="7568" h="27">
+                <a:moveTo>
+                  <a:pt x="0" y="0"/>
+                </a:moveTo>
+                <a:lnTo>
+                  <a:pt x="7568" y="0"/>
+                </a:lnTo>
+                <a:lnTo>
+                  <a:pt x="7568" y="27"/>
+                </a:lnTo>
+                <a:lnTo>
+                  <a:pt x="0" y="27"/>
+                </a:lnTo>
+                <a:lnTo>
+                  <a:pt x="0" y="0"/>
+                </a:lnTo>
+                <a:close/>
+              </a:path>
+            </a:pathLst>
+          </a:custGeom>
+          <a:solidFill>
+            <a:srgbClr val="e5e7eb"/>
+          </a:solidFill>
+          <a:ln w="0">
+            <a:noFill/>
+          </a:ln>
+        </p:spPr>
+        <p:txBody>
+          <a:bodyPr lIns="0" rIns="0" tIns="0" bIns="0" anchor="t">
+            <a:noAutofit/>
+          </a:bodyPr>
+          <a:p>
+            <a:endParaRPr b="0" lang="en-US" sz="2400" spc="-1" strike="noStrike">
+              <a:solidFill>
+                <a:srgbClr val="000000"/>
+              </a:solidFill>
+              <a:latin typeface="DejaVu Serif"/>
+            </a:endParaRPr>
+          </a:p>
+        </p:txBody>
+      </p:sp>
+      <p:sp>
+        <p:nvSpPr>
+          <p:cNvPr id="98" name=""/>
+          <p:cNvSpPr/>
+          <p:nvPr/>
+        </p:nvSpPr>
+        <p:spPr>
+          <a:xfrm>
+            <a:off x="6019560" y="3209760"/>
+            <a:ext cx="10080" cy="1133640"/>
+          </a:xfrm>
+          <a:custGeom>
+            <a:avLst/>
+            <a:gdLst/>
+            <a:ahLst/>
+            <a:rect l="0" t="0" r="r" b="b"/>
+            <a:pathLst>
+              <a:path w="28" h="3149">
+                <a:moveTo>
+                  <a:pt x="0" y="106"/>
+                </a:moveTo>
+                <a:lnTo>
+                  <a:pt x="0" y="3149"/>
+                </a:lnTo>
+                <a:lnTo>
+                  <a:pt x="28" y="3149"/>
+                </a:lnTo>
+                <a:lnTo>
+                  <a:pt x="28" y="0"/>
+                </a:lnTo>
+                <a:lnTo>
+                  <a:pt x="0" y="106"/>
+                </a:lnTo>
+                <a:close/>
+              </a:path>
+            </a:pathLst>
+          </a:custGeom>
+          <a:solidFill>
+            <a:srgbClr val="e5e7eb"/>
+          </a:solidFill>
+          <a:ln w="0">
+            <a:noFill/>
+          </a:ln>
+        </p:spPr>
+        <p:txBody>
+          <a:bodyPr lIns="0" rIns="0" tIns="0" bIns="0" anchor="t">
+            <a:noAutofit/>
+          </a:bodyPr>
+          <a:p>
+            <a:endParaRPr b="0" lang="en-US" sz="2400" spc="-1" strike="noStrike">
+              <a:solidFill>
+                <a:srgbClr val="000000"/>
+              </a:solidFill>
+              <a:latin typeface="DejaVu Serif"/>
+            </a:endParaRPr>
+          </a:p>
+        </p:txBody>
+      </p:sp>
+      <p:sp>
+        <p:nvSpPr>
+          <p:cNvPr id="99" name=""/>
+          <p:cNvSpPr/>
+          <p:nvPr/>
+        </p:nvSpPr>
+        <p:spPr>
+          <a:xfrm>
+            <a:off x="3305160" y="3209760"/>
+            <a:ext cx="9720" cy="1133640"/>
+          </a:xfrm>
+          <a:custGeom>
+            <a:avLst/>
+            <a:gdLst/>
+            <a:ahLst/>
+            <a:rect l="0" t="0" r="r" b="b"/>
+            <a:pathLst>
+              <a:path w="27" h="3149">
+                <a:moveTo>
+                  <a:pt x="0" y="0"/>
+                </a:moveTo>
+                <a:lnTo>
+                  <a:pt x="0" y="3149"/>
+                </a:lnTo>
+                <a:lnTo>
+                  <a:pt x="27" y="3149"/>
+                </a:lnTo>
+                <a:lnTo>
+                  <a:pt x="27" y="106"/>
+                </a:lnTo>
+                <a:lnTo>
+                  <a:pt x="0" y="0"/>
+                </a:lnTo>
+                <a:close/>
+              </a:path>
+            </a:pathLst>
+          </a:custGeom>
+          <a:solidFill>
+            <a:srgbClr val="e5e7eb"/>
+          </a:solidFill>
+          <a:ln w="0">
+            <a:noFill/>
+          </a:ln>
+        </p:spPr>
+        <p:txBody>
+          <a:bodyPr lIns="0" rIns="0" tIns="0" bIns="0" anchor="t">
+            <a:noAutofit/>
+          </a:bodyPr>
+          <a:p>
+            <a:endParaRPr b="0" lang="en-US" sz="2400" spc="-1" strike="noStrike">
+              <a:solidFill>
+                <a:srgbClr val="000000"/>
+              </a:solidFill>
+              <a:latin typeface="DejaVu Serif"/>
+            </a:endParaRPr>
+          </a:p>
+        </p:txBody>
+      </p:sp>
+      <p:sp>
+        <p:nvSpPr>
+          <p:cNvPr id="100" name=""/>
+          <p:cNvSpPr/>
+          <p:nvPr/>
+        </p:nvSpPr>
+        <p:spPr>
+          <a:xfrm>
+            <a:off x="4534200" y="3391200"/>
+            <a:ext cx="272160" cy="272160"/>
+          </a:xfrm>
+          <a:custGeom>
+            <a:avLst/>
+            <a:gdLst/>
+            <a:ahLst/>
+            <a:rect l="0" t="0" r="r" b="b"/>
+            <a:pathLst>
+              <a:path w="756" h="756">
+                <a:moveTo>
+                  <a:pt x="756" y="756"/>
+                </a:moveTo>
+                <a:lnTo>
+                  <a:pt x="702" y="756"/>
+                </a:lnTo>
+                <a:lnTo>
+                  <a:pt x="702" y="621"/>
+                </a:lnTo>
+                <a:cubicBezTo>
+                  <a:pt x="702" y="603"/>
+                  <a:pt x="699" y="586"/>
+                  <a:pt x="692" y="570"/>
+                </a:cubicBezTo>
+                <a:cubicBezTo>
+                  <a:pt x="685" y="553"/>
+                  <a:pt x="675" y="538"/>
+                  <a:pt x="663" y="526"/>
+                </a:cubicBezTo>
+                <a:cubicBezTo>
+                  <a:pt x="650" y="513"/>
+                  <a:pt x="635" y="503"/>
+                  <a:pt x="619" y="497"/>
+                </a:cubicBezTo>
+                <a:cubicBezTo>
+                  <a:pt x="601" y="490"/>
+                  <a:pt x="584" y="486"/>
+                  <a:pt x="566" y="486"/>
+                </a:cubicBezTo>
+                <a:lnTo>
+                  <a:pt x="566" y="432"/>
+                </a:lnTo>
+                <a:cubicBezTo>
+                  <a:pt x="579" y="432"/>
+                  <a:pt x="591" y="434"/>
+                  <a:pt x="603" y="436"/>
+                </a:cubicBezTo>
+                <a:cubicBezTo>
+                  <a:pt x="615" y="438"/>
+                  <a:pt x="628" y="442"/>
+                  <a:pt x="639" y="447"/>
+                </a:cubicBezTo>
+                <a:cubicBezTo>
+                  <a:pt x="651" y="451"/>
+                  <a:pt x="662" y="457"/>
+                  <a:pt x="672" y="464"/>
+                </a:cubicBezTo>
+                <a:cubicBezTo>
+                  <a:pt x="682" y="471"/>
+                  <a:pt x="692" y="479"/>
+                  <a:pt x="701" y="488"/>
+                </a:cubicBezTo>
+                <a:cubicBezTo>
+                  <a:pt x="709" y="496"/>
+                  <a:pt x="717" y="506"/>
+                  <a:pt x="724" y="516"/>
+                </a:cubicBezTo>
+                <a:cubicBezTo>
+                  <a:pt x="731" y="527"/>
+                  <a:pt x="737" y="537"/>
+                  <a:pt x="742" y="549"/>
+                </a:cubicBezTo>
+                <a:cubicBezTo>
+                  <a:pt x="746" y="560"/>
+                  <a:pt x="750" y="572"/>
+                  <a:pt x="752" y="584"/>
+                </a:cubicBezTo>
+                <a:cubicBezTo>
+                  <a:pt x="755" y="596"/>
+                  <a:pt x="756" y="609"/>
+                  <a:pt x="756" y="621"/>
+                </a:cubicBezTo>
+                <a:lnTo>
+                  <a:pt x="756" y="756"/>
+                </a:lnTo>
+                <a:moveTo>
+                  <a:pt x="539" y="756"/>
+                </a:moveTo>
+                <a:lnTo>
+                  <a:pt x="485" y="756"/>
+                </a:lnTo>
+                <a:lnTo>
+                  <a:pt x="485" y="621"/>
+                </a:lnTo>
+                <a:cubicBezTo>
+                  <a:pt x="485" y="603"/>
+                  <a:pt x="482" y="586"/>
+                  <a:pt x="475" y="570"/>
+                </a:cubicBezTo>
+                <a:cubicBezTo>
+                  <a:pt x="468" y="553"/>
+                  <a:pt x="458" y="538"/>
+                  <a:pt x="446" y="526"/>
+                </a:cubicBezTo>
+                <a:cubicBezTo>
+                  <a:pt x="433" y="513"/>
+                  <a:pt x="418" y="503"/>
+                  <a:pt x="402" y="497"/>
+                </a:cubicBezTo>
+                <a:cubicBezTo>
+                  <a:pt x="385" y="490"/>
+                  <a:pt x="368" y="486"/>
+                  <a:pt x="350" y="486"/>
+                </a:cubicBezTo>
+                <a:lnTo>
+                  <a:pt x="189" y="486"/>
+                </a:lnTo>
+                <a:cubicBezTo>
+                  <a:pt x="171" y="486"/>
+                  <a:pt x="153" y="490"/>
+                  <a:pt x="137" y="497"/>
+                </a:cubicBezTo>
+                <a:cubicBezTo>
+                  <a:pt x="120" y="503"/>
+                  <a:pt x="106" y="513"/>
+                  <a:pt x="93" y="526"/>
+                </a:cubicBezTo>
+                <a:cubicBezTo>
+                  <a:pt x="81" y="538"/>
+                  <a:pt x="71" y="553"/>
+                  <a:pt x="64" y="570"/>
+                </a:cubicBezTo>
+                <a:cubicBezTo>
+                  <a:pt x="57" y="586"/>
+                  <a:pt x="54" y="603"/>
+                  <a:pt x="54" y="621"/>
+                </a:cubicBezTo>
+                <a:lnTo>
+                  <a:pt x="54" y="756"/>
+                </a:lnTo>
+                <a:lnTo>
+                  <a:pt x="0" y="756"/>
+                </a:lnTo>
+                <a:lnTo>
+                  <a:pt x="0" y="621"/>
+                </a:lnTo>
+                <a:cubicBezTo>
+                  <a:pt x="0" y="609"/>
+                  <a:pt x="1" y="596"/>
+                  <a:pt x="3" y="584"/>
+                </a:cubicBezTo>
+                <a:cubicBezTo>
+                  <a:pt x="6" y="572"/>
+                  <a:pt x="9" y="560"/>
+                  <a:pt x="14" y="549"/>
+                </a:cubicBezTo>
+                <a:cubicBezTo>
+                  <a:pt x="19" y="537"/>
+                  <a:pt x="25" y="527"/>
+                  <a:pt x="32" y="516"/>
+                </a:cubicBezTo>
+                <a:cubicBezTo>
+                  <a:pt x="38" y="506"/>
+                  <a:pt x="46" y="496"/>
+                  <a:pt x="55" y="488"/>
+                </a:cubicBezTo>
+                <a:cubicBezTo>
+                  <a:pt x="64" y="479"/>
+                  <a:pt x="73" y="471"/>
+                  <a:pt x="84" y="464"/>
+                </a:cubicBezTo>
+                <a:cubicBezTo>
+                  <a:pt x="94" y="457"/>
+                  <a:pt x="105" y="451"/>
+                  <a:pt x="116" y="447"/>
+                </a:cubicBezTo>
+                <a:cubicBezTo>
+                  <a:pt x="128" y="442"/>
+                  <a:pt x="140" y="438"/>
+                  <a:pt x="152" y="436"/>
+                </a:cubicBezTo>
+                <a:cubicBezTo>
+                  <a:pt x="164" y="434"/>
+                  <a:pt x="176" y="432"/>
+                  <a:pt x="189" y="432"/>
+                </a:cubicBezTo>
+                <a:lnTo>
+                  <a:pt x="350" y="432"/>
+                </a:lnTo>
+                <a:cubicBezTo>
+                  <a:pt x="363" y="432"/>
+                  <a:pt x="375" y="434"/>
+                  <a:pt x="387" y="436"/>
+                </a:cubicBezTo>
+                <a:cubicBezTo>
+                  <a:pt x="399" y="438"/>
+                  <a:pt x="411" y="442"/>
+                  <a:pt x="423" y="447"/>
+                </a:cubicBezTo>
+                <a:cubicBezTo>
+                  <a:pt x="434" y="451"/>
+                  <a:pt x="445" y="457"/>
+                  <a:pt x="455" y="464"/>
+                </a:cubicBezTo>
+                <a:cubicBezTo>
+                  <a:pt x="466" y="471"/>
+                  <a:pt x="475" y="479"/>
+                  <a:pt x="484" y="488"/>
+                </a:cubicBezTo>
+                <a:cubicBezTo>
+                  <a:pt x="493" y="496"/>
+                  <a:pt x="500" y="506"/>
+                  <a:pt x="507" y="516"/>
+                </a:cubicBezTo>
+                <a:cubicBezTo>
+                  <a:pt x="514" y="527"/>
+                  <a:pt x="520" y="537"/>
+                  <a:pt x="525" y="549"/>
+                </a:cubicBezTo>
+                <a:cubicBezTo>
+                  <a:pt x="530" y="560"/>
+                  <a:pt x="533" y="572"/>
+                  <a:pt x="536" y="584"/>
+                </a:cubicBezTo>
+                <a:cubicBezTo>
+                  <a:pt x="538" y="596"/>
+                  <a:pt x="539" y="609"/>
+                  <a:pt x="539" y="621"/>
+                </a:cubicBezTo>
+                <a:lnTo>
+                  <a:pt x="539" y="756"/>
+                </a:lnTo>
+                <a:moveTo>
+                  <a:pt x="485" y="0"/>
+                </a:moveTo>
+                <a:lnTo>
+                  <a:pt x="485" y="55"/>
+                </a:lnTo>
+                <a:cubicBezTo>
+                  <a:pt x="503" y="55"/>
+                  <a:pt x="520" y="58"/>
+                  <a:pt x="537" y="65"/>
+                </a:cubicBezTo>
+                <a:cubicBezTo>
+                  <a:pt x="553" y="72"/>
+                  <a:pt x="568" y="82"/>
+                  <a:pt x="581" y="94"/>
+                </a:cubicBezTo>
+                <a:cubicBezTo>
+                  <a:pt x="593" y="107"/>
+                  <a:pt x="603" y="121"/>
+                  <a:pt x="610" y="138"/>
+                </a:cubicBezTo>
+                <a:cubicBezTo>
+                  <a:pt x="617" y="154"/>
+                  <a:pt x="621" y="172"/>
+                  <a:pt x="621" y="190"/>
+                </a:cubicBezTo>
+                <a:cubicBezTo>
+                  <a:pt x="621" y="207"/>
+                  <a:pt x="617" y="225"/>
+                  <a:pt x="610" y="241"/>
+                </a:cubicBezTo>
+                <a:cubicBezTo>
+                  <a:pt x="603" y="258"/>
+                  <a:pt x="593" y="272"/>
+                  <a:pt x="581" y="285"/>
+                </a:cubicBezTo>
+                <a:cubicBezTo>
+                  <a:pt x="568" y="298"/>
+                  <a:pt x="553" y="307"/>
+                  <a:pt x="537" y="314"/>
+                </a:cubicBezTo>
+                <a:cubicBezTo>
+                  <a:pt x="520" y="321"/>
+                  <a:pt x="503" y="324"/>
+                  <a:pt x="485" y="324"/>
+                </a:cubicBezTo>
+                <a:lnTo>
+                  <a:pt x="485" y="378"/>
+                </a:lnTo>
+                <a:cubicBezTo>
+                  <a:pt x="498" y="378"/>
+                  <a:pt x="510" y="377"/>
+                  <a:pt x="522" y="375"/>
+                </a:cubicBezTo>
+                <a:cubicBezTo>
+                  <a:pt x="534" y="372"/>
+                  <a:pt x="546" y="369"/>
+                  <a:pt x="558" y="364"/>
+                </a:cubicBezTo>
+                <a:cubicBezTo>
+                  <a:pt x="569" y="359"/>
+                  <a:pt x="580" y="353"/>
+                  <a:pt x="590" y="347"/>
+                </a:cubicBezTo>
+                <a:cubicBezTo>
+                  <a:pt x="600" y="340"/>
+                  <a:pt x="610" y="332"/>
+                  <a:pt x="620" y="323"/>
+                </a:cubicBezTo>
+                <a:cubicBezTo>
+                  <a:pt x="629" y="314"/>
+                  <a:pt x="636" y="305"/>
+                  <a:pt x="643" y="294"/>
+                </a:cubicBezTo>
+                <a:cubicBezTo>
+                  <a:pt x="650" y="284"/>
+                  <a:pt x="656" y="273"/>
+                  <a:pt x="661" y="262"/>
+                </a:cubicBezTo>
+                <a:cubicBezTo>
+                  <a:pt x="665" y="250"/>
+                  <a:pt x="669" y="239"/>
+                  <a:pt x="671" y="226"/>
+                </a:cubicBezTo>
+                <a:cubicBezTo>
+                  <a:pt x="674" y="214"/>
+                  <a:pt x="675" y="202"/>
+                  <a:pt x="675" y="190"/>
+                </a:cubicBezTo>
+                <a:cubicBezTo>
+                  <a:pt x="675" y="177"/>
+                  <a:pt x="674" y="165"/>
+                  <a:pt x="671" y="153"/>
+                </a:cubicBezTo>
+                <a:cubicBezTo>
+                  <a:pt x="669" y="141"/>
+                  <a:pt x="665" y="129"/>
+                  <a:pt x="661" y="117"/>
+                </a:cubicBezTo>
+                <a:cubicBezTo>
+                  <a:pt x="656" y="106"/>
+                  <a:pt x="650" y="95"/>
+                  <a:pt x="643" y="85"/>
+                </a:cubicBezTo>
+                <a:cubicBezTo>
+                  <a:pt x="636" y="74"/>
+                  <a:pt x="629" y="65"/>
+                  <a:pt x="620" y="56"/>
+                </a:cubicBezTo>
+                <a:cubicBezTo>
+                  <a:pt x="610" y="47"/>
+                  <a:pt x="600" y="39"/>
+                  <a:pt x="590" y="33"/>
+                </a:cubicBezTo>
+                <a:cubicBezTo>
+                  <a:pt x="580" y="26"/>
+                  <a:pt x="569" y="20"/>
+                  <a:pt x="558" y="14"/>
+                </a:cubicBezTo>
+                <a:cubicBezTo>
+                  <a:pt x="546" y="9"/>
+                  <a:pt x="534" y="6"/>
+                  <a:pt x="522" y="3"/>
+                </a:cubicBezTo>
+                <a:cubicBezTo>
+                  <a:pt x="510" y="1"/>
+                  <a:pt x="498" y="0"/>
+                  <a:pt x="485" y="0"/>
+                </a:cubicBezTo>
+                <a:moveTo>
+                  <a:pt x="269" y="55"/>
+                </a:moveTo>
+                <a:cubicBezTo>
+                  <a:pt x="287" y="55"/>
+                  <a:pt x="305" y="58"/>
+                  <a:pt x="321" y="65"/>
+                </a:cubicBezTo>
+                <a:cubicBezTo>
+                  <a:pt x="338" y="72"/>
+                  <a:pt x="352" y="82"/>
+                  <a:pt x="365" y="94"/>
+                </a:cubicBezTo>
+                <a:cubicBezTo>
+                  <a:pt x="377" y="107"/>
+                  <a:pt x="387" y="121"/>
+                  <a:pt x="394" y="138"/>
+                </a:cubicBezTo>
+                <a:cubicBezTo>
+                  <a:pt x="401" y="154"/>
+                  <a:pt x="404" y="172"/>
+                  <a:pt x="404" y="190"/>
+                </a:cubicBezTo>
+                <a:cubicBezTo>
+                  <a:pt x="404" y="207"/>
+                  <a:pt x="401" y="225"/>
+                  <a:pt x="394" y="241"/>
+                </a:cubicBezTo>
+                <a:cubicBezTo>
+                  <a:pt x="387" y="258"/>
+                  <a:pt x="377" y="272"/>
+                  <a:pt x="365" y="285"/>
+                </a:cubicBezTo>
+                <a:cubicBezTo>
+                  <a:pt x="352" y="298"/>
+                  <a:pt x="338" y="307"/>
+                  <a:pt x="321" y="314"/>
+                </a:cubicBezTo>
+                <a:cubicBezTo>
+                  <a:pt x="305" y="321"/>
+                  <a:pt x="287" y="324"/>
+                  <a:pt x="269" y="324"/>
+                </a:cubicBezTo>
+                <a:cubicBezTo>
+                  <a:pt x="252" y="324"/>
+                  <a:pt x="234" y="321"/>
+                  <a:pt x="218" y="314"/>
+                </a:cubicBezTo>
+                <a:cubicBezTo>
+                  <a:pt x="201" y="307"/>
+                  <a:pt x="187" y="298"/>
+                  <a:pt x="174" y="285"/>
+                </a:cubicBezTo>
+                <a:cubicBezTo>
+                  <a:pt x="161" y="272"/>
+                  <a:pt x="152" y="258"/>
+                  <a:pt x="145" y="241"/>
+                </a:cubicBezTo>
+                <a:cubicBezTo>
+                  <a:pt x="138" y="225"/>
+                  <a:pt x="135" y="207"/>
+                  <a:pt x="135" y="190"/>
+                </a:cubicBezTo>
+                <a:cubicBezTo>
+                  <a:pt x="135" y="172"/>
+                  <a:pt x="138" y="154"/>
+                  <a:pt x="145" y="138"/>
+                </a:cubicBezTo>
+                <a:cubicBezTo>
+                  <a:pt x="152" y="121"/>
+                  <a:pt x="161" y="107"/>
+                  <a:pt x="174" y="94"/>
+                </a:cubicBezTo>
+                <a:cubicBezTo>
+                  <a:pt x="187" y="82"/>
+                  <a:pt x="201" y="72"/>
+                  <a:pt x="218" y="65"/>
+                </a:cubicBezTo>
+                <a:cubicBezTo>
+                  <a:pt x="234" y="58"/>
+                  <a:pt x="252" y="55"/>
+                  <a:pt x="269" y="55"/>
+                </a:cubicBezTo>
+                <a:moveTo>
+                  <a:pt x="269" y="0"/>
+                </a:moveTo>
+                <a:cubicBezTo>
+                  <a:pt x="257" y="0"/>
+                  <a:pt x="245" y="1"/>
+                  <a:pt x="233" y="3"/>
+                </a:cubicBezTo>
+                <a:cubicBezTo>
+                  <a:pt x="220" y="6"/>
+                  <a:pt x="209" y="9"/>
+                  <a:pt x="197" y="14"/>
+                </a:cubicBezTo>
+                <a:cubicBezTo>
+                  <a:pt x="186" y="20"/>
+                  <a:pt x="175" y="26"/>
+                  <a:pt x="165" y="33"/>
+                </a:cubicBezTo>
+                <a:cubicBezTo>
+                  <a:pt x="154" y="39"/>
+                  <a:pt x="145" y="47"/>
+                  <a:pt x="136" y="56"/>
+                </a:cubicBezTo>
+                <a:cubicBezTo>
+                  <a:pt x="127" y="65"/>
+                  <a:pt x="119" y="74"/>
+                  <a:pt x="112" y="85"/>
+                </a:cubicBezTo>
+                <a:cubicBezTo>
+                  <a:pt x="106" y="95"/>
+                  <a:pt x="100" y="106"/>
+                  <a:pt x="95" y="117"/>
+                </a:cubicBezTo>
+                <a:cubicBezTo>
+                  <a:pt x="90" y="129"/>
+                  <a:pt x="87" y="141"/>
+                  <a:pt x="84" y="153"/>
+                </a:cubicBezTo>
+                <a:cubicBezTo>
+                  <a:pt x="82" y="165"/>
+                  <a:pt x="81" y="177"/>
+                  <a:pt x="81" y="190"/>
+                </a:cubicBezTo>
+                <a:cubicBezTo>
+                  <a:pt x="81" y="202"/>
+                  <a:pt x="82" y="214"/>
+                  <a:pt x="84" y="226"/>
+                </a:cubicBezTo>
+                <a:cubicBezTo>
+                  <a:pt x="87" y="239"/>
+                  <a:pt x="90" y="250"/>
+                  <a:pt x="95" y="262"/>
+                </a:cubicBezTo>
+                <a:cubicBezTo>
+                  <a:pt x="100" y="273"/>
+                  <a:pt x="106" y="284"/>
+                  <a:pt x="112" y="294"/>
+                </a:cubicBezTo>
+                <a:cubicBezTo>
+                  <a:pt x="119" y="305"/>
+                  <a:pt x="127" y="314"/>
+                  <a:pt x="136" y="323"/>
+                </a:cubicBezTo>
+                <a:cubicBezTo>
+                  <a:pt x="145" y="332"/>
+                  <a:pt x="154" y="340"/>
+                  <a:pt x="165" y="347"/>
+                </a:cubicBezTo>
+                <a:cubicBezTo>
+                  <a:pt x="175" y="353"/>
+                  <a:pt x="186" y="359"/>
+                  <a:pt x="197" y="364"/>
+                </a:cubicBezTo>
+                <a:cubicBezTo>
+                  <a:pt x="209" y="369"/>
+                  <a:pt x="220" y="372"/>
+                  <a:pt x="233" y="375"/>
+                </a:cubicBezTo>
+                <a:cubicBezTo>
+                  <a:pt x="245" y="377"/>
+                  <a:pt x="257" y="378"/>
+                  <a:pt x="269" y="378"/>
+                </a:cubicBezTo>
+                <a:cubicBezTo>
+                  <a:pt x="282" y="378"/>
+                  <a:pt x="294" y="377"/>
+                  <a:pt x="306" y="375"/>
+                </a:cubicBezTo>
+                <a:cubicBezTo>
+                  <a:pt x="318" y="372"/>
+                  <a:pt x="330" y="369"/>
+                  <a:pt x="342" y="364"/>
+                </a:cubicBezTo>
+                <a:cubicBezTo>
+                  <a:pt x="353" y="359"/>
+                  <a:pt x="364" y="353"/>
+                  <a:pt x="374" y="347"/>
+                </a:cubicBezTo>
+                <a:cubicBezTo>
+                  <a:pt x="385" y="340"/>
+                  <a:pt x="394" y="332"/>
+                  <a:pt x="403" y="323"/>
+                </a:cubicBezTo>
+                <a:cubicBezTo>
+                  <a:pt x="412" y="314"/>
+                  <a:pt x="420" y="305"/>
+                  <a:pt x="426" y="294"/>
+                </a:cubicBezTo>
+                <a:cubicBezTo>
+                  <a:pt x="433" y="284"/>
+                  <a:pt x="439" y="273"/>
+                  <a:pt x="444" y="262"/>
+                </a:cubicBezTo>
+                <a:cubicBezTo>
+                  <a:pt x="449" y="250"/>
+                  <a:pt x="452" y="239"/>
+                  <a:pt x="455" y="226"/>
+                </a:cubicBezTo>
+                <a:cubicBezTo>
+                  <a:pt x="457" y="214"/>
+                  <a:pt x="458" y="202"/>
+                  <a:pt x="458" y="190"/>
+                </a:cubicBezTo>
+                <a:cubicBezTo>
+                  <a:pt x="458" y="177"/>
+                  <a:pt x="457" y="165"/>
+                  <a:pt x="455" y="153"/>
+                </a:cubicBezTo>
+                <a:cubicBezTo>
+                  <a:pt x="452" y="141"/>
+                  <a:pt x="449" y="129"/>
+                  <a:pt x="444" y="117"/>
+                </a:cubicBezTo>
+                <a:cubicBezTo>
+                  <a:pt x="439" y="106"/>
+                  <a:pt x="433" y="95"/>
+                  <a:pt x="426" y="85"/>
+                </a:cubicBezTo>
+                <a:cubicBezTo>
+                  <a:pt x="420" y="74"/>
+                  <a:pt x="412" y="65"/>
+                  <a:pt x="403" y="56"/>
+                </a:cubicBezTo>
+                <a:cubicBezTo>
+                  <a:pt x="394" y="47"/>
+                  <a:pt x="385" y="39"/>
+                  <a:pt x="374" y="33"/>
+                </a:cubicBezTo>
+                <a:cubicBezTo>
+                  <a:pt x="364" y="26"/>
+                  <a:pt x="353" y="20"/>
+                  <a:pt x="342" y="14"/>
+                </a:cubicBezTo>
+                <a:cubicBezTo>
+                  <a:pt x="330" y="9"/>
+                  <a:pt x="318" y="6"/>
+                  <a:pt x="306" y="3"/>
+                </a:cubicBezTo>
+                <a:cubicBezTo>
+                  <a:pt x="294" y="1"/>
+                  <a:pt x="282" y="0"/>
+                  <a:pt x="269" y="0"/>
+                </a:cubicBezTo>
+                <a:close/>
+              </a:path>
+            </a:pathLst>
+          </a:custGeom>
+          <a:solidFill>
+            <a:srgbClr val="dd784b"/>
+          </a:solidFill>
+          <a:ln w="0">
+            <a:noFill/>
+          </a:ln>
+        </p:spPr>
+        <p:txBody>
+          <a:bodyPr lIns="0" rIns="0" tIns="0" bIns="0" anchor="t">
+            <a:noAutofit/>
+          </a:bodyPr>
+          <a:p>
+            <a:endParaRPr b="0" lang="en-US" sz="2400" spc="-1" strike="noStrike">
+              <a:solidFill>
+                <a:srgbClr val="000000"/>
+              </a:solidFill>
+              <a:latin typeface="DejaVu Serif"/>
+            </a:endParaRPr>
+          </a:p>
+        </p:txBody>
+      </p:sp>
+      <p:sp>
+        <p:nvSpPr>
+          <p:cNvPr id="101" name=""/>
           <p:cNvSpPr txBox="1"/>
           <p:nvPr/>
         </p:nvSpPr>
         <p:spPr>
           <a:xfrm>
-            <a:off x="634320" y="3826800"/>
-            <a:ext cx="7370640" cy="171000"/>
+            <a:off x="1067400" y="4039920"/>
+            <a:ext cx="1667880" cy="142200"/>
           </a:xfrm>
           <a:prstGeom prst="rect">
             <a:avLst/>
@@ -6834,16 +8129,730 @@
           </a:bodyPr>
           <a:p>
             <a:r>
-              <a:rPr b="0" lang="en-US" sz="1150" spc="-1" strike="noStrike">
+              <a:rPr b="0" lang="en-US" sz="960" spc="-1" strike="noStrike">
                 <a:solidFill>
                   <a:srgbClr val="1a1a2e"/>
                 </a:solidFill>
                 <a:latin typeface="Arial"/>
                 <a:ea typeface="Arial"/>
               </a:rPr>
-              <a:t>leverancier moet bouwen, en andersom. Die route is er; de inhoud gaat er stap voor stap doorheen.</a:t>
+              <a:t>van wens naar eindproduct</a:t>
             </a:r>
-            <a:endParaRPr b="0" lang="en-US" sz="1150" spc="-1" strike="noStrike">
+            <a:endParaRPr b="0" lang="en-US" sz="960" spc="-1" strike="noStrike">
+              <a:solidFill>
+                <a:srgbClr val="000000"/>
+              </a:solidFill>
+              <a:latin typeface="DejaVu Serif"/>
+            </a:endParaRPr>
+          </a:p>
+        </p:txBody>
+      </p:sp>
+      <p:sp>
+        <p:nvSpPr>
+          <p:cNvPr id="102" name=""/>
+          <p:cNvSpPr txBox="1"/>
+          <p:nvPr/>
+        </p:nvSpPr>
+        <p:spPr>
+          <a:xfrm>
+            <a:off x="4248000" y="3761280"/>
+            <a:ext cx="1035360" cy="168120"/>
+          </a:xfrm>
+          <a:prstGeom prst="rect">
+            <a:avLst/>
+          </a:prstGeom>
+          <a:noFill/>
+          <a:ln w="0">
+            <a:noFill/>
+          </a:ln>
+        </p:spPr>
+        <p:txBody>
+          <a:bodyPr lIns="0" rIns="0" tIns="0" bIns="0" anchor="t">
+            <a:noAutofit/>
+          </a:bodyPr>
+          <a:p>
+            <a:r>
+              <a:rPr b="1" lang="en-US" sz="1140" spc="-1" strike="noStrike">
+                <a:solidFill>
+                  <a:srgbClr val="1a1a2e"/>
+                </a:solidFill>
+                <a:latin typeface="Arial"/>
+                <a:ea typeface="Arial"/>
+              </a:rPr>
+              <a:t>Weer op pad</a:t>
+            </a:r>
+            <a:endParaRPr b="0" lang="en-US" sz="1140" spc="-1" strike="noStrike">
+              <a:solidFill>
+                <a:srgbClr val="000000"/>
+              </a:solidFill>
+              <a:latin typeface="DejaVu Serif"/>
+            </a:endParaRPr>
+          </a:p>
+        </p:txBody>
+      </p:sp>
+      <p:sp>
+        <p:nvSpPr>
+          <p:cNvPr id="103" name=""/>
+          <p:cNvSpPr/>
+          <p:nvPr/>
+        </p:nvSpPr>
+        <p:spPr>
+          <a:xfrm>
+            <a:off x="6153120" y="3209760"/>
+            <a:ext cx="2724480" cy="1133640"/>
+          </a:xfrm>
+          <a:custGeom>
+            <a:avLst/>
+            <a:gdLst/>
+            <a:ahLst/>
+            <a:rect l="0" t="0" r="r" b="b"/>
+            <a:pathLst>
+              <a:path w="7568" h="3149">
+                <a:moveTo>
+                  <a:pt x="0" y="0"/>
+                </a:moveTo>
+                <a:lnTo>
+                  <a:pt x="7568" y="0"/>
+                </a:lnTo>
+                <a:lnTo>
+                  <a:pt x="7568" y="3149"/>
+                </a:lnTo>
+                <a:lnTo>
+                  <a:pt x="0" y="3149"/>
+                </a:lnTo>
+                <a:lnTo>
+                  <a:pt x="0" y="0"/>
+                </a:lnTo>
+                <a:close/>
+              </a:path>
+            </a:pathLst>
+          </a:custGeom>
+          <a:solidFill>
+            <a:srgbClr val="ffffff"/>
+          </a:solidFill>
+          <a:ln w="0">
+            <a:noFill/>
+          </a:ln>
+        </p:spPr>
+        <p:txBody>
+          <a:bodyPr lIns="0" rIns="0" tIns="0" bIns="0" anchor="t">
+            <a:noAutofit/>
+          </a:bodyPr>
+          <a:p>
+            <a:endParaRPr b="0" lang="en-US" sz="2400" spc="-1" strike="noStrike">
+              <a:solidFill>
+                <a:srgbClr val="000000"/>
+              </a:solidFill>
+              <a:latin typeface="DejaVu Serif"/>
+            </a:endParaRPr>
+          </a:p>
+        </p:txBody>
+      </p:sp>
+      <p:sp>
+        <p:nvSpPr>
+          <p:cNvPr id="104" name=""/>
+          <p:cNvSpPr/>
+          <p:nvPr/>
+        </p:nvSpPr>
+        <p:spPr>
+          <a:xfrm>
+            <a:off x="6153120" y="3209760"/>
+            <a:ext cx="2724480" cy="38520"/>
+          </a:xfrm>
+          <a:custGeom>
+            <a:avLst/>
+            <a:gdLst/>
+            <a:ahLst/>
+            <a:rect l="0" t="0" r="r" b="b"/>
+            <a:pathLst>
+              <a:path w="7568" h="107">
+                <a:moveTo>
+                  <a:pt x="0" y="0"/>
+                </a:moveTo>
+                <a:lnTo>
+                  <a:pt x="7568" y="0"/>
+                </a:lnTo>
+                <a:lnTo>
+                  <a:pt x="7568" y="107"/>
+                </a:lnTo>
+                <a:lnTo>
+                  <a:pt x="0" y="107"/>
+                </a:lnTo>
+                <a:lnTo>
+                  <a:pt x="0" y="0"/>
+                </a:lnTo>
+                <a:close/>
+              </a:path>
+            </a:pathLst>
+          </a:custGeom>
+          <a:solidFill>
+            <a:srgbClr val="3d68ec"/>
+          </a:solidFill>
+          <a:ln w="0">
+            <a:noFill/>
+          </a:ln>
+        </p:spPr>
+        <p:txBody>
+          <a:bodyPr lIns="0" rIns="0" tIns="0" bIns="0" anchor="t">
+            <a:noAutofit/>
+          </a:bodyPr>
+          <a:p>
+            <a:endParaRPr b="0" lang="en-US" sz="2400" spc="-1" strike="noStrike">
+              <a:solidFill>
+                <a:srgbClr val="000000"/>
+              </a:solidFill>
+              <a:latin typeface="DejaVu Serif"/>
+            </a:endParaRPr>
+          </a:p>
+        </p:txBody>
+      </p:sp>
+      <p:sp>
+        <p:nvSpPr>
+          <p:cNvPr id="105" name=""/>
+          <p:cNvSpPr/>
+          <p:nvPr/>
+        </p:nvSpPr>
+        <p:spPr>
+          <a:xfrm>
+            <a:off x="6153120" y="4333680"/>
+            <a:ext cx="2724480" cy="9720"/>
+          </a:xfrm>
+          <a:custGeom>
+            <a:avLst/>
+            <a:gdLst/>
+            <a:ahLst/>
+            <a:rect l="0" t="0" r="r" b="b"/>
+            <a:pathLst>
+              <a:path w="7568" h="27">
+                <a:moveTo>
+                  <a:pt x="0" y="0"/>
+                </a:moveTo>
+                <a:lnTo>
+                  <a:pt x="7568" y="0"/>
+                </a:lnTo>
+                <a:lnTo>
+                  <a:pt x="7568" y="27"/>
+                </a:lnTo>
+                <a:lnTo>
+                  <a:pt x="0" y="27"/>
+                </a:lnTo>
+                <a:lnTo>
+                  <a:pt x="0" y="0"/>
+                </a:lnTo>
+                <a:close/>
+              </a:path>
+            </a:pathLst>
+          </a:custGeom>
+          <a:solidFill>
+            <a:srgbClr val="e5e7eb"/>
+          </a:solidFill>
+          <a:ln w="0">
+            <a:noFill/>
+          </a:ln>
+        </p:spPr>
+        <p:txBody>
+          <a:bodyPr lIns="0" rIns="0" tIns="0" bIns="0" anchor="t">
+            <a:noAutofit/>
+          </a:bodyPr>
+          <a:p>
+            <a:endParaRPr b="0" lang="en-US" sz="2400" spc="-1" strike="noStrike">
+              <a:solidFill>
+                <a:srgbClr val="000000"/>
+              </a:solidFill>
+              <a:latin typeface="DejaVu Serif"/>
+            </a:endParaRPr>
+          </a:p>
+        </p:txBody>
+      </p:sp>
+      <p:sp>
+        <p:nvSpPr>
+          <p:cNvPr id="106" name=""/>
+          <p:cNvSpPr/>
+          <p:nvPr/>
+        </p:nvSpPr>
+        <p:spPr>
+          <a:xfrm>
+            <a:off x="8867520" y="3209760"/>
+            <a:ext cx="10080" cy="1133640"/>
+          </a:xfrm>
+          <a:custGeom>
+            <a:avLst/>
+            <a:gdLst/>
+            <a:ahLst/>
+            <a:rect l="0" t="0" r="r" b="b"/>
+            <a:pathLst>
+              <a:path w="28" h="3149">
+                <a:moveTo>
+                  <a:pt x="0" y="106"/>
+                </a:moveTo>
+                <a:lnTo>
+                  <a:pt x="0" y="3149"/>
+                </a:lnTo>
+                <a:lnTo>
+                  <a:pt x="28" y="3149"/>
+                </a:lnTo>
+                <a:lnTo>
+                  <a:pt x="28" y="0"/>
+                </a:lnTo>
+                <a:lnTo>
+                  <a:pt x="0" y="106"/>
+                </a:lnTo>
+                <a:close/>
+              </a:path>
+            </a:pathLst>
+          </a:custGeom>
+          <a:solidFill>
+            <a:srgbClr val="e5e7eb"/>
+          </a:solidFill>
+          <a:ln w="0">
+            <a:noFill/>
+          </a:ln>
+        </p:spPr>
+        <p:txBody>
+          <a:bodyPr lIns="0" rIns="0" tIns="0" bIns="0" anchor="t">
+            <a:noAutofit/>
+          </a:bodyPr>
+          <a:p>
+            <a:endParaRPr b="0" lang="en-US" sz="2400" spc="-1" strike="noStrike">
+              <a:solidFill>
+                <a:srgbClr val="000000"/>
+              </a:solidFill>
+              <a:latin typeface="DejaVu Serif"/>
+            </a:endParaRPr>
+          </a:p>
+        </p:txBody>
+      </p:sp>
+      <p:sp>
+        <p:nvSpPr>
+          <p:cNvPr id="107" name=""/>
+          <p:cNvSpPr/>
+          <p:nvPr/>
+        </p:nvSpPr>
+        <p:spPr>
+          <a:xfrm>
+            <a:off x="6153120" y="3209760"/>
+            <a:ext cx="9720" cy="1133640"/>
+          </a:xfrm>
+          <a:custGeom>
+            <a:avLst/>
+            <a:gdLst/>
+            <a:ahLst/>
+            <a:rect l="0" t="0" r="r" b="b"/>
+            <a:pathLst>
+              <a:path w="27" h="3149">
+                <a:moveTo>
+                  <a:pt x="0" y="0"/>
+                </a:moveTo>
+                <a:lnTo>
+                  <a:pt x="0" y="3149"/>
+                </a:lnTo>
+                <a:lnTo>
+                  <a:pt x="27" y="3149"/>
+                </a:lnTo>
+                <a:lnTo>
+                  <a:pt x="27" y="106"/>
+                </a:lnTo>
+                <a:lnTo>
+                  <a:pt x="0" y="0"/>
+                </a:lnTo>
+                <a:close/>
+              </a:path>
+            </a:pathLst>
+          </a:custGeom>
+          <a:solidFill>
+            <a:srgbClr val="e5e7eb"/>
+          </a:solidFill>
+          <a:ln w="0">
+            <a:noFill/>
+          </a:ln>
+        </p:spPr>
+        <p:txBody>
+          <a:bodyPr lIns="0" rIns="0" tIns="0" bIns="0" anchor="t">
+            <a:noAutofit/>
+          </a:bodyPr>
+          <a:p>
+            <a:endParaRPr b="0" lang="en-US" sz="2400" spc="-1" strike="noStrike">
+              <a:solidFill>
+                <a:srgbClr val="000000"/>
+              </a:solidFill>
+              <a:latin typeface="DejaVu Serif"/>
+            </a:endParaRPr>
+          </a:p>
+        </p:txBody>
+      </p:sp>
+      <p:sp>
+        <p:nvSpPr>
+          <p:cNvPr id="108" name=""/>
+          <p:cNvSpPr/>
+          <p:nvPr/>
+        </p:nvSpPr>
+        <p:spPr>
+          <a:xfrm>
+            <a:off x="7382160" y="3391200"/>
+            <a:ext cx="272160" cy="252720"/>
+          </a:xfrm>
+          <a:custGeom>
+            <a:avLst/>
+            <a:gdLst/>
+            <a:ahLst/>
+            <a:rect l="0" t="0" r="r" b="b"/>
+            <a:pathLst>
+              <a:path w="756" h="702">
+                <a:moveTo>
+                  <a:pt x="743" y="113"/>
+                </a:moveTo>
+                <a:cubicBezTo>
+                  <a:pt x="734" y="107"/>
+                  <a:pt x="725" y="107"/>
+                  <a:pt x="716" y="113"/>
+                </a:cubicBezTo>
+                <a:lnTo>
+                  <a:pt x="486" y="227"/>
+                </a:lnTo>
+                <a:lnTo>
+                  <a:pt x="486" y="136"/>
+                </a:lnTo>
+                <a:cubicBezTo>
+                  <a:pt x="486" y="131"/>
+                  <a:pt x="485" y="127"/>
+                  <a:pt x="483" y="122"/>
+                </a:cubicBezTo>
+                <a:cubicBezTo>
+                  <a:pt x="481" y="118"/>
+                  <a:pt x="477" y="115"/>
+                  <a:pt x="473" y="113"/>
+                </a:cubicBezTo>
+                <a:cubicBezTo>
+                  <a:pt x="469" y="110"/>
+                  <a:pt x="465" y="109"/>
+                  <a:pt x="460" y="109"/>
+                </a:cubicBezTo>
+                <a:cubicBezTo>
+                  <a:pt x="456" y="109"/>
+                  <a:pt x="451" y="109"/>
+                  <a:pt x="447" y="112"/>
+                </a:cubicBezTo>
+                <a:lnTo>
+                  <a:pt x="216" y="227"/>
+                </a:lnTo>
+                <a:lnTo>
+                  <a:pt x="216" y="27"/>
+                </a:lnTo>
+                <a:cubicBezTo>
+                  <a:pt x="216" y="19"/>
+                  <a:pt x="213" y="13"/>
+                  <a:pt x="208" y="8"/>
+                </a:cubicBezTo>
+                <a:cubicBezTo>
+                  <a:pt x="202" y="2"/>
+                  <a:pt x="196" y="0"/>
+                  <a:pt x="189" y="0"/>
+                </a:cubicBezTo>
+                <a:lnTo>
+                  <a:pt x="27" y="0"/>
+                </a:lnTo>
+                <a:cubicBezTo>
+                  <a:pt x="19" y="0"/>
+                  <a:pt x="13" y="2"/>
+                  <a:pt x="8" y="8"/>
+                </a:cubicBezTo>
+                <a:cubicBezTo>
+                  <a:pt x="2" y="13"/>
+                  <a:pt x="0" y="19"/>
+                  <a:pt x="0" y="27"/>
+                </a:cubicBezTo>
+                <a:lnTo>
+                  <a:pt x="0" y="702"/>
+                </a:lnTo>
+                <a:lnTo>
+                  <a:pt x="756" y="702"/>
+                </a:lnTo>
+                <a:lnTo>
+                  <a:pt x="756" y="136"/>
+                </a:lnTo>
+                <a:cubicBezTo>
+                  <a:pt x="756" y="126"/>
+                  <a:pt x="752" y="118"/>
+                  <a:pt x="743" y="113"/>
+                </a:cubicBezTo>
+                <a:moveTo>
+                  <a:pt x="540" y="648"/>
+                </a:moveTo>
+                <a:lnTo>
+                  <a:pt x="432" y="648"/>
+                </a:lnTo>
+                <a:lnTo>
+                  <a:pt x="432" y="459"/>
+                </a:lnTo>
+                <a:lnTo>
+                  <a:pt x="540" y="459"/>
+                </a:lnTo>
+                <a:lnTo>
+                  <a:pt x="540" y="648"/>
+                </a:lnTo>
+                <a:moveTo>
+                  <a:pt x="702" y="648"/>
+                </a:moveTo>
+                <a:lnTo>
+                  <a:pt x="594" y="648"/>
+                </a:lnTo>
+                <a:lnTo>
+                  <a:pt x="594" y="432"/>
+                </a:lnTo>
+                <a:cubicBezTo>
+                  <a:pt x="594" y="425"/>
+                  <a:pt x="592" y="418"/>
+                  <a:pt x="586" y="413"/>
+                </a:cubicBezTo>
+                <a:cubicBezTo>
+                  <a:pt x="581" y="408"/>
+                  <a:pt x="575" y="405"/>
+                  <a:pt x="567" y="405"/>
+                </a:cubicBezTo>
+                <a:lnTo>
+                  <a:pt x="405" y="405"/>
+                </a:lnTo>
+                <a:cubicBezTo>
+                  <a:pt x="398" y="405"/>
+                  <a:pt x="392" y="408"/>
+                  <a:pt x="386" y="413"/>
+                </a:cubicBezTo>
+                <a:cubicBezTo>
+                  <a:pt x="381" y="418"/>
+                  <a:pt x="378" y="425"/>
+                  <a:pt x="378" y="432"/>
+                </a:cubicBezTo>
+                <a:lnTo>
+                  <a:pt x="378" y="648"/>
+                </a:lnTo>
+                <a:lnTo>
+                  <a:pt x="54" y="648"/>
+                </a:lnTo>
+                <a:lnTo>
+                  <a:pt x="54" y="55"/>
+                </a:lnTo>
+                <a:lnTo>
+                  <a:pt x="162" y="55"/>
+                </a:lnTo>
+                <a:lnTo>
+                  <a:pt x="162" y="314"/>
+                </a:lnTo>
+                <a:lnTo>
+                  <a:pt x="432" y="179"/>
+                </a:lnTo>
+                <a:lnTo>
+                  <a:pt x="432" y="314"/>
+                </a:lnTo>
+                <a:lnTo>
+                  <a:pt x="702" y="179"/>
+                </a:lnTo>
+                <a:lnTo>
+                  <a:pt x="702" y="648"/>
+                </a:lnTo>
+                <a:close/>
+              </a:path>
+            </a:pathLst>
+          </a:custGeom>
+          <a:solidFill>
+            <a:srgbClr val="3d68ec"/>
+          </a:solidFill>
+          <a:ln w="0">
+            <a:noFill/>
+          </a:ln>
+        </p:spPr>
+        <p:txBody>
+          <a:bodyPr lIns="0" rIns="0" tIns="0" bIns="0" anchor="t">
+            <a:noAutofit/>
+          </a:bodyPr>
+          <a:p>
+            <a:endParaRPr b="0" lang="en-US" sz="2400" spc="-1" strike="noStrike">
+              <a:solidFill>
+                <a:srgbClr val="000000"/>
+              </a:solidFill>
+              <a:latin typeface="DejaVu Serif"/>
+            </a:endParaRPr>
+          </a:p>
+        </p:txBody>
+      </p:sp>
+      <p:sp>
+        <p:nvSpPr>
+          <p:cNvPr id="109" name=""/>
+          <p:cNvSpPr txBox="1"/>
+          <p:nvPr/>
+        </p:nvSpPr>
+        <p:spPr>
+          <a:xfrm>
+            <a:off x="3805200" y="4039920"/>
+            <a:ext cx="1892160" cy="142200"/>
+          </a:xfrm>
+          <a:prstGeom prst="rect">
+            <a:avLst/>
+          </a:prstGeom>
+          <a:noFill/>
+          <a:ln w="0">
+            <a:noFill/>
+          </a:ln>
+        </p:spPr>
+        <p:txBody>
+          <a:bodyPr lIns="0" rIns="0" tIns="0" bIns="0" anchor="t">
+            <a:noAutofit/>
+          </a:bodyPr>
+          <a:p>
+            <a:r>
+              <a:rPr b="0" lang="en-US" sz="960" spc="-1" strike="noStrike">
+                <a:solidFill>
+                  <a:srgbClr val="1a1a2e"/>
+                </a:solidFill>
+                <a:latin typeface="Arial"/>
+                <a:ea typeface="Arial"/>
+              </a:rPr>
+              <a:t>wat moet er gebouwd worden?</a:t>
+            </a:r>
+            <a:endParaRPr b="0" lang="en-US" sz="960" spc="-1" strike="noStrike">
+              <a:solidFill>
+                <a:srgbClr val="000000"/>
+              </a:solidFill>
+              <a:latin typeface="DejaVu Serif"/>
+            </a:endParaRPr>
+          </a:p>
+        </p:txBody>
+      </p:sp>
+      <p:sp>
+        <p:nvSpPr>
+          <p:cNvPr id="110" name=""/>
+          <p:cNvSpPr txBox="1"/>
+          <p:nvPr/>
+        </p:nvSpPr>
+        <p:spPr>
+          <a:xfrm>
+            <a:off x="6719040" y="3761280"/>
+            <a:ext cx="1946880" cy="168120"/>
+          </a:xfrm>
+          <a:prstGeom prst="rect">
+            <a:avLst/>
+          </a:prstGeom>
+          <a:noFill/>
+          <a:ln w="0">
+            <a:noFill/>
+          </a:ln>
+        </p:spPr>
+        <p:txBody>
+          <a:bodyPr lIns="0" rIns="0" tIns="0" bIns="0" anchor="t">
+            <a:noAutofit/>
+          </a:bodyPr>
+          <a:p>
+            <a:r>
+              <a:rPr b="1" lang="en-US" sz="1140" spc="-1" strike="noStrike">
+                <a:solidFill>
+                  <a:srgbClr val="1a1a2e"/>
+                </a:solidFill>
+                <a:latin typeface="Arial"/>
+                <a:ea typeface="Arial"/>
+              </a:rPr>
+              <a:t>Leerroute 1 erdoorheen</a:t>
+            </a:r>
+            <a:endParaRPr b="0" lang="en-US" sz="1140" spc="-1" strike="noStrike">
+              <a:solidFill>
+                <a:srgbClr val="000000"/>
+              </a:solidFill>
+              <a:latin typeface="DejaVu Serif"/>
+            </a:endParaRPr>
+          </a:p>
+        </p:txBody>
+      </p:sp>
+      <p:sp>
+        <p:nvSpPr>
+          <p:cNvPr id="111" name=""/>
+          <p:cNvSpPr/>
+          <p:nvPr/>
+        </p:nvSpPr>
+        <p:spPr>
+          <a:xfrm>
+            <a:off x="0" y="5257440"/>
+            <a:ext cx="9334800" cy="5258160"/>
+          </a:xfrm>
+          <a:custGeom>
+            <a:avLst/>
+            <a:gdLst/>
+            <a:ahLst/>
+            <a:rect l="0" t="0" r="r" b="b"/>
+            <a:pathLst>
+              <a:path w="25930" h="14606">
+                <a:moveTo>
+                  <a:pt x="0" y="0"/>
+                </a:moveTo>
+                <a:lnTo>
+                  <a:pt x="25930" y="0"/>
+                </a:lnTo>
+                <a:lnTo>
+                  <a:pt x="25930" y="14606"/>
+                </a:lnTo>
+                <a:lnTo>
+                  <a:pt x="0" y="14606"/>
+                </a:lnTo>
+                <a:lnTo>
+                  <a:pt x="0" y="0"/>
+                </a:lnTo>
+                <a:close/>
+              </a:path>
+            </a:pathLst>
+          </a:custGeom>
+          <a:solidFill>
+            <a:srgbClr val="ffffff"/>
+          </a:solidFill>
+          <a:ln w="0">
+            <a:noFill/>
+          </a:ln>
+        </p:spPr>
+        <p:txBody>
+          <a:bodyPr lIns="0" rIns="0" tIns="0" bIns="0" anchor="t">
+            <a:noAutofit/>
+          </a:bodyPr>
+          <a:p>
+            <a:endParaRPr b="0" lang="en-US" sz="2400" spc="-1" strike="noStrike">
+              <a:solidFill>
+                <a:srgbClr val="000000"/>
+              </a:solidFill>
+              <a:latin typeface="DejaVu Serif"/>
+            </a:endParaRPr>
+          </a:p>
+        </p:txBody>
+      </p:sp>
+      <p:sp>
+        <p:nvSpPr>
+          <p:cNvPr id="112" name=""/>
+          <p:cNvSpPr txBox="1"/>
+          <p:nvPr/>
+        </p:nvSpPr>
+        <p:spPr>
+          <a:xfrm>
+            <a:off x="6909480" y="4039920"/>
+            <a:ext cx="1331280" cy="142200"/>
+          </a:xfrm>
+          <a:prstGeom prst="rect">
+            <a:avLst/>
+          </a:prstGeom>
+          <a:noFill/>
+          <a:ln w="0">
+            <a:noFill/>
+          </a:ln>
+        </p:spPr>
+        <p:txBody>
+          <a:bodyPr lIns="0" rIns="0" tIns="0" bIns="0" anchor="t">
+            <a:noAutofit/>
+          </a:bodyPr>
+          <a:p>
+            <a:r>
+              <a:rPr b="0" lang="en-US" sz="960" spc="-1" strike="noStrike">
+                <a:solidFill>
+                  <a:srgbClr val="1a1a2e"/>
+                </a:solidFill>
+                <a:latin typeface="Arial"/>
+                <a:ea typeface="Arial"/>
+              </a:rPr>
+              <a:t>tot in het eindproduct</a:t>
+            </a:r>
+            <a:endParaRPr b="0" lang="en-US" sz="960" spc="-1" strike="noStrike">
               <a:solidFill>
                 <a:srgbClr val="000000"/>
               </a:solidFill>
@@ -6884,7 +8893,7 @@
       </p:grpSpPr>
       <p:sp>
         <p:nvSpPr>
-          <p:cNvPr id="95" name=""/>
+          <p:cNvPr id="113" name=""/>
           <p:cNvSpPr/>
           <p:nvPr/>
         </p:nvSpPr>
@@ -6942,7 +8951,7 @@
       </p:sp>
       <p:sp>
         <p:nvSpPr>
-          <p:cNvPr id="96" name=""/>
+          <p:cNvPr id="114" name=""/>
           <p:cNvSpPr/>
           <p:nvPr/>
         </p:nvSpPr>
@@ -7000,7 +9009,7 @@
       </p:sp>
       <p:sp>
         <p:nvSpPr>
-          <p:cNvPr id="97" name=""/>
+          <p:cNvPr id="115" name=""/>
           <p:cNvSpPr/>
           <p:nvPr/>
         </p:nvSpPr>
@@ -7058,7 +9067,7 @@
       </p:sp>
       <p:sp>
         <p:nvSpPr>
-          <p:cNvPr id="98" name=""/>
+          <p:cNvPr id="116" name=""/>
           <p:cNvSpPr/>
           <p:nvPr/>
         </p:nvSpPr>
@@ -7116,7 +9125,7 @@
       </p:sp>
       <p:sp>
         <p:nvSpPr>
-          <p:cNvPr id="99" name=""/>
+          <p:cNvPr id="117" name=""/>
           <p:cNvSpPr/>
           <p:nvPr/>
         </p:nvSpPr>
@@ -7174,7 +9183,7 @@
       </p:sp>
       <p:sp>
         <p:nvSpPr>
-          <p:cNvPr id="100" name=""/>
+          <p:cNvPr id="118" name=""/>
           <p:cNvSpPr/>
           <p:nvPr/>
         </p:nvSpPr>
@@ -7232,7 +9241,7 @@
       </p:sp>
       <p:pic>
         <p:nvPicPr>
-          <p:cNvPr id="101" name="" descr=""/>
+          <p:cNvPr id="119" name="" descr=""/>
           <p:cNvPicPr/>
           <p:nvPr/>
         </p:nvPicPr>
@@ -7255,7 +9264,7 @@
       </p:pic>
       <p:sp>
         <p:nvSpPr>
-          <p:cNvPr id="102" name=""/>
+          <p:cNvPr id="120" name=""/>
           <p:cNvSpPr/>
           <p:nvPr/>
         </p:nvSpPr>
@@ -7473,7 +9482,7 @@
       </p:sp>
       <p:sp>
         <p:nvSpPr>
-          <p:cNvPr id="103" name=""/>
+          <p:cNvPr id="121" name=""/>
           <p:cNvSpPr/>
           <p:nvPr/>
         </p:nvSpPr>
@@ -7692,7 +9701,7 @@
       </p:sp>
       <p:pic>
         <p:nvPicPr>
-          <p:cNvPr id="104" name="" descr=""/>
+          <p:cNvPr id="122" name="" descr=""/>
           <p:cNvPicPr/>
           <p:nvPr/>
         </p:nvPicPr>
@@ -7715,7 +9724,7 @@
       </p:pic>
       <p:sp>
         <p:nvSpPr>
-          <p:cNvPr id="105" name=""/>
+          <p:cNvPr id="123" name=""/>
           <p:cNvSpPr txBox="1"/>
           <p:nvPr/>
         </p:nvSpPr>
@@ -7758,7 +9767,7 @@
       </p:sp>
       <p:sp>
         <p:nvSpPr>
-          <p:cNvPr id="106" name=""/>
+          <p:cNvPr id="124" name=""/>
           <p:cNvSpPr/>
           <p:nvPr/>
         </p:nvSpPr>
@@ -7816,7 +9825,7 @@
       </p:sp>
       <p:sp>
         <p:nvSpPr>
-          <p:cNvPr id="107" name=""/>
+          <p:cNvPr id="125" name=""/>
           <p:cNvSpPr/>
           <p:nvPr/>
         </p:nvSpPr>
@@ -7874,7 +9883,7 @@
       </p:sp>
       <p:sp>
         <p:nvSpPr>
-          <p:cNvPr id="108" name=""/>
+          <p:cNvPr id="126" name=""/>
           <p:cNvSpPr/>
           <p:nvPr/>
         </p:nvSpPr>
@@ -7932,7 +9941,7 @@
       </p:sp>
       <p:sp>
         <p:nvSpPr>
-          <p:cNvPr id="109" name=""/>
+          <p:cNvPr id="127" name=""/>
           <p:cNvSpPr/>
           <p:nvPr/>
         </p:nvSpPr>
@@ -7990,7 +9999,7 @@
       </p:sp>
       <p:sp>
         <p:nvSpPr>
-          <p:cNvPr id="110" name=""/>
+          <p:cNvPr id="128" name=""/>
           <p:cNvSpPr/>
           <p:nvPr/>
         </p:nvSpPr>
@@ -8048,7 +10057,7 @@
       </p:sp>
       <p:sp>
         <p:nvSpPr>
-          <p:cNvPr id="111" name=""/>
+          <p:cNvPr id="129" name=""/>
           <p:cNvSpPr/>
           <p:nvPr/>
         </p:nvSpPr>
@@ -8106,7 +10115,7 @@
       </p:sp>
       <p:sp>
         <p:nvSpPr>
-          <p:cNvPr id="112" name=""/>
+          <p:cNvPr id="130" name=""/>
           <p:cNvSpPr/>
           <p:nvPr/>
         </p:nvSpPr>
@@ -8164,7 +10173,7 @@
       </p:sp>
       <p:sp>
         <p:nvSpPr>
-          <p:cNvPr id="113" name=""/>
+          <p:cNvPr id="131" name=""/>
           <p:cNvSpPr/>
           <p:nvPr/>
         </p:nvSpPr>
@@ -8222,7 +10231,7 @@
       </p:sp>
       <p:sp>
         <p:nvSpPr>
-          <p:cNvPr id="114" name=""/>
+          <p:cNvPr id="132" name=""/>
           <p:cNvSpPr/>
           <p:nvPr/>
         </p:nvSpPr>
@@ -8280,7 +10289,7 @@
       </p:sp>
       <p:sp>
         <p:nvSpPr>
-          <p:cNvPr id="115" name=""/>
+          <p:cNvPr id="133" name=""/>
           <p:cNvSpPr/>
           <p:nvPr/>
         </p:nvSpPr>
@@ -8338,7 +10347,7 @@
       </p:sp>
       <p:sp>
         <p:nvSpPr>
-          <p:cNvPr id="116" name=""/>
+          <p:cNvPr id="134" name=""/>
           <p:cNvSpPr/>
           <p:nvPr/>
         </p:nvSpPr>
@@ -8396,7 +10405,7 @@
       </p:sp>
       <p:sp>
         <p:nvSpPr>
-          <p:cNvPr id="117" name=""/>
+          <p:cNvPr id="135" name=""/>
           <p:cNvSpPr/>
           <p:nvPr/>
         </p:nvSpPr>
@@ -8454,7 +10463,7 @@
       </p:sp>
       <p:sp>
         <p:nvSpPr>
-          <p:cNvPr id="118" name=""/>
+          <p:cNvPr id="136" name=""/>
           <p:cNvSpPr/>
           <p:nvPr/>
         </p:nvSpPr>
@@ -8512,7 +10521,7 @@
       </p:sp>
       <p:sp>
         <p:nvSpPr>
-          <p:cNvPr id="119" name=""/>
+          <p:cNvPr id="137" name=""/>
           <p:cNvSpPr/>
           <p:nvPr/>
         </p:nvSpPr>
@@ -8570,7 +10579,7 @@
       </p:sp>
       <p:sp>
         <p:nvSpPr>
-          <p:cNvPr id="120" name=""/>
+          <p:cNvPr id="138" name=""/>
           <p:cNvSpPr/>
           <p:nvPr/>
         </p:nvSpPr>
@@ -8628,7 +10637,7 @@
       </p:sp>
       <p:sp>
         <p:nvSpPr>
-          <p:cNvPr id="121" name=""/>
+          <p:cNvPr id="139" name=""/>
           <p:cNvSpPr txBox="1"/>
           <p:nvPr/>
         </p:nvSpPr>
@@ -8671,7 +10680,7 @@
       </p:sp>
       <p:sp>
         <p:nvSpPr>
-          <p:cNvPr id="122" name=""/>
+          <p:cNvPr id="140" name=""/>
           <p:cNvSpPr txBox="1"/>
           <p:nvPr/>
         </p:nvSpPr>
@@ -8724,7 +10733,7 @@
       </p:sp>
       <p:sp>
         <p:nvSpPr>
-          <p:cNvPr id="123" name=""/>
+          <p:cNvPr id="141" name=""/>
           <p:cNvSpPr txBox="1"/>
           <p:nvPr/>
         </p:nvSpPr>
@@ -8767,7 +10776,7 @@
       </p:sp>
       <p:sp>
         <p:nvSpPr>
-          <p:cNvPr id="124" name=""/>
+          <p:cNvPr id="142" name=""/>
           <p:cNvSpPr txBox="1"/>
           <p:nvPr/>
         </p:nvSpPr>
@@ -8810,7 +10819,7 @@
       </p:sp>
       <p:sp>
         <p:nvSpPr>
-          <p:cNvPr id="125" name=""/>
+          <p:cNvPr id="143" name=""/>
           <p:cNvSpPr txBox="1"/>
           <p:nvPr/>
         </p:nvSpPr>
@@ -8863,7 +10872,7 @@
       </p:sp>
       <p:sp>
         <p:nvSpPr>
-          <p:cNvPr id="126" name=""/>
+          <p:cNvPr id="144" name=""/>
           <p:cNvSpPr txBox="1"/>
           <p:nvPr/>
         </p:nvSpPr>
@@ -8906,7 +10915,7 @@
       </p:sp>
       <p:sp>
         <p:nvSpPr>
-          <p:cNvPr id="127" name=""/>
+          <p:cNvPr id="145" name=""/>
           <p:cNvSpPr txBox="1"/>
           <p:nvPr/>
         </p:nvSpPr>
@@ -8949,7 +10958,7 @@
       </p:sp>
       <p:sp>
         <p:nvSpPr>
-          <p:cNvPr id="128" name=""/>
+          <p:cNvPr id="146" name=""/>
           <p:cNvSpPr txBox="1"/>
           <p:nvPr/>
         </p:nvSpPr>
@@ -9002,7 +11011,7 @@
       </p:sp>
       <p:sp>
         <p:nvSpPr>
-          <p:cNvPr id="129" name=""/>
+          <p:cNvPr id="147" name=""/>
           <p:cNvSpPr txBox="1"/>
           <p:nvPr/>
         </p:nvSpPr>
@@ -9045,7 +11054,7 @@
       </p:sp>
       <p:sp>
         <p:nvSpPr>
-          <p:cNvPr id="130" name=""/>
+          <p:cNvPr id="148" name=""/>
           <p:cNvSpPr txBox="1"/>
           <p:nvPr/>
         </p:nvSpPr>
@@ -9088,7 +11097,7 @@
       </p:sp>
       <p:sp>
         <p:nvSpPr>
-          <p:cNvPr id="131" name=""/>
+          <p:cNvPr id="149" name=""/>
           <p:cNvSpPr/>
           <p:nvPr/>
         </p:nvSpPr>
@@ -9146,7 +11155,7 @@
       </p:sp>
       <p:sp>
         <p:nvSpPr>
-          <p:cNvPr id="132" name=""/>
+          <p:cNvPr id="150" name=""/>
           <p:cNvSpPr txBox="1"/>
           <p:nvPr/>
         </p:nvSpPr>
@@ -9219,7 +11228,7 @@
       </p:grpSpPr>
       <p:sp>
         <p:nvSpPr>
-          <p:cNvPr id="133" name=""/>
+          <p:cNvPr id="151" name=""/>
           <p:cNvSpPr/>
           <p:nvPr/>
         </p:nvSpPr>
@@ -9277,7 +11286,7 @@
       </p:sp>
       <p:sp>
         <p:nvSpPr>
-          <p:cNvPr id="134" name=""/>
+          <p:cNvPr id="152" name=""/>
           <p:cNvSpPr/>
           <p:nvPr/>
         </p:nvSpPr>
@@ -9335,7 +11344,7 @@
       </p:sp>
       <p:sp>
         <p:nvSpPr>
-          <p:cNvPr id="135" name=""/>
+          <p:cNvPr id="153" name=""/>
           <p:cNvSpPr/>
           <p:nvPr/>
         </p:nvSpPr>
@@ -9393,7 +11402,7 @@
       </p:sp>
       <p:sp>
         <p:nvSpPr>
-          <p:cNvPr id="136" name=""/>
+          <p:cNvPr id="154" name=""/>
           <p:cNvSpPr/>
           <p:nvPr/>
         </p:nvSpPr>
@@ -9451,7 +11460,7 @@
       </p:sp>
       <p:sp>
         <p:nvSpPr>
-          <p:cNvPr id="137" name=""/>
+          <p:cNvPr id="155" name=""/>
           <p:cNvSpPr/>
           <p:nvPr/>
         </p:nvSpPr>
@@ -9509,7 +11518,7 @@
       </p:sp>
       <p:sp>
         <p:nvSpPr>
-          <p:cNvPr id="138" name=""/>
+          <p:cNvPr id="156" name=""/>
           <p:cNvSpPr/>
           <p:nvPr/>
         </p:nvSpPr>
@@ -9567,7 +11576,7 @@
       </p:sp>
       <p:pic>
         <p:nvPicPr>
-          <p:cNvPr id="139" name="" descr=""/>
+          <p:cNvPr id="157" name="" descr=""/>
           <p:cNvPicPr/>
           <p:nvPr/>
         </p:nvPicPr>
@@ -9590,7 +11599,7 @@
       </p:pic>
       <p:sp>
         <p:nvSpPr>
-          <p:cNvPr id="140" name=""/>
+          <p:cNvPr id="158" name=""/>
           <p:cNvSpPr/>
           <p:nvPr/>
         </p:nvSpPr>
@@ -9648,7 +11657,7 @@
       </p:sp>
       <p:sp>
         <p:nvSpPr>
-          <p:cNvPr id="141" name=""/>
+          <p:cNvPr id="159" name=""/>
           <p:cNvSpPr/>
           <p:nvPr/>
         </p:nvSpPr>
@@ -9706,7 +11715,7 @@
       </p:sp>
       <p:sp>
         <p:nvSpPr>
-          <p:cNvPr id="142" name=""/>
+          <p:cNvPr id="160" name=""/>
           <p:cNvSpPr/>
           <p:nvPr/>
         </p:nvSpPr>
@@ -9764,7 +11773,7 @@
       </p:sp>
       <p:sp>
         <p:nvSpPr>
-          <p:cNvPr id="143" name=""/>
+          <p:cNvPr id="161" name=""/>
           <p:cNvSpPr/>
           <p:nvPr/>
         </p:nvSpPr>
@@ -9822,7 +11831,7 @@
       </p:sp>
       <p:sp>
         <p:nvSpPr>
-          <p:cNvPr id="144" name=""/>
+          <p:cNvPr id="162" name=""/>
           <p:cNvSpPr/>
           <p:nvPr/>
         </p:nvSpPr>
@@ -9880,7 +11889,7 @@
       </p:sp>
       <p:sp>
         <p:nvSpPr>
-          <p:cNvPr id="145" name=""/>
+          <p:cNvPr id="163" name=""/>
           <p:cNvSpPr/>
           <p:nvPr/>
         </p:nvSpPr>
@@ -9938,7 +11947,7 @@
       </p:sp>
       <p:sp>
         <p:nvSpPr>
-          <p:cNvPr id="146" name=""/>
+          <p:cNvPr id="164" name=""/>
           <p:cNvSpPr/>
           <p:nvPr/>
         </p:nvSpPr>
@@ -9996,7 +12005,7 @@
       </p:sp>
       <p:sp>
         <p:nvSpPr>
-          <p:cNvPr id="147" name=""/>
+          <p:cNvPr id="165" name=""/>
           <p:cNvSpPr/>
           <p:nvPr/>
         </p:nvSpPr>
@@ -10054,7 +12063,7 @@
       </p:sp>
       <p:sp>
         <p:nvSpPr>
-          <p:cNvPr id="148" name=""/>
+          <p:cNvPr id="166" name=""/>
           <p:cNvSpPr/>
           <p:nvPr/>
         </p:nvSpPr>
@@ -10112,7 +12121,7 @@
       </p:sp>
       <p:sp>
         <p:nvSpPr>
-          <p:cNvPr id="149" name=""/>
+          <p:cNvPr id="167" name=""/>
           <p:cNvSpPr/>
           <p:nvPr/>
         </p:nvSpPr>
@@ -10170,7 +12179,7 @@
       </p:sp>
       <p:sp>
         <p:nvSpPr>
-          <p:cNvPr id="150" name=""/>
+          <p:cNvPr id="168" name=""/>
           <p:cNvSpPr/>
           <p:nvPr/>
         </p:nvSpPr>
@@ -10228,7 +12237,7 @@
       </p:sp>
       <p:sp>
         <p:nvSpPr>
-          <p:cNvPr id="151" name=""/>
+          <p:cNvPr id="169" name=""/>
           <p:cNvSpPr/>
           <p:nvPr/>
         </p:nvSpPr>
@@ -10286,7 +12295,7 @@
       </p:sp>
       <p:sp>
         <p:nvSpPr>
-          <p:cNvPr id="152" name=""/>
+          <p:cNvPr id="170" name=""/>
           <p:cNvSpPr/>
           <p:nvPr/>
         </p:nvSpPr>
@@ -10344,7 +12353,7 @@
       </p:sp>
       <p:sp>
         <p:nvSpPr>
-          <p:cNvPr id="153" name=""/>
+          <p:cNvPr id="171" name=""/>
           <p:cNvSpPr/>
           <p:nvPr/>
         </p:nvSpPr>
@@ -10402,7 +12411,7 @@
       </p:sp>
       <p:sp>
         <p:nvSpPr>
-          <p:cNvPr id="154" name=""/>
+          <p:cNvPr id="172" name=""/>
           <p:cNvSpPr/>
           <p:nvPr/>
         </p:nvSpPr>
@@ -10460,7 +12469,7 @@
       </p:sp>
       <p:sp>
         <p:nvSpPr>
-          <p:cNvPr id="155" name=""/>
+          <p:cNvPr id="173" name=""/>
           <p:cNvSpPr txBox="1"/>
           <p:nvPr/>
         </p:nvSpPr>
@@ -10503,7 +12512,7 @@
       </p:sp>
       <p:sp>
         <p:nvSpPr>
-          <p:cNvPr id="156" name=""/>
+          <p:cNvPr id="174" name=""/>
           <p:cNvSpPr txBox="1"/>
           <p:nvPr/>
         </p:nvSpPr>
@@ -10546,7 +12555,7 @@
       </p:sp>
       <p:sp>
         <p:nvSpPr>
-          <p:cNvPr id="157" name=""/>
+          <p:cNvPr id="175" name=""/>
           <p:cNvSpPr txBox="1"/>
           <p:nvPr/>
         </p:nvSpPr>
@@ -10589,7 +12598,7 @@
       </p:sp>
       <p:sp>
         <p:nvSpPr>
-          <p:cNvPr id="158" name=""/>
+          <p:cNvPr id="176" name=""/>
           <p:cNvSpPr/>
           <p:nvPr/>
         </p:nvSpPr>
@@ -10647,7 +12656,7 @@
       </p:sp>
       <p:sp>
         <p:nvSpPr>
-          <p:cNvPr id="159" name=""/>
+          <p:cNvPr id="177" name=""/>
           <p:cNvSpPr/>
           <p:nvPr/>
         </p:nvSpPr>
@@ -10705,7 +12714,7 @@
       </p:sp>
       <p:sp>
         <p:nvSpPr>
-          <p:cNvPr id="160" name=""/>
+          <p:cNvPr id="178" name=""/>
           <p:cNvSpPr/>
           <p:nvPr/>
         </p:nvSpPr>
@@ -10763,7 +12772,7 @@
       </p:sp>
       <p:sp>
         <p:nvSpPr>
-          <p:cNvPr id="161" name=""/>
+          <p:cNvPr id="179" name=""/>
           <p:cNvSpPr/>
           <p:nvPr/>
         </p:nvSpPr>
@@ -10821,7 +12830,7 @@
       </p:sp>
       <p:sp>
         <p:nvSpPr>
-          <p:cNvPr id="162" name=""/>
+          <p:cNvPr id="180" name=""/>
           <p:cNvSpPr/>
           <p:nvPr/>
         </p:nvSpPr>
@@ -10879,7 +12888,7 @@
       </p:sp>
       <p:sp>
         <p:nvSpPr>
-          <p:cNvPr id="163" name=""/>
+          <p:cNvPr id="181" name=""/>
           <p:cNvSpPr txBox="1"/>
           <p:nvPr/>
         </p:nvSpPr>
@@ -10922,7 +12931,7 @@
       </p:sp>
       <p:sp>
         <p:nvSpPr>
-          <p:cNvPr id="164" name=""/>
+          <p:cNvPr id="182" name=""/>
           <p:cNvSpPr txBox="1"/>
           <p:nvPr/>
         </p:nvSpPr>
@@ -10965,7 +12974,7 @@
       </p:sp>
       <p:sp>
         <p:nvSpPr>
-          <p:cNvPr id="165" name=""/>
+          <p:cNvPr id="183" name=""/>
           <p:cNvSpPr txBox="1"/>
           <p:nvPr/>
         </p:nvSpPr>
@@ -11008,7 +13017,7 @@
       </p:sp>
       <p:sp>
         <p:nvSpPr>
-          <p:cNvPr id="166" name=""/>
+          <p:cNvPr id="184" name=""/>
           <p:cNvSpPr txBox="1"/>
           <p:nvPr/>
         </p:nvSpPr>
@@ -11051,7 +13060,7 @@
       </p:sp>
       <p:sp>
         <p:nvSpPr>
-          <p:cNvPr id="167" name=""/>
+          <p:cNvPr id="185" name=""/>
           <p:cNvSpPr txBox="1"/>
           <p:nvPr/>
         </p:nvSpPr>
@@ -11094,7 +13103,7 @@
       </p:sp>
       <p:sp>
         <p:nvSpPr>
-          <p:cNvPr id="168" name=""/>
+          <p:cNvPr id="186" name=""/>
           <p:cNvSpPr txBox="1"/>
           <p:nvPr/>
         </p:nvSpPr>
@@ -11137,7 +13146,7 @@
       </p:sp>
       <p:sp>
         <p:nvSpPr>
-          <p:cNvPr id="169" name=""/>
+          <p:cNvPr id="187" name=""/>
           <p:cNvSpPr txBox="1"/>
           <p:nvPr/>
         </p:nvSpPr>
@@ -11180,7 +13189,7 @@
       </p:sp>
       <p:sp>
         <p:nvSpPr>
-          <p:cNvPr id="170" name=""/>
+          <p:cNvPr id="188" name=""/>
           <p:cNvSpPr/>
           <p:nvPr/>
         </p:nvSpPr>
@@ -11399,7 +13408,7 @@
       </p:sp>
       <p:pic>
         <p:nvPicPr>
-          <p:cNvPr id="171" name="" descr=""/>
+          <p:cNvPr id="189" name="" descr=""/>
           <p:cNvPicPr/>
           <p:nvPr/>
         </p:nvPicPr>
@@ -11422,7 +13431,7 @@
       </p:pic>
       <p:sp>
         <p:nvSpPr>
-          <p:cNvPr id="172" name=""/>
+          <p:cNvPr id="190" name=""/>
           <p:cNvSpPr txBox="1"/>
           <p:nvPr/>
         </p:nvSpPr>
@@ -11465,7 +13474,7 @@
       </p:sp>
       <p:sp>
         <p:nvSpPr>
-          <p:cNvPr id="173" name=""/>
+          <p:cNvPr id="191" name=""/>
           <p:cNvSpPr/>
           <p:nvPr/>
         </p:nvSpPr>
@@ -11523,7 +13532,7 @@
       </p:sp>
       <p:sp>
         <p:nvSpPr>
-          <p:cNvPr id="174" name=""/>
+          <p:cNvPr id="192" name=""/>
           <p:cNvSpPr txBox="1"/>
           <p:nvPr/>
         </p:nvSpPr>
@@ -11596,7 +13605,7 @@
       </p:grpSpPr>
       <p:sp>
         <p:nvSpPr>
-          <p:cNvPr id="175" name=""/>
+          <p:cNvPr id="193" name=""/>
           <p:cNvSpPr/>
           <p:nvPr/>
         </p:nvSpPr>
@@ -11654,7 +13663,7 @@
       </p:sp>
       <p:sp>
         <p:nvSpPr>
-          <p:cNvPr id="176" name=""/>
+          <p:cNvPr id="194" name=""/>
           <p:cNvSpPr/>
           <p:nvPr/>
         </p:nvSpPr>
@@ -11712,7 +13721,7 @@
       </p:sp>
       <p:sp>
         <p:nvSpPr>
-          <p:cNvPr id="177" name=""/>
+          <p:cNvPr id="195" name=""/>
           <p:cNvSpPr/>
           <p:nvPr/>
         </p:nvSpPr>
@@ -11770,7 +13779,7 @@
       </p:sp>
       <p:sp>
         <p:nvSpPr>
-          <p:cNvPr id="178" name=""/>
+          <p:cNvPr id="196" name=""/>
           <p:cNvSpPr/>
           <p:nvPr/>
         </p:nvSpPr>
@@ -11828,7 +13837,7 @@
       </p:sp>
       <p:sp>
         <p:nvSpPr>
-          <p:cNvPr id="179" name=""/>
+          <p:cNvPr id="197" name=""/>
           <p:cNvSpPr/>
           <p:nvPr/>
         </p:nvSpPr>
@@ -11886,7 +13895,7 @@
       </p:sp>
       <p:sp>
         <p:nvSpPr>
-          <p:cNvPr id="180" name=""/>
+          <p:cNvPr id="198" name=""/>
           <p:cNvSpPr/>
           <p:nvPr/>
         </p:nvSpPr>
@@ -11944,7 +13953,7 @@
       </p:sp>
       <p:pic>
         <p:nvPicPr>
-          <p:cNvPr id="181" name="" descr=""/>
+          <p:cNvPr id="199" name="" descr=""/>
           <p:cNvPicPr/>
           <p:nvPr/>
         </p:nvPicPr>
@@ -11967,14 +13976,14 @@
       </p:pic>
       <p:sp>
         <p:nvSpPr>
-          <p:cNvPr id="182" name=""/>
+          <p:cNvPr id="200" name=""/>
           <p:cNvSpPr/>
           <p:nvPr/>
         </p:nvSpPr>
         <p:spPr>
           <a:xfrm>
-            <a:off x="461880" y="2062080"/>
-            <a:ext cx="4105440" cy="1810080"/>
+            <a:off x="461880" y="1261800"/>
+            <a:ext cx="4105440" cy="3200760"/>
           </a:xfrm>
           <a:custGeom>
             <a:avLst/>
@@ -11982,46 +13991,46 @@
             <a:ahLst/>
             <a:rect l="0" t="0" r="r" b="b"/>
             <a:pathLst>
-              <a:path w="11404" h="5028">
+              <a:path w="11404" h="8891">
                 <a:moveTo>
-                  <a:pt x="0" y="4882"/>
+                  <a:pt x="0" y="8746"/>
                 </a:moveTo>
                 <a:lnTo>
-                  <a:pt x="0" y="145"/>
+                  <a:pt x="0" y="146"/>
                 </a:lnTo>
                 <a:cubicBezTo>
                   <a:pt x="0" y="136"/>
-                  <a:pt x="1" y="126"/>
+                  <a:pt x="1" y="127"/>
                   <a:pt x="3" y="117"/>
                 </a:cubicBezTo>
                 <a:cubicBezTo>
-                  <a:pt x="4" y="107"/>
-                  <a:pt x="7" y="98"/>
+                  <a:pt x="4" y="108"/>
+                  <a:pt x="7" y="99"/>
                   <a:pt x="11" y="90"/>
                 </a:cubicBezTo>
                 <a:cubicBezTo>
                   <a:pt x="14" y="81"/>
-                  <a:pt x="19" y="72"/>
-                  <a:pt x="24" y="64"/>
-                </a:cubicBezTo>
-                <a:cubicBezTo>
-                  <a:pt x="30" y="56"/>
-                  <a:pt x="36" y="49"/>
-                  <a:pt x="42" y="42"/>
+                  <a:pt x="19" y="73"/>
+                  <a:pt x="24" y="65"/>
+                </a:cubicBezTo>
+                <a:cubicBezTo>
+                  <a:pt x="30" y="57"/>
+                  <a:pt x="36" y="50"/>
+                  <a:pt x="42" y="43"/>
                 </a:cubicBezTo>
                 <a:cubicBezTo>
                   <a:pt x="49" y="36"/>
                   <a:pt x="56" y="30"/>
-                  <a:pt x="64" y="24"/>
+                  <a:pt x="64" y="25"/>
                 </a:cubicBezTo>
                 <a:cubicBezTo>
                   <a:pt x="72" y="19"/>
-                  <a:pt x="81" y="14"/>
+                  <a:pt x="81" y="15"/>
                   <a:pt x="90" y="11"/>
                 </a:cubicBezTo>
                 <a:cubicBezTo>
-                  <a:pt x="98" y="7"/>
-                  <a:pt x="107" y="4"/>
+                  <a:pt x="98" y="8"/>
+                  <a:pt x="107" y="5"/>
                   <a:pt x="117" y="3"/>
                 </a:cubicBezTo>
                 <a:cubicBezTo>
@@ -12038,125 +14047,343 @@
                   <a:pt x="11287" y="3"/>
                 </a:cubicBezTo>
                 <a:cubicBezTo>
-                  <a:pt x="11297" y="4"/>
-                  <a:pt x="11306" y="7"/>
+                  <a:pt x="11297" y="5"/>
+                  <a:pt x="11306" y="8"/>
                   <a:pt x="11314" y="11"/>
                 </a:cubicBezTo>
                 <a:cubicBezTo>
-                  <a:pt x="11323" y="14"/>
+                  <a:pt x="11323" y="15"/>
                   <a:pt x="11332" y="19"/>
-                  <a:pt x="11340" y="24"/>
+                  <a:pt x="11340" y="25"/>
                 </a:cubicBezTo>
                 <a:cubicBezTo>
                   <a:pt x="11348" y="30"/>
                   <a:pt x="11355" y="36"/>
-                  <a:pt x="11362" y="42"/>
-                </a:cubicBezTo>
-                <a:cubicBezTo>
-                  <a:pt x="11368" y="49"/>
-                  <a:pt x="11374" y="56"/>
-                  <a:pt x="11380" y="64"/>
-                </a:cubicBezTo>
-                <a:cubicBezTo>
-                  <a:pt x="11385" y="72"/>
+                  <a:pt x="11362" y="43"/>
+                </a:cubicBezTo>
+                <a:cubicBezTo>
+                  <a:pt x="11368" y="50"/>
+                  <a:pt x="11374" y="57"/>
+                  <a:pt x="11380" y="65"/>
+                </a:cubicBezTo>
+                <a:cubicBezTo>
+                  <a:pt x="11385" y="73"/>
                   <a:pt x="11390" y="81"/>
                   <a:pt x="11393" y="90"/>
                 </a:cubicBezTo>
                 <a:cubicBezTo>
-                  <a:pt x="11397" y="98"/>
-                  <a:pt x="11400" y="107"/>
+                  <a:pt x="11397" y="99"/>
+                  <a:pt x="11400" y="108"/>
                   <a:pt x="11401" y="117"/>
                 </a:cubicBezTo>
                 <a:cubicBezTo>
-                  <a:pt x="11403" y="126"/>
+                  <a:pt x="11403" y="127"/>
                   <a:pt x="11404" y="136"/>
-                  <a:pt x="11404" y="145"/>
-                </a:cubicBezTo>
-                <a:lnTo>
-                  <a:pt x="11404" y="4882"/>
-                </a:lnTo>
-                <a:cubicBezTo>
-                  <a:pt x="11404" y="4892"/>
-                  <a:pt x="11403" y="4901"/>
-                  <a:pt x="11401" y="4911"/>
-                </a:cubicBezTo>
-                <a:cubicBezTo>
-                  <a:pt x="11400" y="4920"/>
-                  <a:pt x="11397" y="4929"/>
-                  <a:pt x="11393" y="4938"/>
-                </a:cubicBezTo>
-                <a:cubicBezTo>
-                  <a:pt x="11390" y="4947"/>
-                  <a:pt x="11385" y="4955"/>
-                  <a:pt x="11380" y="4963"/>
-                </a:cubicBezTo>
-                <a:cubicBezTo>
-                  <a:pt x="11374" y="4971"/>
-                  <a:pt x="11368" y="4978"/>
-                  <a:pt x="11362" y="4985"/>
-                </a:cubicBezTo>
-                <a:cubicBezTo>
-                  <a:pt x="11355" y="4992"/>
-                  <a:pt x="11348" y="4998"/>
-                  <a:pt x="11340" y="5003"/>
-                </a:cubicBezTo>
-                <a:cubicBezTo>
-                  <a:pt x="11332" y="5009"/>
-                  <a:pt x="11323" y="5013"/>
-                  <a:pt x="11314" y="5017"/>
-                </a:cubicBezTo>
-                <a:cubicBezTo>
-                  <a:pt x="11306" y="5020"/>
-                  <a:pt x="11297" y="5023"/>
-                  <a:pt x="11287" y="5025"/>
-                </a:cubicBezTo>
-                <a:cubicBezTo>
-                  <a:pt x="11278" y="5027"/>
-                  <a:pt x="11268" y="5028"/>
-                  <a:pt x="11259" y="5028"/>
-                </a:cubicBezTo>
-                <a:lnTo>
-                  <a:pt x="145" y="5028"/>
-                </a:lnTo>
-                <a:cubicBezTo>
-                  <a:pt x="136" y="5028"/>
-                  <a:pt x="126" y="5027"/>
-                  <a:pt x="117" y="5025"/>
-                </a:cubicBezTo>
-                <a:cubicBezTo>
-                  <a:pt x="107" y="5023"/>
-                  <a:pt x="98" y="5020"/>
-                  <a:pt x="90" y="5017"/>
-                </a:cubicBezTo>
-                <a:cubicBezTo>
-                  <a:pt x="81" y="5013"/>
-                  <a:pt x="72" y="5009"/>
-                  <a:pt x="64" y="5003"/>
-                </a:cubicBezTo>
-                <a:cubicBezTo>
-                  <a:pt x="56" y="4998"/>
-                  <a:pt x="49" y="4992"/>
-                  <a:pt x="42" y="4985"/>
-                </a:cubicBezTo>
-                <a:cubicBezTo>
-                  <a:pt x="36" y="4978"/>
-                  <a:pt x="30" y="4971"/>
-                  <a:pt x="24" y="4963"/>
-                </a:cubicBezTo>
-                <a:cubicBezTo>
-                  <a:pt x="19" y="4955"/>
-                  <a:pt x="14" y="4947"/>
-                  <a:pt x="11" y="4938"/>
-                </a:cubicBezTo>
-                <a:cubicBezTo>
-                  <a:pt x="7" y="4929"/>
-                  <a:pt x="4" y="4920"/>
-                  <a:pt x="3" y="4911"/>
-                </a:cubicBezTo>
-                <a:cubicBezTo>
-                  <a:pt x="1" y="4901"/>
-                  <a:pt x="0" y="4892"/>
-                  <a:pt x="0" y="4882"/>
+                  <a:pt x="11404" y="146"/>
+                </a:cubicBezTo>
+                <a:lnTo>
+                  <a:pt x="11404" y="8746"/>
+                </a:lnTo>
+                <a:cubicBezTo>
+                  <a:pt x="11404" y="8755"/>
+                  <a:pt x="11403" y="8765"/>
+                  <a:pt x="11401" y="8774"/>
+                </a:cubicBezTo>
+                <a:cubicBezTo>
+                  <a:pt x="11400" y="8783"/>
+                  <a:pt x="11397" y="8793"/>
+                  <a:pt x="11393" y="8801"/>
+                </a:cubicBezTo>
+                <a:cubicBezTo>
+                  <a:pt x="11390" y="8810"/>
+                  <a:pt x="11385" y="8819"/>
+                  <a:pt x="11380" y="8827"/>
+                </a:cubicBezTo>
+                <a:cubicBezTo>
+                  <a:pt x="11374" y="8834"/>
+                  <a:pt x="11368" y="8842"/>
+                  <a:pt x="11362" y="8849"/>
+                </a:cubicBezTo>
+                <a:cubicBezTo>
+                  <a:pt x="11355" y="8855"/>
+                  <a:pt x="11348" y="8861"/>
+                  <a:pt x="11340" y="8867"/>
+                </a:cubicBezTo>
+                <a:cubicBezTo>
+                  <a:pt x="11332" y="8872"/>
+                  <a:pt x="11323" y="8876"/>
+                  <a:pt x="11314" y="8880"/>
+                </a:cubicBezTo>
+                <a:cubicBezTo>
+                  <a:pt x="11306" y="8884"/>
+                  <a:pt x="11297" y="8887"/>
+                  <a:pt x="11287" y="8888"/>
+                </a:cubicBezTo>
+                <a:cubicBezTo>
+                  <a:pt x="11278" y="8890"/>
+                  <a:pt x="11268" y="8891"/>
+                  <a:pt x="11259" y="8891"/>
+                </a:cubicBezTo>
+                <a:lnTo>
+                  <a:pt x="145" y="8891"/>
+                </a:lnTo>
+                <a:cubicBezTo>
+                  <a:pt x="136" y="8891"/>
+                  <a:pt x="126" y="8890"/>
+                  <a:pt x="117" y="8888"/>
+                </a:cubicBezTo>
+                <a:cubicBezTo>
+                  <a:pt x="107" y="8887"/>
+                  <a:pt x="98" y="8884"/>
+                  <a:pt x="90" y="8880"/>
+                </a:cubicBezTo>
+                <a:cubicBezTo>
+                  <a:pt x="81" y="8876"/>
+                  <a:pt x="72" y="8872"/>
+                  <a:pt x="64" y="8867"/>
+                </a:cubicBezTo>
+                <a:cubicBezTo>
+                  <a:pt x="56" y="8861"/>
+                  <a:pt x="49" y="8855"/>
+                  <a:pt x="42" y="8849"/>
+                </a:cubicBezTo>
+                <a:cubicBezTo>
+                  <a:pt x="36" y="8842"/>
+                  <a:pt x="30" y="8834"/>
+                  <a:pt x="24" y="8827"/>
+                </a:cubicBezTo>
+                <a:cubicBezTo>
+                  <a:pt x="19" y="8819"/>
+                  <a:pt x="14" y="8810"/>
+                  <a:pt x="11" y="8801"/>
+                </a:cubicBezTo>
+                <a:cubicBezTo>
+                  <a:pt x="7" y="8793"/>
+                  <a:pt x="4" y="8783"/>
+                  <a:pt x="3" y="8774"/>
+                </a:cubicBezTo>
+                <a:cubicBezTo>
+                  <a:pt x="1" y="8765"/>
+                  <a:pt x="0" y="8755"/>
+                  <a:pt x="0" y="8746"/>
+                </a:cubicBezTo>
+                <a:close/>
+              </a:path>
+            </a:pathLst>
+          </a:custGeom>
+          <a:solidFill>
+            <a:srgbClr val="ffffff"/>
+          </a:solidFill>
+          <a:ln w="0">
+            <a:noFill/>
+          </a:ln>
+        </p:spPr>
+        <p:txBody>
+          <a:bodyPr lIns="0" rIns="0" tIns="0" bIns="0" anchor="t">
+            <a:noAutofit/>
+          </a:bodyPr>
+          <a:p>
+            <a:endParaRPr b="0" lang="en-US" sz="2400" spc="-1" strike="noStrike">
+              <a:solidFill>
+                <a:srgbClr val="000000"/>
+              </a:solidFill>
+              <a:latin typeface="DejaVu Serif"/>
+            </a:endParaRPr>
+          </a:p>
+        </p:txBody>
+      </p:sp>
+      <p:sp>
+        <p:nvSpPr>
+          <p:cNvPr id="201" name=""/>
+          <p:cNvSpPr/>
+          <p:nvPr/>
+        </p:nvSpPr>
+        <p:spPr>
+          <a:xfrm>
+            <a:off x="461880" y="1261800"/>
+            <a:ext cx="4105440" cy="3200760"/>
+          </a:xfrm>
+          <a:custGeom>
+            <a:avLst/>
+            <a:gdLst/>
+            <a:ahLst/>
+            <a:rect l="0" t="0" r="r" b="b"/>
+            <a:pathLst>
+              <a:path w="11404" h="8891">
+                <a:moveTo>
+                  <a:pt x="0" y="8746"/>
+                </a:moveTo>
+                <a:lnTo>
+                  <a:pt x="0" y="146"/>
+                </a:lnTo>
+                <a:cubicBezTo>
+                  <a:pt x="0" y="136"/>
+                  <a:pt x="1" y="127"/>
+                  <a:pt x="3" y="117"/>
+                </a:cubicBezTo>
+                <a:cubicBezTo>
+                  <a:pt x="4" y="108"/>
+                  <a:pt x="7" y="99"/>
+                  <a:pt x="11" y="90"/>
+                </a:cubicBezTo>
+                <a:cubicBezTo>
+                  <a:pt x="14" y="81"/>
+                  <a:pt x="19" y="73"/>
+                  <a:pt x="24" y="65"/>
+                </a:cubicBezTo>
+                <a:cubicBezTo>
+                  <a:pt x="30" y="57"/>
+                  <a:pt x="36" y="50"/>
+                  <a:pt x="42" y="43"/>
+                </a:cubicBezTo>
+                <a:cubicBezTo>
+                  <a:pt x="49" y="36"/>
+                  <a:pt x="56" y="30"/>
+                  <a:pt x="64" y="25"/>
+                </a:cubicBezTo>
+                <a:cubicBezTo>
+                  <a:pt x="72" y="19"/>
+                  <a:pt x="81" y="15"/>
+                  <a:pt x="90" y="11"/>
+                </a:cubicBezTo>
+                <a:cubicBezTo>
+                  <a:pt x="98" y="8"/>
+                  <a:pt x="107" y="5"/>
+                  <a:pt x="117" y="3"/>
+                </a:cubicBezTo>
+                <a:cubicBezTo>
+                  <a:pt x="126" y="1"/>
+                  <a:pt x="136" y="0"/>
+                  <a:pt x="145" y="0"/>
+                </a:cubicBezTo>
+                <a:lnTo>
+                  <a:pt x="11259" y="0"/>
+                </a:lnTo>
+                <a:cubicBezTo>
+                  <a:pt x="11268" y="0"/>
+                  <a:pt x="11278" y="1"/>
+                  <a:pt x="11287" y="3"/>
+                </a:cubicBezTo>
+                <a:cubicBezTo>
+                  <a:pt x="11297" y="5"/>
+                  <a:pt x="11306" y="8"/>
+                  <a:pt x="11314" y="11"/>
+                </a:cubicBezTo>
+                <a:cubicBezTo>
+                  <a:pt x="11323" y="15"/>
+                  <a:pt x="11332" y="19"/>
+                  <a:pt x="11340" y="25"/>
+                </a:cubicBezTo>
+                <a:cubicBezTo>
+                  <a:pt x="11348" y="30"/>
+                  <a:pt x="11355" y="36"/>
+                  <a:pt x="11362" y="43"/>
+                </a:cubicBezTo>
+                <a:cubicBezTo>
+                  <a:pt x="11368" y="50"/>
+                  <a:pt x="11374" y="57"/>
+                  <a:pt x="11380" y="65"/>
+                </a:cubicBezTo>
+                <a:cubicBezTo>
+                  <a:pt x="11385" y="73"/>
+                  <a:pt x="11390" y="81"/>
+                  <a:pt x="11393" y="90"/>
+                </a:cubicBezTo>
+                <a:cubicBezTo>
+                  <a:pt x="11397" y="99"/>
+                  <a:pt x="11400" y="108"/>
+                  <a:pt x="11401" y="117"/>
+                </a:cubicBezTo>
+                <a:cubicBezTo>
+                  <a:pt x="11403" y="127"/>
+                  <a:pt x="11404" y="136"/>
+                  <a:pt x="11404" y="146"/>
+                </a:cubicBezTo>
+                <a:lnTo>
+                  <a:pt x="11404" y="8746"/>
+                </a:lnTo>
+                <a:cubicBezTo>
+                  <a:pt x="11404" y="8755"/>
+                  <a:pt x="11403" y="8765"/>
+                  <a:pt x="11401" y="8774"/>
+                </a:cubicBezTo>
+                <a:cubicBezTo>
+                  <a:pt x="11400" y="8783"/>
+                  <a:pt x="11397" y="8793"/>
+                  <a:pt x="11393" y="8801"/>
+                </a:cubicBezTo>
+                <a:cubicBezTo>
+                  <a:pt x="11390" y="8810"/>
+                  <a:pt x="11385" y="8819"/>
+                  <a:pt x="11380" y="8827"/>
+                </a:cubicBezTo>
+                <a:cubicBezTo>
+                  <a:pt x="11374" y="8834"/>
+                  <a:pt x="11368" y="8842"/>
+                  <a:pt x="11362" y="8849"/>
+                </a:cubicBezTo>
+                <a:cubicBezTo>
+                  <a:pt x="11355" y="8855"/>
+                  <a:pt x="11348" y="8861"/>
+                  <a:pt x="11340" y="8867"/>
+                </a:cubicBezTo>
+                <a:cubicBezTo>
+                  <a:pt x="11332" y="8872"/>
+                  <a:pt x="11323" y="8876"/>
+                  <a:pt x="11314" y="8880"/>
+                </a:cubicBezTo>
+                <a:cubicBezTo>
+                  <a:pt x="11306" y="8884"/>
+                  <a:pt x="11297" y="8887"/>
+                  <a:pt x="11287" y="8888"/>
+                </a:cubicBezTo>
+                <a:cubicBezTo>
+                  <a:pt x="11278" y="8890"/>
+                  <a:pt x="11268" y="8891"/>
+                  <a:pt x="11259" y="8891"/>
+                </a:cubicBezTo>
+                <a:lnTo>
+                  <a:pt x="145" y="8891"/>
+                </a:lnTo>
+                <a:cubicBezTo>
+                  <a:pt x="136" y="8891"/>
+                  <a:pt x="126" y="8890"/>
+                  <a:pt x="117" y="8888"/>
+                </a:cubicBezTo>
+                <a:cubicBezTo>
+                  <a:pt x="107" y="8887"/>
+                  <a:pt x="98" y="8884"/>
+                  <a:pt x="90" y="8880"/>
+                </a:cubicBezTo>
+                <a:cubicBezTo>
+                  <a:pt x="81" y="8876"/>
+                  <a:pt x="72" y="8872"/>
+                  <a:pt x="64" y="8867"/>
+                </a:cubicBezTo>
+                <a:cubicBezTo>
+                  <a:pt x="56" y="8861"/>
+                  <a:pt x="49" y="8855"/>
+                  <a:pt x="42" y="8849"/>
+                </a:cubicBezTo>
+                <a:cubicBezTo>
+                  <a:pt x="36" y="8842"/>
+                  <a:pt x="30" y="8834"/>
+                  <a:pt x="24" y="8827"/>
+                </a:cubicBezTo>
+                <a:cubicBezTo>
+                  <a:pt x="19" y="8819"/>
+                  <a:pt x="14" y="8810"/>
+                  <a:pt x="11" y="8801"/>
+                </a:cubicBezTo>
+                <a:cubicBezTo>
+                  <a:pt x="7" y="8793"/>
+                  <a:pt x="4" y="8783"/>
+                  <a:pt x="3" y="8774"/>
+                </a:cubicBezTo>
+                <a:cubicBezTo>
+                  <a:pt x="1" y="8765"/>
+                  <a:pt x="0" y="8755"/>
+                  <a:pt x="0" y="8746"/>
                 </a:cubicBezTo>
                 <a:close/>
               </a:path>
@@ -12186,7 +14413,7 @@
       </p:sp>
       <p:pic>
         <p:nvPicPr>
-          <p:cNvPr id="183" name="" descr=""/>
+          <p:cNvPr id="202" name="" descr=""/>
           <p:cNvPicPr/>
           <p:nvPr/>
         </p:nvPicPr>
@@ -12196,8 +14423,8 @@
         </p:blipFill>
         <p:spPr>
           <a:xfrm>
-            <a:off x="466560" y="2066760"/>
-            <a:ext cx="4095360" cy="1800000"/>
+            <a:off x="466560" y="1266840"/>
+            <a:ext cx="4095360" cy="3190680"/>
           </a:xfrm>
           <a:prstGeom prst="rect">
             <a:avLst/>
@@ -12209,883 +14436,13 @@
       </p:pic>
       <p:sp>
         <p:nvSpPr>
-          <p:cNvPr id="184" name=""/>
-          <p:cNvSpPr/>
-          <p:nvPr/>
-        </p:nvSpPr>
-        <p:spPr>
-          <a:xfrm>
-            <a:off x="4762440" y="1504800"/>
-            <a:ext cx="4115160" cy="762480"/>
-          </a:xfrm>
-          <a:custGeom>
-            <a:avLst/>
-            <a:gdLst/>
-            <a:ahLst/>
-            <a:rect l="0" t="0" r="r" b="b"/>
-            <a:pathLst>
-              <a:path w="11431" h="2118">
-                <a:moveTo>
-                  <a:pt x="0" y="0"/>
-                </a:moveTo>
-                <a:lnTo>
-                  <a:pt x="11431" y="0"/>
-                </a:lnTo>
-                <a:lnTo>
-                  <a:pt x="11431" y="2118"/>
-                </a:lnTo>
-                <a:lnTo>
-                  <a:pt x="0" y="2118"/>
-                </a:lnTo>
-                <a:lnTo>
-                  <a:pt x="0" y="0"/>
-                </a:lnTo>
-                <a:close/>
-              </a:path>
-            </a:pathLst>
-          </a:custGeom>
-          <a:solidFill>
-            <a:srgbClr val="ffffff"/>
-          </a:solidFill>
-          <a:ln w="0">
-            <a:noFill/>
-          </a:ln>
-        </p:spPr>
-        <p:txBody>
-          <a:bodyPr lIns="0" rIns="0" tIns="0" bIns="0" anchor="t">
-            <a:noAutofit/>
-          </a:bodyPr>
-          <a:p>
-            <a:endParaRPr b="0" lang="en-US" sz="2400" spc="-1" strike="noStrike">
-              <a:solidFill>
-                <a:srgbClr val="000000"/>
-              </a:solidFill>
-              <a:latin typeface="DejaVu Serif"/>
-            </a:endParaRPr>
-          </a:p>
-        </p:txBody>
-      </p:sp>
-      <p:sp>
-        <p:nvSpPr>
-          <p:cNvPr id="185" name=""/>
-          <p:cNvSpPr/>
-          <p:nvPr/>
-        </p:nvSpPr>
-        <p:spPr>
-          <a:xfrm>
-            <a:off x="4762440" y="1504800"/>
-            <a:ext cx="4115160" cy="38520"/>
-          </a:xfrm>
-          <a:custGeom>
-            <a:avLst/>
-            <a:gdLst/>
-            <a:ahLst/>
-            <a:rect l="0" t="0" r="r" b="b"/>
-            <a:pathLst>
-              <a:path w="11431" h="107">
-                <a:moveTo>
-                  <a:pt x="0" y="0"/>
-                </a:moveTo>
-                <a:lnTo>
-                  <a:pt x="11431" y="0"/>
-                </a:lnTo>
-                <a:lnTo>
-                  <a:pt x="11431" y="107"/>
-                </a:lnTo>
-                <a:lnTo>
-                  <a:pt x="0" y="107"/>
-                </a:lnTo>
-                <a:lnTo>
-                  <a:pt x="0" y="0"/>
-                </a:lnTo>
-                <a:close/>
-              </a:path>
-            </a:pathLst>
-          </a:custGeom>
-          <a:solidFill>
-            <a:srgbClr val="dd784b"/>
-          </a:solidFill>
-          <a:ln w="0">
-            <a:noFill/>
-          </a:ln>
-        </p:spPr>
-        <p:txBody>
-          <a:bodyPr lIns="0" rIns="0" tIns="0" bIns="0" anchor="t">
-            <a:noAutofit/>
-          </a:bodyPr>
-          <a:p>
-            <a:endParaRPr b="0" lang="en-US" sz="2400" spc="-1" strike="noStrike">
-              <a:solidFill>
-                <a:srgbClr val="000000"/>
-              </a:solidFill>
-              <a:latin typeface="DejaVu Serif"/>
-            </a:endParaRPr>
-          </a:p>
-        </p:txBody>
-      </p:sp>
-      <p:sp>
-        <p:nvSpPr>
-          <p:cNvPr id="186" name=""/>
-          <p:cNvSpPr/>
-          <p:nvPr/>
-        </p:nvSpPr>
-        <p:spPr>
-          <a:xfrm>
-            <a:off x="4762440" y="2257200"/>
-            <a:ext cx="4115160" cy="10080"/>
-          </a:xfrm>
-          <a:custGeom>
-            <a:avLst/>
-            <a:gdLst/>
-            <a:ahLst/>
-            <a:rect l="0" t="0" r="r" b="b"/>
-            <a:pathLst>
-              <a:path w="11431" h="28">
-                <a:moveTo>
-                  <a:pt x="0" y="0"/>
-                </a:moveTo>
-                <a:lnTo>
-                  <a:pt x="11431" y="0"/>
-                </a:lnTo>
-                <a:lnTo>
-                  <a:pt x="11431" y="28"/>
-                </a:lnTo>
-                <a:lnTo>
-                  <a:pt x="0" y="28"/>
-                </a:lnTo>
-                <a:lnTo>
-                  <a:pt x="0" y="0"/>
-                </a:lnTo>
-                <a:close/>
-              </a:path>
-            </a:pathLst>
-          </a:custGeom>
-          <a:solidFill>
-            <a:srgbClr val="e5e7eb"/>
-          </a:solidFill>
-          <a:ln w="0">
-            <a:noFill/>
-          </a:ln>
-        </p:spPr>
-        <p:txBody>
-          <a:bodyPr lIns="0" rIns="0" tIns="0" bIns="0" anchor="t">
-            <a:noAutofit/>
-          </a:bodyPr>
-          <a:p>
-            <a:endParaRPr b="0" lang="en-US" sz="2400" spc="-1" strike="noStrike">
-              <a:solidFill>
-                <a:srgbClr val="000000"/>
-              </a:solidFill>
-              <a:latin typeface="DejaVu Serif"/>
-            </a:endParaRPr>
-          </a:p>
-        </p:txBody>
-      </p:sp>
-      <p:sp>
-        <p:nvSpPr>
-          <p:cNvPr id="187" name=""/>
-          <p:cNvSpPr/>
-          <p:nvPr/>
-        </p:nvSpPr>
-        <p:spPr>
-          <a:xfrm>
-            <a:off x="8867520" y="1504800"/>
-            <a:ext cx="10080" cy="762480"/>
-          </a:xfrm>
-          <a:custGeom>
-            <a:avLst/>
-            <a:gdLst/>
-            <a:ahLst/>
-            <a:rect l="0" t="0" r="r" b="b"/>
-            <a:pathLst>
-              <a:path w="28" h="2118">
-                <a:moveTo>
-                  <a:pt x="0" y="106"/>
-                </a:moveTo>
-                <a:lnTo>
-                  <a:pt x="0" y="2118"/>
-                </a:lnTo>
-                <a:lnTo>
-                  <a:pt x="28" y="2118"/>
-                </a:lnTo>
-                <a:lnTo>
-                  <a:pt x="28" y="0"/>
-                </a:lnTo>
-                <a:lnTo>
-                  <a:pt x="0" y="106"/>
-                </a:lnTo>
-                <a:close/>
-              </a:path>
-            </a:pathLst>
-          </a:custGeom>
-          <a:solidFill>
-            <a:srgbClr val="e5e7eb"/>
-          </a:solidFill>
-          <a:ln w="0">
-            <a:noFill/>
-          </a:ln>
-        </p:spPr>
-        <p:txBody>
-          <a:bodyPr lIns="0" rIns="0" tIns="0" bIns="0" anchor="t">
-            <a:noAutofit/>
-          </a:bodyPr>
-          <a:p>
-            <a:endParaRPr b="0" lang="en-US" sz="2400" spc="-1" strike="noStrike">
-              <a:solidFill>
-                <a:srgbClr val="000000"/>
-              </a:solidFill>
-              <a:latin typeface="DejaVu Serif"/>
-            </a:endParaRPr>
-          </a:p>
-        </p:txBody>
-      </p:sp>
-      <p:sp>
-        <p:nvSpPr>
-          <p:cNvPr id="188" name=""/>
-          <p:cNvSpPr/>
-          <p:nvPr/>
-        </p:nvSpPr>
-        <p:spPr>
-          <a:xfrm>
-            <a:off x="4762440" y="1504800"/>
-            <a:ext cx="9720" cy="762480"/>
-          </a:xfrm>
-          <a:custGeom>
-            <a:avLst/>
-            <a:gdLst/>
-            <a:ahLst/>
-            <a:rect l="0" t="0" r="r" b="b"/>
-            <a:pathLst>
-              <a:path w="27" h="2118">
-                <a:moveTo>
-                  <a:pt x="0" y="0"/>
-                </a:moveTo>
-                <a:lnTo>
-                  <a:pt x="0" y="2118"/>
-                </a:lnTo>
-                <a:lnTo>
-                  <a:pt x="27" y="2118"/>
-                </a:lnTo>
-                <a:lnTo>
-                  <a:pt x="27" y="106"/>
-                </a:lnTo>
-                <a:lnTo>
-                  <a:pt x="0" y="0"/>
-                </a:lnTo>
-                <a:close/>
-              </a:path>
-            </a:pathLst>
-          </a:custGeom>
-          <a:solidFill>
-            <a:srgbClr val="e5e7eb"/>
-          </a:solidFill>
-          <a:ln w="0">
-            <a:noFill/>
-          </a:ln>
-        </p:spPr>
-        <p:txBody>
-          <a:bodyPr lIns="0" rIns="0" tIns="0" bIns="0" anchor="t">
-            <a:noAutofit/>
-          </a:bodyPr>
-          <a:p>
-            <a:endParaRPr b="0" lang="en-US" sz="2400" spc="-1" strike="noStrike">
-              <a:solidFill>
-                <a:srgbClr val="000000"/>
-              </a:solidFill>
-              <a:latin typeface="DejaVu Serif"/>
-            </a:endParaRPr>
-          </a:p>
-        </p:txBody>
-      </p:sp>
-      <p:sp>
-        <p:nvSpPr>
-          <p:cNvPr id="189" name=""/>
-          <p:cNvSpPr/>
-          <p:nvPr/>
-        </p:nvSpPr>
-        <p:spPr>
-          <a:xfrm>
-            <a:off x="4762440" y="2371680"/>
-            <a:ext cx="4115160" cy="971640"/>
-          </a:xfrm>
-          <a:custGeom>
-            <a:avLst/>
-            <a:gdLst/>
-            <a:ahLst/>
-            <a:rect l="0" t="0" r="r" b="b"/>
-            <a:pathLst>
-              <a:path w="11431" h="2699">
-                <a:moveTo>
-                  <a:pt x="0" y="0"/>
-                </a:moveTo>
-                <a:lnTo>
-                  <a:pt x="11431" y="0"/>
-                </a:lnTo>
-                <a:lnTo>
-                  <a:pt x="11431" y="2699"/>
-                </a:lnTo>
-                <a:lnTo>
-                  <a:pt x="0" y="2699"/>
-                </a:lnTo>
-                <a:lnTo>
-                  <a:pt x="0" y="0"/>
-                </a:lnTo>
-                <a:close/>
-              </a:path>
-            </a:pathLst>
-          </a:custGeom>
-          <a:solidFill>
-            <a:srgbClr val="ffffff"/>
-          </a:solidFill>
-          <a:ln w="0">
-            <a:noFill/>
-          </a:ln>
-        </p:spPr>
-        <p:txBody>
-          <a:bodyPr lIns="0" rIns="0" tIns="0" bIns="0" anchor="t">
-            <a:noAutofit/>
-          </a:bodyPr>
-          <a:p>
-            <a:endParaRPr b="0" lang="en-US" sz="2400" spc="-1" strike="noStrike">
-              <a:solidFill>
-                <a:srgbClr val="000000"/>
-              </a:solidFill>
-              <a:latin typeface="DejaVu Serif"/>
-            </a:endParaRPr>
-          </a:p>
-        </p:txBody>
-      </p:sp>
-      <p:sp>
-        <p:nvSpPr>
-          <p:cNvPr id="190" name=""/>
-          <p:cNvSpPr/>
-          <p:nvPr/>
-        </p:nvSpPr>
-        <p:spPr>
-          <a:xfrm>
-            <a:off x="4762440" y="2371680"/>
-            <a:ext cx="4115160" cy="38160"/>
-          </a:xfrm>
-          <a:custGeom>
-            <a:avLst/>
-            <a:gdLst/>
-            <a:ahLst/>
-            <a:rect l="0" t="0" r="r" b="b"/>
-            <a:pathLst>
-              <a:path w="11431" h="106">
-                <a:moveTo>
-                  <a:pt x="0" y="0"/>
-                </a:moveTo>
-                <a:lnTo>
-                  <a:pt x="11431" y="0"/>
-                </a:lnTo>
-                <a:lnTo>
-                  <a:pt x="11431" y="106"/>
-                </a:lnTo>
-                <a:lnTo>
-                  <a:pt x="0" y="106"/>
-                </a:lnTo>
-                <a:lnTo>
-                  <a:pt x="0" y="0"/>
-                </a:lnTo>
-                <a:close/>
-              </a:path>
-            </a:pathLst>
-          </a:custGeom>
-          <a:solidFill>
-            <a:srgbClr val="3d68ec"/>
-          </a:solidFill>
-          <a:ln w="0">
-            <a:noFill/>
-          </a:ln>
-        </p:spPr>
-        <p:txBody>
-          <a:bodyPr lIns="0" rIns="0" tIns="0" bIns="0" anchor="t">
-            <a:noAutofit/>
-          </a:bodyPr>
-          <a:p>
-            <a:endParaRPr b="0" lang="en-US" sz="2400" spc="-1" strike="noStrike">
-              <a:solidFill>
-                <a:srgbClr val="000000"/>
-              </a:solidFill>
-              <a:latin typeface="DejaVu Serif"/>
-            </a:endParaRPr>
-          </a:p>
-        </p:txBody>
-      </p:sp>
-      <p:sp>
-        <p:nvSpPr>
-          <p:cNvPr id="191" name=""/>
-          <p:cNvSpPr/>
-          <p:nvPr/>
-        </p:nvSpPr>
-        <p:spPr>
-          <a:xfrm>
-            <a:off x="4762440" y="3333600"/>
-            <a:ext cx="4115160" cy="9720"/>
-          </a:xfrm>
-          <a:custGeom>
-            <a:avLst/>
-            <a:gdLst/>
-            <a:ahLst/>
-            <a:rect l="0" t="0" r="r" b="b"/>
-            <a:pathLst>
-              <a:path w="11431" h="27">
-                <a:moveTo>
-                  <a:pt x="0" y="0"/>
-                </a:moveTo>
-                <a:lnTo>
-                  <a:pt x="11431" y="0"/>
-                </a:lnTo>
-                <a:lnTo>
-                  <a:pt x="11431" y="27"/>
-                </a:lnTo>
-                <a:lnTo>
-                  <a:pt x="0" y="27"/>
-                </a:lnTo>
-                <a:lnTo>
-                  <a:pt x="0" y="0"/>
-                </a:lnTo>
-                <a:close/>
-              </a:path>
-            </a:pathLst>
-          </a:custGeom>
-          <a:solidFill>
-            <a:srgbClr val="e5e7eb"/>
-          </a:solidFill>
-          <a:ln w="0">
-            <a:noFill/>
-          </a:ln>
-        </p:spPr>
-        <p:txBody>
-          <a:bodyPr lIns="0" rIns="0" tIns="0" bIns="0" anchor="t">
-            <a:noAutofit/>
-          </a:bodyPr>
-          <a:p>
-            <a:endParaRPr b="0" lang="en-US" sz="2400" spc="-1" strike="noStrike">
-              <a:solidFill>
-                <a:srgbClr val="000000"/>
-              </a:solidFill>
-              <a:latin typeface="DejaVu Serif"/>
-            </a:endParaRPr>
-          </a:p>
-        </p:txBody>
-      </p:sp>
-      <p:sp>
-        <p:nvSpPr>
-          <p:cNvPr id="192" name=""/>
-          <p:cNvSpPr/>
-          <p:nvPr/>
-        </p:nvSpPr>
-        <p:spPr>
-          <a:xfrm>
-            <a:off x="8867520" y="2371680"/>
-            <a:ext cx="10080" cy="971640"/>
-          </a:xfrm>
-          <a:custGeom>
-            <a:avLst/>
-            <a:gdLst/>
-            <a:ahLst/>
-            <a:rect l="0" t="0" r="r" b="b"/>
-            <a:pathLst>
-              <a:path w="28" h="2699">
-                <a:moveTo>
-                  <a:pt x="0" y="105"/>
-                </a:moveTo>
-                <a:lnTo>
-                  <a:pt x="0" y="2699"/>
-                </a:lnTo>
-                <a:lnTo>
-                  <a:pt x="28" y="2699"/>
-                </a:lnTo>
-                <a:lnTo>
-                  <a:pt x="28" y="0"/>
-                </a:lnTo>
-                <a:lnTo>
-                  <a:pt x="0" y="105"/>
-                </a:lnTo>
-                <a:close/>
-              </a:path>
-            </a:pathLst>
-          </a:custGeom>
-          <a:solidFill>
-            <a:srgbClr val="e5e7eb"/>
-          </a:solidFill>
-          <a:ln w="0">
-            <a:noFill/>
-          </a:ln>
-        </p:spPr>
-        <p:txBody>
-          <a:bodyPr lIns="0" rIns="0" tIns="0" bIns="0" anchor="t">
-            <a:noAutofit/>
-          </a:bodyPr>
-          <a:p>
-            <a:endParaRPr b="0" lang="en-US" sz="2400" spc="-1" strike="noStrike">
-              <a:solidFill>
-                <a:srgbClr val="000000"/>
-              </a:solidFill>
-              <a:latin typeface="DejaVu Serif"/>
-            </a:endParaRPr>
-          </a:p>
-        </p:txBody>
-      </p:sp>
-      <p:sp>
-        <p:nvSpPr>
-          <p:cNvPr id="193" name=""/>
-          <p:cNvSpPr/>
-          <p:nvPr/>
-        </p:nvSpPr>
-        <p:spPr>
-          <a:xfrm>
-            <a:off x="4762440" y="2371680"/>
-            <a:ext cx="9720" cy="971640"/>
-          </a:xfrm>
-          <a:custGeom>
-            <a:avLst/>
-            <a:gdLst/>
-            <a:ahLst/>
-            <a:rect l="0" t="0" r="r" b="b"/>
-            <a:pathLst>
-              <a:path w="27" h="2699">
-                <a:moveTo>
-                  <a:pt x="0" y="0"/>
-                </a:moveTo>
-                <a:lnTo>
-                  <a:pt x="0" y="2699"/>
-                </a:lnTo>
-                <a:lnTo>
-                  <a:pt x="27" y="2699"/>
-                </a:lnTo>
-                <a:lnTo>
-                  <a:pt x="27" y="105"/>
-                </a:lnTo>
-                <a:lnTo>
-                  <a:pt x="0" y="0"/>
-                </a:lnTo>
-                <a:close/>
-              </a:path>
-            </a:pathLst>
-          </a:custGeom>
-          <a:solidFill>
-            <a:srgbClr val="e5e7eb"/>
-          </a:solidFill>
-          <a:ln w="0">
-            <a:noFill/>
-          </a:ln>
-        </p:spPr>
-        <p:txBody>
-          <a:bodyPr lIns="0" rIns="0" tIns="0" bIns="0" anchor="t">
-            <a:noAutofit/>
-          </a:bodyPr>
-          <a:p>
-            <a:endParaRPr b="0" lang="en-US" sz="2400" spc="-1" strike="noStrike">
-              <a:solidFill>
-                <a:srgbClr val="000000"/>
-              </a:solidFill>
-              <a:latin typeface="DejaVu Serif"/>
-            </a:endParaRPr>
-          </a:p>
-        </p:txBody>
-      </p:sp>
-      <p:sp>
-        <p:nvSpPr>
-          <p:cNvPr id="194" name=""/>
-          <p:cNvSpPr/>
-          <p:nvPr/>
-        </p:nvSpPr>
-        <p:spPr>
-          <a:xfrm>
-            <a:off x="4762440" y="3447720"/>
-            <a:ext cx="4115160" cy="972000"/>
-          </a:xfrm>
-          <a:custGeom>
-            <a:avLst/>
-            <a:gdLst/>
-            <a:ahLst/>
-            <a:rect l="0" t="0" r="r" b="b"/>
-            <a:pathLst>
-              <a:path w="11431" h="2700">
-                <a:moveTo>
-                  <a:pt x="0" y="0"/>
-                </a:moveTo>
-                <a:lnTo>
-                  <a:pt x="11431" y="0"/>
-                </a:lnTo>
-                <a:lnTo>
-                  <a:pt x="11431" y="2700"/>
-                </a:lnTo>
-                <a:lnTo>
-                  <a:pt x="0" y="2700"/>
-                </a:lnTo>
-                <a:lnTo>
-                  <a:pt x="0" y="0"/>
-                </a:lnTo>
-                <a:close/>
-              </a:path>
-            </a:pathLst>
-          </a:custGeom>
-          <a:solidFill>
-            <a:srgbClr val="ffffff"/>
-          </a:solidFill>
-          <a:ln w="0">
-            <a:noFill/>
-          </a:ln>
-        </p:spPr>
-        <p:txBody>
-          <a:bodyPr lIns="0" rIns="0" tIns="0" bIns="0" anchor="t">
-            <a:noAutofit/>
-          </a:bodyPr>
-          <a:p>
-            <a:endParaRPr b="0" lang="en-US" sz="2400" spc="-1" strike="noStrike">
-              <a:solidFill>
-                <a:srgbClr val="000000"/>
-              </a:solidFill>
-              <a:latin typeface="DejaVu Serif"/>
-            </a:endParaRPr>
-          </a:p>
-        </p:txBody>
-      </p:sp>
-      <p:sp>
-        <p:nvSpPr>
-          <p:cNvPr id="195" name=""/>
-          <p:cNvSpPr/>
-          <p:nvPr/>
-        </p:nvSpPr>
-        <p:spPr>
-          <a:xfrm>
-            <a:off x="4762440" y="3447720"/>
-            <a:ext cx="4115160" cy="38520"/>
-          </a:xfrm>
-          <a:custGeom>
-            <a:avLst/>
-            <a:gdLst/>
-            <a:ahLst/>
-            <a:rect l="0" t="0" r="r" b="b"/>
-            <a:pathLst>
-              <a:path w="11431" h="107">
-                <a:moveTo>
-                  <a:pt x="0" y="0"/>
-                </a:moveTo>
-                <a:lnTo>
-                  <a:pt x="11431" y="0"/>
-                </a:lnTo>
-                <a:lnTo>
-                  <a:pt x="11431" y="107"/>
-                </a:lnTo>
-                <a:lnTo>
-                  <a:pt x="0" y="107"/>
-                </a:lnTo>
-                <a:lnTo>
-                  <a:pt x="0" y="0"/>
-                </a:lnTo>
-                <a:close/>
-              </a:path>
-            </a:pathLst>
-          </a:custGeom>
-          <a:solidFill>
-            <a:srgbClr val="00af81"/>
-          </a:solidFill>
-          <a:ln w="0">
-            <a:noFill/>
-          </a:ln>
-        </p:spPr>
-        <p:txBody>
-          <a:bodyPr lIns="0" rIns="0" tIns="0" bIns="0" anchor="t">
-            <a:noAutofit/>
-          </a:bodyPr>
-          <a:p>
-            <a:endParaRPr b="0" lang="en-US" sz="2400" spc="-1" strike="noStrike">
-              <a:solidFill>
-                <a:srgbClr val="000000"/>
-              </a:solidFill>
-              <a:latin typeface="DejaVu Serif"/>
-            </a:endParaRPr>
-          </a:p>
-        </p:txBody>
-      </p:sp>
-      <p:sp>
-        <p:nvSpPr>
-          <p:cNvPr id="196" name=""/>
-          <p:cNvSpPr/>
-          <p:nvPr/>
-        </p:nvSpPr>
-        <p:spPr>
-          <a:xfrm>
-            <a:off x="4762440" y="4410000"/>
-            <a:ext cx="4115160" cy="9720"/>
-          </a:xfrm>
-          <a:custGeom>
-            <a:avLst/>
-            <a:gdLst/>
-            <a:ahLst/>
-            <a:rect l="0" t="0" r="r" b="b"/>
-            <a:pathLst>
-              <a:path w="11431" h="27">
-                <a:moveTo>
-                  <a:pt x="0" y="0"/>
-                </a:moveTo>
-                <a:lnTo>
-                  <a:pt x="11431" y="0"/>
-                </a:lnTo>
-                <a:lnTo>
-                  <a:pt x="11431" y="27"/>
-                </a:lnTo>
-                <a:lnTo>
-                  <a:pt x="0" y="27"/>
-                </a:lnTo>
-                <a:lnTo>
-                  <a:pt x="0" y="0"/>
-                </a:lnTo>
-                <a:close/>
-              </a:path>
-            </a:pathLst>
-          </a:custGeom>
-          <a:solidFill>
-            <a:srgbClr val="e5e7eb"/>
-          </a:solidFill>
-          <a:ln w="0">
-            <a:noFill/>
-          </a:ln>
-        </p:spPr>
-        <p:txBody>
-          <a:bodyPr lIns="0" rIns="0" tIns="0" bIns="0" anchor="t">
-            <a:noAutofit/>
-          </a:bodyPr>
-          <a:p>
-            <a:endParaRPr b="0" lang="en-US" sz="2400" spc="-1" strike="noStrike">
-              <a:solidFill>
-                <a:srgbClr val="000000"/>
-              </a:solidFill>
-              <a:latin typeface="DejaVu Serif"/>
-            </a:endParaRPr>
-          </a:p>
-        </p:txBody>
-      </p:sp>
-      <p:sp>
-        <p:nvSpPr>
-          <p:cNvPr id="197" name=""/>
-          <p:cNvSpPr/>
-          <p:nvPr/>
-        </p:nvSpPr>
-        <p:spPr>
-          <a:xfrm>
-            <a:off x="8867520" y="3447720"/>
-            <a:ext cx="10080" cy="972000"/>
-          </a:xfrm>
-          <a:custGeom>
-            <a:avLst/>
-            <a:gdLst/>
-            <a:ahLst/>
-            <a:rect l="0" t="0" r="r" b="b"/>
-            <a:pathLst>
-              <a:path w="28" h="2700">
-                <a:moveTo>
-                  <a:pt x="0" y="106"/>
-                </a:moveTo>
-                <a:lnTo>
-                  <a:pt x="0" y="2700"/>
-                </a:lnTo>
-                <a:lnTo>
-                  <a:pt x="28" y="2700"/>
-                </a:lnTo>
-                <a:lnTo>
-                  <a:pt x="28" y="0"/>
-                </a:lnTo>
-                <a:lnTo>
-                  <a:pt x="0" y="106"/>
-                </a:lnTo>
-                <a:close/>
-              </a:path>
-            </a:pathLst>
-          </a:custGeom>
-          <a:solidFill>
-            <a:srgbClr val="e5e7eb"/>
-          </a:solidFill>
-          <a:ln w="0">
-            <a:noFill/>
-          </a:ln>
-        </p:spPr>
-        <p:txBody>
-          <a:bodyPr lIns="0" rIns="0" tIns="0" bIns="0" anchor="t">
-            <a:noAutofit/>
-          </a:bodyPr>
-          <a:p>
-            <a:endParaRPr b="0" lang="en-US" sz="2400" spc="-1" strike="noStrike">
-              <a:solidFill>
-                <a:srgbClr val="000000"/>
-              </a:solidFill>
-              <a:latin typeface="DejaVu Serif"/>
-            </a:endParaRPr>
-          </a:p>
-        </p:txBody>
-      </p:sp>
-      <p:sp>
-        <p:nvSpPr>
-          <p:cNvPr id="198" name=""/>
-          <p:cNvSpPr/>
-          <p:nvPr/>
-        </p:nvSpPr>
-        <p:spPr>
-          <a:xfrm>
-            <a:off x="4762440" y="3447720"/>
-            <a:ext cx="9720" cy="972000"/>
-          </a:xfrm>
-          <a:custGeom>
-            <a:avLst/>
-            <a:gdLst/>
-            <a:ahLst/>
-            <a:rect l="0" t="0" r="r" b="b"/>
-            <a:pathLst>
-              <a:path w="27" h="2700">
-                <a:moveTo>
-                  <a:pt x="0" y="0"/>
-                </a:moveTo>
-                <a:lnTo>
-                  <a:pt x="0" y="2700"/>
-                </a:lnTo>
-                <a:lnTo>
-                  <a:pt x="27" y="2700"/>
-                </a:lnTo>
-                <a:lnTo>
-                  <a:pt x="27" y="106"/>
-                </a:lnTo>
-                <a:lnTo>
-                  <a:pt x="0" y="0"/>
-                </a:lnTo>
-                <a:close/>
-              </a:path>
-            </a:pathLst>
-          </a:custGeom>
-          <a:solidFill>
-            <a:srgbClr val="e5e7eb"/>
-          </a:solidFill>
-          <a:ln w="0">
-            <a:noFill/>
-          </a:ln>
-        </p:spPr>
-        <p:txBody>
-          <a:bodyPr lIns="0" rIns="0" tIns="0" bIns="0" anchor="t">
-            <a:noAutofit/>
-          </a:bodyPr>
-          <a:p>
-            <a:endParaRPr b="0" lang="en-US" sz="2400" spc="-1" strike="noStrike">
-              <a:solidFill>
-                <a:srgbClr val="000000"/>
-              </a:solidFill>
-              <a:latin typeface="DejaVu Serif"/>
-            </a:endParaRPr>
-          </a:p>
-        </p:txBody>
-      </p:sp>
-      <p:sp>
-        <p:nvSpPr>
-          <p:cNvPr id="199" name=""/>
+          <p:cNvPr id="203" name=""/>
           <p:cNvSpPr txBox="1"/>
           <p:nvPr/>
         </p:nvSpPr>
         <p:spPr>
           <a:xfrm>
-            <a:off x="439920" y="834480"/>
+            <a:off x="439920" y="577080"/>
             <a:ext cx="7038720" cy="399600"/>
           </a:xfrm>
           <a:prstGeom prst="rect">
@@ -13122,7 +14479,920 @@
       </p:sp>
       <p:sp>
         <p:nvSpPr>
-          <p:cNvPr id="200" name=""/>
+          <p:cNvPr id="204" name=""/>
+          <p:cNvSpPr/>
+          <p:nvPr/>
+        </p:nvSpPr>
+        <p:spPr>
+          <a:xfrm>
+            <a:off x="4762440" y="1504800"/>
+            <a:ext cx="4115160" cy="762480"/>
+          </a:xfrm>
+          <a:custGeom>
+            <a:avLst/>
+            <a:gdLst/>
+            <a:ahLst/>
+            <a:rect l="0" t="0" r="r" b="b"/>
+            <a:pathLst>
+              <a:path w="11431" h="2118">
+                <a:moveTo>
+                  <a:pt x="0" y="0"/>
+                </a:moveTo>
+                <a:lnTo>
+                  <a:pt x="11431" y="0"/>
+                </a:lnTo>
+                <a:lnTo>
+                  <a:pt x="11431" y="2118"/>
+                </a:lnTo>
+                <a:lnTo>
+                  <a:pt x="0" y="2118"/>
+                </a:lnTo>
+                <a:lnTo>
+                  <a:pt x="0" y="0"/>
+                </a:lnTo>
+                <a:close/>
+              </a:path>
+            </a:pathLst>
+          </a:custGeom>
+          <a:solidFill>
+            <a:srgbClr val="ffffff"/>
+          </a:solidFill>
+          <a:ln w="0">
+            <a:noFill/>
+          </a:ln>
+        </p:spPr>
+        <p:txBody>
+          <a:bodyPr lIns="0" rIns="0" tIns="0" bIns="0" anchor="t">
+            <a:noAutofit/>
+          </a:bodyPr>
+          <a:p>
+            <a:endParaRPr b="0" lang="en-US" sz="2400" spc="-1" strike="noStrike">
+              <a:solidFill>
+                <a:srgbClr val="000000"/>
+              </a:solidFill>
+              <a:latin typeface="DejaVu Serif"/>
+            </a:endParaRPr>
+          </a:p>
+        </p:txBody>
+      </p:sp>
+      <p:sp>
+        <p:nvSpPr>
+          <p:cNvPr id="205" name=""/>
+          <p:cNvSpPr/>
+          <p:nvPr/>
+        </p:nvSpPr>
+        <p:spPr>
+          <a:xfrm>
+            <a:off x="4762440" y="1504800"/>
+            <a:ext cx="4115160" cy="38520"/>
+          </a:xfrm>
+          <a:custGeom>
+            <a:avLst/>
+            <a:gdLst/>
+            <a:ahLst/>
+            <a:rect l="0" t="0" r="r" b="b"/>
+            <a:pathLst>
+              <a:path w="11431" h="107">
+                <a:moveTo>
+                  <a:pt x="0" y="0"/>
+                </a:moveTo>
+                <a:lnTo>
+                  <a:pt x="11431" y="0"/>
+                </a:lnTo>
+                <a:lnTo>
+                  <a:pt x="11431" y="107"/>
+                </a:lnTo>
+                <a:lnTo>
+                  <a:pt x="0" y="107"/>
+                </a:lnTo>
+                <a:lnTo>
+                  <a:pt x="0" y="0"/>
+                </a:lnTo>
+                <a:close/>
+              </a:path>
+            </a:pathLst>
+          </a:custGeom>
+          <a:solidFill>
+            <a:srgbClr val="dd784b"/>
+          </a:solidFill>
+          <a:ln w="0">
+            <a:noFill/>
+          </a:ln>
+        </p:spPr>
+        <p:txBody>
+          <a:bodyPr lIns="0" rIns="0" tIns="0" bIns="0" anchor="t">
+            <a:noAutofit/>
+          </a:bodyPr>
+          <a:p>
+            <a:endParaRPr b="0" lang="en-US" sz="2400" spc="-1" strike="noStrike">
+              <a:solidFill>
+                <a:srgbClr val="000000"/>
+              </a:solidFill>
+              <a:latin typeface="DejaVu Serif"/>
+            </a:endParaRPr>
+          </a:p>
+        </p:txBody>
+      </p:sp>
+      <p:sp>
+        <p:nvSpPr>
+          <p:cNvPr id="206" name=""/>
+          <p:cNvSpPr/>
+          <p:nvPr/>
+        </p:nvSpPr>
+        <p:spPr>
+          <a:xfrm>
+            <a:off x="4762440" y="2257200"/>
+            <a:ext cx="4115160" cy="10080"/>
+          </a:xfrm>
+          <a:custGeom>
+            <a:avLst/>
+            <a:gdLst/>
+            <a:ahLst/>
+            <a:rect l="0" t="0" r="r" b="b"/>
+            <a:pathLst>
+              <a:path w="11431" h="28">
+                <a:moveTo>
+                  <a:pt x="0" y="0"/>
+                </a:moveTo>
+                <a:lnTo>
+                  <a:pt x="11431" y="0"/>
+                </a:lnTo>
+                <a:lnTo>
+                  <a:pt x="11431" y="28"/>
+                </a:lnTo>
+                <a:lnTo>
+                  <a:pt x="0" y="28"/>
+                </a:lnTo>
+                <a:lnTo>
+                  <a:pt x="0" y="0"/>
+                </a:lnTo>
+                <a:close/>
+              </a:path>
+            </a:pathLst>
+          </a:custGeom>
+          <a:solidFill>
+            <a:srgbClr val="e5e7eb"/>
+          </a:solidFill>
+          <a:ln w="0">
+            <a:noFill/>
+          </a:ln>
+        </p:spPr>
+        <p:txBody>
+          <a:bodyPr lIns="0" rIns="0" tIns="0" bIns="0" anchor="t">
+            <a:noAutofit/>
+          </a:bodyPr>
+          <a:p>
+            <a:endParaRPr b="0" lang="en-US" sz="2400" spc="-1" strike="noStrike">
+              <a:solidFill>
+                <a:srgbClr val="000000"/>
+              </a:solidFill>
+              <a:latin typeface="DejaVu Serif"/>
+            </a:endParaRPr>
+          </a:p>
+        </p:txBody>
+      </p:sp>
+      <p:sp>
+        <p:nvSpPr>
+          <p:cNvPr id="207" name=""/>
+          <p:cNvSpPr/>
+          <p:nvPr/>
+        </p:nvSpPr>
+        <p:spPr>
+          <a:xfrm>
+            <a:off x="8867520" y="1504800"/>
+            <a:ext cx="10080" cy="762480"/>
+          </a:xfrm>
+          <a:custGeom>
+            <a:avLst/>
+            <a:gdLst/>
+            <a:ahLst/>
+            <a:rect l="0" t="0" r="r" b="b"/>
+            <a:pathLst>
+              <a:path w="28" h="2118">
+                <a:moveTo>
+                  <a:pt x="0" y="106"/>
+                </a:moveTo>
+                <a:lnTo>
+                  <a:pt x="0" y="2118"/>
+                </a:lnTo>
+                <a:lnTo>
+                  <a:pt x="28" y="2118"/>
+                </a:lnTo>
+                <a:lnTo>
+                  <a:pt x="28" y="0"/>
+                </a:lnTo>
+                <a:lnTo>
+                  <a:pt x="0" y="106"/>
+                </a:lnTo>
+                <a:close/>
+              </a:path>
+            </a:pathLst>
+          </a:custGeom>
+          <a:solidFill>
+            <a:srgbClr val="e5e7eb"/>
+          </a:solidFill>
+          <a:ln w="0">
+            <a:noFill/>
+          </a:ln>
+        </p:spPr>
+        <p:txBody>
+          <a:bodyPr lIns="0" rIns="0" tIns="0" bIns="0" anchor="t">
+            <a:noAutofit/>
+          </a:bodyPr>
+          <a:p>
+            <a:endParaRPr b="0" lang="en-US" sz="2400" spc="-1" strike="noStrike">
+              <a:solidFill>
+                <a:srgbClr val="000000"/>
+              </a:solidFill>
+              <a:latin typeface="DejaVu Serif"/>
+            </a:endParaRPr>
+          </a:p>
+        </p:txBody>
+      </p:sp>
+      <p:sp>
+        <p:nvSpPr>
+          <p:cNvPr id="208" name=""/>
+          <p:cNvSpPr/>
+          <p:nvPr/>
+        </p:nvSpPr>
+        <p:spPr>
+          <a:xfrm>
+            <a:off x="4762440" y="1504800"/>
+            <a:ext cx="9720" cy="762480"/>
+          </a:xfrm>
+          <a:custGeom>
+            <a:avLst/>
+            <a:gdLst/>
+            <a:ahLst/>
+            <a:rect l="0" t="0" r="r" b="b"/>
+            <a:pathLst>
+              <a:path w="27" h="2118">
+                <a:moveTo>
+                  <a:pt x="0" y="0"/>
+                </a:moveTo>
+                <a:lnTo>
+                  <a:pt x="0" y="2118"/>
+                </a:lnTo>
+                <a:lnTo>
+                  <a:pt x="27" y="2118"/>
+                </a:lnTo>
+                <a:lnTo>
+                  <a:pt x="27" y="106"/>
+                </a:lnTo>
+                <a:lnTo>
+                  <a:pt x="0" y="0"/>
+                </a:lnTo>
+                <a:close/>
+              </a:path>
+            </a:pathLst>
+          </a:custGeom>
+          <a:solidFill>
+            <a:srgbClr val="e5e7eb"/>
+          </a:solidFill>
+          <a:ln w="0">
+            <a:noFill/>
+          </a:ln>
+        </p:spPr>
+        <p:txBody>
+          <a:bodyPr lIns="0" rIns="0" tIns="0" bIns="0" anchor="t">
+            <a:noAutofit/>
+          </a:bodyPr>
+          <a:p>
+            <a:endParaRPr b="0" lang="en-US" sz="2400" spc="-1" strike="noStrike">
+              <a:solidFill>
+                <a:srgbClr val="000000"/>
+              </a:solidFill>
+              <a:latin typeface="DejaVu Serif"/>
+            </a:endParaRPr>
+          </a:p>
+        </p:txBody>
+      </p:sp>
+      <p:sp>
+        <p:nvSpPr>
+          <p:cNvPr id="209" name=""/>
+          <p:cNvSpPr/>
+          <p:nvPr/>
+        </p:nvSpPr>
+        <p:spPr>
+          <a:xfrm>
+            <a:off x="4762440" y="2371680"/>
+            <a:ext cx="4115160" cy="971640"/>
+          </a:xfrm>
+          <a:custGeom>
+            <a:avLst/>
+            <a:gdLst/>
+            <a:ahLst/>
+            <a:rect l="0" t="0" r="r" b="b"/>
+            <a:pathLst>
+              <a:path w="11431" h="2699">
+                <a:moveTo>
+                  <a:pt x="0" y="0"/>
+                </a:moveTo>
+                <a:lnTo>
+                  <a:pt x="11431" y="0"/>
+                </a:lnTo>
+                <a:lnTo>
+                  <a:pt x="11431" y="2699"/>
+                </a:lnTo>
+                <a:lnTo>
+                  <a:pt x="0" y="2699"/>
+                </a:lnTo>
+                <a:lnTo>
+                  <a:pt x="0" y="0"/>
+                </a:lnTo>
+                <a:close/>
+              </a:path>
+            </a:pathLst>
+          </a:custGeom>
+          <a:solidFill>
+            <a:srgbClr val="ffffff"/>
+          </a:solidFill>
+          <a:ln w="0">
+            <a:noFill/>
+          </a:ln>
+        </p:spPr>
+        <p:txBody>
+          <a:bodyPr lIns="0" rIns="0" tIns="0" bIns="0" anchor="t">
+            <a:noAutofit/>
+          </a:bodyPr>
+          <a:p>
+            <a:endParaRPr b="0" lang="en-US" sz="2400" spc="-1" strike="noStrike">
+              <a:solidFill>
+                <a:srgbClr val="000000"/>
+              </a:solidFill>
+              <a:latin typeface="DejaVu Serif"/>
+            </a:endParaRPr>
+          </a:p>
+        </p:txBody>
+      </p:sp>
+      <p:sp>
+        <p:nvSpPr>
+          <p:cNvPr id="210" name=""/>
+          <p:cNvSpPr/>
+          <p:nvPr/>
+        </p:nvSpPr>
+        <p:spPr>
+          <a:xfrm>
+            <a:off x="4762440" y="2371680"/>
+            <a:ext cx="4115160" cy="38160"/>
+          </a:xfrm>
+          <a:custGeom>
+            <a:avLst/>
+            <a:gdLst/>
+            <a:ahLst/>
+            <a:rect l="0" t="0" r="r" b="b"/>
+            <a:pathLst>
+              <a:path w="11431" h="106">
+                <a:moveTo>
+                  <a:pt x="0" y="0"/>
+                </a:moveTo>
+                <a:lnTo>
+                  <a:pt x="11431" y="0"/>
+                </a:lnTo>
+                <a:lnTo>
+                  <a:pt x="11431" y="106"/>
+                </a:lnTo>
+                <a:lnTo>
+                  <a:pt x="0" y="106"/>
+                </a:lnTo>
+                <a:lnTo>
+                  <a:pt x="0" y="0"/>
+                </a:lnTo>
+                <a:close/>
+              </a:path>
+            </a:pathLst>
+          </a:custGeom>
+          <a:solidFill>
+            <a:srgbClr val="3d68ec"/>
+          </a:solidFill>
+          <a:ln w="0">
+            <a:noFill/>
+          </a:ln>
+        </p:spPr>
+        <p:txBody>
+          <a:bodyPr lIns="0" rIns="0" tIns="0" bIns="0" anchor="t">
+            <a:noAutofit/>
+          </a:bodyPr>
+          <a:p>
+            <a:endParaRPr b="0" lang="en-US" sz="2400" spc="-1" strike="noStrike">
+              <a:solidFill>
+                <a:srgbClr val="000000"/>
+              </a:solidFill>
+              <a:latin typeface="DejaVu Serif"/>
+            </a:endParaRPr>
+          </a:p>
+        </p:txBody>
+      </p:sp>
+      <p:sp>
+        <p:nvSpPr>
+          <p:cNvPr id="211" name=""/>
+          <p:cNvSpPr/>
+          <p:nvPr/>
+        </p:nvSpPr>
+        <p:spPr>
+          <a:xfrm>
+            <a:off x="4762440" y="3333600"/>
+            <a:ext cx="4115160" cy="9720"/>
+          </a:xfrm>
+          <a:custGeom>
+            <a:avLst/>
+            <a:gdLst/>
+            <a:ahLst/>
+            <a:rect l="0" t="0" r="r" b="b"/>
+            <a:pathLst>
+              <a:path w="11431" h="27">
+                <a:moveTo>
+                  <a:pt x="0" y="0"/>
+                </a:moveTo>
+                <a:lnTo>
+                  <a:pt x="11431" y="0"/>
+                </a:lnTo>
+                <a:lnTo>
+                  <a:pt x="11431" y="27"/>
+                </a:lnTo>
+                <a:lnTo>
+                  <a:pt x="0" y="27"/>
+                </a:lnTo>
+                <a:lnTo>
+                  <a:pt x="0" y="0"/>
+                </a:lnTo>
+                <a:close/>
+              </a:path>
+            </a:pathLst>
+          </a:custGeom>
+          <a:solidFill>
+            <a:srgbClr val="e5e7eb"/>
+          </a:solidFill>
+          <a:ln w="0">
+            <a:noFill/>
+          </a:ln>
+        </p:spPr>
+        <p:txBody>
+          <a:bodyPr lIns="0" rIns="0" tIns="0" bIns="0" anchor="t">
+            <a:noAutofit/>
+          </a:bodyPr>
+          <a:p>
+            <a:endParaRPr b="0" lang="en-US" sz="2400" spc="-1" strike="noStrike">
+              <a:solidFill>
+                <a:srgbClr val="000000"/>
+              </a:solidFill>
+              <a:latin typeface="DejaVu Serif"/>
+            </a:endParaRPr>
+          </a:p>
+        </p:txBody>
+      </p:sp>
+      <p:sp>
+        <p:nvSpPr>
+          <p:cNvPr id="212" name=""/>
+          <p:cNvSpPr/>
+          <p:nvPr/>
+        </p:nvSpPr>
+        <p:spPr>
+          <a:xfrm>
+            <a:off x="8867520" y="2371680"/>
+            <a:ext cx="10080" cy="971640"/>
+          </a:xfrm>
+          <a:custGeom>
+            <a:avLst/>
+            <a:gdLst/>
+            <a:ahLst/>
+            <a:rect l="0" t="0" r="r" b="b"/>
+            <a:pathLst>
+              <a:path w="28" h="2699">
+                <a:moveTo>
+                  <a:pt x="0" y="105"/>
+                </a:moveTo>
+                <a:lnTo>
+                  <a:pt x="0" y="2699"/>
+                </a:lnTo>
+                <a:lnTo>
+                  <a:pt x="28" y="2699"/>
+                </a:lnTo>
+                <a:lnTo>
+                  <a:pt x="28" y="0"/>
+                </a:lnTo>
+                <a:lnTo>
+                  <a:pt x="0" y="105"/>
+                </a:lnTo>
+                <a:close/>
+              </a:path>
+            </a:pathLst>
+          </a:custGeom>
+          <a:solidFill>
+            <a:srgbClr val="e5e7eb"/>
+          </a:solidFill>
+          <a:ln w="0">
+            <a:noFill/>
+          </a:ln>
+        </p:spPr>
+        <p:txBody>
+          <a:bodyPr lIns="0" rIns="0" tIns="0" bIns="0" anchor="t">
+            <a:noAutofit/>
+          </a:bodyPr>
+          <a:p>
+            <a:endParaRPr b="0" lang="en-US" sz="2400" spc="-1" strike="noStrike">
+              <a:solidFill>
+                <a:srgbClr val="000000"/>
+              </a:solidFill>
+              <a:latin typeface="DejaVu Serif"/>
+            </a:endParaRPr>
+          </a:p>
+        </p:txBody>
+      </p:sp>
+      <p:sp>
+        <p:nvSpPr>
+          <p:cNvPr id="213" name=""/>
+          <p:cNvSpPr/>
+          <p:nvPr/>
+        </p:nvSpPr>
+        <p:spPr>
+          <a:xfrm>
+            <a:off x="4762440" y="2371680"/>
+            <a:ext cx="9720" cy="971640"/>
+          </a:xfrm>
+          <a:custGeom>
+            <a:avLst/>
+            <a:gdLst/>
+            <a:ahLst/>
+            <a:rect l="0" t="0" r="r" b="b"/>
+            <a:pathLst>
+              <a:path w="27" h="2699">
+                <a:moveTo>
+                  <a:pt x="0" y="0"/>
+                </a:moveTo>
+                <a:lnTo>
+                  <a:pt x="0" y="2699"/>
+                </a:lnTo>
+                <a:lnTo>
+                  <a:pt x="27" y="2699"/>
+                </a:lnTo>
+                <a:lnTo>
+                  <a:pt x="27" y="105"/>
+                </a:lnTo>
+                <a:lnTo>
+                  <a:pt x="0" y="0"/>
+                </a:lnTo>
+                <a:close/>
+              </a:path>
+            </a:pathLst>
+          </a:custGeom>
+          <a:solidFill>
+            <a:srgbClr val="e5e7eb"/>
+          </a:solidFill>
+          <a:ln w="0">
+            <a:noFill/>
+          </a:ln>
+        </p:spPr>
+        <p:txBody>
+          <a:bodyPr lIns="0" rIns="0" tIns="0" bIns="0" anchor="t">
+            <a:noAutofit/>
+          </a:bodyPr>
+          <a:p>
+            <a:endParaRPr b="0" lang="en-US" sz="2400" spc="-1" strike="noStrike">
+              <a:solidFill>
+                <a:srgbClr val="000000"/>
+              </a:solidFill>
+              <a:latin typeface="DejaVu Serif"/>
+            </a:endParaRPr>
+          </a:p>
+        </p:txBody>
+      </p:sp>
+      <p:sp>
+        <p:nvSpPr>
+          <p:cNvPr id="214" name=""/>
+          <p:cNvSpPr/>
+          <p:nvPr/>
+        </p:nvSpPr>
+        <p:spPr>
+          <a:xfrm>
+            <a:off x="4762440" y="3447720"/>
+            <a:ext cx="4115160" cy="972000"/>
+          </a:xfrm>
+          <a:custGeom>
+            <a:avLst/>
+            <a:gdLst/>
+            <a:ahLst/>
+            <a:rect l="0" t="0" r="r" b="b"/>
+            <a:pathLst>
+              <a:path w="11431" h="2700">
+                <a:moveTo>
+                  <a:pt x="0" y="0"/>
+                </a:moveTo>
+                <a:lnTo>
+                  <a:pt x="11431" y="0"/>
+                </a:lnTo>
+                <a:lnTo>
+                  <a:pt x="11431" y="2700"/>
+                </a:lnTo>
+                <a:lnTo>
+                  <a:pt x="0" y="2700"/>
+                </a:lnTo>
+                <a:lnTo>
+                  <a:pt x="0" y="0"/>
+                </a:lnTo>
+                <a:close/>
+              </a:path>
+            </a:pathLst>
+          </a:custGeom>
+          <a:solidFill>
+            <a:srgbClr val="ffffff"/>
+          </a:solidFill>
+          <a:ln w="0">
+            <a:noFill/>
+          </a:ln>
+        </p:spPr>
+        <p:txBody>
+          <a:bodyPr lIns="0" rIns="0" tIns="0" bIns="0" anchor="t">
+            <a:noAutofit/>
+          </a:bodyPr>
+          <a:p>
+            <a:endParaRPr b="0" lang="en-US" sz="2400" spc="-1" strike="noStrike">
+              <a:solidFill>
+                <a:srgbClr val="000000"/>
+              </a:solidFill>
+              <a:latin typeface="DejaVu Serif"/>
+            </a:endParaRPr>
+          </a:p>
+        </p:txBody>
+      </p:sp>
+      <p:sp>
+        <p:nvSpPr>
+          <p:cNvPr id="215" name=""/>
+          <p:cNvSpPr/>
+          <p:nvPr/>
+        </p:nvSpPr>
+        <p:spPr>
+          <a:xfrm>
+            <a:off x="4762440" y="3447720"/>
+            <a:ext cx="4115160" cy="38520"/>
+          </a:xfrm>
+          <a:custGeom>
+            <a:avLst/>
+            <a:gdLst/>
+            <a:ahLst/>
+            <a:rect l="0" t="0" r="r" b="b"/>
+            <a:pathLst>
+              <a:path w="11431" h="107">
+                <a:moveTo>
+                  <a:pt x="0" y="0"/>
+                </a:moveTo>
+                <a:lnTo>
+                  <a:pt x="11431" y="0"/>
+                </a:lnTo>
+                <a:lnTo>
+                  <a:pt x="11431" y="107"/>
+                </a:lnTo>
+                <a:lnTo>
+                  <a:pt x="0" y="107"/>
+                </a:lnTo>
+                <a:lnTo>
+                  <a:pt x="0" y="0"/>
+                </a:lnTo>
+                <a:close/>
+              </a:path>
+            </a:pathLst>
+          </a:custGeom>
+          <a:solidFill>
+            <a:srgbClr val="00af81"/>
+          </a:solidFill>
+          <a:ln w="0">
+            <a:noFill/>
+          </a:ln>
+        </p:spPr>
+        <p:txBody>
+          <a:bodyPr lIns="0" rIns="0" tIns="0" bIns="0" anchor="t">
+            <a:noAutofit/>
+          </a:bodyPr>
+          <a:p>
+            <a:endParaRPr b="0" lang="en-US" sz="2400" spc="-1" strike="noStrike">
+              <a:solidFill>
+                <a:srgbClr val="000000"/>
+              </a:solidFill>
+              <a:latin typeface="DejaVu Serif"/>
+            </a:endParaRPr>
+          </a:p>
+        </p:txBody>
+      </p:sp>
+      <p:sp>
+        <p:nvSpPr>
+          <p:cNvPr id="216" name=""/>
+          <p:cNvSpPr/>
+          <p:nvPr/>
+        </p:nvSpPr>
+        <p:spPr>
+          <a:xfrm>
+            <a:off x="4762440" y="4410000"/>
+            <a:ext cx="4115160" cy="9720"/>
+          </a:xfrm>
+          <a:custGeom>
+            <a:avLst/>
+            <a:gdLst/>
+            <a:ahLst/>
+            <a:rect l="0" t="0" r="r" b="b"/>
+            <a:pathLst>
+              <a:path w="11431" h="27">
+                <a:moveTo>
+                  <a:pt x="0" y="0"/>
+                </a:moveTo>
+                <a:lnTo>
+                  <a:pt x="11431" y="0"/>
+                </a:lnTo>
+                <a:lnTo>
+                  <a:pt x="11431" y="27"/>
+                </a:lnTo>
+                <a:lnTo>
+                  <a:pt x="0" y="27"/>
+                </a:lnTo>
+                <a:lnTo>
+                  <a:pt x="0" y="0"/>
+                </a:lnTo>
+                <a:close/>
+              </a:path>
+            </a:pathLst>
+          </a:custGeom>
+          <a:solidFill>
+            <a:srgbClr val="e5e7eb"/>
+          </a:solidFill>
+          <a:ln w="0">
+            <a:noFill/>
+          </a:ln>
+        </p:spPr>
+        <p:txBody>
+          <a:bodyPr lIns="0" rIns="0" tIns="0" bIns="0" anchor="t">
+            <a:noAutofit/>
+          </a:bodyPr>
+          <a:p>
+            <a:endParaRPr b="0" lang="en-US" sz="2400" spc="-1" strike="noStrike">
+              <a:solidFill>
+                <a:srgbClr val="000000"/>
+              </a:solidFill>
+              <a:latin typeface="DejaVu Serif"/>
+            </a:endParaRPr>
+          </a:p>
+        </p:txBody>
+      </p:sp>
+      <p:sp>
+        <p:nvSpPr>
+          <p:cNvPr id="217" name=""/>
+          <p:cNvSpPr/>
+          <p:nvPr/>
+        </p:nvSpPr>
+        <p:spPr>
+          <a:xfrm>
+            <a:off x="8867520" y="3447720"/>
+            <a:ext cx="10080" cy="972000"/>
+          </a:xfrm>
+          <a:custGeom>
+            <a:avLst/>
+            <a:gdLst/>
+            <a:ahLst/>
+            <a:rect l="0" t="0" r="r" b="b"/>
+            <a:pathLst>
+              <a:path w="28" h="2700">
+                <a:moveTo>
+                  <a:pt x="0" y="106"/>
+                </a:moveTo>
+                <a:lnTo>
+                  <a:pt x="0" y="2700"/>
+                </a:lnTo>
+                <a:lnTo>
+                  <a:pt x="28" y="2700"/>
+                </a:lnTo>
+                <a:lnTo>
+                  <a:pt x="28" y="0"/>
+                </a:lnTo>
+                <a:lnTo>
+                  <a:pt x="0" y="106"/>
+                </a:lnTo>
+                <a:close/>
+              </a:path>
+            </a:pathLst>
+          </a:custGeom>
+          <a:solidFill>
+            <a:srgbClr val="e5e7eb"/>
+          </a:solidFill>
+          <a:ln w="0">
+            <a:noFill/>
+          </a:ln>
+        </p:spPr>
+        <p:txBody>
+          <a:bodyPr lIns="0" rIns="0" tIns="0" bIns="0" anchor="t">
+            <a:noAutofit/>
+          </a:bodyPr>
+          <a:p>
+            <a:endParaRPr b="0" lang="en-US" sz="2400" spc="-1" strike="noStrike">
+              <a:solidFill>
+                <a:srgbClr val="000000"/>
+              </a:solidFill>
+              <a:latin typeface="DejaVu Serif"/>
+            </a:endParaRPr>
+          </a:p>
+        </p:txBody>
+      </p:sp>
+      <p:sp>
+        <p:nvSpPr>
+          <p:cNvPr id="218" name=""/>
+          <p:cNvSpPr/>
+          <p:nvPr/>
+        </p:nvSpPr>
+        <p:spPr>
+          <a:xfrm>
+            <a:off x="4762440" y="3447720"/>
+            <a:ext cx="9720" cy="972000"/>
+          </a:xfrm>
+          <a:custGeom>
+            <a:avLst/>
+            <a:gdLst/>
+            <a:ahLst/>
+            <a:rect l="0" t="0" r="r" b="b"/>
+            <a:pathLst>
+              <a:path w="27" h="2700">
+                <a:moveTo>
+                  <a:pt x="0" y="0"/>
+                </a:moveTo>
+                <a:lnTo>
+                  <a:pt x="0" y="2700"/>
+                </a:lnTo>
+                <a:lnTo>
+                  <a:pt x="27" y="2700"/>
+                </a:lnTo>
+                <a:lnTo>
+                  <a:pt x="27" y="106"/>
+                </a:lnTo>
+                <a:lnTo>
+                  <a:pt x="0" y="0"/>
+                </a:lnTo>
+                <a:close/>
+              </a:path>
+            </a:pathLst>
+          </a:custGeom>
+          <a:solidFill>
+            <a:srgbClr val="e5e7eb"/>
+          </a:solidFill>
+          <a:ln w="0">
+            <a:noFill/>
+          </a:ln>
+        </p:spPr>
+        <p:txBody>
+          <a:bodyPr lIns="0" rIns="0" tIns="0" bIns="0" anchor="t">
+            <a:noAutofit/>
+          </a:bodyPr>
+          <a:p>
+            <a:endParaRPr b="0" lang="en-US" sz="2400" spc="-1" strike="noStrike">
+              <a:solidFill>
+                <a:srgbClr val="000000"/>
+              </a:solidFill>
+              <a:latin typeface="DejaVu Serif"/>
+            </a:endParaRPr>
+          </a:p>
+        </p:txBody>
+      </p:sp>
+      <p:sp>
+        <p:nvSpPr>
+          <p:cNvPr id="219" name=""/>
+          <p:cNvSpPr txBox="1"/>
+          <p:nvPr/>
+        </p:nvSpPr>
+        <p:spPr>
+          <a:xfrm>
+            <a:off x="457200" y="4530240"/>
+            <a:ext cx="3902040" cy="125280"/>
+          </a:xfrm>
+          <a:prstGeom prst="rect">
+            <a:avLst/>
+          </a:prstGeom>
+          <a:noFill/>
+          <a:ln w="0">
+            <a:noFill/>
+          </a:ln>
+        </p:spPr>
+        <p:txBody>
+          <a:bodyPr lIns="0" rIns="0" tIns="0" bIns="0" anchor="t">
+            <a:noAutofit/>
+          </a:bodyPr>
+          <a:p>
+            <a:r>
+              <a:rPr b="0" lang="en-US" sz="839" spc="-1" strike="noStrike">
+                <a:solidFill>
+                  <a:srgbClr val="6b7280"/>
+                </a:solidFill>
+                <a:latin typeface="Arial"/>
+                <a:ea typeface="Arial"/>
+              </a:rPr>
+              <a:t>Een stap uit de uitwerking: het geplande aanbod terug naar de catalogus</a:t>
+            </a:r>
+            <a:endParaRPr b="0" lang="en-US" sz="839" spc="-1" strike="noStrike">
+              <a:solidFill>
+                <a:srgbClr val="000000"/>
+              </a:solidFill>
+              <a:latin typeface="DejaVu Serif"/>
+            </a:endParaRPr>
+          </a:p>
+        </p:txBody>
+      </p:sp>
+      <p:sp>
+        <p:nvSpPr>
+          <p:cNvPr id="220" name=""/>
           <p:cNvSpPr txBox="1"/>
           <p:nvPr/>
         </p:nvSpPr>
@@ -13165,7 +15435,7 @@
       </p:sp>
       <p:sp>
         <p:nvSpPr>
-          <p:cNvPr id="201" name=""/>
+          <p:cNvPr id="221" name=""/>
           <p:cNvSpPr txBox="1"/>
           <p:nvPr/>
         </p:nvSpPr>
@@ -13208,7 +15478,7 @@
       </p:sp>
       <p:sp>
         <p:nvSpPr>
-          <p:cNvPr id="202" name=""/>
+          <p:cNvPr id="222" name=""/>
           <p:cNvSpPr txBox="1"/>
           <p:nvPr/>
         </p:nvSpPr>
@@ -13251,7 +15521,7 @@
       </p:sp>
       <p:sp>
         <p:nvSpPr>
-          <p:cNvPr id="203" name=""/>
+          <p:cNvPr id="223" name=""/>
           <p:cNvSpPr txBox="1"/>
           <p:nvPr/>
         </p:nvSpPr>
@@ -13294,7 +15564,7 @@
       </p:sp>
       <p:sp>
         <p:nvSpPr>
-          <p:cNvPr id="204" name=""/>
+          <p:cNvPr id="224" name=""/>
           <p:cNvSpPr txBox="1"/>
           <p:nvPr/>
         </p:nvSpPr>
@@ -13337,7 +15607,7 @@
       </p:sp>
       <p:sp>
         <p:nvSpPr>
-          <p:cNvPr id="205" name=""/>
+          <p:cNvPr id="225" name=""/>
           <p:cNvSpPr txBox="1"/>
           <p:nvPr/>
         </p:nvSpPr>
@@ -13380,7 +15650,7 @@
       </p:sp>
       <p:sp>
         <p:nvSpPr>
-          <p:cNvPr id="206" name=""/>
+          <p:cNvPr id="226" name=""/>
           <p:cNvSpPr txBox="1"/>
           <p:nvPr/>
         </p:nvSpPr>
@@ -13423,7 +15693,7 @@
       </p:sp>
       <p:sp>
         <p:nvSpPr>
-          <p:cNvPr id="207" name=""/>
+          <p:cNvPr id="227" name=""/>
           <p:cNvSpPr/>
           <p:nvPr/>
         </p:nvSpPr>
@@ -13481,7 +15751,7 @@
       </p:sp>
       <p:sp>
         <p:nvSpPr>
-          <p:cNvPr id="208" name=""/>
+          <p:cNvPr id="228" name=""/>
           <p:cNvSpPr txBox="1"/>
           <p:nvPr/>
         </p:nvSpPr>
@@ -13554,7 +15824,7 @@
       </p:grpSpPr>
       <p:sp>
         <p:nvSpPr>
-          <p:cNvPr id="209" name=""/>
+          <p:cNvPr id="229" name=""/>
           <p:cNvSpPr/>
           <p:nvPr/>
         </p:nvSpPr>
@@ -13612,7 +15882,7 @@
       </p:sp>
       <p:sp>
         <p:nvSpPr>
-          <p:cNvPr id="210" name=""/>
+          <p:cNvPr id="230" name=""/>
           <p:cNvSpPr/>
           <p:nvPr/>
         </p:nvSpPr>
@@ -13670,7 +15940,7 @@
       </p:sp>
       <p:sp>
         <p:nvSpPr>
-          <p:cNvPr id="211" name=""/>
+          <p:cNvPr id="231" name=""/>
           <p:cNvSpPr/>
           <p:nvPr/>
         </p:nvSpPr>
@@ -13728,7 +15998,7 @@
       </p:sp>
       <p:sp>
         <p:nvSpPr>
-          <p:cNvPr id="212" name=""/>
+          <p:cNvPr id="232" name=""/>
           <p:cNvSpPr/>
           <p:nvPr/>
         </p:nvSpPr>
@@ -13786,7 +16056,7 @@
       </p:sp>
       <p:sp>
         <p:nvSpPr>
-          <p:cNvPr id="213" name=""/>
+          <p:cNvPr id="233" name=""/>
           <p:cNvSpPr/>
           <p:nvPr/>
         </p:nvSpPr>
@@ -13844,7 +16114,7 @@
       </p:sp>
       <p:sp>
         <p:nvSpPr>
-          <p:cNvPr id="214" name=""/>
+          <p:cNvPr id="234" name=""/>
           <p:cNvSpPr/>
           <p:nvPr/>
         </p:nvSpPr>
@@ -13902,7 +16172,7 @@
       </p:sp>
       <p:pic>
         <p:nvPicPr>
-          <p:cNvPr id="215" name="" descr=""/>
+          <p:cNvPr id="235" name="" descr=""/>
           <p:cNvPicPr/>
           <p:nvPr/>
         </p:nvPicPr>
@@ -13925,7 +16195,7 @@
       </p:pic>
       <p:sp>
         <p:nvSpPr>
-          <p:cNvPr id="216" name=""/>
+          <p:cNvPr id="236" name=""/>
           <p:cNvSpPr/>
           <p:nvPr/>
         </p:nvSpPr>
@@ -13983,7 +16253,7 @@
       </p:sp>
       <p:sp>
         <p:nvSpPr>
-          <p:cNvPr id="217" name=""/>
+          <p:cNvPr id="237" name=""/>
           <p:cNvSpPr/>
           <p:nvPr/>
         </p:nvSpPr>
@@ -14041,7 +16311,7 @@
       </p:sp>
       <p:sp>
         <p:nvSpPr>
-          <p:cNvPr id="218" name=""/>
+          <p:cNvPr id="238" name=""/>
           <p:cNvSpPr/>
           <p:nvPr/>
         </p:nvSpPr>
@@ -14099,7 +16369,7 @@
       </p:sp>
       <p:sp>
         <p:nvSpPr>
-          <p:cNvPr id="219" name=""/>
+          <p:cNvPr id="239" name=""/>
           <p:cNvSpPr/>
           <p:nvPr/>
         </p:nvSpPr>
@@ -14157,7 +16427,7 @@
       </p:sp>
       <p:sp>
         <p:nvSpPr>
-          <p:cNvPr id="220" name=""/>
+          <p:cNvPr id="240" name=""/>
           <p:cNvSpPr/>
           <p:nvPr/>
         </p:nvSpPr>
@@ -14215,7 +16485,7 @@
       </p:sp>
       <p:sp>
         <p:nvSpPr>
-          <p:cNvPr id="221" name=""/>
+          <p:cNvPr id="241" name=""/>
           <p:cNvSpPr txBox="1"/>
           <p:nvPr/>
         </p:nvSpPr>
@@ -14258,7 +16528,7 @@
       </p:sp>
       <p:sp>
         <p:nvSpPr>
-          <p:cNvPr id="222" name=""/>
+          <p:cNvPr id="242" name=""/>
           <p:cNvSpPr txBox="1"/>
           <p:nvPr/>
         </p:nvSpPr>
@@ -14301,7 +16571,7 @@
       </p:sp>
       <p:sp>
         <p:nvSpPr>
-          <p:cNvPr id="223" name=""/>
+          <p:cNvPr id="243" name=""/>
           <p:cNvSpPr/>
           <p:nvPr/>
         </p:nvSpPr>
@@ -14359,7 +16629,7 @@
       </p:sp>
       <p:sp>
         <p:nvSpPr>
-          <p:cNvPr id="224" name=""/>
+          <p:cNvPr id="244" name=""/>
           <p:cNvSpPr/>
           <p:nvPr/>
         </p:nvSpPr>
@@ -14417,7 +16687,7 @@
       </p:sp>
       <p:sp>
         <p:nvSpPr>
-          <p:cNvPr id="225" name=""/>
+          <p:cNvPr id="245" name=""/>
           <p:cNvSpPr/>
           <p:nvPr/>
         </p:nvSpPr>
@@ -14475,7 +16745,7 @@
       </p:sp>
       <p:sp>
         <p:nvSpPr>
-          <p:cNvPr id="226" name=""/>
+          <p:cNvPr id="246" name=""/>
           <p:cNvSpPr/>
           <p:nvPr/>
         </p:nvSpPr>
@@ -14533,7 +16803,7 @@
       </p:sp>
       <p:sp>
         <p:nvSpPr>
-          <p:cNvPr id="227" name=""/>
+          <p:cNvPr id="247" name=""/>
           <p:cNvSpPr/>
           <p:nvPr/>
         </p:nvSpPr>
@@ -14591,7 +16861,7 @@
       </p:sp>
       <p:sp>
         <p:nvSpPr>
-          <p:cNvPr id="228" name=""/>
+          <p:cNvPr id="248" name=""/>
           <p:cNvSpPr txBox="1"/>
           <p:nvPr/>
         </p:nvSpPr>
@@ -14634,7 +16904,7 @@
       </p:sp>
       <p:sp>
         <p:nvSpPr>
-          <p:cNvPr id="229" name=""/>
+          <p:cNvPr id="249" name=""/>
           <p:cNvSpPr txBox="1"/>
           <p:nvPr/>
         </p:nvSpPr>
@@ -14677,7 +16947,7 @@
       </p:sp>
       <p:sp>
         <p:nvSpPr>
-          <p:cNvPr id="230" name=""/>
+          <p:cNvPr id="250" name=""/>
           <p:cNvSpPr/>
           <p:nvPr/>
         </p:nvSpPr>
@@ -14735,7 +17005,7 @@
       </p:sp>
       <p:sp>
         <p:nvSpPr>
-          <p:cNvPr id="231" name=""/>
+          <p:cNvPr id="251" name=""/>
           <p:cNvSpPr/>
           <p:nvPr/>
         </p:nvSpPr>
@@ -14793,7 +17063,7 @@
       </p:sp>
       <p:sp>
         <p:nvSpPr>
-          <p:cNvPr id="232" name=""/>
+          <p:cNvPr id="252" name=""/>
           <p:cNvSpPr/>
           <p:nvPr/>
         </p:nvSpPr>
@@ -14851,7 +17121,7 @@
       </p:sp>
       <p:sp>
         <p:nvSpPr>
-          <p:cNvPr id="233" name=""/>
+          <p:cNvPr id="253" name=""/>
           <p:cNvSpPr/>
           <p:nvPr/>
         </p:nvSpPr>
@@ -14909,7 +17179,7 @@
       </p:sp>
       <p:sp>
         <p:nvSpPr>
-          <p:cNvPr id="234" name=""/>
+          <p:cNvPr id="254" name=""/>
           <p:cNvSpPr/>
           <p:nvPr/>
         </p:nvSpPr>
@@ -14967,7 +17237,7 @@
       </p:sp>
       <p:sp>
         <p:nvSpPr>
-          <p:cNvPr id="235" name=""/>
+          <p:cNvPr id="255" name=""/>
           <p:cNvSpPr txBox="1"/>
           <p:nvPr/>
         </p:nvSpPr>
@@ -15010,7 +17280,7 @@
       </p:sp>
       <p:sp>
         <p:nvSpPr>
-          <p:cNvPr id="236" name=""/>
+          <p:cNvPr id="256" name=""/>
           <p:cNvSpPr txBox="1"/>
           <p:nvPr/>
         </p:nvSpPr>
@@ -15053,7 +17323,7 @@
       </p:sp>
       <p:sp>
         <p:nvSpPr>
-          <p:cNvPr id="237" name=""/>
+          <p:cNvPr id="257" name=""/>
           <p:cNvSpPr/>
           <p:nvPr/>
         </p:nvSpPr>
@@ -15111,7 +17381,7 @@
       </p:sp>
       <p:sp>
         <p:nvSpPr>
-          <p:cNvPr id="238" name=""/>
+          <p:cNvPr id="258" name=""/>
           <p:cNvSpPr/>
           <p:nvPr/>
         </p:nvSpPr>
@@ -15169,7 +17439,7 @@
       </p:sp>
       <p:sp>
         <p:nvSpPr>
-          <p:cNvPr id="239" name=""/>
+          <p:cNvPr id="259" name=""/>
           <p:cNvSpPr/>
           <p:nvPr/>
         </p:nvSpPr>
@@ -15227,7 +17497,7 @@
       </p:sp>
       <p:sp>
         <p:nvSpPr>
-          <p:cNvPr id="240" name=""/>
+          <p:cNvPr id="260" name=""/>
           <p:cNvSpPr/>
           <p:nvPr/>
         </p:nvSpPr>
@@ -15285,7 +17555,7 @@
       </p:sp>
       <p:sp>
         <p:nvSpPr>
-          <p:cNvPr id="241" name=""/>
+          <p:cNvPr id="261" name=""/>
           <p:cNvSpPr/>
           <p:nvPr/>
         </p:nvSpPr>
@@ -15343,7 +17613,7 @@
       </p:sp>
       <p:sp>
         <p:nvSpPr>
-          <p:cNvPr id="242" name=""/>
+          <p:cNvPr id="262" name=""/>
           <p:cNvSpPr txBox="1"/>
           <p:nvPr/>
         </p:nvSpPr>
@@ -15386,7 +17656,7 @@
       </p:sp>
       <p:sp>
         <p:nvSpPr>
-          <p:cNvPr id="243" name=""/>
+          <p:cNvPr id="263" name=""/>
           <p:cNvSpPr txBox="1"/>
           <p:nvPr/>
         </p:nvSpPr>
@@ -15429,7 +17699,7 @@
       </p:sp>
       <p:sp>
         <p:nvSpPr>
-          <p:cNvPr id="244" name=""/>
+          <p:cNvPr id="264" name=""/>
           <p:cNvSpPr/>
           <p:nvPr/>
         </p:nvSpPr>
@@ -15487,7 +17757,7 @@
       </p:sp>
       <p:sp>
         <p:nvSpPr>
-          <p:cNvPr id="245" name=""/>
+          <p:cNvPr id="265" name=""/>
           <p:cNvSpPr/>
           <p:nvPr/>
         </p:nvSpPr>
@@ -15545,7 +17815,7 @@
       </p:sp>
       <p:sp>
         <p:nvSpPr>
-          <p:cNvPr id="246" name=""/>
+          <p:cNvPr id="266" name=""/>
           <p:cNvSpPr/>
           <p:nvPr/>
         </p:nvSpPr>
@@ -15603,7 +17873,7 @@
       </p:sp>
       <p:sp>
         <p:nvSpPr>
-          <p:cNvPr id="247" name=""/>
+          <p:cNvPr id="267" name=""/>
           <p:cNvSpPr/>
           <p:nvPr/>
         </p:nvSpPr>
@@ -15661,7 +17931,7 @@
       </p:sp>
       <p:sp>
         <p:nvSpPr>
-          <p:cNvPr id="248" name=""/>
+          <p:cNvPr id="268" name=""/>
           <p:cNvSpPr/>
           <p:nvPr/>
         </p:nvSpPr>
@@ -15719,7 +17989,7 @@
       </p:sp>
       <p:sp>
         <p:nvSpPr>
-          <p:cNvPr id="249" name=""/>
+          <p:cNvPr id="269" name=""/>
           <p:cNvSpPr txBox="1"/>
           <p:nvPr/>
         </p:nvSpPr>
@@ -15762,7 +18032,7 @@
       </p:sp>
       <p:sp>
         <p:nvSpPr>
-          <p:cNvPr id="250" name=""/>
+          <p:cNvPr id="270" name=""/>
           <p:cNvSpPr txBox="1"/>
           <p:nvPr/>
         </p:nvSpPr>
@@ -15805,7 +18075,7 @@
       </p:sp>
       <p:sp>
         <p:nvSpPr>
-          <p:cNvPr id="251" name=""/>
+          <p:cNvPr id="271" name=""/>
           <p:cNvSpPr txBox="1"/>
           <p:nvPr/>
         </p:nvSpPr>

--- a/presentaties/export/260929_werkgroep_okx_voortgang/260929_werkgroep_okx_voortgang.pptx
+++ b/presentaties/export/260929_werkgroep_okx_voortgang/260929_werkgroep_okx_voortgang.pptx
@@ -11,6 +11,7 @@
     <p:sldId id="259" r:id="rId6"/>
     <p:sldId id="260" r:id="rId7"/>
     <p:sldId id="261" r:id="rId8"/>
+    <p:sldId id="262" r:id="rId9"/>
   </p:sldIdLst>
   <p:sldSz cx="9336088" cy="5257800"/>
   <p:notesSz cx="7559675" cy="10691813"/>
@@ -16967,7 +16968,7 @@
         <p:spPr>
           <a:xfrm>
             <a:off x="439920" y="577080"/>
-            <a:ext cx="7038720" cy="399600"/>
+            <a:ext cx="7408800" cy="399600"/>
           </a:xfrm>
           <a:prstGeom prst="rect">
             <a:avLst/>
@@ -16990,7 +16991,7 @@
                 <a:latin typeface="Arial"/>
                 <a:ea typeface="Arial"/>
               </a:rPr>
-              <a:t>Toetsen met voorbeelduitwerkingen</a:t>
+              <a:t>Veriﬁëren met voorbeelduitwerkingen</a:t>
             </a:r>
             <a:endParaRPr b="0" lang="en-US" sz="2700" spc="-1" strike="noStrike">
               <a:solidFill>
@@ -18095,7 +18096,7 @@
         <p:spPr>
           <a:xfrm>
             <a:off x="4935600" y="3663720"/>
-            <a:ext cx="1308240" cy="160560"/>
+            <a:ext cx="1646640" cy="160560"/>
           </a:xfrm>
           <a:prstGeom prst="rect">
             <a:avLst/>
@@ -18118,7 +18119,7 @@
                 <a:latin typeface="Arial"/>
                 <a:ea typeface="Arial"/>
               </a:rPr>
-              <a:t>Toets bij scholen</a:t>
+              <a:t>Veriﬁëren bij scholen</a:t>
             </a:r>
             <a:endParaRPr b="0" lang="en-US" sz="1080" spc="-1" strike="noStrike">
               <a:solidFill>
@@ -18634,13 +18635,56 @@
       <p:sp>
         <p:nvSpPr>
           <p:cNvPr id="252" name=""/>
+          <p:cNvSpPr txBox="1"/>
+          <p:nvPr/>
+        </p:nvSpPr>
+        <p:spPr>
+          <a:xfrm>
+            <a:off x="439920" y="758160"/>
+            <a:ext cx="4424760" cy="399600"/>
+          </a:xfrm>
+          <a:prstGeom prst="rect">
+            <a:avLst/>
+          </a:prstGeom>
+          <a:noFill/>
+          <a:ln w="0">
+            <a:noFill/>
+          </a:ln>
+        </p:spPr>
+        <p:txBody>
+          <a:bodyPr lIns="0" rIns="0" tIns="0" bIns="0" anchor="t">
+            <a:noAutofit/>
+          </a:bodyPr>
+          <a:p>
+            <a:r>
+              <a:rPr b="1" lang="en-US" sz="2700" spc="-1" strike="noStrike">
+                <a:solidFill>
+                  <a:srgbClr val="dd784b"/>
+                </a:solidFill>
+                <a:latin typeface="Arial"/>
+                <a:ea typeface="Arial"/>
+              </a:rPr>
+              <a:t>Van beeld naar bericht</a:t>
+            </a:r>
+            <a:endParaRPr b="0" lang="en-US" sz="2700" spc="-1" strike="noStrike">
+              <a:solidFill>
+                <a:srgbClr val="000000"/>
+              </a:solidFill>
+              <a:latin typeface="DejaVu Serif"/>
+            </a:endParaRPr>
+          </a:p>
+        </p:txBody>
+      </p:sp>
+      <p:sp>
+        <p:nvSpPr>
+          <p:cNvPr id="253" name=""/>
           <p:cNvSpPr/>
           <p:nvPr/>
         </p:nvSpPr>
         <p:spPr>
           <a:xfrm>
-            <a:off x="456840" y="1609560"/>
-            <a:ext cx="4153320" cy="752760"/>
+            <a:off x="456840" y="1628640"/>
+            <a:ext cx="4124880" cy="1410120"/>
           </a:xfrm>
           <a:custGeom>
             <a:avLst/>
@@ -18648,18 +18692,18 @@
             <a:ahLst/>
             <a:rect l="0" t="0" r="r" b="b"/>
             <a:pathLst>
-              <a:path w="11537" h="2091">
-                <a:moveTo>
-                  <a:pt x="0" y="0"/>
-                </a:moveTo>
-                <a:lnTo>
-                  <a:pt x="11537" y="0"/>
-                </a:lnTo>
-                <a:lnTo>
-                  <a:pt x="11537" y="2091"/>
-                </a:lnTo>
-                <a:lnTo>
-                  <a:pt x="0" y="2091"/>
+              <a:path w="11458" h="3917">
+                <a:moveTo>
+                  <a:pt x="0" y="0"/>
+                </a:moveTo>
+                <a:lnTo>
+                  <a:pt x="11458" y="0"/>
+                </a:lnTo>
+                <a:lnTo>
+                  <a:pt x="11458" y="3917"/>
+                </a:lnTo>
+                <a:lnTo>
+                  <a:pt x="0" y="3917"/>
                 </a:lnTo>
                 <a:lnTo>
                   <a:pt x="0" y="0"/>
@@ -18691,14 +18735,14 @@
       </p:sp>
       <p:sp>
         <p:nvSpPr>
-          <p:cNvPr id="253" name=""/>
+          <p:cNvPr id="254" name=""/>
           <p:cNvSpPr/>
           <p:nvPr/>
         </p:nvSpPr>
         <p:spPr>
           <a:xfrm>
-            <a:off x="456840" y="1609560"/>
-            <a:ext cx="4153320" cy="38520"/>
+            <a:off x="456840" y="1628640"/>
+            <a:ext cx="4124880" cy="38520"/>
           </a:xfrm>
           <a:custGeom>
             <a:avLst/>
@@ -18706,15 +18750,305 @@
             <a:ahLst/>
             <a:rect l="0" t="0" r="r" b="b"/>
             <a:pathLst>
-              <a:path w="11537" h="107">
-                <a:moveTo>
-                  <a:pt x="0" y="0"/>
-                </a:moveTo>
-                <a:lnTo>
-                  <a:pt x="11537" y="0"/>
-                </a:lnTo>
-                <a:lnTo>
-                  <a:pt x="11537" y="107"/>
+              <a:path w="11458" h="107">
+                <a:moveTo>
+                  <a:pt x="0" y="0"/>
+                </a:moveTo>
+                <a:lnTo>
+                  <a:pt x="11458" y="0"/>
+                </a:lnTo>
+                <a:lnTo>
+                  <a:pt x="11458" y="107"/>
+                </a:lnTo>
+                <a:lnTo>
+                  <a:pt x="0" y="107"/>
+                </a:lnTo>
+                <a:lnTo>
+                  <a:pt x="0" y="0"/>
+                </a:lnTo>
+                <a:close/>
+              </a:path>
+            </a:pathLst>
+          </a:custGeom>
+          <a:solidFill>
+            <a:srgbClr val="3d68ec"/>
+          </a:solidFill>
+          <a:ln w="0">
+            <a:noFill/>
+          </a:ln>
+        </p:spPr>
+        <p:txBody>
+          <a:bodyPr lIns="0" rIns="0" tIns="0" bIns="0" anchor="t">
+            <a:noAutofit/>
+          </a:bodyPr>
+          <a:p>
+            <a:endParaRPr b="0" lang="en-US" sz="2400" spc="-1" strike="noStrike">
+              <a:solidFill>
+                <a:srgbClr val="000000"/>
+              </a:solidFill>
+              <a:latin typeface="DejaVu Serif"/>
+            </a:endParaRPr>
+          </a:p>
+        </p:txBody>
+      </p:sp>
+      <p:sp>
+        <p:nvSpPr>
+          <p:cNvPr id="255" name=""/>
+          <p:cNvSpPr/>
+          <p:nvPr/>
+        </p:nvSpPr>
+        <p:spPr>
+          <a:xfrm>
+            <a:off x="456840" y="3028680"/>
+            <a:ext cx="4124880" cy="10080"/>
+          </a:xfrm>
+          <a:custGeom>
+            <a:avLst/>
+            <a:gdLst/>
+            <a:ahLst/>
+            <a:rect l="0" t="0" r="r" b="b"/>
+            <a:pathLst>
+              <a:path w="11458" h="28">
+                <a:moveTo>
+                  <a:pt x="0" y="0"/>
+                </a:moveTo>
+                <a:lnTo>
+                  <a:pt x="11458" y="0"/>
+                </a:lnTo>
+                <a:lnTo>
+                  <a:pt x="11458" y="28"/>
+                </a:lnTo>
+                <a:lnTo>
+                  <a:pt x="0" y="28"/>
+                </a:lnTo>
+                <a:lnTo>
+                  <a:pt x="0" y="0"/>
+                </a:lnTo>
+                <a:close/>
+              </a:path>
+            </a:pathLst>
+          </a:custGeom>
+          <a:solidFill>
+            <a:srgbClr val="e5e7eb"/>
+          </a:solidFill>
+          <a:ln w="0">
+            <a:noFill/>
+          </a:ln>
+        </p:spPr>
+        <p:txBody>
+          <a:bodyPr lIns="0" rIns="0" tIns="0" bIns="0" anchor="t">
+            <a:noAutofit/>
+          </a:bodyPr>
+          <a:p>
+            <a:endParaRPr b="0" lang="en-US" sz="2400" spc="-1" strike="noStrike">
+              <a:solidFill>
+                <a:srgbClr val="000000"/>
+              </a:solidFill>
+              <a:latin typeface="DejaVu Serif"/>
+            </a:endParaRPr>
+          </a:p>
+        </p:txBody>
+      </p:sp>
+      <p:sp>
+        <p:nvSpPr>
+          <p:cNvPr id="256" name=""/>
+          <p:cNvSpPr/>
+          <p:nvPr/>
+        </p:nvSpPr>
+        <p:spPr>
+          <a:xfrm>
+            <a:off x="4571640" y="1628640"/>
+            <a:ext cx="10080" cy="1410120"/>
+          </a:xfrm>
+          <a:custGeom>
+            <a:avLst/>
+            <a:gdLst/>
+            <a:ahLst/>
+            <a:rect l="0" t="0" r="r" b="b"/>
+            <a:pathLst>
+              <a:path w="28" h="3917">
+                <a:moveTo>
+                  <a:pt x="0" y="106"/>
+                </a:moveTo>
+                <a:lnTo>
+                  <a:pt x="0" y="3917"/>
+                </a:lnTo>
+                <a:lnTo>
+                  <a:pt x="28" y="3917"/>
+                </a:lnTo>
+                <a:lnTo>
+                  <a:pt x="28" y="0"/>
+                </a:lnTo>
+                <a:lnTo>
+                  <a:pt x="0" y="106"/>
+                </a:lnTo>
+                <a:close/>
+              </a:path>
+            </a:pathLst>
+          </a:custGeom>
+          <a:solidFill>
+            <a:srgbClr val="e5e7eb"/>
+          </a:solidFill>
+          <a:ln w="0">
+            <a:noFill/>
+          </a:ln>
+        </p:spPr>
+        <p:txBody>
+          <a:bodyPr lIns="0" rIns="0" tIns="0" bIns="0" anchor="t">
+            <a:noAutofit/>
+          </a:bodyPr>
+          <a:p>
+            <a:endParaRPr b="0" lang="en-US" sz="2400" spc="-1" strike="noStrike">
+              <a:solidFill>
+                <a:srgbClr val="000000"/>
+              </a:solidFill>
+              <a:latin typeface="DejaVu Serif"/>
+            </a:endParaRPr>
+          </a:p>
+        </p:txBody>
+      </p:sp>
+      <p:sp>
+        <p:nvSpPr>
+          <p:cNvPr id="257" name=""/>
+          <p:cNvSpPr/>
+          <p:nvPr/>
+        </p:nvSpPr>
+        <p:spPr>
+          <a:xfrm>
+            <a:off x="456840" y="1628640"/>
+            <a:ext cx="10080" cy="1410120"/>
+          </a:xfrm>
+          <a:custGeom>
+            <a:avLst/>
+            <a:gdLst/>
+            <a:ahLst/>
+            <a:rect l="0" t="0" r="r" b="b"/>
+            <a:pathLst>
+              <a:path w="28" h="3917">
+                <a:moveTo>
+                  <a:pt x="0" y="0"/>
+                </a:moveTo>
+                <a:lnTo>
+                  <a:pt x="0" y="3917"/>
+                </a:lnTo>
+                <a:lnTo>
+                  <a:pt x="28" y="3917"/>
+                </a:lnTo>
+                <a:lnTo>
+                  <a:pt x="28" y="106"/>
+                </a:lnTo>
+                <a:lnTo>
+                  <a:pt x="0" y="0"/>
+                </a:lnTo>
+                <a:close/>
+              </a:path>
+            </a:pathLst>
+          </a:custGeom>
+          <a:solidFill>
+            <a:srgbClr val="e5e7eb"/>
+          </a:solidFill>
+          <a:ln w="0">
+            <a:noFill/>
+          </a:ln>
+        </p:spPr>
+        <p:txBody>
+          <a:bodyPr lIns="0" rIns="0" tIns="0" bIns="0" anchor="t">
+            <a:noAutofit/>
+          </a:bodyPr>
+          <a:p>
+            <a:endParaRPr b="0" lang="en-US" sz="2400" spc="-1" strike="noStrike">
+              <a:solidFill>
+                <a:srgbClr val="000000"/>
+              </a:solidFill>
+              <a:latin typeface="DejaVu Serif"/>
+            </a:endParaRPr>
+          </a:p>
+        </p:txBody>
+      </p:sp>
+      <p:sp>
+        <p:nvSpPr>
+          <p:cNvPr id="258" name=""/>
+          <p:cNvSpPr/>
+          <p:nvPr/>
+        </p:nvSpPr>
+        <p:spPr>
+          <a:xfrm>
+            <a:off x="456840" y="3152520"/>
+            <a:ext cx="4124880" cy="1019520"/>
+          </a:xfrm>
+          <a:custGeom>
+            <a:avLst/>
+            <a:gdLst/>
+            <a:ahLst/>
+            <a:rect l="0" t="0" r="r" b="b"/>
+            <a:pathLst>
+              <a:path w="11458" h="2832">
+                <a:moveTo>
+                  <a:pt x="0" y="0"/>
+                </a:moveTo>
+                <a:lnTo>
+                  <a:pt x="11458" y="0"/>
+                </a:lnTo>
+                <a:lnTo>
+                  <a:pt x="11458" y="2832"/>
+                </a:lnTo>
+                <a:lnTo>
+                  <a:pt x="0" y="2832"/>
+                </a:lnTo>
+                <a:lnTo>
+                  <a:pt x="0" y="0"/>
+                </a:lnTo>
+                <a:close/>
+              </a:path>
+            </a:pathLst>
+          </a:custGeom>
+          <a:solidFill>
+            <a:srgbClr val="ffffff"/>
+          </a:solidFill>
+          <a:ln w="0">
+            <a:noFill/>
+          </a:ln>
+        </p:spPr>
+        <p:txBody>
+          <a:bodyPr lIns="0" rIns="0" tIns="0" bIns="0" anchor="t">
+            <a:noAutofit/>
+          </a:bodyPr>
+          <a:p>
+            <a:endParaRPr b="0" lang="en-US" sz="2400" spc="-1" strike="noStrike">
+              <a:solidFill>
+                <a:srgbClr val="000000"/>
+              </a:solidFill>
+              <a:latin typeface="DejaVu Serif"/>
+            </a:endParaRPr>
+          </a:p>
+        </p:txBody>
+      </p:sp>
+      <p:sp>
+        <p:nvSpPr>
+          <p:cNvPr id="259" name=""/>
+          <p:cNvSpPr/>
+          <p:nvPr/>
+        </p:nvSpPr>
+        <p:spPr>
+          <a:xfrm>
+            <a:off x="456840" y="3152520"/>
+            <a:ext cx="4124880" cy="38520"/>
+          </a:xfrm>
+          <a:custGeom>
+            <a:avLst/>
+            <a:gdLst/>
+            <a:ahLst/>
+            <a:rect l="0" t="0" r="r" b="b"/>
+            <a:pathLst>
+              <a:path w="11458" h="107">
+                <a:moveTo>
+                  <a:pt x="0" y="0"/>
+                </a:moveTo>
+                <a:lnTo>
+                  <a:pt x="11458" y="0"/>
+                </a:lnTo>
+                <a:lnTo>
+                  <a:pt x="11458" y="107"/>
                 </a:lnTo>
                 <a:lnTo>
                   <a:pt x="0" y="107"/>
@@ -18749,14 +19083,14 @@
       </p:sp>
       <p:sp>
         <p:nvSpPr>
-          <p:cNvPr id="254" name=""/>
+          <p:cNvPr id="260" name=""/>
           <p:cNvSpPr/>
           <p:nvPr/>
         </p:nvSpPr>
         <p:spPr>
           <a:xfrm>
-            <a:off x="456840" y="2352600"/>
-            <a:ext cx="4153320" cy="9720"/>
+            <a:off x="456840" y="4162320"/>
+            <a:ext cx="4124880" cy="9720"/>
           </a:xfrm>
           <a:custGeom>
             <a:avLst/>
@@ -18764,15 +19098,15 @@
             <a:ahLst/>
             <a:rect l="0" t="0" r="r" b="b"/>
             <a:pathLst>
-              <a:path w="11537" h="27">
-                <a:moveTo>
-                  <a:pt x="0" y="0"/>
-                </a:moveTo>
-                <a:lnTo>
-                  <a:pt x="11537" y="0"/>
-                </a:lnTo>
-                <a:lnTo>
-                  <a:pt x="11537" y="27"/>
+              <a:path w="11458" h="27">
+                <a:moveTo>
+                  <a:pt x="0" y="0"/>
+                </a:moveTo>
+                <a:lnTo>
+                  <a:pt x="11458" y="0"/>
+                </a:lnTo>
+                <a:lnTo>
+                  <a:pt x="11458" y="27"/>
                 </a:lnTo>
                 <a:lnTo>
                   <a:pt x="0" y="27"/>
@@ -18807,14 +19141,14 @@
       </p:sp>
       <p:sp>
         <p:nvSpPr>
-          <p:cNvPr id="255" name=""/>
+          <p:cNvPr id="261" name=""/>
           <p:cNvSpPr/>
           <p:nvPr/>
         </p:nvSpPr>
         <p:spPr>
           <a:xfrm>
-            <a:off x="4600440" y="1609560"/>
-            <a:ext cx="9720" cy="752760"/>
+            <a:off x="4571640" y="3152520"/>
+            <a:ext cx="10080" cy="1019520"/>
           </a:xfrm>
           <a:custGeom>
             <a:avLst/>
@@ -18822,18 +19156,18 @@
             <a:ahLst/>
             <a:rect l="0" t="0" r="r" b="b"/>
             <a:pathLst>
-              <a:path w="27" h="2091">
+              <a:path w="28" h="2832">
                 <a:moveTo>
                   <a:pt x="0" y="106"/>
                 </a:moveTo>
                 <a:lnTo>
-                  <a:pt x="0" y="2091"/>
-                </a:lnTo>
-                <a:lnTo>
-                  <a:pt x="27" y="2091"/>
-                </a:lnTo>
-                <a:lnTo>
-                  <a:pt x="27" y="0"/>
+                  <a:pt x="0" y="2832"/>
+                </a:lnTo>
+                <a:lnTo>
+                  <a:pt x="28" y="2832"/>
+                </a:lnTo>
+                <a:lnTo>
+                  <a:pt x="28" y="0"/>
                 </a:lnTo>
                 <a:lnTo>
                   <a:pt x="0" y="106"/>
@@ -18865,14 +19199,14 @@
       </p:sp>
       <p:sp>
         <p:nvSpPr>
-          <p:cNvPr id="256" name=""/>
+          <p:cNvPr id="262" name=""/>
           <p:cNvSpPr/>
           <p:nvPr/>
         </p:nvSpPr>
         <p:spPr>
           <a:xfrm>
-            <a:off x="456840" y="1609560"/>
-            <a:ext cx="10080" cy="752760"/>
+            <a:off x="456840" y="3152520"/>
+            <a:ext cx="10080" cy="1019520"/>
           </a:xfrm>
           <a:custGeom>
             <a:avLst/>
@@ -18880,15 +19214,15 @@
             <a:ahLst/>
             <a:rect l="0" t="0" r="r" b="b"/>
             <a:pathLst>
-              <a:path w="28" h="2091">
-                <a:moveTo>
-                  <a:pt x="0" y="0"/>
-                </a:moveTo>
-                <a:lnTo>
-                  <a:pt x="0" y="2091"/>
-                </a:lnTo>
-                <a:lnTo>
-                  <a:pt x="28" y="2091"/>
+              <a:path w="28" h="2832">
+                <a:moveTo>
+                  <a:pt x="0" y="0"/>
+                </a:moveTo>
+                <a:lnTo>
+                  <a:pt x="0" y="2832"/>
+                </a:lnTo>
+                <a:lnTo>
+                  <a:pt x="28" y="2832"/>
                 </a:lnTo>
                 <a:lnTo>
                   <a:pt x="28" y="106"/>
@@ -18923,7 +19257,2843 @@
       </p:sp>
       <p:sp>
         <p:nvSpPr>
-          <p:cNvPr id="257" name=""/>
+          <p:cNvPr id="263" name=""/>
+          <p:cNvSpPr txBox="1"/>
+          <p:nvPr/>
+        </p:nvSpPr>
+        <p:spPr>
+          <a:xfrm>
+            <a:off x="457200" y="1356120"/>
+            <a:ext cx="1832400" cy="151200"/>
+          </a:xfrm>
+          <a:prstGeom prst="rect">
+            <a:avLst/>
+          </a:prstGeom>
+          <a:noFill/>
+          <a:ln w="0">
+            <a:noFill/>
+          </a:ln>
+        </p:spPr>
+        <p:txBody>
+          <a:bodyPr lIns="0" rIns="0" tIns="0" bIns="0" anchor="t">
+            <a:noAutofit/>
+          </a:bodyPr>
+          <a:p>
+            <a:r>
+              <a:rPr b="0" lang="en-US" sz="1020" spc="-1" strike="noStrike">
+                <a:solidFill>
+                  <a:srgbClr val="6b7280"/>
+                </a:solidFill>
+                <a:latin typeface="Arial"/>
+                <a:ea typeface="Arial"/>
+              </a:rPr>
+              <a:t>Dezelfde stap, als koppeling</a:t>
+            </a:r>
+            <a:endParaRPr b="0" lang="en-US" sz="1020" spc="-1" strike="noStrike">
+              <a:solidFill>
+                <a:srgbClr val="000000"/>
+              </a:solidFill>
+              <a:latin typeface="DejaVu Serif"/>
+            </a:endParaRPr>
+          </a:p>
+        </p:txBody>
+      </p:sp>
+      <p:sp>
+        <p:nvSpPr>
+          <p:cNvPr id="264" name=""/>
+          <p:cNvSpPr txBox="1"/>
+          <p:nvPr/>
+        </p:nvSpPr>
+        <p:spPr>
+          <a:xfrm>
+            <a:off x="603720" y="1793880"/>
+            <a:ext cx="770400" cy="163440"/>
+          </a:xfrm>
+          <a:prstGeom prst="rect">
+            <a:avLst/>
+          </a:prstGeom>
+          <a:noFill/>
+          <a:ln w="0">
+            <a:noFill/>
+          </a:ln>
+        </p:spPr>
+        <p:txBody>
+          <a:bodyPr lIns="0" rIns="0" tIns="0" bIns="0" anchor="t">
+            <a:noAutofit/>
+          </a:bodyPr>
+          <a:p>
+            <a:r>
+              <a:rPr b="1" lang="en-US" sz="1110" spc="-1" strike="noStrike">
+                <a:solidFill>
+                  <a:srgbClr val="1a1a2e"/>
+                </a:solidFill>
+                <a:latin typeface="Arial"/>
+                <a:ea typeface="Arial"/>
+              </a:rPr>
+              <a:t>Interactie</a:t>
+            </a:r>
+            <a:endParaRPr b="0" lang="en-US" sz="1110" spc="-1" strike="noStrike">
+              <a:solidFill>
+                <a:srgbClr val="000000"/>
+              </a:solidFill>
+              <a:latin typeface="DejaVu Serif"/>
+            </a:endParaRPr>
+          </a:p>
+        </p:txBody>
+      </p:sp>
+      <p:sp>
+        <p:nvSpPr>
+          <p:cNvPr id="265" name=""/>
+          <p:cNvSpPr txBox="1"/>
+          <p:nvPr/>
+        </p:nvSpPr>
+        <p:spPr>
+          <a:xfrm>
+            <a:off x="603720" y="2074680"/>
+            <a:ext cx="1509480" cy="145080"/>
+          </a:xfrm>
+          <a:prstGeom prst="rect">
+            <a:avLst/>
+          </a:prstGeom>
+          <a:noFill/>
+          <a:ln w="0">
+            <a:noFill/>
+          </a:ln>
+        </p:spPr>
+        <p:txBody>
+          <a:bodyPr lIns="0" rIns="0" tIns="0" bIns="0" anchor="t">
+            <a:noAutofit/>
+          </a:bodyPr>
+          <a:p>
+            <a:r>
+              <a:rPr b="1" lang="en-US" sz="980" spc="-1" strike="noStrike">
+                <a:solidFill>
+                  <a:srgbClr val="3d68ec"/>
+                </a:solidFill>
+                <a:latin typeface="Arial"/>
+                <a:ea typeface="Arial"/>
+              </a:rPr>
+              <a:t>Planning </a:t>
+            </a:r>
+            <a:r>
+              <a:rPr b="1" lang="en-US" sz="980" spc="-1" strike="noStrike">
+                <a:solidFill>
+                  <a:srgbClr val="3d68ec"/>
+                </a:solidFill>
+                <a:latin typeface="DejaVuSans"/>
+                <a:ea typeface="DejaVuSans"/>
+              </a:rPr>
+              <a:t>→ </a:t>
+            </a:r>
+            <a:r>
+              <a:rPr b="1" lang="en-US" sz="980" spc="-1" strike="noStrike">
+                <a:solidFill>
+                  <a:srgbClr val="3d68ec"/>
+                </a:solidFill>
+                <a:latin typeface="Arial"/>
+                <a:ea typeface="Arial"/>
+              </a:rPr>
+              <a:t>Catalogus</a:t>
+            </a:r>
+            <a:endParaRPr b="0" lang="en-US" sz="980" spc="-1" strike="noStrike">
+              <a:solidFill>
+                <a:srgbClr val="000000"/>
+              </a:solidFill>
+              <a:latin typeface="DejaVu Serif"/>
+            </a:endParaRPr>
+          </a:p>
+        </p:txBody>
+      </p:sp>
+      <p:sp>
+        <p:nvSpPr>
+          <p:cNvPr id="266" name=""/>
+          <p:cNvSpPr txBox="1"/>
+          <p:nvPr/>
+        </p:nvSpPr>
+        <p:spPr>
+          <a:xfrm>
+            <a:off x="2081880" y="2074680"/>
+            <a:ext cx="1599480" cy="145080"/>
+          </a:xfrm>
+          <a:prstGeom prst="rect">
+            <a:avLst/>
+          </a:prstGeom>
+          <a:noFill/>
+          <a:ln w="0">
+            <a:noFill/>
+          </a:ln>
+        </p:spPr>
+        <p:txBody>
+          <a:bodyPr lIns="0" rIns="0" tIns="0" bIns="0" anchor="t">
+            <a:noAutofit/>
+          </a:bodyPr>
+          <a:p>
+            <a:r>
+              <a:rPr b="0" lang="en-US" sz="980" spc="-1" strike="noStrike">
+                <a:solidFill>
+                  <a:srgbClr val="1a1a2e"/>
+                </a:solidFill>
+                <a:latin typeface="Arial"/>
+                <a:ea typeface="Arial"/>
+              </a:rPr>
+              <a:t>melding: aanbod gepland</a:t>
+            </a:r>
+            <a:endParaRPr b="0" lang="en-US" sz="980" spc="-1" strike="noStrike">
+              <a:solidFill>
+                <a:srgbClr val="000000"/>
+              </a:solidFill>
+              <a:latin typeface="DejaVu Serif"/>
+            </a:endParaRPr>
+          </a:p>
+        </p:txBody>
+      </p:sp>
+      <p:sp>
+        <p:nvSpPr>
+          <p:cNvPr id="267" name=""/>
+          <p:cNvSpPr txBox="1"/>
+          <p:nvPr/>
+        </p:nvSpPr>
+        <p:spPr>
+          <a:xfrm>
+            <a:off x="603720" y="2322360"/>
+            <a:ext cx="1509480" cy="145080"/>
+          </a:xfrm>
+          <a:prstGeom prst="rect">
+            <a:avLst/>
+          </a:prstGeom>
+          <a:noFill/>
+          <a:ln w="0">
+            <a:noFill/>
+          </a:ln>
+        </p:spPr>
+        <p:txBody>
+          <a:bodyPr lIns="0" rIns="0" tIns="0" bIns="0" anchor="t">
+            <a:noAutofit/>
+          </a:bodyPr>
+          <a:p>
+            <a:r>
+              <a:rPr b="1" lang="en-US" sz="980" spc="-1" strike="noStrike">
+                <a:solidFill>
+                  <a:srgbClr val="dd784b"/>
+                </a:solidFill>
+                <a:latin typeface="Arial"/>
+                <a:ea typeface="Arial"/>
+              </a:rPr>
+              <a:t>Catalogus </a:t>
+            </a:r>
+            <a:r>
+              <a:rPr b="1" lang="en-US" sz="980" spc="-1" strike="noStrike">
+                <a:solidFill>
+                  <a:srgbClr val="dd784b"/>
+                </a:solidFill>
+                <a:latin typeface="DejaVuSans"/>
+                <a:ea typeface="DejaVuSans"/>
+              </a:rPr>
+              <a:t>→ </a:t>
+            </a:r>
+            <a:r>
+              <a:rPr b="1" lang="en-US" sz="980" spc="-1" strike="noStrike">
+                <a:solidFill>
+                  <a:srgbClr val="dd784b"/>
+                </a:solidFill>
+                <a:latin typeface="Arial"/>
+                <a:ea typeface="Arial"/>
+              </a:rPr>
+              <a:t>Planning</a:t>
+            </a:r>
+            <a:endParaRPr b="0" lang="en-US" sz="980" spc="-1" strike="noStrike">
+              <a:solidFill>
+                <a:srgbClr val="000000"/>
+              </a:solidFill>
+              <a:latin typeface="DejaVu Serif"/>
+            </a:endParaRPr>
+          </a:p>
+        </p:txBody>
+      </p:sp>
+      <p:sp>
+        <p:nvSpPr>
+          <p:cNvPr id="268" name=""/>
+          <p:cNvSpPr txBox="1"/>
+          <p:nvPr/>
+        </p:nvSpPr>
+        <p:spPr>
+          <a:xfrm>
+            <a:off x="2081880" y="2322360"/>
+            <a:ext cx="1261080" cy="145080"/>
+          </a:xfrm>
+          <a:prstGeom prst="rect">
+            <a:avLst/>
+          </a:prstGeom>
+          <a:noFill/>
+          <a:ln w="0">
+            <a:noFill/>
+          </a:ln>
+        </p:spPr>
+        <p:txBody>
+          <a:bodyPr lIns="0" rIns="0" tIns="0" bIns="0" anchor="t">
+            <a:noAutofit/>
+          </a:bodyPr>
+          <a:p>
+            <a:r>
+              <a:rPr b="0" lang="en-US" sz="980" spc="-1" strike="noStrike">
+                <a:solidFill>
+                  <a:srgbClr val="1a1a2e"/>
+                </a:solidFill>
+                <a:latin typeface="Arial"/>
+                <a:ea typeface="Arial"/>
+              </a:rPr>
+              <a:t>haalt het aanbod op</a:t>
+            </a:r>
+            <a:endParaRPr b="0" lang="en-US" sz="980" spc="-1" strike="noStrike">
+              <a:solidFill>
+                <a:srgbClr val="000000"/>
+              </a:solidFill>
+              <a:latin typeface="DejaVu Serif"/>
+            </a:endParaRPr>
+          </a:p>
+        </p:txBody>
+      </p:sp>
+      <p:sp>
+        <p:nvSpPr>
+          <p:cNvPr id="269" name=""/>
+          <p:cNvSpPr txBox="1"/>
+          <p:nvPr/>
+        </p:nvSpPr>
+        <p:spPr>
+          <a:xfrm>
+            <a:off x="603720" y="2570040"/>
+            <a:ext cx="1509480" cy="145080"/>
+          </a:xfrm>
+          <a:prstGeom prst="rect">
+            <a:avLst/>
+          </a:prstGeom>
+          <a:noFill/>
+          <a:ln w="0">
+            <a:noFill/>
+          </a:ln>
+        </p:spPr>
+        <p:txBody>
+          <a:bodyPr lIns="0" rIns="0" tIns="0" bIns="0" anchor="t">
+            <a:noAutofit/>
+          </a:bodyPr>
+          <a:p>
+            <a:r>
+              <a:rPr b="1" lang="en-US" sz="980" spc="-1" strike="noStrike">
+                <a:solidFill>
+                  <a:srgbClr val="3d68ec"/>
+                </a:solidFill>
+                <a:latin typeface="Arial"/>
+                <a:ea typeface="Arial"/>
+              </a:rPr>
+              <a:t>Planning </a:t>
+            </a:r>
+            <a:r>
+              <a:rPr b="1" lang="en-US" sz="980" spc="-1" strike="noStrike">
+                <a:solidFill>
+                  <a:srgbClr val="3d68ec"/>
+                </a:solidFill>
+                <a:latin typeface="DejaVuSans"/>
+                <a:ea typeface="DejaVuSans"/>
+              </a:rPr>
+              <a:t>→ </a:t>
+            </a:r>
+            <a:r>
+              <a:rPr b="1" lang="en-US" sz="980" spc="-1" strike="noStrike">
+                <a:solidFill>
+                  <a:srgbClr val="3d68ec"/>
+                </a:solidFill>
+                <a:latin typeface="Arial"/>
+                <a:ea typeface="Arial"/>
+              </a:rPr>
+              <a:t>Catalogus</a:t>
+            </a:r>
+            <a:endParaRPr b="0" lang="en-US" sz="980" spc="-1" strike="noStrike">
+              <a:solidFill>
+                <a:srgbClr val="000000"/>
+              </a:solidFill>
+              <a:latin typeface="DejaVu Serif"/>
+            </a:endParaRPr>
+          </a:p>
+        </p:txBody>
+      </p:sp>
+      <p:sp>
+        <p:nvSpPr>
+          <p:cNvPr id="270" name=""/>
+          <p:cNvSpPr txBox="1"/>
+          <p:nvPr/>
+        </p:nvSpPr>
+        <p:spPr>
+          <a:xfrm>
+            <a:off x="2081880" y="2570040"/>
+            <a:ext cx="1945440" cy="145080"/>
+          </a:xfrm>
+          <a:prstGeom prst="rect">
+            <a:avLst/>
+          </a:prstGeom>
+          <a:noFill/>
+          <a:ln w="0">
+            <a:noFill/>
+          </a:ln>
+        </p:spPr>
+        <p:txBody>
+          <a:bodyPr lIns="0" rIns="0" tIns="0" bIns="0" anchor="t">
+            <a:noAutofit/>
+          </a:bodyPr>
+          <a:p>
+            <a:r>
+              <a:rPr b="0" lang="en-US" sz="980" spc="-1" strike="noStrike">
+                <a:solidFill>
+                  <a:srgbClr val="1a1a2e"/>
+                </a:solidFill>
+                <a:latin typeface="Arial"/>
+                <a:ea typeface="Arial"/>
+              </a:rPr>
+              <a:t>aanbod met verwijzing naar de</a:t>
+            </a:r>
+            <a:endParaRPr b="0" lang="en-US" sz="980" spc="-1" strike="noStrike">
+              <a:solidFill>
+                <a:srgbClr val="000000"/>
+              </a:solidFill>
+              <a:latin typeface="DejaVu Serif"/>
+            </a:endParaRPr>
+          </a:p>
+        </p:txBody>
+      </p:sp>
+      <p:sp>
+        <p:nvSpPr>
+          <p:cNvPr id="271" name=""/>
+          <p:cNvSpPr txBox="1"/>
+          <p:nvPr/>
+        </p:nvSpPr>
+        <p:spPr>
+          <a:xfrm>
+            <a:off x="2081880" y="2751120"/>
+            <a:ext cx="709560" cy="145080"/>
+          </a:xfrm>
+          <a:prstGeom prst="rect">
+            <a:avLst/>
+          </a:prstGeom>
+          <a:noFill/>
+          <a:ln w="0">
+            <a:noFill/>
+          </a:ln>
+        </p:spPr>
+        <p:txBody>
+          <a:bodyPr lIns="0" rIns="0" tIns="0" bIns="0" anchor="t">
+            <a:noAutofit/>
+          </a:bodyPr>
+          <a:p>
+            <a:r>
+              <a:rPr b="0" lang="en-US" sz="980" spc="-1" strike="noStrike">
+                <a:solidFill>
+                  <a:srgbClr val="1a1a2e"/>
+                </a:solidFill>
+                <a:latin typeface="Arial"/>
+                <a:ea typeface="Arial"/>
+              </a:rPr>
+              <a:t>speciﬁcatie</a:t>
+            </a:r>
+            <a:endParaRPr b="0" lang="en-US" sz="980" spc="-1" strike="noStrike">
+              <a:solidFill>
+                <a:srgbClr val="000000"/>
+              </a:solidFill>
+              <a:latin typeface="DejaVu Serif"/>
+            </a:endParaRPr>
+          </a:p>
+        </p:txBody>
+      </p:sp>
+      <p:sp>
+        <p:nvSpPr>
+          <p:cNvPr id="272" name=""/>
+          <p:cNvSpPr/>
+          <p:nvPr/>
+        </p:nvSpPr>
+        <p:spPr>
+          <a:xfrm>
+            <a:off x="599760" y="3619440"/>
+            <a:ext cx="1953000" cy="181080"/>
+          </a:xfrm>
+          <a:custGeom>
+            <a:avLst/>
+            <a:gdLst/>
+            <a:ahLst/>
+            <a:rect l="0" t="0" r="r" b="b"/>
+            <a:pathLst>
+              <a:path w="5425" h="503">
+                <a:moveTo>
+                  <a:pt x="0" y="398"/>
+                </a:moveTo>
+                <a:lnTo>
+                  <a:pt x="0" y="105"/>
+                </a:lnTo>
+                <a:cubicBezTo>
+                  <a:pt x="0" y="91"/>
+                  <a:pt x="3" y="78"/>
+                  <a:pt x="8" y="65"/>
+                </a:cubicBezTo>
+                <a:cubicBezTo>
+                  <a:pt x="14" y="52"/>
+                  <a:pt x="21" y="41"/>
+                  <a:pt x="31" y="31"/>
+                </a:cubicBezTo>
+                <a:cubicBezTo>
+                  <a:pt x="41" y="21"/>
+                  <a:pt x="53" y="13"/>
+                  <a:pt x="66" y="8"/>
+                </a:cubicBezTo>
+                <a:cubicBezTo>
+                  <a:pt x="79" y="2"/>
+                  <a:pt x="92" y="0"/>
+                  <a:pt x="106" y="0"/>
+                </a:cubicBezTo>
+                <a:lnTo>
+                  <a:pt x="5319" y="0"/>
+                </a:lnTo>
+                <a:cubicBezTo>
+                  <a:pt x="5334" y="0"/>
+                  <a:pt x="5347" y="2"/>
+                  <a:pt x="5360" y="8"/>
+                </a:cubicBezTo>
+                <a:cubicBezTo>
+                  <a:pt x="5373" y="13"/>
+                  <a:pt x="5384" y="21"/>
+                  <a:pt x="5394" y="31"/>
+                </a:cubicBezTo>
+                <a:cubicBezTo>
+                  <a:pt x="5404" y="41"/>
+                  <a:pt x="5412" y="52"/>
+                  <a:pt x="5417" y="65"/>
+                </a:cubicBezTo>
+                <a:cubicBezTo>
+                  <a:pt x="5423" y="78"/>
+                  <a:pt x="5425" y="91"/>
+                  <a:pt x="5425" y="105"/>
+                </a:cubicBezTo>
+                <a:lnTo>
+                  <a:pt x="5425" y="398"/>
+                </a:lnTo>
+                <a:cubicBezTo>
+                  <a:pt x="5425" y="412"/>
+                  <a:pt x="5423" y="425"/>
+                  <a:pt x="5417" y="438"/>
+                </a:cubicBezTo>
+                <a:cubicBezTo>
+                  <a:pt x="5412" y="451"/>
+                  <a:pt x="5404" y="462"/>
+                  <a:pt x="5394" y="472"/>
+                </a:cubicBezTo>
+                <a:cubicBezTo>
+                  <a:pt x="5384" y="482"/>
+                  <a:pt x="5373" y="490"/>
+                  <a:pt x="5360" y="495"/>
+                </a:cubicBezTo>
+                <a:cubicBezTo>
+                  <a:pt x="5347" y="501"/>
+                  <a:pt x="5334" y="503"/>
+                  <a:pt x="5319" y="503"/>
+                </a:cubicBezTo>
+                <a:lnTo>
+                  <a:pt x="106" y="503"/>
+                </a:lnTo>
+                <a:cubicBezTo>
+                  <a:pt x="92" y="503"/>
+                  <a:pt x="79" y="501"/>
+                  <a:pt x="66" y="495"/>
+                </a:cubicBezTo>
+                <a:cubicBezTo>
+                  <a:pt x="53" y="490"/>
+                  <a:pt x="41" y="482"/>
+                  <a:pt x="31" y="472"/>
+                </a:cubicBezTo>
+                <a:cubicBezTo>
+                  <a:pt x="21" y="462"/>
+                  <a:pt x="14" y="451"/>
+                  <a:pt x="8" y="438"/>
+                </a:cubicBezTo>
+                <a:cubicBezTo>
+                  <a:pt x="3" y="425"/>
+                  <a:pt x="0" y="412"/>
+                  <a:pt x="0" y="398"/>
+                </a:cubicBezTo>
+                <a:close/>
+              </a:path>
+            </a:pathLst>
+          </a:custGeom>
+          <a:solidFill>
+            <a:srgbClr val="f1f3f5"/>
+          </a:solidFill>
+          <a:ln w="0">
+            <a:noFill/>
+          </a:ln>
+        </p:spPr>
+        <p:txBody>
+          <a:bodyPr lIns="0" rIns="0" tIns="0" bIns="0" anchor="t">
+            <a:noAutofit/>
+          </a:bodyPr>
+          <a:p>
+            <a:endParaRPr b="0" lang="en-US" sz="2400" spc="-1" strike="noStrike">
+              <a:solidFill>
+                <a:srgbClr val="000000"/>
+              </a:solidFill>
+              <a:latin typeface="DejaVu Serif"/>
+            </a:endParaRPr>
+          </a:p>
+        </p:txBody>
+      </p:sp>
+      <p:sp>
+        <p:nvSpPr>
+          <p:cNvPr id="273" name=""/>
+          <p:cNvSpPr txBox="1"/>
+          <p:nvPr/>
+        </p:nvSpPr>
+        <p:spPr>
+          <a:xfrm>
+            <a:off x="603720" y="3317760"/>
+            <a:ext cx="707760" cy="163440"/>
+          </a:xfrm>
+          <a:prstGeom prst="rect">
+            <a:avLst/>
+          </a:prstGeom>
+          <a:noFill/>
+          <a:ln w="0">
+            <a:noFill/>
+          </a:ln>
+        </p:spPr>
+        <p:txBody>
+          <a:bodyPr lIns="0" rIns="0" tIns="0" bIns="0" anchor="t">
+            <a:noAutofit/>
+          </a:bodyPr>
+          <a:p>
+            <a:r>
+              <a:rPr b="1" lang="en-US" sz="1110" spc="-1" strike="noStrike">
+                <a:solidFill>
+                  <a:srgbClr val="1a1a2e"/>
+                </a:solidFill>
+                <a:latin typeface="Arial"/>
+                <a:ea typeface="Arial"/>
+              </a:rPr>
+              <a:t>Endpoint</a:t>
+            </a:r>
+            <a:endParaRPr b="0" lang="en-US" sz="1110" spc="-1" strike="noStrike">
+              <a:solidFill>
+                <a:srgbClr val="000000"/>
+              </a:solidFill>
+              <a:latin typeface="DejaVu Serif"/>
+            </a:endParaRPr>
+          </a:p>
+        </p:txBody>
+      </p:sp>
+      <p:sp>
+        <p:nvSpPr>
+          <p:cNvPr id="274" name=""/>
+          <p:cNvSpPr txBox="1"/>
+          <p:nvPr/>
+        </p:nvSpPr>
+        <p:spPr>
+          <a:xfrm>
+            <a:off x="660960" y="3630240"/>
+            <a:ext cx="1829520" cy="142200"/>
+          </a:xfrm>
+          <a:prstGeom prst="rect">
+            <a:avLst/>
+          </a:prstGeom>
+          <a:noFill/>
+          <a:ln w="0">
+            <a:noFill/>
+          </a:ln>
+        </p:spPr>
+        <p:txBody>
+          <a:bodyPr lIns="0" rIns="0" tIns="0" bIns="0" anchor="t">
+            <a:noAutofit/>
+          </a:bodyPr>
+          <a:p>
+            <a:r>
+              <a:rPr b="0" lang="en-US" sz="960" spc="-1" strike="noStrike">
+                <a:solidFill>
+                  <a:srgbClr val="dd784b"/>
+                </a:solidFill>
+                <a:latin typeface="DejaVuSansMono"/>
+                <a:ea typeface="DejaVuSansMono"/>
+              </a:rPr>
+              <a:t>GET /onderwijsaanbod/{id}</a:t>
+            </a:r>
+            <a:endParaRPr b="0" lang="en-US" sz="960" spc="-1" strike="noStrike">
+              <a:solidFill>
+                <a:srgbClr val="000000"/>
+              </a:solidFill>
+              <a:latin typeface="DejaVu Serif"/>
+            </a:endParaRPr>
+          </a:p>
+        </p:txBody>
+      </p:sp>
+      <p:sp>
+        <p:nvSpPr>
+          <p:cNvPr id="275" name=""/>
+          <p:cNvSpPr/>
+          <p:nvPr/>
+        </p:nvSpPr>
+        <p:spPr>
+          <a:xfrm>
+            <a:off x="4752720" y="1628640"/>
+            <a:ext cx="4124880" cy="2152800"/>
+          </a:xfrm>
+          <a:custGeom>
+            <a:avLst/>
+            <a:gdLst/>
+            <a:ahLst/>
+            <a:rect l="0" t="0" r="r" b="b"/>
+            <a:pathLst>
+              <a:path w="11458" h="5980">
+                <a:moveTo>
+                  <a:pt x="0" y="0"/>
+                </a:moveTo>
+                <a:lnTo>
+                  <a:pt x="11458" y="0"/>
+                </a:lnTo>
+                <a:lnTo>
+                  <a:pt x="11458" y="5980"/>
+                </a:lnTo>
+                <a:lnTo>
+                  <a:pt x="0" y="5980"/>
+                </a:lnTo>
+                <a:lnTo>
+                  <a:pt x="0" y="0"/>
+                </a:lnTo>
+                <a:close/>
+              </a:path>
+            </a:pathLst>
+          </a:custGeom>
+          <a:solidFill>
+            <a:srgbClr val="ffffff"/>
+          </a:solidFill>
+          <a:ln w="0">
+            <a:noFill/>
+          </a:ln>
+        </p:spPr>
+        <p:txBody>
+          <a:bodyPr lIns="0" rIns="0" tIns="0" bIns="0" anchor="t">
+            <a:noAutofit/>
+          </a:bodyPr>
+          <a:p>
+            <a:endParaRPr b="0" lang="en-US" sz="2400" spc="-1" strike="noStrike">
+              <a:solidFill>
+                <a:srgbClr val="000000"/>
+              </a:solidFill>
+              <a:latin typeface="DejaVu Serif"/>
+            </a:endParaRPr>
+          </a:p>
+        </p:txBody>
+      </p:sp>
+      <p:sp>
+        <p:nvSpPr>
+          <p:cNvPr id="276" name=""/>
+          <p:cNvSpPr/>
+          <p:nvPr/>
+        </p:nvSpPr>
+        <p:spPr>
+          <a:xfrm>
+            <a:off x="4752720" y="1628640"/>
+            <a:ext cx="4124880" cy="38520"/>
+          </a:xfrm>
+          <a:custGeom>
+            <a:avLst/>
+            <a:gdLst/>
+            <a:ahLst/>
+            <a:rect l="0" t="0" r="r" b="b"/>
+            <a:pathLst>
+              <a:path w="11458" h="107">
+                <a:moveTo>
+                  <a:pt x="0" y="0"/>
+                </a:moveTo>
+                <a:lnTo>
+                  <a:pt x="11458" y="0"/>
+                </a:lnTo>
+                <a:lnTo>
+                  <a:pt x="11458" y="107"/>
+                </a:lnTo>
+                <a:lnTo>
+                  <a:pt x="0" y="107"/>
+                </a:lnTo>
+                <a:lnTo>
+                  <a:pt x="0" y="0"/>
+                </a:lnTo>
+                <a:close/>
+              </a:path>
+            </a:pathLst>
+          </a:custGeom>
+          <a:solidFill>
+            <a:srgbClr val="00af81"/>
+          </a:solidFill>
+          <a:ln w="0">
+            <a:noFill/>
+          </a:ln>
+        </p:spPr>
+        <p:txBody>
+          <a:bodyPr lIns="0" rIns="0" tIns="0" bIns="0" anchor="t">
+            <a:noAutofit/>
+          </a:bodyPr>
+          <a:p>
+            <a:endParaRPr b="0" lang="en-US" sz="2400" spc="-1" strike="noStrike">
+              <a:solidFill>
+                <a:srgbClr val="000000"/>
+              </a:solidFill>
+              <a:latin typeface="DejaVu Serif"/>
+            </a:endParaRPr>
+          </a:p>
+        </p:txBody>
+      </p:sp>
+      <p:sp>
+        <p:nvSpPr>
+          <p:cNvPr id="277" name=""/>
+          <p:cNvSpPr/>
+          <p:nvPr/>
+        </p:nvSpPr>
+        <p:spPr>
+          <a:xfrm>
+            <a:off x="4752720" y="3771720"/>
+            <a:ext cx="4124880" cy="9720"/>
+          </a:xfrm>
+          <a:custGeom>
+            <a:avLst/>
+            <a:gdLst/>
+            <a:ahLst/>
+            <a:rect l="0" t="0" r="r" b="b"/>
+            <a:pathLst>
+              <a:path w="11458" h="27">
+                <a:moveTo>
+                  <a:pt x="0" y="0"/>
+                </a:moveTo>
+                <a:lnTo>
+                  <a:pt x="11458" y="0"/>
+                </a:lnTo>
+                <a:lnTo>
+                  <a:pt x="11458" y="27"/>
+                </a:lnTo>
+                <a:lnTo>
+                  <a:pt x="0" y="27"/>
+                </a:lnTo>
+                <a:lnTo>
+                  <a:pt x="0" y="0"/>
+                </a:lnTo>
+                <a:close/>
+              </a:path>
+            </a:pathLst>
+          </a:custGeom>
+          <a:solidFill>
+            <a:srgbClr val="e5e7eb"/>
+          </a:solidFill>
+          <a:ln w="0">
+            <a:noFill/>
+          </a:ln>
+        </p:spPr>
+        <p:txBody>
+          <a:bodyPr lIns="0" rIns="0" tIns="0" bIns="0" anchor="t">
+            <a:noAutofit/>
+          </a:bodyPr>
+          <a:p>
+            <a:endParaRPr b="0" lang="en-US" sz="2400" spc="-1" strike="noStrike">
+              <a:solidFill>
+                <a:srgbClr val="000000"/>
+              </a:solidFill>
+              <a:latin typeface="DejaVu Serif"/>
+            </a:endParaRPr>
+          </a:p>
+        </p:txBody>
+      </p:sp>
+      <p:sp>
+        <p:nvSpPr>
+          <p:cNvPr id="278" name=""/>
+          <p:cNvSpPr/>
+          <p:nvPr/>
+        </p:nvSpPr>
+        <p:spPr>
+          <a:xfrm>
+            <a:off x="8867520" y="1628640"/>
+            <a:ext cx="10080" cy="2152800"/>
+          </a:xfrm>
+          <a:custGeom>
+            <a:avLst/>
+            <a:gdLst/>
+            <a:ahLst/>
+            <a:rect l="0" t="0" r="r" b="b"/>
+            <a:pathLst>
+              <a:path w="28" h="5980">
+                <a:moveTo>
+                  <a:pt x="0" y="106"/>
+                </a:moveTo>
+                <a:lnTo>
+                  <a:pt x="0" y="5980"/>
+                </a:lnTo>
+                <a:lnTo>
+                  <a:pt x="28" y="5980"/>
+                </a:lnTo>
+                <a:lnTo>
+                  <a:pt x="28" y="0"/>
+                </a:lnTo>
+                <a:lnTo>
+                  <a:pt x="0" y="106"/>
+                </a:lnTo>
+                <a:close/>
+              </a:path>
+            </a:pathLst>
+          </a:custGeom>
+          <a:solidFill>
+            <a:srgbClr val="e5e7eb"/>
+          </a:solidFill>
+          <a:ln w="0">
+            <a:noFill/>
+          </a:ln>
+        </p:spPr>
+        <p:txBody>
+          <a:bodyPr lIns="0" rIns="0" tIns="0" bIns="0" anchor="t">
+            <a:noAutofit/>
+          </a:bodyPr>
+          <a:p>
+            <a:endParaRPr b="0" lang="en-US" sz="2400" spc="-1" strike="noStrike">
+              <a:solidFill>
+                <a:srgbClr val="000000"/>
+              </a:solidFill>
+              <a:latin typeface="DejaVu Serif"/>
+            </a:endParaRPr>
+          </a:p>
+        </p:txBody>
+      </p:sp>
+      <p:sp>
+        <p:nvSpPr>
+          <p:cNvPr id="279" name=""/>
+          <p:cNvSpPr/>
+          <p:nvPr/>
+        </p:nvSpPr>
+        <p:spPr>
+          <a:xfrm>
+            <a:off x="4752720" y="1628640"/>
+            <a:ext cx="10080" cy="2152800"/>
+          </a:xfrm>
+          <a:custGeom>
+            <a:avLst/>
+            <a:gdLst/>
+            <a:ahLst/>
+            <a:rect l="0" t="0" r="r" b="b"/>
+            <a:pathLst>
+              <a:path w="28" h="5980">
+                <a:moveTo>
+                  <a:pt x="0" y="0"/>
+                </a:moveTo>
+                <a:lnTo>
+                  <a:pt x="0" y="5980"/>
+                </a:lnTo>
+                <a:lnTo>
+                  <a:pt x="28" y="5980"/>
+                </a:lnTo>
+                <a:lnTo>
+                  <a:pt x="28" y="106"/>
+                </a:lnTo>
+                <a:lnTo>
+                  <a:pt x="0" y="0"/>
+                </a:lnTo>
+                <a:close/>
+              </a:path>
+            </a:pathLst>
+          </a:custGeom>
+          <a:solidFill>
+            <a:srgbClr val="e5e7eb"/>
+          </a:solidFill>
+          <a:ln w="0">
+            <a:noFill/>
+          </a:ln>
+        </p:spPr>
+        <p:txBody>
+          <a:bodyPr lIns="0" rIns="0" tIns="0" bIns="0" anchor="t">
+            <a:noAutofit/>
+          </a:bodyPr>
+          <a:p>
+            <a:endParaRPr b="0" lang="en-US" sz="2400" spc="-1" strike="noStrike">
+              <a:solidFill>
+                <a:srgbClr val="000000"/>
+              </a:solidFill>
+              <a:latin typeface="DejaVu Serif"/>
+            </a:endParaRPr>
+          </a:p>
+        </p:txBody>
+      </p:sp>
+      <p:sp>
+        <p:nvSpPr>
+          <p:cNvPr id="280" name=""/>
+          <p:cNvSpPr/>
+          <p:nvPr/>
+        </p:nvSpPr>
+        <p:spPr>
+          <a:xfrm>
+            <a:off x="4900320" y="2052360"/>
+            <a:ext cx="3829680" cy="1610280"/>
+          </a:xfrm>
+          <a:custGeom>
+            <a:avLst/>
+            <a:gdLst/>
+            <a:ahLst/>
+            <a:rect l="0" t="0" r="r" b="b"/>
+            <a:pathLst>
+              <a:path w="10638" h="4473">
+                <a:moveTo>
+                  <a:pt x="0" y="4327"/>
+                </a:moveTo>
+                <a:lnTo>
+                  <a:pt x="0" y="146"/>
+                </a:lnTo>
+                <a:cubicBezTo>
+                  <a:pt x="0" y="136"/>
+                  <a:pt x="1" y="127"/>
+                  <a:pt x="3" y="117"/>
+                </a:cubicBezTo>
+                <a:cubicBezTo>
+                  <a:pt x="5" y="108"/>
+                  <a:pt x="8" y="99"/>
+                  <a:pt x="11" y="90"/>
+                </a:cubicBezTo>
+                <a:cubicBezTo>
+                  <a:pt x="15" y="81"/>
+                  <a:pt x="20" y="73"/>
+                  <a:pt x="25" y="65"/>
+                </a:cubicBezTo>
+                <a:cubicBezTo>
+                  <a:pt x="30" y="57"/>
+                  <a:pt x="36" y="50"/>
+                  <a:pt x="43" y="43"/>
+                </a:cubicBezTo>
+                <a:cubicBezTo>
+                  <a:pt x="50" y="36"/>
+                  <a:pt x="57" y="30"/>
+                  <a:pt x="65" y="25"/>
+                </a:cubicBezTo>
+                <a:cubicBezTo>
+                  <a:pt x="73" y="19"/>
+                  <a:pt x="81" y="15"/>
+                  <a:pt x="90" y="11"/>
+                </a:cubicBezTo>
+                <a:cubicBezTo>
+                  <a:pt x="99" y="8"/>
+                  <a:pt x="108" y="5"/>
+                  <a:pt x="117" y="3"/>
+                </a:cubicBezTo>
+                <a:cubicBezTo>
+                  <a:pt x="127" y="1"/>
+                  <a:pt x="136" y="0"/>
+                  <a:pt x="146" y="0"/>
+                </a:cubicBezTo>
+                <a:lnTo>
+                  <a:pt x="10492" y="0"/>
+                </a:lnTo>
+                <a:cubicBezTo>
+                  <a:pt x="10502" y="0"/>
+                  <a:pt x="10511" y="1"/>
+                  <a:pt x="10520" y="3"/>
+                </a:cubicBezTo>
+                <a:cubicBezTo>
+                  <a:pt x="10530" y="5"/>
+                  <a:pt x="10539" y="8"/>
+                  <a:pt x="10548" y="11"/>
+                </a:cubicBezTo>
+                <a:cubicBezTo>
+                  <a:pt x="10557" y="15"/>
+                  <a:pt x="10565" y="19"/>
+                  <a:pt x="10573" y="25"/>
+                </a:cubicBezTo>
+                <a:cubicBezTo>
+                  <a:pt x="10581" y="30"/>
+                  <a:pt x="10588" y="36"/>
+                  <a:pt x="10595" y="43"/>
+                </a:cubicBezTo>
+                <a:cubicBezTo>
+                  <a:pt x="10602" y="50"/>
+                  <a:pt x="10608" y="57"/>
+                  <a:pt x="10613" y="65"/>
+                </a:cubicBezTo>
+                <a:cubicBezTo>
+                  <a:pt x="10618" y="73"/>
+                  <a:pt x="10623" y="81"/>
+                  <a:pt x="10626" y="90"/>
+                </a:cubicBezTo>
+                <a:cubicBezTo>
+                  <a:pt x="10630" y="99"/>
+                  <a:pt x="10633" y="108"/>
+                  <a:pt x="10635" y="117"/>
+                </a:cubicBezTo>
+                <a:cubicBezTo>
+                  <a:pt x="10637" y="127"/>
+                  <a:pt x="10638" y="136"/>
+                  <a:pt x="10638" y="146"/>
+                </a:cubicBezTo>
+                <a:lnTo>
+                  <a:pt x="10638" y="4327"/>
+                </a:lnTo>
+                <a:cubicBezTo>
+                  <a:pt x="10638" y="4337"/>
+                  <a:pt x="10637" y="4346"/>
+                  <a:pt x="10635" y="4356"/>
+                </a:cubicBezTo>
+                <a:cubicBezTo>
+                  <a:pt x="10633" y="4365"/>
+                  <a:pt x="10630" y="4374"/>
+                  <a:pt x="10626" y="4383"/>
+                </a:cubicBezTo>
+                <a:cubicBezTo>
+                  <a:pt x="10623" y="4392"/>
+                  <a:pt x="10618" y="4400"/>
+                  <a:pt x="10613" y="4408"/>
+                </a:cubicBezTo>
+                <a:cubicBezTo>
+                  <a:pt x="10608" y="4416"/>
+                  <a:pt x="10602" y="4423"/>
+                  <a:pt x="10595" y="4430"/>
+                </a:cubicBezTo>
+                <a:cubicBezTo>
+                  <a:pt x="10588" y="4437"/>
+                  <a:pt x="10581" y="4443"/>
+                  <a:pt x="10573" y="4448"/>
+                </a:cubicBezTo>
+                <a:cubicBezTo>
+                  <a:pt x="10565" y="4454"/>
+                  <a:pt x="10557" y="4458"/>
+                  <a:pt x="10548" y="4462"/>
+                </a:cubicBezTo>
+                <a:cubicBezTo>
+                  <a:pt x="10539" y="4465"/>
+                  <a:pt x="10530" y="4468"/>
+                  <a:pt x="10520" y="4470"/>
+                </a:cubicBezTo>
+                <a:cubicBezTo>
+                  <a:pt x="10511" y="4472"/>
+                  <a:pt x="10502" y="4473"/>
+                  <a:pt x="10492" y="4473"/>
+                </a:cubicBezTo>
+                <a:lnTo>
+                  <a:pt x="146" y="4473"/>
+                </a:lnTo>
+                <a:cubicBezTo>
+                  <a:pt x="136" y="4473"/>
+                  <a:pt x="127" y="4472"/>
+                  <a:pt x="117" y="4470"/>
+                </a:cubicBezTo>
+                <a:cubicBezTo>
+                  <a:pt x="108" y="4468"/>
+                  <a:pt x="99" y="4465"/>
+                  <a:pt x="90" y="4462"/>
+                </a:cubicBezTo>
+                <a:cubicBezTo>
+                  <a:pt x="81" y="4458"/>
+                  <a:pt x="73" y="4454"/>
+                  <a:pt x="65" y="4448"/>
+                </a:cubicBezTo>
+                <a:cubicBezTo>
+                  <a:pt x="57" y="4443"/>
+                  <a:pt x="50" y="4437"/>
+                  <a:pt x="43" y="4430"/>
+                </a:cubicBezTo>
+                <a:cubicBezTo>
+                  <a:pt x="36" y="4423"/>
+                  <a:pt x="30" y="4416"/>
+                  <a:pt x="25" y="4408"/>
+                </a:cubicBezTo>
+                <a:cubicBezTo>
+                  <a:pt x="20" y="4400"/>
+                  <a:pt x="15" y="4392"/>
+                  <a:pt x="11" y="4383"/>
+                </a:cubicBezTo>
+                <a:cubicBezTo>
+                  <a:pt x="8" y="4374"/>
+                  <a:pt x="5" y="4365"/>
+                  <a:pt x="3" y="4356"/>
+                </a:cubicBezTo>
+                <a:cubicBezTo>
+                  <a:pt x="1" y="4346"/>
+                  <a:pt x="0" y="4337"/>
+                  <a:pt x="0" y="4327"/>
+                </a:cubicBezTo>
+                <a:close/>
+              </a:path>
+            </a:pathLst>
+          </a:custGeom>
+          <a:solidFill>
+            <a:srgbClr val="f8f9fa"/>
+          </a:solidFill>
+          <a:ln w="0">
+            <a:noFill/>
+          </a:ln>
+        </p:spPr>
+        <p:txBody>
+          <a:bodyPr lIns="0" rIns="0" tIns="0" bIns="0" anchor="t">
+            <a:noAutofit/>
+          </a:bodyPr>
+          <a:p>
+            <a:endParaRPr b="0" lang="en-US" sz="2400" spc="-1" strike="noStrike">
+              <a:solidFill>
+                <a:srgbClr val="000000"/>
+              </a:solidFill>
+              <a:latin typeface="DejaVu Serif"/>
+            </a:endParaRPr>
+          </a:p>
+        </p:txBody>
+      </p:sp>
+      <p:sp>
+        <p:nvSpPr>
+          <p:cNvPr id="281" name=""/>
+          <p:cNvSpPr/>
+          <p:nvPr/>
+        </p:nvSpPr>
+        <p:spPr>
+          <a:xfrm>
+            <a:off x="4900320" y="2052360"/>
+            <a:ext cx="3829680" cy="1610280"/>
+          </a:xfrm>
+          <a:custGeom>
+            <a:avLst/>
+            <a:gdLst/>
+            <a:ahLst/>
+            <a:rect l="0" t="0" r="r" b="b"/>
+            <a:pathLst>
+              <a:path w="10638" h="4473">
+                <a:moveTo>
+                  <a:pt x="0" y="4327"/>
+                </a:moveTo>
+                <a:lnTo>
+                  <a:pt x="0" y="146"/>
+                </a:lnTo>
+                <a:cubicBezTo>
+                  <a:pt x="0" y="136"/>
+                  <a:pt x="1" y="127"/>
+                  <a:pt x="3" y="117"/>
+                </a:cubicBezTo>
+                <a:cubicBezTo>
+                  <a:pt x="5" y="108"/>
+                  <a:pt x="8" y="99"/>
+                  <a:pt x="11" y="90"/>
+                </a:cubicBezTo>
+                <a:cubicBezTo>
+                  <a:pt x="15" y="81"/>
+                  <a:pt x="20" y="73"/>
+                  <a:pt x="25" y="65"/>
+                </a:cubicBezTo>
+                <a:cubicBezTo>
+                  <a:pt x="30" y="57"/>
+                  <a:pt x="36" y="50"/>
+                  <a:pt x="43" y="43"/>
+                </a:cubicBezTo>
+                <a:cubicBezTo>
+                  <a:pt x="50" y="36"/>
+                  <a:pt x="57" y="30"/>
+                  <a:pt x="65" y="25"/>
+                </a:cubicBezTo>
+                <a:cubicBezTo>
+                  <a:pt x="73" y="19"/>
+                  <a:pt x="81" y="15"/>
+                  <a:pt x="90" y="11"/>
+                </a:cubicBezTo>
+                <a:cubicBezTo>
+                  <a:pt x="99" y="8"/>
+                  <a:pt x="108" y="5"/>
+                  <a:pt x="117" y="3"/>
+                </a:cubicBezTo>
+                <a:cubicBezTo>
+                  <a:pt x="127" y="1"/>
+                  <a:pt x="136" y="0"/>
+                  <a:pt x="146" y="0"/>
+                </a:cubicBezTo>
+                <a:lnTo>
+                  <a:pt x="10492" y="0"/>
+                </a:lnTo>
+                <a:cubicBezTo>
+                  <a:pt x="10502" y="0"/>
+                  <a:pt x="10511" y="1"/>
+                  <a:pt x="10520" y="3"/>
+                </a:cubicBezTo>
+                <a:cubicBezTo>
+                  <a:pt x="10530" y="5"/>
+                  <a:pt x="10539" y="8"/>
+                  <a:pt x="10548" y="11"/>
+                </a:cubicBezTo>
+                <a:cubicBezTo>
+                  <a:pt x="10557" y="15"/>
+                  <a:pt x="10565" y="19"/>
+                  <a:pt x="10573" y="25"/>
+                </a:cubicBezTo>
+                <a:cubicBezTo>
+                  <a:pt x="10581" y="30"/>
+                  <a:pt x="10588" y="36"/>
+                  <a:pt x="10595" y="43"/>
+                </a:cubicBezTo>
+                <a:cubicBezTo>
+                  <a:pt x="10602" y="50"/>
+                  <a:pt x="10608" y="57"/>
+                  <a:pt x="10613" y="65"/>
+                </a:cubicBezTo>
+                <a:cubicBezTo>
+                  <a:pt x="10618" y="73"/>
+                  <a:pt x="10623" y="81"/>
+                  <a:pt x="10626" y="90"/>
+                </a:cubicBezTo>
+                <a:cubicBezTo>
+                  <a:pt x="10630" y="99"/>
+                  <a:pt x="10633" y="108"/>
+                  <a:pt x="10635" y="117"/>
+                </a:cubicBezTo>
+                <a:cubicBezTo>
+                  <a:pt x="10637" y="127"/>
+                  <a:pt x="10638" y="136"/>
+                  <a:pt x="10638" y="146"/>
+                </a:cubicBezTo>
+                <a:lnTo>
+                  <a:pt x="10638" y="4327"/>
+                </a:lnTo>
+                <a:cubicBezTo>
+                  <a:pt x="10638" y="4337"/>
+                  <a:pt x="10637" y="4346"/>
+                  <a:pt x="10635" y="4356"/>
+                </a:cubicBezTo>
+                <a:cubicBezTo>
+                  <a:pt x="10633" y="4365"/>
+                  <a:pt x="10630" y="4374"/>
+                  <a:pt x="10626" y="4383"/>
+                </a:cubicBezTo>
+                <a:cubicBezTo>
+                  <a:pt x="10623" y="4392"/>
+                  <a:pt x="10618" y="4400"/>
+                  <a:pt x="10613" y="4408"/>
+                </a:cubicBezTo>
+                <a:cubicBezTo>
+                  <a:pt x="10608" y="4416"/>
+                  <a:pt x="10602" y="4423"/>
+                  <a:pt x="10595" y="4430"/>
+                </a:cubicBezTo>
+                <a:cubicBezTo>
+                  <a:pt x="10588" y="4437"/>
+                  <a:pt x="10581" y="4443"/>
+                  <a:pt x="10573" y="4448"/>
+                </a:cubicBezTo>
+                <a:cubicBezTo>
+                  <a:pt x="10565" y="4454"/>
+                  <a:pt x="10557" y="4458"/>
+                  <a:pt x="10548" y="4462"/>
+                </a:cubicBezTo>
+                <a:cubicBezTo>
+                  <a:pt x="10539" y="4465"/>
+                  <a:pt x="10530" y="4468"/>
+                  <a:pt x="10520" y="4470"/>
+                </a:cubicBezTo>
+                <a:cubicBezTo>
+                  <a:pt x="10511" y="4472"/>
+                  <a:pt x="10502" y="4473"/>
+                  <a:pt x="10492" y="4473"/>
+                </a:cubicBezTo>
+                <a:lnTo>
+                  <a:pt x="146" y="4473"/>
+                </a:lnTo>
+                <a:cubicBezTo>
+                  <a:pt x="136" y="4473"/>
+                  <a:pt x="127" y="4472"/>
+                  <a:pt x="117" y="4470"/>
+                </a:cubicBezTo>
+                <a:cubicBezTo>
+                  <a:pt x="108" y="4468"/>
+                  <a:pt x="99" y="4465"/>
+                  <a:pt x="90" y="4462"/>
+                </a:cubicBezTo>
+                <a:cubicBezTo>
+                  <a:pt x="81" y="4458"/>
+                  <a:pt x="73" y="4454"/>
+                  <a:pt x="65" y="4448"/>
+                </a:cubicBezTo>
+                <a:cubicBezTo>
+                  <a:pt x="57" y="4443"/>
+                  <a:pt x="50" y="4437"/>
+                  <a:pt x="43" y="4430"/>
+                </a:cubicBezTo>
+                <a:cubicBezTo>
+                  <a:pt x="36" y="4423"/>
+                  <a:pt x="30" y="4416"/>
+                  <a:pt x="25" y="4408"/>
+                </a:cubicBezTo>
+                <a:cubicBezTo>
+                  <a:pt x="20" y="4400"/>
+                  <a:pt x="15" y="4392"/>
+                  <a:pt x="11" y="4383"/>
+                </a:cubicBezTo>
+                <a:cubicBezTo>
+                  <a:pt x="8" y="4374"/>
+                  <a:pt x="5" y="4365"/>
+                  <a:pt x="3" y="4356"/>
+                </a:cubicBezTo>
+                <a:cubicBezTo>
+                  <a:pt x="1" y="4346"/>
+                  <a:pt x="0" y="4337"/>
+                  <a:pt x="0" y="4327"/>
+                </a:cubicBezTo>
+                <a:close/>
+              </a:path>
+            </a:pathLst>
+          </a:custGeom>
+          <a:noFill/>
+          <a:ln w="9360">
+            <a:solidFill>
+              <a:srgbClr val="e5e7eb"/>
+            </a:solidFill>
+            <a:miter/>
+          </a:ln>
+        </p:spPr>
+        <p:txBody>
+          <a:bodyPr lIns="4680" rIns="4680" tIns="4680" bIns="4680" anchor="t">
+            <a:noAutofit/>
+          </a:bodyPr>
+          <a:p>
+            <a:endParaRPr b="0" lang="en-US" sz="2400" spc="-1" strike="noStrike">
+              <a:solidFill>
+                <a:srgbClr val="000000"/>
+              </a:solidFill>
+              <a:latin typeface="DejaVu Serif"/>
+            </a:endParaRPr>
+          </a:p>
+        </p:txBody>
+      </p:sp>
+      <p:sp>
+        <p:nvSpPr>
+          <p:cNvPr id="282" name=""/>
+          <p:cNvSpPr txBox="1"/>
+          <p:nvPr/>
+        </p:nvSpPr>
+        <p:spPr>
+          <a:xfrm>
+            <a:off x="603720" y="3887280"/>
+            <a:ext cx="1538280" cy="142200"/>
+          </a:xfrm>
+          <a:prstGeom prst="rect">
+            <a:avLst/>
+          </a:prstGeom>
+          <a:noFill/>
+          <a:ln w="0">
+            <a:noFill/>
+          </a:ln>
+        </p:spPr>
+        <p:txBody>
+          <a:bodyPr lIns="0" rIns="0" tIns="0" bIns="0" anchor="t">
+            <a:noAutofit/>
+          </a:bodyPr>
+          <a:p>
+            <a:r>
+              <a:rPr b="0" lang="en-US" sz="960" spc="-1" strike="noStrike">
+                <a:solidFill>
+                  <a:srgbClr val="6b7280"/>
+                </a:solidFill>
+                <a:latin typeface="Arial"/>
+                <a:ea typeface="Arial"/>
+              </a:rPr>
+              <a:t>op het planningssysteem</a:t>
+            </a:r>
+            <a:endParaRPr b="0" lang="en-US" sz="960" spc="-1" strike="noStrike">
+              <a:solidFill>
+                <a:srgbClr val="000000"/>
+              </a:solidFill>
+              <a:latin typeface="DejaVu Serif"/>
+            </a:endParaRPr>
+          </a:p>
+        </p:txBody>
+      </p:sp>
+      <p:sp>
+        <p:nvSpPr>
+          <p:cNvPr id="283" name=""/>
+          <p:cNvSpPr txBox="1"/>
+          <p:nvPr/>
+        </p:nvSpPr>
+        <p:spPr>
+          <a:xfrm>
+            <a:off x="4897800" y="1793880"/>
+            <a:ext cx="1370880" cy="163440"/>
+          </a:xfrm>
+          <a:prstGeom prst="rect">
+            <a:avLst/>
+          </a:prstGeom>
+          <a:noFill/>
+          <a:ln w="0">
+            <a:noFill/>
+          </a:ln>
+        </p:spPr>
+        <p:txBody>
+          <a:bodyPr lIns="0" rIns="0" tIns="0" bIns="0" anchor="t">
+            <a:noAutofit/>
+          </a:bodyPr>
+          <a:p>
+            <a:r>
+              <a:rPr b="1" lang="en-US" sz="1110" spc="-1" strike="noStrike">
+                <a:solidFill>
+                  <a:srgbClr val="1a1a2e"/>
+                </a:solidFill>
+                <a:latin typeface="Arial"/>
+                <a:ea typeface="Arial"/>
+              </a:rPr>
+              <a:t>Voorbeeldbericht</a:t>
+            </a:r>
+            <a:endParaRPr b="0" lang="en-US" sz="1110" spc="-1" strike="noStrike">
+              <a:solidFill>
+                <a:srgbClr val="000000"/>
+              </a:solidFill>
+              <a:latin typeface="DejaVu Serif"/>
+            </a:endParaRPr>
+          </a:p>
+        </p:txBody>
+      </p:sp>
+      <p:sp>
+        <p:nvSpPr>
+          <p:cNvPr id="284" name=""/>
+          <p:cNvSpPr txBox="1"/>
+          <p:nvPr/>
+        </p:nvSpPr>
+        <p:spPr>
+          <a:xfrm>
+            <a:off x="5013720" y="2141280"/>
+            <a:ext cx="93960" cy="111960"/>
+          </a:xfrm>
+          <a:prstGeom prst="rect">
+            <a:avLst/>
+          </a:prstGeom>
+          <a:noFill/>
+          <a:ln w="0">
+            <a:noFill/>
+          </a:ln>
+        </p:spPr>
+        <p:txBody>
+          <a:bodyPr lIns="0" rIns="0" tIns="0" bIns="0" anchor="t">
+            <a:noAutofit/>
+          </a:bodyPr>
+          <a:p>
+            <a:r>
+              <a:rPr b="0" lang="en-US" sz="750" spc="-1" strike="noStrike">
+                <a:solidFill>
+                  <a:srgbClr val="1b2a6b"/>
+                </a:solidFill>
+                <a:latin typeface="DejaVuSansMono"/>
+                <a:ea typeface="DejaVuSansMono"/>
+              </a:rPr>
+              <a:t>{</a:t>
+            </a:r>
+            <a:endParaRPr b="0" lang="en-US" sz="750" spc="-1" strike="noStrike">
+              <a:solidFill>
+                <a:srgbClr val="000000"/>
+              </a:solidFill>
+              <a:latin typeface="DejaVu Serif"/>
+            </a:endParaRPr>
+          </a:p>
+        </p:txBody>
+      </p:sp>
+      <p:sp>
+        <p:nvSpPr>
+          <p:cNvPr id="285" name=""/>
+          <p:cNvSpPr txBox="1"/>
+          <p:nvPr/>
+        </p:nvSpPr>
+        <p:spPr>
+          <a:xfrm>
+            <a:off x="5013720" y="2284200"/>
+            <a:ext cx="1974240" cy="111960"/>
+          </a:xfrm>
+          <a:prstGeom prst="rect">
+            <a:avLst/>
+          </a:prstGeom>
+          <a:noFill/>
+          <a:ln w="0">
+            <a:noFill/>
+          </a:ln>
+        </p:spPr>
+        <p:txBody>
+          <a:bodyPr lIns="0" rIns="0" tIns="0" bIns="0" anchor="t">
+            <a:noAutofit/>
+          </a:bodyPr>
+          <a:p>
+            <a:r>
+              <a:rPr b="0" lang="en-US" sz="750" spc="-1" strike="noStrike">
+                <a:solidFill>
+                  <a:srgbClr val="1b2a6b"/>
+                </a:solidFill>
+                <a:latin typeface="DejaVuSansMono"/>
+                <a:ea typeface="DejaVuSansMono"/>
+              </a:rPr>
+              <a:t>  </a:t>
+            </a:r>
+            <a:r>
+              <a:rPr b="0" lang="en-US" sz="750" spc="-1" strike="noStrike">
+                <a:solidFill>
+                  <a:srgbClr val="3d68ec"/>
+                </a:solidFill>
+                <a:latin typeface="DejaVuSansMono"/>
+                <a:ea typeface="DejaVuSansMono"/>
+              </a:rPr>
+              <a:t>"aanbodType"</a:t>
+            </a:r>
+            <a:r>
+              <a:rPr b="0" lang="en-US" sz="750" spc="-1" strike="noStrike">
+                <a:solidFill>
+                  <a:srgbClr val="1b2a6b"/>
+                </a:solidFill>
+                <a:latin typeface="DejaVuSansMono"/>
+                <a:ea typeface="DejaVuSansMono"/>
+              </a:rPr>
+              <a:t>: "opleidingsaanbod",</a:t>
+            </a:r>
+            <a:endParaRPr b="0" lang="en-US" sz="750" spc="-1" strike="noStrike">
+              <a:solidFill>
+                <a:srgbClr val="000000"/>
+              </a:solidFill>
+              <a:latin typeface="DejaVu Serif"/>
+            </a:endParaRPr>
+          </a:p>
+        </p:txBody>
+      </p:sp>
+      <p:sp>
+        <p:nvSpPr>
+          <p:cNvPr id="286" name=""/>
+          <p:cNvSpPr txBox="1"/>
+          <p:nvPr/>
+        </p:nvSpPr>
+        <p:spPr>
+          <a:xfrm>
+            <a:off x="5013720" y="2426760"/>
+            <a:ext cx="2538000" cy="111960"/>
+          </a:xfrm>
+          <a:prstGeom prst="rect">
+            <a:avLst/>
+          </a:prstGeom>
+          <a:noFill/>
+          <a:ln w="0">
+            <a:noFill/>
+          </a:ln>
+        </p:spPr>
+        <p:txBody>
+          <a:bodyPr lIns="0" rIns="0" tIns="0" bIns="0" anchor="t">
+            <a:noAutofit/>
+          </a:bodyPr>
+          <a:p>
+            <a:r>
+              <a:rPr b="0" lang="en-US" sz="750" spc="-1" strike="noStrike">
+                <a:solidFill>
+                  <a:srgbClr val="1b2a6b"/>
+                </a:solidFill>
+                <a:latin typeface="DejaVuSansMono"/>
+                <a:ea typeface="DejaVuSansMono"/>
+              </a:rPr>
+              <a:t>  </a:t>
+            </a:r>
+            <a:r>
+              <a:rPr b="0" lang="en-US" sz="750" spc="-1" strike="noStrike">
+                <a:solidFill>
+                  <a:srgbClr val="3d68ec"/>
+                </a:solidFill>
+                <a:latin typeface="DejaVuSansMono"/>
+                <a:ea typeface="DejaVuSansMono"/>
+              </a:rPr>
+              <a:t>"naam"</a:t>
+            </a:r>
+            <a:r>
+              <a:rPr b="0" lang="en-US" sz="750" spc="-1" strike="noStrike">
+                <a:solidFill>
+                  <a:srgbClr val="1b2a6b"/>
+                </a:solidFill>
+                <a:latin typeface="DejaVuSansMono"/>
+                <a:ea typeface="DejaVuSansMono"/>
+              </a:rPr>
+              <a:t>: "Apothekersassistent, cohort 2026",</a:t>
+            </a:r>
+            <a:endParaRPr b="0" lang="en-US" sz="750" spc="-1" strike="noStrike">
+              <a:solidFill>
+                <a:srgbClr val="000000"/>
+              </a:solidFill>
+              <a:latin typeface="DejaVu Serif"/>
+            </a:endParaRPr>
+          </a:p>
+        </p:txBody>
+      </p:sp>
+      <p:sp>
+        <p:nvSpPr>
+          <p:cNvPr id="287" name=""/>
+          <p:cNvSpPr txBox="1"/>
+          <p:nvPr/>
+        </p:nvSpPr>
+        <p:spPr>
+          <a:xfrm>
+            <a:off x="5013720" y="2569680"/>
+            <a:ext cx="1241280" cy="111960"/>
+          </a:xfrm>
+          <a:prstGeom prst="rect">
+            <a:avLst/>
+          </a:prstGeom>
+          <a:noFill/>
+          <a:ln w="0">
+            <a:noFill/>
+          </a:ln>
+        </p:spPr>
+        <p:txBody>
+          <a:bodyPr lIns="0" rIns="0" tIns="0" bIns="0" anchor="t">
+            <a:noAutofit/>
+          </a:bodyPr>
+          <a:p>
+            <a:r>
+              <a:rPr b="0" lang="en-US" sz="750" spc="-1" strike="noStrike">
+                <a:solidFill>
+                  <a:srgbClr val="1b2a6b"/>
+                </a:solidFill>
+                <a:latin typeface="DejaVuSansMono"/>
+                <a:ea typeface="DejaVuSansMono"/>
+              </a:rPr>
+              <a:t>  </a:t>
+            </a:r>
+            <a:r>
+              <a:rPr b="0" lang="en-US" sz="750" spc="-1" strike="noStrike">
+                <a:solidFill>
+                  <a:srgbClr val="3d68ec"/>
+                </a:solidFill>
+                <a:latin typeface="DejaVuSansMono"/>
+                <a:ea typeface="DejaVuSansMono"/>
+              </a:rPr>
+              <a:t>"status"</a:t>
+            </a:r>
+            <a:r>
+              <a:rPr b="0" lang="en-US" sz="750" spc="-1" strike="noStrike">
+                <a:solidFill>
+                  <a:srgbClr val="1b2a6b"/>
+                </a:solidFill>
+                <a:latin typeface="DejaVuSansMono"/>
+                <a:ea typeface="DejaVuSansMono"/>
+              </a:rPr>
+              <a:t>: "gepland",</a:t>
+            </a:r>
+            <a:endParaRPr b="0" lang="en-US" sz="750" spc="-1" strike="noStrike">
+              <a:solidFill>
+                <a:srgbClr val="000000"/>
+              </a:solidFill>
+              <a:latin typeface="DejaVu Serif"/>
+            </a:endParaRPr>
+          </a:p>
+        </p:txBody>
+      </p:sp>
+      <p:sp>
+        <p:nvSpPr>
+          <p:cNvPr id="288" name=""/>
+          <p:cNvSpPr txBox="1"/>
+          <p:nvPr/>
+        </p:nvSpPr>
+        <p:spPr>
+          <a:xfrm>
+            <a:off x="5013720" y="2712600"/>
+            <a:ext cx="1635840" cy="111960"/>
+          </a:xfrm>
+          <a:prstGeom prst="rect">
+            <a:avLst/>
+          </a:prstGeom>
+          <a:noFill/>
+          <a:ln w="0">
+            <a:noFill/>
+          </a:ln>
+        </p:spPr>
+        <p:txBody>
+          <a:bodyPr lIns="0" rIns="0" tIns="0" bIns="0" anchor="t">
+            <a:noAutofit/>
+          </a:bodyPr>
+          <a:p>
+            <a:r>
+              <a:rPr b="0" lang="en-US" sz="750" spc="-1" strike="noStrike">
+                <a:solidFill>
+                  <a:srgbClr val="1b2a6b"/>
+                </a:solidFill>
+                <a:latin typeface="DejaVuSansMono"/>
+                <a:ea typeface="DejaVuSansMono"/>
+              </a:rPr>
+              <a:t>  </a:t>
+            </a:r>
+            <a:r>
+              <a:rPr b="0" lang="en-US" sz="750" spc="-1" strike="noStrike">
+                <a:solidFill>
+                  <a:srgbClr val="3d68ec"/>
+                </a:solidFill>
+                <a:latin typeface="DejaVuSansMono"/>
+                <a:ea typeface="DejaVuSansMono"/>
+              </a:rPr>
+              <a:t>"specificatieVerwijzing"</a:t>
+            </a:r>
+            <a:r>
+              <a:rPr b="0" lang="en-US" sz="750" spc="-1" strike="noStrike">
+                <a:solidFill>
+                  <a:srgbClr val="1b2a6b"/>
+                </a:solidFill>
+                <a:latin typeface="DejaVuSansMono"/>
+                <a:ea typeface="DejaVuSansMono"/>
+              </a:rPr>
+              <a:t>: {</a:t>
+            </a:r>
+            <a:endParaRPr b="0" lang="en-US" sz="750" spc="-1" strike="noStrike">
+              <a:solidFill>
+                <a:srgbClr val="000000"/>
+              </a:solidFill>
+              <a:latin typeface="DejaVu Serif"/>
+            </a:endParaRPr>
+          </a:p>
+        </p:txBody>
+      </p:sp>
+      <p:sp>
+        <p:nvSpPr>
+          <p:cNvPr id="289" name=""/>
+          <p:cNvSpPr txBox="1"/>
+          <p:nvPr/>
+        </p:nvSpPr>
+        <p:spPr>
+          <a:xfrm>
+            <a:off x="5013720" y="2855520"/>
+            <a:ext cx="2594880" cy="111960"/>
+          </a:xfrm>
+          <a:prstGeom prst="rect">
+            <a:avLst/>
+          </a:prstGeom>
+          <a:noFill/>
+          <a:ln w="0">
+            <a:noFill/>
+          </a:ln>
+        </p:spPr>
+        <p:txBody>
+          <a:bodyPr lIns="0" rIns="0" tIns="0" bIns="0" anchor="t">
+            <a:noAutofit/>
+          </a:bodyPr>
+          <a:p>
+            <a:r>
+              <a:rPr b="0" lang="en-US" sz="750" spc="-1" strike="noStrike">
+                <a:solidFill>
+                  <a:srgbClr val="1b2a6b"/>
+                </a:solidFill>
+                <a:latin typeface="DejaVuSansMono"/>
+                <a:ea typeface="DejaVuSansMono"/>
+              </a:rPr>
+              <a:t>    </a:t>
+            </a:r>
+            <a:r>
+              <a:rPr b="0" lang="en-US" sz="750" spc="-1" strike="noStrike">
+                <a:solidFill>
+                  <a:srgbClr val="1b2a6b"/>
+                </a:solidFill>
+                <a:latin typeface="DejaVuSansMono"/>
+                <a:ea typeface="DejaVuSansMono"/>
+              </a:rPr>
+              <a:t>"specificatieId": "79736830-1c5c-470f...",</a:t>
+            </a:r>
+            <a:endParaRPr b="0" lang="en-US" sz="750" spc="-1" strike="noStrike">
+              <a:solidFill>
+                <a:srgbClr val="000000"/>
+              </a:solidFill>
+              <a:latin typeface="DejaVu Serif"/>
+            </a:endParaRPr>
+          </a:p>
+        </p:txBody>
+      </p:sp>
+      <p:sp>
+        <p:nvSpPr>
+          <p:cNvPr id="290" name=""/>
+          <p:cNvSpPr txBox="1"/>
+          <p:nvPr/>
+        </p:nvSpPr>
+        <p:spPr>
+          <a:xfrm>
+            <a:off x="5013720" y="2998440"/>
+            <a:ext cx="1185120" cy="111960"/>
+          </a:xfrm>
+          <a:prstGeom prst="rect">
+            <a:avLst/>
+          </a:prstGeom>
+          <a:noFill/>
+          <a:ln w="0">
+            <a:noFill/>
+          </a:ln>
+        </p:spPr>
+        <p:txBody>
+          <a:bodyPr lIns="0" rIns="0" tIns="0" bIns="0" anchor="t">
+            <a:noAutofit/>
+          </a:bodyPr>
+          <a:p>
+            <a:r>
+              <a:rPr b="0" lang="en-US" sz="750" spc="-1" strike="noStrike">
+                <a:solidFill>
+                  <a:srgbClr val="1b2a6b"/>
+                </a:solidFill>
+                <a:latin typeface="DejaVuSansMono"/>
+                <a:ea typeface="DejaVuSansMono"/>
+              </a:rPr>
+              <a:t>    </a:t>
+            </a:r>
+            <a:r>
+              <a:rPr b="0" lang="en-US" sz="750" spc="-1" strike="noStrike">
+                <a:solidFill>
+                  <a:srgbClr val="1b2a6b"/>
+                </a:solidFill>
+                <a:latin typeface="DejaVuSansMono"/>
+                <a:ea typeface="DejaVuSansMono"/>
+              </a:rPr>
+              <a:t>"versie": "0.1.0"</a:t>
+            </a:r>
+            <a:endParaRPr b="0" lang="en-US" sz="750" spc="-1" strike="noStrike">
+              <a:solidFill>
+                <a:srgbClr val="000000"/>
+              </a:solidFill>
+              <a:latin typeface="DejaVu Serif"/>
+            </a:endParaRPr>
+          </a:p>
+        </p:txBody>
+      </p:sp>
+      <p:sp>
+        <p:nvSpPr>
+          <p:cNvPr id="291" name=""/>
+          <p:cNvSpPr txBox="1"/>
+          <p:nvPr/>
+        </p:nvSpPr>
+        <p:spPr>
+          <a:xfrm>
+            <a:off x="5013720" y="3141360"/>
+            <a:ext cx="226080" cy="111960"/>
+          </a:xfrm>
+          <a:prstGeom prst="rect">
+            <a:avLst/>
+          </a:prstGeom>
+          <a:noFill/>
+          <a:ln w="0">
+            <a:noFill/>
+          </a:ln>
+        </p:spPr>
+        <p:txBody>
+          <a:bodyPr lIns="0" rIns="0" tIns="0" bIns="0" anchor="t">
+            <a:noAutofit/>
+          </a:bodyPr>
+          <a:p>
+            <a:r>
+              <a:rPr b="0" lang="en-US" sz="750" spc="-1" strike="noStrike">
+                <a:solidFill>
+                  <a:srgbClr val="1b2a6b"/>
+                </a:solidFill>
+                <a:latin typeface="DejaVuSansMono"/>
+                <a:ea typeface="DejaVuSansMono"/>
+              </a:rPr>
+              <a:t>  </a:t>
+            </a:r>
+            <a:r>
+              <a:rPr b="0" lang="en-US" sz="750" spc="-1" strike="noStrike">
+                <a:solidFill>
+                  <a:srgbClr val="1b2a6b"/>
+                </a:solidFill>
+                <a:latin typeface="DejaVuSansMono"/>
+                <a:ea typeface="DejaVuSansMono"/>
+              </a:rPr>
+              <a:t>},</a:t>
+            </a:r>
+            <a:endParaRPr b="0" lang="en-US" sz="750" spc="-1" strike="noStrike">
+              <a:solidFill>
+                <a:srgbClr val="000000"/>
+              </a:solidFill>
+              <a:latin typeface="DejaVu Serif"/>
+            </a:endParaRPr>
+          </a:p>
+        </p:txBody>
+      </p:sp>
+      <p:sp>
+        <p:nvSpPr>
+          <p:cNvPr id="292" name=""/>
+          <p:cNvSpPr txBox="1"/>
+          <p:nvPr/>
+        </p:nvSpPr>
+        <p:spPr>
+          <a:xfrm>
+            <a:off x="5013720" y="3274560"/>
+            <a:ext cx="3384000" cy="111960"/>
+          </a:xfrm>
+          <a:prstGeom prst="rect">
+            <a:avLst/>
+          </a:prstGeom>
+          <a:noFill/>
+          <a:ln w="0">
+            <a:noFill/>
+          </a:ln>
+        </p:spPr>
+        <p:txBody>
+          <a:bodyPr lIns="0" rIns="0" tIns="0" bIns="0" anchor="t">
+            <a:noAutofit/>
+          </a:bodyPr>
+          <a:p>
+            <a:r>
+              <a:rPr b="0" lang="en-US" sz="750" spc="-1" strike="noStrike">
+                <a:solidFill>
+                  <a:srgbClr val="1b2a6b"/>
+                </a:solidFill>
+                <a:latin typeface="DejaVuSansMono"/>
+                <a:ea typeface="DejaVuSansMono"/>
+              </a:rPr>
+              <a:t>  </a:t>
+            </a:r>
+            <a:r>
+              <a:rPr b="0" lang="en-US" sz="750" spc="-1" strike="noStrike">
+                <a:solidFill>
+                  <a:srgbClr val="3d68ec"/>
+                </a:solidFill>
+                <a:latin typeface="DejaVuSansMono"/>
+                <a:ea typeface="DejaVuSansMono"/>
+              </a:rPr>
+              <a:t>"periode"</a:t>
+            </a:r>
+            <a:r>
+              <a:rPr b="0" lang="en-US" sz="750" spc="-1" strike="noStrike">
+                <a:solidFill>
+                  <a:srgbClr val="1b2a6b"/>
+                </a:solidFill>
+                <a:latin typeface="DejaVuSansMono"/>
+                <a:ea typeface="DejaVuSansMono"/>
+              </a:rPr>
+              <a:t>: { "start": "2026-09-01", "eind": "2029-07-15" }</a:t>
+            </a:r>
+            <a:endParaRPr b="0" lang="en-US" sz="750" spc="-1" strike="noStrike">
+              <a:solidFill>
+                <a:srgbClr val="000000"/>
+              </a:solidFill>
+              <a:latin typeface="DejaVu Serif"/>
+            </a:endParaRPr>
+          </a:p>
+        </p:txBody>
+      </p:sp>
+      <p:sp>
+        <p:nvSpPr>
+          <p:cNvPr id="293" name=""/>
+          <p:cNvSpPr txBox="1"/>
+          <p:nvPr/>
+        </p:nvSpPr>
+        <p:spPr>
+          <a:xfrm>
+            <a:off x="5013720" y="3417480"/>
+            <a:ext cx="93960" cy="111960"/>
+          </a:xfrm>
+          <a:prstGeom prst="rect">
+            <a:avLst/>
+          </a:prstGeom>
+          <a:noFill/>
+          <a:ln w="0">
+            <a:noFill/>
+          </a:ln>
+        </p:spPr>
+        <p:txBody>
+          <a:bodyPr lIns="0" rIns="0" tIns="0" bIns="0" anchor="t">
+            <a:noAutofit/>
+          </a:bodyPr>
+          <a:p>
+            <a:r>
+              <a:rPr b="0" lang="en-US" sz="750" spc="-1" strike="noStrike">
+                <a:solidFill>
+                  <a:srgbClr val="1b2a6b"/>
+                </a:solidFill>
+                <a:latin typeface="DejaVuSansMono"/>
+                <a:ea typeface="DejaVuSansMono"/>
+              </a:rPr>
+              <a:t>}</a:t>
+            </a:r>
+            <a:endParaRPr b="0" lang="en-US" sz="750" spc="-1" strike="noStrike">
+              <a:solidFill>
+                <a:srgbClr val="000000"/>
+              </a:solidFill>
+              <a:latin typeface="DejaVu Serif"/>
+            </a:endParaRPr>
+          </a:p>
+        </p:txBody>
+      </p:sp>
+      <p:sp>
+        <p:nvSpPr>
+          <p:cNvPr id="294" name=""/>
+          <p:cNvSpPr/>
+          <p:nvPr/>
+        </p:nvSpPr>
+        <p:spPr>
+          <a:xfrm>
+            <a:off x="0" y="5257440"/>
+            <a:ext cx="9334800" cy="5258160"/>
+          </a:xfrm>
+          <a:custGeom>
+            <a:avLst/>
+            <a:gdLst/>
+            <a:ahLst/>
+            <a:rect l="0" t="0" r="r" b="b"/>
+            <a:pathLst>
+              <a:path w="25930" h="14606">
+                <a:moveTo>
+                  <a:pt x="0" y="0"/>
+                </a:moveTo>
+                <a:lnTo>
+                  <a:pt x="25930" y="0"/>
+                </a:lnTo>
+                <a:lnTo>
+                  <a:pt x="25930" y="14606"/>
+                </a:lnTo>
+                <a:lnTo>
+                  <a:pt x="0" y="14606"/>
+                </a:lnTo>
+                <a:lnTo>
+                  <a:pt x="0" y="0"/>
+                </a:lnTo>
+                <a:close/>
+              </a:path>
+            </a:pathLst>
+          </a:custGeom>
+          <a:solidFill>
+            <a:srgbClr val="ffffff"/>
+          </a:solidFill>
+          <a:ln w="0">
+            <a:noFill/>
+          </a:ln>
+        </p:spPr>
+        <p:txBody>
+          <a:bodyPr lIns="0" rIns="0" tIns="0" bIns="0" anchor="t">
+            <a:noAutofit/>
+          </a:bodyPr>
+          <a:p>
+            <a:endParaRPr b="0" lang="en-US" sz="2400" spc="-1" strike="noStrike">
+              <a:solidFill>
+                <a:srgbClr val="000000"/>
+              </a:solidFill>
+              <a:latin typeface="DejaVu Serif"/>
+            </a:endParaRPr>
+          </a:p>
+        </p:txBody>
+      </p:sp>
+      <p:sp>
+        <p:nvSpPr>
+          <p:cNvPr id="295" name=""/>
+          <p:cNvSpPr txBox="1"/>
+          <p:nvPr/>
+        </p:nvSpPr>
+        <p:spPr>
+          <a:xfrm>
+            <a:off x="2709720" y="4318560"/>
+            <a:ext cx="4329000" cy="151200"/>
+          </a:xfrm>
+          <a:prstGeom prst="rect">
+            <a:avLst/>
+          </a:prstGeom>
+          <a:noFill/>
+          <a:ln w="0">
+            <a:noFill/>
+          </a:ln>
+        </p:spPr>
+        <p:txBody>
+          <a:bodyPr lIns="0" rIns="0" tIns="0" bIns="0" anchor="t">
+            <a:noAutofit/>
+          </a:bodyPr>
+          <a:p>
+            <a:r>
+              <a:rPr b="0" lang="en-US" sz="1020" spc="-1" strike="noStrike">
+                <a:solidFill>
+                  <a:srgbClr val="6b7280"/>
+                </a:solidFill>
+                <a:latin typeface="Arial"/>
+                <a:ea typeface="Arial"/>
+              </a:rPr>
+              <a:t>Endpoint, interactie en schema: bouwblokken van het eindproduct</a:t>
+            </a:r>
+            <a:endParaRPr b="0" lang="en-US" sz="1020" spc="-1" strike="noStrike">
+              <a:solidFill>
+                <a:srgbClr val="000000"/>
+              </a:solidFill>
+              <a:latin typeface="DejaVu Serif"/>
+            </a:endParaRPr>
+          </a:p>
+        </p:txBody>
+      </p:sp>
+    </p:spTree>
+  </p:cSld>
+  <mc:AlternateContent>
+    <mc:Choice Requires="p14">
+      <p:transition spd="slow" p14:dur="2000"/>
+    </mc:Choice>
+    <mc:Fallback>
+      <p:transition spd="slow"/>
+    </mc:Fallback>
+  </mc:AlternateContent>
+</p:sld>
+</file>
+
+<file path=ppt/slides/slide7.xml><?xml version="1.0" encoding="utf-8"?>
+<p:sld xmlns:a="http://schemas.openxmlformats.org/drawingml/2006/main" xmlns:p="http://schemas.openxmlformats.org/presentationml/2006/main" xmlns:r="http://schemas.openxmlformats.org/officeDocument/2006/relationships" xmlns:p14="http://schemas.microsoft.com/office/powerpoint/2010/main" xmlns:p15="http://schemas.microsoft.com/office/powerpoint/2012/main" xmlns:mc="http://schemas.openxmlformats.org/markup-compatibility/2006">
+  <p:cSld>
+    <p:spTree>
+      <p:nvGrpSpPr>
+        <p:cNvPr id="1" name=""/>
+        <p:cNvGrpSpPr/>
+        <p:nvPr/>
+      </p:nvGrpSpPr>
+      <p:grpSpPr>
+        <a:xfrm>
+          <a:off x="0" y="0"/>
+          <a:ext cx="0" cy="0"/>
+          <a:chOff x="0" y="0"/>
+          <a:chExt cx="0" cy="0"/>
+        </a:xfrm>
+      </p:grpSpPr>
+      <p:sp>
+        <p:nvSpPr>
+          <p:cNvPr id="296" name=""/>
+          <p:cNvSpPr/>
+          <p:nvPr/>
+        </p:nvSpPr>
+        <p:spPr>
+          <a:xfrm>
+            <a:off x="0" y="0"/>
+            <a:ext cx="9334800" cy="5257800"/>
+          </a:xfrm>
+          <a:custGeom>
+            <a:avLst/>
+            <a:gdLst/>
+            <a:ahLst/>
+            <a:rect l="0" t="0" r="r" b="b"/>
+            <a:pathLst>
+              <a:path w="25930" h="14605">
+                <a:moveTo>
+                  <a:pt x="0" y="0"/>
+                </a:moveTo>
+                <a:lnTo>
+                  <a:pt x="25930" y="0"/>
+                </a:lnTo>
+                <a:lnTo>
+                  <a:pt x="25930" y="14605"/>
+                </a:lnTo>
+                <a:lnTo>
+                  <a:pt x="0" y="14605"/>
+                </a:lnTo>
+                <a:lnTo>
+                  <a:pt x="0" y="0"/>
+                </a:lnTo>
+                <a:close/>
+              </a:path>
+            </a:pathLst>
+          </a:custGeom>
+          <a:solidFill>
+            <a:srgbClr val="ffffff"/>
+          </a:solidFill>
+          <a:ln w="0">
+            <a:noFill/>
+          </a:ln>
+        </p:spPr>
+        <p:txBody>
+          <a:bodyPr lIns="0" rIns="0" tIns="0" bIns="0" anchor="t">
+            <a:noAutofit/>
+          </a:bodyPr>
+          <a:p>
+            <a:endParaRPr b="0" lang="en-US" sz="2400" spc="-1" strike="noStrike">
+              <a:solidFill>
+                <a:srgbClr val="000000"/>
+              </a:solidFill>
+              <a:latin typeface="DejaVu Serif"/>
+            </a:endParaRPr>
+          </a:p>
+        </p:txBody>
+      </p:sp>
+      <p:sp>
+        <p:nvSpPr>
+          <p:cNvPr id="297" name=""/>
+          <p:cNvSpPr/>
+          <p:nvPr/>
+        </p:nvSpPr>
+        <p:spPr>
+          <a:xfrm>
+            <a:off x="0" y="0"/>
+            <a:ext cx="9334800" cy="5257800"/>
+          </a:xfrm>
+          <a:custGeom>
+            <a:avLst/>
+            <a:gdLst/>
+            <a:ahLst/>
+            <a:rect l="0" t="0" r="r" b="b"/>
+            <a:pathLst>
+              <a:path w="25930" h="14605">
+                <a:moveTo>
+                  <a:pt x="0" y="0"/>
+                </a:moveTo>
+                <a:lnTo>
+                  <a:pt x="25930" y="0"/>
+                </a:lnTo>
+                <a:lnTo>
+                  <a:pt x="25930" y="14605"/>
+                </a:lnTo>
+                <a:lnTo>
+                  <a:pt x="0" y="14605"/>
+                </a:lnTo>
+                <a:lnTo>
+                  <a:pt x="0" y="0"/>
+                </a:lnTo>
+                <a:close/>
+              </a:path>
+            </a:pathLst>
+          </a:custGeom>
+          <a:solidFill>
+            <a:srgbClr val="ffffff"/>
+          </a:solidFill>
+          <a:ln w="0">
+            <a:noFill/>
+          </a:ln>
+        </p:spPr>
+        <p:txBody>
+          <a:bodyPr lIns="0" rIns="0" tIns="0" bIns="0" anchor="t">
+            <a:noAutofit/>
+          </a:bodyPr>
+          <a:p>
+            <a:endParaRPr b="0" lang="en-US" sz="2400" spc="-1" strike="noStrike">
+              <a:solidFill>
+                <a:srgbClr val="000000"/>
+              </a:solidFill>
+              <a:latin typeface="DejaVu Serif"/>
+            </a:endParaRPr>
+          </a:p>
+        </p:txBody>
+      </p:sp>
+      <p:sp>
+        <p:nvSpPr>
+          <p:cNvPr id="298" name=""/>
+          <p:cNvSpPr/>
+          <p:nvPr/>
+        </p:nvSpPr>
+        <p:spPr>
+          <a:xfrm>
+            <a:off x="0" y="0"/>
+            <a:ext cx="9334800" cy="5257800"/>
+          </a:xfrm>
+          <a:custGeom>
+            <a:avLst/>
+            <a:gdLst/>
+            <a:ahLst/>
+            <a:rect l="0" t="0" r="r" b="b"/>
+            <a:pathLst>
+              <a:path w="25930" h="14605">
+                <a:moveTo>
+                  <a:pt x="0" y="0"/>
+                </a:moveTo>
+                <a:lnTo>
+                  <a:pt x="25930" y="0"/>
+                </a:lnTo>
+                <a:lnTo>
+                  <a:pt x="25930" y="14605"/>
+                </a:lnTo>
+                <a:lnTo>
+                  <a:pt x="0" y="14605"/>
+                </a:lnTo>
+                <a:lnTo>
+                  <a:pt x="0" y="0"/>
+                </a:lnTo>
+                <a:close/>
+              </a:path>
+            </a:pathLst>
+          </a:custGeom>
+          <a:solidFill>
+            <a:srgbClr val="ffffff"/>
+          </a:solidFill>
+          <a:ln w="0">
+            <a:noFill/>
+          </a:ln>
+        </p:spPr>
+        <p:txBody>
+          <a:bodyPr lIns="0" rIns="0" tIns="0" bIns="0" anchor="t">
+            <a:noAutofit/>
+          </a:bodyPr>
+          <a:p>
+            <a:endParaRPr b="0" lang="en-US" sz="2400" spc="-1" strike="noStrike">
+              <a:solidFill>
+                <a:srgbClr val="000000"/>
+              </a:solidFill>
+              <a:latin typeface="DejaVu Serif"/>
+            </a:endParaRPr>
+          </a:p>
+        </p:txBody>
+      </p:sp>
+      <p:sp>
+        <p:nvSpPr>
+          <p:cNvPr id="299" name=""/>
+          <p:cNvSpPr/>
+          <p:nvPr/>
+        </p:nvSpPr>
+        <p:spPr>
+          <a:xfrm>
+            <a:off x="0" y="0"/>
+            <a:ext cx="9334800" cy="5257800"/>
+          </a:xfrm>
+          <a:custGeom>
+            <a:avLst/>
+            <a:gdLst/>
+            <a:ahLst/>
+            <a:rect l="0" t="0" r="r" b="b"/>
+            <a:pathLst>
+              <a:path w="25930" h="14605">
+                <a:moveTo>
+                  <a:pt x="0" y="0"/>
+                </a:moveTo>
+                <a:lnTo>
+                  <a:pt x="25930" y="0"/>
+                </a:lnTo>
+                <a:lnTo>
+                  <a:pt x="25930" y="14605"/>
+                </a:lnTo>
+                <a:lnTo>
+                  <a:pt x="0" y="14605"/>
+                </a:lnTo>
+                <a:lnTo>
+                  <a:pt x="0" y="0"/>
+                </a:lnTo>
+                <a:close/>
+              </a:path>
+            </a:pathLst>
+          </a:custGeom>
+          <a:solidFill>
+            <a:srgbClr val="000000"/>
+          </a:solidFill>
+          <a:ln w="0">
+            <a:noFill/>
+          </a:ln>
+        </p:spPr>
+        <p:txBody>
+          <a:bodyPr lIns="0" rIns="0" tIns="0" bIns="0" anchor="t">
+            <a:noAutofit/>
+          </a:bodyPr>
+          <a:p>
+            <a:endParaRPr b="0" lang="en-US" sz="2400" spc="-1" strike="noStrike">
+              <a:solidFill>
+                <a:srgbClr val="ffffff"/>
+              </a:solidFill>
+              <a:latin typeface="DejaVu Serif"/>
+            </a:endParaRPr>
+          </a:p>
+        </p:txBody>
+      </p:sp>
+      <p:sp>
+        <p:nvSpPr>
+          <p:cNvPr id="300" name=""/>
+          <p:cNvSpPr/>
+          <p:nvPr/>
+        </p:nvSpPr>
+        <p:spPr>
+          <a:xfrm>
+            <a:off x="0" y="-5257800"/>
+            <a:ext cx="9334800" cy="5258160"/>
+          </a:xfrm>
+          <a:custGeom>
+            <a:avLst/>
+            <a:gdLst/>
+            <a:ahLst/>
+            <a:rect l="0" t="0" r="r" b="b"/>
+            <a:pathLst>
+              <a:path w="25930" h="14606">
+                <a:moveTo>
+                  <a:pt x="0" y="0"/>
+                </a:moveTo>
+                <a:lnTo>
+                  <a:pt x="25930" y="0"/>
+                </a:lnTo>
+                <a:lnTo>
+                  <a:pt x="25930" y="14606"/>
+                </a:lnTo>
+                <a:lnTo>
+                  <a:pt x="0" y="14606"/>
+                </a:lnTo>
+                <a:lnTo>
+                  <a:pt x="0" y="0"/>
+                </a:lnTo>
+                <a:close/>
+              </a:path>
+            </a:pathLst>
+          </a:custGeom>
+          <a:solidFill>
+            <a:srgbClr val="ffffff"/>
+          </a:solidFill>
+          <a:ln w="0">
+            <a:noFill/>
+          </a:ln>
+        </p:spPr>
+        <p:txBody>
+          <a:bodyPr lIns="0" rIns="0" tIns="0" bIns="0" anchor="t">
+            <a:noAutofit/>
+          </a:bodyPr>
+          <a:p>
+            <a:endParaRPr b="0" lang="en-US" sz="2400" spc="-1" strike="noStrike">
+              <a:solidFill>
+                <a:srgbClr val="000000"/>
+              </a:solidFill>
+              <a:latin typeface="DejaVu Serif"/>
+            </a:endParaRPr>
+          </a:p>
+        </p:txBody>
+      </p:sp>
+      <p:sp>
+        <p:nvSpPr>
+          <p:cNvPr id="301" name=""/>
+          <p:cNvSpPr/>
+          <p:nvPr/>
+        </p:nvSpPr>
+        <p:spPr>
+          <a:xfrm>
+            <a:off x="0" y="0"/>
+            <a:ext cx="9334800" cy="5257800"/>
+          </a:xfrm>
+          <a:custGeom>
+            <a:avLst/>
+            <a:gdLst/>
+            <a:ahLst/>
+            <a:rect l="0" t="0" r="r" b="b"/>
+            <a:pathLst>
+              <a:path w="25930" h="14605">
+                <a:moveTo>
+                  <a:pt x="0" y="0"/>
+                </a:moveTo>
+                <a:lnTo>
+                  <a:pt x="25930" y="0"/>
+                </a:lnTo>
+                <a:lnTo>
+                  <a:pt x="25930" y="14605"/>
+                </a:lnTo>
+                <a:lnTo>
+                  <a:pt x="0" y="14605"/>
+                </a:lnTo>
+                <a:lnTo>
+                  <a:pt x="0" y="0"/>
+                </a:lnTo>
+                <a:close/>
+              </a:path>
+            </a:pathLst>
+          </a:custGeom>
+          <a:solidFill>
+            <a:srgbClr val="ffffff"/>
+          </a:solidFill>
+          <a:ln w="0">
+            <a:noFill/>
+          </a:ln>
+        </p:spPr>
+        <p:txBody>
+          <a:bodyPr lIns="0" rIns="0" tIns="0" bIns="0" anchor="t">
+            <a:noAutofit/>
+          </a:bodyPr>
+          <a:p>
+            <a:endParaRPr b="0" lang="en-US" sz="2400" spc="-1" strike="noStrike">
+              <a:solidFill>
+                <a:srgbClr val="000000"/>
+              </a:solidFill>
+              <a:latin typeface="DejaVu Serif"/>
+            </a:endParaRPr>
+          </a:p>
+        </p:txBody>
+      </p:sp>
+      <p:pic>
+        <p:nvPicPr>
+          <p:cNvPr id="302" name="" descr=""/>
+          <p:cNvPicPr/>
+          <p:nvPr/>
+        </p:nvPicPr>
+        <p:blipFill>
+          <a:blip r:embed="rId1"/>
+          <a:stretch/>
+        </p:blipFill>
+        <p:spPr>
+          <a:xfrm>
+            <a:off x="-6120" y="0"/>
+            <a:ext cx="9346680" cy="5257440"/>
+          </a:xfrm>
+          <a:prstGeom prst="rect">
+            <a:avLst/>
+          </a:prstGeom>
+          <a:ln w="0">
+            <a:noFill/>
+          </a:ln>
+        </p:spPr>
+      </p:pic>
+      <p:sp>
+        <p:nvSpPr>
+          <p:cNvPr id="303" name=""/>
+          <p:cNvSpPr/>
+          <p:nvPr/>
+        </p:nvSpPr>
+        <p:spPr>
+          <a:xfrm>
+            <a:off x="456840" y="1609560"/>
+            <a:ext cx="4153320" cy="752760"/>
+          </a:xfrm>
+          <a:custGeom>
+            <a:avLst/>
+            <a:gdLst/>
+            <a:ahLst/>
+            <a:rect l="0" t="0" r="r" b="b"/>
+            <a:pathLst>
+              <a:path w="11537" h="2091">
+                <a:moveTo>
+                  <a:pt x="0" y="0"/>
+                </a:moveTo>
+                <a:lnTo>
+                  <a:pt x="11537" y="0"/>
+                </a:lnTo>
+                <a:lnTo>
+                  <a:pt x="11537" y="2091"/>
+                </a:lnTo>
+                <a:lnTo>
+                  <a:pt x="0" y="2091"/>
+                </a:lnTo>
+                <a:lnTo>
+                  <a:pt x="0" y="0"/>
+                </a:lnTo>
+                <a:close/>
+              </a:path>
+            </a:pathLst>
+          </a:custGeom>
+          <a:solidFill>
+            <a:srgbClr val="ffffff"/>
+          </a:solidFill>
+          <a:ln w="0">
+            <a:noFill/>
+          </a:ln>
+        </p:spPr>
+        <p:txBody>
+          <a:bodyPr lIns="0" rIns="0" tIns="0" bIns="0" anchor="t">
+            <a:noAutofit/>
+          </a:bodyPr>
+          <a:p>
+            <a:endParaRPr b="0" lang="en-US" sz="2400" spc="-1" strike="noStrike">
+              <a:solidFill>
+                <a:srgbClr val="000000"/>
+              </a:solidFill>
+              <a:latin typeface="DejaVu Serif"/>
+            </a:endParaRPr>
+          </a:p>
+        </p:txBody>
+      </p:sp>
+      <p:sp>
+        <p:nvSpPr>
+          <p:cNvPr id="304" name=""/>
+          <p:cNvSpPr/>
+          <p:nvPr/>
+        </p:nvSpPr>
+        <p:spPr>
+          <a:xfrm>
+            <a:off x="456840" y="1609560"/>
+            <a:ext cx="4153320" cy="38520"/>
+          </a:xfrm>
+          <a:custGeom>
+            <a:avLst/>
+            <a:gdLst/>
+            <a:ahLst/>
+            <a:rect l="0" t="0" r="r" b="b"/>
+            <a:pathLst>
+              <a:path w="11537" h="107">
+                <a:moveTo>
+                  <a:pt x="0" y="0"/>
+                </a:moveTo>
+                <a:lnTo>
+                  <a:pt x="11537" y="0"/>
+                </a:lnTo>
+                <a:lnTo>
+                  <a:pt x="11537" y="107"/>
+                </a:lnTo>
+                <a:lnTo>
+                  <a:pt x="0" y="107"/>
+                </a:lnTo>
+                <a:lnTo>
+                  <a:pt x="0" y="0"/>
+                </a:lnTo>
+                <a:close/>
+              </a:path>
+            </a:pathLst>
+          </a:custGeom>
+          <a:solidFill>
+            <a:srgbClr val="dd784b"/>
+          </a:solidFill>
+          <a:ln w="0">
+            <a:noFill/>
+          </a:ln>
+        </p:spPr>
+        <p:txBody>
+          <a:bodyPr lIns="0" rIns="0" tIns="0" bIns="0" anchor="t">
+            <a:noAutofit/>
+          </a:bodyPr>
+          <a:p>
+            <a:endParaRPr b="0" lang="en-US" sz="2400" spc="-1" strike="noStrike">
+              <a:solidFill>
+                <a:srgbClr val="000000"/>
+              </a:solidFill>
+              <a:latin typeface="DejaVu Serif"/>
+            </a:endParaRPr>
+          </a:p>
+        </p:txBody>
+      </p:sp>
+      <p:sp>
+        <p:nvSpPr>
+          <p:cNvPr id="305" name=""/>
+          <p:cNvSpPr/>
+          <p:nvPr/>
+        </p:nvSpPr>
+        <p:spPr>
+          <a:xfrm>
+            <a:off x="456840" y="2352600"/>
+            <a:ext cx="4153320" cy="9720"/>
+          </a:xfrm>
+          <a:custGeom>
+            <a:avLst/>
+            <a:gdLst/>
+            <a:ahLst/>
+            <a:rect l="0" t="0" r="r" b="b"/>
+            <a:pathLst>
+              <a:path w="11537" h="27">
+                <a:moveTo>
+                  <a:pt x="0" y="0"/>
+                </a:moveTo>
+                <a:lnTo>
+                  <a:pt x="11537" y="0"/>
+                </a:lnTo>
+                <a:lnTo>
+                  <a:pt x="11537" y="27"/>
+                </a:lnTo>
+                <a:lnTo>
+                  <a:pt x="0" y="27"/>
+                </a:lnTo>
+                <a:lnTo>
+                  <a:pt x="0" y="0"/>
+                </a:lnTo>
+                <a:close/>
+              </a:path>
+            </a:pathLst>
+          </a:custGeom>
+          <a:solidFill>
+            <a:srgbClr val="e5e7eb"/>
+          </a:solidFill>
+          <a:ln w="0">
+            <a:noFill/>
+          </a:ln>
+        </p:spPr>
+        <p:txBody>
+          <a:bodyPr lIns="0" rIns="0" tIns="0" bIns="0" anchor="t">
+            <a:noAutofit/>
+          </a:bodyPr>
+          <a:p>
+            <a:endParaRPr b="0" lang="en-US" sz="2400" spc="-1" strike="noStrike">
+              <a:solidFill>
+                <a:srgbClr val="000000"/>
+              </a:solidFill>
+              <a:latin typeface="DejaVu Serif"/>
+            </a:endParaRPr>
+          </a:p>
+        </p:txBody>
+      </p:sp>
+      <p:sp>
+        <p:nvSpPr>
+          <p:cNvPr id="306" name=""/>
+          <p:cNvSpPr/>
+          <p:nvPr/>
+        </p:nvSpPr>
+        <p:spPr>
+          <a:xfrm>
+            <a:off x="4600440" y="1609560"/>
+            <a:ext cx="9720" cy="752760"/>
+          </a:xfrm>
+          <a:custGeom>
+            <a:avLst/>
+            <a:gdLst/>
+            <a:ahLst/>
+            <a:rect l="0" t="0" r="r" b="b"/>
+            <a:pathLst>
+              <a:path w="27" h="2091">
+                <a:moveTo>
+                  <a:pt x="0" y="106"/>
+                </a:moveTo>
+                <a:lnTo>
+                  <a:pt x="0" y="2091"/>
+                </a:lnTo>
+                <a:lnTo>
+                  <a:pt x="27" y="2091"/>
+                </a:lnTo>
+                <a:lnTo>
+                  <a:pt x="27" y="0"/>
+                </a:lnTo>
+                <a:lnTo>
+                  <a:pt x="0" y="106"/>
+                </a:lnTo>
+                <a:close/>
+              </a:path>
+            </a:pathLst>
+          </a:custGeom>
+          <a:solidFill>
+            <a:srgbClr val="e5e7eb"/>
+          </a:solidFill>
+          <a:ln w="0">
+            <a:noFill/>
+          </a:ln>
+        </p:spPr>
+        <p:txBody>
+          <a:bodyPr lIns="0" rIns="0" tIns="0" bIns="0" anchor="t">
+            <a:noAutofit/>
+          </a:bodyPr>
+          <a:p>
+            <a:endParaRPr b="0" lang="en-US" sz="2400" spc="-1" strike="noStrike">
+              <a:solidFill>
+                <a:srgbClr val="000000"/>
+              </a:solidFill>
+              <a:latin typeface="DejaVu Serif"/>
+            </a:endParaRPr>
+          </a:p>
+        </p:txBody>
+      </p:sp>
+      <p:sp>
+        <p:nvSpPr>
+          <p:cNvPr id="307" name=""/>
+          <p:cNvSpPr/>
+          <p:nvPr/>
+        </p:nvSpPr>
+        <p:spPr>
+          <a:xfrm>
+            <a:off x="456840" y="1609560"/>
+            <a:ext cx="10080" cy="752760"/>
+          </a:xfrm>
+          <a:custGeom>
+            <a:avLst/>
+            <a:gdLst/>
+            <a:ahLst/>
+            <a:rect l="0" t="0" r="r" b="b"/>
+            <a:pathLst>
+              <a:path w="28" h="2091">
+                <a:moveTo>
+                  <a:pt x="0" y="0"/>
+                </a:moveTo>
+                <a:lnTo>
+                  <a:pt x="0" y="2091"/>
+                </a:lnTo>
+                <a:lnTo>
+                  <a:pt x="28" y="2091"/>
+                </a:lnTo>
+                <a:lnTo>
+                  <a:pt x="28" y="106"/>
+                </a:lnTo>
+                <a:lnTo>
+                  <a:pt x="0" y="0"/>
+                </a:lnTo>
+                <a:close/>
+              </a:path>
+            </a:pathLst>
+          </a:custGeom>
+          <a:solidFill>
+            <a:srgbClr val="e5e7eb"/>
+          </a:solidFill>
+          <a:ln w="0">
+            <a:noFill/>
+          </a:ln>
+        </p:spPr>
+        <p:txBody>
+          <a:bodyPr lIns="0" rIns="0" tIns="0" bIns="0" anchor="t">
+            <a:noAutofit/>
+          </a:bodyPr>
+          <a:p>
+            <a:endParaRPr b="0" lang="en-US" sz="2400" spc="-1" strike="noStrike">
+              <a:solidFill>
+                <a:srgbClr val="000000"/>
+              </a:solidFill>
+              <a:latin typeface="DejaVu Serif"/>
+            </a:endParaRPr>
+          </a:p>
+        </p:txBody>
+      </p:sp>
+      <p:sp>
+        <p:nvSpPr>
+          <p:cNvPr id="308" name=""/>
           <p:cNvSpPr txBox="1"/>
           <p:nvPr/>
         </p:nvSpPr>
@@ -18966,7 +22136,7 @@
       </p:sp>
       <p:sp>
         <p:nvSpPr>
-          <p:cNvPr id="258" name=""/>
+          <p:cNvPr id="309" name=""/>
           <p:cNvSpPr txBox="1"/>
           <p:nvPr/>
         </p:nvSpPr>
@@ -19009,7 +22179,7 @@
       </p:sp>
       <p:sp>
         <p:nvSpPr>
-          <p:cNvPr id="259" name=""/>
+          <p:cNvPr id="310" name=""/>
           <p:cNvSpPr/>
           <p:nvPr/>
         </p:nvSpPr>
@@ -19067,7 +22237,7 @@
       </p:sp>
       <p:sp>
         <p:nvSpPr>
-          <p:cNvPr id="260" name=""/>
+          <p:cNvPr id="311" name=""/>
           <p:cNvSpPr/>
           <p:nvPr/>
         </p:nvSpPr>
@@ -19125,7 +22295,7 @@
       </p:sp>
       <p:sp>
         <p:nvSpPr>
-          <p:cNvPr id="261" name=""/>
+          <p:cNvPr id="312" name=""/>
           <p:cNvSpPr/>
           <p:nvPr/>
         </p:nvSpPr>
@@ -19183,7 +22353,7 @@
       </p:sp>
       <p:sp>
         <p:nvSpPr>
-          <p:cNvPr id="262" name=""/>
+          <p:cNvPr id="313" name=""/>
           <p:cNvSpPr/>
           <p:nvPr/>
         </p:nvSpPr>
@@ -19241,7 +22411,7 @@
       </p:sp>
       <p:sp>
         <p:nvSpPr>
-          <p:cNvPr id="263" name=""/>
+          <p:cNvPr id="314" name=""/>
           <p:cNvSpPr/>
           <p:nvPr/>
         </p:nvSpPr>
@@ -19299,7 +22469,7 @@
       </p:sp>
       <p:sp>
         <p:nvSpPr>
-          <p:cNvPr id="264" name=""/>
+          <p:cNvPr id="315" name=""/>
           <p:cNvSpPr txBox="1"/>
           <p:nvPr/>
         </p:nvSpPr>
@@ -19342,7 +22512,7 @@
       </p:sp>
       <p:sp>
         <p:nvSpPr>
-          <p:cNvPr id="265" name=""/>
+          <p:cNvPr id="316" name=""/>
           <p:cNvSpPr txBox="1"/>
           <p:nvPr/>
         </p:nvSpPr>
@@ -19385,7 +22555,7 @@
       </p:sp>
       <p:sp>
         <p:nvSpPr>
-          <p:cNvPr id="266" name=""/>
+          <p:cNvPr id="317" name=""/>
           <p:cNvSpPr/>
           <p:nvPr/>
         </p:nvSpPr>
@@ -19443,7 +22613,7 @@
       </p:sp>
       <p:sp>
         <p:nvSpPr>
-          <p:cNvPr id="267" name=""/>
+          <p:cNvPr id="318" name=""/>
           <p:cNvSpPr/>
           <p:nvPr/>
         </p:nvSpPr>
@@ -19501,7 +22671,7 @@
       </p:sp>
       <p:sp>
         <p:nvSpPr>
-          <p:cNvPr id="268" name=""/>
+          <p:cNvPr id="319" name=""/>
           <p:cNvSpPr/>
           <p:nvPr/>
         </p:nvSpPr>
@@ -19559,7 +22729,7 @@
       </p:sp>
       <p:sp>
         <p:nvSpPr>
-          <p:cNvPr id="269" name=""/>
+          <p:cNvPr id="320" name=""/>
           <p:cNvSpPr/>
           <p:nvPr/>
         </p:nvSpPr>
@@ -19617,7 +22787,7 @@
       </p:sp>
       <p:sp>
         <p:nvSpPr>
-          <p:cNvPr id="270" name=""/>
+          <p:cNvPr id="321" name=""/>
           <p:cNvSpPr/>
           <p:nvPr/>
         </p:nvSpPr>
@@ -19675,7 +22845,7 @@
       </p:sp>
       <p:sp>
         <p:nvSpPr>
-          <p:cNvPr id="271" name=""/>
+          <p:cNvPr id="322" name=""/>
           <p:cNvSpPr txBox="1"/>
           <p:nvPr/>
         </p:nvSpPr>
@@ -19718,7 +22888,7 @@
       </p:sp>
       <p:sp>
         <p:nvSpPr>
-          <p:cNvPr id="272" name=""/>
+          <p:cNvPr id="323" name=""/>
           <p:cNvSpPr txBox="1"/>
           <p:nvPr/>
         </p:nvSpPr>
@@ -19761,7 +22931,7 @@
       </p:sp>
       <p:sp>
         <p:nvSpPr>
-          <p:cNvPr id="273" name=""/>
+          <p:cNvPr id="324" name=""/>
           <p:cNvSpPr/>
           <p:nvPr/>
         </p:nvSpPr>
@@ -19819,7 +22989,7 @@
       </p:sp>
       <p:sp>
         <p:nvSpPr>
-          <p:cNvPr id="274" name=""/>
+          <p:cNvPr id="325" name=""/>
           <p:cNvSpPr/>
           <p:nvPr/>
         </p:nvSpPr>
@@ -19877,7 +23047,7 @@
       </p:sp>
       <p:sp>
         <p:nvSpPr>
-          <p:cNvPr id="275" name=""/>
+          <p:cNvPr id="326" name=""/>
           <p:cNvSpPr/>
           <p:nvPr/>
         </p:nvSpPr>
@@ -19935,7 +23105,7 @@
       </p:sp>
       <p:sp>
         <p:nvSpPr>
-          <p:cNvPr id="276" name=""/>
+          <p:cNvPr id="327" name=""/>
           <p:cNvSpPr/>
           <p:nvPr/>
         </p:nvSpPr>
@@ -19993,7 +23163,7 @@
       </p:sp>
       <p:sp>
         <p:nvSpPr>
-          <p:cNvPr id="277" name=""/>
+          <p:cNvPr id="328" name=""/>
           <p:cNvSpPr/>
           <p:nvPr/>
         </p:nvSpPr>
@@ -20051,7 +23221,7 @@
       </p:sp>
       <p:sp>
         <p:nvSpPr>
-          <p:cNvPr id="278" name=""/>
+          <p:cNvPr id="329" name=""/>
           <p:cNvSpPr txBox="1"/>
           <p:nvPr/>
         </p:nvSpPr>
@@ -20094,7 +23264,7 @@
       </p:sp>
       <p:sp>
         <p:nvSpPr>
-          <p:cNvPr id="279" name=""/>
+          <p:cNvPr id="330" name=""/>
           <p:cNvSpPr txBox="1"/>
           <p:nvPr/>
         </p:nvSpPr>
@@ -20137,7 +23307,7 @@
       </p:sp>
       <p:sp>
         <p:nvSpPr>
-          <p:cNvPr id="280" name=""/>
+          <p:cNvPr id="331" name=""/>
           <p:cNvSpPr/>
           <p:nvPr/>
         </p:nvSpPr>
@@ -20195,7 +23365,7 @@
       </p:sp>
       <p:sp>
         <p:nvSpPr>
-          <p:cNvPr id="281" name=""/>
+          <p:cNvPr id="332" name=""/>
           <p:cNvSpPr/>
           <p:nvPr/>
         </p:nvSpPr>
@@ -20253,7 +23423,7 @@
       </p:sp>
       <p:sp>
         <p:nvSpPr>
-          <p:cNvPr id="282" name=""/>
+          <p:cNvPr id="333" name=""/>
           <p:cNvSpPr/>
           <p:nvPr/>
         </p:nvSpPr>
@@ -20311,7 +23481,7 @@
       </p:sp>
       <p:sp>
         <p:nvSpPr>
-          <p:cNvPr id="283" name=""/>
+          <p:cNvPr id="334" name=""/>
           <p:cNvSpPr/>
           <p:nvPr/>
         </p:nvSpPr>
@@ -20369,7 +23539,7 @@
       </p:sp>
       <p:sp>
         <p:nvSpPr>
-          <p:cNvPr id="284" name=""/>
+          <p:cNvPr id="335" name=""/>
           <p:cNvSpPr/>
           <p:nvPr/>
         </p:nvSpPr>
@@ -20427,7 +23597,7 @@
       </p:sp>
       <p:sp>
         <p:nvSpPr>
-          <p:cNvPr id="285" name=""/>
+          <p:cNvPr id="336" name=""/>
           <p:cNvSpPr txBox="1"/>
           <p:nvPr/>
         </p:nvSpPr>
@@ -20470,7 +23640,7 @@
       </p:sp>
       <p:sp>
         <p:nvSpPr>
-          <p:cNvPr id="286" name=""/>
+          <p:cNvPr id="337" name=""/>
           <p:cNvSpPr txBox="1"/>
           <p:nvPr/>
         </p:nvSpPr>
@@ -20513,7 +23683,7 @@
       </p:sp>
       <p:sp>
         <p:nvSpPr>
-          <p:cNvPr id="287" name=""/>
+          <p:cNvPr id="338" name=""/>
           <p:cNvSpPr txBox="1"/>
           <p:nvPr/>
         </p:nvSpPr>
